--- a/blocks/B_robot_build/M06_xacro_modularization/M06_Xacro로_구조_모듈화.pptx
+++ b/blocks/B_robot_build/M06_xacro_modularization/M06_Xacro로_구조_모듈화.pptx
@@ -43,6 +43,9 @@
     <p:sldId id="291" r:id="rId43"/>
     <p:sldId id="292" r:id="rId44"/>
     <p:sldId id="293" r:id="rId45"/>
+    <p:sldId id="294" r:id="rId46"/>
+    <p:sldId id="295" r:id="rId47"/>
+    <p:sldId id="296" r:id="rId48"/>
   </p:sldIdLst>
   <p:sldSz cx="12191999" cy="6858000" type="screen4x3"/>
   <p:notesSz cx="6858000" cy="9144000"/>
@@ -629,7 +632,7 @@
           <a:lstStyle/>
           <a:p>
             <a:r>
-              <a:t>[설명] ~/agv_ws/src/agv_description/urdf/agv.urdf.xacro의 전체 파일을 2/10 구간으로 작성한다.</a:t>
+              <a:t>[설명] ~/agv_ws/src/agv_description/urdf/agv.urdf.xacro의 전체 파일을 2/11 구간으로 작성한다.</a:t>
             </a:r>
           </a:p>
           <a:p>
@@ -719,7 +722,7 @@
           <a:lstStyle/>
           <a:p>
             <a:r>
-              <a:t>[설명] ~/agv_ws/src/agv_description/urdf/agv.urdf.xacro의 전체 파일을 3/10 구간으로 작성한다.</a:t>
+              <a:t>[설명] ~/agv_ws/src/agv_description/urdf/agv.urdf.xacro의 전체 파일을 3/11 구간으로 작성한다.</a:t>
             </a:r>
           </a:p>
           <a:p>
@@ -809,7 +812,7 @@
           <a:lstStyle/>
           <a:p>
             <a:r>
-              <a:t>[설명] ~/agv_ws/src/agv_description/urdf/agv.urdf.xacro의 전체 파일을 4/10 구간으로 작성한다.</a:t>
+              <a:t>[설명] ~/agv_ws/src/agv_description/urdf/agv.urdf.xacro의 전체 파일을 4/11 구간으로 작성한다.</a:t>
             </a:r>
           </a:p>
           <a:p>
@@ -899,7 +902,7 @@
           <a:lstStyle/>
           <a:p>
             <a:r>
-              <a:t>[설명] ~/agv_ws/src/agv_description/urdf/agv.urdf.xacro의 전체 파일을 5/10 구간으로 작성한다.</a:t>
+              <a:t>[설명] ~/agv_ws/src/agv_description/urdf/agv.urdf.xacro의 전체 파일을 5/11 구간으로 작성한다.</a:t>
             </a:r>
           </a:p>
           <a:p>
@@ -989,7 +992,7 @@
           <a:lstStyle/>
           <a:p>
             <a:r>
-              <a:t>[설명] ~/agv_ws/src/agv_description/urdf/agv.urdf.xacro의 전체 파일을 6/10 구간으로 작성한다.</a:t>
+              <a:t>[설명] ~/agv_ws/src/agv_description/urdf/agv.urdf.xacro의 전체 파일을 6/11 구간으로 작성한다.</a:t>
             </a:r>
           </a:p>
           <a:p>
@@ -1079,7 +1082,7 @@
           <a:lstStyle/>
           <a:p>
             <a:r>
-              <a:t>[설명] ~/agv_ws/src/agv_description/urdf/agv.urdf.xacro의 전체 파일을 7/10 구간으로 작성한다.</a:t>
+              <a:t>[설명] ~/agv_ws/src/agv_description/urdf/agv.urdf.xacro의 전체 파일을 7/11 구간으로 작성한다.</a:t>
             </a:r>
           </a:p>
           <a:p>
@@ -1169,7 +1172,7 @@
           <a:lstStyle/>
           <a:p>
             <a:r>
-              <a:t>[설명] ~/agv_ws/src/agv_description/urdf/agv.urdf.xacro의 전체 파일을 8/10 구간으로 작성한다.</a:t>
+              <a:t>[설명] ~/agv_ws/src/agv_description/urdf/agv.urdf.xacro의 전체 파일을 8/11 구간으로 작성한다.</a:t>
             </a:r>
           </a:p>
           <a:p>
@@ -1259,7 +1262,7 @@
           <a:lstStyle/>
           <a:p>
             <a:r>
-              <a:t>[설명] ~/agv_ws/src/agv_description/urdf/agv.urdf.xacro의 전체 파일을 9/10 구간으로 작성한다.</a:t>
+              <a:t>[설명] ~/agv_ws/src/agv_description/urdf/agv.urdf.xacro의 전체 파일을 9/11 구간으로 작성한다.</a:t>
             </a:r>
           </a:p>
           <a:p>
@@ -1349,7 +1352,7 @@
           <a:lstStyle/>
           <a:p>
             <a:r>
-              <a:t>[설명] ~/agv_ws/src/agv_description/urdf/agv.urdf.xacro의 전체 파일을 10/10 구간으로 작성한다.</a:t>
+              <a:t>[설명] ~/agv_ws/src/agv_description/urdf/agv.urdf.xacro의 전체 파일을 10/11 구간으로 작성한다.</a:t>
             </a:r>
           </a:p>
           <a:p>
@@ -1439,12 +1442,12 @@
           <a:lstStyle/>
           <a:p>
             <a:r>
-              <a:t>[설명] ~/agv_ws/src/agv_description/urdf/common.xacro의 전체 파일을 1/5 구간으로 작성한다.</a:t>
-            </a:r>
-          </a:p>
-          <a:p>
-            <a:r>
-              <a:t>[실행] nano ~/agv_ws/src/agv_description/urdf/common.xacro</a:t>
+              <a:t>[설명] ~/agv_ws/src/agv_description/urdf/agv.urdf.xacro의 전체 파일을 11/11 구간으로 작성한다.</a:t>
+            </a:r>
+          </a:p>
+          <a:p>
+            <a:r>
+              <a:t>[실행] nano ~/agv_ws/src/agv_description/urdf/agv.urdf.xacro</a:t>
             </a:r>
           </a:p>
           <a:p>
@@ -1619,7 +1622,7 @@
           <a:lstStyle/>
           <a:p>
             <a:r>
-              <a:t>[설명] ~/agv_ws/src/agv_description/urdf/common.xacro의 전체 파일을 2/5 구간으로 작성한다.</a:t>
+              <a:t>[설명] ~/agv_ws/src/agv_description/urdf/common.xacro의 전체 파일을 1/6 구간으로 작성한다.</a:t>
             </a:r>
           </a:p>
           <a:p>
@@ -1709,7 +1712,7 @@
           <a:lstStyle/>
           <a:p>
             <a:r>
-              <a:t>[설명] ~/agv_ws/src/agv_description/urdf/common.xacro의 전체 파일을 3/5 구간으로 작성한다.</a:t>
+              <a:t>[설명] ~/agv_ws/src/agv_description/urdf/common.xacro의 전체 파일을 2/6 구간으로 작성한다.</a:t>
             </a:r>
           </a:p>
           <a:p>
@@ -1799,7 +1802,7 @@
           <a:lstStyle/>
           <a:p>
             <a:r>
-              <a:t>[설명] ~/agv_ws/src/agv_description/urdf/common.xacro의 전체 파일을 4/5 구간으로 작성한다.</a:t>
+              <a:t>[설명] ~/agv_ws/src/agv_description/urdf/common.xacro의 전체 파일을 3/6 구간으로 작성한다.</a:t>
             </a:r>
           </a:p>
           <a:p>
@@ -1889,7 +1892,7 @@
           <a:lstStyle/>
           <a:p>
             <a:r>
-              <a:t>[설명] ~/agv_ws/src/agv_description/urdf/common.xacro의 전체 파일을 5/5 구간으로 작성한다.</a:t>
+              <a:t>[설명] ~/agv_ws/src/agv_description/urdf/common.xacro의 전체 파일을 4/6 구간으로 작성한다.</a:t>
             </a:r>
           </a:p>
           <a:p>
@@ -1979,12 +1982,12 @@
           <a:lstStyle/>
           <a:p>
             <a:r>
-              <a:t>[설명] ~/agv_ws/src/agv_description/urdf/wheels.xacro의 전체 파일을 1/4 구간으로 작성한다.</a:t>
-            </a:r>
-          </a:p>
-          <a:p>
-            <a:r>
-              <a:t>[실행] nano ~/agv_ws/src/agv_description/urdf/wheels.xacro</a:t>
+              <a:t>[설명] ~/agv_ws/src/agv_description/urdf/common.xacro의 전체 파일을 5/6 구간으로 작성한다.</a:t>
+            </a:r>
+          </a:p>
+          <a:p>
+            <a:r>
+              <a:t>[실행] nano ~/agv_ws/src/agv_description/urdf/common.xacro</a:t>
             </a:r>
           </a:p>
           <a:p>
@@ -2069,12 +2072,12 @@
           <a:lstStyle/>
           <a:p>
             <a:r>
-              <a:t>[설명] ~/agv_ws/src/agv_description/urdf/wheels.xacro의 전체 파일을 2/4 구간으로 작성한다.</a:t>
-            </a:r>
-          </a:p>
-          <a:p>
-            <a:r>
-              <a:t>[실행] nano ~/agv_ws/src/agv_description/urdf/wheels.xacro</a:t>
+              <a:t>[설명] ~/agv_ws/src/agv_description/urdf/common.xacro의 전체 파일을 6/6 구간으로 작성한다.</a:t>
+            </a:r>
+          </a:p>
+          <a:p>
+            <a:r>
+              <a:t>[실행] nano ~/agv_ws/src/agv_description/urdf/common.xacro</a:t>
             </a:r>
           </a:p>
           <a:p>
@@ -2159,7 +2162,7 @@
           <a:lstStyle/>
           <a:p>
             <a:r>
-              <a:t>[설명] ~/agv_ws/src/agv_description/urdf/wheels.xacro의 전체 파일을 3/4 구간으로 작성한다.</a:t>
+              <a:t>[설명] ~/agv_ws/src/agv_description/urdf/wheels.xacro의 전체 파일을 1/5 구간으로 작성한다.</a:t>
             </a:r>
           </a:p>
           <a:p>
@@ -2249,7 +2252,7 @@
           <a:lstStyle/>
           <a:p>
             <a:r>
-              <a:t>[설명] ~/agv_ws/src/agv_description/urdf/wheels.xacro의 전체 파일을 4/4 구간으로 작성한다.</a:t>
+              <a:t>[설명] ~/agv_ws/src/agv_description/urdf/wheels.xacro의 전체 파일을 2/5 구간으로 작성한다.</a:t>
             </a:r>
           </a:p>
           <a:p>
@@ -2339,12 +2342,12 @@
           <a:lstStyle/>
           <a:p>
             <a:r>
-              <a:t>[설명] ~/agv_ws/src/agv_description/urdf/sensors.xacro의 전체 파일을 1/4 구간으로 작성한다.</a:t>
-            </a:r>
-          </a:p>
-          <a:p>
-            <a:r>
-              <a:t>[실행] nano ~/agv_ws/src/agv_description/urdf/sensors.xacro</a:t>
+              <a:t>[설명] ~/agv_ws/src/agv_description/urdf/wheels.xacro의 전체 파일을 3/5 구간으로 작성한다.</a:t>
+            </a:r>
+          </a:p>
+          <a:p>
+            <a:r>
+              <a:t>[실행] nano ~/agv_ws/src/agv_description/urdf/wheels.xacro</a:t>
             </a:r>
           </a:p>
           <a:p>
@@ -2429,12 +2432,12 @@
           <a:lstStyle/>
           <a:p>
             <a:r>
-              <a:t>[설명] ~/agv_ws/src/agv_description/urdf/sensors.xacro의 전체 파일을 2/4 구간으로 작성한다.</a:t>
-            </a:r>
-          </a:p>
-          <a:p>
-            <a:r>
-              <a:t>[실행] nano ~/agv_ws/src/agv_description/urdf/sensors.xacro</a:t>
+              <a:t>[설명] ~/agv_ws/src/agv_description/urdf/wheels.xacro의 전체 파일을 4/5 구간으로 작성한다.</a:t>
+            </a:r>
+          </a:p>
+          <a:p>
+            <a:r>
+              <a:t>[실행] nano ~/agv_ws/src/agv_description/urdf/wheels.xacro</a:t>
             </a:r>
           </a:p>
           <a:p>
@@ -2609,12 +2612,12 @@
           <a:lstStyle/>
           <a:p>
             <a:r>
-              <a:t>[설명] ~/agv_ws/src/agv_description/urdf/sensors.xacro의 전체 파일을 3/4 구간으로 작성한다.</a:t>
-            </a:r>
-          </a:p>
-          <a:p>
-            <a:r>
-              <a:t>[실행] nano ~/agv_ws/src/agv_description/urdf/sensors.xacro</a:t>
+              <a:t>[설명] ~/agv_ws/src/agv_description/urdf/wheels.xacro의 전체 파일을 5/5 구간으로 작성한다.</a:t>
+            </a:r>
+          </a:p>
+          <a:p>
+            <a:r>
+              <a:t>[실행] nano ~/agv_ws/src/agv_description/urdf/wheels.xacro</a:t>
             </a:r>
           </a:p>
           <a:p>
@@ -2699,7 +2702,7 @@
           <a:lstStyle/>
           <a:p>
             <a:r>
-              <a:t>[설명] ~/agv_ws/src/agv_description/urdf/sensors.xacro의 전체 파일을 4/4 구간으로 작성한다.</a:t>
+              <a:t>[설명] ~/agv_ws/src/agv_description/urdf/sensors.xacro의 전체 파일을 1/4 구간으로 작성한다.</a:t>
             </a:r>
           </a:p>
           <a:p>
@@ -2789,22 +2792,17 @@
           <a:lstStyle/>
           <a:p>
             <a:r>
-              <a:t>[설명] build/source/run을 생략 없이 실행한다.</a:t>
-            </a:r>
-          </a:p>
-          <a:p>
-            <a:r>
-              <a:t>[실행] xacro ~/agv_ws/src/agv_description/urdf/agv.urdf.xacro &gt; /tmp/agv.urdf</a:t>
-            </a:r>
-          </a:p>
-          <a:p>
-            <a:r>
-              <a:t>check_urdf /tmp/agv.urdf</a:t>
-            </a:r>
-          </a:p>
-          <a:p>
-            <a:r>
-              <a:t>[확인] wheel_radius와 wheel_base 변경이 좌우 바퀴·충돌 형상에 함께 적용된다.</a:t>
+              <a:t>[설명] ~/agv_ws/src/agv_description/urdf/sensors.xacro의 전체 파일을 2/4 구간으로 작성한다.</a:t>
+            </a:r>
+          </a:p>
+          <a:p>
+            <a:r>
+              <a:t>[실행] nano ~/agv_ws/src/agv_description/urdf/sensors.xacro</a:t>
+            </a:r>
+          </a:p>
+          <a:p>
+            <a:r>
+              <a:t>[확인] 코드를 저장하고 다음 코드 슬라이드 또는 build 단계로 이동한다.</a:t>
             </a:r>
           </a:p>
           <a:p>
@@ -2814,7 +2812,7 @@
           </a:p>
           <a:p>
             <a:r>
-              <a:t>[오류] 오류가 나면 현재 폴더, source, 파일 경로를 먼저 확인한다.</a:t>
+              <a:t>[오류] 들여쓰기·XML 태그·따옴표가 슬라이드와 정확히 같은지 확인한다.</a:t>
             </a:r>
           </a:p>
         </p:txBody>
@@ -2884,17 +2882,17 @@
           <a:lstStyle/>
           <a:p>
             <a:r>
-              <a:t>[설명] 실제 Ubuntu/ROS 2 환경에서 생성한 검증 화면이다.</a:t>
-            </a:r>
-          </a:p>
-          <a:p>
-            <a:r>
-              <a:t>[실행] 슬라이드의 명령 또는 파일 작성 단계를 진행한다.</a:t>
-            </a:r>
-          </a:p>
-          <a:p>
-            <a:r>
-              <a:t>[확인] 캡처의 명령과 다음 슬라이드의 검증 명령을 비교한다.</a:t>
+              <a:t>[설명] ~/agv_ws/src/agv_description/urdf/sensors.xacro의 전체 파일을 3/4 구간으로 작성한다.</a:t>
+            </a:r>
+          </a:p>
+          <a:p>
+            <a:r>
+              <a:t>[실행] nano ~/agv_ws/src/agv_description/urdf/sensors.xacro</a:t>
+            </a:r>
+          </a:p>
+          <a:p>
+            <a:r>
+              <a:t>[확인] 코드를 저장하고 다음 코드 슬라이드 또는 build 단계로 이동한다.</a:t>
             </a:r>
           </a:p>
           <a:p>
@@ -2904,7 +2902,7 @@
           </a:p>
           <a:p>
             <a:r>
-              <a:t>[오류] 오류가 나면 현재 폴더, source, 파일 경로를 먼저 확인한다.</a:t>
+              <a:t>[오류] 들여쓰기·XML 태그·따옴표가 슬라이드와 정확히 같은지 확인한다.</a:t>
             </a:r>
           </a:p>
         </p:txBody>
@@ -2974,22 +2972,17 @@
           <a:lstStyle/>
           <a:p>
             <a:r>
-              <a:t>[설명] 검증 명령은 GUI 결과와 별도로 실행해 재현 가능한 완료 기준을 만든다.</a:t>
-            </a:r>
-          </a:p>
-          <a:p>
-            <a:r>
-              <a:t>[실행] xacro ~/agv_ws/src/agv_description/urdf/agv.urdf.xacro &gt; /tmp/agv.urdf</a:t>
-            </a:r>
-          </a:p>
-          <a:p>
-            <a:r>
-              <a:t>rg -n 'wheel_radius|left_wheel_joint|right_wheel_joint' /tmp/agv.urdf</a:t>
-            </a:r>
-          </a:p>
-          <a:p>
-            <a:r>
-              <a:t>[확인] wheel_radius와 wheel_base 변경이 좌우 바퀴·충돌 형상에 함께 적용된다.</a:t>
+              <a:t>[설명] ~/agv_ws/src/agv_description/urdf/sensors.xacro의 전체 파일을 4/4 구간으로 작성한다.</a:t>
+            </a:r>
+          </a:p>
+          <a:p>
+            <a:r>
+              <a:t>[실행] nano ~/agv_ws/src/agv_description/urdf/sensors.xacro</a:t>
+            </a:r>
+          </a:p>
+          <a:p>
+            <a:r>
+              <a:t>[확인] 코드를 저장하고 다음 코드 슬라이드 또는 build 단계로 이동한다.</a:t>
             </a:r>
           </a:p>
           <a:p>
@@ -2999,7 +2992,7 @@
           </a:p>
           <a:p>
             <a:r>
-              <a:t>[오류] 오류가 나면 현재 폴더, source, 파일 경로를 먼저 확인한다.</a:t>
+              <a:t>[오류] 들여쓰기·XML 태그·따옴표가 슬라이드와 정확히 같은지 확인한다.</a:t>
             </a:r>
           </a:p>
         </p:txBody>
@@ -3069,17 +3062,22 @@
           <a:lstStyle/>
           <a:p>
             <a:r>
-              <a:t>[설명] 오류를 대신 해결하지 말고 증상부터 우선 확인 순서대로 교육생이 실행하게 한다.</a:t>
-            </a:r>
-          </a:p>
-          <a:p>
-            <a:r>
-              <a:t>[실행] 슬라이드의 명령 또는 파일 작성 단계를 진행한다.</a:t>
-            </a:r>
-          </a:p>
-          <a:p>
-            <a:r>
-              <a:t>[확인] 수정 뒤 첫 검증 명령을 다시 실행한다.</a:t>
+              <a:t>[설명] build/source/run을 생략 없이 실행한다.</a:t>
+            </a:r>
+          </a:p>
+          <a:p>
+            <a:r>
+              <a:t>[실행] xacro ~/agv_ws/src/agv_description/urdf/agv.urdf.xacro &gt; /tmp/agv.urdf</a:t>
+            </a:r>
+          </a:p>
+          <a:p>
+            <a:r>
+              <a:t>check_urdf /tmp/agv.urdf</a:t>
+            </a:r>
+          </a:p>
+          <a:p>
+            <a:r>
+              <a:t>[확인] wheel_radius와 wheel_base 변경이 좌우 바퀴·충돌 형상에 함께 적용된다.</a:t>
             </a:r>
           </a:p>
           <a:p>
@@ -3089,7 +3087,7 @@
           </a:p>
           <a:p>
             <a:r>
-              <a:t>[오류] 슬라이드의 두 대표 오류를 먼저 사용한다.</a:t>
+              <a:t>[오류] 오류가 나면 현재 폴더, source, 파일 경로를 먼저 확인한다.</a:t>
             </a:r>
           </a:p>
         </p:txBody>
@@ -3159,7 +3157,7 @@
           <a:lstStyle/>
           <a:p>
             <a:r>
-              <a:t>[설명] 교육생이 직접 한 값만 바꿔 원인과 결과를 연결하게 한다.</a:t>
+              <a:t>[설명] 실제 Ubuntu/ROS 2 환경에서 생성한 검증 화면이다.</a:t>
             </a:r>
           </a:p>
           <a:p>
@@ -3169,7 +3167,7 @@
           </a:p>
           <a:p>
             <a:r>
-              <a:t>[확인] 원래 값과 변경 값을 모두 기록한다.</a:t>
+              <a:t>[확인] 캡처의 명령과 다음 슬라이드의 검증 명령을 비교한다.</a:t>
             </a:r>
           </a:p>
           <a:p>
@@ -3249,17 +3247,22 @@
           <a:lstStyle/>
           <a:p>
             <a:r>
-              <a:t>[설명] 교육생이 Complete·캡처·로그를 저장했는지 확인하고 다음 모듈의 시작 상태를 읽는다.</a:t>
-            </a:r>
-          </a:p>
-          <a:p>
-            <a:r>
-              <a:t>[실행] 슬라이드의 명령 또는 파일 작성 단계를 진행한다.</a:t>
-            </a:r>
-          </a:p>
-          <a:p>
-            <a:r>
-              <a:t>[확인] M07 Gazebo 물리 시작 조건을 말할 수 있다.</a:t>
+              <a:t>[설명] 검증 명령은 GUI 결과와 별도로 실행해 재현 가능한 완료 기준을 만든다.</a:t>
+            </a:r>
+          </a:p>
+          <a:p>
+            <a:r>
+              <a:t>[실행] xacro ~/agv_ws/src/agv_description/urdf/agv.urdf.xacro &gt; /tmp/agv.urdf</a:t>
+            </a:r>
+          </a:p>
+          <a:p>
+            <a:r>
+              <a:t>rg -n 'wheel_radius|left_wheel_joint|right_wheel_joint' /tmp/agv.urdf</a:t>
+            </a:r>
+          </a:p>
+          <a:p>
+            <a:r>
+              <a:t>[확인] wheel_radius와 wheel_base 변경이 좌우 바퀴·충돌 형상에 함께 적용된다.</a:t>
             </a:r>
           </a:p>
           <a:p>
@@ -3339,7 +3342,7 @@
           <a:lstStyle/>
           <a:p>
             <a:r>
-              <a:t>[설명] 공식 문서는 버전 차이와 확장 학습을 확인할 때 사용한다.</a:t>
+              <a:t>[설명] 오류를 대신 해결하지 말고 증상부터 우선 확인 순서대로 교육생이 실행하게 한다.</a:t>
             </a:r>
           </a:p>
           <a:p>
@@ -3349,7 +3352,97 @@
           </a:p>
           <a:p>
             <a:r>
-              <a:t>[확인] 학습자는 본문만으로 현재 모듈을 완료한 상태여야 한다.</a:t>
+              <a:t>[확인] 수정 뒤 첫 검증 명령을 다시 실행한다.</a:t>
+            </a:r>
+          </a:p>
+          <a:p>
+            <a:r>
+              <a:t>[멈춤] 교육생이 현재 체크포인트를 통과할 때까지 기다린다.</a:t>
+            </a:r>
+          </a:p>
+          <a:p>
+            <a:r>
+              <a:t>[오류] 슬라이드의 두 대표 오류를 먼저 사용한다.</a:t>
+            </a:r>
+          </a:p>
+        </p:txBody>
+      </p:sp>
+      <p:sp>
+        <p:nvSpPr>
+          <p:cNvPr id="4" name="Slide Number Placeholder 3"/>
+          <p:cNvSpPr>
+            <a:spLocks noGrp="1"/>
+          </p:cNvSpPr>
+          <p:nvPr>
+            <p:ph type="sldNum" idx="5" sz="quarter"/>
+          </p:nvPr>
+        </p:nvSpPr>
+        <p:spPr/>
+      </p:sp>
+    </p:spTree>
+  </p:cSld>
+  <p:clrMapOvr>
+    <a:masterClrMapping/>
+  </p:clrMapOvr>
+</p:notes>
+</file>
+
+<file path=ppt/notesSlides/notesSlide39.xml><?xml version="1.0" encoding="utf-8"?>
+<p:notes xmlns:a="http://schemas.openxmlformats.org/drawingml/2006/main" xmlns:p="http://schemas.openxmlformats.org/presentationml/2006/main" xmlns:r="http://schemas.openxmlformats.org/officeDocument/2006/relationships">
+  <p:cSld>
+    <p:spTree>
+      <p:nvGrpSpPr>
+        <p:cNvPr id="1" name=""/>
+        <p:cNvGrpSpPr/>
+        <p:nvPr/>
+      </p:nvGrpSpPr>
+      <p:grpSpPr>
+        <a:xfrm>
+          <a:off x="0" y="0"/>
+          <a:ext cx="0" cy="0"/>
+          <a:chOff x="0" y="0"/>
+          <a:chExt cx="0" cy="0"/>
+        </a:xfrm>
+      </p:grpSpPr>
+      <p:sp>
+        <p:nvSpPr>
+          <p:cNvPr id="2" name="Slide Image Placeholder 1"/>
+          <p:cNvSpPr>
+            <a:spLocks noGrp="1"/>
+          </p:cNvSpPr>
+          <p:nvPr>
+            <p:ph type="sldImg" idx="2"/>
+          </p:nvPr>
+        </p:nvSpPr>
+        <p:spPr/>
+      </p:sp>
+      <p:sp>
+        <p:nvSpPr>
+          <p:cNvPr id="3" name="Notes Placeholder 2"/>
+          <p:cNvSpPr>
+            <a:spLocks noGrp="1"/>
+          </p:cNvSpPr>
+          <p:nvPr>
+            <p:ph type="body" idx="3" sz="quarter"/>
+          </p:nvPr>
+        </p:nvSpPr>
+        <p:spPr/>
+        <p:txBody>
+          <a:bodyPr/>
+          <a:lstStyle/>
+          <a:p>
+            <a:r>
+              <a:t>[설명] 교육생이 직접 한 값만 바꿔 원인과 결과를 연결하게 한다.</a:t>
+            </a:r>
+          </a:p>
+          <a:p>
+            <a:r>
+              <a:t>[실행] 슬라이드의 명령 또는 파일 작성 단계를 진행한다.</a:t>
+            </a:r>
+          </a:p>
+          <a:p>
+            <a:r>
+              <a:t>[확인] 원래 값과 변경 값을 모두 기록한다.</a:t>
             </a:r>
           </a:p>
           <a:p>
@@ -3474,6 +3567,186 @@
 </p:notes>
 </file>
 
+<file path=ppt/notesSlides/notesSlide40.xml><?xml version="1.0" encoding="utf-8"?>
+<p:notes xmlns:a="http://schemas.openxmlformats.org/drawingml/2006/main" xmlns:p="http://schemas.openxmlformats.org/presentationml/2006/main" xmlns:r="http://schemas.openxmlformats.org/officeDocument/2006/relationships">
+  <p:cSld>
+    <p:spTree>
+      <p:nvGrpSpPr>
+        <p:cNvPr id="1" name=""/>
+        <p:cNvGrpSpPr/>
+        <p:nvPr/>
+      </p:nvGrpSpPr>
+      <p:grpSpPr>
+        <a:xfrm>
+          <a:off x="0" y="0"/>
+          <a:ext cx="0" cy="0"/>
+          <a:chOff x="0" y="0"/>
+          <a:chExt cx="0" cy="0"/>
+        </a:xfrm>
+      </p:grpSpPr>
+      <p:sp>
+        <p:nvSpPr>
+          <p:cNvPr id="2" name="Slide Image Placeholder 1"/>
+          <p:cNvSpPr>
+            <a:spLocks noGrp="1"/>
+          </p:cNvSpPr>
+          <p:nvPr>
+            <p:ph type="sldImg" idx="2"/>
+          </p:nvPr>
+        </p:nvSpPr>
+        <p:spPr/>
+      </p:sp>
+      <p:sp>
+        <p:nvSpPr>
+          <p:cNvPr id="3" name="Notes Placeholder 2"/>
+          <p:cNvSpPr>
+            <a:spLocks noGrp="1"/>
+          </p:cNvSpPr>
+          <p:nvPr>
+            <p:ph type="body" idx="3" sz="quarter"/>
+          </p:nvPr>
+        </p:nvSpPr>
+        <p:spPr/>
+        <p:txBody>
+          <a:bodyPr/>
+          <a:lstStyle/>
+          <a:p>
+            <a:r>
+              <a:t>[설명] 교육생이 Complete·캡처·로그를 저장했는지 확인하고 다음 모듈의 시작 상태를 읽는다.</a:t>
+            </a:r>
+          </a:p>
+          <a:p>
+            <a:r>
+              <a:t>[실행] 슬라이드의 명령 또는 파일 작성 단계를 진행한다.</a:t>
+            </a:r>
+          </a:p>
+          <a:p>
+            <a:r>
+              <a:t>[확인] M07 Gazebo 물리 시작 조건을 말할 수 있다.</a:t>
+            </a:r>
+          </a:p>
+          <a:p>
+            <a:r>
+              <a:t>[멈춤] 교육생이 현재 체크포인트를 통과할 때까지 기다린다.</a:t>
+            </a:r>
+          </a:p>
+          <a:p>
+            <a:r>
+              <a:t>[오류] 오류가 나면 현재 폴더, source, 파일 경로를 먼저 확인한다.</a:t>
+            </a:r>
+          </a:p>
+        </p:txBody>
+      </p:sp>
+      <p:sp>
+        <p:nvSpPr>
+          <p:cNvPr id="4" name="Slide Number Placeholder 3"/>
+          <p:cNvSpPr>
+            <a:spLocks noGrp="1"/>
+          </p:cNvSpPr>
+          <p:nvPr>
+            <p:ph type="sldNum" idx="5" sz="quarter"/>
+          </p:nvPr>
+        </p:nvSpPr>
+        <p:spPr/>
+      </p:sp>
+    </p:spTree>
+  </p:cSld>
+  <p:clrMapOvr>
+    <a:masterClrMapping/>
+  </p:clrMapOvr>
+</p:notes>
+</file>
+
+<file path=ppt/notesSlides/notesSlide41.xml><?xml version="1.0" encoding="utf-8"?>
+<p:notes xmlns:a="http://schemas.openxmlformats.org/drawingml/2006/main" xmlns:p="http://schemas.openxmlformats.org/presentationml/2006/main" xmlns:r="http://schemas.openxmlformats.org/officeDocument/2006/relationships">
+  <p:cSld>
+    <p:spTree>
+      <p:nvGrpSpPr>
+        <p:cNvPr id="1" name=""/>
+        <p:cNvGrpSpPr/>
+        <p:nvPr/>
+      </p:nvGrpSpPr>
+      <p:grpSpPr>
+        <a:xfrm>
+          <a:off x="0" y="0"/>
+          <a:ext cx="0" cy="0"/>
+          <a:chOff x="0" y="0"/>
+          <a:chExt cx="0" cy="0"/>
+        </a:xfrm>
+      </p:grpSpPr>
+      <p:sp>
+        <p:nvSpPr>
+          <p:cNvPr id="2" name="Slide Image Placeholder 1"/>
+          <p:cNvSpPr>
+            <a:spLocks noGrp="1"/>
+          </p:cNvSpPr>
+          <p:nvPr>
+            <p:ph type="sldImg" idx="2"/>
+          </p:nvPr>
+        </p:nvSpPr>
+        <p:spPr/>
+      </p:sp>
+      <p:sp>
+        <p:nvSpPr>
+          <p:cNvPr id="3" name="Notes Placeholder 2"/>
+          <p:cNvSpPr>
+            <a:spLocks noGrp="1"/>
+          </p:cNvSpPr>
+          <p:nvPr>
+            <p:ph type="body" idx="3" sz="quarter"/>
+          </p:nvPr>
+        </p:nvSpPr>
+        <p:spPr/>
+        <p:txBody>
+          <a:bodyPr/>
+          <a:lstStyle/>
+          <a:p>
+            <a:r>
+              <a:t>[설명] 공식 문서는 버전 차이와 확장 학습을 확인할 때 사용한다.</a:t>
+            </a:r>
+          </a:p>
+          <a:p>
+            <a:r>
+              <a:t>[실행] 슬라이드의 명령 또는 파일 작성 단계를 진행한다.</a:t>
+            </a:r>
+          </a:p>
+          <a:p>
+            <a:r>
+              <a:t>[확인] 학습자는 본문만으로 현재 모듈을 완료한 상태여야 한다.</a:t>
+            </a:r>
+          </a:p>
+          <a:p>
+            <a:r>
+              <a:t>[멈춤] 교육생이 현재 체크포인트를 통과할 때까지 기다린다.</a:t>
+            </a:r>
+          </a:p>
+          <a:p>
+            <a:r>
+              <a:t>[오류] 오류가 나면 현재 폴더, source, 파일 경로를 먼저 확인한다.</a:t>
+            </a:r>
+          </a:p>
+        </p:txBody>
+      </p:sp>
+      <p:sp>
+        <p:nvSpPr>
+          <p:cNvPr id="4" name="Slide Number Placeholder 3"/>
+          <p:cNvSpPr>
+            <a:spLocks noGrp="1"/>
+          </p:cNvSpPr>
+          <p:nvPr>
+            <p:ph type="sldNum" idx="5" sz="quarter"/>
+          </p:nvPr>
+        </p:nvSpPr>
+        <p:spPr/>
+      </p:sp>
+    </p:spTree>
+  </p:cSld>
+  <p:clrMapOvr>
+    <a:masterClrMapping/>
+  </p:clrMapOvr>
+</p:notes>
+</file>
+
 <file path=ppt/notesSlides/notesSlide5.xml><?xml version="1.0" encoding="utf-8"?>
 <p:notes xmlns:a="http://schemas.openxmlformats.org/drawingml/2006/main" xmlns:p="http://schemas.openxmlformats.org/presentationml/2006/main" xmlns:r="http://schemas.openxmlformats.org/officeDocument/2006/relationships">
   <p:cSld>
@@ -3894,7 +4167,7 @@
           <a:lstStyle/>
           <a:p>
             <a:r>
-              <a:t>[설명] ~/agv_ws/src/agv_description/urdf/agv.urdf.xacro의 전체 파일을 1/10 구간으로 작성한다.</a:t>
+              <a:t>[설명] ~/agv_ws/src/agv_description/urdf/agv.urdf.xacro의 전체 파일을 1/11 구간으로 작성한다.</a:t>
             </a:r>
           </a:p>
           <a:p>
@@ -7287,7 +7560,7 @@
               </a:defRPr>
             </a:pPr>
             <a:r>
-              <a:t>파일을 계속 작성하고 저장한다 (2/10)</a:t>
+              <a:t>파일을 계속 작성하고 저장한다 (2/11)</a:t>
             </a:r>
           </a:p>
         </p:txBody>
@@ -7462,7 +7735,7 @@
               </a:defRPr>
             </a:pPr>
             <a:r>
-              <a:t>현재 단계 4/13    |    현재 폴더 ~/agv_ws    |    현재 터미널</a:t>
+              <a:t>현재 단계 4/14    |    현재 폴더 ~/agv_ws    |    현재 터미널</a:t>
             </a:r>
           </a:p>
         </p:txBody>
@@ -7475,8 +7748,8 @@
         </p:nvSpPr>
         <p:spPr>
           <a:xfrm>
-            <a:off x="658368" y="1682496"/>
-            <a:ext cx="10972800" cy="347472"/>
+            <a:off x="658368" y="1627632"/>
+            <a:ext cx="10972800" cy="256032"/>
           </a:xfrm>
           <a:prstGeom prst="rect">
             <a:avLst/>
@@ -7493,7 +7766,7 @@
               <a:spcAft>
                 <a:spcPts val="0"/>
               </a:spcAft>
-              <a:defRPr sz="1700" b="1">
+              <a:defRPr sz="1500" b="1">
                 <a:solidFill>
                   <a:srgbClr val="122C4E"/>
                 </a:solidFill>
@@ -7514,8 +7787,8 @@
         </p:nvSpPr>
         <p:spPr>
           <a:xfrm>
-            <a:off x="658368" y="2103120"/>
-            <a:ext cx="10972800" cy="493776"/>
+            <a:off x="658368" y="1956816"/>
+            <a:ext cx="10972800" cy="603504"/>
           </a:xfrm>
           <a:prstGeom prst="rect">
             <a:avLst/>
@@ -7559,7 +7832,11 @@
               </a:defRPr>
             </a:pPr>
             <a:r>
-              <a:t>파일 생성/열기: mkdir -p ~/agv_ws/src/agv_description/urdf    &amp;&amp;    nano ~/agv_ws/src/agv_description/urdf/agv.urdf.xacro</a:t>
+              <a:t>파일 생성: mkdir -p ~/agv_ws/src/agv_description/urdf</a:t>
+            </a:r>
+            <a:br/>
+            <a:r>
+              <a:t>파일 열기: nano ~/agv_ws/src/agv_description/urdf/agv.urdf.xacro</a:t>
             </a:r>
           </a:p>
         </p:txBody>
@@ -7572,8 +7849,8 @@
         </p:nvSpPr>
         <p:spPr>
           <a:xfrm>
-            <a:off x="658368" y="2761488"/>
-            <a:ext cx="10972800" cy="3383280"/>
+            <a:off x="658368" y="2706624"/>
+            <a:ext cx="10972800" cy="3364992"/>
           </a:xfrm>
           <a:prstGeom prst="rect">
             <a:avLst/>
@@ -7616,6 +7893,11 @@
                 <a:latin typeface="DejaVu Sans Mono"/>
               </a:defRPr>
             </a:pPr>
+            <a:br/>
+            <a:r>
+              <a:t>  </a:t>
+            </a:r>
+            <a:br/>
             <a:r>
               <a:t>  &lt;xacro:property name="body_length" value="0.60"/&gt;</a:t>
             </a:r>
@@ -7654,22 +7936,6 @@
             <a:br/>
             <a:r>
               <a:t>  &lt;xacro:property name="wheel_radius" value="0.08"/&gt;</a:t>
-            </a:r>
-            <a:br/>
-            <a:r>
-              <a:t>  </a:t>
-            </a:r>
-            <a:br/>
-            <a:r>
-              <a:t>  </a:t>
-            </a:r>
-            <a:br/>
-            <a:r>
-              <a:t>  &lt;xacro:property name="wheel_width" value="0.05"/&gt;</a:t>
-            </a:r>
-            <a:br/>
-            <a:r>
-              <a:t>  </a:t>
             </a:r>
           </a:p>
         </p:txBody>
@@ -7682,7 +7948,7 @@
         </p:nvSpPr>
         <p:spPr>
           <a:xfrm>
-            <a:off x="749808" y="6199632"/>
+            <a:off x="749808" y="6181344"/>
             <a:ext cx="10789920" cy="201168"/>
           </a:xfrm>
           <a:prstGeom prst="rect">
@@ -7708,7 +7974,7 @@
               </a:defRPr>
             </a:pPr>
             <a:r>
-              <a:t>파일 전체 2/10 · 이 슬라이드 다음에 같은 파일의 나머지 줄이 이어집니다.</a:t>
+              <a:t>파일 전체 2/11 · 이 슬라이드 다음에 같은 파일의 나머지 줄이 이어집니다.</a:t>
             </a:r>
           </a:p>
         </p:txBody>
@@ -7765,7 +8031,7 @@
               </a:defRPr>
             </a:pPr>
             <a:r>
-              <a:t>파일을 계속 작성하고 저장한다 (3/10)</a:t>
+              <a:t>파일을 계속 작성하고 저장한다 (3/11)</a:t>
             </a:r>
           </a:p>
         </p:txBody>
@@ -7940,7 +8206,7 @@
               </a:defRPr>
             </a:pPr>
             <a:r>
-              <a:t>현재 단계 5/13    |    현재 폴더 ~/agv_ws    |    현재 터미널</a:t>
+              <a:t>현재 단계 5/14    |    현재 폴더 ~/agv_ws    |    현재 터미널</a:t>
             </a:r>
           </a:p>
         </p:txBody>
@@ -7953,8 +8219,8 @@
         </p:nvSpPr>
         <p:spPr>
           <a:xfrm>
-            <a:off x="658368" y="1682496"/>
-            <a:ext cx="10972800" cy="347472"/>
+            <a:off x="658368" y="1627632"/>
+            <a:ext cx="10972800" cy="256032"/>
           </a:xfrm>
           <a:prstGeom prst="rect">
             <a:avLst/>
@@ -7971,7 +8237,7 @@
               <a:spcAft>
                 <a:spcPts val="0"/>
               </a:spcAft>
-              <a:defRPr sz="1700" b="1">
+              <a:defRPr sz="1500" b="1">
                 <a:solidFill>
                   <a:srgbClr val="122C4E"/>
                 </a:solidFill>
@@ -7992,8 +8258,8 @@
         </p:nvSpPr>
         <p:spPr>
           <a:xfrm>
-            <a:off x="658368" y="2103120"/>
-            <a:ext cx="10972800" cy="493776"/>
+            <a:off x="658368" y="1956816"/>
+            <a:ext cx="10972800" cy="603504"/>
           </a:xfrm>
           <a:prstGeom prst="rect">
             <a:avLst/>
@@ -8037,7 +8303,11 @@
               </a:defRPr>
             </a:pPr>
             <a:r>
-              <a:t>파일 생성/열기: mkdir -p ~/agv_ws/src/agv_description/urdf    &amp;&amp;    nano ~/agv_ws/src/agv_description/urdf/agv.urdf.xacro</a:t>
+              <a:t>파일 생성: mkdir -p ~/agv_ws/src/agv_description/urdf</a:t>
+            </a:r>
+            <a:br/>
+            <a:r>
+              <a:t>파일 열기: nano ~/agv_ws/src/agv_description/urdf/agv.urdf.xacro</a:t>
             </a:r>
           </a:p>
         </p:txBody>
@@ -8050,8 +8320,8 @@
         </p:nvSpPr>
         <p:spPr>
           <a:xfrm>
-            <a:off x="658368" y="2761488"/>
-            <a:ext cx="10972800" cy="3383280"/>
+            <a:off x="658368" y="2706624"/>
+            <a:ext cx="10972800" cy="3364992"/>
           </a:xfrm>
           <a:prstGeom prst="rect">
             <a:avLst/>
@@ -8099,6 +8369,22 @@
             </a:r>
             <a:br/>
             <a:r>
+              <a:t>  </a:t>
+            </a:r>
+            <a:br/>
+            <a:r>
+              <a:t>  &lt;xacro:property name="wheel_width" value="0.05"/&gt;</a:t>
+            </a:r>
+            <a:br/>
+            <a:r>
+              <a:t>  </a:t>
+            </a:r>
+            <a:br/>
+            <a:r>
+              <a:t>  </a:t>
+            </a:r>
+            <a:br/>
+            <a:r>
               <a:t>  &lt;xacro:property name="wheel_base" value="0.38"/&gt;</a:t>
             </a:r>
             <a:br/>
@@ -8121,30 +8407,6 @@
             <a:br/>
             <a:r>
               <a:t>  </a:t>
-            </a:r>
-            <a:br/>
-            <a:r>
-              <a:t>  &lt;link name="base_link"&gt;</a:t>
-            </a:r>
-            <a:br/>
-            <a:r>
-              <a:t>    </a:t>
-            </a:r>
-            <a:br/>
-            <a:r>
-              <a:t>    </a:t>
-            </a:r>
-            <a:br/>
-            <a:r>
-              <a:t>    &lt;visual&gt;</a:t>
-            </a:r>
-            <a:br/>
-            <a:r>
-              <a:t>      &lt;origin xyz="0 0 ${wheel_radius + body_height/2}"/&gt;</a:t>
-            </a:r>
-            <a:br/>
-            <a:r>
-              <a:t>      &lt;geometry&gt;</a:t>
             </a:r>
           </a:p>
         </p:txBody>
@@ -8157,7 +8419,7 @@
         </p:nvSpPr>
         <p:spPr>
           <a:xfrm>
-            <a:off x="749808" y="6199632"/>
+            <a:off x="749808" y="6181344"/>
             <a:ext cx="10789920" cy="201168"/>
           </a:xfrm>
           <a:prstGeom prst="rect">
@@ -8183,7 +8445,7 @@
               </a:defRPr>
             </a:pPr>
             <a:r>
-              <a:t>파일 전체 3/10 · 이 슬라이드 다음에 같은 파일의 나머지 줄이 이어집니다.</a:t>
+              <a:t>파일 전체 3/11 · 이 슬라이드 다음에 같은 파일의 나머지 줄이 이어집니다.</a:t>
             </a:r>
           </a:p>
         </p:txBody>
@@ -8240,7 +8502,7 @@
               </a:defRPr>
             </a:pPr>
             <a:r>
-              <a:t>파일을 계속 작성하고 저장한다 (4/10)</a:t>
+              <a:t>파일을 계속 작성하고 저장한다 (4/11)</a:t>
             </a:r>
           </a:p>
         </p:txBody>
@@ -8415,7 +8677,7 @@
               </a:defRPr>
             </a:pPr>
             <a:r>
-              <a:t>현재 단계 6/13    |    현재 폴더 ~/agv_ws    |    현재 터미널</a:t>
+              <a:t>현재 단계 6/14    |    현재 폴더 ~/agv_ws    |    현재 터미널</a:t>
             </a:r>
           </a:p>
         </p:txBody>
@@ -8428,8 +8690,8 @@
         </p:nvSpPr>
         <p:spPr>
           <a:xfrm>
-            <a:off x="658368" y="1682496"/>
-            <a:ext cx="10972800" cy="347472"/>
+            <a:off x="658368" y="1627632"/>
+            <a:ext cx="10972800" cy="256032"/>
           </a:xfrm>
           <a:prstGeom prst="rect">
             <a:avLst/>
@@ -8446,7 +8708,7 @@
               <a:spcAft>
                 <a:spcPts val="0"/>
               </a:spcAft>
-              <a:defRPr sz="1700" b="1">
+              <a:defRPr sz="1500" b="1">
                 <a:solidFill>
                   <a:srgbClr val="122C4E"/>
                 </a:solidFill>
@@ -8467,8 +8729,8 @@
         </p:nvSpPr>
         <p:spPr>
           <a:xfrm>
-            <a:off x="658368" y="2103120"/>
-            <a:ext cx="10972800" cy="493776"/>
+            <a:off x="658368" y="1956816"/>
+            <a:ext cx="10972800" cy="603504"/>
           </a:xfrm>
           <a:prstGeom prst="rect">
             <a:avLst/>
@@ -8512,7 +8774,11 @@
               </a:defRPr>
             </a:pPr>
             <a:r>
-              <a:t>파일 생성/열기: mkdir -p ~/agv_ws/src/agv_description/urdf    &amp;&amp;    nano ~/agv_ws/src/agv_description/urdf/agv.urdf.xacro</a:t>
+              <a:t>파일 생성: mkdir -p ~/agv_ws/src/agv_description/urdf</a:t>
+            </a:r>
+            <a:br/>
+            <a:r>
+              <a:t>파일 열기: nano ~/agv_ws/src/agv_description/urdf/agv.urdf.xacro</a:t>
             </a:r>
           </a:p>
         </p:txBody>
@@ -8525,8 +8791,8 @@
         </p:nvSpPr>
         <p:spPr>
           <a:xfrm>
-            <a:off x="658368" y="2761488"/>
-            <a:ext cx="10972800" cy="3383280"/>
+            <a:off x="658368" y="2706624"/>
+            <a:ext cx="10972800" cy="3364992"/>
           </a:xfrm>
           <a:prstGeom prst="rect">
             <a:avLst/>
@@ -8570,6 +8836,30 @@
               </a:defRPr>
             </a:pPr>
             <a:r>
+              <a:t>  &lt;link name="base_link"&gt;</a:t>
+            </a:r>
+            <a:br/>
+            <a:r>
+              <a:t>    </a:t>
+            </a:r>
+            <a:br/>
+            <a:r>
+              <a:t>    </a:t>
+            </a:r>
+            <a:br/>
+            <a:r>
+              <a:t>    &lt;visual&gt;</a:t>
+            </a:r>
+            <a:br/>
+            <a:r>
+              <a:t>      &lt;origin xyz="0 0 ${wheel_radius + body_height/2}"/&gt;</a:t>
+            </a:r>
+            <a:br/>
+            <a:r>
+              <a:t>      &lt;geometry&gt;</a:t>
+            </a:r>
+            <a:br/>
+            <a:r>
               <a:t>        &lt;box size="${body_length} ${body_width} ${body_height}"/&gt;</a:t>
             </a:r>
             <a:br/>
@@ -8583,38 +8873,6 @@
             <a:br/>
             <a:r>
               <a:t>    &lt;/visual&gt;</a:t>
-            </a:r>
-            <a:br/>
-            <a:r>
-              <a:t>    </a:t>
-            </a:r>
-            <a:br/>
-            <a:r>
-              <a:t>    </a:t>
-            </a:r>
-            <a:br/>
-            <a:r>
-              <a:t>    &lt;collision&gt;</a:t>
-            </a:r>
-            <a:br/>
-            <a:r>
-              <a:t>      &lt;origin xyz="0 0 ${wheel_radius + body_height/2}"/&gt;</a:t>
-            </a:r>
-            <a:br/>
-            <a:r>
-              <a:t>      &lt;geometry&gt;</a:t>
-            </a:r>
-            <a:br/>
-            <a:r>
-              <a:t>        &lt;box size="${body_length} ${body_width} ${body_height}"/&gt;</a:t>
-            </a:r>
-            <a:br/>
-            <a:r>
-              <a:t>      &lt;/geometry&gt;</a:t>
-            </a:r>
-            <a:br/>
-            <a:r>
-              <a:t>    &lt;/collision&gt;</a:t>
             </a:r>
             <a:br/>
             <a:r>
@@ -8635,7 +8893,7 @@
         </p:nvSpPr>
         <p:spPr>
           <a:xfrm>
-            <a:off x="749808" y="6199632"/>
+            <a:off x="749808" y="6181344"/>
             <a:ext cx="10789920" cy="201168"/>
           </a:xfrm>
           <a:prstGeom prst="rect">
@@ -8661,7 +8919,7 @@
               </a:defRPr>
             </a:pPr>
             <a:r>
-              <a:t>파일 전체 4/10 · 이 슬라이드 다음에 같은 파일의 나머지 줄이 이어집니다.</a:t>
+              <a:t>파일 전체 4/11 · 이 슬라이드 다음에 같은 파일의 나머지 줄이 이어집니다.</a:t>
             </a:r>
           </a:p>
         </p:txBody>
@@ -8718,7 +8976,7 @@
               </a:defRPr>
             </a:pPr>
             <a:r>
-              <a:t>파일을 계속 작성하고 저장한다 (5/10)</a:t>
+              <a:t>파일을 계속 작성하고 저장한다 (5/11)</a:t>
             </a:r>
           </a:p>
         </p:txBody>
@@ -8893,7 +9151,7 @@
               </a:defRPr>
             </a:pPr>
             <a:r>
-              <a:t>현재 단계 7/13    |    현재 폴더 ~/agv_ws    |    현재 터미널</a:t>
+              <a:t>현재 단계 7/14    |    현재 폴더 ~/agv_ws    |    현재 터미널</a:t>
             </a:r>
           </a:p>
         </p:txBody>
@@ -8906,8 +9164,8 @@
         </p:nvSpPr>
         <p:spPr>
           <a:xfrm>
-            <a:off x="658368" y="1682496"/>
-            <a:ext cx="10972800" cy="347472"/>
+            <a:off x="658368" y="1627632"/>
+            <a:ext cx="10972800" cy="256032"/>
           </a:xfrm>
           <a:prstGeom prst="rect">
             <a:avLst/>
@@ -8924,7 +9182,7 @@
               <a:spcAft>
                 <a:spcPts val="0"/>
               </a:spcAft>
-              <a:defRPr sz="1700" b="1">
+              <a:defRPr sz="1500" b="1">
                 <a:solidFill>
                   <a:srgbClr val="122C4E"/>
                 </a:solidFill>
@@ -8945,8 +9203,8 @@
         </p:nvSpPr>
         <p:spPr>
           <a:xfrm>
-            <a:off x="658368" y="2103120"/>
-            <a:ext cx="10972800" cy="493776"/>
+            <a:off x="658368" y="1956816"/>
+            <a:ext cx="10972800" cy="603504"/>
           </a:xfrm>
           <a:prstGeom prst="rect">
             <a:avLst/>
@@ -8990,7 +9248,11 @@
               </a:defRPr>
             </a:pPr>
             <a:r>
-              <a:t>파일 생성/열기: mkdir -p ~/agv_ws/src/agv_description/urdf    &amp;&amp;    nano ~/agv_ws/src/agv_description/urdf/agv.urdf.xacro</a:t>
+              <a:t>파일 생성: mkdir -p ~/agv_ws/src/agv_description/urdf</a:t>
+            </a:r>
+            <a:br/>
+            <a:r>
+              <a:t>파일 열기: nano ~/agv_ws/src/agv_description/urdf/agv.urdf.xacro</a:t>
             </a:r>
           </a:p>
         </p:txBody>
@@ -9003,8 +9265,8 @@
         </p:nvSpPr>
         <p:spPr>
           <a:xfrm>
-            <a:off x="658368" y="2761488"/>
-            <a:ext cx="10972800" cy="3383280"/>
+            <a:off x="658368" y="2706624"/>
+            <a:ext cx="10972800" cy="3364992"/>
           </a:xfrm>
           <a:prstGeom prst="rect">
             <a:avLst/>
@@ -9048,6 +9310,38 @@
               </a:defRPr>
             </a:pPr>
             <a:r>
+              <a:t>    &lt;collision&gt;</a:t>
+            </a:r>
+            <a:br/>
+            <a:r>
+              <a:t>      &lt;origin xyz="0 0 ${wheel_radius + body_height/2}"/&gt;</a:t>
+            </a:r>
+            <a:br/>
+            <a:r>
+              <a:t>      &lt;geometry&gt;</a:t>
+            </a:r>
+            <a:br/>
+            <a:r>
+              <a:t>        &lt;box size="${body_length} ${body_width} ${body_height}"/&gt;</a:t>
+            </a:r>
+            <a:br/>
+            <a:r>
+              <a:t>      &lt;/geometry&gt;</a:t>
+            </a:r>
+            <a:br/>
+            <a:r>
+              <a:t>    &lt;/collision&gt;</a:t>
+            </a:r>
+            <a:br/>
+            <a:r>
+              <a:t>    </a:t>
+            </a:r>
+            <a:br/>
+            <a:r>
+              <a:t>    </a:t>
+            </a:r>
+            <a:br/>
+            <a:r>
               <a:t>    &lt;xacro:box_inertia mass="12.0" x="${body_length}" y="${body_width}"</a:t>
             </a:r>
             <a:br/>
@@ -9058,43 +9352,6 @@
             <a:r>
               <a:t>    </a:t>
             </a:r>
-            <a:br/>
-            <a:r>
-              <a:t>  </a:t>
-            </a:r>
-            <a:br/>
-            <a:r>
-              <a:t>  &lt;/link&gt;</a:t>
-            </a:r>
-            <a:br/>
-            <a:r>
-              <a:t>  </a:t>
-            </a:r>
-            <a:br/>
-            <a:r>
-              <a:t>  </a:t>
-            </a:r>
-            <a:br/>
-            <a:r>
-              <a:t>  &lt;joint name="base_footprint_joint" type="fixed"&gt;</a:t>
-            </a:r>
-            <a:br/>
-            <a:r>
-              <a:t>    &lt;parent link="base_footprint"/&gt;</a:t>
-            </a:r>
-            <a:br/>
-            <a:r>
-              <a:t>    &lt;child link="base_link"/&gt;</a:t>
-            </a:r>
-            <a:br/>
-            <a:r>
-              <a:t>  &lt;/joint&gt;</a:t>
-            </a:r>
-            <a:br/>
-            <a:r>
-              <a:t>  </a:t>
-            </a:r>
-            <a:br/>
             <a:br/>
             <a:r>
               <a:t>  </a:t>
@@ -9110,7 +9367,7 @@
         </p:nvSpPr>
         <p:spPr>
           <a:xfrm>
-            <a:off x="749808" y="6199632"/>
+            <a:off x="749808" y="6181344"/>
             <a:ext cx="10789920" cy="201168"/>
           </a:xfrm>
           <a:prstGeom prst="rect">
@@ -9136,7 +9393,7 @@
               </a:defRPr>
             </a:pPr>
             <a:r>
-              <a:t>파일 전체 5/10 · 이 슬라이드 다음에 같은 파일의 나머지 줄이 이어집니다.</a:t>
+              <a:t>파일 전체 5/11 · 이 슬라이드 다음에 같은 파일의 나머지 줄이 이어집니다.</a:t>
             </a:r>
           </a:p>
         </p:txBody>
@@ -9193,7 +9450,7 @@
               </a:defRPr>
             </a:pPr>
             <a:r>
-              <a:t>파일을 계속 작성하고 저장한다 (6/10)</a:t>
+              <a:t>파일을 계속 작성하고 저장한다 (6/11)</a:t>
             </a:r>
           </a:p>
         </p:txBody>
@@ -9368,7 +9625,7 @@
               </a:defRPr>
             </a:pPr>
             <a:r>
-              <a:t>현재 단계 8/13    |    현재 폴더 ~/agv_ws    |    현재 터미널</a:t>
+              <a:t>현재 단계 8/14    |    현재 폴더 ~/agv_ws    |    현재 터미널</a:t>
             </a:r>
           </a:p>
         </p:txBody>
@@ -9381,8 +9638,8 @@
         </p:nvSpPr>
         <p:spPr>
           <a:xfrm>
-            <a:off x="658368" y="1682496"/>
-            <a:ext cx="10972800" cy="347472"/>
+            <a:off x="658368" y="1627632"/>
+            <a:ext cx="10972800" cy="256032"/>
           </a:xfrm>
           <a:prstGeom prst="rect">
             <a:avLst/>
@@ -9399,7 +9656,7 @@
               <a:spcAft>
                 <a:spcPts val="0"/>
               </a:spcAft>
-              <a:defRPr sz="1700" b="1">
+              <a:defRPr sz="1500" b="1">
                 <a:solidFill>
                   <a:srgbClr val="122C4E"/>
                 </a:solidFill>
@@ -9420,8 +9677,8 @@
         </p:nvSpPr>
         <p:spPr>
           <a:xfrm>
-            <a:off x="658368" y="2103120"/>
-            <a:ext cx="10972800" cy="493776"/>
+            <a:off x="658368" y="1956816"/>
+            <a:ext cx="10972800" cy="603504"/>
           </a:xfrm>
           <a:prstGeom prst="rect">
             <a:avLst/>
@@ -9465,7 +9722,11 @@
               </a:defRPr>
             </a:pPr>
             <a:r>
-              <a:t>파일 생성/열기: mkdir -p ~/agv_ws/src/agv_description/urdf    &amp;&amp;    nano ~/agv_ws/src/agv_description/urdf/agv.urdf.xacro</a:t>
+              <a:t>파일 생성: mkdir -p ~/agv_ws/src/agv_description/urdf</a:t>
+            </a:r>
+            <a:br/>
+            <a:r>
+              <a:t>파일 열기: nano ~/agv_ws/src/agv_description/urdf/agv.urdf.xacro</a:t>
             </a:r>
           </a:p>
         </p:txBody>
@@ -9478,8 +9739,8 @@
         </p:nvSpPr>
         <p:spPr>
           <a:xfrm>
-            <a:off x="658368" y="2761488"/>
-            <a:ext cx="10972800" cy="3383280"/>
+            <a:off x="658368" y="2706624"/>
+            <a:ext cx="10972800" cy="3364992"/>
           </a:xfrm>
           <a:prstGeom prst="rect">
             <a:avLst/>
@@ -9523,56 +9784,48 @@
               </a:defRPr>
             </a:pPr>
             <a:r>
+              <a:t>  &lt;/link&gt;</a:t>
+            </a:r>
+            <a:br/>
+            <a:r>
+              <a:t>  </a:t>
+            </a:r>
+            <a:br/>
+            <a:r>
+              <a:t>  </a:t>
+            </a:r>
+            <a:br/>
+            <a:r>
+              <a:t>  &lt;joint name="base_footprint_joint" type="fixed"&gt;</a:t>
+            </a:r>
+            <a:br/>
+            <a:r>
+              <a:t>    &lt;parent link="base_footprint"/&gt;</a:t>
+            </a:r>
+            <a:br/>
+            <a:r>
+              <a:t>    &lt;child link="base_link"/&gt;</a:t>
+            </a:r>
+            <a:br/>
+            <a:r>
+              <a:t>  &lt;/joint&gt;</a:t>
+            </a:r>
+            <a:br/>
+            <a:r>
+              <a:t>  </a:t>
+            </a:r>
+            <a:br/>
+            <a:br/>
+            <a:r>
+              <a:t>  </a:t>
+            </a:r>
+            <a:br/>
+            <a:r>
               <a:t>  &lt;xacro:agv_wheel side="left" y="${wheel_base/2}" radius="${wheel_radius}"</a:t>
             </a:r>
             <a:br/>
             <a:r>
               <a:t>    width="${wheel_width}"/&gt;</a:t>
-            </a:r>
-            <a:br/>
-            <a:r>
-              <a:t>  </a:t>
-            </a:r>
-            <a:br/>
-            <a:r>
-              <a:t>  </a:t>
-            </a:r>
-            <a:br/>
-            <a:r>
-              <a:t>  &lt;xacro:agv_wheel side="right" y="${-wheel_base/2}" radius="${wheel_radius}"</a:t>
-            </a:r>
-            <a:br/>
-            <a:r>
-              <a:t>    width="${wheel_width}"/&gt;</a:t>
-            </a:r>
-            <a:br/>
-            <a:r>
-              <a:t>  </a:t>
-            </a:r>
-            <a:br/>
-            <a:br/>
-            <a:r>
-              <a:t>  </a:t>
-            </a:r>
-            <a:br/>
-            <a:r>
-              <a:t>  &lt;link name="caster_link"&gt;</a:t>
-            </a:r>
-            <a:br/>
-            <a:r>
-              <a:t>    &lt;visual&gt;</a:t>
-            </a:r>
-            <a:br/>
-            <a:r>
-              <a:t>      &lt;geometry&gt;</a:t>
-            </a:r>
-            <a:br/>
-            <a:r>
-              <a:t>        &lt;sphere radius="0.04"/&gt;</a:t>
-            </a:r>
-            <a:br/>
-            <a:r>
-              <a:t>      &lt;/geometry&gt;</a:t>
             </a:r>
           </a:p>
         </p:txBody>
@@ -9585,7 +9838,7 @@
         </p:nvSpPr>
         <p:spPr>
           <a:xfrm>
-            <a:off x="749808" y="6199632"/>
+            <a:off x="749808" y="6181344"/>
             <a:ext cx="10789920" cy="201168"/>
           </a:xfrm>
           <a:prstGeom prst="rect">
@@ -9611,7 +9864,7 @@
               </a:defRPr>
             </a:pPr>
             <a:r>
-              <a:t>파일 전체 6/10 · 이 슬라이드 다음에 같은 파일의 나머지 줄이 이어집니다.</a:t>
+              <a:t>파일 전체 6/11 · 이 슬라이드 다음에 같은 파일의 나머지 줄이 이어집니다.</a:t>
             </a:r>
           </a:p>
         </p:txBody>
@@ -9668,7 +9921,7 @@
               </a:defRPr>
             </a:pPr>
             <a:r>
-              <a:t>파일을 계속 작성하고 저장한다 (7/10)</a:t>
+              <a:t>파일을 계속 작성하고 저장한다 (7/11)</a:t>
             </a:r>
           </a:p>
         </p:txBody>
@@ -9843,7 +10096,7 @@
               </a:defRPr>
             </a:pPr>
             <a:r>
-              <a:t>현재 단계 9/13    |    현재 폴더 ~/agv_ws    |    현재 터미널</a:t>
+              <a:t>현재 단계 9/14    |    현재 폴더 ~/agv_ws    |    현재 터미널</a:t>
             </a:r>
           </a:p>
         </p:txBody>
@@ -9856,8 +10109,8 @@
         </p:nvSpPr>
         <p:spPr>
           <a:xfrm>
-            <a:off x="658368" y="1682496"/>
-            <a:ext cx="10972800" cy="347472"/>
+            <a:off x="658368" y="1627632"/>
+            <a:ext cx="10972800" cy="256032"/>
           </a:xfrm>
           <a:prstGeom prst="rect">
             <a:avLst/>
@@ -9874,7 +10127,7 @@
               <a:spcAft>
                 <a:spcPts val="0"/>
               </a:spcAft>
-              <a:defRPr sz="1700" b="1">
+              <a:defRPr sz="1500" b="1">
                 <a:solidFill>
                   <a:srgbClr val="122C4E"/>
                 </a:solidFill>
@@ -9895,8 +10148,8 @@
         </p:nvSpPr>
         <p:spPr>
           <a:xfrm>
-            <a:off x="658368" y="2103120"/>
-            <a:ext cx="10972800" cy="493776"/>
+            <a:off x="658368" y="1956816"/>
+            <a:ext cx="10972800" cy="603504"/>
           </a:xfrm>
           <a:prstGeom prst="rect">
             <a:avLst/>
@@ -9940,7 +10193,11 @@
               </a:defRPr>
             </a:pPr>
             <a:r>
-              <a:t>파일 생성/열기: mkdir -p ~/agv_ws/src/agv_description/urdf    &amp;&amp;    nano ~/agv_ws/src/agv_description/urdf/agv.urdf.xacro</a:t>
+              <a:t>파일 생성: mkdir -p ~/agv_ws/src/agv_description/urdf</a:t>
+            </a:r>
+            <a:br/>
+            <a:r>
+              <a:t>파일 열기: nano ~/agv_ws/src/agv_description/urdf/agv.urdf.xacro</a:t>
             </a:r>
           </a:p>
         </p:txBody>
@@ -9953,8 +10210,8 @@
         </p:nvSpPr>
         <p:spPr>
           <a:xfrm>
-            <a:off x="658368" y="2761488"/>
-            <a:ext cx="10972800" cy="3383280"/>
+            <a:off x="658368" y="2706624"/>
+            <a:ext cx="10972800" cy="3364992"/>
           </a:xfrm>
           <a:prstGeom prst="rect">
             <a:avLst/>
@@ -9998,15 +10255,36 @@
               </a:defRPr>
             </a:pPr>
             <a:r>
-              <a:t>      &lt;material name="wheel_gray"/&gt;</a:t>
-            </a:r>
-            <a:br/>
-            <a:r>
-              <a:t>    &lt;/visual&gt;</a:t>
-            </a:r>
-            <a:br/>
-            <a:r>
-              <a:t>    &lt;collision&gt;</a:t>
+              <a:t>  </a:t>
+            </a:r>
+            <a:br/>
+            <a:r>
+              <a:t>  </a:t>
+            </a:r>
+            <a:br/>
+            <a:r>
+              <a:t>  &lt;xacro:agv_wheel side="right" y="${-wheel_base/2}" radius="${wheel_radius}"</a:t>
+            </a:r>
+            <a:br/>
+            <a:r>
+              <a:t>    width="${wheel_width}"/&gt;</a:t>
+            </a:r>
+            <a:br/>
+            <a:r>
+              <a:t>  </a:t>
+            </a:r>
+            <a:br/>
+            <a:br/>
+            <a:r>
+              <a:t>  </a:t>
+            </a:r>
+            <a:br/>
+            <a:r>
+              <a:t>  &lt;link name="caster_link"&gt;</a:t>
+            </a:r>
+            <a:br/>
+            <a:r>
+              <a:t>    &lt;visual&gt;</a:t>
             </a:r>
             <a:br/>
             <a:r>
@@ -10019,38 +10297,6 @@
             <a:br/>
             <a:r>
               <a:t>      &lt;/geometry&gt;</a:t>
-            </a:r>
-            <a:br/>
-            <a:r>
-              <a:t>    &lt;/collision&gt;</a:t>
-            </a:r>
-            <a:br/>
-            <a:r>
-              <a:t>    &lt;inertial&gt;</a:t>
-            </a:r>
-            <a:br/>
-            <a:r>
-              <a:t>      &lt;mass value="0.15"/&gt;</a:t>
-            </a:r>
-            <a:br/>
-            <a:r>
-              <a:t>      &lt;inertia ixx="0.0001" ixy="0" ixz="0" iyy="0.0001" iyz="0" izz="0.0001"/&gt;</a:t>
-            </a:r>
-            <a:br/>
-            <a:r>
-              <a:t>    &lt;/inertial&gt;</a:t>
-            </a:r>
-            <a:br/>
-            <a:r>
-              <a:t>  &lt;/link&gt;</a:t>
-            </a:r>
-            <a:br/>
-            <a:r>
-              <a:t>  </a:t>
-            </a:r>
-            <a:br/>
-            <a:r>
-              <a:t>  </a:t>
             </a:r>
           </a:p>
         </p:txBody>
@@ -10063,7 +10309,7 @@
         </p:nvSpPr>
         <p:spPr>
           <a:xfrm>
-            <a:off x="749808" y="6199632"/>
+            <a:off x="749808" y="6181344"/>
             <a:ext cx="10789920" cy="201168"/>
           </a:xfrm>
           <a:prstGeom prst="rect">
@@ -10089,7 +10335,7 @@
               </a:defRPr>
             </a:pPr>
             <a:r>
-              <a:t>파일 전체 7/10 · 이 슬라이드 다음에 같은 파일의 나머지 줄이 이어집니다.</a:t>
+              <a:t>파일 전체 7/11 · 이 슬라이드 다음에 같은 파일의 나머지 줄이 이어집니다.</a:t>
             </a:r>
           </a:p>
         </p:txBody>
@@ -10146,7 +10392,7 @@
               </a:defRPr>
             </a:pPr>
             <a:r>
-              <a:t>파일을 계속 작성하고 저장한다 (8/10)</a:t>
+              <a:t>파일을 계속 작성하고 저장한다 (8/11)</a:t>
             </a:r>
           </a:p>
         </p:txBody>
@@ -10321,7 +10567,7 @@
               </a:defRPr>
             </a:pPr>
             <a:r>
-              <a:t>현재 단계 10/13    |    현재 폴더 ~/agv_ws    |    현재 터미널</a:t>
+              <a:t>현재 단계 10/14    |    현재 폴더 ~/agv_ws    |    현재 터미널</a:t>
             </a:r>
           </a:p>
         </p:txBody>
@@ -10334,8 +10580,8 @@
         </p:nvSpPr>
         <p:spPr>
           <a:xfrm>
-            <a:off x="658368" y="1682496"/>
-            <a:ext cx="10972800" cy="347472"/>
+            <a:off x="658368" y="1627632"/>
+            <a:ext cx="10972800" cy="256032"/>
           </a:xfrm>
           <a:prstGeom prst="rect">
             <a:avLst/>
@@ -10352,7 +10598,7 @@
               <a:spcAft>
                 <a:spcPts val="0"/>
               </a:spcAft>
-              <a:defRPr sz="1700" b="1">
+              <a:defRPr sz="1500" b="1">
                 <a:solidFill>
                   <a:srgbClr val="122C4E"/>
                 </a:solidFill>
@@ -10373,8 +10619,8 @@
         </p:nvSpPr>
         <p:spPr>
           <a:xfrm>
-            <a:off x="658368" y="2103120"/>
-            <a:ext cx="10972800" cy="493776"/>
+            <a:off x="658368" y="1956816"/>
+            <a:ext cx="10972800" cy="603504"/>
           </a:xfrm>
           <a:prstGeom prst="rect">
             <a:avLst/>
@@ -10418,7 +10664,11 @@
               </a:defRPr>
             </a:pPr>
             <a:r>
-              <a:t>파일 생성/열기: mkdir -p ~/agv_ws/src/agv_description/urdf    &amp;&amp;    nano ~/agv_ws/src/agv_description/urdf/agv.urdf.xacro</a:t>
+              <a:t>파일 생성: mkdir -p ~/agv_ws/src/agv_description/urdf</a:t>
+            </a:r>
+            <a:br/>
+            <a:r>
+              <a:t>파일 열기: nano ~/agv_ws/src/agv_description/urdf/agv.urdf.xacro</a:t>
             </a:r>
           </a:p>
         </p:txBody>
@@ -10431,8 +10681,8 @@
         </p:nvSpPr>
         <p:spPr>
           <a:xfrm>
-            <a:off x="658368" y="2761488"/>
-            <a:ext cx="10972800" cy="3383280"/>
+            <a:off x="658368" y="2706624"/>
+            <a:ext cx="10972800" cy="3364992"/>
           </a:xfrm>
           <a:prstGeom prst="rect">
             <a:avLst/>
@@ -10476,56 +10726,51 @@
               </a:defRPr>
             </a:pPr>
             <a:r>
-              <a:t>  &lt;joint name="caster_joint" type="fixed"&gt;</a:t>
-            </a:r>
-            <a:br/>
-            <a:r>
-              <a:t>    &lt;parent link="base_link"/&gt;</a:t>
-            </a:r>
-            <a:br/>
-            <a:r>
-              <a:t>    &lt;child link="caster_link"/&gt;</a:t>
-            </a:r>
-            <a:br/>
-            <a:r>
-              <a:t>    &lt;origin xyz="-0.24 0 0.04"/&gt;</a:t>
-            </a:r>
-            <a:br/>
-            <a:r>
-              <a:t>  &lt;/joint&gt;</a:t>
-            </a:r>
-            <a:br/>
-            <a:r>
-              <a:t>  </a:t>
-            </a:r>
-            <a:br/>
-            <a:br/>
-            <a:r>
-              <a:t>  </a:t>
-            </a:r>
-            <a:br/>
-            <a:r>
-              <a:t>  &lt;xacro:fixed_sensor name="lidar" parent="base_link" xyz="0.12 0 ${wheel_radius +</a:t>
-            </a:r>
-            <a:br/>
-            <a:r>
-              <a:t>    body_height + 0.04}" rpy="0 0 0" size="0.09 0.09 0.05"/&gt;</a:t>
-            </a:r>
-            <a:br/>
-            <a:r>
-              <a:t>  </a:t>
-            </a:r>
-            <a:br/>
-            <a:r>
-              <a:t>  </a:t>
-            </a:r>
-            <a:br/>
-            <a:r>
-              <a:t>  &lt;xacro:fixed_sensor name="camera" parent="base_link" xyz="0.28 0 ${wheel_radius +</a:t>
-            </a:r>
-            <a:br/>
-            <a:r>
-              <a:t>    body_height + 0.04}" rpy="0 0 0" size="0.05 0.08 0.05"/&gt;</a:t>
+              <a:t>      &lt;material name="wheel_gray"/&gt;</a:t>
+            </a:r>
+            <a:br/>
+            <a:r>
+              <a:t>    &lt;/visual&gt;</a:t>
+            </a:r>
+            <a:br/>
+            <a:r>
+              <a:t>    &lt;collision&gt;</a:t>
+            </a:r>
+            <a:br/>
+            <a:r>
+              <a:t>      &lt;geometry&gt;</a:t>
+            </a:r>
+            <a:br/>
+            <a:r>
+              <a:t>        &lt;sphere radius="0.04"/&gt;</a:t>
+            </a:r>
+            <a:br/>
+            <a:r>
+              <a:t>      &lt;/geometry&gt;</a:t>
+            </a:r>
+            <a:br/>
+            <a:r>
+              <a:t>    &lt;/collision&gt;</a:t>
+            </a:r>
+            <a:br/>
+            <a:r>
+              <a:t>    &lt;inertial&gt;</a:t>
+            </a:r>
+            <a:br/>
+            <a:r>
+              <a:t>      &lt;mass value="0.15"/&gt;</a:t>
+            </a:r>
+            <a:br/>
+            <a:r>
+              <a:t>      &lt;inertia ixx="0.0001" ixy="0" ixz="0" iyy="0.0001" iyz="0" izz="0.0001"/&gt;</a:t>
+            </a:r>
+            <a:br/>
+            <a:r>
+              <a:t>    &lt;/inertial&gt;</a:t>
+            </a:r>
+            <a:br/>
+            <a:r>
+              <a:t>  &lt;/link&gt;</a:t>
             </a:r>
           </a:p>
         </p:txBody>
@@ -10538,7 +10783,7 @@
         </p:nvSpPr>
         <p:spPr>
           <a:xfrm>
-            <a:off x="749808" y="6199632"/>
+            <a:off x="749808" y="6181344"/>
             <a:ext cx="10789920" cy="201168"/>
           </a:xfrm>
           <a:prstGeom prst="rect">
@@ -10564,7 +10809,7 @@
               </a:defRPr>
             </a:pPr>
             <a:r>
-              <a:t>파일 전체 8/10 · 이 슬라이드 다음에 같은 파일의 나머지 줄이 이어집니다.</a:t>
+              <a:t>파일 전체 8/11 · 이 슬라이드 다음에 같은 파일의 나머지 줄이 이어집니다.</a:t>
             </a:r>
           </a:p>
         </p:txBody>
@@ -10621,7 +10866,7 @@
               </a:defRPr>
             </a:pPr>
             <a:r>
-              <a:t>파일을 계속 작성하고 저장한다 (9/10)</a:t>
+              <a:t>파일을 계속 작성하고 저장한다 (9/11)</a:t>
             </a:r>
           </a:p>
         </p:txBody>
@@ -10796,7 +11041,7 @@
               </a:defRPr>
             </a:pPr>
             <a:r>
-              <a:t>현재 단계 11/13    |    현재 폴더 ~/agv_ws    |    현재 터미널</a:t>
+              <a:t>현재 단계 11/14    |    현재 폴더 ~/agv_ws    |    현재 터미널</a:t>
             </a:r>
           </a:p>
         </p:txBody>
@@ -10809,8 +11054,8 @@
         </p:nvSpPr>
         <p:spPr>
           <a:xfrm>
-            <a:off x="658368" y="1682496"/>
-            <a:ext cx="10972800" cy="347472"/>
+            <a:off x="658368" y="1627632"/>
+            <a:ext cx="10972800" cy="256032"/>
           </a:xfrm>
           <a:prstGeom prst="rect">
             <a:avLst/>
@@ -10827,7 +11072,7 @@
               <a:spcAft>
                 <a:spcPts val="0"/>
               </a:spcAft>
-              <a:defRPr sz="1700" b="1">
+              <a:defRPr sz="1500" b="1">
                 <a:solidFill>
                   <a:srgbClr val="122C4E"/>
                 </a:solidFill>
@@ -10848,8 +11093,8 @@
         </p:nvSpPr>
         <p:spPr>
           <a:xfrm>
-            <a:off x="658368" y="2103120"/>
-            <a:ext cx="10972800" cy="493776"/>
+            <a:off x="658368" y="1956816"/>
+            <a:ext cx="10972800" cy="603504"/>
           </a:xfrm>
           <a:prstGeom prst="rect">
             <a:avLst/>
@@ -10893,7 +11138,11 @@
               </a:defRPr>
             </a:pPr>
             <a:r>
-              <a:t>파일 생성/열기: mkdir -p ~/agv_ws/src/agv_description/urdf    &amp;&amp;    nano ~/agv_ws/src/agv_description/urdf/agv.urdf.xacro</a:t>
+              <a:t>파일 생성: mkdir -p ~/agv_ws/src/agv_description/urdf</a:t>
+            </a:r>
+            <a:br/>
+            <a:r>
+              <a:t>파일 열기: nano ~/agv_ws/src/agv_description/urdf/agv.urdf.xacro</a:t>
             </a:r>
           </a:p>
         </p:txBody>
@@ -10906,8 +11155,8 @@
         </p:nvSpPr>
         <p:spPr>
           <a:xfrm>
-            <a:off x="658368" y="2761488"/>
-            <a:ext cx="10972800" cy="3383280"/>
+            <a:off x="658368" y="2706624"/>
+            <a:ext cx="10972800" cy="3364992"/>
           </a:xfrm>
           <a:prstGeom prst="rect">
             <a:avLst/>
@@ -10959,51 +11208,40 @@
             </a:r>
             <a:br/>
             <a:r>
-              <a:t>  &lt;link name="camera_optical_frame"/&gt;</a:t>
+              <a:t>  &lt;joint name="caster_joint" type="fixed"&gt;</a:t>
+            </a:r>
+            <a:br/>
+            <a:r>
+              <a:t>    &lt;parent link="base_link"/&gt;</a:t>
+            </a:r>
+            <a:br/>
+            <a:r>
+              <a:t>    &lt;child link="caster_link"/&gt;</a:t>
+            </a:r>
+            <a:br/>
+            <a:r>
+              <a:t>    &lt;origin xyz="-0.24 0 0.04"/&gt;</a:t>
+            </a:r>
+            <a:br/>
+            <a:r>
+              <a:t>  &lt;/joint&gt;</a:t>
             </a:r>
             <a:br/>
             <a:r>
               <a:t>  </a:t>
             </a:r>
             <a:br/>
+            <a:br/>
             <a:r>
               <a:t>  </a:t>
             </a:r>
             <a:br/>
             <a:r>
-              <a:t>  &lt;joint name="camera_optical_joint" type="fixed"&gt;</a:t>
-            </a:r>
-            <a:br/>
-            <a:r>
-              <a:t>    &lt;parent link="camera_link"/&gt;</a:t>
-            </a:r>
-            <a:br/>
-            <a:r>
-              <a:t>    &lt;child link="camera_optical_frame"/&gt;</a:t>
-            </a:r>
-            <a:br/>
-            <a:r>
-              <a:t>    &lt;origin xyz="0 0 0" rpy="-1.5708 0 -1.5708"/&gt;</a:t>
-            </a:r>
-            <a:br/>
-            <a:r>
-              <a:t>  &lt;/joint&gt;</a:t>
-            </a:r>
-            <a:br/>
-            <a:r>
-              <a:t>  </a:t>
-            </a:r>
-            <a:br/>
-            <a:r>
-              <a:t>  </a:t>
-            </a:r>
-            <a:br/>
-            <a:r>
-              <a:t>  &lt;xacro:fixed_sensor name="imu" parent="base_link" xyz="0 0 ${wheel_radius +</a:t>
-            </a:r>
-            <a:br/>
-            <a:r>
-              <a:t>    body_height + 0.02}" rpy="0 0 0" size="0.03 0.03 0.02"/&gt;</a:t>
+              <a:t>  &lt;xacro:fixed_sensor name="lidar" parent="base_link" xyz="0.12 0 ${wheel_radius +</a:t>
+            </a:r>
+            <a:br/>
+            <a:r>
+              <a:t>    body_height + 0.04}" rpy="0 0 0" size="0.09 0.09 0.05"/&gt;</a:t>
             </a:r>
           </a:p>
         </p:txBody>
@@ -11016,7 +11254,7 @@
         </p:nvSpPr>
         <p:spPr>
           <a:xfrm>
-            <a:off x="749808" y="6199632"/>
+            <a:off x="749808" y="6181344"/>
             <a:ext cx="10789920" cy="201168"/>
           </a:xfrm>
           <a:prstGeom prst="rect">
@@ -11042,7 +11280,7 @@
               </a:defRPr>
             </a:pPr>
             <a:r>
-              <a:t>파일 전체 9/10 · 이 슬라이드 다음에 같은 파일의 나머지 줄이 이어집니다.</a:t>
+              <a:t>파일 전체 9/11 · 이 슬라이드 다음에 같은 파일의 나머지 줄이 이어집니다.</a:t>
             </a:r>
           </a:p>
         </p:txBody>
@@ -11099,7 +11337,7 @@
               </a:defRPr>
             </a:pPr>
             <a:r>
-              <a:t>파일을 계속 작성하고 저장한다 (10/10)</a:t>
+              <a:t>파일을 계속 작성하고 저장한다 (10/11)</a:t>
             </a:r>
           </a:p>
         </p:txBody>
@@ -11274,7 +11512,7 @@
               </a:defRPr>
             </a:pPr>
             <a:r>
-              <a:t>현재 단계 12/13    |    현재 폴더 ~/agv_ws    |    현재 터미널</a:t>
+              <a:t>현재 단계 12/14    |    현재 폴더 ~/agv_ws    |    현재 터미널</a:t>
             </a:r>
           </a:p>
         </p:txBody>
@@ -11287,8 +11525,8 @@
         </p:nvSpPr>
         <p:spPr>
           <a:xfrm>
-            <a:off x="658368" y="1682496"/>
-            <a:ext cx="10972800" cy="347472"/>
+            <a:off x="658368" y="1627632"/>
+            <a:ext cx="10972800" cy="256032"/>
           </a:xfrm>
           <a:prstGeom prst="rect">
             <a:avLst/>
@@ -11305,7 +11543,7 @@
               <a:spcAft>
                 <a:spcPts val="0"/>
               </a:spcAft>
-              <a:defRPr sz="1700" b="1">
+              <a:defRPr sz="1500" b="1">
                 <a:solidFill>
                   <a:srgbClr val="122C4E"/>
                 </a:solidFill>
@@ -11326,8 +11564,8 @@
         </p:nvSpPr>
         <p:spPr>
           <a:xfrm>
-            <a:off x="658368" y="2103120"/>
-            <a:ext cx="10972800" cy="493776"/>
+            <a:off x="658368" y="1956816"/>
+            <a:ext cx="10972800" cy="603504"/>
           </a:xfrm>
           <a:prstGeom prst="rect">
             <a:avLst/>
@@ -11371,7 +11609,11 @@
               </a:defRPr>
             </a:pPr>
             <a:r>
-              <a:t>파일 생성/열기: mkdir -p ~/agv_ws/src/agv_description/urdf    &amp;&amp;    nano ~/agv_ws/src/agv_description/urdf/agv.urdf.xacro</a:t>
+              <a:t>파일 생성: mkdir -p ~/agv_ws/src/agv_description/urdf</a:t>
+            </a:r>
+            <a:br/>
+            <a:r>
+              <a:t>파일 열기: nano ~/agv_ws/src/agv_description/urdf/agv.urdf.xacro</a:t>
             </a:r>
           </a:p>
         </p:txBody>
@@ -11384,8 +11626,8 @@
         </p:nvSpPr>
         <p:spPr>
           <a:xfrm>
-            <a:off x="658368" y="2761488"/>
-            <a:ext cx="10972800" cy="3383280"/>
+            <a:off x="658368" y="2706624"/>
+            <a:ext cx="10972800" cy="3364992"/>
           </a:xfrm>
           <a:prstGeom prst="rect">
             <a:avLst/>
@@ -11432,9 +11674,48 @@
               <a:t>  </a:t>
             </a:r>
             <a:br/>
-            <a:br/>
-            <a:r>
-              <a:t>&lt;/robot&gt;</a:t>
+            <a:r>
+              <a:t>  </a:t>
+            </a:r>
+            <a:br/>
+            <a:r>
+              <a:t>  &lt;xacro:fixed_sensor name="camera" parent="base_link" xyz="0.28 0 ${wheel_radius +</a:t>
+            </a:r>
+            <a:br/>
+            <a:r>
+              <a:t>    body_height + 0.04}" rpy="0 0 0" size="0.05 0.08 0.05"/&gt;</a:t>
+            </a:r>
+            <a:br/>
+            <a:r>
+              <a:t>  </a:t>
+            </a:r>
+            <a:br/>
+            <a:r>
+              <a:t>  </a:t>
+            </a:r>
+            <a:br/>
+            <a:r>
+              <a:t>  &lt;link name="camera_optical_frame"/&gt;</a:t>
+            </a:r>
+            <a:br/>
+            <a:r>
+              <a:t>  </a:t>
+            </a:r>
+            <a:br/>
+            <a:r>
+              <a:t>  </a:t>
+            </a:r>
+            <a:br/>
+            <a:r>
+              <a:t>  &lt;joint name="camera_optical_joint" type="fixed"&gt;</a:t>
+            </a:r>
+            <a:br/>
+            <a:r>
+              <a:t>    &lt;parent link="camera_link"/&gt;</a:t>
+            </a:r>
+            <a:br/>
+            <a:r>
+              <a:t>    &lt;child link="camera_optical_frame"/&gt;</a:t>
             </a:r>
           </a:p>
         </p:txBody>
@@ -11447,7 +11728,7 @@
         </p:nvSpPr>
         <p:spPr>
           <a:xfrm>
-            <a:off x="749808" y="6199632"/>
+            <a:off x="749808" y="6181344"/>
             <a:ext cx="10789920" cy="201168"/>
           </a:xfrm>
           <a:prstGeom prst="rect">
@@ -11473,7 +11754,7 @@
               </a:defRPr>
             </a:pPr>
             <a:r>
-              <a:t>파일 전체 10/10 · 이 슬라이드 다음에 같은 파일의 나머지 줄이 이어집니다.</a:t>
+              <a:t>파일 전체 10/11 · 이 슬라이드 다음에 같은 파일의 나머지 줄이 이어집니다.</a:t>
             </a:r>
           </a:p>
         </p:txBody>
@@ -11530,7 +11811,7 @@
               </a:defRPr>
             </a:pPr>
             <a:r>
-              <a:t>파일을 새로 만들고 저장한다 (1/5)</a:t>
+              <a:t>파일을 계속 작성하고 저장한다 (11/11)</a:t>
             </a:r>
           </a:p>
         </p:txBody>
@@ -11569,7 +11850,7 @@
               </a:defRPr>
             </a:pPr>
             <a:r>
-              <a:t>~/agv_ws/src/agv_description/urdf/common.xacro</a:t>
+              <a:t>~/agv_ws/src/agv_description/urdf/agv.urdf.xacro</a:t>
             </a:r>
           </a:p>
         </p:txBody>
@@ -11705,7 +11986,7 @@
               </a:defRPr>
             </a:pPr>
             <a:r>
-              <a:t>현재 단계 13/18    |    현재 폴더 ~/agv_ws    |    현재 터미널</a:t>
+              <a:t>현재 단계 13/14    |    현재 폴더 ~/agv_ws    |    현재 터미널</a:t>
             </a:r>
           </a:p>
         </p:txBody>
@@ -11718,8 +11999,8 @@
         </p:nvSpPr>
         <p:spPr>
           <a:xfrm>
-            <a:off x="658368" y="1682496"/>
-            <a:ext cx="10972800" cy="347472"/>
+            <a:off x="658368" y="1627632"/>
+            <a:ext cx="10972800" cy="256032"/>
           </a:xfrm>
           <a:prstGeom prst="rect">
             <a:avLst/>
@@ -11736,7 +12017,7 @@
               <a:spcAft>
                 <a:spcPts val="0"/>
               </a:spcAft>
-              <a:defRPr sz="1700" b="1">
+              <a:defRPr sz="1500" b="1">
                 <a:solidFill>
                   <a:srgbClr val="122C4E"/>
                 </a:solidFill>
@@ -11757,8 +12038,8 @@
         </p:nvSpPr>
         <p:spPr>
           <a:xfrm>
-            <a:off x="658368" y="2103120"/>
-            <a:ext cx="10972800" cy="493776"/>
+            <a:off x="658368" y="1956816"/>
+            <a:ext cx="10972800" cy="603504"/>
           </a:xfrm>
           <a:prstGeom prst="rect">
             <a:avLst/>
@@ -11802,7 +12083,11 @@
               </a:defRPr>
             </a:pPr>
             <a:r>
-              <a:t>파일 생성/열기: mkdir -p ~/agv_ws/src/agv_description/urdf    &amp;&amp;    nano ~/agv_ws/src/agv_description/urdf/common.xacro</a:t>
+              <a:t>파일 생성: mkdir -p ~/agv_ws/src/agv_description/urdf</a:t>
+            </a:r>
+            <a:br/>
+            <a:r>
+              <a:t>파일 열기: nano ~/agv_ws/src/agv_description/urdf/agv.urdf.xacro</a:t>
             </a:r>
           </a:p>
         </p:txBody>
@@ -11815,8 +12100,8 @@
         </p:nvSpPr>
         <p:spPr>
           <a:xfrm>
-            <a:off x="658368" y="2761488"/>
-            <a:ext cx="10972800" cy="3383280"/>
+            <a:off x="658368" y="2706624"/>
+            <a:ext cx="10972800" cy="3364992"/>
           </a:xfrm>
           <a:prstGeom prst="rect">
             <a:avLst/>
@@ -11860,11 +12145,11 @@
               </a:defRPr>
             </a:pPr>
             <a:r>
-              <a:t>&lt;?xml version="1.0" ?&gt;</a:t>
-            </a:r>
-            <a:br/>
-            <a:r>
-              <a:t>&lt;robot xmlns:xacro="http://www.ros.org/wiki/xacro"&gt;</a:t>
+              <a:t>    &lt;origin xyz="0 0 0" rpy="-1.5708 0 -1.5708"/&gt;</a:t>
+            </a:r>
+            <a:br/>
+            <a:r>
+              <a:t>  &lt;/joint&gt;</a:t>
             </a:r>
             <a:br/>
             <a:r>
@@ -11876,43 +12161,20 @@
             </a:r>
             <a:br/>
             <a:r>
-              <a:t>  &lt;material name="agv_blue"&gt;</a:t>
-            </a:r>
-            <a:br/>
-            <a:r>
-              <a:t>    &lt;color rgba="0.10 0.35 0.80 1.0"/&gt;</a:t>
-            </a:r>
-            <a:br/>
-            <a:r>
-              <a:t>  &lt;/material&gt;</a:t>
+              <a:t>  &lt;xacro:fixed_sensor name="imu" parent="base_link" xyz="0 0 ${wheel_radius +</a:t>
+            </a:r>
+            <a:br/>
+            <a:r>
+              <a:t>    body_height + 0.02}" rpy="0 0 0" size="0.03 0.03 0.02"/&gt;</a:t>
             </a:r>
             <a:br/>
             <a:r>
               <a:t>  </a:t>
             </a:r>
             <a:br/>
-            <a:r>
-              <a:t>  </a:t>
-            </a:r>
-            <a:br/>
-            <a:r>
-              <a:t>  &lt;material name="sensor_black"&gt;</a:t>
-            </a:r>
-            <a:br/>
-            <a:r>
-              <a:t>    &lt;color rgba="0.06 0.06 0.06 1.0"/&gt;</a:t>
-            </a:r>
-            <a:br/>
-            <a:r>
-              <a:t>  &lt;/material&gt;</a:t>
-            </a:r>
-            <a:br/>
-            <a:r>
-              <a:t>  </a:t>
-            </a:r>
-            <a:br/>
-            <a:r>
-              <a:t>  </a:t>
+            <a:br/>
+            <a:r>
+              <a:t>&lt;/robot&gt;</a:t>
             </a:r>
           </a:p>
         </p:txBody>
@@ -11925,7 +12187,7 @@
         </p:nvSpPr>
         <p:spPr>
           <a:xfrm>
-            <a:off x="749808" y="6199632"/>
+            <a:off x="749808" y="6181344"/>
             <a:ext cx="10789920" cy="201168"/>
           </a:xfrm>
           <a:prstGeom prst="rect">
@@ -11951,7 +12213,7 @@
               </a:defRPr>
             </a:pPr>
             <a:r>
-              <a:t>파일 전체 1/5 · 이 슬라이드 다음에 같은 파일의 나머지 줄이 이어집니다.</a:t>
+              <a:t>파일 전체 11/11 · 이 슬라이드 다음에 같은 파일의 나머지 줄이 이어집니다.</a:t>
             </a:r>
           </a:p>
         </p:txBody>
@@ -12469,7 +12731,7 @@
               </a:defRPr>
             </a:pPr>
             <a:r>
-              <a:t>파일을 계속 작성하고 저장한다 (2/5)</a:t>
+              <a:t>파일을 새로 만들고 저장한다 (1/6)</a:t>
             </a:r>
           </a:p>
         </p:txBody>
@@ -12644,7 +12906,7 @@
               </a:defRPr>
             </a:pPr>
             <a:r>
-              <a:t>현재 단계 14/18    |    현재 폴더 ~/agv_ws    |    현재 터미널</a:t>
+              <a:t>현재 단계 14/20    |    현재 폴더 ~/agv_ws    |    현재 터미널</a:t>
             </a:r>
           </a:p>
         </p:txBody>
@@ -12657,8 +12919,8 @@
         </p:nvSpPr>
         <p:spPr>
           <a:xfrm>
-            <a:off x="658368" y="1682496"/>
-            <a:ext cx="10972800" cy="347472"/>
+            <a:off x="658368" y="1627632"/>
+            <a:ext cx="10972800" cy="256032"/>
           </a:xfrm>
           <a:prstGeom prst="rect">
             <a:avLst/>
@@ -12675,7 +12937,7 @@
               <a:spcAft>
                 <a:spcPts val="0"/>
               </a:spcAft>
-              <a:defRPr sz="1700" b="1">
+              <a:defRPr sz="1500" b="1">
                 <a:solidFill>
                   <a:srgbClr val="122C4E"/>
                 </a:solidFill>
@@ -12696,8 +12958,8 @@
         </p:nvSpPr>
         <p:spPr>
           <a:xfrm>
-            <a:off x="658368" y="2103120"/>
-            <a:ext cx="10972800" cy="493776"/>
+            <a:off x="658368" y="1956816"/>
+            <a:ext cx="10972800" cy="603504"/>
           </a:xfrm>
           <a:prstGeom prst="rect">
             <a:avLst/>
@@ -12741,7 +13003,11 @@
               </a:defRPr>
             </a:pPr>
             <a:r>
-              <a:t>파일 생성/열기: mkdir -p ~/agv_ws/src/agv_description/urdf    &amp;&amp;    nano ~/agv_ws/src/agv_description/urdf/common.xacro</a:t>
+              <a:t>파일 생성: mkdir -p ~/agv_ws/src/agv_description/urdf</a:t>
+            </a:r>
+            <a:br/>
+            <a:r>
+              <a:t>파일 열기: nano ~/agv_ws/src/agv_description/urdf/common.xacro</a:t>
             </a:r>
           </a:p>
         </p:txBody>
@@ -12754,8 +13020,8 @@
         </p:nvSpPr>
         <p:spPr>
           <a:xfrm>
-            <a:off x="658368" y="2761488"/>
-            <a:ext cx="10972800" cy="3383280"/>
+            <a:off x="658368" y="2706624"/>
+            <a:ext cx="10972800" cy="3364992"/>
           </a:xfrm>
           <a:prstGeom prst="rect">
             <a:avLst/>
@@ -12799,11 +13065,27 @@
               </a:defRPr>
             </a:pPr>
             <a:r>
-              <a:t>  &lt;material name="wheel_gray"&gt;</a:t>
-            </a:r>
-            <a:br/>
-            <a:r>
-              <a:t>    &lt;color rgba="0.15 0.15 0.15 1.0"/&gt;</a:t>
+              <a:t>&lt;?xml version="1.0" ?&gt;</a:t>
+            </a:r>
+            <a:br/>
+            <a:r>
+              <a:t>&lt;robot xmlns:xacro="http://www.ros.org/wiki/xacro"&gt;</a:t>
+            </a:r>
+            <a:br/>
+            <a:r>
+              <a:t>  </a:t>
+            </a:r>
+            <a:br/>
+            <a:r>
+              <a:t>  </a:t>
+            </a:r>
+            <a:br/>
+            <a:r>
+              <a:t>  &lt;material name="agv_blue"&gt;</a:t>
+            </a:r>
+            <a:br/>
+            <a:r>
+              <a:t>    &lt;color rgba="0.10 0.35 0.80 1.0"/&gt;</a:t>
             </a:r>
             <a:br/>
             <a:r>
@@ -12814,41 +13096,20 @@
               <a:t>  </a:t>
             </a:r>
             <a:br/>
-            <a:br/>
             <a:r>
               <a:t>  </a:t>
             </a:r>
             <a:br/>
             <a:r>
-              <a:t>  &lt;xacro:macro name="box_inertia" params="mass x y z"&gt;</a:t>
-            </a:r>
-            <a:br/>
-            <a:r>
-              <a:t>    </a:t>
-            </a:r>
-            <a:br/>
-            <a:r>
-              <a:t>    </a:t>
-            </a:r>
-            <a:br/>
-            <a:r>
-              <a:t>    &lt;inertial&gt;</a:t>
-            </a:r>
-            <a:br/>
-            <a:r>
-              <a:t>      </a:t>
-            </a:r>
-            <a:br/>
-            <a:r>
-              <a:t>      </a:t>
-            </a:r>
-            <a:br/>
-            <a:r>
-              <a:t>      &lt;mass value="${mass}"/&gt;</a:t>
-            </a:r>
-            <a:br/>
-            <a:r>
-              <a:t>      </a:t>
+              <a:t>  &lt;material name="sensor_black"&gt;</a:t>
+            </a:r>
+            <a:br/>
+            <a:r>
+              <a:t>    &lt;color rgba="0.06 0.06 0.06 1.0"/&gt;</a:t>
+            </a:r>
+            <a:br/>
+            <a:r>
+              <a:t>  &lt;/material&gt;</a:t>
             </a:r>
           </a:p>
         </p:txBody>
@@ -12861,7 +13122,7 @@
         </p:nvSpPr>
         <p:spPr>
           <a:xfrm>
-            <a:off x="749808" y="6199632"/>
+            <a:off x="749808" y="6181344"/>
             <a:ext cx="10789920" cy="201168"/>
           </a:xfrm>
           <a:prstGeom prst="rect">
@@ -12887,7 +13148,7 @@
               </a:defRPr>
             </a:pPr>
             <a:r>
-              <a:t>파일 전체 2/5 · 이 슬라이드 다음에 같은 파일의 나머지 줄이 이어집니다.</a:t>
+              <a:t>파일 전체 1/6 · 이 슬라이드 다음에 같은 파일의 나머지 줄이 이어집니다.</a:t>
             </a:r>
           </a:p>
         </p:txBody>
@@ -12944,7 +13205,7 @@
               </a:defRPr>
             </a:pPr>
             <a:r>
-              <a:t>파일을 계속 작성하고 저장한다 (3/5)</a:t>
+              <a:t>파일을 계속 작성하고 저장한다 (2/6)</a:t>
             </a:r>
           </a:p>
         </p:txBody>
@@ -13119,7 +13380,7 @@
               </a:defRPr>
             </a:pPr>
             <a:r>
-              <a:t>현재 단계 15/18    |    현재 폴더 ~/agv_ws    |    현재 터미널</a:t>
+              <a:t>현재 단계 15/20    |    현재 폴더 ~/agv_ws    |    현재 터미널</a:t>
             </a:r>
           </a:p>
         </p:txBody>
@@ -13132,8 +13393,8 @@
         </p:nvSpPr>
         <p:spPr>
           <a:xfrm>
-            <a:off x="658368" y="1682496"/>
-            <a:ext cx="10972800" cy="347472"/>
+            <a:off x="658368" y="1627632"/>
+            <a:ext cx="10972800" cy="256032"/>
           </a:xfrm>
           <a:prstGeom prst="rect">
             <a:avLst/>
@@ -13150,7 +13411,7 @@
               <a:spcAft>
                 <a:spcPts val="0"/>
               </a:spcAft>
-              <a:defRPr sz="1700" b="1">
+              <a:defRPr sz="1500" b="1">
                 <a:solidFill>
                   <a:srgbClr val="122C4E"/>
                 </a:solidFill>
@@ -13171,8 +13432,8 @@
         </p:nvSpPr>
         <p:spPr>
           <a:xfrm>
-            <a:off x="658368" y="2103120"/>
-            <a:ext cx="10972800" cy="493776"/>
+            <a:off x="658368" y="1956816"/>
+            <a:ext cx="10972800" cy="603504"/>
           </a:xfrm>
           <a:prstGeom prst="rect">
             <a:avLst/>
@@ -13216,7 +13477,11 @@
               </a:defRPr>
             </a:pPr>
             <a:r>
-              <a:t>파일 생성/열기: mkdir -p ~/agv_ws/src/agv_description/urdf    &amp;&amp;    nano ~/agv_ws/src/agv_description/urdf/common.xacro</a:t>
+              <a:t>파일 생성: mkdir -p ~/agv_ws/src/agv_description/urdf</a:t>
+            </a:r>
+            <a:br/>
+            <a:r>
+              <a:t>파일 열기: nano ~/agv_ws/src/agv_description/urdf/common.xacro</a:t>
             </a:r>
           </a:p>
         </p:txBody>
@@ -13229,8 +13494,8 @@
         </p:nvSpPr>
         <p:spPr>
           <a:xfrm>
-            <a:off x="658368" y="2761488"/>
-            <a:ext cx="10972800" cy="3383280"/>
+            <a:off x="658368" y="2706624"/>
+            <a:ext cx="10972800" cy="3364992"/>
           </a:xfrm>
           <a:prstGeom prst="rect">
             <a:avLst/>
@@ -13274,31 +13539,36 @@
               </a:defRPr>
             </a:pPr>
             <a:r>
-              <a:t>      </a:t>
-            </a:r>
-            <a:br/>
-            <a:r>
-              <a:t>      &lt;origin xyz="0 0 0" rpy="0 0 0"/&gt;</a:t>
-            </a:r>
-            <a:br/>
-            <a:r>
-              <a:t>      </a:t>
-            </a:r>
-            <a:br/>
-            <a:r>
-              <a:t>      </a:t>
-            </a:r>
-            <a:br/>
-            <a:r>
-              <a:t>      &lt;inertia ixx="${mass * (y*y + z*z) / 12}" ixy="0" ixz="0" iyy="${mass * (x*x +</a:t>
-            </a:r>
-            <a:br/>
-            <a:r>
-              <a:t>        z*z) / 12}" iyz="0" izz="${mass * (x*x + y*y) / 12}"/&gt;</a:t>
-            </a:r>
-            <a:br/>
-            <a:r>
-              <a:t>      </a:t>
+              <a:t>  </a:t>
+            </a:r>
+            <a:br/>
+            <a:r>
+              <a:t>  </a:t>
+            </a:r>
+            <a:br/>
+            <a:r>
+              <a:t>  &lt;material name="wheel_gray"&gt;</a:t>
+            </a:r>
+            <a:br/>
+            <a:r>
+              <a:t>    &lt;color rgba="0.15 0.15 0.15 1.0"/&gt;</a:t>
+            </a:r>
+            <a:br/>
+            <a:r>
+              <a:t>  &lt;/material&gt;</a:t>
+            </a:r>
+            <a:br/>
+            <a:r>
+              <a:t>  </a:t>
+            </a:r>
+            <a:br/>
+            <a:br/>
+            <a:r>
+              <a:t>  </a:t>
+            </a:r>
+            <a:br/>
+            <a:r>
+              <a:t>  &lt;xacro:macro name="box_inertia" params="mass x y z"&gt;</a:t>
             </a:r>
             <a:br/>
             <a:r>
@@ -13306,25 +13576,12 @@
             </a:r>
             <a:br/>
             <a:r>
-              <a:t>    &lt;/inertial&gt;</a:t>
-            </a:r>
-            <a:br/>
-            <a:r>
               <a:t>    </a:t>
             </a:r>
             <a:br/>
             <a:r>
-              <a:t>  </a:t>
-            </a:r>
-            <a:br/>
-            <a:r>
-              <a:t>  &lt;/xacro:macro&gt;</a:t>
-            </a:r>
-            <a:br/>
-            <a:r>
-              <a:t>  </a:t>
-            </a:r>
-            <a:br/>
+              <a:t>    &lt;inertial&gt;</a:t>
+            </a:r>
           </a:p>
         </p:txBody>
       </p:sp>
@@ -13336,7 +13593,7 @@
         </p:nvSpPr>
         <p:spPr>
           <a:xfrm>
-            <a:off x="749808" y="6199632"/>
+            <a:off x="749808" y="6181344"/>
             <a:ext cx="10789920" cy="201168"/>
           </a:xfrm>
           <a:prstGeom prst="rect">
@@ -13362,7 +13619,7 @@
               </a:defRPr>
             </a:pPr>
             <a:r>
-              <a:t>파일 전체 3/5 · 이 슬라이드 다음에 같은 파일의 나머지 줄이 이어집니다.</a:t>
+              <a:t>파일 전체 2/6 · 이 슬라이드 다음에 같은 파일의 나머지 줄이 이어집니다.</a:t>
             </a:r>
           </a:p>
         </p:txBody>
@@ -13419,7 +13676,7 @@
               </a:defRPr>
             </a:pPr>
             <a:r>
-              <a:t>파일을 계속 작성하고 저장한다 (4/5)</a:t>
+              <a:t>파일을 계속 작성하고 저장한다 (3/6)</a:t>
             </a:r>
           </a:p>
         </p:txBody>
@@ -13594,7 +13851,7 @@
               </a:defRPr>
             </a:pPr>
             <a:r>
-              <a:t>현재 단계 16/18    |    현재 폴더 ~/agv_ws    |    현재 터미널</a:t>
+              <a:t>현재 단계 16/20    |    현재 폴더 ~/agv_ws    |    현재 터미널</a:t>
             </a:r>
           </a:p>
         </p:txBody>
@@ -13607,8 +13864,8 @@
         </p:nvSpPr>
         <p:spPr>
           <a:xfrm>
-            <a:off x="658368" y="1682496"/>
-            <a:ext cx="10972800" cy="347472"/>
+            <a:off x="658368" y="1627632"/>
+            <a:ext cx="10972800" cy="256032"/>
           </a:xfrm>
           <a:prstGeom prst="rect">
             <a:avLst/>
@@ -13625,7 +13882,7 @@
               <a:spcAft>
                 <a:spcPts val="0"/>
               </a:spcAft>
-              <a:defRPr sz="1700" b="1">
+              <a:defRPr sz="1500" b="1">
                 <a:solidFill>
                   <a:srgbClr val="122C4E"/>
                 </a:solidFill>
@@ -13646,8 +13903,8 @@
         </p:nvSpPr>
         <p:spPr>
           <a:xfrm>
-            <a:off x="658368" y="2103120"/>
-            <a:ext cx="10972800" cy="493776"/>
+            <a:off x="658368" y="1956816"/>
+            <a:ext cx="10972800" cy="603504"/>
           </a:xfrm>
           <a:prstGeom prst="rect">
             <a:avLst/>
@@ -13691,7 +13948,11 @@
               </a:defRPr>
             </a:pPr>
             <a:r>
-              <a:t>파일 생성/열기: mkdir -p ~/agv_ws/src/agv_description/urdf    &amp;&amp;    nano ~/agv_ws/src/agv_description/urdf/common.xacro</a:t>
+              <a:t>파일 생성: mkdir -p ~/agv_ws/src/agv_description/urdf</a:t>
+            </a:r>
+            <a:br/>
+            <a:r>
+              <a:t>파일 열기: nano ~/agv_ws/src/agv_description/urdf/common.xacro</a:t>
             </a:r>
           </a:p>
         </p:txBody>
@@ -13704,8 +13965,8 @@
         </p:nvSpPr>
         <p:spPr>
           <a:xfrm>
-            <a:off x="658368" y="2761488"/>
-            <a:ext cx="10972800" cy="3383280"/>
+            <a:off x="658368" y="2706624"/>
+            <a:ext cx="10972800" cy="3364992"/>
           </a:xfrm>
           <a:prstGeom prst="rect">
             <a:avLst/>
@@ -13749,59 +14010,51 @@
               </a:defRPr>
             </a:pPr>
             <a:r>
-              <a:t>  </a:t>
-            </a:r>
-            <a:br/>
-            <a:r>
-              <a:t>  &lt;xacro:macro name="cylinder_inertia" params="mass radius length"&gt;</a:t>
+              <a:t>      </a:t>
+            </a:r>
+            <a:br/>
+            <a:r>
+              <a:t>      </a:t>
+            </a:r>
+            <a:br/>
+            <a:r>
+              <a:t>      &lt;mass value="${mass}"/&gt;</a:t>
+            </a:r>
+            <a:br/>
+            <a:r>
+              <a:t>      </a:t>
+            </a:r>
+            <a:br/>
+            <a:r>
+              <a:t>      </a:t>
+            </a:r>
+            <a:br/>
+            <a:r>
+              <a:t>      &lt;origin xyz="0 0 0" rpy="0 0 0"/&gt;</a:t>
+            </a:r>
+            <a:br/>
+            <a:r>
+              <a:t>      </a:t>
+            </a:r>
+            <a:br/>
+            <a:r>
+              <a:t>      </a:t>
+            </a:r>
+            <a:br/>
+            <a:r>
+              <a:t>      &lt;inertia ixx="${mass * (y*y + z*z) / 12}" ixy="0" ixz="0" iyy="${mass * (x*x +</a:t>
+            </a:r>
+            <a:br/>
+            <a:r>
+              <a:t>        z*z) / 12}" iyz="0" izz="${mass * (x*x + y*y) / 12}"/&gt;</a:t>
+            </a:r>
+            <a:br/>
+            <a:r>
+              <a:t>      </a:t>
             </a:r>
             <a:br/>
             <a:r>
               <a:t>    </a:t>
-            </a:r>
-            <a:br/>
-            <a:r>
-              <a:t>    </a:t>
-            </a:r>
-            <a:br/>
-            <a:r>
-              <a:t>    &lt;inertial&gt;</a:t>
-            </a:r>
-            <a:br/>
-            <a:r>
-              <a:t>      </a:t>
-            </a:r>
-            <a:br/>
-            <a:r>
-              <a:t>      </a:t>
-            </a:r>
-            <a:br/>
-            <a:r>
-              <a:t>      &lt;mass value="${mass}"/&gt;</a:t>
-            </a:r>
-            <a:br/>
-            <a:r>
-              <a:t>      </a:t>
-            </a:r>
-            <a:br/>
-            <a:r>
-              <a:t>      </a:t>
-            </a:r>
-            <a:br/>
-            <a:r>
-              <a:t>      &lt;origin xyz="0 0 0" rpy="0 0 0"/&gt;</a:t>
-            </a:r>
-            <a:br/>
-            <a:r>
-              <a:t>      </a:t>
-            </a:r>
-            <a:br/>
-            <a:r>
-              <a:t>      </a:t>
-            </a:r>
-            <a:br/>
-            <a:r>
-              <a:t>      &lt;inertia ixx="${mass * (3*radius*radius + length*length) / 12}" ixy="0" ixz="0"</a:t>
             </a:r>
           </a:p>
         </p:txBody>
@@ -13814,7 +14067,7 @@
         </p:nvSpPr>
         <p:spPr>
           <a:xfrm>
-            <a:off x="749808" y="6199632"/>
+            <a:off x="749808" y="6181344"/>
             <a:ext cx="10789920" cy="201168"/>
           </a:xfrm>
           <a:prstGeom prst="rect">
@@ -13840,7 +14093,7 @@
               </a:defRPr>
             </a:pPr>
             <a:r>
-              <a:t>파일 전체 4/5 · 이 슬라이드 다음에 같은 파일의 나머지 줄이 이어집니다.</a:t>
+              <a:t>파일 전체 3/6 · 이 슬라이드 다음에 같은 파일의 나머지 줄이 이어집니다.</a:t>
             </a:r>
           </a:p>
         </p:txBody>
@@ -13897,7 +14150,7 @@
               </a:defRPr>
             </a:pPr>
             <a:r>
-              <a:t>파일을 계속 작성하고 저장한다 (5/5)</a:t>
+              <a:t>파일을 계속 작성하고 저장한다 (4/6)</a:t>
             </a:r>
           </a:p>
         </p:txBody>
@@ -14072,7 +14325,7 @@
               </a:defRPr>
             </a:pPr>
             <a:r>
-              <a:t>현재 단계 17/18    |    현재 폴더 ~/agv_ws    |    현재 터미널</a:t>
+              <a:t>현재 단계 17/20    |    현재 폴더 ~/agv_ws    |    현재 터미널</a:t>
             </a:r>
           </a:p>
         </p:txBody>
@@ -14085,8 +14338,8 @@
         </p:nvSpPr>
         <p:spPr>
           <a:xfrm>
-            <a:off x="658368" y="1682496"/>
-            <a:ext cx="10972800" cy="347472"/>
+            <a:off x="658368" y="1627632"/>
+            <a:ext cx="10972800" cy="256032"/>
           </a:xfrm>
           <a:prstGeom prst="rect">
             <a:avLst/>
@@ -14103,7 +14356,7 @@
               <a:spcAft>
                 <a:spcPts val="0"/>
               </a:spcAft>
-              <a:defRPr sz="1700" b="1">
+              <a:defRPr sz="1500" b="1">
                 <a:solidFill>
                   <a:srgbClr val="122C4E"/>
                 </a:solidFill>
@@ -14124,8 +14377,8 @@
         </p:nvSpPr>
         <p:spPr>
           <a:xfrm>
-            <a:off x="658368" y="2103120"/>
-            <a:ext cx="10972800" cy="493776"/>
+            <a:off x="658368" y="1956816"/>
+            <a:ext cx="10972800" cy="603504"/>
           </a:xfrm>
           <a:prstGeom prst="rect">
             <a:avLst/>
@@ -14169,7 +14422,11 @@
               </a:defRPr>
             </a:pPr>
             <a:r>
-              <a:t>파일 생성/열기: mkdir -p ~/agv_ws/src/agv_description/urdf    &amp;&amp;    nano ~/agv_ws/src/agv_description/urdf/common.xacro</a:t>
+              <a:t>파일 생성: mkdir -p ~/agv_ws/src/agv_description/urdf</a:t>
+            </a:r>
+            <a:br/>
+            <a:r>
+              <a:t>파일 열기: nano ~/agv_ws/src/agv_description/urdf/common.xacro</a:t>
             </a:r>
           </a:p>
         </p:txBody>
@@ -14182,8 +14439,8 @@
         </p:nvSpPr>
         <p:spPr>
           <a:xfrm>
-            <a:off x="658368" y="2761488"/>
-            <a:ext cx="10972800" cy="3383280"/>
+            <a:off x="658368" y="2706624"/>
+            <a:ext cx="10972800" cy="3364992"/>
           </a:xfrm>
           <a:prstGeom prst="rect">
             <a:avLst/>
@@ -14227,44 +14484,48 @@
               </a:defRPr>
             </a:pPr>
             <a:r>
-              <a:t>        iyy="${mass * (3*radius*radius + length*length) / 12}" iyz="0" izz="${mass *</a:t>
-            </a:r>
-            <a:br/>
-            <a:r>
-              <a:t>        radius*radius / 2}"/&gt;</a:t>
+              <a:t>    &lt;/inertial&gt;</a:t>
+            </a:r>
+            <a:br/>
+            <a:r>
+              <a:t>    </a:t>
+            </a:r>
+            <a:br/>
+            <a:r>
+              <a:t>  </a:t>
+            </a:r>
+            <a:br/>
+            <a:r>
+              <a:t>  &lt;/xacro:macro&gt;</a:t>
+            </a:r>
+            <a:br/>
+            <a:r>
+              <a:t>  </a:t>
+            </a:r>
+            <a:br/>
+            <a:br/>
+            <a:r>
+              <a:t>  </a:t>
+            </a:r>
+            <a:br/>
+            <a:r>
+              <a:t>  &lt;xacro:macro name="cylinder_inertia" params="mass radius length"&gt;</a:t>
+            </a:r>
+            <a:br/>
+            <a:r>
+              <a:t>    </a:t>
+            </a:r>
+            <a:br/>
+            <a:r>
+              <a:t>    </a:t>
+            </a:r>
+            <a:br/>
+            <a:r>
+              <a:t>    &lt;inertial&gt;</a:t>
             </a:r>
             <a:br/>
             <a:r>
               <a:t>      </a:t>
-            </a:r>
-            <a:br/>
-            <a:r>
-              <a:t>    </a:t>
-            </a:r>
-            <a:br/>
-            <a:r>
-              <a:t>    &lt;/inertial&gt;</a:t>
-            </a:r>
-            <a:br/>
-            <a:r>
-              <a:t>    </a:t>
-            </a:r>
-            <a:br/>
-            <a:r>
-              <a:t>  </a:t>
-            </a:r>
-            <a:br/>
-            <a:r>
-              <a:t>  &lt;/xacro:macro&gt;</a:t>
-            </a:r>
-            <a:br/>
-            <a:r>
-              <a:t>  </a:t>
-            </a:r>
-            <a:br/>
-            <a:br/>
-            <a:r>
-              <a:t>&lt;/robot&gt;</a:t>
             </a:r>
           </a:p>
         </p:txBody>
@@ -14277,7 +14538,7 @@
         </p:nvSpPr>
         <p:spPr>
           <a:xfrm>
-            <a:off x="749808" y="6199632"/>
+            <a:off x="749808" y="6181344"/>
             <a:ext cx="10789920" cy="201168"/>
           </a:xfrm>
           <a:prstGeom prst="rect">
@@ -14303,7 +14564,7 @@
               </a:defRPr>
             </a:pPr>
             <a:r>
-              <a:t>파일 전체 5/5 · 이 슬라이드 다음에 같은 파일의 나머지 줄이 이어집니다.</a:t>
+              <a:t>파일 전체 4/6 · 이 슬라이드 다음에 같은 파일의 나머지 줄이 이어집니다.</a:t>
             </a:r>
           </a:p>
         </p:txBody>
@@ -14360,7 +14621,7 @@
               </a:defRPr>
             </a:pPr>
             <a:r>
-              <a:t>파일을 새로 만들고 저장한다 (1/4)</a:t>
+              <a:t>파일을 계속 작성하고 저장한다 (5/6)</a:t>
             </a:r>
           </a:p>
         </p:txBody>
@@ -14399,7 +14660,7 @@
               </a:defRPr>
             </a:pPr>
             <a:r>
-              <a:t>~/agv_ws/src/agv_description/urdf/wheels.xacro</a:t>
+              <a:t>~/agv_ws/src/agv_description/urdf/common.xacro</a:t>
             </a:r>
           </a:p>
         </p:txBody>
@@ -14535,7 +14796,7 @@
               </a:defRPr>
             </a:pPr>
             <a:r>
-              <a:t>현재 단계 18/22    |    현재 폴더 ~/agv_ws    |    현재 터미널</a:t>
+              <a:t>현재 단계 18/20    |    현재 폴더 ~/agv_ws    |    현재 터미널</a:t>
             </a:r>
           </a:p>
         </p:txBody>
@@ -14548,8 +14809,8 @@
         </p:nvSpPr>
         <p:spPr>
           <a:xfrm>
-            <a:off x="658368" y="1682496"/>
-            <a:ext cx="10972800" cy="347472"/>
+            <a:off x="658368" y="1627632"/>
+            <a:ext cx="10972800" cy="256032"/>
           </a:xfrm>
           <a:prstGeom prst="rect">
             <a:avLst/>
@@ -14566,7 +14827,7 @@
               <a:spcAft>
                 <a:spcPts val="0"/>
               </a:spcAft>
-              <a:defRPr sz="1700" b="1">
+              <a:defRPr sz="1500" b="1">
                 <a:solidFill>
                   <a:srgbClr val="122C4E"/>
                 </a:solidFill>
@@ -14587,8 +14848,8 @@
         </p:nvSpPr>
         <p:spPr>
           <a:xfrm>
-            <a:off x="658368" y="2103120"/>
-            <a:ext cx="10972800" cy="493776"/>
+            <a:off x="658368" y="1956816"/>
+            <a:ext cx="10972800" cy="603504"/>
           </a:xfrm>
           <a:prstGeom prst="rect">
             <a:avLst/>
@@ -14632,7 +14893,11 @@
               </a:defRPr>
             </a:pPr>
             <a:r>
-              <a:t>파일 생성/열기: mkdir -p ~/agv_ws/src/agv_description/urdf    &amp;&amp;    nano ~/agv_ws/src/agv_description/urdf/wheels.xacro</a:t>
+              <a:t>파일 생성: mkdir -p ~/agv_ws/src/agv_description/urdf</a:t>
+            </a:r>
+            <a:br/>
+            <a:r>
+              <a:t>파일 열기: nano ~/agv_ws/src/agv_description/urdf/common.xacro</a:t>
             </a:r>
           </a:p>
         </p:txBody>
@@ -14645,8 +14910,8 @@
         </p:nvSpPr>
         <p:spPr>
           <a:xfrm>
-            <a:off x="658368" y="2761488"/>
-            <a:ext cx="10972800" cy="3383280"/>
+            <a:off x="658368" y="2706624"/>
+            <a:ext cx="10972800" cy="3364992"/>
           </a:xfrm>
           <a:prstGeom prst="rect">
             <a:avLst/>
@@ -14690,59 +14955,51 @@
               </a:defRPr>
             </a:pPr>
             <a:r>
-              <a:t>&lt;?xml version="1.0" ?&gt;</a:t>
-            </a:r>
-            <a:br/>
-            <a:r>
-              <a:t>&lt;robot xmlns:xacro="http://www.ros.org/wiki/xacro"&gt;</a:t>
-            </a:r>
-            <a:br/>
-            <a:r>
-              <a:t>  </a:t>
-            </a:r>
-            <a:br/>
-            <a:r>
-              <a:t>  </a:t>
-            </a:r>
-            <a:br/>
-            <a:r>
-              <a:t>  &lt;xacro:macro name="agv_wheel" params="side y radius width"&gt;</a:t>
+              <a:t>      </a:t>
+            </a:r>
+            <a:br/>
+            <a:r>
+              <a:t>      &lt;mass value="${mass}"/&gt;</a:t>
+            </a:r>
+            <a:br/>
+            <a:r>
+              <a:t>      </a:t>
+            </a:r>
+            <a:br/>
+            <a:r>
+              <a:t>      </a:t>
+            </a:r>
+            <a:br/>
+            <a:r>
+              <a:t>      &lt;origin xyz="0 0 0" rpy="0 0 0"/&gt;</a:t>
+            </a:r>
+            <a:br/>
+            <a:r>
+              <a:t>      </a:t>
+            </a:r>
+            <a:br/>
+            <a:r>
+              <a:t>      </a:t>
+            </a:r>
+            <a:br/>
+            <a:r>
+              <a:t>      &lt;inertia ixx="${mass * (3*radius*radius + length*length) / 12}" ixy="0" ixz="0"</a:t>
+            </a:r>
+            <a:br/>
+            <a:r>
+              <a:t>        iyy="${mass * (3*radius*radius + length*length) / 12}" iyz="0" izz="${mass *</a:t>
+            </a:r>
+            <a:br/>
+            <a:r>
+              <a:t>        radius*radius / 2}"/&gt;</a:t>
+            </a:r>
+            <a:br/>
+            <a:r>
+              <a:t>      </a:t>
             </a:r>
             <a:br/>
             <a:r>
               <a:t>    </a:t>
-            </a:r>
-            <a:br/>
-            <a:r>
-              <a:t>    </a:t>
-            </a:r>
-            <a:br/>
-            <a:r>
-              <a:t>    &lt;link name="${side}_wheel_link"&gt;</a:t>
-            </a:r>
-            <a:br/>
-            <a:r>
-              <a:t>      </a:t>
-            </a:r>
-            <a:br/>
-            <a:r>
-              <a:t>      </a:t>
-            </a:r>
-            <a:br/>
-            <a:r>
-              <a:t>      &lt;visual&gt;</a:t>
-            </a:r>
-            <a:br/>
-            <a:r>
-              <a:t>        &lt;origin xyz="0 0 0" rpy="1.5708 0 0"/&gt;</a:t>
-            </a:r>
-            <a:br/>
-            <a:r>
-              <a:t>        &lt;geometry&gt;</a:t>
-            </a:r>
-            <a:br/>
-            <a:r>
-              <a:t>          &lt;cylinder radius="${radius}" length="${width}"/&gt;</a:t>
             </a:r>
           </a:p>
         </p:txBody>
@@ -14755,7 +15012,7 @@
         </p:nvSpPr>
         <p:spPr>
           <a:xfrm>
-            <a:off x="749808" y="6199632"/>
+            <a:off x="749808" y="6181344"/>
             <a:ext cx="10789920" cy="201168"/>
           </a:xfrm>
           <a:prstGeom prst="rect">
@@ -14781,7 +15038,7 @@
               </a:defRPr>
             </a:pPr>
             <a:r>
-              <a:t>파일 전체 1/4 · 이 슬라이드 다음에 같은 파일의 나머지 줄이 이어집니다.</a:t>
+              <a:t>파일 전체 5/6 · 이 슬라이드 다음에 같은 파일의 나머지 줄이 이어집니다.</a:t>
             </a:r>
           </a:p>
         </p:txBody>
@@ -14838,7 +15095,7 @@
               </a:defRPr>
             </a:pPr>
             <a:r>
-              <a:t>파일을 계속 작성하고 저장한다 (2/4)</a:t>
+              <a:t>파일을 계속 작성하고 저장한다 (6/6)</a:t>
             </a:r>
           </a:p>
         </p:txBody>
@@ -14877,7 +15134,7 @@
               </a:defRPr>
             </a:pPr>
             <a:r>
-              <a:t>~/agv_ws/src/agv_description/urdf/wheels.xacro</a:t>
+              <a:t>~/agv_ws/src/agv_description/urdf/common.xacro</a:t>
             </a:r>
           </a:p>
         </p:txBody>
@@ -15013,7 +15270,7 @@
               </a:defRPr>
             </a:pPr>
             <a:r>
-              <a:t>현재 단계 19/22    |    현재 폴더 ~/agv_ws    |    현재 터미널</a:t>
+              <a:t>현재 단계 19/20    |    현재 폴더 ~/agv_ws    |    현재 터미널</a:t>
             </a:r>
           </a:p>
         </p:txBody>
@@ -15026,8 +15283,8 @@
         </p:nvSpPr>
         <p:spPr>
           <a:xfrm>
-            <a:off x="658368" y="1682496"/>
-            <a:ext cx="10972800" cy="347472"/>
+            <a:off x="658368" y="1627632"/>
+            <a:ext cx="10972800" cy="256032"/>
           </a:xfrm>
           <a:prstGeom prst="rect">
             <a:avLst/>
@@ -15044,7 +15301,7 @@
               <a:spcAft>
                 <a:spcPts val="0"/>
               </a:spcAft>
-              <a:defRPr sz="1700" b="1">
+              <a:defRPr sz="1500" b="1">
                 <a:solidFill>
                   <a:srgbClr val="122C4E"/>
                 </a:solidFill>
@@ -15065,8 +15322,8 @@
         </p:nvSpPr>
         <p:spPr>
           <a:xfrm>
-            <a:off x="658368" y="2103120"/>
-            <a:ext cx="10972800" cy="493776"/>
+            <a:off x="658368" y="1956816"/>
+            <a:ext cx="10972800" cy="603504"/>
           </a:xfrm>
           <a:prstGeom prst="rect">
             <a:avLst/>
@@ -15110,7 +15367,11 @@
               </a:defRPr>
             </a:pPr>
             <a:r>
-              <a:t>파일 생성/열기: mkdir -p ~/agv_ws/src/agv_description/urdf    &amp;&amp;    nano ~/agv_ws/src/agv_description/urdf/wheels.xacro</a:t>
+              <a:t>파일 생성: mkdir -p ~/agv_ws/src/agv_description/urdf</a:t>
+            </a:r>
+            <a:br/>
+            <a:r>
+              <a:t>파일 열기: nano ~/agv_ws/src/agv_description/urdf/common.xacro</a:t>
             </a:r>
           </a:p>
         </p:txBody>
@@ -15123,8 +15384,8 @@
         </p:nvSpPr>
         <p:spPr>
           <a:xfrm>
-            <a:off x="658368" y="2761488"/>
-            <a:ext cx="10972800" cy="3383280"/>
+            <a:off x="658368" y="2706624"/>
+            <a:ext cx="10972800" cy="3364992"/>
           </a:xfrm>
           <a:prstGeom prst="rect">
             <a:avLst/>
@@ -15168,59 +15429,28 @@
               </a:defRPr>
             </a:pPr>
             <a:r>
-              <a:t>        &lt;/geometry&gt;</a:t>
-            </a:r>
-            <a:br/>
-            <a:r>
-              <a:t>        &lt;material name="wheel_gray"/&gt;</a:t>
-            </a:r>
-            <a:br/>
-            <a:r>
-              <a:t>      &lt;/visual&gt;</a:t>
-            </a:r>
-            <a:br/>
-            <a:r>
-              <a:t>      </a:t>
-            </a:r>
-            <a:br/>
-            <a:r>
-              <a:t>      </a:t>
-            </a:r>
-            <a:br/>
-            <a:r>
-              <a:t>      &lt;collision&gt;</a:t>
-            </a:r>
-            <a:br/>
-            <a:r>
-              <a:t>        &lt;origin xyz="0 0 0" rpy="1.5708 0 0"/&gt;</a:t>
-            </a:r>
-            <a:br/>
-            <a:r>
-              <a:t>        &lt;geometry&gt;</a:t>
-            </a:r>
-            <a:br/>
-            <a:r>
-              <a:t>          &lt;cylinder radius="${radius}" length="${width}"/&gt;</a:t>
-            </a:r>
-            <a:br/>
-            <a:r>
-              <a:t>        &lt;/geometry&gt;</a:t>
-            </a:r>
-            <a:br/>
-            <a:r>
-              <a:t>      &lt;/collision&gt;</a:t>
-            </a:r>
-            <a:br/>
-            <a:r>
-              <a:t>      </a:t>
-            </a:r>
-            <a:br/>
-            <a:r>
-              <a:t>      </a:t>
-            </a:r>
-            <a:br/>
-            <a:r>
-              <a:t>      &lt;xacro:cylinder_inertia mass="0.6" radius="${radius}" length="${width}"/&gt;</a:t>
+              <a:t>    &lt;/inertial&gt;</a:t>
+            </a:r>
+            <a:br/>
+            <a:r>
+              <a:t>    </a:t>
+            </a:r>
+            <a:br/>
+            <a:r>
+              <a:t>  </a:t>
+            </a:r>
+            <a:br/>
+            <a:r>
+              <a:t>  &lt;/xacro:macro&gt;</a:t>
+            </a:r>
+            <a:br/>
+            <a:r>
+              <a:t>  </a:t>
+            </a:r>
+            <a:br/>
+            <a:br/>
+            <a:r>
+              <a:t>&lt;/robot&gt;</a:t>
             </a:r>
           </a:p>
         </p:txBody>
@@ -15233,7 +15463,7 @@
         </p:nvSpPr>
         <p:spPr>
           <a:xfrm>
-            <a:off x="749808" y="6199632"/>
+            <a:off x="749808" y="6181344"/>
             <a:ext cx="10789920" cy="201168"/>
           </a:xfrm>
           <a:prstGeom prst="rect">
@@ -15259,7 +15489,7 @@
               </a:defRPr>
             </a:pPr>
             <a:r>
-              <a:t>파일 전체 2/4 · 이 슬라이드 다음에 같은 파일의 나머지 줄이 이어집니다.</a:t>
+              <a:t>파일 전체 6/6 · 이 슬라이드 다음에 같은 파일의 나머지 줄이 이어집니다.</a:t>
             </a:r>
           </a:p>
         </p:txBody>
@@ -15316,7 +15546,7 @@
               </a:defRPr>
             </a:pPr>
             <a:r>
-              <a:t>파일을 계속 작성하고 저장한다 (3/4)</a:t>
+              <a:t>파일을 새로 만들고 저장한다 (1/5)</a:t>
             </a:r>
           </a:p>
         </p:txBody>
@@ -15491,7 +15721,7 @@
               </a:defRPr>
             </a:pPr>
             <a:r>
-              <a:t>현재 단계 20/22    |    현재 폴더 ~/agv_ws    |    현재 터미널</a:t>
+              <a:t>현재 단계 20/25    |    현재 폴더 ~/agv_ws    |    현재 터미널</a:t>
             </a:r>
           </a:p>
         </p:txBody>
@@ -15504,8 +15734,8 @@
         </p:nvSpPr>
         <p:spPr>
           <a:xfrm>
-            <a:off x="658368" y="1682496"/>
-            <a:ext cx="10972800" cy="347472"/>
+            <a:off x="658368" y="1627632"/>
+            <a:ext cx="10972800" cy="256032"/>
           </a:xfrm>
           <a:prstGeom prst="rect">
             <a:avLst/>
@@ -15522,7 +15752,7 @@
               <a:spcAft>
                 <a:spcPts val="0"/>
               </a:spcAft>
-              <a:defRPr sz="1700" b="1">
+              <a:defRPr sz="1500" b="1">
                 <a:solidFill>
                   <a:srgbClr val="122C4E"/>
                 </a:solidFill>
@@ -15543,8 +15773,8 @@
         </p:nvSpPr>
         <p:spPr>
           <a:xfrm>
-            <a:off x="658368" y="2103120"/>
-            <a:ext cx="10972800" cy="493776"/>
+            <a:off x="658368" y="1956816"/>
+            <a:ext cx="10972800" cy="603504"/>
           </a:xfrm>
           <a:prstGeom prst="rect">
             <a:avLst/>
@@ -15588,7 +15818,11 @@
               </a:defRPr>
             </a:pPr>
             <a:r>
-              <a:t>파일 생성/열기: mkdir -p ~/agv_ws/src/agv_description/urdf    &amp;&amp;    nano ~/agv_ws/src/agv_description/urdf/wheels.xacro</a:t>
+              <a:t>파일 생성: mkdir -p ~/agv_ws/src/agv_description/urdf</a:t>
+            </a:r>
+            <a:br/>
+            <a:r>
+              <a:t>파일 열기: nano ~/agv_ws/src/agv_description/urdf/wheels.xacro</a:t>
             </a:r>
           </a:p>
         </p:txBody>
@@ -15601,8 +15835,8 @@
         </p:nvSpPr>
         <p:spPr>
           <a:xfrm>
-            <a:off x="658368" y="2761488"/>
-            <a:ext cx="10972800" cy="3383280"/>
+            <a:off x="658368" y="2706624"/>
+            <a:ext cx="10972800" cy="3364992"/>
           </a:xfrm>
           <a:prstGeom prst="rect">
             <a:avLst/>
@@ -15646,59 +15880,51 @@
               </a:defRPr>
             </a:pPr>
             <a:r>
+              <a:t>&lt;?xml version="1.0" ?&gt;</a:t>
+            </a:r>
+            <a:br/>
+            <a:r>
+              <a:t>&lt;robot xmlns:xacro="http://www.ros.org/wiki/xacro"&gt;</a:t>
+            </a:r>
+            <a:br/>
+            <a:r>
+              <a:t>  </a:t>
+            </a:r>
+            <a:br/>
+            <a:r>
+              <a:t>  </a:t>
+            </a:r>
+            <a:br/>
+            <a:r>
+              <a:t>  &lt;xacro:macro name="agv_wheel" params="side y radius width"&gt;</a:t>
+            </a:r>
+            <a:br/>
+            <a:r>
+              <a:t>    </a:t>
+            </a:r>
+            <a:br/>
+            <a:r>
+              <a:t>    </a:t>
+            </a:r>
+            <a:br/>
+            <a:r>
+              <a:t>    &lt;link name="${side}_wheel_link"&gt;</a:t>
+            </a:r>
+            <a:br/>
+            <a:r>
               <a:t>      </a:t>
             </a:r>
             <a:br/>
             <a:r>
-              <a:t>    </a:t>
-            </a:r>
-            <a:br/>
-            <a:r>
-              <a:t>    &lt;/link&gt;</a:t>
-            </a:r>
-            <a:br/>
-            <a:r>
-              <a:t>    </a:t>
-            </a:r>
-            <a:br/>
-            <a:r>
-              <a:t>    </a:t>
-            </a:r>
-            <a:br/>
-            <a:r>
-              <a:t>    &lt;joint name="${side}_wheel_joint" type="continuous"&gt;</a:t>
-            </a:r>
-            <a:br/>
-            <a:r>
               <a:t>      </a:t>
             </a:r>
             <a:br/>
             <a:r>
-              <a:t>      </a:t>
-            </a:r>
-            <a:br/>
-            <a:r>
-              <a:t>      &lt;parent link="base_link"/&gt;</a:t>
-            </a:r>
-            <a:br/>
-            <a:r>
-              <a:t>      &lt;child link="${side}_wheel_link"/&gt;</a:t>
-            </a:r>
-            <a:br/>
-            <a:r>
-              <a:t>      </a:t>
-            </a:r>
-            <a:br/>
-            <a:r>
-              <a:t>      </a:t>
-            </a:r>
-            <a:br/>
-            <a:r>
-              <a:t>      &lt;origin xyz="0 ${y} ${radius}" rpy="0 0 0"/&gt;</a:t>
-            </a:r>
-            <a:br/>
-            <a:r>
-              <a:t>      &lt;axis xyz="0 1 0"/&gt;</a:t>
+              <a:t>      &lt;visual&gt;</a:t>
+            </a:r>
+            <a:br/>
+            <a:r>
+              <a:t>        &lt;origin xyz="0 0 0" rpy="1.5708 0 0"/&gt;</a:t>
             </a:r>
           </a:p>
         </p:txBody>
@@ -15711,7 +15937,7 @@
         </p:nvSpPr>
         <p:spPr>
           <a:xfrm>
-            <a:off x="749808" y="6199632"/>
+            <a:off x="749808" y="6181344"/>
             <a:ext cx="10789920" cy="201168"/>
           </a:xfrm>
           <a:prstGeom prst="rect">
@@ -15737,7 +15963,7 @@
               </a:defRPr>
             </a:pPr>
             <a:r>
-              <a:t>파일 전체 3/4 · 이 슬라이드 다음에 같은 파일의 나머지 줄이 이어집니다.</a:t>
+              <a:t>파일 전체 1/5 · 이 슬라이드 다음에 같은 파일의 나머지 줄이 이어집니다.</a:t>
             </a:r>
           </a:p>
         </p:txBody>
@@ -15794,7 +16020,7 @@
               </a:defRPr>
             </a:pPr>
             <a:r>
-              <a:t>파일을 계속 작성하고 저장한다 (4/4)</a:t>
+              <a:t>파일을 계속 작성하고 저장한다 (2/5)</a:t>
             </a:r>
           </a:p>
         </p:txBody>
@@ -15969,7 +16195,7 @@
               </a:defRPr>
             </a:pPr>
             <a:r>
-              <a:t>현재 단계 21/22    |    현재 폴더 ~/agv_ws    |    현재 터미널</a:t>
+              <a:t>현재 단계 21/25    |    현재 폴더 ~/agv_ws    |    현재 터미널</a:t>
             </a:r>
           </a:p>
         </p:txBody>
@@ -15982,8 +16208,8 @@
         </p:nvSpPr>
         <p:spPr>
           <a:xfrm>
-            <a:off x="658368" y="1682496"/>
-            <a:ext cx="10972800" cy="347472"/>
+            <a:off x="658368" y="1627632"/>
+            <a:ext cx="10972800" cy="256032"/>
           </a:xfrm>
           <a:prstGeom prst="rect">
             <a:avLst/>
@@ -16000,7 +16226,7 @@
               <a:spcAft>
                 <a:spcPts val="0"/>
               </a:spcAft>
-              <a:defRPr sz="1700" b="1">
+              <a:defRPr sz="1500" b="1">
                 <a:solidFill>
                   <a:srgbClr val="122C4E"/>
                 </a:solidFill>
@@ -16021,8 +16247,8 @@
         </p:nvSpPr>
         <p:spPr>
           <a:xfrm>
-            <a:off x="658368" y="2103120"/>
-            <a:ext cx="10972800" cy="493776"/>
+            <a:off x="658368" y="1956816"/>
+            <a:ext cx="10972800" cy="603504"/>
           </a:xfrm>
           <a:prstGeom prst="rect">
             <a:avLst/>
@@ -16066,7 +16292,11 @@
               </a:defRPr>
             </a:pPr>
             <a:r>
-              <a:t>파일 생성/열기: mkdir -p ~/agv_ws/src/agv_description/urdf    &amp;&amp;    nano ~/agv_ws/src/agv_description/urdf/wheels.xacro</a:t>
+              <a:t>파일 생성: mkdir -p ~/agv_ws/src/agv_description/urdf</a:t>
+            </a:r>
+            <a:br/>
+            <a:r>
+              <a:t>파일 열기: nano ~/agv_ws/src/agv_description/urdf/wheels.xacro</a:t>
             </a:r>
           </a:p>
         </p:txBody>
@@ -16079,8 +16309,8 @@
         </p:nvSpPr>
         <p:spPr>
           <a:xfrm>
-            <a:off x="658368" y="2761488"/>
-            <a:ext cx="10972800" cy="3383280"/>
+            <a:off x="658368" y="2706624"/>
+            <a:ext cx="10972800" cy="3364992"/>
           </a:xfrm>
           <a:prstGeom prst="rect">
             <a:avLst/>
@@ -16124,36 +16354,51 @@
               </a:defRPr>
             </a:pPr>
             <a:r>
+              <a:t>        &lt;geometry&gt;</a:t>
+            </a:r>
+            <a:br/>
+            <a:r>
+              <a:t>          &lt;cylinder radius="${radius}" length="${width}"/&gt;</a:t>
+            </a:r>
+            <a:br/>
+            <a:r>
+              <a:t>        &lt;/geometry&gt;</a:t>
+            </a:r>
+            <a:br/>
+            <a:r>
+              <a:t>        &lt;material name="wheel_gray"/&gt;</a:t>
+            </a:r>
+            <a:br/>
+            <a:r>
+              <a:t>      &lt;/visual&gt;</a:t>
+            </a:r>
+            <a:br/>
+            <a:r>
               <a:t>      </a:t>
             </a:r>
             <a:br/>
             <a:r>
-              <a:t>    </a:t>
-            </a:r>
-            <a:br/>
-            <a:r>
-              <a:t>    &lt;/joint&gt;</a:t>
-            </a:r>
-            <a:br/>
-            <a:r>
-              <a:t>    </a:t>
-            </a:r>
-            <a:br/>
-            <a:r>
-              <a:t>  </a:t>
-            </a:r>
-            <a:br/>
-            <a:r>
-              <a:t>  &lt;/xacro:macro&gt;</a:t>
-            </a:r>
-            <a:br/>
-            <a:r>
-              <a:t>  </a:t>
-            </a:r>
-            <a:br/>
-            <a:br/>
-            <a:r>
-              <a:t>&lt;/robot&gt;</a:t>
+              <a:t>      </a:t>
+            </a:r>
+            <a:br/>
+            <a:r>
+              <a:t>      &lt;collision&gt;</a:t>
+            </a:r>
+            <a:br/>
+            <a:r>
+              <a:t>        &lt;origin xyz="0 0 0" rpy="1.5708 0 0"/&gt;</a:t>
+            </a:r>
+            <a:br/>
+            <a:r>
+              <a:t>        &lt;geometry&gt;</a:t>
+            </a:r>
+            <a:br/>
+            <a:r>
+              <a:t>          &lt;cylinder radius="${radius}" length="${width}"/&gt;</a:t>
+            </a:r>
+            <a:br/>
+            <a:r>
+              <a:t>        &lt;/geometry&gt;</a:t>
             </a:r>
           </a:p>
         </p:txBody>
@@ -16166,7 +16411,7 @@
         </p:nvSpPr>
         <p:spPr>
           <a:xfrm>
-            <a:off x="749808" y="6199632"/>
+            <a:off x="749808" y="6181344"/>
             <a:ext cx="10789920" cy="201168"/>
           </a:xfrm>
           <a:prstGeom prst="rect">
@@ -16192,7 +16437,7 @@
               </a:defRPr>
             </a:pPr>
             <a:r>
-              <a:t>파일 전체 4/4 · 이 슬라이드 다음에 같은 파일의 나머지 줄이 이어집니다.</a:t>
+              <a:t>파일 전체 2/5 · 이 슬라이드 다음에 같은 파일의 나머지 줄이 이어집니다.</a:t>
             </a:r>
           </a:p>
         </p:txBody>
@@ -16249,7 +16494,7 @@
               </a:defRPr>
             </a:pPr>
             <a:r>
-              <a:t>파일을 새로 만들고 저장한다 (1/4)</a:t>
+              <a:t>파일을 계속 작성하고 저장한다 (3/5)</a:t>
             </a:r>
           </a:p>
         </p:txBody>
@@ -16288,7 +16533,7 @@
               </a:defRPr>
             </a:pPr>
             <a:r>
-              <a:t>~/agv_ws/src/agv_description/urdf/sensors.xacro</a:t>
+              <a:t>~/agv_ws/src/agv_description/urdf/wheels.xacro</a:t>
             </a:r>
           </a:p>
         </p:txBody>
@@ -16424,7 +16669,7 @@
               </a:defRPr>
             </a:pPr>
             <a:r>
-              <a:t>현재 단계 22/26    |    현재 폴더 ~/agv_ws    |    현재 터미널</a:t>
+              <a:t>현재 단계 22/25    |    현재 폴더 ~/agv_ws    |    현재 터미널</a:t>
             </a:r>
           </a:p>
         </p:txBody>
@@ -16437,8 +16682,8 @@
         </p:nvSpPr>
         <p:spPr>
           <a:xfrm>
-            <a:off x="658368" y="1682496"/>
-            <a:ext cx="10972800" cy="347472"/>
+            <a:off x="658368" y="1627632"/>
+            <a:ext cx="10972800" cy="256032"/>
           </a:xfrm>
           <a:prstGeom prst="rect">
             <a:avLst/>
@@ -16455,7 +16700,7 @@
               <a:spcAft>
                 <a:spcPts val="0"/>
               </a:spcAft>
-              <a:defRPr sz="1700" b="1">
+              <a:defRPr sz="1500" b="1">
                 <a:solidFill>
                   <a:srgbClr val="122C4E"/>
                 </a:solidFill>
@@ -16476,8 +16721,8 @@
         </p:nvSpPr>
         <p:spPr>
           <a:xfrm>
-            <a:off x="658368" y="2103120"/>
-            <a:ext cx="10972800" cy="493776"/>
+            <a:off x="658368" y="1956816"/>
+            <a:ext cx="10972800" cy="603504"/>
           </a:xfrm>
           <a:prstGeom prst="rect">
             <a:avLst/>
@@ -16521,7 +16766,11 @@
               </a:defRPr>
             </a:pPr>
             <a:r>
-              <a:t>파일 생성/열기: mkdir -p ~/agv_ws/src/agv_description/urdf    &amp;&amp;    nano ~/agv_ws/src/agv_description/urdf/sensors.xacro</a:t>
+              <a:t>파일 생성: mkdir -p ~/agv_ws/src/agv_description/urdf</a:t>
+            </a:r>
+            <a:br/>
+            <a:r>
+              <a:t>파일 열기: nano ~/agv_ws/src/agv_description/urdf/wheels.xacro</a:t>
             </a:r>
           </a:p>
         </p:txBody>
@@ -16534,8 +16783,8 @@
         </p:nvSpPr>
         <p:spPr>
           <a:xfrm>
-            <a:off x="658368" y="2761488"/>
-            <a:ext cx="10972800" cy="3383280"/>
+            <a:off x="658368" y="2706624"/>
+            <a:ext cx="10972800" cy="3364992"/>
           </a:xfrm>
           <a:prstGeom prst="rect">
             <a:avLst/>
@@ -16579,23 +16828,23 @@
               </a:defRPr>
             </a:pPr>
             <a:r>
-              <a:t>&lt;?xml version="1.0" ?&gt;</a:t>
-            </a:r>
-            <a:br/>
-            <a:r>
-              <a:t>&lt;robot xmlns:xacro="http://www.ros.org/wiki/xacro"&gt;</a:t>
-            </a:r>
-            <a:br/>
-            <a:r>
-              <a:t>  </a:t>
-            </a:r>
-            <a:br/>
-            <a:r>
-              <a:t>  </a:t>
-            </a:r>
-            <a:br/>
-            <a:r>
-              <a:t>  &lt;xacro:macro name="fixed_sensor" params="name parent xyz rpy size"&gt;</a:t>
+              <a:t>      &lt;/collision&gt;</a:t>
+            </a:r>
+            <a:br/>
+            <a:r>
+              <a:t>      </a:t>
+            </a:r>
+            <a:br/>
+            <a:r>
+              <a:t>      </a:t>
+            </a:r>
+            <a:br/>
+            <a:r>
+              <a:t>      &lt;xacro:cylinder_inertia mass="0.6" radius="${radius}" length="${width}"/&gt;</a:t>
+            </a:r>
+            <a:br/>
+            <a:r>
+              <a:t>      </a:t>
             </a:r>
             <a:br/>
             <a:r>
@@ -16603,11 +16852,19 @@
             </a:r>
             <a:br/>
             <a:r>
+              <a:t>    &lt;/link&gt;</a:t>
+            </a:r>
+            <a:br/>
+            <a:r>
               <a:t>    </a:t>
             </a:r>
             <a:br/>
             <a:r>
-              <a:t>    &lt;link name="${name}_link"&gt;</a:t>
+              <a:t>    </a:t>
+            </a:r>
+            <a:br/>
+            <a:r>
+              <a:t>    &lt;joint name="${side}_wheel_joint" type="continuous"&gt;</a:t>
             </a:r>
             <a:br/>
             <a:r>
@@ -16616,22 +16873,6 @@
             <a:br/>
             <a:r>
               <a:t>      </a:t>
-            </a:r>
-            <a:br/>
-            <a:r>
-              <a:t>      &lt;visual&gt;</a:t>
-            </a:r>
-            <a:br/>
-            <a:r>
-              <a:t>        &lt;geometry&gt;</a:t>
-            </a:r>
-            <a:br/>
-            <a:r>
-              <a:t>          &lt;box size="${size}"/&gt;</a:t>
-            </a:r>
-            <a:br/>
-            <a:r>
-              <a:t>        &lt;/geometry&gt;</a:t>
             </a:r>
           </a:p>
         </p:txBody>
@@ -16644,7 +16885,7 @@
         </p:nvSpPr>
         <p:spPr>
           <a:xfrm>
-            <a:off x="749808" y="6199632"/>
+            <a:off x="749808" y="6181344"/>
             <a:ext cx="10789920" cy="201168"/>
           </a:xfrm>
           <a:prstGeom prst="rect">
@@ -16670,7 +16911,7 @@
               </a:defRPr>
             </a:pPr>
             <a:r>
-              <a:t>파일 전체 1/4 · 이 슬라이드 다음에 같은 파일의 나머지 줄이 이어집니다.</a:t>
+              <a:t>파일 전체 3/5 · 이 슬라이드 다음에 같은 파일의 나머지 줄이 이어집니다.</a:t>
             </a:r>
           </a:p>
         </p:txBody>
@@ -16727,7 +16968,7 @@
               </a:defRPr>
             </a:pPr>
             <a:r>
-              <a:t>파일을 계속 작성하고 저장한다 (2/4)</a:t>
+              <a:t>파일을 계속 작성하고 저장한다 (4/5)</a:t>
             </a:r>
           </a:p>
         </p:txBody>
@@ -16766,7 +17007,7 @@
               </a:defRPr>
             </a:pPr>
             <a:r>
-              <a:t>~/agv_ws/src/agv_description/urdf/sensors.xacro</a:t>
+              <a:t>~/agv_ws/src/agv_description/urdf/wheels.xacro</a:t>
             </a:r>
           </a:p>
         </p:txBody>
@@ -16902,7 +17143,7 @@
               </a:defRPr>
             </a:pPr>
             <a:r>
-              <a:t>현재 단계 23/26    |    현재 폴더 ~/agv_ws    |    현재 터미널</a:t>
+              <a:t>현재 단계 23/25    |    현재 폴더 ~/agv_ws    |    현재 터미널</a:t>
             </a:r>
           </a:p>
         </p:txBody>
@@ -16915,8 +17156,8 @@
         </p:nvSpPr>
         <p:spPr>
           <a:xfrm>
-            <a:off x="658368" y="1682496"/>
-            <a:ext cx="10972800" cy="347472"/>
+            <a:off x="658368" y="1627632"/>
+            <a:ext cx="10972800" cy="256032"/>
           </a:xfrm>
           <a:prstGeom prst="rect">
             <a:avLst/>
@@ -16933,7 +17174,7 @@
               <a:spcAft>
                 <a:spcPts val="0"/>
               </a:spcAft>
-              <a:defRPr sz="1700" b="1">
+              <a:defRPr sz="1500" b="1">
                 <a:solidFill>
                   <a:srgbClr val="122C4E"/>
                 </a:solidFill>
@@ -16954,8 +17195,8 @@
         </p:nvSpPr>
         <p:spPr>
           <a:xfrm>
-            <a:off x="658368" y="2103120"/>
-            <a:ext cx="10972800" cy="493776"/>
+            <a:off x="658368" y="1956816"/>
+            <a:ext cx="10972800" cy="603504"/>
           </a:xfrm>
           <a:prstGeom prst="rect">
             <a:avLst/>
@@ -16999,7 +17240,11 @@
               </a:defRPr>
             </a:pPr>
             <a:r>
-              <a:t>파일 생성/열기: mkdir -p ~/agv_ws/src/agv_description/urdf    &amp;&amp;    nano ~/agv_ws/src/agv_description/urdf/sensors.xacro</a:t>
+              <a:t>파일 생성: mkdir -p ~/agv_ws/src/agv_description/urdf</a:t>
+            </a:r>
+            <a:br/>
+            <a:r>
+              <a:t>파일 열기: nano ~/agv_ws/src/agv_description/urdf/wheels.xacro</a:t>
             </a:r>
           </a:p>
         </p:txBody>
@@ -17012,8 +17257,8 @@
         </p:nvSpPr>
         <p:spPr>
           <a:xfrm>
-            <a:off x="658368" y="2761488"/>
-            <a:ext cx="10972800" cy="3383280"/>
+            <a:off x="658368" y="2706624"/>
+            <a:ext cx="10972800" cy="3364992"/>
           </a:xfrm>
           <a:prstGeom prst="rect">
             <a:avLst/>
@@ -17057,11 +17302,11 @@
               </a:defRPr>
             </a:pPr>
             <a:r>
-              <a:t>        &lt;material name="sensor_black"/&gt;</a:t>
-            </a:r>
-            <a:br/>
-            <a:r>
-              <a:t>      &lt;/visual&gt;</a:t>
+              <a:t>      &lt;parent link="base_link"/&gt;</a:t>
+            </a:r>
+            <a:br/>
+            <a:r>
+              <a:t>      &lt;child link="${side}_wheel_link"/&gt;</a:t>
             </a:r>
             <a:br/>
             <a:r>
@@ -17073,23 +17318,11 @@
             </a:r>
             <a:br/>
             <a:r>
-              <a:t>      &lt;collision&gt;</a:t>
-            </a:r>
-            <a:br/>
-            <a:r>
-              <a:t>        &lt;geometry&gt;</a:t>
-            </a:r>
-            <a:br/>
-            <a:r>
-              <a:t>          &lt;box size="${size}"/&gt;</a:t>
-            </a:r>
-            <a:br/>
-            <a:r>
-              <a:t>        &lt;/geometry&gt;</a:t>
-            </a:r>
-            <a:br/>
-            <a:r>
-              <a:t>      &lt;/collision&gt;</a:t>
+              <a:t>      &lt;origin xyz="0 ${y} ${radius}" rpy="0 0 0"/&gt;</a:t>
+            </a:r>
+            <a:br/>
+            <a:r>
+              <a:t>      &lt;axis xyz="0 1 0"/&gt;</a:t>
             </a:r>
             <a:br/>
             <a:r>
@@ -17097,19 +17330,23 @@
             </a:r>
             <a:br/>
             <a:r>
-              <a:t>      </a:t>
-            </a:r>
-            <a:br/>
-            <a:r>
-              <a:t>      &lt;inertial&gt;</a:t>
-            </a:r>
-            <a:br/>
-            <a:r>
-              <a:t>        &lt;mass value="0.05"/&gt;</a:t>
-            </a:r>
-            <a:br/>
-            <a:r>
-              <a:t>        &lt;inertia ixx="0.0001" ixy="0" ixz="0" iyy="0.0001" iyz="0" izz="0.0001"/&gt;</a:t>
+              <a:t>    </a:t>
+            </a:r>
+            <a:br/>
+            <a:r>
+              <a:t>    &lt;/joint&gt;</a:t>
+            </a:r>
+            <a:br/>
+            <a:r>
+              <a:t>    </a:t>
+            </a:r>
+            <a:br/>
+            <a:r>
+              <a:t>  </a:t>
+            </a:r>
+            <a:br/>
+            <a:r>
+              <a:t>  &lt;/xacro:macro&gt;</a:t>
             </a:r>
           </a:p>
         </p:txBody>
@@ -17122,7 +17359,7 @@
         </p:nvSpPr>
         <p:spPr>
           <a:xfrm>
-            <a:off x="749808" y="6199632"/>
+            <a:off x="749808" y="6181344"/>
             <a:ext cx="10789920" cy="201168"/>
           </a:xfrm>
           <a:prstGeom prst="rect">
@@ -17148,7 +17385,7 @@
               </a:defRPr>
             </a:pPr>
             <a:r>
-              <a:t>파일 전체 2/4 · 이 슬라이드 다음에 같은 파일의 나머지 줄이 이어집니다.</a:t>
+              <a:t>파일 전체 4/5 · 이 슬라이드 다음에 같은 파일의 나머지 줄이 이어집니다.</a:t>
             </a:r>
           </a:p>
         </p:txBody>
@@ -17624,7 +17861,7 @@
               </a:defRPr>
             </a:pPr>
             <a:r>
-              <a:t>파일을 계속 작성하고 저장한다 (3/4)</a:t>
+              <a:t>파일을 계속 작성하고 저장한다 (5/5)</a:t>
             </a:r>
           </a:p>
         </p:txBody>
@@ -17663,7 +17900,7 @@
               </a:defRPr>
             </a:pPr>
             <a:r>
-              <a:t>~/agv_ws/src/agv_description/urdf/sensors.xacro</a:t>
+              <a:t>~/agv_ws/src/agv_description/urdf/wheels.xacro</a:t>
             </a:r>
           </a:p>
         </p:txBody>
@@ -17799,7 +18036,7 @@
               </a:defRPr>
             </a:pPr>
             <a:r>
-              <a:t>현재 단계 24/26    |    현재 폴더 ~/agv_ws    |    현재 터미널</a:t>
+              <a:t>현재 단계 24/25    |    현재 폴더 ~/agv_ws    |    현재 터미널</a:t>
             </a:r>
           </a:p>
         </p:txBody>
@@ -17812,8 +18049,8 @@
         </p:nvSpPr>
         <p:spPr>
           <a:xfrm>
-            <a:off x="658368" y="1682496"/>
-            <a:ext cx="10972800" cy="347472"/>
+            <a:off x="658368" y="1627632"/>
+            <a:ext cx="10972800" cy="256032"/>
           </a:xfrm>
           <a:prstGeom prst="rect">
             <a:avLst/>
@@ -17830,7 +18067,7 @@
               <a:spcAft>
                 <a:spcPts val="0"/>
               </a:spcAft>
-              <a:defRPr sz="1700" b="1">
+              <a:defRPr sz="1500" b="1">
                 <a:solidFill>
                   <a:srgbClr val="122C4E"/>
                 </a:solidFill>
@@ -17851,8 +18088,8 @@
         </p:nvSpPr>
         <p:spPr>
           <a:xfrm>
-            <a:off x="658368" y="2103120"/>
-            <a:ext cx="10972800" cy="493776"/>
+            <a:off x="658368" y="1956816"/>
+            <a:ext cx="10972800" cy="603504"/>
           </a:xfrm>
           <a:prstGeom prst="rect">
             <a:avLst/>
@@ -17896,7 +18133,11 @@
               </a:defRPr>
             </a:pPr>
             <a:r>
-              <a:t>파일 생성/열기: mkdir -p ~/agv_ws/src/agv_description/urdf    &amp;&amp;    nano ~/agv_ws/src/agv_description/urdf/sensors.xacro</a:t>
+              <a:t>파일 생성: mkdir -p ~/agv_ws/src/agv_description/urdf</a:t>
+            </a:r>
+            <a:br/>
+            <a:r>
+              <a:t>파일 열기: nano ~/agv_ws/src/agv_description/urdf/wheels.xacro</a:t>
             </a:r>
           </a:p>
         </p:txBody>
@@ -17909,8 +18150,8 @@
         </p:nvSpPr>
         <p:spPr>
           <a:xfrm>
-            <a:off x="658368" y="2761488"/>
-            <a:ext cx="10972800" cy="3383280"/>
+            <a:off x="658368" y="2706624"/>
+            <a:ext cx="10972800" cy="3364992"/>
           </a:xfrm>
           <a:prstGeom prst="rect">
             <a:avLst/>
@@ -17954,59 +18195,12 @@
               </a:defRPr>
             </a:pPr>
             <a:r>
-              <a:t>      &lt;/inertial&gt;</a:t>
-            </a:r>
-            <a:br/>
-            <a:r>
-              <a:t>      </a:t>
-            </a:r>
-            <a:br/>
-            <a:r>
-              <a:t>    </a:t>
-            </a:r>
-            <a:br/>
-            <a:r>
-              <a:t>    &lt;/link&gt;</a:t>
-            </a:r>
-            <a:br/>
-            <a:r>
-              <a:t>    </a:t>
-            </a:r>
-            <a:br/>
-            <a:r>
-              <a:t>    </a:t>
-            </a:r>
-            <a:br/>
-            <a:r>
-              <a:t>    &lt;joint name="${name}_joint" type="fixed"&gt;</a:t>
-            </a:r>
-            <a:br/>
-            <a:r>
-              <a:t>      &lt;parent link="${parent}"/&gt;</a:t>
-            </a:r>
-            <a:br/>
-            <a:r>
-              <a:t>      &lt;child link="${name}_link"/&gt;</a:t>
-            </a:r>
-            <a:br/>
-            <a:r>
-              <a:t>      &lt;origin xyz="${xyz}" rpy="${rpy}"/&gt;</a:t>
-            </a:r>
-            <a:br/>
-            <a:r>
-              <a:t>    &lt;/joint&gt;</a:t>
-            </a:r>
-            <a:br/>
-            <a:r>
-              <a:t>    </a:t>
-            </a:r>
-            <a:br/>
-            <a:r>
               <a:t>  </a:t>
             </a:r>
             <a:br/>
-            <a:r>
-              <a:t>  &lt;/xacro:macro&gt;</a:t>
+            <a:br/>
+            <a:r>
+              <a:t>&lt;/robot&gt;</a:t>
             </a:r>
           </a:p>
         </p:txBody>
@@ -18019,7 +18213,7 @@
         </p:nvSpPr>
         <p:spPr>
           <a:xfrm>
-            <a:off x="749808" y="6199632"/>
+            <a:off x="749808" y="6181344"/>
             <a:ext cx="10789920" cy="201168"/>
           </a:xfrm>
           <a:prstGeom prst="rect">
@@ -18045,7 +18239,7 @@
               </a:defRPr>
             </a:pPr>
             <a:r>
-              <a:t>파일 전체 3/4 · 이 슬라이드 다음에 같은 파일의 나머지 줄이 이어집니다.</a:t>
+              <a:t>파일 전체 5/5 · 이 슬라이드 다음에 같은 파일의 나머지 줄이 이어집니다.</a:t>
             </a:r>
           </a:p>
         </p:txBody>
@@ -18102,7 +18296,7 @@
               </a:defRPr>
             </a:pPr>
             <a:r>
-              <a:t>파일을 계속 작성하고 저장한다 (4/4)</a:t>
+              <a:t>파일을 새로 만들고 저장한다 (1/4)</a:t>
             </a:r>
           </a:p>
         </p:txBody>
@@ -18277,7 +18471,7 @@
               </a:defRPr>
             </a:pPr>
             <a:r>
-              <a:t>현재 단계 25/26    |    현재 폴더 ~/agv_ws    |    현재 터미널</a:t>
+              <a:t>현재 단계 25/29    |    현재 폴더 ~/agv_ws    |    현재 터미널</a:t>
             </a:r>
           </a:p>
         </p:txBody>
@@ -18290,8 +18484,8 @@
         </p:nvSpPr>
         <p:spPr>
           <a:xfrm>
-            <a:off x="658368" y="1682496"/>
-            <a:ext cx="10972800" cy="347472"/>
+            <a:off x="658368" y="1627632"/>
+            <a:ext cx="10972800" cy="256032"/>
           </a:xfrm>
           <a:prstGeom prst="rect">
             <a:avLst/>
@@ -18308,7 +18502,7 @@
               <a:spcAft>
                 <a:spcPts val="0"/>
               </a:spcAft>
-              <a:defRPr sz="1700" b="1">
+              <a:defRPr sz="1500" b="1">
                 <a:solidFill>
                   <a:srgbClr val="122C4E"/>
                 </a:solidFill>
@@ -18329,8 +18523,8 @@
         </p:nvSpPr>
         <p:spPr>
           <a:xfrm>
-            <a:off x="658368" y="2103120"/>
-            <a:ext cx="10972800" cy="493776"/>
+            <a:off x="658368" y="1956816"/>
+            <a:ext cx="10972800" cy="603504"/>
           </a:xfrm>
           <a:prstGeom prst="rect">
             <a:avLst/>
@@ -18374,7 +18568,11 @@
               </a:defRPr>
             </a:pPr>
             <a:r>
-              <a:t>파일 생성/열기: mkdir -p ~/agv_ws/src/agv_description/urdf    &amp;&amp;    nano ~/agv_ws/src/agv_description/urdf/sensors.xacro</a:t>
+              <a:t>파일 생성: mkdir -p ~/agv_ws/src/agv_description/urdf</a:t>
+            </a:r>
+            <a:br/>
+            <a:r>
+              <a:t>파일 열기: nano ~/agv_ws/src/agv_description/urdf/sensors.xacro</a:t>
             </a:r>
           </a:p>
         </p:txBody>
@@ -18387,8 +18585,8 @@
         </p:nvSpPr>
         <p:spPr>
           <a:xfrm>
-            <a:off x="658368" y="2761488"/>
-            <a:ext cx="10972800" cy="3383280"/>
+            <a:off x="658368" y="2706624"/>
+            <a:ext cx="10972800" cy="3364992"/>
           </a:xfrm>
           <a:prstGeom prst="rect">
             <a:avLst/>
@@ -18432,12 +18630,51 @@
               </a:defRPr>
             </a:pPr>
             <a:r>
+              <a:t>&lt;?xml version="1.0" ?&gt;</a:t>
+            </a:r>
+            <a:br/>
+            <a:r>
+              <a:t>&lt;robot xmlns:xacro="http://www.ros.org/wiki/xacro"&gt;</a:t>
+            </a:r>
+            <a:br/>
+            <a:r>
               <a:t>  </a:t>
             </a:r>
             <a:br/>
-            <a:br/>
-            <a:r>
-              <a:t>&lt;/robot&gt;</a:t>
+            <a:r>
+              <a:t>  </a:t>
+            </a:r>
+            <a:br/>
+            <a:r>
+              <a:t>  &lt;xacro:macro name="fixed_sensor" params="name parent xyz rpy size"&gt;</a:t>
+            </a:r>
+            <a:br/>
+            <a:r>
+              <a:t>    </a:t>
+            </a:r>
+            <a:br/>
+            <a:r>
+              <a:t>    </a:t>
+            </a:r>
+            <a:br/>
+            <a:r>
+              <a:t>    &lt;link name="${name}_link"&gt;</a:t>
+            </a:r>
+            <a:br/>
+            <a:r>
+              <a:t>      </a:t>
+            </a:r>
+            <a:br/>
+            <a:r>
+              <a:t>      </a:t>
+            </a:r>
+            <a:br/>
+            <a:r>
+              <a:t>      &lt;visual&gt;</a:t>
+            </a:r>
+            <a:br/>
+            <a:r>
+              <a:t>        &lt;geometry&gt;</a:t>
             </a:r>
           </a:p>
         </p:txBody>
@@ -18450,7 +18687,7 @@
         </p:nvSpPr>
         <p:spPr>
           <a:xfrm>
-            <a:off x="749808" y="6199632"/>
+            <a:off x="749808" y="6181344"/>
             <a:ext cx="10789920" cy="201168"/>
           </a:xfrm>
           <a:prstGeom prst="rect">
@@ -18476,7 +18713,7 @@
               </a:defRPr>
             </a:pPr>
             <a:r>
-              <a:t>파일 전체 4/4 · 이 슬라이드 다음에 같은 파일의 나머지 줄이 이어집니다.</a:t>
+              <a:t>파일 전체 1/4 · 이 슬라이드 다음에 같은 파일의 나머지 줄이 이어집니다.</a:t>
             </a:r>
           </a:p>
         </p:txBody>
@@ -18533,7 +18770,7 @@
               </a:defRPr>
             </a:pPr>
             <a:r>
-              <a:t>build → source → run 순서로 실행한다</a:t>
+              <a:t>파일을 계속 작성하고 저장한다 (2/4)</a:t>
             </a:r>
           </a:p>
         </p:txBody>
@@ -18572,7 +18809,7 @@
               </a:defRPr>
             </a:pPr>
             <a:r>
-              <a:t>새 파일 또는 수정 파일은 build와 source 뒤에만 실행 이름·설정에 반영됩니다.</a:t>
+              <a:t>~/agv_ws/src/agv_description/urdf/sensors.xacro</a:t>
             </a:r>
           </a:p>
         </p:txBody>
@@ -18708,23 +18945,124 @@
               </a:defRPr>
             </a:pPr>
             <a:r>
-              <a:t>현재 단계 실행    |    현재 폴더 ~/agv_ws    |    현재 터미널</a:t>
-            </a:r>
-          </a:p>
-        </p:txBody>
-      </p:sp>
-      <p:sp>
-        <p:nvSpPr>
-          <p:cNvPr id="7" name="Rounded Rectangle 6"/>
+              <a:t>현재 단계 26/29    |    현재 폴더 ~/agv_ws    |    현재 터미널</a:t>
+            </a:r>
+          </a:p>
+        </p:txBody>
+      </p:sp>
+      <p:sp>
+        <p:nvSpPr>
+          <p:cNvPr id="7" name="TextBox 6"/>
+          <p:cNvSpPr txBox="1"/>
+          <p:nvPr/>
+        </p:nvSpPr>
+        <p:spPr>
+          <a:xfrm>
+            <a:off x="658368" y="1627632"/>
+            <a:ext cx="10972800" cy="256032"/>
+          </a:xfrm>
+          <a:prstGeom prst="rect">
+            <a:avLst/>
+          </a:prstGeom>
+          <a:noFill/>
+        </p:spPr>
+        <p:txBody>
+          <a:bodyPr wrap="square" lIns="73152" rIns="73152" tIns="36576" bIns="36576">
+            <a:spAutoFit/>
+          </a:bodyPr>
+          <a:lstStyle/>
+          <a:p>
+            <a:pPr algn="l">
+              <a:spcAft>
+                <a:spcPts val="0"/>
+              </a:spcAft>
+              <a:defRPr sz="1500" b="1">
+                <a:solidFill>
+                  <a:srgbClr val="122C4E"/>
+                </a:solidFill>
+                <a:latin typeface="Noto Sans CJK KR"/>
+              </a:defRPr>
+            </a:pPr>
+            <a:r>
+              <a:t>이번 단계: 파일의 전체 내용을 중간 생략 없이 작성합니다. 아래 줄 범위를 끝까지 입력하세요.</a:t>
+            </a:r>
+          </a:p>
+        </p:txBody>
+      </p:sp>
+      <p:sp>
+        <p:nvSpPr>
+          <p:cNvPr id="8" name="Rectangle 7"/>
           <p:cNvSpPr/>
           <p:nvPr/>
         </p:nvSpPr>
         <p:spPr>
           <a:xfrm>
-            <a:off x="658368" y="1700784"/>
-            <a:ext cx="10972800" cy="3182112"/>
-          </a:xfrm>
-          <a:prstGeom prst="roundRect">
+            <a:off x="658368" y="1956816"/>
+            <a:ext cx="10972800" cy="603504"/>
+          </a:xfrm>
+          <a:prstGeom prst="rect">
+            <a:avLst/>
+          </a:prstGeom>
+          <a:solidFill>
+            <a:srgbClr val="F4F7FB"/>
+          </a:solidFill>
+          <a:ln>
+            <a:solidFill>
+              <a:srgbClr val="F4F7FB"/>
+            </a:solidFill>
+          </a:ln>
+        </p:spPr>
+        <p:style>
+          <a:lnRef idx="1">
+            <a:schemeClr val="accent1"/>
+          </a:lnRef>
+          <a:fillRef idx="3">
+            <a:schemeClr val="accent1"/>
+          </a:fillRef>
+          <a:effectRef idx="2">
+            <a:schemeClr val="accent1"/>
+          </a:effectRef>
+          <a:fontRef idx="minor">
+            <a:schemeClr val="lt1"/>
+          </a:fontRef>
+        </p:style>
+        <p:txBody>
+          <a:bodyPr rtlCol="0" anchor="ctr" wrap="square" lIns="73152" rIns="73152" tIns="36576" bIns="36576"/>
+          <a:lstStyle/>
+          <a:p>
+            <a:pPr algn="l">
+              <a:spcAft>
+                <a:spcPts val="0"/>
+              </a:spcAft>
+              <a:defRPr sz="1400" b="0">
+                <a:solidFill>
+                  <a:srgbClr val="122C4E"/>
+                </a:solidFill>
+                <a:latin typeface="DejaVu Sans Mono"/>
+              </a:defRPr>
+            </a:pPr>
+            <a:r>
+              <a:t>파일 생성: mkdir -p ~/agv_ws/src/agv_description/urdf</a:t>
+            </a:r>
+            <a:br/>
+            <a:r>
+              <a:t>파일 열기: nano ~/agv_ws/src/agv_description/urdf/sensors.xacro</a:t>
+            </a:r>
+          </a:p>
+        </p:txBody>
+      </p:sp>
+      <p:sp>
+        <p:nvSpPr>
+          <p:cNvPr id="9" name="Rectangle 8"/>
+          <p:cNvSpPr/>
+          <p:nvPr/>
+        </p:nvSpPr>
+        <p:spPr>
+          <a:xfrm>
+            <a:off x="658368" y="2706624"/>
+            <a:ext cx="10972800" cy="3364992"/>
+          </a:xfrm>
+          <a:prstGeom prst="rect">
             <a:avLst/>
           </a:prstGeom>
           <a:solidFill>
@@ -18751,14 +19089,14 @@
           </a:fontRef>
         </p:style>
         <p:txBody>
-          <a:bodyPr rtlCol="0" anchor="ctr" wrap="square" lIns="73152" rIns="73152" tIns="36576" bIns="36576"/>
-          <a:lstStyle/>
-          <a:p>
-            <a:pPr algn="l">
-              <a:spcAft>
-                <a:spcPts val="0"/>
-              </a:spcAft>
-              <a:defRPr sz="1600" b="0">
+          <a:bodyPr rtlCol="0" anchor="ctr" wrap="square" lIns="164592" rIns="164592" tIns="109728" bIns="36576"/>
+          <a:lstStyle/>
+          <a:p>
+            <a:pPr algn="l">
+              <a:spcAft>
+                <a:spcPts val="0"/>
+              </a:spcAft>
+              <a:defRPr sz="1400" b="0">
                 <a:solidFill>
                   <a:srgbClr val="FFFFFF"/>
                 </a:solidFill>
@@ -18766,25 +19104,65 @@
               </a:defRPr>
             </a:pPr>
             <a:r>
-              <a:t>xacro ~/agv_ws/src/agv_description/urdf/agv.urdf.xacro &gt; /tmp/agv.urdf</a:t>
-            </a:r>
-            <a:br/>
-            <a:r>
-              <a:t>check_urdf /tmp/agv.urdf</a:t>
-            </a:r>
-          </a:p>
-        </p:txBody>
-      </p:sp>
-      <p:sp>
-        <p:nvSpPr>
-          <p:cNvPr id="8" name="TextBox 7"/>
+              <a:t>          &lt;box size="${size}"/&gt;</a:t>
+            </a:r>
+            <a:br/>
+            <a:r>
+              <a:t>        &lt;/geometry&gt;</a:t>
+            </a:r>
+            <a:br/>
+            <a:r>
+              <a:t>        &lt;material name="sensor_black"/&gt;</a:t>
+            </a:r>
+            <a:br/>
+            <a:r>
+              <a:t>      &lt;/visual&gt;</a:t>
+            </a:r>
+            <a:br/>
+            <a:r>
+              <a:t>      </a:t>
+            </a:r>
+            <a:br/>
+            <a:r>
+              <a:t>      </a:t>
+            </a:r>
+            <a:br/>
+            <a:r>
+              <a:t>      &lt;collision&gt;</a:t>
+            </a:r>
+            <a:br/>
+            <a:r>
+              <a:t>        &lt;geometry&gt;</a:t>
+            </a:r>
+            <a:br/>
+            <a:r>
+              <a:t>          &lt;box size="${size}"/&gt;</a:t>
+            </a:r>
+            <a:br/>
+            <a:r>
+              <a:t>        &lt;/geometry&gt;</a:t>
+            </a:r>
+            <a:br/>
+            <a:r>
+              <a:t>      &lt;/collision&gt;</a:t>
+            </a:r>
+            <a:br/>
+            <a:r>
+              <a:t>      </a:t>
+            </a:r>
+          </a:p>
+        </p:txBody>
+      </p:sp>
+      <p:sp>
+        <p:nvSpPr>
+          <p:cNvPr id="10" name="TextBox 9"/>
           <p:cNvSpPr txBox="1"/>
           <p:nvPr/>
         </p:nvSpPr>
         <p:spPr>
           <a:xfrm>
-            <a:off x="786384" y="5239512"/>
-            <a:ext cx="1261872" cy="237744"/>
+            <a:off x="749808" y="6181344"/>
+            <a:ext cx="10789920" cy="201168"/>
           </a:xfrm>
           <a:prstGeom prst="rect">
             <a:avLst/>
@@ -18801,54 +19179,15 @@
               <a:spcAft>
                 <a:spcPts val="0"/>
               </a:spcAft>
-              <a:defRPr sz="1800" b="1">
-                <a:solidFill>
-                  <a:srgbClr val="2A8B5A"/>
-                </a:solidFill>
-                <a:latin typeface="Noto Sans CJK KR"/>
-              </a:defRPr>
-            </a:pPr>
-            <a:r>
-              <a:t>확인 기준</a:t>
-            </a:r>
-          </a:p>
-        </p:txBody>
-      </p:sp>
-      <p:sp>
-        <p:nvSpPr>
-          <p:cNvPr id="9" name="TextBox 8"/>
-          <p:cNvSpPr txBox="1"/>
-          <p:nvPr/>
-        </p:nvSpPr>
-        <p:spPr>
-          <a:xfrm>
-            <a:off x="786384" y="5532120"/>
-            <a:ext cx="10469880" cy="420624"/>
-          </a:xfrm>
-          <a:prstGeom prst="rect">
-            <a:avLst/>
-          </a:prstGeom>
-          <a:noFill/>
-        </p:spPr>
-        <p:txBody>
-          <a:bodyPr wrap="square" lIns="73152" rIns="73152" tIns="36576" bIns="36576">
-            <a:spAutoFit/>
-          </a:bodyPr>
-          <a:lstStyle/>
-          <a:p>
-            <a:pPr algn="l">
-              <a:spcAft>
-                <a:spcPts val="0"/>
-              </a:spcAft>
-              <a:defRPr sz="1800" b="0">
-                <a:solidFill>
-                  <a:srgbClr val="122C4E"/>
-                </a:solidFill>
-                <a:latin typeface="Noto Sans CJK KR"/>
-              </a:defRPr>
-            </a:pPr>
-            <a:r>
-              <a:t>wheel_radius와 wheel_base 변경이 좌우 바퀴·충돌 형상에 함께 적용된다.</a:t>
+              <a:defRPr sz="1000" b="0">
+                <a:solidFill>
+                  <a:srgbClr val="5C6672"/>
+                </a:solidFill>
+                <a:latin typeface="Noto Sans CJK KR"/>
+              </a:defRPr>
+            </a:pPr>
+            <a:r>
+              <a:t>파일 전체 2/4 · 이 슬라이드 다음에 같은 파일의 나머지 줄이 이어집니다.</a:t>
             </a:r>
           </a:p>
         </p:txBody>
@@ -18905,7 +19244,7 @@
               </a:defRPr>
             </a:pPr>
             <a:r>
-              <a:t>정상 결과: 실제 환경에서 확인한 출력</a:t>
+              <a:t>파일을 계속 작성하고 저장한다 (3/4)</a:t>
             </a:r>
           </a:p>
         </p:txBody>
@@ -18944,7 +19283,7 @@
               </a:defRPr>
             </a:pPr>
             <a:r>
-              <a:t>실제 ROS 2 환경의 파일·패키지·구성 검증 로그</a:t>
+              <a:t>~/agv_ws/src/agv_description/urdf/sensors.xacro</a:t>
             </a:r>
           </a:p>
         </p:txBody>
@@ -19027,30 +19366,64 @@
           </a:p>
         </p:txBody>
       </p:sp>
-      <p:pic>
-        <p:nvPicPr>
-          <p:cNvPr id="6" name="Picture 5" descr="validation_terminal.png"/>
-          <p:cNvPicPr>
-            <a:picLocks noChangeAspect="1"/>
-          </p:cNvPicPr>
-          <p:nvPr/>
-        </p:nvPicPr>
-        <p:blipFill>
-          <a:blip r:embed="rId2"/>
-          <a:stretch>
-            <a:fillRect/>
-          </a:stretch>
-        </p:blipFill>
-        <p:spPr>
-          <a:xfrm>
-            <a:off x="790956" y="1884338"/>
-            <a:ext cx="10607040" cy="3738546"/>
-          </a:xfrm>
-          <a:prstGeom prst="rect">
-            <a:avLst/>
-          </a:prstGeom>
-        </p:spPr>
-      </p:pic>
+      <p:sp>
+        <p:nvSpPr>
+          <p:cNvPr id="6" name="Rectangle 5"/>
+          <p:cNvSpPr/>
+          <p:nvPr/>
+        </p:nvSpPr>
+        <p:spPr>
+          <a:xfrm>
+            <a:off x="566928" y="1188720"/>
+            <a:ext cx="11064240" cy="347472"/>
+          </a:xfrm>
+          <a:prstGeom prst="rect">
+            <a:avLst/>
+          </a:prstGeom>
+          <a:solidFill>
+            <a:srgbClr val="F4F7FB"/>
+          </a:solidFill>
+          <a:ln>
+            <a:solidFill>
+              <a:srgbClr val="F4F7FB"/>
+            </a:solidFill>
+          </a:ln>
+        </p:spPr>
+        <p:style>
+          <a:lnRef idx="1">
+            <a:schemeClr val="accent1"/>
+          </a:lnRef>
+          <a:fillRef idx="3">
+            <a:schemeClr val="accent1"/>
+          </a:fillRef>
+          <a:effectRef idx="2">
+            <a:schemeClr val="accent1"/>
+          </a:effectRef>
+          <a:fontRef idx="minor">
+            <a:schemeClr val="lt1"/>
+          </a:fontRef>
+        </p:style>
+        <p:txBody>
+          <a:bodyPr rtlCol="0" anchor="ctr" wrap="square" lIns="73152" rIns="73152" tIns="36576" bIns="36576"/>
+          <a:lstStyle/>
+          <a:p>
+            <a:pPr algn="l">
+              <a:spcAft>
+                <a:spcPts val="0"/>
+              </a:spcAft>
+              <a:defRPr sz="1300" b="1">
+                <a:solidFill>
+                  <a:srgbClr val="122C4E"/>
+                </a:solidFill>
+                <a:latin typeface="Noto Sans CJK KR"/>
+              </a:defRPr>
+            </a:pPr>
+            <a:r>
+              <a:t>현재 단계 27/29    |    현재 폴더 ~/agv_ws    |    현재 터미널</a:t>
+            </a:r>
+          </a:p>
+        </p:txBody>
+      </p:sp>
       <p:sp>
         <p:nvSpPr>
           <p:cNvPr id="7" name="TextBox 6"/>
@@ -19059,8 +19432,8 @@
         </p:nvSpPr>
         <p:spPr>
           <a:xfrm>
-            <a:off x="777240" y="6217920"/>
-            <a:ext cx="10607040" cy="182880"/>
+            <a:off x="658368" y="1627632"/>
+            <a:ext cx="10972800" cy="256032"/>
           </a:xfrm>
           <a:prstGeom prst="rect">
             <a:avLst/>
@@ -19073,19 +19446,222 @@
           </a:bodyPr>
           <a:lstStyle/>
           <a:p>
-            <a:pPr algn="ctr">
-              <a:spcAft>
-                <a:spcPts val="0"/>
-              </a:spcAft>
-              <a:defRPr sz="1100" b="1">
-                <a:solidFill>
-                  <a:srgbClr val="2A8B5A"/>
-                </a:solidFill>
-                <a:latin typeface="Noto Sans CJK KR"/>
-              </a:defRPr>
-            </a:pPr>
-            <a:r>
-              <a:t>① 명령/설정  ② 정상 출력 또는 화면  ③ 다음 검증 명령으로 재확인</a:t>
+            <a:pPr algn="l">
+              <a:spcAft>
+                <a:spcPts val="0"/>
+              </a:spcAft>
+              <a:defRPr sz="1500" b="1">
+                <a:solidFill>
+                  <a:srgbClr val="122C4E"/>
+                </a:solidFill>
+                <a:latin typeface="Noto Sans CJK KR"/>
+              </a:defRPr>
+            </a:pPr>
+            <a:r>
+              <a:t>이번 단계: 파일의 전체 내용을 중간 생략 없이 작성합니다. 아래 줄 범위를 끝까지 입력하세요.</a:t>
+            </a:r>
+          </a:p>
+        </p:txBody>
+      </p:sp>
+      <p:sp>
+        <p:nvSpPr>
+          <p:cNvPr id="8" name="Rectangle 7"/>
+          <p:cNvSpPr/>
+          <p:nvPr/>
+        </p:nvSpPr>
+        <p:spPr>
+          <a:xfrm>
+            <a:off x="658368" y="1956816"/>
+            <a:ext cx="10972800" cy="603504"/>
+          </a:xfrm>
+          <a:prstGeom prst="rect">
+            <a:avLst/>
+          </a:prstGeom>
+          <a:solidFill>
+            <a:srgbClr val="F4F7FB"/>
+          </a:solidFill>
+          <a:ln>
+            <a:solidFill>
+              <a:srgbClr val="F4F7FB"/>
+            </a:solidFill>
+          </a:ln>
+        </p:spPr>
+        <p:style>
+          <a:lnRef idx="1">
+            <a:schemeClr val="accent1"/>
+          </a:lnRef>
+          <a:fillRef idx="3">
+            <a:schemeClr val="accent1"/>
+          </a:fillRef>
+          <a:effectRef idx="2">
+            <a:schemeClr val="accent1"/>
+          </a:effectRef>
+          <a:fontRef idx="minor">
+            <a:schemeClr val="lt1"/>
+          </a:fontRef>
+        </p:style>
+        <p:txBody>
+          <a:bodyPr rtlCol="0" anchor="ctr" wrap="square" lIns="73152" rIns="73152" tIns="36576" bIns="36576"/>
+          <a:lstStyle/>
+          <a:p>
+            <a:pPr algn="l">
+              <a:spcAft>
+                <a:spcPts val="0"/>
+              </a:spcAft>
+              <a:defRPr sz="1400" b="0">
+                <a:solidFill>
+                  <a:srgbClr val="122C4E"/>
+                </a:solidFill>
+                <a:latin typeface="DejaVu Sans Mono"/>
+              </a:defRPr>
+            </a:pPr>
+            <a:r>
+              <a:t>파일 생성: mkdir -p ~/agv_ws/src/agv_description/urdf</a:t>
+            </a:r>
+            <a:br/>
+            <a:r>
+              <a:t>파일 열기: nano ~/agv_ws/src/agv_description/urdf/sensors.xacro</a:t>
+            </a:r>
+          </a:p>
+        </p:txBody>
+      </p:sp>
+      <p:sp>
+        <p:nvSpPr>
+          <p:cNvPr id="9" name="Rectangle 8"/>
+          <p:cNvSpPr/>
+          <p:nvPr/>
+        </p:nvSpPr>
+        <p:spPr>
+          <a:xfrm>
+            <a:off x="658368" y="2706624"/>
+            <a:ext cx="10972800" cy="3364992"/>
+          </a:xfrm>
+          <a:prstGeom prst="rect">
+            <a:avLst/>
+          </a:prstGeom>
+          <a:solidFill>
+            <a:srgbClr val="1D232D"/>
+          </a:solidFill>
+          <a:ln>
+            <a:solidFill>
+              <a:srgbClr val="1D232D"/>
+            </a:solidFill>
+          </a:ln>
+        </p:spPr>
+        <p:style>
+          <a:lnRef idx="1">
+            <a:schemeClr val="accent1"/>
+          </a:lnRef>
+          <a:fillRef idx="3">
+            <a:schemeClr val="accent1"/>
+          </a:fillRef>
+          <a:effectRef idx="2">
+            <a:schemeClr val="accent1"/>
+          </a:effectRef>
+          <a:fontRef idx="minor">
+            <a:schemeClr val="lt1"/>
+          </a:fontRef>
+        </p:style>
+        <p:txBody>
+          <a:bodyPr rtlCol="0" anchor="ctr" wrap="square" lIns="164592" rIns="164592" tIns="109728" bIns="36576"/>
+          <a:lstStyle/>
+          <a:p>
+            <a:pPr algn="l">
+              <a:spcAft>
+                <a:spcPts val="0"/>
+              </a:spcAft>
+              <a:defRPr sz="1400" b="0">
+                <a:solidFill>
+                  <a:srgbClr val="FFFFFF"/>
+                </a:solidFill>
+                <a:latin typeface="DejaVu Sans Mono"/>
+              </a:defRPr>
+            </a:pPr>
+            <a:r>
+              <a:t>      </a:t>
+            </a:r>
+            <a:br/>
+            <a:r>
+              <a:t>      &lt;inertial&gt;</a:t>
+            </a:r>
+            <a:br/>
+            <a:r>
+              <a:t>        &lt;mass value="0.05"/&gt;</a:t>
+            </a:r>
+            <a:br/>
+            <a:r>
+              <a:t>        &lt;inertia ixx="0.0001" ixy="0" ixz="0" iyy="0.0001" iyz="0" izz="0.0001"/&gt;</a:t>
+            </a:r>
+            <a:br/>
+            <a:r>
+              <a:t>      &lt;/inertial&gt;</a:t>
+            </a:r>
+            <a:br/>
+            <a:r>
+              <a:t>      </a:t>
+            </a:r>
+            <a:br/>
+            <a:r>
+              <a:t>    </a:t>
+            </a:r>
+            <a:br/>
+            <a:r>
+              <a:t>    &lt;/link&gt;</a:t>
+            </a:r>
+            <a:br/>
+            <a:r>
+              <a:t>    </a:t>
+            </a:r>
+            <a:br/>
+            <a:r>
+              <a:t>    </a:t>
+            </a:r>
+            <a:br/>
+            <a:r>
+              <a:t>    &lt;joint name="${name}_joint" type="fixed"&gt;</a:t>
+            </a:r>
+            <a:br/>
+            <a:r>
+              <a:t>      &lt;parent link="${parent}"/&gt;</a:t>
+            </a:r>
+          </a:p>
+        </p:txBody>
+      </p:sp>
+      <p:sp>
+        <p:nvSpPr>
+          <p:cNvPr id="10" name="TextBox 9"/>
+          <p:cNvSpPr txBox="1"/>
+          <p:nvPr/>
+        </p:nvSpPr>
+        <p:spPr>
+          <a:xfrm>
+            <a:off x="749808" y="6181344"/>
+            <a:ext cx="10789920" cy="201168"/>
+          </a:xfrm>
+          <a:prstGeom prst="rect">
+            <a:avLst/>
+          </a:prstGeom>
+          <a:noFill/>
+        </p:spPr>
+        <p:txBody>
+          <a:bodyPr wrap="square" lIns="73152" rIns="73152" tIns="36576" bIns="36576">
+            <a:spAutoFit/>
+          </a:bodyPr>
+          <a:lstStyle/>
+          <a:p>
+            <a:pPr algn="l">
+              <a:spcAft>
+                <a:spcPts val="0"/>
+              </a:spcAft>
+              <a:defRPr sz="1000" b="0">
+                <a:solidFill>
+                  <a:srgbClr val="5C6672"/>
+                </a:solidFill>
+                <a:latin typeface="Noto Sans CJK KR"/>
+              </a:defRPr>
+            </a:pPr>
+            <a:r>
+              <a:t>파일 전체 3/4 · 이 슬라이드 다음에 같은 파일의 나머지 줄이 이어집니다.</a:t>
             </a:r>
           </a:p>
         </p:txBody>
@@ -19142,7 +19718,7 @@
               </a:defRPr>
             </a:pPr>
             <a:r>
-              <a:t>객관적 검증 명령으로 완료를 확인한다</a:t>
+              <a:t>파일을 계속 작성하고 저장한다 (4/4)</a:t>
             </a:r>
           </a:p>
         </p:txBody>
@@ -19181,7 +19757,7 @@
               </a:defRPr>
             </a:pPr>
             <a:r>
-              <a:t>화면만 보지 말고 topic·frame·파일·parameter를 다시 확인합니다.</a:t>
+              <a:t>~/agv_ws/src/agv_description/urdf/sensors.xacro</a:t>
             </a:r>
           </a:p>
         </p:txBody>
@@ -19317,23 +19893,124 @@
               </a:defRPr>
             </a:pPr>
             <a:r>
-              <a:t>현재 단계 검증    |    현재 폴더 ~/agv_ws    |    현재 터미널</a:t>
-            </a:r>
-          </a:p>
-        </p:txBody>
-      </p:sp>
-      <p:sp>
-        <p:nvSpPr>
-          <p:cNvPr id="7" name="Rounded Rectangle 6"/>
+              <a:t>현재 단계 28/29    |    현재 폴더 ~/agv_ws    |    현재 터미널</a:t>
+            </a:r>
+          </a:p>
+        </p:txBody>
+      </p:sp>
+      <p:sp>
+        <p:nvSpPr>
+          <p:cNvPr id="7" name="TextBox 6"/>
+          <p:cNvSpPr txBox="1"/>
+          <p:nvPr/>
+        </p:nvSpPr>
+        <p:spPr>
+          <a:xfrm>
+            <a:off x="658368" y="1627632"/>
+            <a:ext cx="10972800" cy="256032"/>
+          </a:xfrm>
+          <a:prstGeom prst="rect">
+            <a:avLst/>
+          </a:prstGeom>
+          <a:noFill/>
+        </p:spPr>
+        <p:txBody>
+          <a:bodyPr wrap="square" lIns="73152" rIns="73152" tIns="36576" bIns="36576">
+            <a:spAutoFit/>
+          </a:bodyPr>
+          <a:lstStyle/>
+          <a:p>
+            <a:pPr algn="l">
+              <a:spcAft>
+                <a:spcPts val="0"/>
+              </a:spcAft>
+              <a:defRPr sz="1500" b="1">
+                <a:solidFill>
+                  <a:srgbClr val="122C4E"/>
+                </a:solidFill>
+                <a:latin typeface="Noto Sans CJK KR"/>
+              </a:defRPr>
+            </a:pPr>
+            <a:r>
+              <a:t>이번 단계: 파일의 전체 내용을 중간 생략 없이 작성합니다. 아래 줄 범위를 끝까지 입력하세요.</a:t>
+            </a:r>
+          </a:p>
+        </p:txBody>
+      </p:sp>
+      <p:sp>
+        <p:nvSpPr>
+          <p:cNvPr id="8" name="Rectangle 7"/>
           <p:cNvSpPr/>
           <p:nvPr/>
         </p:nvSpPr>
         <p:spPr>
           <a:xfrm>
-            <a:off x="658368" y="1755648"/>
-            <a:ext cx="10972800" cy="2148840"/>
-          </a:xfrm>
-          <a:prstGeom prst="roundRect">
+            <a:off x="658368" y="1956816"/>
+            <a:ext cx="10972800" cy="603504"/>
+          </a:xfrm>
+          <a:prstGeom prst="rect">
+            <a:avLst/>
+          </a:prstGeom>
+          <a:solidFill>
+            <a:srgbClr val="F4F7FB"/>
+          </a:solidFill>
+          <a:ln>
+            <a:solidFill>
+              <a:srgbClr val="F4F7FB"/>
+            </a:solidFill>
+          </a:ln>
+        </p:spPr>
+        <p:style>
+          <a:lnRef idx="1">
+            <a:schemeClr val="accent1"/>
+          </a:lnRef>
+          <a:fillRef idx="3">
+            <a:schemeClr val="accent1"/>
+          </a:fillRef>
+          <a:effectRef idx="2">
+            <a:schemeClr val="accent1"/>
+          </a:effectRef>
+          <a:fontRef idx="minor">
+            <a:schemeClr val="lt1"/>
+          </a:fontRef>
+        </p:style>
+        <p:txBody>
+          <a:bodyPr rtlCol="0" anchor="ctr" wrap="square" lIns="73152" rIns="73152" tIns="36576" bIns="36576"/>
+          <a:lstStyle/>
+          <a:p>
+            <a:pPr algn="l">
+              <a:spcAft>
+                <a:spcPts val="0"/>
+              </a:spcAft>
+              <a:defRPr sz="1400" b="0">
+                <a:solidFill>
+                  <a:srgbClr val="122C4E"/>
+                </a:solidFill>
+                <a:latin typeface="DejaVu Sans Mono"/>
+              </a:defRPr>
+            </a:pPr>
+            <a:r>
+              <a:t>파일 생성: mkdir -p ~/agv_ws/src/agv_description/urdf</a:t>
+            </a:r>
+            <a:br/>
+            <a:r>
+              <a:t>파일 열기: nano ~/agv_ws/src/agv_description/urdf/sensors.xacro</a:t>
+            </a:r>
+          </a:p>
+        </p:txBody>
+      </p:sp>
+      <p:sp>
+        <p:nvSpPr>
+          <p:cNvPr id="9" name="Rectangle 8"/>
+          <p:cNvSpPr/>
+          <p:nvPr/>
+        </p:nvSpPr>
+        <p:spPr>
+          <a:xfrm>
+            <a:off x="658368" y="2706624"/>
+            <a:ext cx="10972800" cy="3364992"/>
+          </a:xfrm>
+          <a:prstGeom prst="rect">
             <a:avLst/>
           </a:prstGeom>
           <a:solidFill>
@@ -19360,14 +20037,14 @@
           </a:fontRef>
         </p:style>
         <p:txBody>
-          <a:bodyPr rtlCol="0" anchor="ctr" wrap="square" lIns="73152" rIns="73152" tIns="36576" bIns="36576"/>
-          <a:lstStyle/>
-          <a:p>
-            <a:pPr algn="l">
-              <a:spcAft>
-                <a:spcPts val="0"/>
-              </a:spcAft>
-              <a:defRPr sz="1600" b="0">
+          <a:bodyPr rtlCol="0" anchor="ctr" wrap="square" lIns="164592" rIns="164592" tIns="109728" bIns="36576"/>
+          <a:lstStyle/>
+          <a:p>
+            <a:pPr algn="l">
+              <a:spcAft>
+                <a:spcPts val="0"/>
+              </a:spcAft>
+              <a:defRPr sz="1400" b="0">
                 <a:solidFill>
                   <a:srgbClr val="FFFFFF"/>
                 </a:solidFill>
@@ -19375,95 +20052,50 @@
               </a:defRPr>
             </a:pPr>
             <a:r>
-              <a:t>xacro ~/agv_ws/src/agv_description/urdf/agv.urdf.xacro &gt; /tmp/agv.urdf</a:t>
-            </a:r>
-            <a:br/>
-            <a:r>
-              <a:t>rg -n 'wheel_radius|left_wheel_joint|right_wheel_joint' /tmp/agv.urdf</a:t>
-            </a:r>
-          </a:p>
-        </p:txBody>
-      </p:sp>
-      <p:sp>
-        <p:nvSpPr>
-          <p:cNvPr id="8" name="Rounded Rectangle 7"/>
-          <p:cNvSpPr/>
-          <p:nvPr/>
-        </p:nvSpPr>
-        <p:spPr>
-          <a:xfrm>
-            <a:off x="658368" y="4206240"/>
-            <a:ext cx="10972800" cy="1554480"/>
-          </a:xfrm>
-          <a:prstGeom prst="roundRect">
-            <a:avLst/>
-          </a:prstGeom>
-          <a:solidFill>
-            <a:srgbClr val="F4F7FB"/>
-          </a:solidFill>
-          <a:ln>
-            <a:solidFill>
-              <a:srgbClr val="D1DFD5"/>
-            </a:solidFill>
-          </a:ln>
-        </p:spPr>
-        <p:style>
-          <a:lnRef idx="1">
-            <a:schemeClr val="accent1"/>
-          </a:lnRef>
-          <a:fillRef idx="3">
-            <a:schemeClr val="accent1"/>
-          </a:fillRef>
-          <a:effectRef idx="2">
-            <a:schemeClr val="accent1"/>
-          </a:effectRef>
-          <a:fontRef idx="minor">
-            <a:schemeClr val="lt1"/>
-          </a:fontRef>
-        </p:style>
-        <p:txBody>
-          <a:bodyPr rtlCol="0" anchor="ctr" wrap="square" lIns="73152" rIns="73152" tIns="36576" bIns="36576"/>
-          <a:lstStyle/>
-          <a:p>
-            <a:pPr algn="l">
-              <a:spcAft>
-                <a:spcPts val="0"/>
-              </a:spcAft>
-              <a:defRPr sz="1800" b="1">
-                <a:solidFill>
-                  <a:srgbClr val="2A8B5A"/>
-                </a:solidFill>
-                <a:latin typeface="Noto Sans CJK KR"/>
-              </a:defRPr>
-            </a:pPr>
-            <a:r>
-              <a:t>완료 체크</a:t>
-            </a:r>
-            <a:br/>
-            <a:r>
-              <a:t>□ 명령이 오류 없이 실행된다.</a:t>
-            </a:r>
-            <a:br/>
-            <a:r>
-              <a:t>□ 기대한 파일·topic·frame·parameter 이름이 보인다.</a:t>
-            </a:r>
-            <a:br/>
-            <a:r>
-              <a:t>□ 값의 단위와 방향을 한 문장으로 설명할 수 있다.</a:t>
-            </a:r>
-          </a:p>
-        </p:txBody>
-      </p:sp>
-      <p:sp>
-        <p:nvSpPr>
-          <p:cNvPr id="9" name="TextBox 8"/>
+              <a:t>      &lt;child link="${name}_link"/&gt;</a:t>
+            </a:r>
+            <a:br/>
+            <a:r>
+              <a:t>      &lt;origin xyz="${xyz}" rpy="${rpy}"/&gt;</a:t>
+            </a:r>
+            <a:br/>
+            <a:r>
+              <a:t>    &lt;/joint&gt;</a:t>
+            </a:r>
+            <a:br/>
+            <a:r>
+              <a:t>    </a:t>
+            </a:r>
+            <a:br/>
+            <a:r>
+              <a:t>  </a:t>
+            </a:r>
+            <a:br/>
+            <a:r>
+              <a:t>  &lt;/xacro:macro&gt;</a:t>
+            </a:r>
+            <a:br/>
+            <a:r>
+              <a:t>  </a:t>
+            </a:r>
+            <a:br/>
+            <a:br/>
+            <a:r>
+              <a:t>&lt;/robot&gt;</a:t>
+            </a:r>
+          </a:p>
+        </p:txBody>
+      </p:sp>
+      <p:sp>
+        <p:nvSpPr>
+          <p:cNvPr id="10" name="TextBox 9"/>
           <p:cNvSpPr txBox="1"/>
           <p:nvPr/>
         </p:nvSpPr>
         <p:spPr>
           <a:xfrm>
-            <a:off x="731520" y="5989320"/>
-            <a:ext cx="10789920" cy="237744"/>
+            <a:off x="749808" y="6181344"/>
+            <a:ext cx="10789920" cy="201168"/>
           </a:xfrm>
           <a:prstGeom prst="rect">
             <a:avLst/>
@@ -19480,15 +20112,15 @@
               <a:spcAft>
                 <a:spcPts val="0"/>
               </a:spcAft>
-              <a:defRPr sz="1500" b="1">
-                <a:solidFill>
-                  <a:srgbClr val="122C4E"/>
-                </a:solidFill>
-                <a:latin typeface="Noto Sans CJK KR"/>
-              </a:defRPr>
-            </a:pPr>
-            <a:r>
-              <a:t>완료 조건: wheel_radius와 wheel_base 변경이 좌우 바퀴·충돌 형상에 함께 적용된다.</a:t>
+              <a:defRPr sz="1000" b="0">
+                <a:solidFill>
+                  <a:srgbClr val="5C6672"/>
+                </a:solidFill>
+                <a:latin typeface="Noto Sans CJK KR"/>
+              </a:defRPr>
+            </a:pPr>
+            <a:r>
+              <a:t>파일 전체 4/4 · 이 슬라이드 다음에 같은 파일의 나머지 줄이 이어집니다.</a:t>
             </a:r>
           </a:p>
         </p:txBody>
@@ -19545,7 +20177,7 @@
               </a:defRPr>
             </a:pPr>
             <a:r>
-              <a:t>막히면: 증상 → 우선 확인 → 재검증</a:t>
+              <a:t>build → source → run 순서로 실행한다</a:t>
             </a:r>
           </a:p>
         </p:txBody>
@@ -19584,7 +20216,7 @@
               </a:defRPr>
             </a:pPr>
             <a:r>
-              <a:t>오류 메시지를 숨기지 않고 같은 순서로 점검합니다.</a:t>
+              <a:t>새 파일 또는 수정 파일은 build와 source 뒤에만 실행 이름·설정에 반영됩니다.</a:t>
             </a:r>
           </a:p>
         </p:txBody>
@@ -19720,7 +20352,7 @@
               </a:defRPr>
             </a:pPr>
             <a:r>
-              <a:t>현재 단계 오류 대응    |    현재 폴더 ~/agv_ws    |    현재 터미널</a:t>
+              <a:t>현재 단계 실행    |    현재 폴더 ~/agv_ws    |    현재 터미널</a:t>
             </a:r>
           </a:p>
         </p:txBody>
@@ -19733,18 +20365,18 @@
         </p:nvSpPr>
         <p:spPr>
           <a:xfrm>
-            <a:off x="694944" y="1755648"/>
-            <a:ext cx="10972800" cy="1115568"/>
+            <a:off x="658368" y="1700784"/>
+            <a:ext cx="10972800" cy="3182112"/>
           </a:xfrm>
           <a:prstGeom prst="roundRect">
             <a:avLst/>
           </a:prstGeom>
           <a:solidFill>
-            <a:srgbClr val="FFF7F4"/>
+            <a:srgbClr val="1D232D"/>
           </a:solidFill>
           <a:ln>
             <a:solidFill>
-              <a:srgbClr val="EDBEB4"/>
+              <a:srgbClr val="1D232D"/>
             </a:solidFill>
           </a:ln>
         </p:spPr>
@@ -19763,10 +20395,27 @@
           </a:fontRef>
         </p:style>
         <p:txBody>
-          <a:bodyPr rtlCol="0" anchor="ctr"/>
-          <a:lstStyle/>
-          <a:p>
-            <a:pPr algn="ctr"/>
+          <a:bodyPr rtlCol="0" anchor="ctr" wrap="square" lIns="73152" rIns="73152" tIns="36576" bIns="36576"/>
+          <a:lstStyle/>
+          <a:p>
+            <a:pPr algn="l">
+              <a:spcAft>
+                <a:spcPts val="0"/>
+              </a:spcAft>
+              <a:defRPr sz="1600" b="0">
+                <a:solidFill>
+                  <a:srgbClr val="FFFFFF"/>
+                </a:solidFill>
+                <a:latin typeface="DejaVu Sans Mono"/>
+              </a:defRPr>
+            </a:pPr>
+            <a:r>
+              <a:t>xacro ~/agv_ws/src/agv_description/urdf/agv.urdf.xacro &gt; /tmp/agv.urdf</a:t>
+            </a:r>
+            <a:br/>
+            <a:r>
+              <a:t>check_urdf /tmp/agv.urdf</a:t>
+            </a:r>
           </a:p>
         </p:txBody>
       </p:sp>
@@ -19778,8 +20427,8 @@
         </p:nvSpPr>
         <p:spPr>
           <a:xfrm>
-            <a:off x="896112" y="1901952"/>
-            <a:ext cx="2926080" cy="274320"/>
+            <a:off x="786384" y="5239512"/>
+            <a:ext cx="1261872" cy="237744"/>
           </a:xfrm>
           <a:prstGeom prst="rect">
             <a:avLst/>
@@ -19798,13 +20447,13 @@
               </a:spcAft>
               <a:defRPr sz="1800" b="1">
                 <a:solidFill>
-                  <a:srgbClr val="BE3B3B"/>
-                </a:solidFill>
-                <a:latin typeface="Noto Sans CJK KR"/>
-              </a:defRPr>
-            </a:pPr>
-            <a:r>
-              <a:t>증상 1: unknown macro/property</a:t>
+                  <a:srgbClr val="2A8B5A"/>
+                </a:solidFill>
+                <a:latin typeface="Noto Sans CJK KR"/>
+              </a:defRPr>
+            </a:pPr>
+            <a:r>
+              <a:t>확인 기준</a:t>
             </a:r>
           </a:p>
         </p:txBody>
@@ -19817,8 +20466,8 @@
         </p:nvSpPr>
         <p:spPr>
           <a:xfrm>
-            <a:off x="3794760" y="1883664"/>
-            <a:ext cx="7543800" cy="621792"/>
+            <a:off x="786384" y="5532120"/>
+            <a:ext cx="10469880" cy="420624"/>
           </a:xfrm>
           <a:prstGeom prst="rect">
             <a:avLst/>
@@ -19835,7 +20484,7 @@
               <a:spcAft>
                 <a:spcPts val="0"/>
               </a:spcAft>
-              <a:defRPr sz="1600" b="0">
+              <a:defRPr sz="1800" b="0">
                 <a:solidFill>
                   <a:srgbClr val="122C4E"/>
                 </a:solidFill>
@@ -19843,177 +20492,7 @@
               </a:defRPr>
             </a:pPr>
             <a:r>
-              <a:t>우선 확인: 선언 순서·xacro namespace·철자를 확인한다.</a:t>
-            </a:r>
-            <a:br/>
-            <a:r>
-              <a:t>수정 후: xacro ~/agv_ws/src/agv_description/urdf/agv.urdf.xacro &gt; /tmp/agv.urdf</a:t>
-            </a:r>
-          </a:p>
-        </p:txBody>
-      </p:sp>
-      <p:sp>
-        <p:nvSpPr>
-          <p:cNvPr id="10" name="Rounded Rectangle 9"/>
-          <p:cNvSpPr/>
-          <p:nvPr/>
-        </p:nvSpPr>
-        <p:spPr>
-          <a:xfrm>
-            <a:off x="694944" y="3172968"/>
-            <a:ext cx="10972800" cy="1115568"/>
-          </a:xfrm>
-          <a:prstGeom prst="roundRect">
-            <a:avLst/>
-          </a:prstGeom>
-          <a:solidFill>
-            <a:srgbClr val="FFF7F4"/>
-          </a:solidFill>
-          <a:ln>
-            <a:solidFill>
-              <a:srgbClr val="EDBEB4"/>
-            </a:solidFill>
-          </a:ln>
-        </p:spPr>
-        <p:style>
-          <a:lnRef idx="1">
-            <a:schemeClr val="accent1"/>
-          </a:lnRef>
-          <a:fillRef idx="3">
-            <a:schemeClr val="accent1"/>
-          </a:fillRef>
-          <a:effectRef idx="2">
-            <a:schemeClr val="accent1"/>
-          </a:effectRef>
-          <a:fontRef idx="minor">
-            <a:schemeClr val="lt1"/>
-          </a:fontRef>
-        </p:style>
-        <p:txBody>
-          <a:bodyPr rtlCol="0" anchor="ctr"/>
-          <a:lstStyle/>
-          <a:p>
-            <a:pPr algn="ctr"/>
-          </a:p>
-        </p:txBody>
-      </p:sp>
-      <p:sp>
-        <p:nvSpPr>
-          <p:cNvPr id="11" name="TextBox 10"/>
-          <p:cNvSpPr txBox="1"/>
-          <p:nvPr/>
-        </p:nvSpPr>
-        <p:spPr>
-          <a:xfrm>
-            <a:off x="896112" y="3319272"/>
-            <a:ext cx="2926080" cy="274320"/>
-          </a:xfrm>
-          <a:prstGeom prst="rect">
-            <a:avLst/>
-          </a:prstGeom>
-          <a:noFill/>
-        </p:spPr>
-        <p:txBody>
-          <a:bodyPr wrap="square" lIns="73152" rIns="73152" tIns="36576" bIns="36576">
-            <a:spAutoFit/>
-          </a:bodyPr>
-          <a:lstStyle/>
-          <a:p>
-            <a:pPr algn="l">
-              <a:spcAft>
-                <a:spcPts val="0"/>
-              </a:spcAft>
-              <a:defRPr sz="1800" b="1">
-                <a:solidFill>
-                  <a:srgbClr val="BE3B3B"/>
-                </a:solidFill>
-                <a:latin typeface="Noto Sans CJK KR"/>
-              </a:defRPr>
-            </a:pPr>
-            <a:r>
-              <a:t>증상 2: include file not found</a:t>
-            </a:r>
-          </a:p>
-        </p:txBody>
-      </p:sp>
-      <p:sp>
-        <p:nvSpPr>
-          <p:cNvPr id="12" name="TextBox 11"/>
-          <p:cNvSpPr txBox="1"/>
-          <p:nvPr/>
-        </p:nvSpPr>
-        <p:spPr>
-          <a:xfrm>
-            <a:off x="3794760" y="3300984"/>
-            <a:ext cx="7543800" cy="621792"/>
-          </a:xfrm>
-          <a:prstGeom prst="rect">
-            <a:avLst/>
-          </a:prstGeom>
-          <a:noFill/>
-        </p:spPr>
-        <p:txBody>
-          <a:bodyPr wrap="square" lIns="73152" rIns="73152" tIns="36576" bIns="36576">
-            <a:spAutoFit/>
-          </a:bodyPr>
-          <a:lstStyle/>
-          <a:p>
-            <a:pPr algn="l">
-              <a:spcAft>
-                <a:spcPts val="0"/>
-              </a:spcAft>
-              <a:defRPr sz="1600" b="0">
-                <a:solidFill>
-                  <a:srgbClr val="122C4E"/>
-                </a:solidFill>
-                <a:latin typeface="Noto Sans CJK KR"/>
-              </a:defRPr>
-            </a:pPr>
-            <a:r>
-              <a:t>우선 확인: 패키지 이름과 설치 대상·파일 경로를 확인한다.</a:t>
-            </a:r>
-            <a:br/>
-            <a:r>
-              <a:t>수정 후: xacro ~/agv_ws/src/agv_description/urdf/agv.urdf.xacro &gt; /tmp/agv.urdf</a:t>
-            </a:r>
-          </a:p>
-        </p:txBody>
-      </p:sp>
-      <p:sp>
-        <p:nvSpPr>
-          <p:cNvPr id="13" name="TextBox 12"/>
-          <p:cNvSpPr txBox="1"/>
-          <p:nvPr/>
-        </p:nvSpPr>
-        <p:spPr>
-          <a:xfrm>
-            <a:off x="822960" y="5102352"/>
-            <a:ext cx="10607040" cy="402336"/>
-          </a:xfrm>
-          <a:prstGeom prst="rect">
-            <a:avLst/>
-          </a:prstGeom>
-          <a:noFill/>
-        </p:spPr>
-        <p:txBody>
-          <a:bodyPr wrap="square" lIns="73152" rIns="73152" tIns="36576" bIns="36576">
-            <a:spAutoFit/>
-          </a:bodyPr>
-          <a:lstStyle/>
-          <a:p>
-            <a:pPr algn="ctr">
-              <a:spcAft>
-                <a:spcPts val="0"/>
-              </a:spcAft>
-              <a:defRPr sz="1800" b="1">
-                <a:solidFill>
-                  <a:srgbClr val="DB7E22"/>
-                </a:solidFill>
-                <a:latin typeface="Noto Sans CJK KR"/>
-              </a:defRPr>
-            </a:pPr>
-            <a:r>
-              <a:t>공통 순서: ① 현재 폴더 ② source ③ 파일 경로 ④ 이름/타입/단위 ⑤ build·source 후 재실행</a:t>
+              <a:t>wheel_radius와 wheel_base 변경이 좌우 바퀴·충돌 형상에 함께 적용된다.</a:t>
             </a:r>
           </a:p>
         </p:txBody>
@@ -20070,7 +20549,7 @@
               </a:defRPr>
             </a:pPr>
             <a:r>
-              <a:t>미니 실습: 값 하나를 바꾸고 결과를 비교한다</a:t>
+              <a:t>정상 결과: 실제 환경에서 확인한 출력</a:t>
             </a:r>
           </a:p>
         </p:txBody>
@@ -20109,7 +20588,7 @@
               </a:defRPr>
             </a:pPr>
             <a:r>
-              <a:t>정상 결과를 만든 뒤에는 한 번에 하나의 값만 바꿉니다.</a:t>
+              <a:t>실제 ROS 2 환경의 파일·패키지·구성 검증 로그</a:t>
             </a:r>
           </a:p>
         </p:txBody>
@@ -20192,132 +20671,40 @@
           </a:p>
         </p:txBody>
       </p:sp>
-      <p:sp>
-        <p:nvSpPr>
-          <p:cNvPr id="6" name="Rectangle 5"/>
-          <p:cNvSpPr/>
-          <p:nvPr/>
-        </p:nvSpPr>
-        <p:spPr>
-          <a:xfrm>
-            <a:off x="566928" y="1188720"/>
-            <a:ext cx="11064240" cy="347472"/>
-          </a:xfrm>
-          <a:prstGeom prst="rect">
-            <a:avLst/>
-          </a:prstGeom>
-          <a:solidFill>
-            <a:srgbClr val="F4F7FB"/>
-          </a:solidFill>
-          <a:ln>
-            <a:solidFill>
-              <a:srgbClr val="F4F7FB"/>
-            </a:solidFill>
-          </a:ln>
-        </p:spPr>
-        <p:style>
-          <a:lnRef idx="1">
-            <a:schemeClr val="accent1"/>
-          </a:lnRef>
-          <a:fillRef idx="3">
-            <a:schemeClr val="accent1"/>
-          </a:fillRef>
-          <a:effectRef idx="2">
-            <a:schemeClr val="accent1"/>
-          </a:effectRef>
-          <a:fontRef idx="minor">
-            <a:schemeClr val="lt1"/>
-          </a:fontRef>
-        </p:style>
-        <p:txBody>
-          <a:bodyPr rtlCol="0" anchor="ctr" wrap="square" lIns="73152" rIns="73152" tIns="36576" bIns="36576"/>
-          <a:lstStyle/>
-          <a:p>
-            <a:pPr algn="l">
-              <a:spcAft>
-                <a:spcPts val="0"/>
-              </a:spcAft>
-              <a:defRPr sz="1300" b="1">
-                <a:solidFill>
-                  <a:srgbClr val="122C4E"/>
-                </a:solidFill>
-                <a:latin typeface="Noto Sans CJK KR"/>
-              </a:defRPr>
-            </a:pPr>
-            <a:r>
-              <a:t>현재 단계 미니 실습    |    현재 폴더 ~/agv_ws    |    현재 터미널</a:t>
-            </a:r>
-          </a:p>
-        </p:txBody>
-      </p:sp>
-      <p:sp>
-        <p:nvSpPr>
-          <p:cNvPr id="7" name="Rounded Rectangle 6"/>
-          <p:cNvSpPr/>
-          <p:nvPr/>
-        </p:nvSpPr>
-        <p:spPr>
-          <a:xfrm>
-            <a:off x="749808" y="1874519"/>
-            <a:ext cx="10652760" cy="1993392"/>
-          </a:xfrm>
-          <a:prstGeom prst="roundRect">
-            <a:avLst/>
-          </a:prstGeom>
-          <a:solidFill>
-            <a:srgbClr val="FFF8EB"/>
-          </a:solidFill>
-          <a:ln>
-            <a:solidFill>
-              <a:srgbClr val="ECC680"/>
-            </a:solidFill>
-          </a:ln>
-        </p:spPr>
-        <p:style>
-          <a:lnRef idx="1">
-            <a:schemeClr val="accent1"/>
-          </a:lnRef>
-          <a:fillRef idx="3">
-            <a:schemeClr val="accent1"/>
-          </a:fillRef>
-          <a:effectRef idx="2">
-            <a:schemeClr val="accent1"/>
-          </a:effectRef>
-          <a:fontRef idx="minor">
-            <a:schemeClr val="lt1"/>
-          </a:fontRef>
-        </p:style>
-        <p:txBody>
-          <a:bodyPr rtlCol="0" anchor="ctr" wrap="square" lIns="73152" rIns="73152" tIns="36576" bIns="36576"/>
-          <a:lstStyle/>
-          <a:p>
-            <a:pPr algn="ctr">
-              <a:spcAft>
-                <a:spcPts val="0"/>
-              </a:spcAft>
-              <a:defRPr sz="2300" b="1">
-                <a:solidFill>
-                  <a:srgbClr val="122C4E"/>
-                </a:solidFill>
-                <a:latin typeface="Noto Sans CJK KR"/>
-              </a:defRPr>
-            </a:pPr>
-            <a:r>
-              <a:t>wheel_radius 0.08→0.12 m를 적용한 뒤 joint origin과 cylinder radius가 함께 바뀌는지 비교한다.</a:t>
-            </a:r>
-          </a:p>
-        </p:txBody>
-      </p:sp>
-      <p:sp>
-        <p:nvSpPr>
-          <p:cNvPr id="8" name="TextBox 7"/>
+      <p:pic>
+        <p:nvPicPr>
+          <p:cNvPr id="6" name="Picture 5" descr="validation_terminal.png"/>
+          <p:cNvPicPr>
+            <a:picLocks noChangeAspect="1"/>
+          </p:cNvPicPr>
+          <p:nvPr/>
+        </p:nvPicPr>
+        <p:blipFill>
+          <a:blip r:embed="rId2"/>
+          <a:stretch>
+            <a:fillRect/>
+          </a:stretch>
+        </p:blipFill>
+        <p:spPr>
+          <a:xfrm>
+            <a:off x="790956" y="1884338"/>
+            <a:ext cx="10607040" cy="3738546"/>
+          </a:xfrm>
+          <a:prstGeom prst="rect">
+            <a:avLst/>
+          </a:prstGeom>
+        </p:spPr>
+      </p:pic>
+      <p:sp>
+        <p:nvSpPr>
+          <p:cNvPr id="7" name="TextBox 6"/>
           <p:cNvSpPr txBox="1"/>
           <p:nvPr/>
         </p:nvSpPr>
         <p:spPr>
           <a:xfrm>
-            <a:off x="877824" y="4590288"/>
-            <a:ext cx="10241280" cy="594360"/>
+            <a:off x="777240" y="6217920"/>
+            <a:ext cx="10607040" cy="182880"/>
           </a:xfrm>
           <a:prstGeom prst="rect">
             <a:avLst/>
@@ -20334,15 +20721,15 @@
               <a:spcAft>
                 <a:spcPts val="0"/>
               </a:spcAft>
-              <a:defRPr sz="1900" b="1">
-                <a:solidFill>
-                  <a:srgbClr val="DB7E22"/>
-                </a:solidFill>
-                <a:latin typeface="Noto Sans CJK KR"/>
-              </a:defRPr>
-            </a:pPr>
-            <a:r>
-              <a:t>기록할 것: 바꾼 값(단위) · 기대한 변화 · 실제 출력/화면 · 원래 값으로 되돌린 결과</a:t>
+              <a:defRPr sz="1100" b="1">
+                <a:solidFill>
+                  <a:srgbClr val="2A8B5A"/>
+                </a:solidFill>
+                <a:latin typeface="Noto Sans CJK KR"/>
+              </a:defRPr>
+            </a:pPr>
+            <a:r>
+              <a:t>① 명령/설정  ② 정상 출력 또는 화면  ③ 다음 검증 명령으로 재확인</a:t>
             </a:r>
           </a:p>
         </p:txBody>
@@ -20399,7 +20786,7 @@
               </a:defRPr>
             </a:pPr>
             <a:r>
-              <a:t>체크포인트를 저장하고 다음 모듈로 넘긴다</a:t>
+              <a:t>객관적 검증 명령으로 완료를 확인한다</a:t>
             </a:r>
           </a:p>
         </p:txBody>
@@ -20438,7 +20825,7 @@
               </a:defRPr>
             </a:pPr>
             <a:r>
-              <a:t>현재 Complete는 다음 Starter의 기준선입니다.</a:t>
+              <a:t>화면만 보지 말고 topic·frame·파일·parameter를 다시 확인합니다.</a:t>
             </a:r>
           </a:p>
         </p:txBody>
@@ -20574,7 +20961,7 @@
               </a:defRPr>
             </a:pPr>
             <a:r>
-              <a:t>현재 단계 체크포인트    |    현재 폴더 ~/agv_ws    |    현재 터미널</a:t>
+              <a:t>현재 단계 검증    |    현재 폴더 ~/agv_ws    |    현재 터미널</a:t>
             </a:r>
           </a:p>
         </p:txBody>
@@ -20587,8 +20974,70 @@
         </p:nvSpPr>
         <p:spPr>
           <a:xfrm>
-            <a:off x="685800" y="1737360"/>
-            <a:ext cx="10972800" cy="3611880"/>
+            <a:off x="658368" y="1755648"/>
+            <a:ext cx="10972800" cy="2148840"/>
+          </a:xfrm>
+          <a:prstGeom prst="roundRect">
+            <a:avLst/>
+          </a:prstGeom>
+          <a:solidFill>
+            <a:srgbClr val="1D232D"/>
+          </a:solidFill>
+          <a:ln>
+            <a:solidFill>
+              <a:srgbClr val="1D232D"/>
+            </a:solidFill>
+          </a:ln>
+        </p:spPr>
+        <p:style>
+          <a:lnRef idx="1">
+            <a:schemeClr val="accent1"/>
+          </a:lnRef>
+          <a:fillRef idx="3">
+            <a:schemeClr val="accent1"/>
+          </a:fillRef>
+          <a:effectRef idx="2">
+            <a:schemeClr val="accent1"/>
+          </a:effectRef>
+          <a:fontRef idx="minor">
+            <a:schemeClr val="lt1"/>
+          </a:fontRef>
+        </p:style>
+        <p:txBody>
+          <a:bodyPr rtlCol="0" anchor="ctr" wrap="square" lIns="73152" rIns="73152" tIns="36576" bIns="36576"/>
+          <a:lstStyle/>
+          <a:p>
+            <a:pPr algn="l">
+              <a:spcAft>
+                <a:spcPts val="0"/>
+              </a:spcAft>
+              <a:defRPr sz="1600" b="0">
+                <a:solidFill>
+                  <a:srgbClr val="FFFFFF"/>
+                </a:solidFill>
+                <a:latin typeface="DejaVu Sans Mono"/>
+              </a:defRPr>
+            </a:pPr>
+            <a:r>
+              <a:t>xacro ~/agv_ws/src/agv_description/urdf/agv.urdf.xacro &gt; /tmp/agv.urdf</a:t>
+            </a:r>
+            <a:br/>
+            <a:r>
+              <a:t>rg -n 'wheel_radius|left_wheel_joint|right_wheel_joint' /tmp/agv.urdf</a:t>
+            </a:r>
+          </a:p>
+        </p:txBody>
+      </p:sp>
+      <p:sp>
+        <p:nvSpPr>
+          <p:cNvPr id="8" name="Rounded Rectangle 7"/>
+          <p:cNvSpPr/>
+          <p:nvPr/>
+        </p:nvSpPr>
+        <p:spPr>
+          <a:xfrm>
+            <a:off x="658368" y="4206240"/>
+            <a:ext cx="10972800" cy="1554480"/>
           </a:xfrm>
           <a:prstGeom prst="roundRect">
             <a:avLst/>
@@ -20598,7 +21047,7 @@
           </a:solidFill>
           <a:ln>
             <a:solidFill>
-              <a:srgbClr val="D2DCE8"/>
+              <a:srgbClr val="D1DFD5"/>
             </a:solidFill>
           </a:ln>
         </p:spPr>
@@ -20617,112 +21066,34 @@
           </a:fontRef>
         </p:style>
         <p:txBody>
-          <a:bodyPr rtlCol="0" anchor="ctr"/>
-          <a:lstStyle/>
-          <a:p>
-            <a:pPr algn="ctr"/>
-          </a:p>
-        </p:txBody>
-      </p:sp>
-      <p:sp>
-        <p:nvSpPr>
-          <p:cNvPr id="8" name="TextBox 7"/>
-          <p:cNvSpPr txBox="1"/>
-          <p:nvPr/>
-        </p:nvSpPr>
-        <p:spPr>
-          <a:xfrm>
-            <a:off x="896112" y="1993392"/>
-            <a:ext cx="10332720" cy="2971800"/>
-          </a:xfrm>
-          <a:prstGeom prst="rect">
-            <a:avLst/>
-          </a:prstGeom>
-          <a:noFill/>
-        </p:spPr>
-        <p:txBody>
-          <a:bodyPr wrap="square" lIns="109728" rIns="109728">
-            <a:spAutoFit/>
-          </a:bodyPr>
-          <a:lstStyle/>
-          <a:p>
-            <a:pPr>
-              <a:spcAft>
-                <a:spcPts val="800"/>
-              </a:spcAft>
-              <a:defRPr sz="1800">
-                <a:solidFill>
-                  <a:srgbClr val="122C4E"/>
-                </a:solidFill>
-                <a:latin typeface="Noto Sans CJK KR"/>
-              </a:defRPr>
-            </a:pPr>
-            <a:r>
-              <a:t>• □ 완료 화면: wheel_radius와 wheel_base 변경이 좌우 바퀴·충돌 형상에 함께 적용된다.</a:t>
-            </a:r>
-          </a:p>
-          <a:p>
-            <a:pPr>
-              <a:spcAft>
-                <a:spcPts val="800"/>
-              </a:spcAft>
-              <a:defRPr sz="1800">
-                <a:solidFill>
-                  <a:srgbClr val="122C4E"/>
-                </a:solidFill>
-                <a:latin typeface="Noto Sans CJK KR"/>
-              </a:defRPr>
-            </a:pPr>
-            <a:r>
-              <a:t>• □ Complete 파일: blocks/B_robot_build/M06_xacro_modularization/complete/</a:t>
-            </a:r>
-          </a:p>
-          <a:p>
-            <a:pPr>
-              <a:spcAft>
-                <a:spcPts val="800"/>
-              </a:spcAft>
-              <a:defRPr sz="1800">
-                <a:solidFill>
-                  <a:srgbClr val="122C4E"/>
-                </a:solidFill>
-                <a:latin typeface="Noto Sans CJK KR"/>
-              </a:defRPr>
-            </a:pPr>
-            <a:r>
-              <a:t>• □ 정상 로그·캡처: logs/validation.log, screenshots/validation_terminal.png</a:t>
-            </a:r>
-          </a:p>
-          <a:p>
-            <a:pPr>
-              <a:spcAft>
-                <a:spcPts val="800"/>
-              </a:spcAft>
-              <a:defRPr sz="1800">
-                <a:solidFill>
-                  <a:srgbClr val="122C4E"/>
-                </a:solidFill>
-                <a:latin typeface="Noto Sans CJK KR"/>
-              </a:defRPr>
-            </a:pPr>
-            <a:r>
-              <a:t>• □ 버전 식별: CHECKSUM_or_TAG.txt의 SHA-256 manifest</a:t>
-            </a:r>
-          </a:p>
-          <a:p>
-            <a:pPr>
-              <a:spcAft>
-                <a:spcPts val="800"/>
-              </a:spcAft>
-              <a:defRPr sz="1800">
-                <a:solidFill>
-                  <a:srgbClr val="122C4E"/>
-                </a:solidFill>
-                <a:latin typeface="Noto Sans CJK KR"/>
-              </a:defRPr>
-            </a:pPr>
-            <a:r>
-              <a:t>• □ 다음 시작 조건: M07 Gazebo 물리</a:t>
+          <a:bodyPr rtlCol="0" anchor="ctr" wrap="square" lIns="73152" rIns="73152" tIns="36576" bIns="36576"/>
+          <a:lstStyle/>
+          <a:p>
+            <a:pPr algn="l">
+              <a:spcAft>
+                <a:spcPts val="0"/>
+              </a:spcAft>
+              <a:defRPr sz="1800" b="1">
+                <a:solidFill>
+                  <a:srgbClr val="2A8B5A"/>
+                </a:solidFill>
+                <a:latin typeface="Noto Sans CJK KR"/>
+              </a:defRPr>
+            </a:pPr>
+            <a:r>
+              <a:t>완료 체크</a:t>
+            </a:r>
+            <a:br/>
+            <a:r>
+              <a:t>□ 명령이 오류 없이 실행된다.</a:t>
+            </a:r>
+            <a:br/>
+            <a:r>
+              <a:t>□ 기대한 파일·topic·frame·parameter 이름이 보인다.</a:t>
+            </a:r>
+            <a:br/>
+            <a:r>
+              <a:t>□ 값의 단위와 방향을 한 문장으로 설명할 수 있다.</a:t>
             </a:r>
           </a:p>
         </p:txBody>
@@ -20735,8 +21106,8 @@
         </p:nvSpPr>
         <p:spPr>
           <a:xfrm>
-            <a:off x="868680" y="5596128"/>
-            <a:ext cx="10515600" cy="338328"/>
+            <a:off x="731520" y="5989320"/>
+            <a:ext cx="10789920" cy="237744"/>
           </a:xfrm>
           <a:prstGeom prst="rect">
             <a:avLst/>
@@ -20749,19 +21120,19 @@
           </a:bodyPr>
           <a:lstStyle/>
           <a:p>
-            <a:pPr algn="ctr">
-              <a:spcAft>
-                <a:spcPts val="0"/>
-              </a:spcAft>
-              <a:defRPr sz="1700" b="1">
-                <a:solidFill>
-                  <a:srgbClr val="2A8B5A"/>
-                </a:solidFill>
-                <a:latin typeface="Noto Sans CJK KR"/>
-              </a:defRPr>
-            </a:pPr>
-            <a:r>
-              <a:t>다음 모듈을 시작하기 전, 이 슬라이드의 Complete와 다음 모듈의 Starter를 비교합니다.</a:t>
+            <a:pPr algn="l">
+              <a:spcAft>
+                <a:spcPts val="0"/>
+              </a:spcAft>
+              <a:defRPr sz="1500" b="1">
+                <a:solidFill>
+                  <a:srgbClr val="122C4E"/>
+                </a:solidFill>
+                <a:latin typeface="Noto Sans CJK KR"/>
+              </a:defRPr>
+            </a:pPr>
+            <a:r>
+              <a:t>완료 조건: wheel_radius와 wheel_base 변경이 좌우 바퀴·충돌 형상에 함께 적용된다.</a:t>
             </a:r>
           </a:p>
         </p:txBody>
@@ -20818,7 +21189,7 @@
               </a:defRPr>
             </a:pPr>
             <a:r>
-              <a:t>공식 참고 자료</a:t>
+              <a:t>막히면: 증상 → 우선 확인 → 재검증</a:t>
             </a:r>
           </a:p>
         </p:txBody>
@@ -20857,7 +21228,7 @@
               </a:defRPr>
             </a:pPr>
             <a:r>
-              <a:t>본문 단계는 링크를 열지 않아도 완료할 수 있으며, 링크는 개념을 더 확인할 때만 사용합니다.</a:t>
+              <a:t>오류 메시지를 숨기지 않고 같은 순서로 점검합니다.</a:t>
             </a:r>
           </a:p>
         </p:txBody>
@@ -20942,16 +21313,16 @@
       </p:sp>
       <p:sp>
         <p:nvSpPr>
-          <p:cNvPr id="6" name="Rounded Rectangle 5"/>
+          <p:cNvPr id="6" name="Rectangle 5"/>
           <p:cNvSpPr/>
           <p:nvPr/>
         </p:nvSpPr>
         <p:spPr>
           <a:xfrm>
-            <a:off x="658368" y="1554480"/>
-            <a:ext cx="10972800" cy="4526280"/>
-          </a:xfrm>
-          <a:prstGeom prst="roundRect">
+            <a:off x="566928" y="1188720"/>
+            <a:ext cx="11064240" cy="347472"/>
+          </a:xfrm>
+          <a:prstGeom prst="rect">
             <a:avLst/>
           </a:prstGeom>
           <a:solidFill>
@@ -20959,7 +21330,7 @@
           </a:solidFill>
           <a:ln>
             <a:solidFill>
-              <a:srgbClr val="D7DFE9"/>
+              <a:srgbClr val="F4F7FB"/>
             </a:solidFill>
           </a:ln>
         </p:spPr>
@@ -20978,6 +21349,64 @@
           </a:fontRef>
         </p:style>
         <p:txBody>
+          <a:bodyPr rtlCol="0" anchor="ctr" wrap="square" lIns="73152" rIns="73152" tIns="36576" bIns="36576"/>
+          <a:lstStyle/>
+          <a:p>
+            <a:pPr algn="l">
+              <a:spcAft>
+                <a:spcPts val="0"/>
+              </a:spcAft>
+              <a:defRPr sz="1300" b="1">
+                <a:solidFill>
+                  <a:srgbClr val="122C4E"/>
+                </a:solidFill>
+                <a:latin typeface="Noto Sans CJK KR"/>
+              </a:defRPr>
+            </a:pPr>
+            <a:r>
+              <a:t>현재 단계 오류 대응    |    현재 폴더 ~/agv_ws    |    현재 터미널</a:t>
+            </a:r>
+          </a:p>
+        </p:txBody>
+      </p:sp>
+      <p:sp>
+        <p:nvSpPr>
+          <p:cNvPr id="7" name="Rounded Rectangle 6"/>
+          <p:cNvSpPr/>
+          <p:nvPr/>
+        </p:nvSpPr>
+        <p:spPr>
+          <a:xfrm>
+            <a:off x="694944" y="1755648"/>
+            <a:ext cx="10972800" cy="1115568"/>
+          </a:xfrm>
+          <a:prstGeom prst="roundRect">
+            <a:avLst/>
+          </a:prstGeom>
+          <a:solidFill>
+            <a:srgbClr val="FFF7F4"/>
+          </a:solidFill>
+          <a:ln>
+            <a:solidFill>
+              <a:srgbClr val="EDBEB4"/>
+            </a:solidFill>
+          </a:ln>
+        </p:spPr>
+        <p:style>
+          <a:lnRef idx="1">
+            <a:schemeClr val="accent1"/>
+          </a:lnRef>
+          <a:fillRef idx="3">
+            <a:schemeClr val="accent1"/>
+          </a:fillRef>
+          <a:effectRef idx="2">
+            <a:schemeClr val="accent1"/>
+          </a:effectRef>
+          <a:fontRef idx="minor">
+            <a:schemeClr val="lt1"/>
+          </a:fontRef>
+        </p:style>
+        <p:txBody>
           <a:bodyPr rtlCol="0" anchor="ctr"/>
           <a:lstStyle/>
           <a:p>
@@ -20987,14 +21416,14 @@
       </p:sp>
       <p:sp>
         <p:nvSpPr>
-          <p:cNvPr id="7" name="TextBox 6"/>
+          <p:cNvPr id="8" name="TextBox 7"/>
           <p:cNvSpPr txBox="1"/>
           <p:nvPr/>
         </p:nvSpPr>
         <p:spPr>
           <a:xfrm>
-            <a:off x="914400" y="1810512"/>
-            <a:ext cx="3840480" cy="256032"/>
+            <a:off x="896112" y="1901952"/>
+            <a:ext cx="2926080" cy="274320"/>
           </a:xfrm>
           <a:prstGeom prst="rect">
             <a:avLst/>
@@ -21011,29 +21440,29 @@
               <a:spcAft>
                 <a:spcPts val="0"/>
               </a:spcAft>
-              <a:defRPr sz="1700" b="1">
-                <a:solidFill>
-                  <a:srgbClr val="122C4E"/>
-                </a:solidFill>
-                <a:latin typeface="Noto Sans CJK KR"/>
-              </a:defRPr>
-            </a:pPr>
-            <a:r>
-              <a:t>ROS 2 Jazzy — Gazebo Simulation</a:t>
-            </a:r>
-          </a:p>
-        </p:txBody>
-      </p:sp>
-      <p:sp>
-        <p:nvSpPr>
-          <p:cNvPr id="8" name="TextBox 7"/>
+              <a:defRPr sz="1800" b="1">
+                <a:solidFill>
+                  <a:srgbClr val="BE3B3B"/>
+                </a:solidFill>
+                <a:latin typeface="Noto Sans CJK KR"/>
+              </a:defRPr>
+            </a:pPr>
+            <a:r>
+              <a:t>증상 1: unknown macro/property</a:t>
+            </a:r>
+          </a:p>
+        </p:txBody>
+      </p:sp>
+      <p:sp>
+        <p:nvSpPr>
+          <p:cNvPr id="9" name="TextBox 8"/>
           <p:cNvSpPr txBox="1"/>
           <p:nvPr/>
         </p:nvSpPr>
         <p:spPr>
           <a:xfrm>
-            <a:off x="914400" y="2121408"/>
-            <a:ext cx="9966960" cy="256032"/>
+            <a:off x="3794760" y="1883664"/>
+            <a:ext cx="7543800" cy="621792"/>
           </a:xfrm>
           <a:prstGeom prst="rect">
             <a:avLst/>
@@ -21050,29 +21479,78 @@
               <a:spcAft>
                 <a:spcPts val="0"/>
               </a:spcAft>
-              <a:defRPr sz="1200" b="0">
-                <a:solidFill>
-                  <a:srgbClr val="225B9B"/>
-                </a:solidFill>
-                <a:latin typeface="DejaVu Sans Mono"/>
-              </a:defRPr>
-            </a:pPr>
-            <a:r>
-              <a:t>https://docs.ros.org/en/jazzy/Tutorials/Advanced/Simulators/Gazebo/Simulation-Gazebo.html</a:t>
-            </a:r>
-          </a:p>
-        </p:txBody>
-      </p:sp>
-      <p:sp>
-        <p:nvSpPr>
-          <p:cNvPr id="9" name="TextBox 8"/>
+              <a:defRPr sz="1600" b="0">
+                <a:solidFill>
+                  <a:srgbClr val="122C4E"/>
+                </a:solidFill>
+                <a:latin typeface="Noto Sans CJK KR"/>
+              </a:defRPr>
+            </a:pPr>
+            <a:r>
+              <a:t>우선 확인: 선언 순서·xacro namespace·철자를 확인한다.</a:t>
+            </a:r>
+            <a:br/>
+            <a:r>
+              <a:t>수정 후: xacro ~/agv_ws/src/agv_description/urdf/agv.urdf.xacro &gt; /tmp/agv.urdf</a:t>
+            </a:r>
+          </a:p>
+        </p:txBody>
+      </p:sp>
+      <p:sp>
+        <p:nvSpPr>
+          <p:cNvPr id="10" name="Rounded Rectangle 9"/>
+          <p:cNvSpPr/>
+          <p:nvPr/>
+        </p:nvSpPr>
+        <p:spPr>
+          <a:xfrm>
+            <a:off x="694944" y="3172968"/>
+            <a:ext cx="10972800" cy="1115568"/>
+          </a:xfrm>
+          <a:prstGeom prst="roundRect">
+            <a:avLst/>
+          </a:prstGeom>
+          <a:solidFill>
+            <a:srgbClr val="FFF7F4"/>
+          </a:solidFill>
+          <a:ln>
+            <a:solidFill>
+              <a:srgbClr val="EDBEB4"/>
+            </a:solidFill>
+          </a:ln>
+        </p:spPr>
+        <p:style>
+          <a:lnRef idx="1">
+            <a:schemeClr val="accent1"/>
+          </a:lnRef>
+          <a:fillRef idx="3">
+            <a:schemeClr val="accent1"/>
+          </a:fillRef>
+          <a:effectRef idx="2">
+            <a:schemeClr val="accent1"/>
+          </a:effectRef>
+          <a:fontRef idx="minor">
+            <a:schemeClr val="lt1"/>
+          </a:fontRef>
+        </p:style>
+        <p:txBody>
+          <a:bodyPr rtlCol="0" anchor="ctr"/>
+          <a:lstStyle/>
+          <a:p>
+            <a:pPr algn="ctr"/>
+          </a:p>
+        </p:txBody>
+      </p:sp>
+      <p:sp>
+        <p:nvSpPr>
+          <p:cNvPr id="11" name="TextBox 10"/>
           <p:cNvSpPr txBox="1"/>
           <p:nvPr/>
         </p:nvSpPr>
         <p:spPr>
           <a:xfrm>
-            <a:off x="914400" y="2816352"/>
-            <a:ext cx="3840480" cy="256032"/>
+            <a:off x="896112" y="3319272"/>
+            <a:ext cx="2926080" cy="274320"/>
           </a:xfrm>
           <a:prstGeom prst="rect">
             <a:avLst/>
@@ -21089,29 +21567,29 @@
               <a:spcAft>
                 <a:spcPts val="0"/>
               </a:spcAft>
-              <a:defRPr sz="1700" b="1">
-                <a:solidFill>
-                  <a:srgbClr val="122C4E"/>
-                </a:solidFill>
-                <a:latin typeface="Noto Sans CJK KR"/>
-              </a:defRPr>
-            </a:pPr>
-            <a:r>
-              <a:t>ROS 2 Jazzy — URDF / robot_state_publisher</a:t>
-            </a:r>
-          </a:p>
-        </p:txBody>
-      </p:sp>
-      <p:sp>
-        <p:nvSpPr>
-          <p:cNvPr id="10" name="TextBox 9"/>
+              <a:defRPr sz="1800" b="1">
+                <a:solidFill>
+                  <a:srgbClr val="BE3B3B"/>
+                </a:solidFill>
+                <a:latin typeface="Noto Sans CJK KR"/>
+              </a:defRPr>
+            </a:pPr>
+            <a:r>
+              <a:t>증상 2: include file not found</a:t>
+            </a:r>
+          </a:p>
+        </p:txBody>
+      </p:sp>
+      <p:sp>
+        <p:nvSpPr>
+          <p:cNvPr id="12" name="TextBox 11"/>
           <p:cNvSpPr txBox="1"/>
           <p:nvPr/>
         </p:nvSpPr>
         <p:spPr>
           <a:xfrm>
-            <a:off x="914400" y="3127248"/>
-            <a:ext cx="9966960" cy="256032"/>
+            <a:off x="3794760" y="3300984"/>
+            <a:ext cx="7543800" cy="621792"/>
           </a:xfrm>
           <a:prstGeom prst="rect">
             <a:avLst/>
@@ -21128,29 +21606,33 @@
               <a:spcAft>
                 <a:spcPts val="0"/>
               </a:spcAft>
-              <a:defRPr sz="1200" b="0">
-                <a:solidFill>
-                  <a:srgbClr val="225B9B"/>
-                </a:solidFill>
-                <a:latin typeface="DejaVu Sans Mono"/>
-              </a:defRPr>
-            </a:pPr>
-            <a:r>
-              <a:t>https://docs.ros.org/en/jazzy/Tutorials/Intermediate/URDF/Using-URDF-with-Robot-State-Publisher-py.html</a:t>
-            </a:r>
-          </a:p>
-        </p:txBody>
-      </p:sp>
-      <p:sp>
-        <p:nvSpPr>
-          <p:cNvPr id="11" name="TextBox 10"/>
+              <a:defRPr sz="1600" b="0">
+                <a:solidFill>
+                  <a:srgbClr val="122C4E"/>
+                </a:solidFill>
+                <a:latin typeface="Noto Sans CJK KR"/>
+              </a:defRPr>
+            </a:pPr>
+            <a:r>
+              <a:t>우선 확인: 패키지 이름과 설치 대상·파일 경로를 확인한다.</a:t>
+            </a:r>
+            <a:br/>
+            <a:r>
+              <a:t>수정 후: xacro ~/agv_ws/src/agv_description/urdf/agv.urdf.xacro &gt; /tmp/agv.urdf</a:t>
+            </a:r>
+          </a:p>
+        </p:txBody>
+      </p:sp>
+      <p:sp>
+        <p:nvSpPr>
+          <p:cNvPr id="13" name="TextBox 12"/>
           <p:cNvSpPr txBox="1"/>
           <p:nvPr/>
         </p:nvSpPr>
         <p:spPr>
           <a:xfrm>
-            <a:off x="914400" y="3822191"/>
-            <a:ext cx="3840480" cy="256032"/>
+            <a:off x="822960" y="5102352"/>
+            <a:ext cx="10607040" cy="402336"/>
           </a:xfrm>
           <a:prstGeom prst="rect">
             <a:avLst/>
@@ -21163,33 +21645,51 @@
           </a:bodyPr>
           <a:lstStyle/>
           <a:p>
-            <a:pPr algn="l">
-              <a:spcAft>
-                <a:spcPts val="0"/>
-              </a:spcAft>
-              <a:defRPr sz="1700" b="1">
-                <a:solidFill>
-                  <a:srgbClr val="122C4E"/>
-                </a:solidFill>
-                <a:latin typeface="Noto Sans CJK KR"/>
-              </a:defRPr>
-            </a:pPr>
-            <a:r>
-              <a:t>Gazebo — ROS 2 Integration / ros_gz_bridge</a:t>
-            </a:r>
-          </a:p>
-        </p:txBody>
-      </p:sp>
-      <p:sp>
-        <p:nvSpPr>
-          <p:cNvPr id="12" name="TextBox 11"/>
+            <a:pPr algn="ctr">
+              <a:spcAft>
+                <a:spcPts val="0"/>
+              </a:spcAft>
+              <a:defRPr sz="1800" b="1">
+                <a:solidFill>
+                  <a:srgbClr val="DB7E22"/>
+                </a:solidFill>
+                <a:latin typeface="Noto Sans CJK KR"/>
+              </a:defRPr>
+            </a:pPr>
+            <a:r>
+              <a:t>공통 순서: ① 현재 폴더 ② source ③ 파일 경로 ④ 이름/타입/단위 ⑤ build·source 후 재실행</a:t>
+            </a:r>
+          </a:p>
+        </p:txBody>
+      </p:sp>
+    </p:spTree>
+  </p:cSld>
+  <p:clrMapOvr>
+    <a:masterClrMapping/>
+  </p:clrMapOvr>
+</p:sld>
+</file>
+
+<file path=ppt/slides/slide39.xml><?xml version="1.0" encoding="utf-8"?>
+<p:sld xmlns:a="http://schemas.openxmlformats.org/drawingml/2006/main" xmlns:p="http://schemas.openxmlformats.org/presentationml/2006/main" xmlns:r="http://schemas.openxmlformats.org/officeDocument/2006/relationships">
+  <p:cSld>
+    <p:spTree>
+      <p:nvGrpSpPr>
+        <p:cNvPr id="1" name=""/>
+        <p:cNvGrpSpPr/>
+        <p:nvPr/>
+      </p:nvGrpSpPr>
+      <p:grpSpPr/>
+      <p:sp>
+        <p:nvSpPr>
+          <p:cNvPr id="2" name="TextBox 1"/>
           <p:cNvSpPr txBox="1"/>
           <p:nvPr/>
         </p:nvSpPr>
         <p:spPr>
           <a:xfrm>
-            <a:off x="914400" y="4133087"/>
-            <a:ext cx="9966960" cy="256032"/>
+            <a:off x="566928" y="347472"/>
+            <a:ext cx="10881360" cy="438912"/>
           </a:xfrm>
           <a:prstGeom prst="rect">
             <a:avLst/>
@@ -21206,29 +21706,29 @@
               <a:spcAft>
                 <a:spcPts val="0"/>
               </a:spcAft>
-              <a:defRPr sz="1200" b="0">
-                <a:solidFill>
-                  <a:srgbClr val="225B9B"/>
-                </a:solidFill>
-                <a:latin typeface="DejaVu Sans Mono"/>
-              </a:defRPr>
-            </a:pPr>
-            <a:r>
-              <a:t>https://gazebosim.org/docs/latest/ros2_integration/</a:t>
-            </a:r>
-          </a:p>
-        </p:txBody>
-      </p:sp>
-      <p:sp>
-        <p:nvSpPr>
-          <p:cNvPr id="13" name="TextBox 12"/>
+              <a:defRPr sz="3200" b="1">
+                <a:solidFill>
+                  <a:srgbClr val="122C4E"/>
+                </a:solidFill>
+                <a:latin typeface="Noto Sans CJK KR"/>
+              </a:defRPr>
+            </a:pPr>
+            <a:r>
+              <a:t>미니 실습: 값 하나를 바꾸고 결과를 비교한다</a:t>
+            </a:r>
+          </a:p>
+        </p:txBody>
+      </p:sp>
+      <p:sp>
+        <p:nvSpPr>
+          <p:cNvPr id="3" name="TextBox 2"/>
           <p:cNvSpPr txBox="1"/>
           <p:nvPr/>
         </p:nvSpPr>
         <p:spPr>
           <a:xfrm>
-            <a:off x="914400" y="4828032"/>
-            <a:ext cx="3840480" cy="256032"/>
+            <a:off x="603504" y="859536"/>
+            <a:ext cx="10698480" cy="292608"/>
           </a:xfrm>
           <a:prstGeom prst="rect">
             <a:avLst/>
@@ -21245,29 +21745,29 @@
               <a:spcAft>
                 <a:spcPts val="0"/>
               </a:spcAft>
-              <a:defRPr sz="1700" b="1">
-                <a:solidFill>
-                  <a:srgbClr val="122C4E"/>
-                </a:solidFill>
-                <a:latin typeface="Noto Sans CJK KR"/>
-              </a:defRPr>
-            </a:pPr>
-            <a:r>
-              <a:t>ROS 2 Jazzy — rosbag2 Recording and Playback</a:t>
-            </a:r>
-          </a:p>
-        </p:txBody>
-      </p:sp>
-      <p:sp>
-        <p:nvSpPr>
-          <p:cNvPr id="14" name="TextBox 13"/>
+              <a:defRPr sz="1700" b="0">
+                <a:solidFill>
+                  <a:srgbClr val="5C6672"/>
+                </a:solidFill>
+                <a:latin typeface="Noto Sans CJK KR"/>
+              </a:defRPr>
+            </a:pPr>
+            <a:r>
+              <a:t>정상 결과를 만든 뒤에는 한 번에 하나의 값만 바꿉니다.</a:t>
+            </a:r>
+          </a:p>
+        </p:txBody>
+      </p:sp>
+      <p:sp>
+        <p:nvSpPr>
+          <p:cNvPr id="4" name="TextBox 3"/>
           <p:cNvSpPr txBox="1"/>
           <p:nvPr/>
         </p:nvSpPr>
         <p:spPr>
           <a:xfrm>
-            <a:off x="914400" y="5138928"/>
-            <a:ext cx="9966960" cy="256032"/>
+            <a:off x="530352" y="6510528"/>
+            <a:ext cx="7772400" cy="201168"/>
           </a:xfrm>
           <a:prstGeom prst="rect">
             <a:avLst/>
@@ -21284,15 +21784,209 @@
               <a:spcAft>
                 <a:spcPts val="0"/>
               </a:spcAft>
-              <a:defRPr sz="1200" b="0">
-                <a:solidFill>
-                  <a:srgbClr val="225B9B"/>
-                </a:solidFill>
-                <a:latin typeface="DejaVu Sans Mono"/>
-              </a:defRPr>
-            </a:pPr>
-            <a:r>
-              <a:t>https://docs.ros.org/en/jazzy/Tutorials/Beginner-CLI-Tools/Recording-And-Playing-Back-Data/Recording-And-Playing-Back-Data.html</a:t>
+              <a:defRPr sz="1000" b="0">
+                <a:solidFill>
+                  <a:srgbClr val="5C6672"/>
+                </a:solidFill>
+                <a:latin typeface="Noto Sans CJK KR"/>
+              </a:defRPr>
+            </a:pPr>
+            <a:r>
+              <a:t>ROS 2 Jazzy · Gazebo Harmonic · M06 · 따라 하기형 AGV 실습</a:t>
+            </a:r>
+          </a:p>
+        </p:txBody>
+      </p:sp>
+      <p:sp>
+        <p:nvSpPr>
+          <p:cNvPr id="5" name="TextBox 4"/>
+          <p:cNvSpPr txBox="1"/>
+          <p:nvPr/>
+        </p:nvSpPr>
+        <p:spPr>
+          <a:xfrm>
+            <a:off x="9144000" y="6510528"/>
+            <a:ext cx="2468880" cy="201168"/>
+          </a:xfrm>
+          <a:prstGeom prst="rect">
+            <a:avLst/>
+          </a:prstGeom>
+          <a:noFill/>
+        </p:spPr>
+        <p:txBody>
+          <a:bodyPr wrap="square" lIns="73152" rIns="73152" tIns="36576" bIns="36576">
+            <a:spAutoFit/>
+          </a:bodyPr>
+          <a:lstStyle/>
+          <a:p>
+            <a:pPr algn="r">
+              <a:spcAft>
+                <a:spcPts val="0"/>
+              </a:spcAft>
+              <a:defRPr sz="1000" b="0">
+                <a:solidFill>
+                  <a:srgbClr val="5C6672"/>
+                </a:solidFill>
+                <a:latin typeface="Noto Sans CJK KR"/>
+              </a:defRPr>
+            </a:pPr>
+            <a:r>
+              <a:t>명령·파일 경로는 슬라이드에서 복사 가능</a:t>
+            </a:r>
+          </a:p>
+        </p:txBody>
+      </p:sp>
+      <p:sp>
+        <p:nvSpPr>
+          <p:cNvPr id="6" name="Rectangle 5"/>
+          <p:cNvSpPr/>
+          <p:nvPr/>
+        </p:nvSpPr>
+        <p:spPr>
+          <a:xfrm>
+            <a:off x="566928" y="1188720"/>
+            <a:ext cx="11064240" cy="347472"/>
+          </a:xfrm>
+          <a:prstGeom prst="rect">
+            <a:avLst/>
+          </a:prstGeom>
+          <a:solidFill>
+            <a:srgbClr val="F4F7FB"/>
+          </a:solidFill>
+          <a:ln>
+            <a:solidFill>
+              <a:srgbClr val="F4F7FB"/>
+            </a:solidFill>
+          </a:ln>
+        </p:spPr>
+        <p:style>
+          <a:lnRef idx="1">
+            <a:schemeClr val="accent1"/>
+          </a:lnRef>
+          <a:fillRef idx="3">
+            <a:schemeClr val="accent1"/>
+          </a:fillRef>
+          <a:effectRef idx="2">
+            <a:schemeClr val="accent1"/>
+          </a:effectRef>
+          <a:fontRef idx="minor">
+            <a:schemeClr val="lt1"/>
+          </a:fontRef>
+        </p:style>
+        <p:txBody>
+          <a:bodyPr rtlCol="0" anchor="ctr" wrap="square" lIns="73152" rIns="73152" tIns="36576" bIns="36576"/>
+          <a:lstStyle/>
+          <a:p>
+            <a:pPr algn="l">
+              <a:spcAft>
+                <a:spcPts val="0"/>
+              </a:spcAft>
+              <a:defRPr sz="1300" b="1">
+                <a:solidFill>
+                  <a:srgbClr val="122C4E"/>
+                </a:solidFill>
+                <a:latin typeface="Noto Sans CJK KR"/>
+              </a:defRPr>
+            </a:pPr>
+            <a:r>
+              <a:t>현재 단계 미니 실습    |    현재 폴더 ~/agv_ws    |    현재 터미널</a:t>
+            </a:r>
+          </a:p>
+        </p:txBody>
+      </p:sp>
+      <p:sp>
+        <p:nvSpPr>
+          <p:cNvPr id="7" name="Rounded Rectangle 6"/>
+          <p:cNvSpPr/>
+          <p:nvPr/>
+        </p:nvSpPr>
+        <p:spPr>
+          <a:xfrm>
+            <a:off x="749808" y="1874519"/>
+            <a:ext cx="10652760" cy="1993392"/>
+          </a:xfrm>
+          <a:prstGeom prst="roundRect">
+            <a:avLst/>
+          </a:prstGeom>
+          <a:solidFill>
+            <a:srgbClr val="FFF8EB"/>
+          </a:solidFill>
+          <a:ln>
+            <a:solidFill>
+              <a:srgbClr val="ECC680"/>
+            </a:solidFill>
+          </a:ln>
+        </p:spPr>
+        <p:style>
+          <a:lnRef idx="1">
+            <a:schemeClr val="accent1"/>
+          </a:lnRef>
+          <a:fillRef idx="3">
+            <a:schemeClr val="accent1"/>
+          </a:fillRef>
+          <a:effectRef idx="2">
+            <a:schemeClr val="accent1"/>
+          </a:effectRef>
+          <a:fontRef idx="minor">
+            <a:schemeClr val="lt1"/>
+          </a:fontRef>
+        </p:style>
+        <p:txBody>
+          <a:bodyPr rtlCol="0" anchor="ctr" wrap="square" lIns="73152" rIns="73152" tIns="36576" bIns="36576"/>
+          <a:lstStyle/>
+          <a:p>
+            <a:pPr algn="ctr">
+              <a:spcAft>
+                <a:spcPts val="0"/>
+              </a:spcAft>
+              <a:defRPr sz="2300" b="1">
+                <a:solidFill>
+                  <a:srgbClr val="122C4E"/>
+                </a:solidFill>
+                <a:latin typeface="Noto Sans CJK KR"/>
+              </a:defRPr>
+            </a:pPr>
+            <a:r>
+              <a:t>wheel_radius 0.08→0.12 m를 적용한 뒤 joint origin과 cylinder radius가 함께 바뀌는지 비교한다.</a:t>
+            </a:r>
+          </a:p>
+        </p:txBody>
+      </p:sp>
+      <p:sp>
+        <p:nvSpPr>
+          <p:cNvPr id="8" name="TextBox 7"/>
+          <p:cNvSpPr txBox="1"/>
+          <p:nvPr/>
+        </p:nvSpPr>
+        <p:spPr>
+          <a:xfrm>
+            <a:off x="877824" y="4590288"/>
+            <a:ext cx="10241280" cy="594360"/>
+          </a:xfrm>
+          <a:prstGeom prst="rect">
+            <a:avLst/>
+          </a:prstGeom>
+          <a:noFill/>
+        </p:spPr>
+        <p:txBody>
+          <a:bodyPr wrap="square" lIns="73152" rIns="73152" tIns="36576" bIns="36576">
+            <a:spAutoFit/>
+          </a:bodyPr>
+          <a:lstStyle/>
+          <a:p>
+            <a:pPr algn="ctr">
+              <a:spcAft>
+                <a:spcPts val="0"/>
+              </a:spcAft>
+              <a:defRPr sz="1900" b="1">
+                <a:solidFill>
+                  <a:srgbClr val="DB7E22"/>
+                </a:solidFill>
+                <a:latin typeface="Noto Sans CJK KR"/>
+              </a:defRPr>
+            </a:pPr>
+            <a:r>
+              <a:t>기록할 것: 바꾼 값(단위) · 기대한 변화 · 실제 출력/화면 · 원래 값으로 되돌린 결과</a:t>
             </a:r>
           </a:p>
         </p:txBody>
@@ -21638,6 +22332,956 @@
 </p:sld>
 </file>
 
+<file path=ppt/slides/slide40.xml><?xml version="1.0" encoding="utf-8"?>
+<p:sld xmlns:a="http://schemas.openxmlformats.org/drawingml/2006/main" xmlns:p="http://schemas.openxmlformats.org/presentationml/2006/main" xmlns:r="http://schemas.openxmlformats.org/officeDocument/2006/relationships">
+  <p:cSld>
+    <p:spTree>
+      <p:nvGrpSpPr>
+        <p:cNvPr id="1" name=""/>
+        <p:cNvGrpSpPr/>
+        <p:nvPr/>
+      </p:nvGrpSpPr>
+      <p:grpSpPr/>
+      <p:sp>
+        <p:nvSpPr>
+          <p:cNvPr id="2" name="TextBox 1"/>
+          <p:cNvSpPr txBox="1"/>
+          <p:nvPr/>
+        </p:nvSpPr>
+        <p:spPr>
+          <a:xfrm>
+            <a:off x="566928" y="347472"/>
+            <a:ext cx="10881360" cy="438912"/>
+          </a:xfrm>
+          <a:prstGeom prst="rect">
+            <a:avLst/>
+          </a:prstGeom>
+          <a:noFill/>
+        </p:spPr>
+        <p:txBody>
+          <a:bodyPr wrap="square" lIns="73152" rIns="73152" tIns="36576" bIns="36576">
+            <a:spAutoFit/>
+          </a:bodyPr>
+          <a:lstStyle/>
+          <a:p>
+            <a:pPr algn="l">
+              <a:spcAft>
+                <a:spcPts val="0"/>
+              </a:spcAft>
+              <a:defRPr sz="3200" b="1">
+                <a:solidFill>
+                  <a:srgbClr val="122C4E"/>
+                </a:solidFill>
+                <a:latin typeface="Noto Sans CJK KR"/>
+              </a:defRPr>
+            </a:pPr>
+            <a:r>
+              <a:t>체크포인트를 저장하고 다음 모듈로 넘긴다</a:t>
+            </a:r>
+          </a:p>
+        </p:txBody>
+      </p:sp>
+      <p:sp>
+        <p:nvSpPr>
+          <p:cNvPr id="3" name="TextBox 2"/>
+          <p:cNvSpPr txBox="1"/>
+          <p:nvPr/>
+        </p:nvSpPr>
+        <p:spPr>
+          <a:xfrm>
+            <a:off x="603504" y="859536"/>
+            <a:ext cx="10698480" cy="292608"/>
+          </a:xfrm>
+          <a:prstGeom prst="rect">
+            <a:avLst/>
+          </a:prstGeom>
+          <a:noFill/>
+        </p:spPr>
+        <p:txBody>
+          <a:bodyPr wrap="square" lIns="73152" rIns="73152" tIns="36576" bIns="36576">
+            <a:spAutoFit/>
+          </a:bodyPr>
+          <a:lstStyle/>
+          <a:p>
+            <a:pPr algn="l">
+              <a:spcAft>
+                <a:spcPts val="0"/>
+              </a:spcAft>
+              <a:defRPr sz="1700" b="0">
+                <a:solidFill>
+                  <a:srgbClr val="5C6672"/>
+                </a:solidFill>
+                <a:latin typeface="Noto Sans CJK KR"/>
+              </a:defRPr>
+            </a:pPr>
+            <a:r>
+              <a:t>현재 Complete는 다음 Starter의 기준선입니다.</a:t>
+            </a:r>
+          </a:p>
+        </p:txBody>
+      </p:sp>
+      <p:sp>
+        <p:nvSpPr>
+          <p:cNvPr id="4" name="TextBox 3"/>
+          <p:cNvSpPr txBox="1"/>
+          <p:nvPr/>
+        </p:nvSpPr>
+        <p:spPr>
+          <a:xfrm>
+            <a:off x="530352" y="6510528"/>
+            <a:ext cx="7772400" cy="201168"/>
+          </a:xfrm>
+          <a:prstGeom prst="rect">
+            <a:avLst/>
+          </a:prstGeom>
+          <a:noFill/>
+        </p:spPr>
+        <p:txBody>
+          <a:bodyPr wrap="square" lIns="73152" rIns="73152" tIns="36576" bIns="36576">
+            <a:spAutoFit/>
+          </a:bodyPr>
+          <a:lstStyle/>
+          <a:p>
+            <a:pPr algn="l">
+              <a:spcAft>
+                <a:spcPts val="0"/>
+              </a:spcAft>
+              <a:defRPr sz="1000" b="0">
+                <a:solidFill>
+                  <a:srgbClr val="5C6672"/>
+                </a:solidFill>
+                <a:latin typeface="Noto Sans CJK KR"/>
+              </a:defRPr>
+            </a:pPr>
+            <a:r>
+              <a:t>ROS 2 Jazzy · Gazebo Harmonic · M06 · 따라 하기형 AGV 실습</a:t>
+            </a:r>
+          </a:p>
+        </p:txBody>
+      </p:sp>
+      <p:sp>
+        <p:nvSpPr>
+          <p:cNvPr id="5" name="TextBox 4"/>
+          <p:cNvSpPr txBox="1"/>
+          <p:nvPr/>
+        </p:nvSpPr>
+        <p:spPr>
+          <a:xfrm>
+            <a:off x="9144000" y="6510528"/>
+            <a:ext cx="2468880" cy="201168"/>
+          </a:xfrm>
+          <a:prstGeom prst="rect">
+            <a:avLst/>
+          </a:prstGeom>
+          <a:noFill/>
+        </p:spPr>
+        <p:txBody>
+          <a:bodyPr wrap="square" lIns="73152" rIns="73152" tIns="36576" bIns="36576">
+            <a:spAutoFit/>
+          </a:bodyPr>
+          <a:lstStyle/>
+          <a:p>
+            <a:pPr algn="r">
+              <a:spcAft>
+                <a:spcPts val="0"/>
+              </a:spcAft>
+              <a:defRPr sz="1000" b="0">
+                <a:solidFill>
+                  <a:srgbClr val="5C6672"/>
+                </a:solidFill>
+                <a:latin typeface="Noto Sans CJK KR"/>
+              </a:defRPr>
+            </a:pPr>
+            <a:r>
+              <a:t>명령·파일 경로는 슬라이드에서 복사 가능</a:t>
+            </a:r>
+          </a:p>
+        </p:txBody>
+      </p:sp>
+      <p:sp>
+        <p:nvSpPr>
+          <p:cNvPr id="6" name="Rectangle 5"/>
+          <p:cNvSpPr/>
+          <p:nvPr/>
+        </p:nvSpPr>
+        <p:spPr>
+          <a:xfrm>
+            <a:off x="566928" y="1188720"/>
+            <a:ext cx="11064240" cy="347472"/>
+          </a:xfrm>
+          <a:prstGeom prst="rect">
+            <a:avLst/>
+          </a:prstGeom>
+          <a:solidFill>
+            <a:srgbClr val="F4F7FB"/>
+          </a:solidFill>
+          <a:ln>
+            <a:solidFill>
+              <a:srgbClr val="F4F7FB"/>
+            </a:solidFill>
+          </a:ln>
+        </p:spPr>
+        <p:style>
+          <a:lnRef idx="1">
+            <a:schemeClr val="accent1"/>
+          </a:lnRef>
+          <a:fillRef idx="3">
+            <a:schemeClr val="accent1"/>
+          </a:fillRef>
+          <a:effectRef idx="2">
+            <a:schemeClr val="accent1"/>
+          </a:effectRef>
+          <a:fontRef idx="minor">
+            <a:schemeClr val="lt1"/>
+          </a:fontRef>
+        </p:style>
+        <p:txBody>
+          <a:bodyPr rtlCol="0" anchor="ctr" wrap="square" lIns="73152" rIns="73152" tIns="36576" bIns="36576"/>
+          <a:lstStyle/>
+          <a:p>
+            <a:pPr algn="l">
+              <a:spcAft>
+                <a:spcPts val="0"/>
+              </a:spcAft>
+              <a:defRPr sz="1300" b="1">
+                <a:solidFill>
+                  <a:srgbClr val="122C4E"/>
+                </a:solidFill>
+                <a:latin typeface="Noto Sans CJK KR"/>
+              </a:defRPr>
+            </a:pPr>
+            <a:r>
+              <a:t>현재 단계 체크포인트    |    현재 폴더 ~/agv_ws    |    현재 터미널</a:t>
+            </a:r>
+          </a:p>
+        </p:txBody>
+      </p:sp>
+      <p:sp>
+        <p:nvSpPr>
+          <p:cNvPr id="7" name="Rounded Rectangle 6"/>
+          <p:cNvSpPr/>
+          <p:nvPr/>
+        </p:nvSpPr>
+        <p:spPr>
+          <a:xfrm>
+            <a:off x="685800" y="1737360"/>
+            <a:ext cx="10972800" cy="3611880"/>
+          </a:xfrm>
+          <a:prstGeom prst="roundRect">
+            <a:avLst/>
+          </a:prstGeom>
+          <a:solidFill>
+            <a:srgbClr val="F4F7FB"/>
+          </a:solidFill>
+          <a:ln>
+            <a:solidFill>
+              <a:srgbClr val="D2DCE8"/>
+            </a:solidFill>
+          </a:ln>
+        </p:spPr>
+        <p:style>
+          <a:lnRef idx="1">
+            <a:schemeClr val="accent1"/>
+          </a:lnRef>
+          <a:fillRef idx="3">
+            <a:schemeClr val="accent1"/>
+          </a:fillRef>
+          <a:effectRef idx="2">
+            <a:schemeClr val="accent1"/>
+          </a:effectRef>
+          <a:fontRef idx="minor">
+            <a:schemeClr val="lt1"/>
+          </a:fontRef>
+        </p:style>
+        <p:txBody>
+          <a:bodyPr rtlCol="0" anchor="ctr"/>
+          <a:lstStyle/>
+          <a:p>
+            <a:pPr algn="ctr"/>
+          </a:p>
+        </p:txBody>
+      </p:sp>
+      <p:sp>
+        <p:nvSpPr>
+          <p:cNvPr id="8" name="TextBox 7"/>
+          <p:cNvSpPr txBox="1"/>
+          <p:nvPr/>
+        </p:nvSpPr>
+        <p:spPr>
+          <a:xfrm>
+            <a:off x="896112" y="1993392"/>
+            <a:ext cx="10332720" cy="2971800"/>
+          </a:xfrm>
+          <a:prstGeom prst="rect">
+            <a:avLst/>
+          </a:prstGeom>
+          <a:noFill/>
+        </p:spPr>
+        <p:txBody>
+          <a:bodyPr wrap="square" lIns="109728" rIns="109728">
+            <a:spAutoFit/>
+          </a:bodyPr>
+          <a:lstStyle/>
+          <a:p>
+            <a:pPr>
+              <a:spcAft>
+                <a:spcPts val="800"/>
+              </a:spcAft>
+              <a:defRPr sz="1800">
+                <a:solidFill>
+                  <a:srgbClr val="122C4E"/>
+                </a:solidFill>
+                <a:latin typeface="Noto Sans CJK KR"/>
+              </a:defRPr>
+            </a:pPr>
+            <a:r>
+              <a:t>• □ 완료 화면: wheel_radius와 wheel_base 변경이 좌우 바퀴·충돌 형상에 함께 적용된다.</a:t>
+            </a:r>
+          </a:p>
+          <a:p>
+            <a:pPr>
+              <a:spcAft>
+                <a:spcPts val="800"/>
+              </a:spcAft>
+              <a:defRPr sz="1800">
+                <a:solidFill>
+                  <a:srgbClr val="122C4E"/>
+                </a:solidFill>
+                <a:latin typeface="Noto Sans CJK KR"/>
+              </a:defRPr>
+            </a:pPr>
+            <a:r>
+              <a:t>• □ Complete 파일: blocks/B_robot_build/M06_xacro_modularization/complete/</a:t>
+            </a:r>
+          </a:p>
+          <a:p>
+            <a:pPr>
+              <a:spcAft>
+                <a:spcPts val="800"/>
+              </a:spcAft>
+              <a:defRPr sz="1800">
+                <a:solidFill>
+                  <a:srgbClr val="122C4E"/>
+                </a:solidFill>
+                <a:latin typeface="Noto Sans CJK KR"/>
+              </a:defRPr>
+            </a:pPr>
+            <a:r>
+              <a:t>• □ 정상 로그·캡처: logs/validation.log, screenshots/validation_terminal.png</a:t>
+            </a:r>
+          </a:p>
+          <a:p>
+            <a:pPr>
+              <a:spcAft>
+                <a:spcPts val="800"/>
+              </a:spcAft>
+              <a:defRPr sz="1800">
+                <a:solidFill>
+                  <a:srgbClr val="122C4E"/>
+                </a:solidFill>
+                <a:latin typeface="Noto Sans CJK KR"/>
+              </a:defRPr>
+            </a:pPr>
+            <a:r>
+              <a:t>• □ 버전 식별: CHECKSUM_or_TAG.txt의 SHA-256 manifest</a:t>
+            </a:r>
+          </a:p>
+          <a:p>
+            <a:pPr>
+              <a:spcAft>
+                <a:spcPts val="800"/>
+              </a:spcAft>
+              <a:defRPr sz="1800">
+                <a:solidFill>
+                  <a:srgbClr val="122C4E"/>
+                </a:solidFill>
+                <a:latin typeface="Noto Sans CJK KR"/>
+              </a:defRPr>
+            </a:pPr>
+            <a:r>
+              <a:t>• □ 다음 시작 조건: M07 Gazebo 물리</a:t>
+            </a:r>
+          </a:p>
+        </p:txBody>
+      </p:sp>
+      <p:sp>
+        <p:nvSpPr>
+          <p:cNvPr id="9" name="TextBox 8"/>
+          <p:cNvSpPr txBox="1"/>
+          <p:nvPr/>
+        </p:nvSpPr>
+        <p:spPr>
+          <a:xfrm>
+            <a:off x="868680" y="5596128"/>
+            <a:ext cx="10515600" cy="338328"/>
+          </a:xfrm>
+          <a:prstGeom prst="rect">
+            <a:avLst/>
+          </a:prstGeom>
+          <a:noFill/>
+        </p:spPr>
+        <p:txBody>
+          <a:bodyPr wrap="square" lIns="73152" rIns="73152" tIns="36576" bIns="36576">
+            <a:spAutoFit/>
+          </a:bodyPr>
+          <a:lstStyle/>
+          <a:p>
+            <a:pPr algn="ctr">
+              <a:spcAft>
+                <a:spcPts val="0"/>
+              </a:spcAft>
+              <a:defRPr sz="1700" b="1">
+                <a:solidFill>
+                  <a:srgbClr val="2A8B5A"/>
+                </a:solidFill>
+                <a:latin typeface="Noto Sans CJK KR"/>
+              </a:defRPr>
+            </a:pPr>
+            <a:r>
+              <a:t>다음 모듈을 시작하기 전, 이 슬라이드의 Complete와 다음 모듈의 Starter를 비교합니다.</a:t>
+            </a:r>
+          </a:p>
+        </p:txBody>
+      </p:sp>
+    </p:spTree>
+  </p:cSld>
+  <p:clrMapOvr>
+    <a:masterClrMapping/>
+  </p:clrMapOvr>
+</p:sld>
+</file>
+
+<file path=ppt/slides/slide41.xml><?xml version="1.0" encoding="utf-8"?>
+<p:sld xmlns:a="http://schemas.openxmlformats.org/drawingml/2006/main" xmlns:p="http://schemas.openxmlformats.org/presentationml/2006/main" xmlns:r="http://schemas.openxmlformats.org/officeDocument/2006/relationships">
+  <p:cSld>
+    <p:spTree>
+      <p:nvGrpSpPr>
+        <p:cNvPr id="1" name=""/>
+        <p:cNvGrpSpPr/>
+        <p:nvPr/>
+      </p:nvGrpSpPr>
+      <p:grpSpPr/>
+      <p:sp>
+        <p:nvSpPr>
+          <p:cNvPr id="2" name="TextBox 1"/>
+          <p:cNvSpPr txBox="1"/>
+          <p:nvPr/>
+        </p:nvSpPr>
+        <p:spPr>
+          <a:xfrm>
+            <a:off x="566928" y="347472"/>
+            <a:ext cx="10881360" cy="438912"/>
+          </a:xfrm>
+          <a:prstGeom prst="rect">
+            <a:avLst/>
+          </a:prstGeom>
+          <a:noFill/>
+        </p:spPr>
+        <p:txBody>
+          <a:bodyPr wrap="square" lIns="73152" rIns="73152" tIns="36576" bIns="36576">
+            <a:spAutoFit/>
+          </a:bodyPr>
+          <a:lstStyle/>
+          <a:p>
+            <a:pPr algn="l">
+              <a:spcAft>
+                <a:spcPts val="0"/>
+              </a:spcAft>
+              <a:defRPr sz="3200" b="1">
+                <a:solidFill>
+                  <a:srgbClr val="122C4E"/>
+                </a:solidFill>
+                <a:latin typeface="Noto Sans CJK KR"/>
+              </a:defRPr>
+            </a:pPr>
+            <a:r>
+              <a:t>공식 참고 자료</a:t>
+            </a:r>
+          </a:p>
+        </p:txBody>
+      </p:sp>
+      <p:sp>
+        <p:nvSpPr>
+          <p:cNvPr id="3" name="TextBox 2"/>
+          <p:cNvSpPr txBox="1"/>
+          <p:nvPr/>
+        </p:nvSpPr>
+        <p:spPr>
+          <a:xfrm>
+            <a:off x="603504" y="859536"/>
+            <a:ext cx="10698480" cy="292608"/>
+          </a:xfrm>
+          <a:prstGeom prst="rect">
+            <a:avLst/>
+          </a:prstGeom>
+          <a:noFill/>
+        </p:spPr>
+        <p:txBody>
+          <a:bodyPr wrap="square" lIns="73152" rIns="73152" tIns="36576" bIns="36576">
+            <a:spAutoFit/>
+          </a:bodyPr>
+          <a:lstStyle/>
+          <a:p>
+            <a:pPr algn="l">
+              <a:spcAft>
+                <a:spcPts val="0"/>
+              </a:spcAft>
+              <a:defRPr sz="1700" b="0">
+                <a:solidFill>
+                  <a:srgbClr val="5C6672"/>
+                </a:solidFill>
+                <a:latin typeface="Noto Sans CJK KR"/>
+              </a:defRPr>
+            </a:pPr>
+            <a:r>
+              <a:t>본문 단계는 링크를 열지 않아도 완료할 수 있으며, 링크는 개념을 더 확인할 때만 사용합니다.</a:t>
+            </a:r>
+          </a:p>
+        </p:txBody>
+      </p:sp>
+      <p:sp>
+        <p:nvSpPr>
+          <p:cNvPr id="4" name="TextBox 3"/>
+          <p:cNvSpPr txBox="1"/>
+          <p:nvPr/>
+        </p:nvSpPr>
+        <p:spPr>
+          <a:xfrm>
+            <a:off x="530352" y="6510528"/>
+            <a:ext cx="7772400" cy="201168"/>
+          </a:xfrm>
+          <a:prstGeom prst="rect">
+            <a:avLst/>
+          </a:prstGeom>
+          <a:noFill/>
+        </p:spPr>
+        <p:txBody>
+          <a:bodyPr wrap="square" lIns="73152" rIns="73152" tIns="36576" bIns="36576">
+            <a:spAutoFit/>
+          </a:bodyPr>
+          <a:lstStyle/>
+          <a:p>
+            <a:pPr algn="l">
+              <a:spcAft>
+                <a:spcPts val="0"/>
+              </a:spcAft>
+              <a:defRPr sz="1000" b="0">
+                <a:solidFill>
+                  <a:srgbClr val="5C6672"/>
+                </a:solidFill>
+                <a:latin typeface="Noto Sans CJK KR"/>
+              </a:defRPr>
+            </a:pPr>
+            <a:r>
+              <a:t>ROS 2 Jazzy · Gazebo Harmonic · M06 · 따라 하기형 AGV 실습</a:t>
+            </a:r>
+          </a:p>
+        </p:txBody>
+      </p:sp>
+      <p:sp>
+        <p:nvSpPr>
+          <p:cNvPr id="5" name="TextBox 4"/>
+          <p:cNvSpPr txBox="1"/>
+          <p:nvPr/>
+        </p:nvSpPr>
+        <p:spPr>
+          <a:xfrm>
+            <a:off x="9144000" y="6510528"/>
+            <a:ext cx="2468880" cy="201168"/>
+          </a:xfrm>
+          <a:prstGeom prst="rect">
+            <a:avLst/>
+          </a:prstGeom>
+          <a:noFill/>
+        </p:spPr>
+        <p:txBody>
+          <a:bodyPr wrap="square" lIns="73152" rIns="73152" tIns="36576" bIns="36576">
+            <a:spAutoFit/>
+          </a:bodyPr>
+          <a:lstStyle/>
+          <a:p>
+            <a:pPr algn="r">
+              <a:spcAft>
+                <a:spcPts val="0"/>
+              </a:spcAft>
+              <a:defRPr sz="1000" b="0">
+                <a:solidFill>
+                  <a:srgbClr val="5C6672"/>
+                </a:solidFill>
+                <a:latin typeface="Noto Sans CJK KR"/>
+              </a:defRPr>
+            </a:pPr>
+            <a:r>
+              <a:t>명령·파일 경로는 슬라이드에서 복사 가능</a:t>
+            </a:r>
+          </a:p>
+        </p:txBody>
+      </p:sp>
+      <p:sp>
+        <p:nvSpPr>
+          <p:cNvPr id="6" name="Rounded Rectangle 5"/>
+          <p:cNvSpPr/>
+          <p:nvPr/>
+        </p:nvSpPr>
+        <p:spPr>
+          <a:xfrm>
+            <a:off x="658368" y="1554480"/>
+            <a:ext cx="10972800" cy="4526280"/>
+          </a:xfrm>
+          <a:prstGeom prst="roundRect">
+            <a:avLst/>
+          </a:prstGeom>
+          <a:solidFill>
+            <a:srgbClr val="F4F7FB"/>
+          </a:solidFill>
+          <a:ln>
+            <a:solidFill>
+              <a:srgbClr val="D7DFE9"/>
+            </a:solidFill>
+          </a:ln>
+        </p:spPr>
+        <p:style>
+          <a:lnRef idx="1">
+            <a:schemeClr val="accent1"/>
+          </a:lnRef>
+          <a:fillRef idx="3">
+            <a:schemeClr val="accent1"/>
+          </a:fillRef>
+          <a:effectRef idx="2">
+            <a:schemeClr val="accent1"/>
+          </a:effectRef>
+          <a:fontRef idx="minor">
+            <a:schemeClr val="lt1"/>
+          </a:fontRef>
+        </p:style>
+        <p:txBody>
+          <a:bodyPr rtlCol="0" anchor="ctr"/>
+          <a:lstStyle/>
+          <a:p>
+            <a:pPr algn="ctr"/>
+          </a:p>
+        </p:txBody>
+      </p:sp>
+      <p:sp>
+        <p:nvSpPr>
+          <p:cNvPr id="7" name="TextBox 6"/>
+          <p:cNvSpPr txBox="1"/>
+          <p:nvPr/>
+        </p:nvSpPr>
+        <p:spPr>
+          <a:xfrm>
+            <a:off x="914400" y="1773936"/>
+            <a:ext cx="3840480" cy="256032"/>
+          </a:xfrm>
+          <a:prstGeom prst="rect">
+            <a:avLst/>
+          </a:prstGeom>
+          <a:noFill/>
+        </p:spPr>
+        <p:txBody>
+          <a:bodyPr wrap="square" lIns="73152" rIns="73152" tIns="36576" bIns="36576">
+            <a:spAutoFit/>
+          </a:bodyPr>
+          <a:lstStyle/>
+          <a:p>
+            <a:pPr algn="l">
+              <a:spcAft>
+                <a:spcPts val="0"/>
+              </a:spcAft>
+              <a:defRPr sz="1700" b="1">
+                <a:solidFill>
+                  <a:srgbClr val="122C4E"/>
+                </a:solidFill>
+                <a:latin typeface="Noto Sans CJK KR"/>
+              </a:defRPr>
+            </a:pPr>
+            <a:r>
+              <a:t>ROS 2 Jazzy — Gazebo Simulation</a:t>
+            </a:r>
+          </a:p>
+        </p:txBody>
+      </p:sp>
+      <p:sp>
+        <p:nvSpPr>
+          <p:cNvPr id="8" name="TextBox 7"/>
+          <p:cNvSpPr txBox="1"/>
+          <p:nvPr/>
+        </p:nvSpPr>
+        <p:spPr>
+          <a:xfrm>
+            <a:off x="914400" y="2048255"/>
+            <a:ext cx="9966960" cy="475488"/>
+          </a:xfrm>
+          <a:prstGeom prst="rect">
+            <a:avLst/>
+          </a:prstGeom>
+          <a:noFill/>
+        </p:spPr>
+        <p:txBody>
+          <a:bodyPr wrap="square" lIns="73152" rIns="73152" tIns="36576" bIns="36576">
+            <a:spAutoFit/>
+          </a:bodyPr>
+          <a:lstStyle/>
+          <a:p>
+            <a:pPr algn="l">
+              <a:spcAft>
+                <a:spcPts val="0"/>
+              </a:spcAft>
+              <a:defRPr sz="1000" b="0">
+                <a:solidFill>
+                  <a:srgbClr val="225B9B"/>
+                </a:solidFill>
+                <a:latin typeface="DejaVu Sans Mono"/>
+              </a:defRPr>
+            </a:pPr>
+            <a:r>
+              <a:t>https://docs.ros.org/en/jazzy/Tutorials/Advanced/Simulators/Gazebo/Simulation-Gazebo.html</a:t>
+            </a:r>
+          </a:p>
+        </p:txBody>
+      </p:sp>
+      <p:sp>
+        <p:nvSpPr>
+          <p:cNvPr id="9" name="TextBox 8"/>
+          <p:cNvSpPr txBox="1"/>
+          <p:nvPr/>
+        </p:nvSpPr>
+        <p:spPr>
+          <a:xfrm>
+            <a:off x="914400" y="2852928"/>
+            <a:ext cx="3840480" cy="256032"/>
+          </a:xfrm>
+          <a:prstGeom prst="rect">
+            <a:avLst/>
+          </a:prstGeom>
+          <a:noFill/>
+        </p:spPr>
+        <p:txBody>
+          <a:bodyPr wrap="square" lIns="73152" rIns="73152" tIns="36576" bIns="36576">
+            <a:spAutoFit/>
+          </a:bodyPr>
+          <a:lstStyle/>
+          <a:p>
+            <a:pPr algn="l">
+              <a:spcAft>
+                <a:spcPts val="0"/>
+              </a:spcAft>
+              <a:defRPr sz="1700" b="1">
+                <a:solidFill>
+                  <a:srgbClr val="122C4E"/>
+                </a:solidFill>
+                <a:latin typeface="Noto Sans CJK KR"/>
+              </a:defRPr>
+            </a:pPr>
+            <a:r>
+              <a:t>ROS 2 Jazzy — URDF / robot_state_publisher</a:t>
+            </a:r>
+          </a:p>
+        </p:txBody>
+      </p:sp>
+      <p:sp>
+        <p:nvSpPr>
+          <p:cNvPr id="10" name="TextBox 9"/>
+          <p:cNvSpPr txBox="1"/>
+          <p:nvPr/>
+        </p:nvSpPr>
+        <p:spPr>
+          <a:xfrm>
+            <a:off x="914400" y="3127248"/>
+            <a:ext cx="9966960" cy="475488"/>
+          </a:xfrm>
+          <a:prstGeom prst="rect">
+            <a:avLst/>
+          </a:prstGeom>
+          <a:noFill/>
+        </p:spPr>
+        <p:txBody>
+          <a:bodyPr wrap="square" lIns="73152" rIns="73152" tIns="36576" bIns="36576">
+            <a:spAutoFit/>
+          </a:bodyPr>
+          <a:lstStyle/>
+          <a:p>
+            <a:pPr algn="l">
+              <a:spcAft>
+                <a:spcPts val="0"/>
+              </a:spcAft>
+              <a:defRPr sz="1000" b="0">
+                <a:solidFill>
+                  <a:srgbClr val="225B9B"/>
+                </a:solidFill>
+                <a:latin typeface="DejaVu Sans Mono"/>
+              </a:defRPr>
+            </a:pPr>
+            <a:r>
+              <a:t>https://docs.ros.org/en/jazzy/Tutorials/Intermediate/URDF/Using-URDF-with-Robot-State-Publisher-py.html</a:t>
+            </a:r>
+          </a:p>
+        </p:txBody>
+      </p:sp>
+      <p:sp>
+        <p:nvSpPr>
+          <p:cNvPr id="11" name="TextBox 10"/>
+          <p:cNvSpPr txBox="1"/>
+          <p:nvPr/>
+        </p:nvSpPr>
+        <p:spPr>
+          <a:xfrm>
+            <a:off x="914400" y="3931920"/>
+            <a:ext cx="3840480" cy="256032"/>
+          </a:xfrm>
+          <a:prstGeom prst="rect">
+            <a:avLst/>
+          </a:prstGeom>
+          <a:noFill/>
+        </p:spPr>
+        <p:txBody>
+          <a:bodyPr wrap="square" lIns="73152" rIns="73152" tIns="36576" bIns="36576">
+            <a:spAutoFit/>
+          </a:bodyPr>
+          <a:lstStyle/>
+          <a:p>
+            <a:pPr algn="l">
+              <a:spcAft>
+                <a:spcPts val="0"/>
+              </a:spcAft>
+              <a:defRPr sz="1700" b="1">
+                <a:solidFill>
+                  <a:srgbClr val="122C4E"/>
+                </a:solidFill>
+                <a:latin typeface="Noto Sans CJK KR"/>
+              </a:defRPr>
+            </a:pPr>
+            <a:r>
+              <a:t>Gazebo — ROS 2 Integration / ros_gz_bridge</a:t>
+            </a:r>
+          </a:p>
+        </p:txBody>
+      </p:sp>
+      <p:sp>
+        <p:nvSpPr>
+          <p:cNvPr id="12" name="TextBox 11"/>
+          <p:cNvSpPr txBox="1"/>
+          <p:nvPr/>
+        </p:nvSpPr>
+        <p:spPr>
+          <a:xfrm>
+            <a:off x="914400" y="4206240"/>
+            <a:ext cx="9966960" cy="475488"/>
+          </a:xfrm>
+          <a:prstGeom prst="rect">
+            <a:avLst/>
+          </a:prstGeom>
+          <a:noFill/>
+        </p:spPr>
+        <p:txBody>
+          <a:bodyPr wrap="square" lIns="73152" rIns="73152" tIns="36576" bIns="36576">
+            <a:spAutoFit/>
+          </a:bodyPr>
+          <a:lstStyle/>
+          <a:p>
+            <a:pPr algn="l">
+              <a:spcAft>
+                <a:spcPts val="0"/>
+              </a:spcAft>
+              <a:defRPr sz="1000" b="0">
+                <a:solidFill>
+                  <a:srgbClr val="225B9B"/>
+                </a:solidFill>
+                <a:latin typeface="DejaVu Sans Mono"/>
+              </a:defRPr>
+            </a:pPr>
+            <a:r>
+              <a:t>https://gazebosim.org/docs/latest/ros2_integration/</a:t>
+            </a:r>
+          </a:p>
+        </p:txBody>
+      </p:sp>
+      <p:sp>
+        <p:nvSpPr>
+          <p:cNvPr id="13" name="TextBox 12"/>
+          <p:cNvSpPr txBox="1"/>
+          <p:nvPr/>
+        </p:nvSpPr>
+        <p:spPr>
+          <a:xfrm>
+            <a:off x="914400" y="5010912"/>
+            <a:ext cx="3840480" cy="256032"/>
+          </a:xfrm>
+          <a:prstGeom prst="rect">
+            <a:avLst/>
+          </a:prstGeom>
+          <a:noFill/>
+        </p:spPr>
+        <p:txBody>
+          <a:bodyPr wrap="square" lIns="73152" rIns="73152" tIns="36576" bIns="36576">
+            <a:spAutoFit/>
+          </a:bodyPr>
+          <a:lstStyle/>
+          <a:p>
+            <a:pPr algn="l">
+              <a:spcAft>
+                <a:spcPts val="0"/>
+              </a:spcAft>
+              <a:defRPr sz="1700" b="1">
+                <a:solidFill>
+                  <a:srgbClr val="122C4E"/>
+                </a:solidFill>
+                <a:latin typeface="Noto Sans CJK KR"/>
+              </a:defRPr>
+            </a:pPr>
+            <a:r>
+              <a:t>ROS 2 Jazzy — rosbag2 Recording and Playback</a:t>
+            </a:r>
+          </a:p>
+        </p:txBody>
+      </p:sp>
+      <p:sp>
+        <p:nvSpPr>
+          <p:cNvPr id="14" name="TextBox 13"/>
+          <p:cNvSpPr txBox="1"/>
+          <p:nvPr/>
+        </p:nvSpPr>
+        <p:spPr>
+          <a:xfrm>
+            <a:off x="914400" y="5285232"/>
+            <a:ext cx="9966960" cy="475488"/>
+          </a:xfrm>
+          <a:prstGeom prst="rect">
+            <a:avLst/>
+          </a:prstGeom>
+          <a:noFill/>
+        </p:spPr>
+        <p:txBody>
+          <a:bodyPr wrap="square" lIns="73152" rIns="73152" tIns="36576" bIns="36576">
+            <a:spAutoFit/>
+          </a:bodyPr>
+          <a:lstStyle/>
+          <a:p>
+            <a:pPr algn="l">
+              <a:spcAft>
+                <a:spcPts val="0"/>
+              </a:spcAft>
+              <a:defRPr sz="1000" b="0">
+                <a:solidFill>
+                  <a:srgbClr val="225B9B"/>
+                </a:solidFill>
+                <a:latin typeface="DejaVu Sans Mono"/>
+              </a:defRPr>
+            </a:pPr>
+            <a:r>
+              <a:t>https://docs.ros.org/en/jazzy/Tutorials/Beginner-CLI-Tools/Recording-And-Playing-Back-Data/Recording-And-Playing-Back-Data.html</a:t>
+            </a:r>
+          </a:p>
+        </p:txBody>
+      </p:sp>
+    </p:spTree>
+  </p:cSld>
+  <p:clrMapOvr>
+    <a:masterClrMapping/>
+  </p:clrMapOvr>
+</p:sld>
+</file>
+
 <file path=ppt/slides/slide5.xml><?xml version="1.0" encoding="utf-8"?>
 <p:sld xmlns:a="http://schemas.openxmlformats.org/drawingml/2006/main" xmlns:p="http://schemas.openxmlformats.org/presentationml/2006/main" xmlns:r="http://schemas.openxmlformats.org/officeDocument/2006/relationships">
   <p:cSld>
@@ -23334,7 +24978,7 @@
               </a:defRPr>
             </a:pPr>
             <a:r>
-              <a:t>파일을 새로 만들고 저장한다 (1/10)</a:t>
+              <a:t>파일을 새로 만들고 저장한다 (1/11)</a:t>
             </a:r>
           </a:p>
         </p:txBody>
@@ -23509,7 +25153,7 @@
               </a:defRPr>
             </a:pPr>
             <a:r>
-              <a:t>현재 단계 3/13    |    현재 폴더 ~/agv_ws    |    현재 터미널</a:t>
+              <a:t>현재 단계 3/14    |    현재 폴더 ~/agv_ws    |    현재 터미널</a:t>
             </a:r>
           </a:p>
         </p:txBody>
@@ -23522,8 +25166,8 @@
         </p:nvSpPr>
         <p:spPr>
           <a:xfrm>
-            <a:off x="658368" y="1682496"/>
-            <a:ext cx="10972800" cy="347472"/>
+            <a:off x="658368" y="1627632"/>
+            <a:ext cx="10972800" cy="256032"/>
           </a:xfrm>
           <a:prstGeom prst="rect">
             <a:avLst/>
@@ -23540,7 +25184,7 @@
               <a:spcAft>
                 <a:spcPts val="0"/>
               </a:spcAft>
-              <a:defRPr sz="1700" b="1">
+              <a:defRPr sz="1500" b="1">
                 <a:solidFill>
                   <a:srgbClr val="122C4E"/>
                 </a:solidFill>
@@ -23561,8 +25205,8 @@
         </p:nvSpPr>
         <p:spPr>
           <a:xfrm>
-            <a:off x="658368" y="2103120"/>
-            <a:ext cx="10972800" cy="493776"/>
+            <a:off x="658368" y="1956816"/>
+            <a:ext cx="10972800" cy="603504"/>
           </a:xfrm>
           <a:prstGeom prst="rect">
             <a:avLst/>
@@ -23606,7 +25250,11 @@
               </a:defRPr>
             </a:pPr>
             <a:r>
-              <a:t>파일 생성/열기: mkdir -p ~/agv_ws/src/agv_description/urdf    &amp;&amp;    nano ~/agv_ws/src/agv_description/urdf/agv.urdf.xacro</a:t>
+              <a:t>파일 생성: mkdir -p ~/agv_ws/src/agv_description/urdf</a:t>
+            </a:r>
+            <a:br/>
+            <a:r>
+              <a:t>파일 열기: nano ~/agv_ws/src/agv_description/urdf/agv.urdf.xacro</a:t>
             </a:r>
           </a:p>
         </p:txBody>
@@ -23619,8 +25267,8 @@
         </p:nvSpPr>
         <p:spPr>
           <a:xfrm>
-            <a:off x="658368" y="2761488"/>
-            <a:ext cx="10972800" cy="3383280"/>
+            <a:off x="658368" y="2706624"/>
+            <a:ext cx="10972800" cy="3364992"/>
           </a:xfrm>
           <a:prstGeom prst="rect">
             <a:avLst/>
@@ -23710,11 +25358,6 @@
             <a:r>
               <a:t>  </a:t>
             </a:r>
-            <a:br/>
-            <a:br/>
-            <a:r>
-              <a:t>  </a:t>
-            </a:r>
           </a:p>
         </p:txBody>
       </p:sp>
@@ -23726,7 +25369,7 @@
         </p:nvSpPr>
         <p:spPr>
           <a:xfrm>
-            <a:off x="749808" y="6199632"/>
+            <a:off x="749808" y="6181344"/>
             <a:ext cx="10789920" cy="201168"/>
           </a:xfrm>
           <a:prstGeom prst="rect">
@@ -23752,7 +25395,7 @@
               </a:defRPr>
             </a:pPr>
             <a:r>
-              <a:t>파일 전체 1/10 · 이 슬라이드 다음에 같은 파일의 나머지 줄이 이어집니다.</a:t>
+              <a:t>파일 전체 1/11 · 이 슬라이드 다음에 같은 파일의 나머지 줄이 이어집니다.</a:t>
             </a:r>
           </a:p>
         </p:txBody>

--- a/blocks/B_robot_build/M06_xacro_modularization/M06_Xacro로_구조_모듈화.pptx
+++ b/blocks/B_robot_build/M06_xacro_modularization/M06_Xacro로_구조_모듈화.pptx
@@ -25,6 +25,9 @@
     <p:sldId id="273" r:id="rId25"/>
     <p:sldId id="274" r:id="rId26"/>
     <p:sldId id="275" r:id="rId27"/>
+    <p:sldId id="276" r:id="rId28"/>
+    <p:sldId id="277" r:id="rId29"/>
+    <p:sldId id="278" r:id="rId30"/>
   </p:sldIdLst>
   <p:sldSz cx="12191999" cy="6858000" type="screen4x3"/>
   <p:notesSz cx="6858000" cy="9144000"/>
@@ -611,17 +614,22 @@
           <a:lstStyle/>
           <a:p>
             <a:r>
-              <a:t>[설명] ~/ros2_curri/agv_ws/src/agv_description/curriculum_stages/M06/agv.urdf.xacro의 전체 파일을 2/5 구간으로 작성한다.</a:t>
-            </a:r>
-          </a:p>
-          <a:p>
-            <a:r>
-              <a:t>[실행] nano ~/ros2_curri/agv_ws/src/agv_description/curriculum_stages/M06/agv.urdf.xacro</a:t>
-            </a:r>
-          </a:p>
-          <a:p>
-            <a:r>
-              <a:t>[확인] 코드를 저장하고 다음 코드 슬라이드 또는 build 단계로 이동한다.</a:t>
+              <a:t>[설명] 하나의 wheel_radius가 좌우 바퀴에 함께 적용되어야 한다.</a:t>
+            </a:r>
+          </a:p>
+          <a:p>
+            <a:r>
+              <a:t>[실행] check_urdf /tmp/agv_from_xacro.urdf</a:t>
+            </a:r>
+          </a:p>
+          <a:p>
+            <a:r>
+              <a:t># wheel_radius 값을 바꾼 뒤 같은 두 명령을 다시 실행</a:t>
+            </a:r>
+          </a:p>
+          <a:p>
+            <a:r>
+              <a:t>[확인] 명령 출력에서 슬라이드의 확인 항목을 찾는다.</a:t>
             </a:r>
           </a:p>
           <a:p>
@@ -631,7 +639,7 @@
           </a:p>
           <a:p>
             <a:r>
-              <a:t>[오류] 들여쓰기·XML 태그·따옴표가 슬라이드와 정확히 같은지 확인한다.</a:t>
+              <a:t>[오류] 오류가 나면 현재 폴더, source, 파일 경로를 먼저 확인한다.</a:t>
             </a:r>
           </a:p>
         </p:txBody>
@@ -701,7 +709,7 @@
           <a:lstStyle/>
           <a:p>
             <a:r>
-              <a:t>[설명] ~/ros2_curri/agv_ws/src/agv_description/curriculum_stages/M06/agv.urdf.xacro의 전체 파일을 3/5 구간으로 작성한다.</a:t>
+              <a:t>[설명] ~/ros2_curri/agv_ws/src/agv_description/curriculum_stages/M06/agv.urdf.xacro의 전체 파일을 1/5 구간으로 작성한다.</a:t>
             </a:r>
           </a:p>
           <a:p>
@@ -791,7 +799,7 @@
           <a:lstStyle/>
           <a:p>
             <a:r>
-              <a:t>[설명] ~/ros2_curri/agv_ws/src/agv_description/curriculum_stages/M06/agv.urdf.xacro의 전체 파일을 4/5 구간으로 작성한다.</a:t>
+              <a:t>[설명] ~/ros2_curri/agv_ws/src/agv_description/curriculum_stages/M06/agv.urdf.xacro의 전체 파일을 2/5 구간으로 작성한다.</a:t>
             </a:r>
           </a:p>
           <a:p>
@@ -881,7 +889,7 @@
           <a:lstStyle/>
           <a:p>
             <a:r>
-              <a:t>[설명] ~/ros2_curri/agv_ws/src/agv_description/curriculum_stages/M06/agv.urdf.xacro의 전체 파일을 5/5 구간으로 작성한다.</a:t>
+              <a:t>[설명] ~/ros2_curri/agv_ws/src/agv_description/curriculum_stages/M06/agv.urdf.xacro의 전체 파일을 3/5 구간으로 작성한다.</a:t>
             </a:r>
           </a:p>
           <a:p>
@@ -971,22 +979,17 @@
           <a:lstStyle/>
           <a:p>
             <a:r>
-              <a:t>[설명] build/source/run을 생략 없이 실행한다.</a:t>
-            </a:r>
-          </a:p>
-          <a:p>
-            <a:r>
-              <a:t>[실행] xacro ~/ros2_curri/agv_ws/src/agv_description/curriculum_stages/M06/agv.urdf.xacro &gt; /tmp/agv.urdf</a:t>
-            </a:r>
-          </a:p>
-          <a:p>
-            <a:r>
-              <a:t>check_urdf /tmp/agv.urdf</a:t>
-            </a:r>
-          </a:p>
-          <a:p>
-            <a:r>
-              <a:t>[확인] wheel_radius와 wheel_base 변경이 좌우 바퀴·충돌 형상에 함께 적용된다.</a:t>
+              <a:t>[설명] ~/ros2_curri/agv_ws/src/agv_description/curriculum_stages/M06/agv.urdf.xacro의 전체 파일을 4/5 구간으로 작성한다.</a:t>
+            </a:r>
+          </a:p>
+          <a:p>
+            <a:r>
+              <a:t>[실행] nano ~/ros2_curri/agv_ws/src/agv_description/curriculum_stages/M06/agv.urdf.xacro</a:t>
+            </a:r>
+          </a:p>
+          <a:p>
+            <a:r>
+              <a:t>[확인] 코드를 저장하고 다음 코드 슬라이드 또는 build 단계로 이동한다.</a:t>
             </a:r>
           </a:p>
           <a:p>
@@ -996,7 +999,7 @@
           </a:p>
           <a:p>
             <a:r>
-              <a:t>[오류] 오류가 나면 현재 폴더, source, 파일 경로를 먼저 확인한다.</a:t>
+              <a:t>[오류] 들여쓰기·XML 태그·따옴표가 슬라이드와 정확히 같은지 확인한다.</a:t>
             </a:r>
           </a:p>
         </p:txBody>
@@ -1066,17 +1069,17 @@
           <a:lstStyle/>
           <a:p>
             <a:r>
-              <a:t>[설명] 실제 Ubuntu/ROS 2 환경에서 생성한 검증 화면이다.</a:t>
-            </a:r>
-          </a:p>
-          <a:p>
-            <a:r>
-              <a:t>[실행] 슬라이드의 명령 또는 파일 작성 단계를 진행한다.</a:t>
-            </a:r>
-          </a:p>
-          <a:p>
-            <a:r>
-              <a:t>[확인] 캡처의 명령과 다음 슬라이드의 검증 명령을 비교한다.</a:t>
+              <a:t>[설명] ~/ros2_curri/agv_ws/src/agv_description/curriculum_stages/M06/agv.urdf.xacro의 전체 파일을 5/5 구간으로 작성한다.</a:t>
+            </a:r>
+          </a:p>
+          <a:p>
+            <a:r>
+              <a:t>[실행] nano ~/ros2_curri/agv_ws/src/agv_description/curriculum_stages/M06/agv.urdf.xacro</a:t>
+            </a:r>
+          </a:p>
+          <a:p>
+            <a:r>
+              <a:t>[확인] 코드를 저장하고 다음 코드 슬라이드 또는 build 단계로 이동한다.</a:t>
             </a:r>
           </a:p>
           <a:p>
@@ -1086,7 +1089,7 @@
           </a:p>
           <a:p>
             <a:r>
-              <a:t>[오류] 오류가 나면 현재 폴더, source, 파일 경로를 먼저 확인한다.</a:t>
+              <a:t>[오류] 들여쓰기·XML 태그·따옴표가 슬라이드와 정확히 같은지 확인한다.</a:t>
             </a:r>
           </a:p>
         </p:txBody>
@@ -1156,7 +1159,7 @@
           <a:lstStyle/>
           <a:p>
             <a:r>
-              <a:t>[설명] 검증 명령은 GUI 결과와 별도로 실행해 재현 가능한 완료 기준을 만든다.</a:t>
+              <a:t>[설명] build/source/run을 생략 없이 실행한다.</a:t>
             </a:r>
           </a:p>
           <a:p>
@@ -1166,7 +1169,7 @@
           </a:p>
           <a:p>
             <a:r>
-              <a:t>rg -n 'wheel_radius|left_wheel_joint|right_wheel_joint' /tmp/agv.urdf</a:t>
+              <a:t>check_urdf /tmp/agv.urdf</a:t>
             </a:r>
           </a:p>
           <a:p>
@@ -1251,7 +1254,7 @@
           <a:lstStyle/>
           <a:p>
             <a:r>
-              <a:t>[설명] 오류를 대신 해결하지 말고 증상부터 우선 확인 순서대로 교육생이 실행하게 한다.</a:t>
+              <a:t>[설명] 실제 Ubuntu/ROS 2 환경에서 생성한 검증 화면이다.</a:t>
             </a:r>
           </a:p>
           <a:p>
@@ -1261,7 +1264,7 @@
           </a:p>
           <a:p>
             <a:r>
-              <a:t>[확인] 수정 뒤 첫 검증 명령을 다시 실행한다.</a:t>
+              <a:t>[확인] ① 명령/설정  ② 정상 출력 또는 화면  ③ 다음 검증 명령으로 재확인</a:t>
             </a:r>
           </a:p>
           <a:p>
@@ -1271,7 +1274,7 @@
           </a:p>
           <a:p>
             <a:r>
-              <a:t>[오류] 슬라이드의 두 대표 오류를 먼저 사용한다.</a:t>
+              <a:t>[오류] 오류가 나면 현재 폴더, source, 파일 경로를 먼저 확인한다.</a:t>
             </a:r>
           </a:p>
         </p:txBody>
@@ -1341,7 +1344,7 @@
           <a:lstStyle/>
           <a:p>
             <a:r>
-              <a:t>[설명] 교육생이 직접 한 값만 바꿔 원인과 결과를 연결하게 한다.</a:t>
+              <a:t>[설명] 실제 Ubuntu/ROS 2 환경에서 생성한 검증 화면이다.</a:t>
             </a:r>
           </a:p>
           <a:p>
@@ -1351,7 +1354,7 @@
           </a:p>
           <a:p>
             <a:r>
-              <a:t>[확인] 원래 값과 변경 값을 모두 기록한다.</a:t>
+              <a:t>[확인] xacro 명령 다음의 Successfully Parsed XML과 left/right wheel child를 찾습니다.</a:t>
             </a:r>
           </a:p>
           <a:p>
@@ -1431,17 +1434,22 @@
           <a:lstStyle/>
           <a:p>
             <a:r>
-              <a:t>[설명] 교육생이 Complete·캡처·로그를 저장했는지 확인하고 다음 모듈의 시작 상태를 읽는다.</a:t>
-            </a:r>
-          </a:p>
-          <a:p>
-            <a:r>
-              <a:t>[실행] 슬라이드의 명령 또는 파일 작성 단계를 진행한다.</a:t>
-            </a:r>
-          </a:p>
-          <a:p>
-            <a:r>
-              <a:t>[확인] M07 Gazebo 물리 시작 조건을 말할 수 있다.</a:t>
+              <a:t>[설명] 검증 명령은 GUI 결과와 별도로 실행해 재현 가능한 완료 기준을 만든다.</a:t>
+            </a:r>
+          </a:p>
+          <a:p>
+            <a:r>
+              <a:t>[실행] xacro ~/ros2_curri/agv_ws/src/agv_description/curriculum_stages/M06/agv.urdf.xacro &gt; /tmp/agv.urdf</a:t>
+            </a:r>
+          </a:p>
+          <a:p>
+            <a:r>
+              <a:t>rg -n 'wheel_radius|left_wheel_joint|right_wheel_joint' /tmp/agv.urdf</a:t>
+            </a:r>
+          </a:p>
+          <a:p>
+            <a:r>
+              <a:t>[확인] wheel_radius와 wheel_base 변경이 좌우 바퀴·충돌 형상에 함께 적용된다.</a:t>
             </a:r>
           </a:p>
           <a:p>
@@ -1611,6 +1619,276 @@
           <a:lstStyle/>
           <a:p>
             <a:r>
+              <a:t>[설명] 오류를 대신 해결하지 말고 증상부터 우선 확인 순서대로 교육생이 실행하게 한다.</a:t>
+            </a:r>
+          </a:p>
+          <a:p>
+            <a:r>
+              <a:t>[실행] 슬라이드의 명령 또는 파일 작성 단계를 진행한다.</a:t>
+            </a:r>
+          </a:p>
+          <a:p>
+            <a:r>
+              <a:t>[확인] 수정 뒤 첫 검증 명령을 다시 실행한다.</a:t>
+            </a:r>
+          </a:p>
+          <a:p>
+            <a:r>
+              <a:t>[멈춤] 교육생이 현재 체크포인트를 통과할 때까지 기다린다.</a:t>
+            </a:r>
+          </a:p>
+          <a:p>
+            <a:r>
+              <a:t>[오류] 슬라이드의 두 대표 오류를 먼저 사용한다.</a:t>
+            </a:r>
+          </a:p>
+        </p:txBody>
+      </p:sp>
+      <p:sp>
+        <p:nvSpPr>
+          <p:cNvPr id="4" name="Slide Number Placeholder 3"/>
+          <p:cNvSpPr>
+            <a:spLocks noGrp="1"/>
+          </p:cNvSpPr>
+          <p:nvPr>
+            <p:ph type="sldNum" idx="5" sz="quarter"/>
+          </p:nvPr>
+        </p:nvSpPr>
+        <p:spPr/>
+      </p:sp>
+    </p:spTree>
+  </p:cSld>
+  <p:clrMapOvr>
+    <a:masterClrMapping/>
+  </p:clrMapOvr>
+</p:notes>
+</file>
+
+<file path=ppt/notesSlides/notesSlide21.xml><?xml version="1.0" encoding="utf-8"?>
+<p:notes xmlns:a="http://schemas.openxmlformats.org/drawingml/2006/main" xmlns:p="http://schemas.openxmlformats.org/presentationml/2006/main" xmlns:r="http://schemas.openxmlformats.org/officeDocument/2006/relationships">
+  <p:cSld>
+    <p:spTree>
+      <p:nvGrpSpPr>
+        <p:cNvPr id="1" name=""/>
+        <p:cNvGrpSpPr/>
+        <p:nvPr/>
+      </p:nvGrpSpPr>
+      <p:grpSpPr>
+        <a:xfrm>
+          <a:off x="0" y="0"/>
+          <a:ext cx="0" cy="0"/>
+          <a:chOff x="0" y="0"/>
+          <a:chExt cx="0" cy="0"/>
+        </a:xfrm>
+      </p:grpSpPr>
+      <p:sp>
+        <p:nvSpPr>
+          <p:cNvPr id="2" name="Slide Image Placeholder 1"/>
+          <p:cNvSpPr>
+            <a:spLocks noGrp="1"/>
+          </p:cNvSpPr>
+          <p:nvPr>
+            <p:ph type="sldImg" idx="2"/>
+          </p:nvPr>
+        </p:nvSpPr>
+        <p:spPr/>
+      </p:sp>
+      <p:sp>
+        <p:nvSpPr>
+          <p:cNvPr id="3" name="Notes Placeholder 2"/>
+          <p:cNvSpPr>
+            <a:spLocks noGrp="1"/>
+          </p:cNvSpPr>
+          <p:nvPr>
+            <p:ph type="body" idx="3" sz="quarter"/>
+          </p:nvPr>
+        </p:nvSpPr>
+        <p:spPr/>
+        <p:txBody>
+          <a:bodyPr/>
+          <a:lstStyle/>
+          <a:p>
+            <a:r>
+              <a:t>[설명] 교육생이 직접 한 값만 바꿔 원인과 결과를 연결하게 한다.</a:t>
+            </a:r>
+          </a:p>
+          <a:p>
+            <a:r>
+              <a:t>[실행] 슬라이드의 명령 또는 파일 작성 단계를 진행한다.</a:t>
+            </a:r>
+          </a:p>
+          <a:p>
+            <a:r>
+              <a:t>[확인] 원래 값과 변경 값을 모두 기록한다.</a:t>
+            </a:r>
+          </a:p>
+          <a:p>
+            <a:r>
+              <a:t>[멈춤] 교육생이 현재 체크포인트를 통과할 때까지 기다린다.</a:t>
+            </a:r>
+          </a:p>
+          <a:p>
+            <a:r>
+              <a:t>[오류] 오류가 나면 현재 폴더, source, 파일 경로를 먼저 확인한다.</a:t>
+            </a:r>
+          </a:p>
+        </p:txBody>
+      </p:sp>
+      <p:sp>
+        <p:nvSpPr>
+          <p:cNvPr id="4" name="Slide Number Placeholder 3"/>
+          <p:cNvSpPr>
+            <a:spLocks noGrp="1"/>
+          </p:cNvSpPr>
+          <p:nvPr>
+            <p:ph type="sldNum" idx="5" sz="quarter"/>
+          </p:nvPr>
+        </p:nvSpPr>
+        <p:spPr/>
+      </p:sp>
+    </p:spTree>
+  </p:cSld>
+  <p:clrMapOvr>
+    <a:masterClrMapping/>
+  </p:clrMapOvr>
+</p:notes>
+</file>
+
+<file path=ppt/notesSlides/notesSlide22.xml><?xml version="1.0" encoding="utf-8"?>
+<p:notes xmlns:a="http://schemas.openxmlformats.org/drawingml/2006/main" xmlns:p="http://schemas.openxmlformats.org/presentationml/2006/main" xmlns:r="http://schemas.openxmlformats.org/officeDocument/2006/relationships">
+  <p:cSld>
+    <p:spTree>
+      <p:nvGrpSpPr>
+        <p:cNvPr id="1" name=""/>
+        <p:cNvGrpSpPr/>
+        <p:nvPr/>
+      </p:nvGrpSpPr>
+      <p:grpSpPr>
+        <a:xfrm>
+          <a:off x="0" y="0"/>
+          <a:ext cx="0" cy="0"/>
+          <a:chOff x="0" y="0"/>
+          <a:chExt cx="0" cy="0"/>
+        </a:xfrm>
+      </p:grpSpPr>
+      <p:sp>
+        <p:nvSpPr>
+          <p:cNvPr id="2" name="Slide Image Placeholder 1"/>
+          <p:cNvSpPr>
+            <a:spLocks noGrp="1"/>
+          </p:cNvSpPr>
+          <p:nvPr>
+            <p:ph type="sldImg" idx="2"/>
+          </p:nvPr>
+        </p:nvSpPr>
+        <p:spPr/>
+      </p:sp>
+      <p:sp>
+        <p:nvSpPr>
+          <p:cNvPr id="3" name="Notes Placeholder 2"/>
+          <p:cNvSpPr>
+            <a:spLocks noGrp="1"/>
+          </p:cNvSpPr>
+          <p:nvPr>
+            <p:ph type="body" idx="3" sz="quarter"/>
+          </p:nvPr>
+        </p:nvSpPr>
+        <p:spPr/>
+        <p:txBody>
+          <a:bodyPr/>
+          <a:lstStyle/>
+          <a:p>
+            <a:r>
+              <a:t>[설명] 교육생이 Complete·캡처·로그를 저장했는지 확인하고 다음 모듈의 시작 상태를 읽는다.</a:t>
+            </a:r>
+          </a:p>
+          <a:p>
+            <a:r>
+              <a:t>[실행] 슬라이드의 명령 또는 파일 작성 단계를 진행한다.</a:t>
+            </a:r>
+          </a:p>
+          <a:p>
+            <a:r>
+              <a:t>[확인] M07 Gazebo 물리 시작 조건을 말할 수 있다.</a:t>
+            </a:r>
+          </a:p>
+          <a:p>
+            <a:r>
+              <a:t>[멈춤] 교육생이 현재 체크포인트를 통과할 때까지 기다린다.</a:t>
+            </a:r>
+          </a:p>
+          <a:p>
+            <a:r>
+              <a:t>[오류] 오류가 나면 현재 폴더, source, 파일 경로를 먼저 확인한다.</a:t>
+            </a:r>
+          </a:p>
+        </p:txBody>
+      </p:sp>
+      <p:sp>
+        <p:nvSpPr>
+          <p:cNvPr id="4" name="Slide Number Placeholder 3"/>
+          <p:cNvSpPr>
+            <a:spLocks noGrp="1"/>
+          </p:cNvSpPr>
+          <p:nvPr>
+            <p:ph type="sldNum" idx="5" sz="quarter"/>
+          </p:nvPr>
+        </p:nvSpPr>
+        <p:spPr/>
+      </p:sp>
+    </p:spTree>
+  </p:cSld>
+  <p:clrMapOvr>
+    <a:masterClrMapping/>
+  </p:clrMapOvr>
+</p:notes>
+</file>
+
+<file path=ppt/notesSlides/notesSlide23.xml><?xml version="1.0" encoding="utf-8"?>
+<p:notes xmlns:a="http://schemas.openxmlformats.org/drawingml/2006/main" xmlns:p="http://schemas.openxmlformats.org/presentationml/2006/main" xmlns:r="http://schemas.openxmlformats.org/officeDocument/2006/relationships">
+  <p:cSld>
+    <p:spTree>
+      <p:nvGrpSpPr>
+        <p:cNvPr id="1" name=""/>
+        <p:cNvGrpSpPr/>
+        <p:nvPr/>
+      </p:nvGrpSpPr>
+      <p:grpSpPr>
+        <a:xfrm>
+          <a:off x="0" y="0"/>
+          <a:ext cx="0" cy="0"/>
+          <a:chOff x="0" y="0"/>
+          <a:chExt cx="0" cy="0"/>
+        </a:xfrm>
+      </p:grpSpPr>
+      <p:sp>
+        <p:nvSpPr>
+          <p:cNvPr id="2" name="Slide Image Placeholder 1"/>
+          <p:cNvSpPr>
+            <a:spLocks noGrp="1"/>
+          </p:cNvSpPr>
+          <p:nvPr>
+            <p:ph type="sldImg" idx="2"/>
+          </p:nvPr>
+        </p:nvSpPr>
+        <p:spPr/>
+      </p:sp>
+      <p:sp>
+        <p:nvSpPr>
+          <p:cNvPr id="3" name="Notes Placeholder 2"/>
+          <p:cNvSpPr>
+            <a:spLocks noGrp="1"/>
+          </p:cNvSpPr>
+          <p:nvPr>
+            <p:ph type="body" idx="3" sz="quarter"/>
+          </p:nvPr>
+        </p:nvSpPr>
+        <p:spPr/>
+        <p:txBody>
+          <a:bodyPr/>
+          <a:lstStyle/>
+          <a:p>
+            <a:r>
               <a:t>[설명] 공식 문서는 버전 차이와 확장 학습을 확인할 때 사용한다.</a:t>
             </a:r>
           </a:p>
@@ -2061,22 +2339,17 @@
           <a:lstStyle/>
           <a:p>
             <a:r>
-              <a:t>[설명] M05 단일 URDF의 반복 바퀴 구조를 macro/property로 바꾸는 첫 단계다.</a:t>
-            </a:r>
-          </a:p>
-          <a:p>
-            <a:r>
-              <a:t>[실행] cd ~/ros2_curri/agv_ws</a:t>
-            </a:r>
-          </a:p>
-          <a:p>
-            <a:r>
-              <a:t>xacro src/agv_description/curriculum_stages/M06/agv.urdf.xacro &gt; /tmp/agv_from_xacro.urdf</a:t>
-            </a:r>
-          </a:p>
-          <a:p>
-            <a:r>
-              <a:t>[확인] 명령 출력에서 슬라이드의 확인 항목을 찾는다.</a:t>
+              <a:t>[설명] 파일을 코드 문법보다 먼저 역할·사용법·확인 화면으로 설명한다.</a:t>
+            </a:r>
+          </a:p>
+          <a:p>
+            <a:r>
+              <a:t>[실행] 슬라이드의 명령 또는 파일 작성 단계를 진행한다.</a:t>
+            </a:r>
+          </a:p>
+          <a:p>
+            <a:r>
+              <a:t>[확인] 교육생이 각 파일의 산출물과 확인 위치를 말할 수 있다.</a:t>
             </a:r>
           </a:p>
           <a:p>
@@ -2156,22 +2429,17 @@
           <a:lstStyle/>
           <a:p>
             <a:r>
-              <a:t>[설명] 하나의 wheel_radius가 좌우 바퀴에 함께 적용되어야 한다.</a:t>
-            </a:r>
-          </a:p>
-          <a:p>
-            <a:r>
-              <a:t>[실행] check_urdf /tmp/agv_from_xacro.urdf</a:t>
-            </a:r>
-          </a:p>
-          <a:p>
-            <a:r>
-              <a:t># wheel_radius 값을 바꾼 뒤 같은 두 명령을 다시 실행</a:t>
-            </a:r>
-          </a:p>
-          <a:p>
-            <a:r>
-              <a:t>[확인] 명령 출력에서 슬라이드의 확인 항목을 찾는다.</a:t>
+              <a:t>[설명] Xacro는 같은 바퀴 코드를 복사하지 않고 ‘값 한 번, 생성 여러 번’으로 바꾸는 도구입니다.</a:t>
+            </a:r>
+          </a:p>
+          <a:p>
+            <a:r>
+              <a:t>[실행] 슬라이드의 명령 또는 파일 작성 단계를 진행한다.</a:t>
+            </a:r>
+          </a:p>
+          <a:p>
+            <a:r>
+              <a:t>[확인] xacro → /tmp/agv.urdf → check_urdf 순서가 변환과 검증을 분리합니다.</a:t>
             </a:r>
           </a:p>
           <a:p>
@@ -2251,17 +2519,22 @@
           <a:lstStyle/>
           <a:p>
             <a:r>
-              <a:t>[설명] ~/ros2_curri/agv_ws/src/agv_description/curriculum_stages/M06/agv.urdf.xacro의 전체 파일을 1/5 구간으로 작성한다.</a:t>
-            </a:r>
-          </a:p>
-          <a:p>
-            <a:r>
-              <a:t>[실행] nano ~/ros2_curri/agv_ws/src/agv_description/curriculum_stages/M06/agv.urdf.xacro</a:t>
-            </a:r>
-          </a:p>
-          <a:p>
-            <a:r>
-              <a:t>[확인] 코드를 저장하고 다음 코드 슬라이드 또는 build 단계로 이동한다.</a:t>
+              <a:t>[설명] M05 단일 URDF의 반복 바퀴 구조를 macro/property로 바꾸는 첫 단계다.</a:t>
+            </a:r>
+          </a:p>
+          <a:p>
+            <a:r>
+              <a:t>[실행] cd ~/ros2_curri/agv_ws</a:t>
+            </a:r>
+          </a:p>
+          <a:p>
+            <a:r>
+              <a:t>xacro src/agv_description/curriculum_stages/M06/agv.urdf.xacro &gt; /tmp/agv_from_xacro.urdf</a:t>
+            </a:r>
+          </a:p>
+          <a:p>
+            <a:r>
+              <a:t>[확인] 명령 출력에서 슬라이드의 확인 항목을 찾는다.</a:t>
             </a:r>
           </a:p>
           <a:p>
@@ -2271,7 +2544,7 @@
           </a:p>
           <a:p>
             <a:r>
-              <a:t>[오류] 들여쓰기·XML 태그·따옴표가 슬라이드와 정확히 같은지 확인한다.</a:t>
+              <a:t>[오류] 오류가 나면 현재 폴더, source, 파일 경로를 먼저 확인한다.</a:t>
             </a:r>
           </a:p>
         </p:txBody>
@@ -5644,7 +5917,7 @@
               </a:defRPr>
             </a:pPr>
             <a:r>
-              <a:t>파일을 계속 작성하고 저장한다 (2/5)</a:t>
+              <a:t>property 변경을 검증한다</a:t>
             </a:r>
           </a:p>
         </p:txBody>
@@ -5683,7 +5956,7 @@
               </a:defRPr>
             </a:pPr>
             <a:r>
-              <a:t>~/ros2_curri/agv_ws/src/agv_description/curriculum_stages/M06/agv.urdf.xacro</a:t>
+              <a:t>한 장에는 한 행동만 수행합니다.</a:t>
             </a:r>
           </a:p>
         </p:txBody>
@@ -5819,7 +6092,7 @@
               </a:defRPr>
             </a:pPr>
             <a:r>
-              <a:t>현재 단계 4/8    |    현재 폴더 ~/ros2_curri/agv_ws    |    현재 터미널</a:t>
+              <a:t>현재 단계 2/2    |    현재 폴더 ~/ros2_curri/agv_ws    |    현재 터미널</a:t>
             </a:r>
           </a:p>
         </p:txBody>
@@ -5832,8 +6105,8 @@
         </p:nvSpPr>
         <p:spPr>
           <a:xfrm>
-            <a:off x="658368" y="1627632"/>
-            <a:ext cx="10972800" cy="256032"/>
+            <a:off x="676656" y="1764792"/>
+            <a:ext cx="1828800" cy="347472"/>
           </a:xfrm>
           <a:prstGeom prst="rect">
             <a:avLst/>
@@ -5850,7 +6123,46 @@
               <a:spcAft>
                 <a:spcPts val="0"/>
               </a:spcAft>
-              <a:defRPr sz="1500" b="1">
+              <a:defRPr sz="1800" b="1">
+                <a:solidFill>
+                  <a:srgbClr val="225B9B"/>
+                </a:solidFill>
+                <a:latin typeface="Noto Sans CJK KR"/>
+              </a:defRPr>
+            </a:pPr>
+            <a:r>
+              <a:t>왜 하는가</a:t>
+            </a:r>
+          </a:p>
+        </p:txBody>
+      </p:sp>
+      <p:sp>
+        <p:nvSpPr>
+          <p:cNvPr id="8" name="TextBox 7"/>
+          <p:cNvSpPr txBox="1"/>
+          <p:nvPr/>
+        </p:nvSpPr>
+        <p:spPr>
+          <a:xfrm>
+            <a:off x="676656" y="2103120"/>
+            <a:ext cx="10789920" cy="512064"/>
+          </a:xfrm>
+          <a:prstGeom prst="rect">
+            <a:avLst/>
+          </a:prstGeom>
+          <a:noFill/>
+        </p:spPr>
+        <p:txBody>
+          <a:bodyPr wrap="square" lIns="73152" rIns="73152" tIns="36576" bIns="36576">
+            <a:spAutoFit/>
+          </a:bodyPr>
+          <a:lstStyle/>
+          <a:p>
+            <a:pPr algn="l">
+              <a:spcAft>
+                <a:spcPts val="0"/>
+              </a:spcAft>
+              <a:defRPr sz="2000" b="0">
                 <a:solidFill>
                   <a:srgbClr val="122C4E"/>
                 </a:solidFill>
@@ -5858,85 +6170,23 @@
               </a:defRPr>
             </a:pPr>
             <a:r>
-              <a:t>이번 단계: 파일의 전체 내용을 중간 생략 없이 작성합니다. 아래 줄 범위를 끝까지 입력하세요.</a:t>
-            </a:r>
-          </a:p>
-        </p:txBody>
-      </p:sp>
-      <p:sp>
-        <p:nvSpPr>
-          <p:cNvPr id="8" name="Rectangle 7"/>
+              <a:t>하나의 wheel_radius가 좌우 바퀴에 함께 적용되어야 한다.</a:t>
+            </a:r>
+          </a:p>
+        </p:txBody>
+      </p:sp>
+      <p:sp>
+        <p:nvSpPr>
+          <p:cNvPr id="9" name="Rounded Rectangle 8"/>
           <p:cNvSpPr/>
           <p:nvPr/>
         </p:nvSpPr>
         <p:spPr>
           <a:xfrm>
-            <a:off x="658368" y="1956816"/>
-            <a:ext cx="10972800" cy="603504"/>
-          </a:xfrm>
-          <a:prstGeom prst="rect">
-            <a:avLst/>
-          </a:prstGeom>
-          <a:solidFill>
-            <a:srgbClr val="F4F7FB"/>
-          </a:solidFill>
-          <a:ln>
-            <a:solidFill>
-              <a:srgbClr val="F4F7FB"/>
-            </a:solidFill>
-          </a:ln>
-        </p:spPr>
-        <p:style>
-          <a:lnRef idx="1">
-            <a:schemeClr val="accent1"/>
-          </a:lnRef>
-          <a:fillRef idx="3">
-            <a:schemeClr val="accent1"/>
-          </a:fillRef>
-          <a:effectRef idx="2">
-            <a:schemeClr val="accent1"/>
-          </a:effectRef>
-          <a:fontRef idx="minor">
-            <a:schemeClr val="lt1"/>
-          </a:fontRef>
-        </p:style>
-        <p:txBody>
-          <a:bodyPr rtlCol="0" anchor="ctr" wrap="square" lIns="73152" rIns="73152" tIns="36576" bIns="36576"/>
-          <a:lstStyle/>
-          <a:p>
-            <a:pPr algn="l">
-              <a:spcAft>
-                <a:spcPts val="0"/>
-              </a:spcAft>
-              <a:defRPr sz="1400" b="0">
-                <a:solidFill>
-                  <a:srgbClr val="122C4E"/>
-                </a:solidFill>
-                <a:latin typeface="DejaVu Sans Mono"/>
-              </a:defRPr>
-            </a:pPr>
-            <a:r>
-              <a:t>파일 생성: mkdir -p ~/ros2_curri/agv_ws/src/agv_description/curriculum_stages/M06</a:t>
-            </a:r>
-            <a:br/>
-            <a:r>
-              <a:t>파일 열기: nano ~/ros2_curri/agv_ws/src/agv_description/curriculum_stages/M06/agv.urdf.xacro</a:t>
-            </a:r>
-          </a:p>
-        </p:txBody>
-      </p:sp>
-      <p:sp>
-        <p:nvSpPr>
-          <p:cNvPr id="9" name="Rectangle 8"/>
-          <p:cNvSpPr/>
-          <p:nvPr/>
-        </p:nvSpPr>
-        <p:spPr>
-          <a:xfrm>
-            <a:off x="658368" y="2706624"/>
-            <a:ext cx="10972800" cy="3364992"/>
-          </a:xfrm>
-          <a:prstGeom prst="rect">
+            <a:off x="676656" y="2871216"/>
+            <a:ext cx="10835640" cy="2331720"/>
+          </a:xfrm>
+          <a:prstGeom prst="roundRect">
             <a:avLst/>
           </a:prstGeom>
           <a:solidFill>
@@ -5963,14 +6213,14 @@
           </a:fontRef>
         </p:style>
         <p:txBody>
-          <a:bodyPr rtlCol="0" anchor="ctr" wrap="square" lIns="164592" rIns="164592" tIns="109728" bIns="36576"/>
+          <a:bodyPr rtlCol="0" anchor="ctr" wrap="square" lIns="73152" rIns="73152" tIns="36576" bIns="36576"/>
           <a:lstStyle/>
           <a:p>
             <a:pPr algn="l">
               <a:spcAft>
                 <a:spcPts val="0"/>
               </a:spcAft>
-              <a:defRPr sz="1400" b="0">
+              <a:defRPr sz="1600" b="0">
                 <a:solidFill>
                   <a:srgbClr val="FFFFFF"/>
                 </a:solidFill>
@@ -5978,51 +6228,11 @@
               </a:defRPr>
             </a:pPr>
             <a:r>
-              <a:t>    </a:t>
+              <a:t>check_urdf /tmp/agv_from_xacro.urdf</a:t>
             </a:r>
             <a:br/>
             <a:r>
-              <a:t>    &lt;link name="${side}_wheel_link"&gt;</a:t>
-            </a:r>
-            <a:br/>
-            <a:r>
-              <a:t>      &lt;visual&gt;</a:t>
-            </a:r>
-            <a:br/>
-            <a:r>
-              <a:t>        &lt;origin rpy="1.5708 0 0"/&gt;</a:t>
-            </a:r>
-            <a:br/>
-            <a:r>
-              <a:t>        &lt;geometry&gt;</a:t>
-            </a:r>
-            <a:br/>
-            <a:r>
-              <a:t>          &lt;cylinder radius="${wheel_radius}" length="0.05"/&gt;</a:t>
-            </a:r>
-            <a:br/>
-            <a:r>
-              <a:t>        &lt;/geometry&gt;</a:t>
-            </a:r>
-            <a:br/>
-            <a:r>
-              <a:t>      &lt;/visual&gt;</a:t>
-            </a:r>
-            <a:br/>
-            <a:r>
-              <a:t>    &lt;/link&gt;</a:t>
-            </a:r>
-            <a:br/>
-            <a:r>
-              <a:t>    </a:t>
-            </a:r>
-            <a:br/>
-            <a:r>
-              <a:t>    </a:t>
-            </a:r>
-            <a:br/>
-            <a:r>
-              <a:t>    &lt;joint name="${side}_wheel_joint" type="continuous"&gt;</a:t>
+              <a:t># wheel_radius 값을 바꾼 뒤 같은 두 명령을 다시 실행</a:t>
             </a:r>
           </a:p>
         </p:txBody>
@@ -6035,8 +6245,8 @@
         </p:nvSpPr>
         <p:spPr>
           <a:xfrm>
-            <a:off x="749808" y="6181344"/>
-            <a:ext cx="10789920" cy="201168"/>
+            <a:off x="768096" y="5468112"/>
+            <a:ext cx="1143000" cy="256032"/>
           </a:xfrm>
           <a:prstGeom prst="rect">
             <a:avLst/>
@@ -6053,15 +6263,54 @@
               <a:spcAft>
                 <a:spcPts val="0"/>
               </a:spcAft>
-              <a:defRPr sz="1000" b="0">
-                <a:solidFill>
-                  <a:srgbClr val="5C6672"/>
-                </a:solidFill>
-                <a:latin typeface="Noto Sans CJK KR"/>
-              </a:defRPr>
-            </a:pPr>
-            <a:r>
-              <a:t>파일 전체 2/5 · 이 슬라이드 다음에 같은 파일의 나머지 줄이 이어집니다.</a:t>
+              <a:defRPr sz="1800" b="1">
+                <a:solidFill>
+                  <a:srgbClr val="2A8B5A"/>
+                </a:solidFill>
+                <a:latin typeface="Noto Sans CJK KR"/>
+              </a:defRPr>
+            </a:pPr>
+            <a:r>
+              <a:t>확인</a:t>
+            </a:r>
+          </a:p>
+        </p:txBody>
+      </p:sp>
+      <p:sp>
+        <p:nvSpPr>
+          <p:cNvPr id="11" name="TextBox 10"/>
+          <p:cNvSpPr txBox="1"/>
+          <p:nvPr/>
+        </p:nvSpPr>
+        <p:spPr>
+          <a:xfrm>
+            <a:off x="768096" y="5742432"/>
+            <a:ext cx="10561320" cy="347472"/>
+          </a:xfrm>
+          <a:prstGeom prst="rect">
+            <a:avLst/>
+          </a:prstGeom>
+          <a:noFill/>
+        </p:spPr>
+        <p:txBody>
+          <a:bodyPr wrap="square" lIns="73152" rIns="73152" tIns="36576" bIns="36576">
+            <a:spAutoFit/>
+          </a:bodyPr>
+          <a:lstStyle/>
+          <a:p>
+            <a:pPr algn="l">
+              <a:spcAft>
+                <a:spcPts val="0"/>
+              </a:spcAft>
+              <a:defRPr sz="1800" b="0">
+                <a:solidFill>
+                  <a:srgbClr val="122C4E"/>
+                </a:solidFill>
+                <a:latin typeface="Noto Sans CJK KR"/>
+              </a:defRPr>
+            </a:pPr>
+            <a:r>
+              <a:t>명령의 출력에서 topic·frame·파일 이름 또는 성공 메시지를 찾으면 이 단계가 완료됩니다.</a:t>
             </a:r>
           </a:p>
         </p:txBody>
@@ -6118,7 +6367,7 @@
               </a:defRPr>
             </a:pPr>
             <a:r>
-              <a:t>파일을 계속 작성하고 저장한다 (3/5)</a:t>
+              <a:t>파일을 새로 만들고 저장한다 (1/5)</a:t>
             </a:r>
           </a:p>
         </p:txBody>
@@ -6293,7 +6542,7 @@
               </a:defRPr>
             </a:pPr>
             <a:r>
-              <a:t>현재 단계 5/8    |    현재 폴더 ~/ros2_curri/agv_ws    |    현재 터미널</a:t>
+              <a:t>현재 단계 3/8    |    현재 폴더 ~/ros2_curri/agv_ws    |    현재 터미널</a:t>
             </a:r>
           </a:p>
         </p:txBody>
@@ -6452,51 +6701,51 @@
               </a:defRPr>
             </a:pPr>
             <a:r>
-              <a:t>      &lt;parent link="base_link"/&gt;</a:t>
+              <a:t>&lt;?xml version="1.0" ?&gt;</a:t>
             </a:r>
             <a:br/>
             <a:r>
-              <a:t>      &lt;child link="${side}_wheel_link"/&gt;</a:t>
+              <a:t>&lt;robot xmlns:xacro="http://www.ros.org/wiki/xacro" name="agv_m06"&gt;</a:t>
             </a:r>
             <a:br/>
             <a:r>
-              <a:t>      &lt;origin xyz="0 ${y} ${wheel_radius}"/&gt;</a:t>
+              <a:t>  </a:t>
             </a:r>
             <a:br/>
             <a:r>
-              <a:t>      &lt;axis xyz="0 1 0"/&gt;</a:t>
+              <a:t>  </a:t>
             </a:r>
             <a:br/>
             <a:r>
-              <a:t>    &lt;/joint&gt;</a:t>
+              <a:t>  &lt;xacro:property name="wheel_radius" value="0.08"/&gt;</a:t>
             </a:r>
             <a:br/>
             <a:r>
+              <a:t>  </a:t>
+            </a:r>
+            <a:br/>
+            <a:r>
+              <a:t>  </a:t>
+            </a:r>
+            <a:br/>
+            <a:r>
+              <a:t>  &lt;xacro:property name="half_track" value="0.19"/&gt;</a:t>
+            </a:r>
+            <a:br/>
+            <a:r>
+              <a:t>  </a:t>
+            </a:r>
+            <a:br/>
+            <a:r>
+              <a:t>  </a:t>
+            </a:r>
+            <a:br/>
+            <a:r>
+              <a:t>  &lt;xacro:macro name="wheel" params="side y"&gt;</a:t>
+            </a:r>
+            <a:br/>
+            <a:r>
               <a:t>    </a:t>
-            </a:r>
-            <a:br/>
-            <a:r>
-              <a:t>  </a:t>
-            </a:r>
-            <a:br/>
-            <a:r>
-              <a:t>  &lt;/xacro:macro&gt;</a:t>
-            </a:r>
-            <a:br/>
-            <a:r>
-              <a:t>  </a:t>
-            </a:r>
-            <a:br/>
-            <a:r>
-              <a:t>  </a:t>
-            </a:r>
-            <a:br/>
-            <a:r>
-              <a:t>  &lt;link name="base_link"&gt;</a:t>
-            </a:r>
-            <a:br/>
-            <a:r>
-              <a:t>    &lt;visual&gt;</a:t>
             </a:r>
           </a:p>
         </p:txBody>
@@ -6535,7 +6784,7 @@
               </a:defRPr>
             </a:pPr>
             <a:r>
-              <a:t>파일 전체 3/5 · 이 슬라이드 다음에 같은 파일의 나머지 줄이 이어집니다.</a:t>
+              <a:t>파일 전체 1/5 · 이 슬라이드 다음에 같은 파일의 나머지 줄이 이어집니다.</a:t>
             </a:r>
           </a:p>
         </p:txBody>
@@ -6592,7 +6841,7 @@
               </a:defRPr>
             </a:pPr>
             <a:r>
-              <a:t>파일을 계속 작성하고 저장한다 (4/5)</a:t>
+              <a:t>파일을 계속 작성하고 저장한다 (2/5)</a:t>
             </a:r>
           </a:p>
         </p:txBody>
@@ -6767,7 +7016,7 @@
               </a:defRPr>
             </a:pPr>
             <a:r>
-              <a:t>현재 단계 6/8    |    현재 폴더 ~/ros2_curri/agv_ws    |    현재 터미널</a:t>
+              <a:t>현재 단계 4/8    |    현재 폴더 ~/ros2_curri/agv_ws    |    현재 터미널</a:t>
             </a:r>
           </a:p>
         </p:txBody>
@@ -6926,49 +7175,52 @@
               </a:defRPr>
             </a:pPr>
             <a:r>
-              <a:t>      &lt;origin xyz="0 0 0.16"/&gt;</a:t>
+              <a:t>    </a:t>
             </a:r>
             <a:br/>
             <a:r>
-              <a:t>      &lt;geometry&gt;</a:t>
+              <a:t>    &lt;link name="${side}_wheel_link"&gt;</a:t>
             </a:r>
             <a:br/>
             <a:r>
-              <a:t>        &lt;box size="0.60 0.42 0.16"/&gt;</a:t>
+              <a:t>      &lt;visual&gt;</a:t>
             </a:r>
             <a:br/>
             <a:r>
-              <a:t>      &lt;/geometry&gt;</a:t>
+              <a:t>        &lt;origin rpy="1.5708 0 0"/&gt;</a:t>
             </a:r>
             <a:br/>
             <a:r>
-              <a:t>    &lt;/visual&gt;</a:t>
+              <a:t>        &lt;geometry&gt;</a:t>
             </a:r>
             <a:br/>
             <a:r>
-              <a:t>  &lt;/link&gt;</a:t>
+              <a:t>          &lt;cylinder radius="${wheel_radius}" length="0.05"/&gt;</a:t>
             </a:r>
             <a:br/>
             <a:r>
-              <a:t>  </a:t>
+              <a:t>        &lt;/geometry&gt;</a:t>
             </a:r>
             <a:br/>
             <a:r>
-              <a:t>  </a:t>
+              <a:t>      &lt;/visual&gt;</a:t>
             </a:r>
             <a:br/>
             <a:r>
-              <a:t>  &lt;xacro:wheel side="left" y="${half_track}"/&gt;</a:t>
+              <a:t>    &lt;/link&gt;</a:t>
             </a:r>
             <a:br/>
             <a:r>
-              <a:t>  &lt;xacro:wheel side="right" y="${-half_track}"/&gt;</a:t>
+              <a:t>    </a:t>
             </a:r>
             <a:br/>
             <a:r>
-              <a:t>  </a:t>
+              <a:t>    </a:t>
             </a:r>
             <a:br/>
+            <a:r>
+              <a:t>    &lt;joint name="${side}_wheel_joint" type="continuous"&gt;</a:t>
+            </a:r>
           </a:p>
         </p:txBody>
       </p:sp>
@@ -7006,7 +7258,7 @@
               </a:defRPr>
             </a:pPr>
             <a:r>
-              <a:t>파일 전체 4/5 · 이 슬라이드 다음에 같은 파일의 나머지 줄이 이어집니다.</a:t>
+              <a:t>파일 전체 2/5 · 이 슬라이드 다음에 같은 파일의 나머지 줄이 이어집니다.</a:t>
             </a:r>
           </a:p>
         </p:txBody>
@@ -7063,7 +7315,7 @@
               </a:defRPr>
             </a:pPr>
             <a:r>
-              <a:t>파일을 계속 작성하고 저장한다 (5/5)</a:t>
+              <a:t>파일을 계속 작성하고 저장한다 (3/5)</a:t>
             </a:r>
           </a:p>
         </p:txBody>
@@ -7238,7 +7490,7 @@
               </a:defRPr>
             </a:pPr>
             <a:r>
-              <a:t>현재 단계 7/8    |    현재 폴더 ~/ros2_curri/agv_ws    |    현재 터미널</a:t>
+              <a:t>현재 단계 5/8    |    현재 폴더 ~/ros2_curri/agv_ws    |    현재 터미널</a:t>
             </a:r>
           </a:p>
         </p:txBody>
@@ -7397,7 +7649,51 @@
               </a:defRPr>
             </a:pPr>
             <a:r>
-              <a:t>&lt;/robot&gt;</a:t>
+              <a:t>      &lt;parent link="base_link"/&gt;</a:t>
+            </a:r>
+            <a:br/>
+            <a:r>
+              <a:t>      &lt;child link="${side}_wheel_link"/&gt;</a:t>
+            </a:r>
+            <a:br/>
+            <a:r>
+              <a:t>      &lt;origin xyz="0 ${y} ${wheel_radius}"/&gt;</a:t>
+            </a:r>
+            <a:br/>
+            <a:r>
+              <a:t>      &lt;axis xyz="0 1 0"/&gt;</a:t>
+            </a:r>
+            <a:br/>
+            <a:r>
+              <a:t>    &lt;/joint&gt;</a:t>
+            </a:r>
+            <a:br/>
+            <a:r>
+              <a:t>    </a:t>
+            </a:r>
+            <a:br/>
+            <a:r>
+              <a:t>  </a:t>
+            </a:r>
+            <a:br/>
+            <a:r>
+              <a:t>  &lt;/xacro:macro&gt;</a:t>
+            </a:r>
+            <a:br/>
+            <a:r>
+              <a:t>  </a:t>
+            </a:r>
+            <a:br/>
+            <a:r>
+              <a:t>  </a:t>
+            </a:r>
+            <a:br/>
+            <a:r>
+              <a:t>  &lt;link name="base_link"&gt;</a:t>
+            </a:r>
+            <a:br/>
+            <a:r>
+              <a:t>    &lt;visual&gt;</a:t>
             </a:r>
           </a:p>
         </p:txBody>
@@ -7436,7 +7732,7 @@
               </a:defRPr>
             </a:pPr>
             <a:r>
-              <a:t>파일 전체 5/5 · 이 슬라이드 다음에 같은 파일의 나머지 줄이 이어집니다.</a:t>
+              <a:t>파일 전체 3/5 · 이 슬라이드 다음에 같은 파일의 나머지 줄이 이어집니다.</a:t>
             </a:r>
           </a:p>
         </p:txBody>
@@ -7493,7 +7789,7 @@
               </a:defRPr>
             </a:pPr>
             <a:r>
-              <a:t>build → source → run 순서로 실행한다</a:t>
+              <a:t>파일을 계속 작성하고 저장한다 (4/5)</a:t>
             </a:r>
           </a:p>
         </p:txBody>
@@ -7532,7 +7828,7 @@
               </a:defRPr>
             </a:pPr>
             <a:r>
-              <a:t>새 파일 또는 수정 파일은 build와 source 뒤에만 실행 이름·설정에 반영됩니다.</a:t>
+              <a:t>~/ros2_curri/agv_ws/src/agv_description/curriculum_stages/M06/agv.urdf.xacro</a:t>
             </a:r>
           </a:p>
         </p:txBody>
@@ -7668,23 +7964,124 @@
               </a:defRPr>
             </a:pPr>
             <a:r>
-              <a:t>현재 단계 실행    |    현재 폴더 ~/ros2_curri/agv_ws    |    현재 터미널</a:t>
-            </a:r>
-          </a:p>
-        </p:txBody>
-      </p:sp>
-      <p:sp>
-        <p:nvSpPr>
-          <p:cNvPr id="7" name="Rounded Rectangle 6"/>
+              <a:t>현재 단계 6/8    |    현재 폴더 ~/ros2_curri/agv_ws    |    현재 터미널</a:t>
+            </a:r>
+          </a:p>
+        </p:txBody>
+      </p:sp>
+      <p:sp>
+        <p:nvSpPr>
+          <p:cNvPr id="7" name="TextBox 6"/>
+          <p:cNvSpPr txBox="1"/>
+          <p:nvPr/>
+        </p:nvSpPr>
+        <p:spPr>
+          <a:xfrm>
+            <a:off x="658368" y="1627632"/>
+            <a:ext cx="10972800" cy="256032"/>
+          </a:xfrm>
+          <a:prstGeom prst="rect">
+            <a:avLst/>
+          </a:prstGeom>
+          <a:noFill/>
+        </p:spPr>
+        <p:txBody>
+          <a:bodyPr wrap="square" lIns="73152" rIns="73152" tIns="36576" bIns="36576">
+            <a:spAutoFit/>
+          </a:bodyPr>
+          <a:lstStyle/>
+          <a:p>
+            <a:pPr algn="l">
+              <a:spcAft>
+                <a:spcPts val="0"/>
+              </a:spcAft>
+              <a:defRPr sz="1500" b="1">
+                <a:solidFill>
+                  <a:srgbClr val="122C4E"/>
+                </a:solidFill>
+                <a:latin typeface="Noto Sans CJK KR"/>
+              </a:defRPr>
+            </a:pPr>
+            <a:r>
+              <a:t>이번 단계: 파일의 전체 내용을 중간 생략 없이 작성합니다. 아래 줄 범위를 끝까지 입력하세요.</a:t>
+            </a:r>
+          </a:p>
+        </p:txBody>
+      </p:sp>
+      <p:sp>
+        <p:nvSpPr>
+          <p:cNvPr id="8" name="Rectangle 7"/>
           <p:cNvSpPr/>
           <p:nvPr/>
         </p:nvSpPr>
         <p:spPr>
           <a:xfrm>
-            <a:off x="658368" y="1700784"/>
-            <a:ext cx="10972800" cy="3182112"/>
-          </a:xfrm>
-          <a:prstGeom prst="roundRect">
+            <a:off x="658368" y="1956816"/>
+            <a:ext cx="10972800" cy="603504"/>
+          </a:xfrm>
+          <a:prstGeom prst="rect">
+            <a:avLst/>
+          </a:prstGeom>
+          <a:solidFill>
+            <a:srgbClr val="F4F7FB"/>
+          </a:solidFill>
+          <a:ln>
+            <a:solidFill>
+              <a:srgbClr val="F4F7FB"/>
+            </a:solidFill>
+          </a:ln>
+        </p:spPr>
+        <p:style>
+          <a:lnRef idx="1">
+            <a:schemeClr val="accent1"/>
+          </a:lnRef>
+          <a:fillRef idx="3">
+            <a:schemeClr val="accent1"/>
+          </a:fillRef>
+          <a:effectRef idx="2">
+            <a:schemeClr val="accent1"/>
+          </a:effectRef>
+          <a:fontRef idx="minor">
+            <a:schemeClr val="lt1"/>
+          </a:fontRef>
+        </p:style>
+        <p:txBody>
+          <a:bodyPr rtlCol="0" anchor="ctr" wrap="square" lIns="73152" rIns="73152" tIns="36576" bIns="36576"/>
+          <a:lstStyle/>
+          <a:p>
+            <a:pPr algn="l">
+              <a:spcAft>
+                <a:spcPts val="0"/>
+              </a:spcAft>
+              <a:defRPr sz="1400" b="0">
+                <a:solidFill>
+                  <a:srgbClr val="122C4E"/>
+                </a:solidFill>
+                <a:latin typeface="DejaVu Sans Mono"/>
+              </a:defRPr>
+            </a:pPr>
+            <a:r>
+              <a:t>파일 생성: mkdir -p ~/ros2_curri/agv_ws/src/agv_description/curriculum_stages/M06</a:t>
+            </a:r>
+            <a:br/>
+            <a:r>
+              <a:t>파일 열기: nano ~/ros2_curri/agv_ws/src/agv_description/curriculum_stages/M06/agv.urdf.xacro</a:t>
+            </a:r>
+          </a:p>
+        </p:txBody>
+      </p:sp>
+      <p:sp>
+        <p:nvSpPr>
+          <p:cNvPr id="9" name="Rectangle 8"/>
+          <p:cNvSpPr/>
+          <p:nvPr/>
+        </p:nvSpPr>
+        <p:spPr>
+          <a:xfrm>
+            <a:off x="658368" y="2706624"/>
+            <a:ext cx="10972800" cy="3364992"/>
+          </a:xfrm>
+          <a:prstGeom prst="rect">
             <a:avLst/>
           </a:prstGeom>
           <a:solidFill>
@@ -7711,14 +8108,14 @@
           </a:fontRef>
         </p:style>
         <p:txBody>
-          <a:bodyPr rtlCol="0" anchor="ctr" wrap="square" lIns="73152" rIns="73152" tIns="36576" bIns="36576"/>
+          <a:bodyPr rtlCol="0" anchor="ctr" wrap="square" lIns="164592" rIns="164592" tIns="109728" bIns="36576"/>
           <a:lstStyle/>
           <a:p>
             <a:pPr algn="l">
               <a:spcAft>
                 <a:spcPts val="0"/>
               </a:spcAft>
-              <a:defRPr sz="1600" b="0">
+              <a:defRPr sz="1400" b="0">
                 <a:solidFill>
                   <a:srgbClr val="FFFFFF"/>
                 </a:solidFill>
@@ -7726,25 +8123,62 @@
               </a:defRPr>
             </a:pPr>
             <a:r>
-              <a:t>xacro ~/ros2_curri/agv_ws/src/agv_description/curriculum_stages/M06/agv.urdf.xacro &gt; /tmp/agv.urdf</a:t>
+              <a:t>      &lt;origin xyz="0 0 0.16"/&gt;</a:t>
             </a:r>
             <a:br/>
             <a:r>
-              <a:t>check_urdf /tmp/agv.urdf</a:t>
-            </a:r>
-          </a:p>
-        </p:txBody>
-      </p:sp>
-      <p:sp>
-        <p:nvSpPr>
-          <p:cNvPr id="8" name="TextBox 7"/>
+              <a:t>      &lt;geometry&gt;</a:t>
+            </a:r>
+            <a:br/>
+            <a:r>
+              <a:t>        &lt;box size="0.60 0.42 0.16"/&gt;</a:t>
+            </a:r>
+            <a:br/>
+            <a:r>
+              <a:t>      &lt;/geometry&gt;</a:t>
+            </a:r>
+            <a:br/>
+            <a:r>
+              <a:t>    &lt;/visual&gt;</a:t>
+            </a:r>
+            <a:br/>
+            <a:r>
+              <a:t>  &lt;/link&gt;</a:t>
+            </a:r>
+            <a:br/>
+            <a:r>
+              <a:t>  </a:t>
+            </a:r>
+            <a:br/>
+            <a:r>
+              <a:t>  </a:t>
+            </a:r>
+            <a:br/>
+            <a:r>
+              <a:t>  &lt;xacro:wheel side="left" y="${half_track}"/&gt;</a:t>
+            </a:r>
+            <a:br/>
+            <a:r>
+              <a:t>  &lt;xacro:wheel side="right" y="${-half_track}"/&gt;</a:t>
+            </a:r>
+            <a:br/>
+            <a:r>
+              <a:t>  </a:t>
+            </a:r>
+            <a:br/>
+          </a:p>
+        </p:txBody>
+      </p:sp>
+      <p:sp>
+        <p:nvSpPr>
+          <p:cNvPr id="10" name="TextBox 9"/>
           <p:cNvSpPr txBox="1"/>
           <p:nvPr/>
         </p:nvSpPr>
         <p:spPr>
           <a:xfrm>
-            <a:off x="786384" y="5239512"/>
-            <a:ext cx="1261872" cy="237744"/>
+            <a:off x="749808" y="6181344"/>
+            <a:ext cx="10789920" cy="201168"/>
           </a:xfrm>
           <a:prstGeom prst="rect">
             <a:avLst/>
@@ -7761,54 +8195,15 @@
               <a:spcAft>
                 <a:spcPts val="0"/>
               </a:spcAft>
-              <a:defRPr sz="1800" b="1">
-                <a:solidFill>
-                  <a:srgbClr val="2A8B5A"/>
-                </a:solidFill>
-                <a:latin typeface="Noto Sans CJK KR"/>
-              </a:defRPr>
-            </a:pPr>
-            <a:r>
-              <a:t>확인 기준</a:t>
-            </a:r>
-          </a:p>
-        </p:txBody>
-      </p:sp>
-      <p:sp>
-        <p:nvSpPr>
-          <p:cNvPr id="9" name="TextBox 8"/>
-          <p:cNvSpPr txBox="1"/>
-          <p:nvPr/>
-        </p:nvSpPr>
-        <p:spPr>
-          <a:xfrm>
-            <a:off x="786384" y="5532120"/>
-            <a:ext cx="10469880" cy="420624"/>
-          </a:xfrm>
-          <a:prstGeom prst="rect">
-            <a:avLst/>
-          </a:prstGeom>
-          <a:noFill/>
-        </p:spPr>
-        <p:txBody>
-          <a:bodyPr wrap="square" lIns="73152" rIns="73152" tIns="36576" bIns="36576">
-            <a:spAutoFit/>
-          </a:bodyPr>
-          <a:lstStyle/>
-          <a:p>
-            <a:pPr algn="l">
-              <a:spcAft>
-                <a:spcPts val="0"/>
-              </a:spcAft>
-              <a:defRPr sz="1800" b="0">
-                <a:solidFill>
-                  <a:srgbClr val="122C4E"/>
-                </a:solidFill>
-                <a:latin typeface="Noto Sans CJK KR"/>
-              </a:defRPr>
-            </a:pPr>
-            <a:r>
-              <a:t>wheel_radius와 wheel_base 변경이 좌우 바퀴·충돌 형상에 함께 적용된다.</a:t>
+              <a:defRPr sz="1000" b="0">
+                <a:solidFill>
+                  <a:srgbClr val="5C6672"/>
+                </a:solidFill>
+                <a:latin typeface="Noto Sans CJK KR"/>
+              </a:defRPr>
+            </a:pPr>
+            <a:r>
+              <a:t>파일 전체 4/5 · 이 슬라이드 다음에 같은 파일의 나머지 줄이 이어집니다.</a:t>
             </a:r>
           </a:p>
         </p:txBody>
@@ -7865,7 +8260,7 @@
               </a:defRPr>
             </a:pPr>
             <a:r>
-              <a:t>정상 결과: 실제 환경에서 확인한 출력</a:t>
+              <a:t>파일을 계속 작성하고 저장한다 (5/5)</a:t>
             </a:r>
           </a:p>
         </p:txBody>
@@ -7904,7 +8299,7 @@
               </a:defRPr>
             </a:pPr>
             <a:r>
-              <a:t>실제 ROS 2 환경의 파일·패키지·구성 검증 로그</a:t>
+              <a:t>~/ros2_curri/agv_ws/src/agv_description/curriculum_stages/M06/agv.urdf.xacro</a:t>
             </a:r>
           </a:p>
         </p:txBody>
@@ -7987,30 +8382,64 @@
           </a:p>
         </p:txBody>
       </p:sp>
-      <p:pic>
-        <p:nvPicPr>
-          <p:cNvPr id="6" name="Picture 5" descr="validation_terminal.png"/>
-          <p:cNvPicPr>
-            <a:picLocks noChangeAspect="1"/>
-          </p:cNvPicPr>
-          <p:nvPr/>
-        </p:nvPicPr>
-        <p:blipFill>
-          <a:blip r:embed="rId2"/>
-          <a:stretch>
-            <a:fillRect/>
-          </a:stretch>
-        </p:blipFill>
-        <p:spPr>
-          <a:xfrm>
-            <a:off x="790956" y="1884338"/>
-            <a:ext cx="10607040" cy="3738546"/>
-          </a:xfrm>
-          <a:prstGeom prst="rect">
-            <a:avLst/>
-          </a:prstGeom>
-        </p:spPr>
-      </p:pic>
+      <p:sp>
+        <p:nvSpPr>
+          <p:cNvPr id="6" name="Rectangle 5"/>
+          <p:cNvSpPr/>
+          <p:nvPr/>
+        </p:nvSpPr>
+        <p:spPr>
+          <a:xfrm>
+            <a:off x="566928" y="1188720"/>
+            <a:ext cx="11064240" cy="347472"/>
+          </a:xfrm>
+          <a:prstGeom prst="rect">
+            <a:avLst/>
+          </a:prstGeom>
+          <a:solidFill>
+            <a:srgbClr val="F4F7FB"/>
+          </a:solidFill>
+          <a:ln>
+            <a:solidFill>
+              <a:srgbClr val="F4F7FB"/>
+            </a:solidFill>
+          </a:ln>
+        </p:spPr>
+        <p:style>
+          <a:lnRef idx="1">
+            <a:schemeClr val="accent1"/>
+          </a:lnRef>
+          <a:fillRef idx="3">
+            <a:schemeClr val="accent1"/>
+          </a:fillRef>
+          <a:effectRef idx="2">
+            <a:schemeClr val="accent1"/>
+          </a:effectRef>
+          <a:fontRef idx="minor">
+            <a:schemeClr val="lt1"/>
+          </a:fontRef>
+        </p:style>
+        <p:txBody>
+          <a:bodyPr rtlCol="0" anchor="ctr" wrap="square" lIns="73152" rIns="73152" tIns="36576" bIns="36576"/>
+          <a:lstStyle/>
+          <a:p>
+            <a:pPr algn="l">
+              <a:spcAft>
+                <a:spcPts val="0"/>
+              </a:spcAft>
+              <a:defRPr sz="1300" b="1">
+                <a:solidFill>
+                  <a:srgbClr val="122C4E"/>
+                </a:solidFill>
+                <a:latin typeface="Noto Sans CJK KR"/>
+              </a:defRPr>
+            </a:pPr>
+            <a:r>
+              <a:t>현재 단계 7/8    |    현재 폴더 ~/ros2_curri/agv_ws    |    현재 터미널</a:t>
+            </a:r>
+          </a:p>
+        </p:txBody>
+      </p:sp>
       <p:sp>
         <p:nvSpPr>
           <p:cNvPr id="7" name="TextBox 6"/>
@@ -8019,8 +8448,8 @@
         </p:nvSpPr>
         <p:spPr>
           <a:xfrm>
-            <a:off x="777240" y="6217920"/>
-            <a:ext cx="10607040" cy="182880"/>
+            <a:off x="658368" y="1627632"/>
+            <a:ext cx="10972800" cy="256032"/>
           </a:xfrm>
           <a:prstGeom prst="rect">
             <a:avLst/>
@@ -8033,19 +8462,178 @@
           </a:bodyPr>
           <a:lstStyle/>
           <a:p>
-            <a:pPr algn="ctr">
-              <a:spcAft>
-                <a:spcPts val="0"/>
-              </a:spcAft>
-              <a:defRPr sz="1100" b="1">
-                <a:solidFill>
-                  <a:srgbClr val="2A8B5A"/>
-                </a:solidFill>
-                <a:latin typeface="Noto Sans CJK KR"/>
-              </a:defRPr>
-            </a:pPr>
-            <a:r>
-              <a:t>① 명령/설정  ② 정상 출력 또는 화면  ③ 다음 검증 명령으로 재확인</a:t>
+            <a:pPr algn="l">
+              <a:spcAft>
+                <a:spcPts val="0"/>
+              </a:spcAft>
+              <a:defRPr sz="1500" b="1">
+                <a:solidFill>
+                  <a:srgbClr val="122C4E"/>
+                </a:solidFill>
+                <a:latin typeface="Noto Sans CJK KR"/>
+              </a:defRPr>
+            </a:pPr>
+            <a:r>
+              <a:t>이번 단계: 파일의 전체 내용을 중간 생략 없이 작성합니다. 아래 줄 범위를 끝까지 입력하세요.</a:t>
+            </a:r>
+          </a:p>
+        </p:txBody>
+      </p:sp>
+      <p:sp>
+        <p:nvSpPr>
+          <p:cNvPr id="8" name="Rectangle 7"/>
+          <p:cNvSpPr/>
+          <p:nvPr/>
+        </p:nvSpPr>
+        <p:spPr>
+          <a:xfrm>
+            <a:off x="658368" y="1956816"/>
+            <a:ext cx="10972800" cy="603504"/>
+          </a:xfrm>
+          <a:prstGeom prst="rect">
+            <a:avLst/>
+          </a:prstGeom>
+          <a:solidFill>
+            <a:srgbClr val="F4F7FB"/>
+          </a:solidFill>
+          <a:ln>
+            <a:solidFill>
+              <a:srgbClr val="F4F7FB"/>
+            </a:solidFill>
+          </a:ln>
+        </p:spPr>
+        <p:style>
+          <a:lnRef idx="1">
+            <a:schemeClr val="accent1"/>
+          </a:lnRef>
+          <a:fillRef idx="3">
+            <a:schemeClr val="accent1"/>
+          </a:fillRef>
+          <a:effectRef idx="2">
+            <a:schemeClr val="accent1"/>
+          </a:effectRef>
+          <a:fontRef idx="minor">
+            <a:schemeClr val="lt1"/>
+          </a:fontRef>
+        </p:style>
+        <p:txBody>
+          <a:bodyPr rtlCol="0" anchor="ctr" wrap="square" lIns="73152" rIns="73152" tIns="36576" bIns="36576"/>
+          <a:lstStyle/>
+          <a:p>
+            <a:pPr algn="l">
+              <a:spcAft>
+                <a:spcPts val="0"/>
+              </a:spcAft>
+              <a:defRPr sz="1400" b="0">
+                <a:solidFill>
+                  <a:srgbClr val="122C4E"/>
+                </a:solidFill>
+                <a:latin typeface="DejaVu Sans Mono"/>
+              </a:defRPr>
+            </a:pPr>
+            <a:r>
+              <a:t>파일 생성: mkdir -p ~/ros2_curri/agv_ws/src/agv_description/curriculum_stages/M06</a:t>
+            </a:r>
+            <a:br/>
+            <a:r>
+              <a:t>파일 열기: nano ~/ros2_curri/agv_ws/src/agv_description/curriculum_stages/M06/agv.urdf.xacro</a:t>
+            </a:r>
+          </a:p>
+        </p:txBody>
+      </p:sp>
+      <p:sp>
+        <p:nvSpPr>
+          <p:cNvPr id="9" name="Rectangle 8"/>
+          <p:cNvSpPr/>
+          <p:nvPr/>
+        </p:nvSpPr>
+        <p:spPr>
+          <a:xfrm>
+            <a:off x="658368" y="2706624"/>
+            <a:ext cx="10972800" cy="3364992"/>
+          </a:xfrm>
+          <a:prstGeom prst="rect">
+            <a:avLst/>
+          </a:prstGeom>
+          <a:solidFill>
+            <a:srgbClr val="1D232D"/>
+          </a:solidFill>
+          <a:ln>
+            <a:solidFill>
+              <a:srgbClr val="1D232D"/>
+            </a:solidFill>
+          </a:ln>
+        </p:spPr>
+        <p:style>
+          <a:lnRef idx="1">
+            <a:schemeClr val="accent1"/>
+          </a:lnRef>
+          <a:fillRef idx="3">
+            <a:schemeClr val="accent1"/>
+          </a:fillRef>
+          <a:effectRef idx="2">
+            <a:schemeClr val="accent1"/>
+          </a:effectRef>
+          <a:fontRef idx="minor">
+            <a:schemeClr val="lt1"/>
+          </a:fontRef>
+        </p:style>
+        <p:txBody>
+          <a:bodyPr rtlCol="0" anchor="ctr" wrap="square" lIns="164592" rIns="164592" tIns="109728" bIns="36576"/>
+          <a:lstStyle/>
+          <a:p>
+            <a:pPr algn="l">
+              <a:spcAft>
+                <a:spcPts val="0"/>
+              </a:spcAft>
+              <a:defRPr sz="1400" b="0">
+                <a:solidFill>
+                  <a:srgbClr val="FFFFFF"/>
+                </a:solidFill>
+                <a:latin typeface="DejaVu Sans Mono"/>
+              </a:defRPr>
+            </a:pPr>
+            <a:r>
+              <a:t>&lt;/robot&gt;</a:t>
+            </a:r>
+          </a:p>
+        </p:txBody>
+      </p:sp>
+      <p:sp>
+        <p:nvSpPr>
+          <p:cNvPr id="10" name="TextBox 9"/>
+          <p:cNvSpPr txBox="1"/>
+          <p:nvPr/>
+        </p:nvSpPr>
+        <p:spPr>
+          <a:xfrm>
+            <a:off x="749808" y="6181344"/>
+            <a:ext cx="10789920" cy="201168"/>
+          </a:xfrm>
+          <a:prstGeom prst="rect">
+            <a:avLst/>
+          </a:prstGeom>
+          <a:noFill/>
+        </p:spPr>
+        <p:txBody>
+          <a:bodyPr wrap="square" lIns="73152" rIns="73152" tIns="36576" bIns="36576">
+            <a:spAutoFit/>
+          </a:bodyPr>
+          <a:lstStyle/>
+          <a:p>
+            <a:pPr algn="l">
+              <a:spcAft>
+                <a:spcPts val="0"/>
+              </a:spcAft>
+              <a:defRPr sz="1000" b="0">
+                <a:solidFill>
+                  <a:srgbClr val="5C6672"/>
+                </a:solidFill>
+                <a:latin typeface="Noto Sans CJK KR"/>
+              </a:defRPr>
+            </a:pPr>
+            <a:r>
+              <a:t>파일 전체 5/5 · 이 슬라이드 다음에 같은 파일의 나머지 줄이 이어집니다.</a:t>
             </a:r>
           </a:p>
         </p:txBody>
@@ -8102,7 +8690,7 @@
               </a:defRPr>
             </a:pPr>
             <a:r>
-              <a:t>객관적 검증 명령으로 완료를 확인한다</a:t>
+              <a:t>build → source → run 순서로 실행한다</a:t>
             </a:r>
           </a:p>
         </p:txBody>
@@ -8141,7 +8729,7 @@
               </a:defRPr>
             </a:pPr>
             <a:r>
-              <a:t>화면만 보지 말고 topic·frame·파일·parameter를 다시 확인합니다.</a:t>
+              <a:t>새 파일 또는 수정 파일은 build와 source 뒤에만 실행 이름·설정에 반영됩니다.</a:t>
             </a:r>
           </a:p>
         </p:txBody>
@@ -8277,7 +8865,7 @@
               </a:defRPr>
             </a:pPr>
             <a:r>
-              <a:t>현재 단계 검증    |    현재 폴더 ~/ros2_curri/agv_ws    |    현재 터미널</a:t>
+              <a:t>현재 단계 실행    |    현재 폴더 ~/ros2_curri/agv_ws    |    현재 터미널</a:t>
             </a:r>
           </a:p>
         </p:txBody>
@@ -8290,8 +8878,8 @@
         </p:nvSpPr>
         <p:spPr>
           <a:xfrm>
-            <a:off x="658368" y="1755648"/>
-            <a:ext cx="10972800" cy="2148840"/>
+            <a:off x="658368" y="1700784"/>
+            <a:ext cx="10972800" cy="3182112"/>
           </a:xfrm>
           <a:prstGeom prst="roundRect">
             <a:avLst/>
@@ -8339,91 +8927,21 @@
             </a:r>
             <a:br/>
             <a:r>
-              <a:t>rg -n 'wheel_radius|left_wheel_joint|right_wheel_joint' /tmp/agv.urdf</a:t>
-            </a:r>
-          </a:p>
-        </p:txBody>
-      </p:sp>
-      <p:sp>
-        <p:nvSpPr>
-          <p:cNvPr id="8" name="Rounded Rectangle 7"/>
-          <p:cNvSpPr/>
-          <p:nvPr/>
-        </p:nvSpPr>
-        <p:spPr>
-          <a:xfrm>
-            <a:off x="658368" y="4206240"/>
-            <a:ext cx="10972800" cy="1554480"/>
-          </a:xfrm>
-          <a:prstGeom prst="roundRect">
-            <a:avLst/>
-          </a:prstGeom>
-          <a:solidFill>
-            <a:srgbClr val="F4F7FB"/>
-          </a:solidFill>
-          <a:ln>
-            <a:solidFill>
-              <a:srgbClr val="D1DFD5"/>
-            </a:solidFill>
-          </a:ln>
-        </p:spPr>
-        <p:style>
-          <a:lnRef idx="1">
-            <a:schemeClr val="accent1"/>
-          </a:lnRef>
-          <a:fillRef idx="3">
-            <a:schemeClr val="accent1"/>
-          </a:fillRef>
-          <a:effectRef idx="2">
-            <a:schemeClr val="accent1"/>
-          </a:effectRef>
-          <a:fontRef idx="minor">
-            <a:schemeClr val="lt1"/>
-          </a:fontRef>
-        </p:style>
-        <p:txBody>
-          <a:bodyPr rtlCol="0" anchor="ctr" wrap="square" lIns="73152" rIns="73152" tIns="36576" bIns="36576"/>
-          <a:lstStyle/>
-          <a:p>
-            <a:pPr algn="l">
-              <a:spcAft>
-                <a:spcPts val="0"/>
-              </a:spcAft>
-              <a:defRPr sz="1800" b="1">
-                <a:solidFill>
-                  <a:srgbClr val="2A8B5A"/>
-                </a:solidFill>
-                <a:latin typeface="Noto Sans CJK KR"/>
-              </a:defRPr>
-            </a:pPr>
-            <a:r>
-              <a:t>완료 체크</a:t>
-            </a:r>
-            <a:br/>
-            <a:r>
-              <a:t>□ 명령이 오류 없이 실행된다.</a:t>
-            </a:r>
-            <a:br/>
-            <a:r>
-              <a:t>□ 기대한 파일·topic·frame·parameter 이름이 보인다.</a:t>
-            </a:r>
-            <a:br/>
-            <a:r>
-              <a:t>□ 값의 단위와 방향을 한 문장으로 설명할 수 있다.</a:t>
-            </a:r>
-          </a:p>
-        </p:txBody>
-      </p:sp>
-      <p:sp>
-        <p:nvSpPr>
-          <p:cNvPr id="9" name="TextBox 8"/>
+              <a:t>check_urdf /tmp/agv.urdf</a:t>
+            </a:r>
+          </a:p>
+        </p:txBody>
+      </p:sp>
+      <p:sp>
+        <p:nvSpPr>
+          <p:cNvPr id="8" name="TextBox 7"/>
           <p:cNvSpPr txBox="1"/>
           <p:nvPr/>
         </p:nvSpPr>
         <p:spPr>
           <a:xfrm>
-            <a:off x="731520" y="5989320"/>
-            <a:ext cx="10789920" cy="237744"/>
+            <a:off x="786384" y="5239512"/>
+            <a:ext cx="1261872" cy="237744"/>
           </a:xfrm>
           <a:prstGeom prst="rect">
             <a:avLst/>
@@ -8440,7 +8958,46 @@
               <a:spcAft>
                 <a:spcPts val="0"/>
               </a:spcAft>
-              <a:defRPr sz="1500" b="1">
+              <a:defRPr sz="1800" b="1">
+                <a:solidFill>
+                  <a:srgbClr val="2A8B5A"/>
+                </a:solidFill>
+                <a:latin typeface="Noto Sans CJK KR"/>
+              </a:defRPr>
+            </a:pPr>
+            <a:r>
+              <a:t>확인 기준</a:t>
+            </a:r>
+          </a:p>
+        </p:txBody>
+      </p:sp>
+      <p:sp>
+        <p:nvSpPr>
+          <p:cNvPr id="9" name="TextBox 8"/>
+          <p:cNvSpPr txBox="1"/>
+          <p:nvPr/>
+        </p:nvSpPr>
+        <p:spPr>
+          <a:xfrm>
+            <a:off x="786384" y="5532120"/>
+            <a:ext cx="10469880" cy="420624"/>
+          </a:xfrm>
+          <a:prstGeom prst="rect">
+            <a:avLst/>
+          </a:prstGeom>
+          <a:noFill/>
+        </p:spPr>
+        <p:txBody>
+          <a:bodyPr wrap="square" lIns="73152" rIns="73152" tIns="36576" bIns="36576">
+            <a:spAutoFit/>
+          </a:bodyPr>
+          <a:lstStyle/>
+          <a:p>
+            <a:pPr algn="l">
+              <a:spcAft>
+                <a:spcPts val="0"/>
+              </a:spcAft>
+              <a:defRPr sz="1800" b="0">
                 <a:solidFill>
                   <a:srgbClr val="122C4E"/>
                 </a:solidFill>
@@ -8448,7 +9005,7 @@
               </a:defRPr>
             </a:pPr>
             <a:r>
-              <a:t>완료 조건: wheel_radius와 wheel_base 변경이 좌우 바퀴·충돌 형상에 함께 적용된다.</a:t>
+              <a:t>wheel_radius와 wheel_base 변경이 좌우 바퀴·충돌 형상에 함께 적용된다.</a:t>
             </a:r>
           </a:p>
         </p:txBody>
@@ -8505,7 +9062,7 @@
               </a:defRPr>
             </a:pPr>
             <a:r>
-              <a:t>막히면: 증상 → 우선 확인 → 재검증</a:t>
+              <a:t>정상 결과: 실제 환경에서 확인한 출력</a:t>
             </a:r>
           </a:p>
         </p:txBody>
@@ -8544,7 +9101,7 @@
               </a:defRPr>
             </a:pPr>
             <a:r>
-              <a:t>오류 메시지를 숨기지 않고 같은 순서로 점검합니다.</a:t>
+              <a:t>실제 ROS 2 환경의 파일·패키지·구성 검증 로그</a:t>
             </a:r>
           </a:p>
         </p:txBody>
@@ -8627,119 +9184,40 @@
           </a:p>
         </p:txBody>
       </p:sp>
-      <p:sp>
-        <p:nvSpPr>
-          <p:cNvPr id="6" name="Rectangle 5"/>
-          <p:cNvSpPr/>
-          <p:nvPr/>
-        </p:nvSpPr>
-        <p:spPr>
-          <a:xfrm>
-            <a:off x="566928" y="1188720"/>
-            <a:ext cx="11064240" cy="347472"/>
-          </a:xfrm>
-          <a:prstGeom prst="rect">
-            <a:avLst/>
-          </a:prstGeom>
-          <a:solidFill>
-            <a:srgbClr val="F4F7FB"/>
-          </a:solidFill>
-          <a:ln>
-            <a:solidFill>
-              <a:srgbClr val="F4F7FB"/>
-            </a:solidFill>
-          </a:ln>
-        </p:spPr>
-        <p:style>
-          <a:lnRef idx="1">
-            <a:schemeClr val="accent1"/>
-          </a:lnRef>
-          <a:fillRef idx="3">
-            <a:schemeClr val="accent1"/>
-          </a:fillRef>
-          <a:effectRef idx="2">
-            <a:schemeClr val="accent1"/>
-          </a:effectRef>
-          <a:fontRef idx="minor">
-            <a:schemeClr val="lt1"/>
-          </a:fontRef>
-        </p:style>
-        <p:txBody>
-          <a:bodyPr rtlCol="0" anchor="ctr" wrap="square" lIns="73152" rIns="73152" tIns="36576" bIns="36576"/>
-          <a:lstStyle/>
-          <a:p>
-            <a:pPr algn="l">
-              <a:spcAft>
-                <a:spcPts val="0"/>
-              </a:spcAft>
-              <a:defRPr sz="1300" b="1">
-                <a:solidFill>
-                  <a:srgbClr val="122C4E"/>
-                </a:solidFill>
-                <a:latin typeface="Noto Sans CJK KR"/>
-              </a:defRPr>
-            </a:pPr>
-            <a:r>
-              <a:t>현재 단계 오류 대응    |    현재 폴더 ~/ros2_curri/agv_ws    |    현재 터미널</a:t>
-            </a:r>
-          </a:p>
-        </p:txBody>
-      </p:sp>
-      <p:sp>
-        <p:nvSpPr>
-          <p:cNvPr id="7" name="Rounded Rectangle 6"/>
-          <p:cNvSpPr/>
-          <p:nvPr/>
-        </p:nvSpPr>
-        <p:spPr>
-          <a:xfrm>
-            <a:off x="694944" y="1755648"/>
-            <a:ext cx="10972800" cy="1115568"/>
-          </a:xfrm>
-          <a:prstGeom prst="roundRect">
-            <a:avLst/>
-          </a:prstGeom>
-          <a:solidFill>
-            <a:srgbClr val="FFF7F4"/>
-          </a:solidFill>
-          <a:ln>
-            <a:solidFill>
-              <a:srgbClr val="EDBEB4"/>
-            </a:solidFill>
-          </a:ln>
-        </p:spPr>
-        <p:style>
-          <a:lnRef idx="1">
-            <a:schemeClr val="accent1"/>
-          </a:lnRef>
-          <a:fillRef idx="3">
-            <a:schemeClr val="accent1"/>
-          </a:fillRef>
-          <a:effectRef idx="2">
-            <a:schemeClr val="accent1"/>
-          </a:effectRef>
-          <a:fontRef idx="minor">
-            <a:schemeClr val="lt1"/>
-          </a:fontRef>
-        </p:style>
-        <p:txBody>
-          <a:bodyPr rtlCol="0" anchor="ctr"/>
-          <a:lstStyle/>
-          <a:p>
-            <a:pPr algn="ctr"/>
-          </a:p>
-        </p:txBody>
-      </p:sp>
-      <p:sp>
-        <p:nvSpPr>
-          <p:cNvPr id="8" name="TextBox 7"/>
+      <p:pic>
+        <p:nvPicPr>
+          <p:cNvPr id="6" name="Picture 5" descr="validation_terminal.png"/>
+          <p:cNvPicPr>
+            <a:picLocks noChangeAspect="1"/>
+          </p:cNvPicPr>
+          <p:nvPr/>
+        </p:nvPicPr>
+        <p:blipFill>
+          <a:blip r:embed="rId2"/>
+          <a:stretch>
+            <a:fillRect/>
+          </a:stretch>
+        </p:blipFill>
+        <p:spPr>
+          <a:xfrm>
+            <a:off x="790956" y="1884338"/>
+            <a:ext cx="10607040" cy="3738546"/>
+          </a:xfrm>
+          <a:prstGeom prst="rect">
+            <a:avLst/>
+          </a:prstGeom>
+        </p:spPr>
+      </p:pic>
+      <p:sp>
+        <p:nvSpPr>
+          <p:cNvPr id="7" name="TextBox 6"/>
           <p:cNvSpPr txBox="1"/>
           <p:nvPr/>
         </p:nvSpPr>
         <p:spPr>
           <a:xfrm>
-            <a:off x="896112" y="1901952"/>
-            <a:ext cx="2926080" cy="274320"/>
+            <a:off x="777240" y="6144768"/>
+            <a:ext cx="10607040" cy="310896"/>
           </a:xfrm>
           <a:prstGeom prst="rect">
             <a:avLst/>
@@ -8752,228 +9230,19 @@
           </a:bodyPr>
           <a:lstStyle/>
           <a:p>
-            <a:pPr algn="l">
-              <a:spcAft>
-                <a:spcPts val="0"/>
-              </a:spcAft>
-              <a:defRPr sz="1800" b="1">
-                <a:solidFill>
-                  <a:srgbClr val="BE3B3B"/>
-                </a:solidFill>
-                <a:latin typeface="Noto Sans CJK KR"/>
-              </a:defRPr>
-            </a:pPr>
-            <a:r>
-              <a:t>증상 1: unknown macro/property</a:t>
-            </a:r>
-          </a:p>
-        </p:txBody>
-      </p:sp>
-      <p:sp>
-        <p:nvSpPr>
-          <p:cNvPr id="9" name="TextBox 8"/>
-          <p:cNvSpPr txBox="1"/>
-          <p:nvPr/>
-        </p:nvSpPr>
-        <p:spPr>
-          <a:xfrm>
-            <a:off x="3794760" y="1883664"/>
-            <a:ext cx="7543800" cy="621792"/>
-          </a:xfrm>
-          <a:prstGeom prst="rect">
-            <a:avLst/>
-          </a:prstGeom>
-          <a:noFill/>
-        </p:spPr>
-        <p:txBody>
-          <a:bodyPr wrap="square" lIns="73152" rIns="73152" tIns="36576" bIns="36576">
-            <a:spAutoFit/>
-          </a:bodyPr>
-          <a:lstStyle/>
-          <a:p>
-            <a:pPr algn="l">
-              <a:spcAft>
-                <a:spcPts val="0"/>
-              </a:spcAft>
-              <a:defRPr sz="1600" b="0">
-                <a:solidFill>
-                  <a:srgbClr val="122C4E"/>
-                </a:solidFill>
-                <a:latin typeface="Noto Sans CJK KR"/>
-              </a:defRPr>
-            </a:pPr>
-            <a:r>
-              <a:t>우선 확인: 선언 순서·xacro namespace·철자를 확인한다.</a:t>
-            </a:r>
-            <a:br/>
-            <a:r>
-              <a:t>수정 후: xacro ~/ros2_curri/agv_ws/src/agv_description/curriculum_stages/M06/agv.urdf.xacro &gt; /tmp/agv.urdf</a:t>
-            </a:r>
-          </a:p>
-        </p:txBody>
-      </p:sp>
-      <p:sp>
-        <p:nvSpPr>
-          <p:cNvPr id="10" name="Rounded Rectangle 9"/>
-          <p:cNvSpPr/>
-          <p:nvPr/>
-        </p:nvSpPr>
-        <p:spPr>
-          <a:xfrm>
-            <a:off x="694944" y="3172968"/>
-            <a:ext cx="10972800" cy="1115568"/>
-          </a:xfrm>
-          <a:prstGeom prst="roundRect">
-            <a:avLst/>
-          </a:prstGeom>
-          <a:solidFill>
-            <a:srgbClr val="FFF7F4"/>
-          </a:solidFill>
-          <a:ln>
-            <a:solidFill>
-              <a:srgbClr val="EDBEB4"/>
-            </a:solidFill>
-          </a:ln>
-        </p:spPr>
-        <p:style>
-          <a:lnRef idx="1">
-            <a:schemeClr val="accent1"/>
-          </a:lnRef>
-          <a:fillRef idx="3">
-            <a:schemeClr val="accent1"/>
-          </a:fillRef>
-          <a:effectRef idx="2">
-            <a:schemeClr val="accent1"/>
-          </a:effectRef>
-          <a:fontRef idx="minor">
-            <a:schemeClr val="lt1"/>
-          </a:fontRef>
-        </p:style>
-        <p:txBody>
-          <a:bodyPr rtlCol="0" anchor="ctr"/>
-          <a:lstStyle/>
-          <a:p>
-            <a:pPr algn="ctr"/>
-          </a:p>
-        </p:txBody>
-      </p:sp>
-      <p:sp>
-        <p:nvSpPr>
-          <p:cNvPr id="11" name="TextBox 10"/>
-          <p:cNvSpPr txBox="1"/>
-          <p:nvPr/>
-        </p:nvSpPr>
-        <p:spPr>
-          <a:xfrm>
-            <a:off x="896112" y="3319272"/>
-            <a:ext cx="2926080" cy="274320"/>
-          </a:xfrm>
-          <a:prstGeom prst="rect">
-            <a:avLst/>
-          </a:prstGeom>
-          <a:noFill/>
-        </p:spPr>
-        <p:txBody>
-          <a:bodyPr wrap="square" lIns="73152" rIns="73152" tIns="36576" bIns="36576">
-            <a:spAutoFit/>
-          </a:bodyPr>
-          <a:lstStyle/>
-          <a:p>
-            <a:pPr algn="l">
-              <a:spcAft>
-                <a:spcPts val="0"/>
-              </a:spcAft>
-              <a:defRPr sz="1800" b="1">
-                <a:solidFill>
-                  <a:srgbClr val="BE3B3B"/>
-                </a:solidFill>
-                <a:latin typeface="Noto Sans CJK KR"/>
-              </a:defRPr>
-            </a:pPr>
-            <a:r>
-              <a:t>증상 2: include file not found</a:t>
-            </a:r>
-          </a:p>
-        </p:txBody>
-      </p:sp>
-      <p:sp>
-        <p:nvSpPr>
-          <p:cNvPr id="12" name="TextBox 11"/>
-          <p:cNvSpPr txBox="1"/>
-          <p:nvPr/>
-        </p:nvSpPr>
-        <p:spPr>
-          <a:xfrm>
-            <a:off x="3794760" y="3300984"/>
-            <a:ext cx="7543800" cy="621792"/>
-          </a:xfrm>
-          <a:prstGeom prst="rect">
-            <a:avLst/>
-          </a:prstGeom>
-          <a:noFill/>
-        </p:spPr>
-        <p:txBody>
-          <a:bodyPr wrap="square" lIns="73152" rIns="73152" tIns="36576" bIns="36576">
-            <a:spAutoFit/>
-          </a:bodyPr>
-          <a:lstStyle/>
-          <a:p>
-            <a:pPr algn="l">
-              <a:spcAft>
-                <a:spcPts val="0"/>
-              </a:spcAft>
-              <a:defRPr sz="1600" b="0">
-                <a:solidFill>
-                  <a:srgbClr val="122C4E"/>
-                </a:solidFill>
-                <a:latin typeface="Noto Sans CJK KR"/>
-              </a:defRPr>
-            </a:pPr>
-            <a:r>
-              <a:t>우선 확인: 패키지 이름과 설치 대상·파일 경로를 확인한다.</a:t>
-            </a:r>
-            <a:br/>
-            <a:r>
-              <a:t>수정 후: xacro ~/ros2_curri/agv_ws/src/agv_description/curriculum_stages/M06/agv.urdf.xacro &gt; /tmp/agv.urdf</a:t>
-            </a:r>
-          </a:p>
-        </p:txBody>
-      </p:sp>
-      <p:sp>
-        <p:nvSpPr>
-          <p:cNvPr id="13" name="TextBox 12"/>
-          <p:cNvSpPr txBox="1"/>
-          <p:nvPr/>
-        </p:nvSpPr>
-        <p:spPr>
-          <a:xfrm>
-            <a:off x="822960" y="5102352"/>
-            <a:ext cx="10607040" cy="402336"/>
-          </a:xfrm>
-          <a:prstGeom prst="rect">
-            <a:avLst/>
-          </a:prstGeom>
-          <a:noFill/>
-        </p:spPr>
-        <p:txBody>
-          <a:bodyPr wrap="square" lIns="73152" rIns="73152" tIns="36576" bIns="36576">
-            <a:spAutoFit/>
-          </a:bodyPr>
-          <a:lstStyle/>
-          <a:p>
             <a:pPr algn="ctr">
               <a:spcAft>
                 <a:spcPts val="0"/>
               </a:spcAft>
-              <a:defRPr sz="1800" b="1">
-                <a:solidFill>
-                  <a:srgbClr val="DB7E22"/>
-                </a:solidFill>
-                <a:latin typeface="Noto Sans CJK KR"/>
-              </a:defRPr>
-            </a:pPr>
-            <a:r>
-              <a:t>공통 순서: ① 현재 폴더 ② source ③ 파일 경로 ④ 이름/타입/단위 ⑤ build·source 후 재실행</a:t>
+              <a:defRPr sz="1100" b="1">
+                <a:solidFill>
+                  <a:srgbClr val="2A8B5A"/>
+                </a:solidFill>
+                <a:latin typeface="Noto Sans CJK KR"/>
+              </a:defRPr>
+            </a:pPr>
+            <a:r>
+              <a:t>화면에서 확인: ① 명령/설정  ② 정상 출력 또는 화면  ③ 다음 검증 명령으로 재확인</a:t>
             </a:r>
           </a:p>
         </p:txBody>
@@ -9030,7 +9299,7 @@
               </a:defRPr>
             </a:pPr>
             <a:r>
-              <a:t>미니 실습: 값 하나를 바꾸고 결과를 비교한다</a:t>
+              <a:t>정상 결과: 실제 환경에서 확인한 출력</a:t>
             </a:r>
           </a:p>
         </p:txBody>
@@ -9069,7 +9338,7 @@
               </a:defRPr>
             </a:pPr>
             <a:r>
-              <a:t>정상 결과를 만든 뒤에는 한 번에 하나의 값만 바꿉니다.</a:t>
+              <a:t>실제 terminal: Xacro 변환 뒤 생성 URDF를 check_urdf로 검사한 결과</a:t>
             </a:r>
           </a:p>
         </p:txBody>
@@ -9152,132 +9421,40 @@
           </a:p>
         </p:txBody>
       </p:sp>
-      <p:sp>
-        <p:nvSpPr>
-          <p:cNvPr id="6" name="Rectangle 5"/>
-          <p:cNvSpPr/>
-          <p:nvPr/>
-        </p:nvSpPr>
-        <p:spPr>
-          <a:xfrm>
-            <a:off x="566928" y="1188720"/>
-            <a:ext cx="11064240" cy="347472"/>
-          </a:xfrm>
-          <a:prstGeom prst="rect">
-            <a:avLst/>
-          </a:prstGeom>
-          <a:solidFill>
-            <a:srgbClr val="F4F7FB"/>
-          </a:solidFill>
-          <a:ln>
-            <a:solidFill>
-              <a:srgbClr val="F4F7FB"/>
-            </a:solidFill>
-          </a:ln>
-        </p:spPr>
-        <p:style>
-          <a:lnRef idx="1">
-            <a:schemeClr val="accent1"/>
-          </a:lnRef>
-          <a:fillRef idx="3">
-            <a:schemeClr val="accent1"/>
-          </a:fillRef>
-          <a:effectRef idx="2">
-            <a:schemeClr val="accent1"/>
-          </a:effectRef>
-          <a:fontRef idx="minor">
-            <a:schemeClr val="lt1"/>
-          </a:fontRef>
-        </p:style>
-        <p:txBody>
-          <a:bodyPr rtlCol="0" anchor="ctr" wrap="square" lIns="73152" rIns="73152" tIns="36576" bIns="36576"/>
-          <a:lstStyle/>
-          <a:p>
-            <a:pPr algn="l">
-              <a:spcAft>
-                <a:spcPts val="0"/>
-              </a:spcAft>
-              <a:defRPr sz="1300" b="1">
-                <a:solidFill>
-                  <a:srgbClr val="122C4E"/>
-                </a:solidFill>
-                <a:latin typeface="Noto Sans CJK KR"/>
-              </a:defRPr>
-            </a:pPr>
-            <a:r>
-              <a:t>현재 단계 미니 실습    |    현재 폴더 ~/ros2_curri/agv_ws    |    현재 터미널</a:t>
-            </a:r>
-          </a:p>
-        </p:txBody>
-      </p:sp>
-      <p:sp>
-        <p:nvSpPr>
-          <p:cNvPr id="7" name="Rounded Rectangle 6"/>
-          <p:cNvSpPr/>
-          <p:nvPr/>
-        </p:nvSpPr>
-        <p:spPr>
-          <a:xfrm>
-            <a:off x="749808" y="1874519"/>
-            <a:ext cx="10652760" cy="1993392"/>
-          </a:xfrm>
-          <a:prstGeom prst="roundRect">
-            <a:avLst/>
-          </a:prstGeom>
-          <a:solidFill>
-            <a:srgbClr val="FFF8EB"/>
-          </a:solidFill>
-          <a:ln>
-            <a:solidFill>
-              <a:srgbClr val="ECC680"/>
-            </a:solidFill>
-          </a:ln>
-        </p:spPr>
-        <p:style>
-          <a:lnRef idx="1">
-            <a:schemeClr val="accent1"/>
-          </a:lnRef>
-          <a:fillRef idx="3">
-            <a:schemeClr val="accent1"/>
-          </a:fillRef>
-          <a:effectRef idx="2">
-            <a:schemeClr val="accent1"/>
-          </a:effectRef>
-          <a:fontRef idx="minor">
-            <a:schemeClr val="lt1"/>
-          </a:fontRef>
-        </p:style>
-        <p:txBody>
-          <a:bodyPr rtlCol="0" anchor="ctr" wrap="square" lIns="73152" rIns="73152" tIns="36576" bIns="36576"/>
-          <a:lstStyle/>
-          <a:p>
-            <a:pPr algn="ctr">
-              <a:spcAft>
-                <a:spcPts val="0"/>
-              </a:spcAft>
-              <a:defRPr sz="2300" b="1">
-                <a:solidFill>
-                  <a:srgbClr val="122C4E"/>
-                </a:solidFill>
-                <a:latin typeface="Noto Sans CJK KR"/>
-              </a:defRPr>
-            </a:pPr>
-            <a:r>
-              <a:t>wheel_radius 0.08→0.12 m를 적용한 뒤 joint origin과 cylinder radius가 함께 바뀌는지 비교한다.</a:t>
-            </a:r>
-          </a:p>
-        </p:txBody>
-      </p:sp>
-      <p:sp>
-        <p:nvSpPr>
-          <p:cNvPr id="8" name="TextBox 7"/>
+      <p:pic>
+        <p:nvPicPr>
+          <p:cNvPr id="6" name="Picture 5" descr="03_m06_xacro_terminal_actual.png"/>
+          <p:cNvPicPr>
+            <a:picLocks noChangeAspect="1"/>
+          </p:cNvPicPr>
+          <p:nvPr/>
+        </p:nvPicPr>
+        <p:blipFill>
+          <a:blip r:embed="rId2"/>
+          <a:stretch>
+            <a:fillRect/>
+          </a:stretch>
+        </p:blipFill>
+        <p:spPr>
+          <a:xfrm>
+            <a:off x="2789770" y="1353312"/>
+            <a:ext cx="6609411" cy="4800600"/>
+          </a:xfrm>
+          <a:prstGeom prst="rect">
+            <a:avLst/>
+          </a:prstGeom>
+        </p:spPr>
+      </p:pic>
+      <p:sp>
+        <p:nvSpPr>
+          <p:cNvPr id="7" name="TextBox 6"/>
           <p:cNvSpPr txBox="1"/>
           <p:nvPr/>
         </p:nvSpPr>
         <p:spPr>
           <a:xfrm>
-            <a:off x="877824" y="4590288"/>
-            <a:ext cx="10241280" cy="594360"/>
+            <a:off x="777240" y="6144768"/>
+            <a:ext cx="10607040" cy="310896"/>
           </a:xfrm>
           <a:prstGeom prst="rect">
             <a:avLst/>
@@ -9294,15 +9471,15 @@
               <a:spcAft>
                 <a:spcPts val="0"/>
               </a:spcAft>
-              <a:defRPr sz="1900" b="1">
-                <a:solidFill>
-                  <a:srgbClr val="DB7E22"/>
-                </a:solidFill>
-                <a:latin typeface="Noto Sans CJK KR"/>
-              </a:defRPr>
-            </a:pPr>
-            <a:r>
-              <a:t>기록할 것: 바꾼 값(단위) · 기대한 변화 · 실제 출력/화면 · 원래 값으로 되돌린 결과</a:t>
+              <a:defRPr sz="1100" b="1">
+                <a:solidFill>
+                  <a:srgbClr val="2A8B5A"/>
+                </a:solidFill>
+                <a:latin typeface="Noto Sans CJK KR"/>
+              </a:defRPr>
+            </a:pPr>
+            <a:r>
+              <a:t>화면에서 확인: xacro 명령 다음의 Successfully Parsed XML과 left/right wheel child를 찾습니다.</a:t>
             </a:r>
           </a:p>
         </p:txBody>
@@ -9359,7 +9536,7 @@
               </a:defRPr>
             </a:pPr>
             <a:r>
-              <a:t>체크포인트를 저장하고 다음 모듈로 넘긴다</a:t>
+              <a:t>객관적 검증 명령으로 완료를 확인한다</a:t>
             </a:r>
           </a:p>
         </p:txBody>
@@ -9398,7 +9575,7 @@
               </a:defRPr>
             </a:pPr>
             <a:r>
-              <a:t>현재 Complete는 다음 Starter의 기준선입니다.</a:t>
+              <a:t>화면만 보지 말고 topic·frame·파일·parameter를 다시 확인합니다.</a:t>
             </a:r>
           </a:p>
         </p:txBody>
@@ -9534,7 +9711,7 @@
               </a:defRPr>
             </a:pPr>
             <a:r>
-              <a:t>현재 단계 체크포인트    |    현재 폴더 ~/ros2_curri/agv_ws    |    현재 터미널</a:t>
+              <a:t>현재 단계 검증    |    현재 폴더 ~/ros2_curri/agv_ws    |    현재 터미널</a:t>
             </a:r>
           </a:p>
         </p:txBody>
@@ -9547,8 +9724,70 @@
         </p:nvSpPr>
         <p:spPr>
           <a:xfrm>
-            <a:off x="685800" y="1737360"/>
-            <a:ext cx="10972800" cy="3611880"/>
+            <a:off x="658368" y="1755648"/>
+            <a:ext cx="10972800" cy="2148840"/>
+          </a:xfrm>
+          <a:prstGeom prst="roundRect">
+            <a:avLst/>
+          </a:prstGeom>
+          <a:solidFill>
+            <a:srgbClr val="1D232D"/>
+          </a:solidFill>
+          <a:ln>
+            <a:solidFill>
+              <a:srgbClr val="1D232D"/>
+            </a:solidFill>
+          </a:ln>
+        </p:spPr>
+        <p:style>
+          <a:lnRef idx="1">
+            <a:schemeClr val="accent1"/>
+          </a:lnRef>
+          <a:fillRef idx="3">
+            <a:schemeClr val="accent1"/>
+          </a:fillRef>
+          <a:effectRef idx="2">
+            <a:schemeClr val="accent1"/>
+          </a:effectRef>
+          <a:fontRef idx="minor">
+            <a:schemeClr val="lt1"/>
+          </a:fontRef>
+        </p:style>
+        <p:txBody>
+          <a:bodyPr rtlCol="0" anchor="ctr" wrap="square" lIns="73152" rIns="73152" tIns="36576" bIns="36576"/>
+          <a:lstStyle/>
+          <a:p>
+            <a:pPr algn="l">
+              <a:spcAft>
+                <a:spcPts val="0"/>
+              </a:spcAft>
+              <a:defRPr sz="1600" b="0">
+                <a:solidFill>
+                  <a:srgbClr val="FFFFFF"/>
+                </a:solidFill>
+                <a:latin typeface="DejaVu Sans Mono"/>
+              </a:defRPr>
+            </a:pPr>
+            <a:r>
+              <a:t>xacro ~/ros2_curri/agv_ws/src/agv_description/curriculum_stages/M06/agv.urdf.xacro &gt; /tmp/agv.urdf</a:t>
+            </a:r>
+            <a:br/>
+            <a:r>
+              <a:t>rg -n 'wheel_radius|left_wheel_joint|right_wheel_joint' /tmp/agv.urdf</a:t>
+            </a:r>
+          </a:p>
+        </p:txBody>
+      </p:sp>
+      <p:sp>
+        <p:nvSpPr>
+          <p:cNvPr id="8" name="Rounded Rectangle 7"/>
+          <p:cNvSpPr/>
+          <p:nvPr/>
+        </p:nvSpPr>
+        <p:spPr>
+          <a:xfrm>
+            <a:off x="658368" y="4206240"/>
+            <a:ext cx="10972800" cy="1554480"/>
           </a:xfrm>
           <a:prstGeom prst="roundRect">
             <a:avLst/>
@@ -9558,7 +9797,7 @@
           </a:solidFill>
           <a:ln>
             <a:solidFill>
-              <a:srgbClr val="D2DCE8"/>
+              <a:srgbClr val="D1DFD5"/>
             </a:solidFill>
           </a:ln>
         </p:spPr>
@@ -9577,112 +9816,34 @@
           </a:fontRef>
         </p:style>
         <p:txBody>
-          <a:bodyPr rtlCol="0" anchor="ctr"/>
-          <a:lstStyle/>
-          <a:p>
-            <a:pPr algn="ctr"/>
-          </a:p>
-        </p:txBody>
-      </p:sp>
-      <p:sp>
-        <p:nvSpPr>
-          <p:cNvPr id="8" name="TextBox 7"/>
-          <p:cNvSpPr txBox="1"/>
-          <p:nvPr/>
-        </p:nvSpPr>
-        <p:spPr>
-          <a:xfrm>
-            <a:off x="896112" y="1993392"/>
-            <a:ext cx="10332720" cy="2971800"/>
-          </a:xfrm>
-          <a:prstGeom prst="rect">
-            <a:avLst/>
-          </a:prstGeom>
-          <a:noFill/>
-        </p:spPr>
-        <p:txBody>
-          <a:bodyPr wrap="square" lIns="109728" rIns="109728">
-            <a:spAutoFit/>
-          </a:bodyPr>
-          <a:lstStyle/>
-          <a:p>
-            <a:pPr>
-              <a:spcAft>
-                <a:spcPts val="800"/>
-              </a:spcAft>
-              <a:defRPr sz="1800">
-                <a:solidFill>
-                  <a:srgbClr val="122C4E"/>
-                </a:solidFill>
-                <a:latin typeface="Noto Sans CJK KR"/>
-              </a:defRPr>
-            </a:pPr>
-            <a:r>
-              <a:t>• □ 완료 화면: wheel_radius와 wheel_base 변경이 좌우 바퀴·충돌 형상에 함께 적용된다.</a:t>
-            </a:r>
-          </a:p>
-          <a:p>
-            <a:pPr>
-              <a:spcAft>
-                <a:spcPts val="800"/>
-              </a:spcAft>
-              <a:defRPr sz="1800">
-                <a:solidFill>
-                  <a:srgbClr val="122C4E"/>
-                </a:solidFill>
-                <a:latin typeface="Noto Sans CJK KR"/>
-              </a:defRPr>
-            </a:pPr>
-            <a:r>
-              <a:t>• □ Complete 파일: blocks/B_robot_build/M06_xacro_modularization/complete/</a:t>
-            </a:r>
-          </a:p>
-          <a:p>
-            <a:pPr>
-              <a:spcAft>
-                <a:spcPts val="800"/>
-              </a:spcAft>
-              <a:defRPr sz="1800">
-                <a:solidFill>
-                  <a:srgbClr val="122C4E"/>
-                </a:solidFill>
-                <a:latin typeface="Noto Sans CJK KR"/>
-              </a:defRPr>
-            </a:pPr>
-            <a:r>
-              <a:t>• □ 정상 로그·캡처: logs/validation.log, screenshots/validation_terminal.png</a:t>
-            </a:r>
-          </a:p>
-          <a:p>
-            <a:pPr>
-              <a:spcAft>
-                <a:spcPts val="800"/>
-              </a:spcAft>
-              <a:defRPr sz="1800">
-                <a:solidFill>
-                  <a:srgbClr val="122C4E"/>
-                </a:solidFill>
-                <a:latin typeface="Noto Sans CJK KR"/>
-              </a:defRPr>
-            </a:pPr>
-            <a:r>
-              <a:t>• □ 버전 식별: CHECKSUM_or_TAG.txt의 SHA-256 manifest</a:t>
-            </a:r>
-          </a:p>
-          <a:p>
-            <a:pPr>
-              <a:spcAft>
-                <a:spcPts val="800"/>
-              </a:spcAft>
-              <a:defRPr sz="1800">
-                <a:solidFill>
-                  <a:srgbClr val="122C4E"/>
-                </a:solidFill>
-                <a:latin typeface="Noto Sans CJK KR"/>
-              </a:defRPr>
-            </a:pPr>
-            <a:r>
-              <a:t>• □ 다음 시작 조건: M07 Gazebo 물리</a:t>
+          <a:bodyPr rtlCol="0" anchor="ctr" wrap="square" lIns="73152" rIns="73152" tIns="36576" bIns="36576"/>
+          <a:lstStyle/>
+          <a:p>
+            <a:pPr algn="l">
+              <a:spcAft>
+                <a:spcPts val="0"/>
+              </a:spcAft>
+              <a:defRPr sz="1800" b="1">
+                <a:solidFill>
+                  <a:srgbClr val="2A8B5A"/>
+                </a:solidFill>
+                <a:latin typeface="Noto Sans CJK KR"/>
+              </a:defRPr>
+            </a:pPr>
+            <a:r>
+              <a:t>완료 체크</a:t>
+            </a:r>
+            <a:br/>
+            <a:r>
+              <a:t>□ 명령이 오류 없이 실행된다.</a:t>
+            </a:r>
+            <a:br/>
+            <a:r>
+              <a:t>□ 기대한 파일·topic·frame·parameter 이름이 보인다.</a:t>
+            </a:r>
+            <a:br/>
+            <a:r>
+              <a:t>□ 값의 단위와 방향을 한 문장으로 설명할 수 있다.</a:t>
             </a:r>
           </a:p>
         </p:txBody>
@@ -9695,8 +9856,8 @@
         </p:nvSpPr>
         <p:spPr>
           <a:xfrm>
-            <a:off x="868680" y="5596128"/>
-            <a:ext cx="10515600" cy="338328"/>
+            <a:off x="731520" y="5989320"/>
+            <a:ext cx="10789920" cy="237744"/>
           </a:xfrm>
           <a:prstGeom prst="rect">
             <a:avLst/>
@@ -9709,19 +9870,19 @@
           </a:bodyPr>
           <a:lstStyle/>
           <a:p>
-            <a:pPr algn="ctr">
-              <a:spcAft>
-                <a:spcPts val="0"/>
-              </a:spcAft>
-              <a:defRPr sz="1700" b="1">
-                <a:solidFill>
-                  <a:srgbClr val="2A8B5A"/>
-                </a:solidFill>
-                <a:latin typeface="Noto Sans CJK KR"/>
-              </a:defRPr>
-            </a:pPr>
-            <a:r>
-              <a:t>다음 모듈을 시작하기 전, 이 슬라이드의 Complete와 다음 모듈의 Starter를 비교합니다.</a:t>
+            <a:pPr algn="l">
+              <a:spcAft>
+                <a:spcPts val="0"/>
+              </a:spcAft>
+              <a:defRPr sz="1500" b="1">
+                <a:solidFill>
+                  <a:srgbClr val="122C4E"/>
+                </a:solidFill>
+                <a:latin typeface="Noto Sans CJK KR"/>
+              </a:defRPr>
+            </a:pPr>
+            <a:r>
+              <a:t>완료 조건: wheel_radius와 wheel_base 변경이 좌우 바퀴·충돌 형상에 함께 적용된다.</a:t>
             </a:r>
           </a:p>
         </p:txBody>
@@ -10239,6 +10400,1279 @@
               </a:defRPr>
             </a:pPr>
             <a:r>
+              <a:t>막히면: 증상 → 우선 확인 → 재검증</a:t>
+            </a:r>
+          </a:p>
+        </p:txBody>
+      </p:sp>
+      <p:sp>
+        <p:nvSpPr>
+          <p:cNvPr id="3" name="TextBox 2"/>
+          <p:cNvSpPr txBox="1"/>
+          <p:nvPr/>
+        </p:nvSpPr>
+        <p:spPr>
+          <a:xfrm>
+            <a:off x="603504" y="859536"/>
+            <a:ext cx="10698480" cy="292608"/>
+          </a:xfrm>
+          <a:prstGeom prst="rect">
+            <a:avLst/>
+          </a:prstGeom>
+          <a:noFill/>
+        </p:spPr>
+        <p:txBody>
+          <a:bodyPr wrap="square" lIns="73152" rIns="73152" tIns="36576" bIns="36576">
+            <a:spAutoFit/>
+          </a:bodyPr>
+          <a:lstStyle/>
+          <a:p>
+            <a:pPr algn="l">
+              <a:spcAft>
+                <a:spcPts val="0"/>
+              </a:spcAft>
+              <a:defRPr sz="1700" b="0">
+                <a:solidFill>
+                  <a:srgbClr val="5C6672"/>
+                </a:solidFill>
+                <a:latin typeface="Noto Sans CJK KR"/>
+              </a:defRPr>
+            </a:pPr>
+            <a:r>
+              <a:t>오류 메시지를 숨기지 않고 같은 순서로 점검합니다.</a:t>
+            </a:r>
+          </a:p>
+        </p:txBody>
+      </p:sp>
+      <p:sp>
+        <p:nvSpPr>
+          <p:cNvPr id="4" name="TextBox 3"/>
+          <p:cNvSpPr txBox="1"/>
+          <p:nvPr/>
+        </p:nvSpPr>
+        <p:spPr>
+          <a:xfrm>
+            <a:off x="530352" y="6510528"/>
+            <a:ext cx="7772400" cy="201168"/>
+          </a:xfrm>
+          <a:prstGeom prst="rect">
+            <a:avLst/>
+          </a:prstGeom>
+          <a:noFill/>
+        </p:spPr>
+        <p:txBody>
+          <a:bodyPr wrap="square" lIns="73152" rIns="73152" tIns="36576" bIns="36576">
+            <a:spAutoFit/>
+          </a:bodyPr>
+          <a:lstStyle/>
+          <a:p>
+            <a:pPr algn="l">
+              <a:spcAft>
+                <a:spcPts val="0"/>
+              </a:spcAft>
+              <a:defRPr sz="1000" b="0">
+                <a:solidFill>
+                  <a:srgbClr val="5C6672"/>
+                </a:solidFill>
+                <a:latin typeface="Noto Sans CJK KR"/>
+              </a:defRPr>
+            </a:pPr>
+            <a:r>
+              <a:t>ROS 2 Jazzy · Gazebo Harmonic · M06 · 따라 하기형 AGV 실습</a:t>
+            </a:r>
+          </a:p>
+        </p:txBody>
+      </p:sp>
+      <p:sp>
+        <p:nvSpPr>
+          <p:cNvPr id="5" name="TextBox 4"/>
+          <p:cNvSpPr txBox="1"/>
+          <p:nvPr/>
+        </p:nvSpPr>
+        <p:spPr>
+          <a:xfrm>
+            <a:off x="9144000" y="6510528"/>
+            <a:ext cx="2468880" cy="201168"/>
+          </a:xfrm>
+          <a:prstGeom prst="rect">
+            <a:avLst/>
+          </a:prstGeom>
+          <a:noFill/>
+        </p:spPr>
+        <p:txBody>
+          <a:bodyPr wrap="square" lIns="73152" rIns="73152" tIns="36576" bIns="36576">
+            <a:spAutoFit/>
+          </a:bodyPr>
+          <a:lstStyle/>
+          <a:p>
+            <a:pPr algn="r">
+              <a:spcAft>
+                <a:spcPts val="0"/>
+              </a:spcAft>
+              <a:defRPr sz="1000" b="0">
+                <a:solidFill>
+                  <a:srgbClr val="5C6672"/>
+                </a:solidFill>
+                <a:latin typeface="Noto Sans CJK KR"/>
+              </a:defRPr>
+            </a:pPr>
+            <a:r>
+              <a:t>명령·파일 경로는 슬라이드에서 복사 가능</a:t>
+            </a:r>
+          </a:p>
+        </p:txBody>
+      </p:sp>
+      <p:sp>
+        <p:nvSpPr>
+          <p:cNvPr id="6" name="Rectangle 5"/>
+          <p:cNvSpPr/>
+          <p:nvPr/>
+        </p:nvSpPr>
+        <p:spPr>
+          <a:xfrm>
+            <a:off x="566928" y="1188720"/>
+            <a:ext cx="11064240" cy="347472"/>
+          </a:xfrm>
+          <a:prstGeom prst="rect">
+            <a:avLst/>
+          </a:prstGeom>
+          <a:solidFill>
+            <a:srgbClr val="F4F7FB"/>
+          </a:solidFill>
+          <a:ln>
+            <a:solidFill>
+              <a:srgbClr val="F4F7FB"/>
+            </a:solidFill>
+          </a:ln>
+        </p:spPr>
+        <p:style>
+          <a:lnRef idx="1">
+            <a:schemeClr val="accent1"/>
+          </a:lnRef>
+          <a:fillRef idx="3">
+            <a:schemeClr val="accent1"/>
+          </a:fillRef>
+          <a:effectRef idx="2">
+            <a:schemeClr val="accent1"/>
+          </a:effectRef>
+          <a:fontRef idx="minor">
+            <a:schemeClr val="lt1"/>
+          </a:fontRef>
+        </p:style>
+        <p:txBody>
+          <a:bodyPr rtlCol="0" anchor="ctr" wrap="square" lIns="73152" rIns="73152" tIns="36576" bIns="36576"/>
+          <a:lstStyle/>
+          <a:p>
+            <a:pPr algn="l">
+              <a:spcAft>
+                <a:spcPts val="0"/>
+              </a:spcAft>
+              <a:defRPr sz="1300" b="1">
+                <a:solidFill>
+                  <a:srgbClr val="122C4E"/>
+                </a:solidFill>
+                <a:latin typeface="Noto Sans CJK KR"/>
+              </a:defRPr>
+            </a:pPr>
+            <a:r>
+              <a:t>현재 단계 오류 대응    |    현재 폴더 ~/ros2_curri/agv_ws    |    현재 터미널</a:t>
+            </a:r>
+          </a:p>
+        </p:txBody>
+      </p:sp>
+      <p:sp>
+        <p:nvSpPr>
+          <p:cNvPr id="7" name="Rounded Rectangle 6"/>
+          <p:cNvSpPr/>
+          <p:nvPr/>
+        </p:nvSpPr>
+        <p:spPr>
+          <a:xfrm>
+            <a:off x="694944" y="1755648"/>
+            <a:ext cx="10972800" cy="1115568"/>
+          </a:xfrm>
+          <a:prstGeom prst="roundRect">
+            <a:avLst/>
+          </a:prstGeom>
+          <a:solidFill>
+            <a:srgbClr val="FFF7F4"/>
+          </a:solidFill>
+          <a:ln>
+            <a:solidFill>
+              <a:srgbClr val="EDBEB4"/>
+            </a:solidFill>
+          </a:ln>
+        </p:spPr>
+        <p:style>
+          <a:lnRef idx="1">
+            <a:schemeClr val="accent1"/>
+          </a:lnRef>
+          <a:fillRef idx="3">
+            <a:schemeClr val="accent1"/>
+          </a:fillRef>
+          <a:effectRef idx="2">
+            <a:schemeClr val="accent1"/>
+          </a:effectRef>
+          <a:fontRef idx="minor">
+            <a:schemeClr val="lt1"/>
+          </a:fontRef>
+        </p:style>
+        <p:txBody>
+          <a:bodyPr rtlCol="0" anchor="ctr"/>
+          <a:lstStyle/>
+          <a:p>
+            <a:pPr algn="ctr"/>
+          </a:p>
+        </p:txBody>
+      </p:sp>
+      <p:sp>
+        <p:nvSpPr>
+          <p:cNvPr id="8" name="TextBox 7"/>
+          <p:cNvSpPr txBox="1"/>
+          <p:nvPr/>
+        </p:nvSpPr>
+        <p:spPr>
+          <a:xfrm>
+            <a:off x="896112" y="1901952"/>
+            <a:ext cx="2926080" cy="274320"/>
+          </a:xfrm>
+          <a:prstGeom prst="rect">
+            <a:avLst/>
+          </a:prstGeom>
+          <a:noFill/>
+        </p:spPr>
+        <p:txBody>
+          <a:bodyPr wrap="square" lIns="73152" rIns="73152" tIns="36576" bIns="36576">
+            <a:spAutoFit/>
+          </a:bodyPr>
+          <a:lstStyle/>
+          <a:p>
+            <a:pPr algn="l">
+              <a:spcAft>
+                <a:spcPts val="0"/>
+              </a:spcAft>
+              <a:defRPr sz="1800" b="1">
+                <a:solidFill>
+                  <a:srgbClr val="BE3B3B"/>
+                </a:solidFill>
+                <a:latin typeface="Noto Sans CJK KR"/>
+              </a:defRPr>
+            </a:pPr>
+            <a:r>
+              <a:t>증상 1: unknown macro/property</a:t>
+            </a:r>
+          </a:p>
+        </p:txBody>
+      </p:sp>
+      <p:sp>
+        <p:nvSpPr>
+          <p:cNvPr id="9" name="TextBox 8"/>
+          <p:cNvSpPr txBox="1"/>
+          <p:nvPr/>
+        </p:nvSpPr>
+        <p:spPr>
+          <a:xfrm>
+            <a:off x="3794760" y="1883664"/>
+            <a:ext cx="7543800" cy="621792"/>
+          </a:xfrm>
+          <a:prstGeom prst="rect">
+            <a:avLst/>
+          </a:prstGeom>
+          <a:noFill/>
+        </p:spPr>
+        <p:txBody>
+          <a:bodyPr wrap="square" lIns="73152" rIns="73152" tIns="36576" bIns="36576">
+            <a:spAutoFit/>
+          </a:bodyPr>
+          <a:lstStyle/>
+          <a:p>
+            <a:pPr algn="l">
+              <a:spcAft>
+                <a:spcPts val="0"/>
+              </a:spcAft>
+              <a:defRPr sz="1600" b="0">
+                <a:solidFill>
+                  <a:srgbClr val="122C4E"/>
+                </a:solidFill>
+                <a:latin typeface="Noto Sans CJK KR"/>
+              </a:defRPr>
+            </a:pPr>
+            <a:r>
+              <a:t>우선 확인: 선언 순서·xacro namespace·철자를 확인한다.</a:t>
+            </a:r>
+            <a:br/>
+            <a:r>
+              <a:t>수정 후: xacro ~/ros2_curri/agv_ws/src/agv_description/curriculum_stages/M06/agv.urdf.xacro &gt; /tmp/agv.urdf</a:t>
+            </a:r>
+          </a:p>
+        </p:txBody>
+      </p:sp>
+      <p:sp>
+        <p:nvSpPr>
+          <p:cNvPr id="10" name="Rounded Rectangle 9"/>
+          <p:cNvSpPr/>
+          <p:nvPr/>
+        </p:nvSpPr>
+        <p:spPr>
+          <a:xfrm>
+            <a:off x="694944" y="3172968"/>
+            <a:ext cx="10972800" cy="1115568"/>
+          </a:xfrm>
+          <a:prstGeom prst="roundRect">
+            <a:avLst/>
+          </a:prstGeom>
+          <a:solidFill>
+            <a:srgbClr val="FFF7F4"/>
+          </a:solidFill>
+          <a:ln>
+            <a:solidFill>
+              <a:srgbClr val="EDBEB4"/>
+            </a:solidFill>
+          </a:ln>
+        </p:spPr>
+        <p:style>
+          <a:lnRef idx="1">
+            <a:schemeClr val="accent1"/>
+          </a:lnRef>
+          <a:fillRef idx="3">
+            <a:schemeClr val="accent1"/>
+          </a:fillRef>
+          <a:effectRef idx="2">
+            <a:schemeClr val="accent1"/>
+          </a:effectRef>
+          <a:fontRef idx="minor">
+            <a:schemeClr val="lt1"/>
+          </a:fontRef>
+        </p:style>
+        <p:txBody>
+          <a:bodyPr rtlCol="0" anchor="ctr"/>
+          <a:lstStyle/>
+          <a:p>
+            <a:pPr algn="ctr"/>
+          </a:p>
+        </p:txBody>
+      </p:sp>
+      <p:sp>
+        <p:nvSpPr>
+          <p:cNvPr id="11" name="TextBox 10"/>
+          <p:cNvSpPr txBox="1"/>
+          <p:nvPr/>
+        </p:nvSpPr>
+        <p:spPr>
+          <a:xfrm>
+            <a:off x="896112" y="3319272"/>
+            <a:ext cx="2926080" cy="274320"/>
+          </a:xfrm>
+          <a:prstGeom prst="rect">
+            <a:avLst/>
+          </a:prstGeom>
+          <a:noFill/>
+        </p:spPr>
+        <p:txBody>
+          <a:bodyPr wrap="square" lIns="73152" rIns="73152" tIns="36576" bIns="36576">
+            <a:spAutoFit/>
+          </a:bodyPr>
+          <a:lstStyle/>
+          <a:p>
+            <a:pPr algn="l">
+              <a:spcAft>
+                <a:spcPts val="0"/>
+              </a:spcAft>
+              <a:defRPr sz="1800" b="1">
+                <a:solidFill>
+                  <a:srgbClr val="BE3B3B"/>
+                </a:solidFill>
+                <a:latin typeface="Noto Sans CJK KR"/>
+              </a:defRPr>
+            </a:pPr>
+            <a:r>
+              <a:t>증상 2: include file not found</a:t>
+            </a:r>
+          </a:p>
+        </p:txBody>
+      </p:sp>
+      <p:sp>
+        <p:nvSpPr>
+          <p:cNvPr id="12" name="TextBox 11"/>
+          <p:cNvSpPr txBox="1"/>
+          <p:nvPr/>
+        </p:nvSpPr>
+        <p:spPr>
+          <a:xfrm>
+            <a:off x="3794760" y="3300984"/>
+            <a:ext cx="7543800" cy="621792"/>
+          </a:xfrm>
+          <a:prstGeom prst="rect">
+            <a:avLst/>
+          </a:prstGeom>
+          <a:noFill/>
+        </p:spPr>
+        <p:txBody>
+          <a:bodyPr wrap="square" lIns="73152" rIns="73152" tIns="36576" bIns="36576">
+            <a:spAutoFit/>
+          </a:bodyPr>
+          <a:lstStyle/>
+          <a:p>
+            <a:pPr algn="l">
+              <a:spcAft>
+                <a:spcPts val="0"/>
+              </a:spcAft>
+              <a:defRPr sz="1600" b="0">
+                <a:solidFill>
+                  <a:srgbClr val="122C4E"/>
+                </a:solidFill>
+                <a:latin typeface="Noto Sans CJK KR"/>
+              </a:defRPr>
+            </a:pPr>
+            <a:r>
+              <a:t>우선 확인: 패키지 이름과 설치 대상·파일 경로를 확인한다.</a:t>
+            </a:r>
+            <a:br/>
+            <a:r>
+              <a:t>수정 후: xacro ~/ros2_curri/agv_ws/src/agv_description/curriculum_stages/M06/agv.urdf.xacro &gt; /tmp/agv.urdf</a:t>
+            </a:r>
+          </a:p>
+        </p:txBody>
+      </p:sp>
+      <p:sp>
+        <p:nvSpPr>
+          <p:cNvPr id="13" name="TextBox 12"/>
+          <p:cNvSpPr txBox="1"/>
+          <p:nvPr/>
+        </p:nvSpPr>
+        <p:spPr>
+          <a:xfrm>
+            <a:off x="822960" y="5102352"/>
+            <a:ext cx="10607040" cy="402336"/>
+          </a:xfrm>
+          <a:prstGeom prst="rect">
+            <a:avLst/>
+          </a:prstGeom>
+          <a:noFill/>
+        </p:spPr>
+        <p:txBody>
+          <a:bodyPr wrap="square" lIns="73152" rIns="73152" tIns="36576" bIns="36576">
+            <a:spAutoFit/>
+          </a:bodyPr>
+          <a:lstStyle/>
+          <a:p>
+            <a:pPr algn="ctr">
+              <a:spcAft>
+                <a:spcPts val="0"/>
+              </a:spcAft>
+              <a:defRPr sz="1800" b="1">
+                <a:solidFill>
+                  <a:srgbClr val="DB7E22"/>
+                </a:solidFill>
+                <a:latin typeface="Noto Sans CJK KR"/>
+              </a:defRPr>
+            </a:pPr>
+            <a:r>
+              <a:t>공통 순서: ① 현재 폴더 ② source ③ 파일 경로 ④ 이름/타입/단위 ⑤ build·source 후 재실행</a:t>
+            </a:r>
+          </a:p>
+        </p:txBody>
+      </p:sp>
+    </p:spTree>
+  </p:cSld>
+  <p:clrMapOvr>
+    <a:masterClrMapping/>
+  </p:clrMapOvr>
+</p:sld>
+</file>
+
+<file path=ppt/slides/slide21.xml><?xml version="1.0" encoding="utf-8"?>
+<p:sld xmlns:a="http://schemas.openxmlformats.org/drawingml/2006/main" xmlns:p="http://schemas.openxmlformats.org/presentationml/2006/main" xmlns:r="http://schemas.openxmlformats.org/officeDocument/2006/relationships">
+  <p:cSld>
+    <p:spTree>
+      <p:nvGrpSpPr>
+        <p:cNvPr id="1" name=""/>
+        <p:cNvGrpSpPr/>
+        <p:nvPr/>
+      </p:nvGrpSpPr>
+      <p:grpSpPr/>
+      <p:sp>
+        <p:nvSpPr>
+          <p:cNvPr id="2" name="TextBox 1"/>
+          <p:cNvSpPr txBox="1"/>
+          <p:nvPr/>
+        </p:nvSpPr>
+        <p:spPr>
+          <a:xfrm>
+            <a:off x="566928" y="347472"/>
+            <a:ext cx="10881360" cy="438912"/>
+          </a:xfrm>
+          <a:prstGeom prst="rect">
+            <a:avLst/>
+          </a:prstGeom>
+          <a:noFill/>
+        </p:spPr>
+        <p:txBody>
+          <a:bodyPr wrap="square" lIns="73152" rIns="73152" tIns="36576" bIns="36576">
+            <a:spAutoFit/>
+          </a:bodyPr>
+          <a:lstStyle/>
+          <a:p>
+            <a:pPr algn="l">
+              <a:spcAft>
+                <a:spcPts val="0"/>
+              </a:spcAft>
+              <a:defRPr sz="3200" b="1">
+                <a:solidFill>
+                  <a:srgbClr val="122C4E"/>
+                </a:solidFill>
+                <a:latin typeface="Noto Sans CJK KR"/>
+              </a:defRPr>
+            </a:pPr>
+            <a:r>
+              <a:t>미니 실습: 값 하나를 바꾸고 결과를 비교한다</a:t>
+            </a:r>
+          </a:p>
+        </p:txBody>
+      </p:sp>
+      <p:sp>
+        <p:nvSpPr>
+          <p:cNvPr id="3" name="TextBox 2"/>
+          <p:cNvSpPr txBox="1"/>
+          <p:nvPr/>
+        </p:nvSpPr>
+        <p:spPr>
+          <a:xfrm>
+            <a:off x="603504" y="859536"/>
+            <a:ext cx="10698480" cy="292608"/>
+          </a:xfrm>
+          <a:prstGeom prst="rect">
+            <a:avLst/>
+          </a:prstGeom>
+          <a:noFill/>
+        </p:spPr>
+        <p:txBody>
+          <a:bodyPr wrap="square" lIns="73152" rIns="73152" tIns="36576" bIns="36576">
+            <a:spAutoFit/>
+          </a:bodyPr>
+          <a:lstStyle/>
+          <a:p>
+            <a:pPr algn="l">
+              <a:spcAft>
+                <a:spcPts val="0"/>
+              </a:spcAft>
+              <a:defRPr sz="1700" b="0">
+                <a:solidFill>
+                  <a:srgbClr val="5C6672"/>
+                </a:solidFill>
+                <a:latin typeface="Noto Sans CJK KR"/>
+              </a:defRPr>
+            </a:pPr>
+            <a:r>
+              <a:t>정상 결과를 만든 뒤에는 한 번에 하나의 값만 바꿉니다.</a:t>
+            </a:r>
+          </a:p>
+        </p:txBody>
+      </p:sp>
+      <p:sp>
+        <p:nvSpPr>
+          <p:cNvPr id="4" name="TextBox 3"/>
+          <p:cNvSpPr txBox="1"/>
+          <p:nvPr/>
+        </p:nvSpPr>
+        <p:spPr>
+          <a:xfrm>
+            <a:off x="530352" y="6510528"/>
+            <a:ext cx="7772400" cy="201168"/>
+          </a:xfrm>
+          <a:prstGeom prst="rect">
+            <a:avLst/>
+          </a:prstGeom>
+          <a:noFill/>
+        </p:spPr>
+        <p:txBody>
+          <a:bodyPr wrap="square" lIns="73152" rIns="73152" tIns="36576" bIns="36576">
+            <a:spAutoFit/>
+          </a:bodyPr>
+          <a:lstStyle/>
+          <a:p>
+            <a:pPr algn="l">
+              <a:spcAft>
+                <a:spcPts val="0"/>
+              </a:spcAft>
+              <a:defRPr sz="1000" b="0">
+                <a:solidFill>
+                  <a:srgbClr val="5C6672"/>
+                </a:solidFill>
+                <a:latin typeface="Noto Sans CJK KR"/>
+              </a:defRPr>
+            </a:pPr>
+            <a:r>
+              <a:t>ROS 2 Jazzy · Gazebo Harmonic · M06 · 따라 하기형 AGV 실습</a:t>
+            </a:r>
+          </a:p>
+        </p:txBody>
+      </p:sp>
+      <p:sp>
+        <p:nvSpPr>
+          <p:cNvPr id="5" name="TextBox 4"/>
+          <p:cNvSpPr txBox="1"/>
+          <p:nvPr/>
+        </p:nvSpPr>
+        <p:spPr>
+          <a:xfrm>
+            <a:off x="9144000" y="6510528"/>
+            <a:ext cx="2468880" cy="201168"/>
+          </a:xfrm>
+          <a:prstGeom prst="rect">
+            <a:avLst/>
+          </a:prstGeom>
+          <a:noFill/>
+        </p:spPr>
+        <p:txBody>
+          <a:bodyPr wrap="square" lIns="73152" rIns="73152" tIns="36576" bIns="36576">
+            <a:spAutoFit/>
+          </a:bodyPr>
+          <a:lstStyle/>
+          <a:p>
+            <a:pPr algn="r">
+              <a:spcAft>
+                <a:spcPts val="0"/>
+              </a:spcAft>
+              <a:defRPr sz="1000" b="0">
+                <a:solidFill>
+                  <a:srgbClr val="5C6672"/>
+                </a:solidFill>
+                <a:latin typeface="Noto Sans CJK KR"/>
+              </a:defRPr>
+            </a:pPr>
+            <a:r>
+              <a:t>명령·파일 경로는 슬라이드에서 복사 가능</a:t>
+            </a:r>
+          </a:p>
+        </p:txBody>
+      </p:sp>
+      <p:sp>
+        <p:nvSpPr>
+          <p:cNvPr id="6" name="Rectangle 5"/>
+          <p:cNvSpPr/>
+          <p:nvPr/>
+        </p:nvSpPr>
+        <p:spPr>
+          <a:xfrm>
+            <a:off x="566928" y="1188720"/>
+            <a:ext cx="11064240" cy="347472"/>
+          </a:xfrm>
+          <a:prstGeom prst="rect">
+            <a:avLst/>
+          </a:prstGeom>
+          <a:solidFill>
+            <a:srgbClr val="F4F7FB"/>
+          </a:solidFill>
+          <a:ln>
+            <a:solidFill>
+              <a:srgbClr val="F4F7FB"/>
+            </a:solidFill>
+          </a:ln>
+        </p:spPr>
+        <p:style>
+          <a:lnRef idx="1">
+            <a:schemeClr val="accent1"/>
+          </a:lnRef>
+          <a:fillRef idx="3">
+            <a:schemeClr val="accent1"/>
+          </a:fillRef>
+          <a:effectRef idx="2">
+            <a:schemeClr val="accent1"/>
+          </a:effectRef>
+          <a:fontRef idx="minor">
+            <a:schemeClr val="lt1"/>
+          </a:fontRef>
+        </p:style>
+        <p:txBody>
+          <a:bodyPr rtlCol="0" anchor="ctr" wrap="square" lIns="73152" rIns="73152" tIns="36576" bIns="36576"/>
+          <a:lstStyle/>
+          <a:p>
+            <a:pPr algn="l">
+              <a:spcAft>
+                <a:spcPts val="0"/>
+              </a:spcAft>
+              <a:defRPr sz="1300" b="1">
+                <a:solidFill>
+                  <a:srgbClr val="122C4E"/>
+                </a:solidFill>
+                <a:latin typeface="Noto Sans CJK KR"/>
+              </a:defRPr>
+            </a:pPr>
+            <a:r>
+              <a:t>현재 단계 미니 실습    |    현재 폴더 ~/ros2_curri/agv_ws    |    현재 터미널</a:t>
+            </a:r>
+          </a:p>
+        </p:txBody>
+      </p:sp>
+      <p:sp>
+        <p:nvSpPr>
+          <p:cNvPr id="7" name="Rounded Rectangle 6"/>
+          <p:cNvSpPr/>
+          <p:nvPr/>
+        </p:nvSpPr>
+        <p:spPr>
+          <a:xfrm>
+            <a:off x="749808" y="1874519"/>
+            <a:ext cx="10652760" cy="1993392"/>
+          </a:xfrm>
+          <a:prstGeom prst="roundRect">
+            <a:avLst/>
+          </a:prstGeom>
+          <a:solidFill>
+            <a:srgbClr val="FFF8EB"/>
+          </a:solidFill>
+          <a:ln>
+            <a:solidFill>
+              <a:srgbClr val="ECC680"/>
+            </a:solidFill>
+          </a:ln>
+        </p:spPr>
+        <p:style>
+          <a:lnRef idx="1">
+            <a:schemeClr val="accent1"/>
+          </a:lnRef>
+          <a:fillRef idx="3">
+            <a:schemeClr val="accent1"/>
+          </a:fillRef>
+          <a:effectRef idx="2">
+            <a:schemeClr val="accent1"/>
+          </a:effectRef>
+          <a:fontRef idx="minor">
+            <a:schemeClr val="lt1"/>
+          </a:fontRef>
+        </p:style>
+        <p:txBody>
+          <a:bodyPr rtlCol="0" anchor="ctr" wrap="square" lIns="73152" rIns="73152" tIns="36576" bIns="36576"/>
+          <a:lstStyle/>
+          <a:p>
+            <a:pPr algn="ctr">
+              <a:spcAft>
+                <a:spcPts val="0"/>
+              </a:spcAft>
+              <a:defRPr sz="2300" b="1">
+                <a:solidFill>
+                  <a:srgbClr val="122C4E"/>
+                </a:solidFill>
+                <a:latin typeface="Noto Sans CJK KR"/>
+              </a:defRPr>
+            </a:pPr>
+            <a:r>
+              <a:t>wheel_radius 0.08→0.12 m를 적용한 뒤 joint origin과 cylinder radius가 함께 바뀌는지 비교한다.</a:t>
+            </a:r>
+          </a:p>
+        </p:txBody>
+      </p:sp>
+      <p:sp>
+        <p:nvSpPr>
+          <p:cNvPr id="8" name="TextBox 7"/>
+          <p:cNvSpPr txBox="1"/>
+          <p:nvPr/>
+        </p:nvSpPr>
+        <p:spPr>
+          <a:xfrm>
+            <a:off x="877824" y="4590288"/>
+            <a:ext cx="10241280" cy="594360"/>
+          </a:xfrm>
+          <a:prstGeom prst="rect">
+            <a:avLst/>
+          </a:prstGeom>
+          <a:noFill/>
+        </p:spPr>
+        <p:txBody>
+          <a:bodyPr wrap="square" lIns="73152" rIns="73152" tIns="36576" bIns="36576">
+            <a:spAutoFit/>
+          </a:bodyPr>
+          <a:lstStyle/>
+          <a:p>
+            <a:pPr algn="ctr">
+              <a:spcAft>
+                <a:spcPts val="0"/>
+              </a:spcAft>
+              <a:defRPr sz="1900" b="1">
+                <a:solidFill>
+                  <a:srgbClr val="DB7E22"/>
+                </a:solidFill>
+                <a:latin typeface="Noto Sans CJK KR"/>
+              </a:defRPr>
+            </a:pPr>
+            <a:r>
+              <a:t>기록할 것: 바꾼 값(단위) · 기대한 변화 · 실제 출력/화면 · 원래 값으로 되돌린 결과</a:t>
+            </a:r>
+          </a:p>
+        </p:txBody>
+      </p:sp>
+    </p:spTree>
+  </p:cSld>
+  <p:clrMapOvr>
+    <a:masterClrMapping/>
+  </p:clrMapOvr>
+</p:sld>
+</file>
+
+<file path=ppt/slides/slide22.xml><?xml version="1.0" encoding="utf-8"?>
+<p:sld xmlns:a="http://schemas.openxmlformats.org/drawingml/2006/main" xmlns:p="http://schemas.openxmlformats.org/presentationml/2006/main" xmlns:r="http://schemas.openxmlformats.org/officeDocument/2006/relationships">
+  <p:cSld>
+    <p:spTree>
+      <p:nvGrpSpPr>
+        <p:cNvPr id="1" name=""/>
+        <p:cNvGrpSpPr/>
+        <p:nvPr/>
+      </p:nvGrpSpPr>
+      <p:grpSpPr/>
+      <p:sp>
+        <p:nvSpPr>
+          <p:cNvPr id="2" name="TextBox 1"/>
+          <p:cNvSpPr txBox="1"/>
+          <p:nvPr/>
+        </p:nvSpPr>
+        <p:spPr>
+          <a:xfrm>
+            <a:off x="566928" y="347472"/>
+            <a:ext cx="10881360" cy="438912"/>
+          </a:xfrm>
+          <a:prstGeom prst="rect">
+            <a:avLst/>
+          </a:prstGeom>
+          <a:noFill/>
+        </p:spPr>
+        <p:txBody>
+          <a:bodyPr wrap="square" lIns="73152" rIns="73152" tIns="36576" bIns="36576">
+            <a:spAutoFit/>
+          </a:bodyPr>
+          <a:lstStyle/>
+          <a:p>
+            <a:pPr algn="l">
+              <a:spcAft>
+                <a:spcPts val="0"/>
+              </a:spcAft>
+              <a:defRPr sz="3200" b="1">
+                <a:solidFill>
+                  <a:srgbClr val="122C4E"/>
+                </a:solidFill>
+                <a:latin typeface="Noto Sans CJK KR"/>
+              </a:defRPr>
+            </a:pPr>
+            <a:r>
+              <a:t>체크포인트를 저장하고 다음 모듈로 넘긴다</a:t>
+            </a:r>
+          </a:p>
+        </p:txBody>
+      </p:sp>
+      <p:sp>
+        <p:nvSpPr>
+          <p:cNvPr id="3" name="TextBox 2"/>
+          <p:cNvSpPr txBox="1"/>
+          <p:nvPr/>
+        </p:nvSpPr>
+        <p:spPr>
+          <a:xfrm>
+            <a:off x="603504" y="859536"/>
+            <a:ext cx="10698480" cy="292608"/>
+          </a:xfrm>
+          <a:prstGeom prst="rect">
+            <a:avLst/>
+          </a:prstGeom>
+          <a:noFill/>
+        </p:spPr>
+        <p:txBody>
+          <a:bodyPr wrap="square" lIns="73152" rIns="73152" tIns="36576" bIns="36576">
+            <a:spAutoFit/>
+          </a:bodyPr>
+          <a:lstStyle/>
+          <a:p>
+            <a:pPr algn="l">
+              <a:spcAft>
+                <a:spcPts val="0"/>
+              </a:spcAft>
+              <a:defRPr sz="1700" b="0">
+                <a:solidFill>
+                  <a:srgbClr val="5C6672"/>
+                </a:solidFill>
+                <a:latin typeface="Noto Sans CJK KR"/>
+              </a:defRPr>
+            </a:pPr>
+            <a:r>
+              <a:t>현재 Complete는 다음 Starter의 기준선입니다.</a:t>
+            </a:r>
+          </a:p>
+        </p:txBody>
+      </p:sp>
+      <p:sp>
+        <p:nvSpPr>
+          <p:cNvPr id="4" name="TextBox 3"/>
+          <p:cNvSpPr txBox="1"/>
+          <p:nvPr/>
+        </p:nvSpPr>
+        <p:spPr>
+          <a:xfrm>
+            <a:off x="530352" y="6510528"/>
+            <a:ext cx="7772400" cy="201168"/>
+          </a:xfrm>
+          <a:prstGeom prst="rect">
+            <a:avLst/>
+          </a:prstGeom>
+          <a:noFill/>
+        </p:spPr>
+        <p:txBody>
+          <a:bodyPr wrap="square" lIns="73152" rIns="73152" tIns="36576" bIns="36576">
+            <a:spAutoFit/>
+          </a:bodyPr>
+          <a:lstStyle/>
+          <a:p>
+            <a:pPr algn="l">
+              <a:spcAft>
+                <a:spcPts val="0"/>
+              </a:spcAft>
+              <a:defRPr sz="1000" b="0">
+                <a:solidFill>
+                  <a:srgbClr val="5C6672"/>
+                </a:solidFill>
+                <a:latin typeface="Noto Sans CJK KR"/>
+              </a:defRPr>
+            </a:pPr>
+            <a:r>
+              <a:t>ROS 2 Jazzy · Gazebo Harmonic · M06 · 따라 하기형 AGV 실습</a:t>
+            </a:r>
+          </a:p>
+        </p:txBody>
+      </p:sp>
+      <p:sp>
+        <p:nvSpPr>
+          <p:cNvPr id="5" name="TextBox 4"/>
+          <p:cNvSpPr txBox="1"/>
+          <p:nvPr/>
+        </p:nvSpPr>
+        <p:spPr>
+          <a:xfrm>
+            <a:off x="9144000" y="6510528"/>
+            <a:ext cx="2468880" cy="201168"/>
+          </a:xfrm>
+          <a:prstGeom prst="rect">
+            <a:avLst/>
+          </a:prstGeom>
+          <a:noFill/>
+        </p:spPr>
+        <p:txBody>
+          <a:bodyPr wrap="square" lIns="73152" rIns="73152" tIns="36576" bIns="36576">
+            <a:spAutoFit/>
+          </a:bodyPr>
+          <a:lstStyle/>
+          <a:p>
+            <a:pPr algn="r">
+              <a:spcAft>
+                <a:spcPts val="0"/>
+              </a:spcAft>
+              <a:defRPr sz="1000" b="0">
+                <a:solidFill>
+                  <a:srgbClr val="5C6672"/>
+                </a:solidFill>
+                <a:latin typeface="Noto Sans CJK KR"/>
+              </a:defRPr>
+            </a:pPr>
+            <a:r>
+              <a:t>명령·파일 경로는 슬라이드에서 복사 가능</a:t>
+            </a:r>
+          </a:p>
+        </p:txBody>
+      </p:sp>
+      <p:sp>
+        <p:nvSpPr>
+          <p:cNvPr id="6" name="Rectangle 5"/>
+          <p:cNvSpPr/>
+          <p:nvPr/>
+        </p:nvSpPr>
+        <p:spPr>
+          <a:xfrm>
+            <a:off x="566928" y="1188720"/>
+            <a:ext cx="11064240" cy="347472"/>
+          </a:xfrm>
+          <a:prstGeom prst="rect">
+            <a:avLst/>
+          </a:prstGeom>
+          <a:solidFill>
+            <a:srgbClr val="F4F7FB"/>
+          </a:solidFill>
+          <a:ln>
+            <a:solidFill>
+              <a:srgbClr val="F4F7FB"/>
+            </a:solidFill>
+          </a:ln>
+        </p:spPr>
+        <p:style>
+          <a:lnRef idx="1">
+            <a:schemeClr val="accent1"/>
+          </a:lnRef>
+          <a:fillRef idx="3">
+            <a:schemeClr val="accent1"/>
+          </a:fillRef>
+          <a:effectRef idx="2">
+            <a:schemeClr val="accent1"/>
+          </a:effectRef>
+          <a:fontRef idx="minor">
+            <a:schemeClr val="lt1"/>
+          </a:fontRef>
+        </p:style>
+        <p:txBody>
+          <a:bodyPr rtlCol="0" anchor="ctr" wrap="square" lIns="73152" rIns="73152" tIns="36576" bIns="36576"/>
+          <a:lstStyle/>
+          <a:p>
+            <a:pPr algn="l">
+              <a:spcAft>
+                <a:spcPts val="0"/>
+              </a:spcAft>
+              <a:defRPr sz="1300" b="1">
+                <a:solidFill>
+                  <a:srgbClr val="122C4E"/>
+                </a:solidFill>
+                <a:latin typeface="Noto Sans CJK KR"/>
+              </a:defRPr>
+            </a:pPr>
+            <a:r>
+              <a:t>현재 단계 체크포인트    |    현재 폴더 ~/ros2_curri/agv_ws    |    현재 터미널</a:t>
+            </a:r>
+          </a:p>
+        </p:txBody>
+      </p:sp>
+      <p:sp>
+        <p:nvSpPr>
+          <p:cNvPr id="7" name="Rounded Rectangle 6"/>
+          <p:cNvSpPr/>
+          <p:nvPr/>
+        </p:nvSpPr>
+        <p:spPr>
+          <a:xfrm>
+            <a:off x="685800" y="1737360"/>
+            <a:ext cx="10972800" cy="3611880"/>
+          </a:xfrm>
+          <a:prstGeom prst="roundRect">
+            <a:avLst/>
+          </a:prstGeom>
+          <a:solidFill>
+            <a:srgbClr val="F4F7FB"/>
+          </a:solidFill>
+          <a:ln>
+            <a:solidFill>
+              <a:srgbClr val="D2DCE8"/>
+            </a:solidFill>
+          </a:ln>
+        </p:spPr>
+        <p:style>
+          <a:lnRef idx="1">
+            <a:schemeClr val="accent1"/>
+          </a:lnRef>
+          <a:fillRef idx="3">
+            <a:schemeClr val="accent1"/>
+          </a:fillRef>
+          <a:effectRef idx="2">
+            <a:schemeClr val="accent1"/>
+          </a:effectRef>
+          <a:fontRef idx="minor">
+            <a:schemeClr val="lt1"/>
+          </a:fontRef>
+        </p:style>
+        <p:txBody>
+          <a:bodyPr rtlCol="0" anchor="ctr"/>
+          <a:lstStyle/>
+          <a:p>
+            <a:pPr algn="ctr"/>
+          </a:p>
+        </p:txBody>
+      </p:sp>
+      <p:sp>
+        <p:nvSpPr>
+          <p:cNvPr id="8" name="TextBox 7"/>
+          <p:cNvSpPr txBox="1"/>
+          <p:nvPr/>
+        </p:nvSpPr>
+        <p:spPr>
+          <a:xfrm>
+            <a:off x="896112" y="1993392"/>
+            <a:ext cx="10332720" cy="2971800"/>
+          </a:xfrm>
+          <a:prstGeom prst="rect">
+            <a:avLst/>
+          </a:prstGeom>
+          <a:noFill/>
+        </p:spPr>
+        <p:txBody>
+          <a:bodyPr wrap="square" lIns="109728" rIns="109728">
+            <a:spAutoFit/>
+          </a:bodyPr>
+          <a:lstStyle/>
+          <a:p>
+            <a:pPr>
+              <a:spcAft>
+                <a:spcPts val="800"/>
+              </a:spcAft>
+              <a:defRPr sz="1800">
+                <a:solidFill>
+                  <a:srgbClr val="122C4E"/>
+                </a:solidFill>
+                <a:latin typeface="Noto Sans CJK KR"/>
+              </a:defRPr>
+            </a:pPr>
+            <a:r>
+              <a:t>• □ 완료 화면: wheel_radius와 wheel_base 변경이 좌우 바퀴·충돌 형상에 함께 적용된다.</a:t>
+            </a:r>
+          </a:p>
+          <a:p>
+            <a:pPr>
+              <a:spcAft>
+                <a:spcPts val="800"/>
+              </a:spcAft>
+              <a:defRPr sz="1800">
+                <a:solidFill>
+                  <a:srgbClr val="122C4E"/>
+                </a:solidFill>
+                <a:latin typeface="Noto Sans CJK KR"/>
+              </a:defRPr>
+            </a:pPr>
+            <a:r>
+              <a:t>• □ Complete 파일: blocks/B_robot_build/M06_xacro_modularization/complete/</a:t>
+            </a:r>
+          </a:p>
+          <a:p>
+            <a:pPr>
+              <a:spcAft>
+                <a:spcPts val="800"/>
+              </a:spcAft>
+              <a:defRPr sz="1800">
+                <a:solidFill>
+                  <a:srgbClr val="122C4E"/>
+                </a:solidFill>
+                <a:latin typeface="Noto Sans CJK KR"/>
+              </a:defRPr>
+            </a:pPr>
+            <a:r>
+              <a:t>• □ 정상 로그·캡처: logs/validation.log, screenshots/validation_terminal.png</a:t>
+            </a:r>
+          </a:p>
+          <a:p>
+            <a:pPr>
+              <a:spcAft>
+                <a:spcPts val="800"/>
+              </a:spcAft>
+              <a:defRPr sz="1800">
+                <a:solidFill>
+                  <a:srgbClr val="122C4E"/>
+                </a:solidFill>
+                <a:latin typeface="Noto Sans CJK KR"/>
+              </a:defRPr>
+            </a:pPr>
+            <a:r>
+              <a:t>• □ 버전 식별: CHECKSUM_or_TAG.txt의 SHA-256 manifest</a:t>
+            </a:r>
+          </a:p>
+          <a:p>
+            <a:pPr>
+              <a:spcAft>
+                <a:spcPts val="800"/>
+              </a:spcAft>
+              <a:defRPr sz="1800">
+                <a:solidFill>
+                  <a:srgbClr val="122C4E"/>
+                </a:solidFill>
+                <a:latin typeface="Noto Sans CJK KR"/>
+              </a:defRPr>
+            </a:pPr>
+            <a:r>
+              <a:t>• □ 다음 시작 조건: M07 Gazebo 물리</a:t>
+            </a:r>
+          </a:p>
+        </p:txBody>
+      </p:sp>
+      <p:sp>
+        <p:nvSpPr>
+          <p:cNvPr id="9" name="TextBox 8"/>
+          <p:cNvSpPr txBox="1"/>
+          <p:nvPr/>
+        </p:nvSpPr>
+        <p:spPr>
+          <a:xfrm>
+            <a:off x="868680" y="5596128"/>
+            <a:ext cx="10515600" cy="338328"/>
+          </a:xfrm>
+          <a:prstGeom prst="rect">
+            <a:avLst/>
+          </a:prstGeom>
+          <a:noFill/>
+        </p:spPr>
+        <p:txBody>
+          <a:bodyPr wrap="square" lIns="73152" rIns="73152" tIns="36576" bIns="36576">
+            <a:spAutoFit/>
+          </a:bodyPr>
+          <a:lstStyle/>
+          <a:p>
+            <a:pPr algn="ctr">
+              <a:spcAft>
+                <a:spcPts val="0"/>
+              </a:spcAft>
+              <a:defRPr sz="1700" b="1">
+                <a:solidFill>
+                  <a:srgbClr val="2A8B5A"/>
+                </a:solidFill>
+                <a:latin typeface="Noto Sans CJK KR"/>
+              </a:defRPr>
+            </a:pPr>
+            <a:r>
+              <a:t>다음 모듈을 시작하기 전, 이 슬라이드의 Complete와 다음 모듈의 Starter를 비교합니다.</a:t>
+            </a:r>
+          </a:p>
+        </p:txBody>
+      </p:sp>
+    </p:spTree>
+  </p:cSld>
+  <p:clrMapOvr>
+    <a:masterClrMapping/>
+  </p:clrMapOvr>
+</p:sld>
+</file>
+
+<file path=ppt/slides/slide23.xml><?xml version="1.0" encoding="utf-8"?>
+<p:sld xmlns:a="http://schemas.openxmlformats.org/drawingml/2006/main" xmlns:p="http://schemas.openxmlformats.org/presentationml/2006/main" xmlns:r="http://schemas.openxmlformats.org/officeDocument/2006/relationships">
+  <p:cSld>
+    <p:spTree>
+      <p:nvGrpSpPr>
+        <p:cNvPr id="1" name=""/>
+        <p:cNvGrpSpPr/>
+        <p:nvPr/>
+      </p:nvGrpSpPr>
+      <p:grpSpPr/>
+      <p:sp>
+        <p:nvSpPr>
+          <p:cNvPr id="2" name="TextBox 1"/>
+          <p:cNvSpPr txBox="1"/>
+          <p:nvPr/>
+        </p:nvSpPr>
+        <p:spPr>
+          <a:xfrm>
+            <a:off x="566928" y="347472"/>
+            <a:ext cx="10881360" cy="438912"/>
+          </a:xfrm>
+          <a:prstGeom prst="rect">
+            <a:avLst/>
+          </a:prstGeom>
+          <a:noFill/>
+        </p:spPr>
+        <p:txBody>
+          <a:bodyPr wrap="square" lIns="73152" rIns="73152" tIns="36576" bIns="36576">
+            <a:spAutoFit/>
+          </a:bodyPr>
+          <a:lstStyle/>
+          <a:p>
+            <a:pPr algn="l">
+              <a:spcAft>
+                <a:spcPts val="0"/>
+              </a:spcAft>
+              <a:defRPr sz="3200" b="1">
+                <a:solidFill>
+                  <a:srgbClr val="122C4E"/>
+                </a:solidFill>
+                <a:latin typeface="Noto Sans CJK KR"/>
+              </a:defRPr>
+            </a:pPr>
+            <a:r>
               <a:t>공식 참고 자료</a:t>
             </a:r>
           </a:p>
@@ -12258,7 +13692,7 @@
               </a:defRPr>
             </a:pPr>
             <a:r>
-              <a:t>처음으로 Xacro macro를 만든다</a:t>
+              <a:t>코드/설정이 실제로 만드는 것 (1/1)</a:t>
             </a:r>
           </a:p>
         </p:txBody>
@@ -12297,7 +13731,7 @@
               </a:defRPr>
             </a:pPr>
             <a:r>
-              <a:t>한 장에는 한 행동만 수행합니다.</a:t>
+              <a:t>파일을 입력하기 전에 ‘무엇을 만들고 어디서 볼지’를 먼저 연결합니다.</a:t>
             </a:r>
           </a:p>
         </p:txBody>
@@ -12433,109 +13867,31 @@
               </a:defRPr>
             </a:pPr>
             <a:r>
-              <a:t>현재 단계 1/2    |    현재 폴더 ~/ros2_curri/agv_ws    |    현재 터미널</a:t>
-            </a:r>
-          </a:p>
-        </p:txBody>
-      </p:sp>
-      <p:sp>
-        <p:nvSpPr>
-          <p:cNvPr id="7" name="TextBox 6"/>
-          <p:cNvSpPr txBox="1"/>
-          <p:nvPr/>
-        </p:nvSpPr>
-        <p:spPr>
-          <a:xfrm>
-            <a:off x="676656" y="1764792"/>
-            <a:ext cx="1828800" cy="347472"/>
-          </a:xfrm>
-          <a:prstGeom prst="rect">
-            <a:avLst/>
-          </a:prstGeom>
-          <a:noFill/>
-        </p:spPr>
-        <p:txBody>
-          <a:bodyPr wrap="square" lIns="73152" rIns="73152" tIns="36576" bIns="36576">
-            <a:spAutoFit/>
-          </a:bodyPr>
-          <a:lstStyle/>
-          <a:p>
-            <a:pPr algn="l">
-              <a:spcAft>
-                <a:spcPts val="0"/>
-              </a:spcAft>
-              <a:defRPr sz="1800" b="1">
-                <a:solidFill>
-                  <a:srgbClr val="225B9B"/>
-                </a:solidFill>
-                <a:latin typeface="Noto Sans CJK KR"/>
-              </a:defRPr>
-            </a:pPr>
-            <a:r>
-              <a:t>왜 하는가</a:t>
-            </a:r>
-          </a:p>
-        </p:txBody>
-      </p:sp>
-      <p:sp>
-        <p:nvSpPr>
-          <p:cNvPr id="8" name="TextBox 7"/>
-          <p:cNvSpPr txBox="1"/>
-          <p:nvPr/>
-        </p:nvSpPr>
-        <p:spPr>
-          <a:xfrm>
-            <a:off x="676656" y="2103120"/>
-            <a:ext cx="10789920" cy="512064"/>
-          </a:xfrm>
-          <a:prstGeom prst="rect">
-            <a:avLst/>
-          </a:prstGeom>
-          <a:noFill/>
-        </p:spPr>
-        <p:txBody>
-          <a:bodyPr wrap="square" lIns="73152" rIns="73152" tIns="36576" bIns="36576">
-            <a:spAutoFit/>
-          </a:bodyPr>
-          <a:lstStyle/>
-          <a:p>
-            <a:pPr algn="l">
-              <a:spcAft>
-                <a:spcPts val="0"/>
-              </a:spcAft>
-              <a:defRPr sz="2000" b="0">
-                <a:solidFill>
-                  <a:srgbClr val="122C4E"/>
-                </a:solidFill>
-                <a:latin typeface="Noto Sans CJK KR"/>
-              </a:defRPr>
-            </a:pPr>
-            <a:r>
-              <a:t>M05 단일 URDF의 반복 바퀴 구조를 macro/property로 바꾸는 첫 단계다.</a:t>
-            </a:r>
-          </a:p>
-        </p:txBody>
-      </p:sp>
-      <p:sp>
-        <p:nvSpPr>
-          <p:cNvPr id="9" name="Rounded Rectangle 8"/>
+              <a:t>현재 단계 파일 역할    |    현재 폴더 ~/ros2_curri/agv_ws    |    현재 터미널</a:t>
+            </a:r>
+          </a:p>
+        </p:txBody>
+      </p:sp>
+      <p:sp>
+        <p:nvSpPr>
+          <p:cNvPr id="7" name="Rounded Rectangle 6"/>
           <p:cNvSpPr/>
           <p:nvPr/>
         </p:nvSpPr>
         <p:spPr>
           <a:xfrm>
-            <a:off x="676656" y="2871216"/>
-            <a:ext cx="10835640" cy="2331720"/>
+            <a:off x="640080" y="1627632"/>
+            <a:ext cx="10972800" cy="2048256"/>
           </a:xfrm>
           <a:prstGeom prst="roundRect">
             <a:avLst/>
           </a:prstGeom>
           <a:solidFill>
-            <a:srgbClr val="1D232D"/>
+            <a:srgbClr val="F4F7FB"/>
           </a:solidFill>
           <a:ln>
             <a:solidFill>
-              <a:srgbClr val="1D232D"/>
+              <a:srgbClr val="CCDBEB"/>
             </a:solidFill>
           </a:ln>
         </p:spPr>
@@ -12554,40 +13910,23 @@
           </a:fontRef>
         </p:style>
         <p:txBody>
-          <a:bodyPr rtlCol="0" anchor="ctr" wrap="square" lIns="73152" rIns="73152" tIns="36576" bIns="36576"/>
-          <a:lstStyle/>
-          <a:p>
-            <a:pPr algn="l">
-              <a:spcAft>
-                <a:spcPts val="0"/>
-              </a:spcAft>
-              <a:defRPr sz="1600" b="0">
-                <a:solidFill>
-                  <a:srgbClr val="FFFFFF"/>
-                </a:solidFill>
-                <a:latin typeface="DejaVu Sans Mono"/>
-              </a:defRPr>
-            </a:pPr>
-            <a:r>
-              <a:t>cd ~/ros2_curri/agv_ws</a:t>
-            </a:r>
-            <a:br/>
-            <a:r>
-              <a:t>xacro src/agv_description/curriculum_stages/M06/agv.urdf.xacro &gt; /tmp/agv_from_xacro.urdf</a:t>
-            </a:r>
-          </a:p>
-        </p:txBody>
-      </p:sp>
-      <p:sp>
-        <p:nvSpPr>
-          <p:cNvPr id="10" name="TextBox 9"/>
+          <a:bodyPr rtlCol="0" anchor="ctr"/>
+          <a:lstStyle/>
+          <a:p>
+            <a:pPr algn="ctr"/>
+          </a:p>
+        </p:txBody>
+      </p:sp>
+      <p:sp>
+        <p:nvSpPr>
+          <p:cNvPr id="8" name="TextBox 7"/>
           <p:cNvSpPr txBox="1"/>
           <p:nvPr/>
         </p:nvSpPr>
         <p:spPr>
           <a:xfrm>
-            <a:off x="768096" y="5468112"/>
-            <a:ext cx="1143000" cy="256032"/>
+            <a:off x="850392" y="1764792"/>
+            <a:ext cx="10424160" cy="256032"/>
           </a:xfrm>
           <a:prstGeom prst="rect">
             <a:avLst/>
@@ -12604,29 +13943,29 @@
               <a:spcAft>
                 <a:spcPts val="0"/>
               </a:spcAft>
-              <a:defRPr sz="1800" b="1">
-                <a:solidFill>
-                  <a:srgbClr val="2A8B5A"/>
-                </a:solidFill>
-                <a:latin typeface="Noto Sans CJK KR"/>
-              </a:defRPr>
-            </a:pPr>
-            <a:r>
-              <a:t>확인</a:t>
-            </a:r>
-          </a:p>
-        </p:txBody>
-      </p:sp>
-      <p:sp>
-        <p:nvSpPr>
-          <p:cNvPr id="11" name="TextBox 10"/>
+              <a:defRPr sz="1300" b="1">
+                <a:solidFill>
+                  <a:srgbClr val="225B9B"/>
+                </a:solidFill>
+                <a:latin typeface="DejaVu Sans Mono"/>
+              </a:defRPr>
+            </a:pPr>
+            <a:r>
+              <a:t>~/ros2_curri/agv_ws/src/agv_description/curriculum_stages/M06/agv.urdf.xacro</a:t>
+            </a:r>
+          </a:p>
+        </p:txBody>
+      </p:sp>
+      <p:sp>
+        <p:nvSpPr>
+          <p:cNvPr id="9" name="TextBox 8"/>
           <p:cNvSpPr txBox="1"/>
           <p:nvPr/>
         </p:nvSpPr>
         <p:spPr>
           <a:xfrm>
-            <a:off x="768096" y="5742432"/>
-            <a:ext cx="10561320" cy="347472"/>
+            <a:off x="868680" y="2130552"/>
+            <a:ext cx="1234440" cy="228600"/>
           </a:xfrm>
           <a:prstGeom prst="rect">
             <a:avLst/>
@@ -12643,7 +13982,46 @@
               <a:spcAft>
                 <a:spcPts val="0"/>
               </a:spcAft>
-              <a:defRPr sz="1800" b="0">
+              <a:defRPr sz="1500" b="1">
+                <a:solidFill>
+                  <a:srgbClr val="2A8B5A"/>
+                </a:solidFill>
+                <a:latin typeface="Noto Sans CJK KR"/>
+              </a:defRPr>
+            </a:pPr>
+            <a:r>
+              <a:t>만드는 것</a:t>
+            </a:r>
+          </a:p>
+        </p:txBody>
+      </p:sp>
+      <p:sp>
+        <p:nvSpPr>
+          <p:cNvPr id="10" name="TextBox 9"/>
+          <p:cNvSpPr txBox="1"/>
+          <p:nvPr/>
+        </p:nvSpPr>
+        <p:spPr>
+          <a:xfrm>
+            <a:off x="1975104" y="2112264"/>
+            <a:ext cx="9189720" cy="274320"/>
+          </a:xfrm>
+          <a:prstGeom prst="rect">
+            <a:avLst/>
+          </a:prstGeom>
+          <a:noFill/>
+        </p:spPr>
+        <p:txBody>
+          <a:bodyPr wrap="square" lIns="73152" rIns="73152" tIns="36576" bIns="36576">
+            <a:spAutoFit/>
+          </a:bodyPr>
+          <a:lstStyle/>
+          <a:p>
+            <a:pPr algn="l">
+              <a:spcAft>
+                <a:spcPts val="0"/>
+              </a:spcAft>
+              <a:defRPr sz="1500" b="0">
                 <a:solidFill>
                   <a:srgbClr val="122C4E"/>
                 </a:solidFill>
@@ -12651,7 +14029,167 @@
               </a:defRPr>
             </a:pPr>
             <a:r>
-              <a:t>명령의 출력에서 topic·frame·파일 이름 또는 성공 메시지를 찾으면 이 단계가 완료됩니다.</a:t>
+              <a:t>반복되는 좌·우 바퀴를 property와 macro 하나로 생성하는 재사용 가능한 AGV 설명</a:t>
+            </a:r>
+          </a:p>
+        </p:txBody>
+      </p:sp>
+      <p:sp>
+        <p:nvSpPr>
+          <p:cNvPr id="11" name="TextBox 10"/>
+          <p:cNvSpPr txBox="1"/>
+          <p:nvPr/>
+        </p:nvSpPr>
+        <p:spPr>
+          <a:xfrm>
+            <a:off x="868680" y="2505456"/>
+            <a:ext cx="1234440" cy="228600"/>
+          </a:xfrm>
+          <a:prstGeom prst="rect">
+            <a:avLst/>
+          </a:prstGeom>
+          <a:noFill/>
+        </p:spPr>
+        <p:txBody>
+          <a:bodyPr wrap="square" lIns="73152" rIns="73152" tIns="36576" bIns="36576">
+            <a:spAutoFit/>
+          </a:bodyPr>
+          <a:lstStyle/>
+          <a:p>
+            <a:pPr algn="l">
+              <a:spcAft>
+                <a:spcPts val="0"/>
+              </a:spcAft>
+              <a:defRPr sz="1500" b="1">
+                <a:solidFill>
+                  <a:srgbClr val="DB7E22"/>
+                </a:solidFill>
+                <a:latin typeface="Noto Sans CJK KR"/>
+              </a:defRPr>
+            </a:pPr>
+            <a:r>
+              <a:t>코드 읽기</a:t>
+            </a:r>
+          </a:p>
+        </p:txBody>
+      </p:sp>
+      <p:sp>
+        <p:nvSpPr>
+          <p:cNvPr id="12" name="TextBox 11"/>
+          <p:cNvSpPr txBox="1"/>
+          <p:nvPr/>
+        </p:nvSpPr>
+        <p:spPr>
+          <a:xfrm>
+            <a:off x="1975104" y="2487168"/>
+            <a:ext cx="9189720" cy="301752"/>
+          </a:xfrm>
+          <a:prstGeom prst="rect">
+            <a:avLst/>
+          </a:prstGeom>
+          <a:noFill/>
+        </p:spPr>
+        <p:txBody>
+          <a:bodyPr wrap="square" lIns="73152" rIns="73152" tIns="36576" bIns="36576">
+            <a:spAutoFit/>
+          </a:bodyPr>
+          <a:lstStyle/>
+          <a:p>
+            <a:pPr algn="l">
+              <a:spcAft>
+                <a:spcPts val="0"/>
+              </a:spcAft>
+              <a:defRPr sz="1400" b="0">
+                <a:solidFill>
+                  <a:srgbClr val="122C4E"/>
+                </a:solidFill>
+                <a:latin typeface="Noto Sans CJK KR"/>
+              </a:defRPr>
+            </a:pPr>
+            <a:r>
+              <a:t>property → macro 정의 → macro 호출 순서로 읽고, wheel_radius 한 값만 바꾼다.</a:t>
+            </a:r>
+          </a:p>
+        </p:txBody>
+      </p:sp>
+      <p:sp>
+        <p:nvSpPr>
+          <p:cNvPr id="13" name="TextBox 12"/>
+          <p:cNvSpPr txBox="1"/>
+          <p:nvPr/>
+        </p:nvSpPr>
+        <p:spPr>
+          <a:xfrm>
+            <a:off x="868680" y="2889504"/>
+            <a:ext cx="1234440" cy="228600"/>
+          </a:xfrm>
+          <a:prstGeom prst="rect">
+            <a:avLst/>
+          </a:prstGeom>
+          <a:noFill/>
+        </p:spPr>
+        <p:txBody>
+          <a:bodyPr wrap="square" lIns="73152" rIns="73152" tIns="36576" bIns="36576">
+            <a:spAutoFit/>
+          </a:bodyPr>
+          <a:lstStyle/>
+          <a:p>
+            <a:pPr algn="l">
+              <a:spcAft>
+                <a:spcPts val="0"/>
+              </a:spcAft>
+              <a:defRPr sz="1500" b="1">
+                <a:solidFill>
+                  <a:srgbClr val="225B9B"/>
+                </a:solidFill>
+                <a:latin typeface="Noto Sans CJK KR"/>
+              </a:defRPr>
+            </a:pPr>
+            <a:r>
+              <a:t>사용/확인</a:t>
+            </a:r>
+          </a:p>
+        </p:txBody>
+      </p:sp>
+      <p:sp>
+        <p:nvSpPr>
+          <p:cNvPr id="14" name="TextBox 13"/>
+          <p:cNvSpPr txBox="1"/>
+          <p:nvPr/>
+        </p:nvSpPr>
+        <p:spPr>
+          <a:xfrm>
+            <a:off x="1975104" y="2871216"/>
+            <a:ext cx="9189720" cy="512064"/>
+          </a:xfrm>
+          <a:prstGeom prst="rect">
+            <a:avLst/>
+          </a:prstGeom>
+          <a:noFill/>
+        </p:spPr>
+        <p:txBody>
+          <a:bodyPr wrap="square" lIns="73152" rIns="73152" tIns="36576" bIns="36576">
+            <a:spAutoFit/>
+          </a:bodyPr>
+          <a:lstStyle/>
+          <a:p>
+            <a:pPr algn="l">
+              <a:spcAft>
+                <a:spcPts val="0"/>
+              </a:spcAft>
+              <a:defRPr sz="1300" b="0">
+                <a:solidFill>
+                  <a:srgbClr val="122C4E"/>
+                </a:solidFill>
+                <a:latin typeface="Noto Sans CJK KR"/>
+              </a:defRPr>
+            </a:pPr>
+            <a:r>
+              <a:t>사용: xacro로 URDF를 만든 뒤 check_urdf를 실행한다.</a:t>
+            </a:r>
+            <a:br/>
+            <a:r>
+              <a:t>화면/출력: 생성 URDF의 left/right wheel과 같은 반지름</a:t>
             </a:r>
           </a:p>
         </p:txBody>
@@ -12708,7 +14246,7 @@
               </a:defRPr>
             </a:pPr>
             <a:r>
-              <a:t>property 변경을 검증한다</a:t>
+              <a:t>코드를 ‘만드는 것 → 표시할 줄 → 바꾼 결과’로 읽는다</a:t>
             </a:r>
           </a:p>
         </p:txBody>
@@ -12747,7 +14285,7 @@
               </a:defRPr>
             </a:pPr>
             <a:r>
-              <a:t>한 장에는 한 행동만 수행합니다.</a:t>
+              <a:t>PDF 예시처럼 화면을 보기 전에 코드의 역할과 관찰 지점을 한 번 짚고 갑니다.</a:t>
             </a:r>
           </a:p>
         </p:txBody>
@@ -12883,109 +14421,31 @@
               </a:defRPr>
             </a:pPr>
             <a:r>
-              <a:t>현재 단계 2/2    |    현재 폴더 ~/ros2_curri/agv_ws    |    현재 터미널</a:t>
-            </a:r>
-          </a:p>
-        </p:txBody>
-      </p:sp>
-      <p:sp>
-        <p:nvSpPr>
-          <p:cNvPr id="7" name="TextBox 6"/>
-          <p:cNvSpPr txBox="1"/>
-          <p:nvPr/>
-        </p:nvSpPr>
-        <p:spPr>
-          <a:xfrm>
-            <a:off x="676656" y="1764792"/>
-            <a:ext cx="1828800" cy="347472"/>
-          </a:xfrm>
-          <a:prstGeom prst="rect">
-            <a:avLst/>
-          </a:prstGeom>
-          <a:noFill/>
-        </p:spPr>
-        <p:txBody>
-          <a:bodyPr wrap="square" lIns="73152" rIns="73152" tIns="36576" bIns="36576">
-            <a:spAutoFit/>
-          </a:bodyPr>
-          <a:lstStyle/>
-          <a:p>
-            <a:pPr algn="l">
-              <a:spcAft>
-                <a:spcPts val="0"/>
-              </a:spcAft>
-              <a:defRPr sz="1800" b="1">
-                <a:solidFill>
-                  <a:srgbClr val="225B9B"/>
-                </a:solidFill>
-                <a:latin typeface="Noto Sans CJK KR"/>
-              </a:defRPr>
-            </a:pPr>
-            <a:r>
-              <a:t>왜 하는가</a:t>
-            </a:r>
-          </a:p>
-        </p:txBody>
-      </p:sp>
-      <p:sp>
-        <p:nvSpPr>
-          <p:cNvPr id="8" name="TextBox 7"/>
-          <p:cNvSpPr txBox="1"/>
-          <p:nvPr/>
-        </p:nvSpPr>
-        <p:spPr>
-          <a:xfrm>
-            <a:off x="676656" y="2103120"/>
-            <a:ext cx="10789920" cy="512064"/>
-          </a:xfrm>
-          <a:prstGeom prst="rect">
-            <a:avLst/>
-          </a:prstGeom>
-          <a:noFill/>
-        </p:spPr>
-        <p:txBody>
-          <a:bodyPr wrap="square" lIns="73152" rIns="73152" tIns="36576" bIns="36576">
-            <a:spAutoFit/>
-          </a:bodyPr>
-          <a:lstStyle/>
-          <a:p>
-            <a:pPr algn="l">
-              <a:spcAft>
-                <a:spcPts val="0"/>
-              </a:spcAft>
-              <a:defRPr sz="2000" b="0">
-                <a:solidFill>
-                  <a:srgbClr val="122C4E"/>
-                </a:solidFill>
-                <a:latin typeface="Noto Sans CJK KR"/>
-              </a:defRPr>
-            </a:pPr>
-            <a:r>
-              <a:t>하나의 wheel_radius가 좌우 바퀴에 함께 적용되어야 한다.</a:t>
-            </a:r>
-          </a:p>
-        </p:txBody>
-      </p:sp>
-      <p:sp>
-        <p:nvSpPr>
-          <p:cNvPr id="9" name="Rounded Rectangle 8"/>
+              <a:t>현재 단계 코드 해설    |    현재 폴더 ~/ros2_curri/agv_ws    |    현재 터미널</a:t>
+            </a:r>
+          </a:p>
+        </p:txBody>
+      </p:sp>
+      <p:sp>
+        <p:nvSpPr>
+          <p:cNvPr id="7" name="Rounded Rectangle 6"/>
           <p:cNvSpPr/>
           <p:nvPr/>
         </p:nvSpPr>
         <p:spPr>
           <a:xfrm>
-            <a:off x="676656" y="2871216"/>
-            <a:ext cx="10835640" cy="2331720"/>
+            <a:off x="658368" y="1664208"/>
+            <a:ext cx="5321808" cy="1764792"/>
           </a:xfrm>
           <a:prstGeom prst="roundRect">
             <a:avLst/>
           </a:prstGeom>
           <a:solidFill>
-            <a:srgbClr val="1D232D"/>
+            <a:srgbClr val="F4F7FB"/>
           </a:solidFill>
           <a:ln>
             <a:solidFill>
-              <a:srgbClr val="1D232D"/>
+              <a:srgbClr val="2A8B5A"/>
             </a:solidFill>
           </a:ln>
         </p:spPr>
@@ -13004,40 +14464,23 @@
           </a:fontRef>
         </p:style>
         <p:txBody>
-          <a:bodyPr rtlCol="0" anchor="ctr" wrap="square" lIns="73152" rIns="73152" tIns="36576" bIns="36576"/>
-          <a:lstStyle/>
-          <a:p>
-            <a:pPr algn="l">
-              <a:spcAft>
-                <a:spcPts val="0"/>
-              </a:spcAft>
-              <a:defRPr sz="1600" b="0">
-                <a:solidFill>
-                  <a:srgbClr val="FFFFFF"/>
-                </a:solidFill>
-                <a:latin typeface="DejaVu Sans Mono"/>
-              </a:defRPr>
-            </a:pPr>
-            <a:r>
-              <a:t>check_urdf /tmp/agv_from_xacro.urdf</a:t>
-            </a:r>
-            <a:br/>
-            <a:r>
-              <a:t># wheel_radius 값을 바꾼 뒤 같은 두 명령을 다시 실행</a:t>
-            </a:r>
-          </a:p>
-        </p:txBody>
-      </p:sp>
-      <p:sp>
-        <p:nvSpPr>
-          <p:cNvPr id="10" name="TextBox 9"/>
+          <a:bodyPr rtlCol="0" anchor="ctr"/>
+          <a:lstStyle/>
+          <a:p>
+            <a:pPr algn="ctr"/>
+          </a:p>
+        </p:txBody>
+      </p:sp>
+      <p:sp>
+        <p:nvSpPr>
+          <p:cNvPr id="8" name="TextBox 7"/>
           <p:cNvSpPr txBox="1"/>
           <p:nvPr/>
         </p:nvSpPr>
         <p:spPr>
           <a:xfrm>
-            <a:off x="768096" y="5468112"/>
-            <a:ext cx="1143000" cy="256032"/>
+            <a:off x="859536" y="1828800"/>
+            <a:ext cx="4892040" cy="265176"/>
           </a:xfrm>
           <a:prstGeom prst="rect">
             <a:avLst/>
@@ -13054,7 +14497,7 @@
               <a:spcAft>
                 <a:spcPts val="0"/>
               </a:spcAft>
-              <a:defRPr sz="1800" b="1">
+              <a:defRPr sz="1700" b="1">
                 <a:solidFill>
                   <a:srgbClr val="2A8B5A"/>
                 </a:solidFill>
@@ -13062,21 +14505,21 @@
               </a:defRPr>
             </a:pPr>
             <a:r>
-              <a:t>확인</a:t>
-            </a:r>
-          </a:p>
-        </p:txBody>
-      </p:sp>
-      <p:sp>
-        <p:nvSpPr>
-          <p:cNvPr id="11" name="TextBox 10"/>
+              <a:t>1. 이 파일이 만드는 것</a:t>
+            </a:r>
+          </a:p>
+        </p:txBody>
+      </p:sp>
+      <p:sp>
+        <p:nvSpPr>
+          <p:cNvPr id="9" name="TextBox 8"/>
           <p:cNvSpPr txBox="1"/>
           <p:nvPr/>
         </p:nvSpPr>
         <p:spPr>
           <a:xfrm>
-            <a:off x="768096" y="5742432"/>
-            <a:ext cx="10561320" cy="347472"/>
+            <a:off x="859536" y="2240280"/>
+            <a:ext cx="4846320" cy="941832"/>
           </a:xfrm>
           <a:prstGeom prst="rect">
             <a:avLst/>
@@ -13093,7 +14536,7 @@
               <a:spcAft>
                 <a:spcPts val="0"/>
               </a:spcAft>
-              <a:defRPr sz="1800" b="0">
+              <a:defRPr sz="1600" b="0">
                 <a:solidFill>
                   <a:srgbClr val="122C4E"/>
                 </a:solidFill>
@@ -13101,7 +14544,415 @@
               </a:defRPr>
             </a:pPr>
             <a:r>
-              <a:t>명령의 출력에서 topic·frame·파일 이름 또는 성공 메시지를 찾으면 이 단계가 완료됩니다.</a:t>
+              <a:t>Xacro는 같은 바퀴 코드를 복사하지 않고 ‘값 한 번, 생성 여러 번’으로 바꾸는 도구입니다.</a:t>
+            </a:r>
+          </a:p>
+        </p:txBody>
+      </p:sp>
+      <p:sp>
+        <p:nvSpPr>
+          <p:cNvPr id="10" name="Rounded Rectangle 9"/>
+          <p:cNvSpPr/>
+          <p:nvPr/>
+        </p:nvSpPr>
+        <p:spPr>
+          <a:xfrm>
+            <a:off x="6217920" y="1664208"/>
+            <a:ext cx="5321808" cy="1764792"/>
+          </a:xfrm>
+          <a:prstGeom prst="roundRect">
+            <a:avLst/>
+          </a:prstGeom>
+          <a:solidFill>
+            <a:srgbClr val="F4F7FB"/>
+          </a:solidFill>
+          <a:ln>
+            <a:solidFill>
+              <a:srgbClr val="225B9B"/>
+            </a:solidFill>
+          </a:ln>
+        </p:spPr>
+        <p:style>
+          <a:lnRef idx="1">
+            <a:schemeClr val="accent1"/>
+          </a:lnRef>
+          <a:fillRef idx="3">
+            <a:schemeClr val="accent1"/>
+          </a:fillRef>
+          <a:effectRef idx="2">
+            <a:schemeClr val="accent1"/>
+          </a:effectRef>
+          <a:fontRef idx="minor">
+            <a:schemeClr val="lt1"/>
+          </a:fontRef>
+        </p:style>
+        <p:txBody>
+          <a:bodyPr rtlCol="0" anchor="ctr"/>
+          <a:lstStyle/>
+          <a:p>
+            <a:pPr algn="ctr"/>
+          </a:p>
+        </p:txBody>
+      </p:sp>
+      <p:sp>
+        <p:nvSpPr>
+          <p:cNvPr id="11" name="TextBox 10"/>
+          <p:cNvSpPr txBox="1"/>
+          <p:nvPr/>
+        </p:nvSpPr>
+        <p:spPr>
+          <a:xfrm>
+            <a:off x="6419088" y="1828800"/>
+            <a:ext cx="4892040" cy="265176"/>
+          </a:xfrm>
+          <a:prstGeom prst="rect">
+            <a:avLst/>
+          </a:prstGeom>
+          <a:noFill/>
+        </p:spPr>
+        <p:txBody>
+          <a:bodyPr wrap="square" lIns="73152" rIns="73152" tIns="36576" bIns="36576">
+            <a:spAutoFit/>
+          </a:bodyPr>
+          <a:lstStyle/>
+          <a:p>
+            <a:pPr algn="l">
+              <a:spcAft>
+                <a:spcPts val="0"/>
+              </a:spcAft>
+              <a:defRPr sz="1700" b="1">
+                <a:solidFill>
+                  <a:srgbClr val="225B9B"/>
+                </a:solidFill>
+                <a:latin typeface="Noto Sans CJK KR"/>
+              </a:defRPr>
+            </a:pPr>
+            <a:r>
+              <a:t>2. 먼저 찾을 코드/태그</a:t>
+            </a:r>
+          </a:p>
+        </p:txBody>
+      </p:sp>
+      <p:sp>
+        <p:nvSpPr>
+          <p:cNvPr id="12" name="TextBox 11"/>
+          <p:cNvSpPr txBox="1"/>
+          <p:nvPr/>
+        </p:nvSpPr>
+        <p:spPr>
+          <a:xfrm>
+            <a:off x="6419088" y="2240280"/>
+            <a:ext cx="4846320" cy="941832"/>
+          </a:xfrm>
+          <a:prstGeom prst="rect">
+            <a:avLst/>
+          </a:prstGeom>
+          <a:noFill/>
+        </p:spPr>
+        <p:txBody>
+          <a:bodyPr wrap="square" lIns="73152" rIns="73152" tIns="36576" bIns="36576">
+            <a:spAutoFit/>
+          </a:bodyPr>
+          <a:lstStyle/>
+          <a:p>
+            <a:pPr algn="l">
+              <a:spcAft>
+                <a:spcPts val="0"/>
+              </a:spcAft>
+              <a:defRPr sz="1600" b="0">
+                <a:solidFill>
+                  <a:srgbClr val="122C4E"/>
+                </a:solidFill>
+                <a:latin typeface="Noto Sans CJK KR"/>
+              </a:defRPr>
+            </a:pPr>
+            <a:r>
+              <a:t>&lt;xacro:property&gt;, &lt;xacro:macro&gt;, &lt;xacro:wheel ...&gt;</a:t>
+            </a:r>
+          </a:p>
+        </p:txBody>
+      </p:sp>
+      <p:sp>
+        <p:nvSpPr>
+          <p:cNvPr id="13" name="Rounded Rectangle 12"/>
+          <p:cNvSpPr/>
+          <p:nvPr/>
+        </p:nvSpPr>
+        <p:spPr>
+          <a:xfrm>
+            <a:off x="658368" y="3813048"/>
+            <a:ext cx="5321808" cy="1764792"/>
+          </a:xfrm>
+          <a:prstGeom prst="roundRect">
+            <a:avLst/>
+          </a:prstGeom>
+          <a:solidFill>
+            <a:srgbClr val="F4F7FB"/>
+          </a:solidFill>
+          <a:ln>
+            <a:solidFill>
+              <a:srgbClr val="DB7E22"/>
+            </a:solidFill>
+          </a:ln>
+        </p:spPr>
+        <p:style>
+          <a:lnRef idx="1">
+            <a:schemeClr val="accent1"/>
+          </a:lnRef>
+          <a:fillRef idx="3">
+            <a:schemeClr val="accent1"/>
+          </a:fillRef>
+          <a:effectRef idx="2">
+            <a:schemeClr val="accent1"/>
+          </a:effectRef>
+          <a:fontRef idx="minor">
+            <a:schemeClr val="lt1"/>
+          </a:fontRef>
+        </p:style>
+        <p:txBody>
+          <a:bodyPr rtlCol="0" anchor="ctr"/>
+          <a:lstStyle/>
+          <a:p>
+            <a:pPr algn="ctr"/>
+          </a:p>
+        </p:txBody>
+      </p:sp>
+      <p:sp>
+        <p:nvSpPr>
+          <p:cNvPr id="14" name="TextBox 13"/>
+          <p:cNvSpPr txBox="1"/>
+          <p:nvPr/>
+        </p:nvSpPr>
+        <p:spPr>
+          <a:xfrm>
+            <a:off x="859536" y="3977639"/>
+            <a:ext cx="4892040" cy="265176"/>
+          </a:xfrm>
+          <a:prstGeom prst="rect">
+            <a:avLst/>
+          </a:prstGeom>
+          <a:noFill/>
+        </p:spPr>
+        <p:txBody>
+          <a:bodyPr wrap="square" lIns="73152" rIns="73152" tIns="36576" bIns="36576">
+            <a:spAutoFit/>
+          </a:bodyPr>
+          <a:lstStyle/>
+          <a:p>
+            <a:pPr algn="l">
+              <a:spcAft>
+                <a:spcPts val="0"/>
+              </a:spcAft>
+              <a:defRPr sz="1700" b="1">
+                <a:solidFill>
+                  <a:srgbClr val="DB7E22"/>
+                </a:solidFill>
+                <a:latin typeface="Noto Sans CJK KR"/>
+              </a:defRPr>
+            </a:pPr>
+            <a:r>
+              <a:t>3. 값을 바꾸면</a:t>
+            </a:r>
+          </a:p>
+        </p:txBody>
+      </p:sp>
+      <p:sp>
+        <p:nvSpPr>
+          <p:cNvPr id="15" name="TextBox 14"/>
+          <p:cNvSpPr txBox="1"/>
+          <p:nvPr/>
+        </p:nvSpPr>
+        <p:spPr>
+          <a:xfrm>
+            <a:off x="859536" y="4389120"/>
+            <a:ext cx="4846320" cy="941832"/>
+          </a:xfrm>
+          <a:prstGeom prst="rect">
+            <a:avLst/>
+          </a:prstGeom>
+          <a:noFill/>
+        </p:spPr>
+        <p:txBody>
+          <a:bodyPr wrap="square" lIns="73152" rIns="73152" tIns="36576" bIns="36576">
+            <a:spAutoFit/>
+          </a:bodyPr>
+          <a:lstStyle/>
+          <a:p>
+            <a:pPr algn="l">
+              <a:spcAft>
+                <a:spcPts val="0"/>
+              </a:spcAft>
+              <a:defRPr sz="1600" b="0">
+                <a:solidFill>
+                  <a:srgbClr val="122C4E"/>
+                </a:solidFill>
+                <a:latin typeface="Noto Sans CJK KR"/>
+              </a:defRPr>
+            </a:pPr>
+            <a:r>
+              <a:t>wheel_radius 값을 하나 바꾸면 좌우 macro 호출에 같은 값이 전달됩니다.</a:t>
+            </a:r>
+          </a:p>
+        </p:txBody>
+      </p:sp>
+      <p:sp>
+        <p:nvSpPr>
+          <p:cNvPr id="16" name="Rounded Rectangle 15"/>
+          <p:cNvSpPr/>
+          <p:nvPr/>
+        </p:nvSpPr>
+        <p:spPr>
+          <a:xfrm>
+            <a:off x="6217920" y="3813048"/>
+            <a:ext cx="5321808" cy="1764792"/>
+          </a:xfrm>
+          <a:prstGeom prst="roundRect">
+            <a:avLst/>
+          </a:prstGeom>
+          <a:solidFill>
+            <a:srgbClr val="F4F7FB"/>
+          </a:solidFill>
+          <a:ln>
+            <a:solidFill>
+              <a:srgbClr val="BE3B3B"/>
+            </a:solidFill>
+          </a:ln>
+        </p:spPr>
+        <p:style>
+          <a:lnRef idx="1">
+            <a:schemeClr val="accent1"/>
+          </a:lnRef>
+          <a:fillRef idx="3">
+            <a:schemeClr val="accent1"/>
+          </a:fillRef>
+          <a:effectRef idx="2">
+            <a:schemeClr val="accent1"/>
+          </a:effectRef>
+          <a:fontRef idx="minor">
+            <a:schemeClr val="lt1"/>
+          </a:fontRef>
+        </p:style>
+        <p:txBody>
+          <a:bodyPr rtlCol="0" anchor="ctr"/>
+          <a:lstStyle/>
+          <a:p>
+            <a:pPr algn="ctr"/>
+          </a:p>
+        </p:txBody>
+      </p:sp>
+      <p:sp>
+        <p:nvSpPr>
+          <p:cNvPr id="17" name="TextBox 16"/>
+          <p:cNvSpPr txBox="1"/>
+          <p:nvPr/>
+        </p:nvSpPr>
+        <p:spPr>
+          <a:xfrm>
+            <a:off x="6419088" y="3977639"/>
+            <a:ext cx="4892040" cy="265176"/>
+          </a:xfrm>
+          <a:prstGeom prst="rect">
+            <a:avLst/>
+          </a:prstGeom>
+          <a:noFill/>
+        </p:spPr>
+        <p:txBody>
+          <a:bodyPr wrap="square" lIns="73152" rIns="73152" tIns="36576" bIns="36576">
+            <a:spAutoFit/>
+          </a:bodyPr>
+          <a:lstStyle/>
+          <a:p>
+            <a:pPr algn="l">
+              <a:spcAft>
+                <a:spcPts val="0"/>
+              </a:spcAft>
+              <a:defRPr sz="1700" b="1">
+                <a:solidFill>
+                  <a:srgbClr val="BE3B3B"/>
+                </a:solidFill>
+                <a:latin typeface="Noto Sans CJK KR"/>
+              </a:defRPr>
+            </a:pPr>
+            <a:r>
+              <a:t>4. 실제로 보는 곳</a:t>
+            </a:r>
+          </a:p>
+        </p:txBody>
+      </p:sp>
+      <p:sp>
+        <p:nvSpPr>
+          <p:cNvPr id="18" name="TextBox 17"/>
+          <p:cNvSpPr txBox="1"/>
+          <p:nvPr/>
+        </p:nvSpPr>
+        <p:spPr>
+          <a:xfrm>
+            <a:off x="6419088" y="4389120"/>
+            <a:ext cx="4846320" cy="941832"/>
+          </a:xfrm>
+          <a:prstGeom prst="rect">
+            <a:avLst/>
+          </a:prstGeom>
+          <a:noFill/>
+        </p:spPr>
+        <p:txBody>
+          <a:bodyPr wrap="square" lIns="73152" rIns="73152" tIns="36576" bIns="36576">
+            <a:spAutoFit/>
+          </a:bodyPr>
+          <a:lstStyle/>
+          <a:p>
+            <a:pPr algn="l">
+              <a:spcAft>
+                <a:spcPts val="0"/>
+              </a:spcAft>
+              <a:defRPr sz="1600" b="0">
+                <a:solidFill>
+                  <a:srgbClr val="122C4E"/>
+                </a:solidFill>
+                <a:latin typeface="Noto Sans CJK KR"/>
+              </a:defRPr>
+            </a:pPr>
+            <a:r>
+              <a:t>xacro → /tmp/agv.urdf → check_urdf 순서가 변환과 검증을 분리합니다.</a:t>
+            </a:r>
+          </a:p>
+        </p:txBody>
+      </p:sp>
+      <p:sp>
+        <p:nvSpPr>
+          <p:cNvPr id="19" name="TextBox 18"/>
+          <p:cNvSpPr txBox="1"/>
+          <p:nvPr/>
+        </p:nvSpPr>
+        <p:spPr>
+          <a:xfrm>
+            <a:off x="777240" y="6172200"/>
+            <a:ext cx="10607040" cy="201168"/>
+          </a:xfrm>
+          <a:prstGeom prst="rect">
+            <a:avLst/>
+          </a:prstGeom>
+          <a:noFill/>
+        </p:spPr>
+        <p:txBody>
+          <a:bodyPr wrap="square" lIns="73152" rIns="73152" tIns="36576" bIns="36576">
+            <a:spAutoFit/>
+          </a:bodyPr>
+          <a:lstStyle/>
+          <a:p>
+            <a:pPr algn="ctr">
+              <a:spcAft>
+                <a:spcPts val="0"/>
+              </a:spcAft>
+              <a:defRPr sz="1200" b="1">
+                <a:solidFill>
+                  <a:srgbClr val="2A8B5A"/>
+                </a:solidFill>
+                <a:latin typeface="Noto Sans CJK KR"/>
+              </a:defRPr>
+            </a:pPr>
+            <a:r>
+              <a:t>다음 코드 슬라이드에서는 위의 태그/함수를 찾아 색으로 표시하며 한 줄씩 설명합니다.</a:t>
             </a:r>
           </a:p>
         </p:txBody>
@@ -13158,7 +15009,7 @@
               </a:defRPr>
             </a:pPr>
             <a:r>
-              <a:t>파일을 새로 만들고 저장한다 (1/5)</a:t>
+              <a:t>처음으로 Xacro macro를 만든다</a:t>
             </a:r>
           </a:p>
         </p:txBody>
@@ -13197,7 +15048,7 @@
               </a:defRPr>
             </a:pPr>
             <a:r>
-              <a:t>~/ros2_curri/agv_ws/src/agv_description/curriculum_stages/M06/agv.urdf.xacro</a:t>
+              <a:t>한 장에는 한 행동만 수행합니다.</a:t>
             </a:r>
           </a:p>
         </p:txBody>
@@ -13333,7 +15184,7 @@
               </a:defRPr>
             </a:pPr>
             <a:r>
-              <a:t>현재 단계 3/8    |    현재 폴더 ~/ros2_curri/agv_ws    |    현재 터미널</a:t>
+              <a:t>현재 단계 1/2    |    현재 폴더 ~/ros2_curri/agv_ws    |    현재 터미널</a:t>
             </a:r>
           </a:p>
         </p:txBody>
@@ -13346,8 +15197,8 @@
         </p:nvSpPr>
         <p:spPr>
           <a:xfrm>
-            <a:off x="658368" y="1627632"/>
-            <a:ext cx="10972800" cy="256032"/>
+            <a:off x="676656" y="1764792"/>
+            <a:ext cx="1828800" cy="347472"/>
           </a:xfrm>
           <a:prstGeom prst="rect">
             <a:avLst/>
@@ -13364,7 +15215,46 @@
               <a:spcAft>
                 <a:spcPts val="0"/>
               </a:spcAft>
-              <a:defRPr sz="1500" b="1">
+              <a:defRPr sz="1800" b="1">
+                <a:solidFill>
+                  <a:srgbClr val="225B9B"/>
+                </a:solidFill>
+                <a:latin typeface="Noto Sans CJK KR"/>
+              </a:defRPr>
+            </a:pPr>
+            <a:r>
+              <a:t>왜 하는가</a:t>
+            </a:r>
+          </a:p>
+        </p:txBody>
+      </p:sp>
+      <p:sp>
+        <p:nvSpPr>
+          <p:cNvPr id="8" name="TextBox 7"/>
+          <p:cNvSpPr txBox="1"/>
+          <p:nvPr/>
+        </p:nvSpPr>
+        <p:spPr>
+          <a:xfrm>
+            <a:off x="676656" y="2103120"/>
+            <a:ext cx="10789920" cy="512064"/>
+          </a:xfrm>
+          <a:prstGeom prst="rect">
+            <a:avLst/>
+          </a:prstGeom>
+          <a:noFill/>
+        </p:spPr>
+        <p:txBody>
+          <a:bodyPr wrap="square" lIns="73152" rIns="73152" tIns="36576" bIns="36576">
+            <a:spAutoFit/>
+          </a:bodyPr>
+          <a:lstStyle/>
+          <a:p>
+            <a:pPr algn="l">
+              <a:spcAft>
+                <a:spcPts val="0"/>
+              </a:spcAft>
+              <a:defRPr sz="2000" b="0">
                 <a:solidFill>
                   <a:srgbClr val="122C4E"/>
                 </a:solidFill>
@@ -13372,85 +15262,23 @@
               </a:defRPr>
             </a:pPr>
             <a:r>
-              <a:t>이번 단계: 파일의 전체 내용을 중간 생략 없이 작성합니다. 아래 줄 범위를 끝까지 입력하세요.</a:t>
-            </a:r>
-          </a:p>
-        </p:txBody>
-      </p:sp>
-      <p:sp>
-        <p:nvSpPr>
-          <p:cNvPr id="8" name="Rectangle 7"/>
+              <a:t>M05 단일 URDF의 반복 바퀴 구조를 macro/property로 바꾸는 첫 단계다.</a:t>
+            </a:r>
+          </a:p>
+        </p:txBody>
+      </p:sp>
+      <p:sp>
+        <p:nvSpPr>
+          <p:cNvPr id="9" name="Rounded Rectangle 8"/>
           <p:cNvSpPr/>
           <p:nvPr/>
         </p:nvSpPr>
         <p:spPr>
           <a:xfrm>
-            <a:off x="658368" y="1956816"/>
-            <a:ext cx="10972800" cy="603504"/>
-          </a:xfrm>
-          <a:prstGeom prst="rect">
-            <a:avLst/>
-          </a:prstGeom>
-          <a:solidFill>
-            <a:srgbClr val="F4F7FB"/>
-          </a:solidFill>
-          <a:ln>
-            <a:solidFill>
-              <a:srgbClr val="F4F7FB"/>
-            </a:solidFill>
-          </a:ln>
-        </p:spPr>
-        <p:style>
-          <a:lnRef idx="1">
-            <a:schemeClr val="accent1"/>
-          </a:lnRef>
-          <a:fillRef idx="3">
-            <a:schemeClr val="accent1"/>
-          </a:fillRef>
-          <a:effectRef idx="2">
-            <a:schemeClr val="accent1"/>
-          </a:effectRef>
-          <a:fontRef idx="minor">
-            <a:schemeClr val="lt1"/>
-          </a:fontRef>
-        </p:style>
-        <p:txBody>
-          <a:bodyPr rtlCol="0" anchor="ctr" wrap="square" lIns="73152" rIns="73152" tIns="36576" bIns="36576"/>
-          <a:lstStyle/>
-          <a:p>
-            <a:pPr algn="l">
-              <a:spcAft>
-                <a:spcPts val="0"/>
-              </a:spcAft>
-              <a:defRPr sz="1400" b="0">
-                <a:solidFill>
-                  <a:srgbClr val="122C4E"/>
-                </a:solidFill>
-                <a:latin typeface="DejaVu Sans Mono"/>
-              </a:defRPr>
-            </a:pPr>
-            <a:r>
-              <a:t>파일 생성: mkdir -p ~/ros2_curri/agv_ws/src/agv_description/curriculum_stages/M06</a:t>
-            </a:r>
-            <a:br/>
-            <a:r>
-              <a:t>파일 열기: nano ~/ros2_curri/agv_ws/src/agv_description/curriculum_stages/M06/agv.urdf.xacro</a:t>
-            </a:r>
-          </a:p>
-        </p:txBody>
-      </p:sp>
-      <p:sp>
-        <p:nvSpPr>
-          <p:cNvPr id="9" name="Rectangle 8"/>
-          <p:cNvSpPr/>
-          <p:nvPr/>
-        </p:nvSpPr>
-        <p:spPr>
-          <a:xfrm>
-            <a:off x="658368" y="2706624"/>
-            <a:ext cx="10972800" cy="3364992"/>
-          </a:xfrm>
-          <a:prstGeom prst="rect">
+            <a:off x="676656" y="2871216"/>
+            <a:ext cx="10835640" cy="2331720"/>
+          </a:xfrm>
+          <a:prstGeom prst="roundRect">
             <a:avLst/>
           </a:prstGeom>
           <a:solidFill>
@@ -13477,14 +15305,14 @@
           </a:fontRef>
         </p:style>
         <p:txBody>
-          <a:bodyPr rtlCol="0" anchor="ctr" wrap="square" lIns="164592" rIns="164592" tIns="109728" bIns="36576"/>
+          <a:bodyPr rtlCol="0" anchor="ctr" wrap="square" lIns="73152" rIns="73152" tIns="36576" bIns="36576"/>
           <a:lstStyle/>
           <a:p>
             <a:pPr algn="l">
               <a:spcAft>
                 <a:spcPts val="0"/>
               </a:spcAft>
-              <a:defRPr sz="1400" b="0">
+              <a:defRPr sz="1600" b="0">
                 <a:solidFill>
                   <a:srgbClr val="FFFFFF"/>
                 </a:solidFill>
@@ -13492,51 +15320,11 @@
               </a:defRPr>
             </a:pPr>
             <a:r>
-              <a:t>&lt;?xml version="1.0" ?&gt;</a:t>
+              <a:t>cd ~/ros2_curri/agv_ws</a:t>
             </a:r>
             <a:br/>
             <a:r>
-              <a:t>&lt;robot xmlns:xacro="http://www.ros.org/wiki/xacro" name="agv_m06"&gt;</a:t>
-            </a:r>
-            <a:br/>
-            <a:r>
-              <a:t>  </a:t>
-            </a:r>
-            <a:br/>
-            <a:r>
-              <a:t>  </a:t>
-            </a:r>
-            <a:br/>
-            <a:r>
-              <a:t>  &lt;xacro:property name="wheel_radius" value="0.08"/&gt;</a:t>
-            </a:r>
-            <a:br/>
-            <a:r>
-              <a:t>  </a:t>
-            </a:r>
-            <a:br/>
-            <a:r>
-              <a:t>  </a:t>
-            </a:r>
-            <a:br/>
-            <a:r>
-              <a:t>  &lt;xacro:property name="half_track" value="0.19"/&gt;</a:t>
-            </a:r>
-            <a:br/>
-            <a:r>
-              <a:t>  </a:t>
-            </a:r>
-            <a:br/>
-            <a:r>
-              <a:t>  </a:t>
-            </a:r>
-            <a:br/>
-            <a:r>
-              <a:t>  &lt;xacro:macro name="wheel" params="side y"&gt;</a:t>
-            </a:r>
-            <a:br/>
-            <a:r>
-              <a:t>    </a:t>
+              <a:t>xacro src/agv_description/curriculum_stages/M06/agv.urdf.xacro &gt; /tmp/agv_from_xacro.urdf</a:t>
             </a:r>
           </a:p>
         </p:txBody>
@@ -13549,8 +15337,8 @@
         </p:nvSpPr>
         <p:spPr>
           <a:xfrm>
-            <a:off x="749808" y="6181344"/>
-            <a:ext cx="10789920" cy="201168"/>
+            <a:off x="768096" y="5468112"/>
+            <a:ext cx="1143000" cy="256032"/>
           </a:xfrm>
           <a:prstGeom prst="rect">
             <a:avLst/>
@@ -13567,15 +15355,54 @@
               <a:spcAft>
                 <a:spcPts val="0"/>
               </a:spcAft>
-              <a:defRPr sz="1000" b="0">
-                <a:solidFill>
-                  <a:srgbClr val="5C6672"/>
-                </a:solidFill>
-                <a:latin typeface="Noto Sans CJK KR"/>
-              </a:defRPr>
-            </a:pPr>
-            <a:r>
-              <a:t>파일 전체 1/5 · 이 슬라이드 다음에 같은 파일의 나머지 줄이 이어집니다.</a:t>
+              <a:defRPr sz="1800" b="1">
+                <a:solidFill>
+                  <a:srgbClr val="2A8B5A"/>
+                </a:solidFill>
+                <a:latin typeface="Noto Sans CJK KR"/>
+              </a:defRPr>
+            </a:pPr>
+            <a:r>
+              <a:t>확인</a:t>
+            </a:r>
+          </a:p>
+        </p:txBody>
+      </p:sp>
+      <p:sp>
+        <p:nvSpPr>
+          <p:cNvPr id="11" name="TextBox 10"/>
+          <p:cNvSpPr txBox="1"/>
+          <p:nvPr/>
+        </p:nvSpPr>
+        <p:spPr>
+          <a:xfrm>
+            <a:off x="768096" y="5742432"/>
+            <a:ext cx="10561320" cy="347472"/>
+          </a:xfrm>
+          <a:prstGeom prst="rect">
+            <a:avLst/>
+          </a:prstGeom>
+          <a:noFill/>
+        </p:spPr>
+        <p:txBody>
+          <a:bodyPr wrap="square" lIns="73152" rIns="73152" tIns="36576" bIns="36576">
+            <a:spAutoFit/>
+          </a:bodyPr>
+          <a:lstStyle/>
+          <a:p>
+            <a:pPr algn="l">
+              <a:spcAft>
+                <a:spcPts val="0"/>
+              </a:spcAft>
+              <a:defRPr sz="1800" b="0">
+                <a:solidFill>
+                  <a:srgbClr val="122C4E"/>
+                </a:solidFill>
+                <a:latin typeface="Noto Sans CJK KR"/>
+              </a:defRPr>
+            </a:pPr>
+            <a:r>
+              <a:t>명령의 출력에서 topic·frame·파일 이름 또는 성공 메시지를 찾으면 이 단계가 완료됩니다.</a:t>
             </a:r>
           </a:p>
         </p:txBody>

--- a/blocks/B_robot_build/M06_xacro_modularization/M06_Xacro로_구조_모듈화.pptx
+++ b/blocks/B_robot_build/M06_xacro_modularization/M06_Xacro로_구조_모듈화.pptx
@@ -28,6 +28,9 @@
     <p:sldId id="276" r:id="rId28"/>
     <p:sldId id="277" r:id="rId29"/>
     <p:sldId id="278" r:id="rId30"/>
+    <p:sldId id="279" r:id="rId31"/>
+    <p:sldId id="280" r:id="rId32"/>
+    <p:sldId id="281" r:id="rId33"/>
   </p:sldIdLst>
   <p:sldSz cx="12191999" cy="6858000" type="screen4x3"/>
   <p:notesSz cx="6858000" cy="9144000"/>
@@ -614,22 +617,17 @@
           <a:lstStyle/>
           <a:p>
             <a:r>
-              <a:t>[설명] 하나의 wheel_radius가 좌우 바퀴에 함께 적용되어야 한다.</a:t>
-            </a:r>
-          </a:p>
-          <a:p>
-            <a:r>
-              <a:t>[실행] check_urdf /tmp/agv_from_xacro.urdf</a:t>
-            </a:r>
-          </a:p>
-          <a:p>
-            <a:r>
-              <a:t># wheel_radius 값을 바꾼 뒤 같은 두 명령을 다시 실행</a:t>
-            </a:r>
-          </a:p>
-          <a:p>
-            <a:r>
-              <a:t>[확인] 명령 출력에서 슬라이드의 확인 항목을 찾는다.</a:t>
+              <a:t>[설명] Xacro는 같은 바퀴 코드를 복사하지 않고 ‘값 한 번, 생성 여러 번’으로 바꾸는 도구입니다.</a:t>
+            </a:r>
+          </a:p>
+          <a:p>
+            <a:r>
+              <a:t>[실행] 슬라이드의 명령 또는 파일 작성 단계를 진행한다.</a:t>
+            </a:r>
+          </a:p>
+          <a:p>
+            <a:r>
+              <a:t>[확인] xacro → /tmp/agv.urdf → check_urdf 순서가 변환과 검증을 분리합니다.</a:t>
             </a:r>
           </a:p>
           <a:p>
@@ -709,17 +707,22 @@
           <a:lstStyle/>
           <a:p>
             <a:r>
-              <a:t>[설명] ~/ros2_curri/agv_ws/src/agv_description/curriculum_stages/M06/agv.urdf.xacro의 전체 파일을 1/5 구간으로 작성한다.</a:t>
-            </a:r>
-          </a:p>
-          <a:p>
-            <a:r>
-              <a:t>[실행] nano ~/ros2_curri/agv_ws/src/agv_description/curriculum_stages/M06/agv.urdf.xacro</a:t>
-            </a:r>
-          </a:p>
-          <a:p>
-            <a:r>
-              <a:t>[확인] 코드를 저장하고 다음 코드 슬라이드 또는 build 단계로 이동한다.</a:t>
+              <a:t>[설명] 반복되는 좌·우 바퀴를 property와 macro 하나로 생성하는 재사용 가능한 AGV 설명</a:t>
+            </a:r>
+          </a:p>
+          <a:p>
+            <a:r>
+              <a:t>[실행] mkdir -p ~/ros2_curri/my_agv_ws/src/agv_description/curriculum_stages/M06</a:t>
+            </a:r>
+          </a:p>
+          <a:p>
+            <a:r>
+              <a:t>nano ~/ros2_curri/my_agv_ws/src/agv_description/curriculum_stages/M06/agv.urdf.xacro</a:t>
+            </a:r>
+          </a:p>
+          <a:p>
+            <a:r>
+              <a:t>[확인] 빈 파일을 연 뒤 다음 코드 입력 슬라이드로 간다.</a:t>
             </a:r>
           </a:p>
           <a:p>
@@ -729,7 +732,7 @@
           </a:p>
           <a:p>
             <a:r>
-              <a:t>[오류] 들여쓰기·XML 태그·따옴표가 슬라이드와 정확히 같은지 확인한다.</a:t>
+              <a:t>[오류] 오류가 나면 현재 폴더, source, 파일 경로를 먼저 확인한다.</a:t>
             </a:r>
           </a:p>
         </p:txBody>
@@ -799,17 +802,17 @@
           <a:lstStyle/>
           <a:p>
             <a:r>
-              <a:t>[설명] ~/ros2_curri/agv_ws/src/agv_description/curriculum_stages/M06/agv.urdf.xacro의 전체 파일을 2/5 구간으로 작성한다.</a:t>
-            </a:r>
-          </a:p>
-          <a:p>
-            <a:r>
-              <a:t>[실행] nano ~/ros2_curri/agv_ws/src/agv_description/curriculum_stages/M06/agv.urdf.xacro</a:t>
-            </a:r>
-          </a:p>
-          <a:p>
-            <a:r>
-              <a:t>[확인] 코드를 저장하고 다음 코드 슬라이드 또는 build 단계로 이동한다.</a:t>
+              <a:t>[설명] ~/ros2_curri/my_agv_ws/src/agv_description/curriculum_stages/M06/agv.urdf.xacro의 1/5 구현 블록을 직접 입력한다.</a:t>
+            </a:r>
+          </a:p>
+          <a:p>
+            <a:r>
+              <a:t>[실행] nano ~/ros2_curri/my_agv_ws/src/agv_description/curriculum_stages/M06/agv.urdf.xacro</a:t>
+            </a:r>
+          </a:p>
+          <a:p>
+            <a:r>
+              <a:t>[확인] 저장 뒤 다음 구현 블록으로 이동한다.</a:t>
             </a:r>
           </a:p>
           <a:p>
@@ -889,17 +892,17 @@
           <a:lstStyle/>
           <a:p>
             <a:r>
-              <a:t>[설명] ~/ros2_curri/agv_ws/src/agv_description/curriculum_stages/M06/agv.urdf.xacro의 전체 파일을 3/5 구간으로 작성한다.</a:t>
-            </a:r>
-          </a:p>
-          <a:p>
-            <a:r>
-              <a:t>[실행] nano ~/ros2_curri/agv_ws/src/agv_description/curriculum_stages/M06/agv.urdf.xacro</a:t>
-            </a:r>
-          </a:p>
-          <a:p>
-            <a:r>
-              <a:t>[확인] 코드를 저장하고 다음 코드 슬라이드 또는 build 단계로 이동한다.</a:t>
+              <a:t>[설명] ~/ros2_curri/my_agv_ws/src/agv_description/curriculum_stages/M06/agv.urdf.xacro의 2/5 구현 블록을 직접 입력한다.</a:t>
+            </a:r>
+          </a:p>
+          <a:p>
+            <a:r>
+              <a:t>[실행] nano ~/ros2_curri/my_agv_ws/src/agv_description/curriculum_stages/M06/agv.urdf.xacro</a:t>
+            </a:r>
+          </a:p>
+          <a:p>
+            <a:r>
+              <a:t>[확인] 저장 뒤 다음 구현 블록으로 이동한다.</a:t>
             </a:r>
           </a:p>
           <a:p>
@@ -979,17 +982,17 @@
           <a:lstStyle/>
           <a:p>
             <a:r>
-              <a:t>[설명] ~/ros2_curri/agv_ws/src/agv_description/curriculum_stages/M06/agv.urdf.xacro의 전체 파일을 4/5 구간으로 작성한다.</a:t>
-            </a:r>
-          </a:p>
-          <a:p>
-            <a:r>
-              <a:t>[실행] nano ~/ros2_curri/agv_ws/src/agv_description/curriculum_stages/M06/agv.urdf.xacro</a:t>
-            </a:r>
-          </a:p>
-          <a:p>
-            <a:r>
-              <a:t>[확인] 코드를 저장하고 다음 코드 슬라이드 또는 build 단계로 이동한다.</a:t>
+              <a:t>[설명] ~/ros2_curri/my_agv_ws/src/agv_description/curriculum_stages/M06/agv.urdf.xacro의 3/5 구현 블록을 직접 입력한다.</a:t>
+            </a:r>
+          </a:p>
+          <a:p>
+            <a:r>
+              <a:t>[실행] nano ~/ros2_curri/my_agv_ws/src/agv_description/curriculum_stages/M06/agv.urdf.xacro</a:t>
+            </a:r>
+          </a:p>
+          <a:p>
+            <a:r>
+              <a:t>[확인] 저장 뒤 다음 구현 블록으로 이동한다.</a:t>
             </a:r>
           </a:p>
           <a:p>
@@ -1069,17 +1072,17 @@
           <a:lstStyle/>
           <a:p>
             <a:r>
-              <a:t>[설명] ~/ros2_curri/agv_ws/src/agv_description/curriculum_stages/M06/agv.urdf.xacro의 전체 파일을 5/5 구간으로 작성한다.</a:t>
-            </a:r>
-          </a:p>
-          <a:p>
-            <a:r>
-              <a:t>[실행] nano ~/ros2_curri/agv_ws/src/agv_description/curriculum_stages/M06/agv.urdf.xacro</a:t>
-            </a:r>
-          </a:p>
-          <a:p>
-            <a:r>
-              <a:t>[확인] 코드를 저장하고 다음 코드 슬라이드 또는 build 단계로 이동한다.</a:t>
+              <a:t>[설명] ~/ros2_curri/my_agv_ws/src/agv_description/curriculum_stages/M06/agv.urdf.xacro의 4/5 구현 블록을 직접 입력한다.</a:t>
+            </a:r>
+          </a:p>
+          <a:p>
+            <a:r>
+              <a:t>[실행] nano ~/ros2_curri/my_agv_ws/src/agv_description/curriculum_stages/M06/agv.urdf.xacro</a:t>
+            </a:r>
+          </a:p>
+          <a:p>
+            <a:r>
+              <a:t>[확인] 저장 뒤 다음 구현 블록으로 이동한다.</a:t>
             </a:r>
           </a:p>
           <a:p>
@@ -1159,22 +1162,17 @@
           <a:lstStyle/>
           <a:p>
             <a:r>
-              <a:t>[설명] build/source/run을 생략 없이 실행한다.</a:t>
-            </a:r>
-          </a:p>
-          <a:p>
-            <a:r>
-              <a:t>[실행] xacro ~/ros2_curri/agv_ws/src/agv_description/curriculum_stages/M06/agv.urdf.xacro &gt; /tmp/agv.urdf</a:t>
-            </a:r>
-          </a:p>
-          <a:p>
-            <a:r>
-              <a:t>check_urdf /tmp/agv.urdf</a:t>
-            </a:r>
-          </a:p>
-          <a:p>
-            <a:r>
-              <a:t>[확인] wheel_radius와 wheel_base 변경이 좌우 바퀴·충돌 형상에 함께 적용된다.</a:t>
+              <a:t>[설명] ~/ros2_curri/my_agv_ws/src/agv_description/curriculum_stages/M06/agv.urdf.xacro의 5/5 구현 블록을 직접 입력한다.</a:t>
+            </a:r>
+          </a:p>
+          <a:p>
+            <a:r>
+              <a:t>[실행] nano ~/ros2_curri/my_agv_ws/src/agv_description/curriculum_stages/M06/agv.urdf.xacro</a:t>
+            </a:r>
+          </a:p>
+          <a:p>
+            <a:r>
+              <a:t>[확인] 저장 뒤 다음 구현 블록으로 이동한다.</a:t>
             </a:r>
           </a:p>
           <a:p>
@@ -1184,7 +1182,7 @@
           </a:p>
           <a:p>
             <a:r>
-              <a:t>[오류] 오류가 나면 현재 폴더, source, 파일 경로를 먼저 확인한다.</a:t>
+              <a:t>[오류] 들여쓰기·XML 태그·따옴표가 슬라이드와 정확히 같은지 확인한다.</a:t>
             </a:r>
           </a:p>
         </p:txBody>
@@ -1254,17 +1252,22 @@
           <a:lstStyle/>
           <a:p>
             <a:r>
-              <a:t>[설명] 실제 Ubuntu/ROS 2 환경에서 생성한 검증 화면이다.</a:t>
-            </a:r>
-          </a:p>
-          <a:p>
-            <a:r>
-              <a:t>[실행] 슬라이드의 명령 또는 파일 작성 단계를 진행한다.</a:t>
-            </a:r>
-          </a:p>
-          <a:p>
-            <a:r>
-              <a:t>[확인] ① 명령/설정  ② 정상 출력 또는 화면  ③ 다음 검증 명령으로 재확인</a:t>
+              <a:t>[설명] M05 단일 URDF의 반복 바퀴 구조를 macro/property로 바꾸는 첫 단계다.</a:t>
+            </a:r>
+          </a:p>
+          <a:p>
+            <a:r>
+              <a:t>[실행] cd ~/ros2_curri/my_agv_ws</a:t>
+            </a:r>
+          </a:p>
+          <a:p>
+            <a:r>
+              <a:t>xacro src/agv_description/curriculum_stages/M06/agv.urdf.xacro &gt; /tmp/agv_from_xacro.urdf</a:t>
+            </a:r>
+          </a:p>
+          <a:p>
+            <a:r>
+              <a:t>[확인] 명령 출력에서 슬라이드의 확인 항목을 찾는다.</a:t>
             </a:r>
           </a:p>
           <a:p>
@@ -1344,17 +1347,22 @@
           <a:lstStyle/>
           <a:p>
             <a:r>
-              <a:t>[설명] 실제 Ubuntu/ROS 2 환경에서 생성한 검증 화면이다.</a:t>
-            </a:r>
-          </a:p>
-          <a:p>
-            <a:r>
-              <a:t>[실행] 슬라이드의 명령 또는 파일 작성 단계를 진행한다.</a:t>
-            </a:r>
-          </a:p>
-          <a:p>
-            <a:r>
-              <a:t>[확인] xacro 명령 다음의 Successfully Parsed XML과 left/right wheel child를 찾습니다.</a:t>
+              <a:t>[설명] 하나의 wheel_radius가 좌우 바퀴에 함께 적용되어야 한다.</a:t>
+            </a:r>
+          </a:p>
+          <a:p>
+            <a:r>
+              <a:t>[실행] check_urdf /tmp/agv_from_xacro.urdf</a:t>
+            </a:r>
+          </a:p>
+          <a:p>
+            <a:r>
+              <a:t># wheel_radius 값을 바꾼 뒤 같은 두 명령을 다시 실행</a:t>
+            </a:r>
+          </a:p>
+          <a:p>
+            <a:r>
+              <a:t>[확인] 명령 출력에서 슬라이드의 확인 항목을 찾는다.</a:t>
             </a:r>
           </a:p>
           <a:p>
@@ -1434,17 +1442,17 @@
           <a:lstStyle/>
           <a:p>
             <a:r>
-              <a:t>[설명] 검증 명령은 GUI 결과와 별도로 실행해 재현 가능한 완료 기준을 만든다.</a:t>
-            </a:r>
-          </a:p>
-          <a:p>
-            <a:r>
-              <a:t>[실행] xacro ~/ros2_curri/agv_ws/src/agv_description/curriculum_stages/M06/agv.urdf.xacro &gt; /tmp/agv.urdf</a:t>
-            </a:r>
-          </a:p>
-          <a:p>
-            <a:r>
-              <a:t>rg -n 'wheel_radius|left_wheel_joint|right_wheel_joint' /tmp/agv.urdf</a:t>
+              <a:t>[설명] build/source/run을 생략 없이 실행한다.</a:t>
+            </a:r>
+          </a:p>
+          <a:p>
+            <a:r>
+              <a:t>[실행] xacro ~/ros2_curri/my_agv_ws/src/agv_description/curriculum_stages/M06/agv.urdf.xacro &gt; /tmp/agv.urdf</a:t>
+            </a:r>
+          </a:p>
+          <a:p>
+            <a:r>
+              <a:t>check_urdf /tmp/agv.urdf</a:t>
             </a:r>
           </a:p>
           <a:p>
@@ -1619,7 +1627,7 @@
           <a:lstStyle/>
           <a:p>
             <a:r>
-              <a:t>[설명] 오류를 대신 해결하지 말고 증상부터 우선 확인 순서대로 교육생이 실행하게 한다.</a:t>
+              <a:t>[설명] 실제 Ubuntu/ROS 2 환경에서 생성한 검증 화면이다.</a:t>
             </a:r>
           </a:p>
           <a:p>
@@ -1629,7 +1637,7 @@
           </a:p>
           <a:p>
             <a:r>
-              <a:t>[확인] 수정 뒤 첫 검증 명령을 다시 실행한다.</a:t>
+              <a:t>[확인] ① 명령/설정  ② 정상 출력 또는 화면  ③ 다음 검증 명령으로 재확인</a:t>
             </a:r>
           </a:p>
           <a:p>
@@ -1639,7 +1647,7 @@
           </a:p>
           <a:p>
             <a:r>
-              <a:t>[오류] 슬라이드의 두 대표 오류를 먼저 사용한다.</a:t>
+              <a:t>[오류] 오류가 나면 현재 폴더, source, 파일 경로를 먼저 확인한다.</a:t>
             </a:r>
           </a:p>
         </p:txBody>
@@ -1709,17 +1717,22 @@
           <a:lstStyle/>
           <a:p>
             <a:r>
-              <a:t>[설명] 교육생이 직접 한 값만 바꿔 원인과 결과를 연결하게 한다.</a:t>
-            </a:r>
-          </a:p>
-          <a:p>
-            <a:r>
-              <a:t>[실행] 슬라이드의 명령 또는 파일 작성 단계를 진행한다.</a:t>
-            </a:r>
-          </a:p>
-          <a:p>
-            <a:r>
-              <a:t>[확인] 원래 값과 변경 값을 모두 기록한다.</a:t>
+              <a:t>[설명] 검증 명령은 GUI 결과와 별도로 실행해 재현 가능한 완료 기준을 만든다.</a:t>
+            </a:r>
+          </a:p>
+          <a:p>
+            <a:r>
+              <a:t>[실행] xacro ~/ros2_curri/my_agv_ws/src/agv_description/curriculum_stages/M06/agv.urdf.xacro &gt; /tmp/agv.urdf</a:t>
+            </a:r>
+          </a:p>
+          <a:p>
+            <a:r>
+              <a:t>rg -n 'wheel_radius|left_wheel_joint|right_wheel_joint' /tmp/agv.urdf</a:t>
+            </a:r>
+          </a:p>
+          <a:p>
+            <a:r>
+              <a:t>[확인] wheel_radius와 wheel_base 변경이 좌우 바퀴·충돌 형상에 함께 적용된다.</a:t>
             </a:r>
           </a:p>
           <a:p>
@@ -1799,7 +1812,7 @@
           <a:lstStyle/>
           <a:p>
             <a:r>
-              <a:t>[설명] 교육생이 Complete·캡처·로그를 저장했는지 확인하고 다음 모듈의 시작 상태를 읽는다.</a:t>
+              <a:t>[설명] 오류를 대신 해결하지 말고 증상부터 우선 확인 순서대로 교육생이 실행하게 한다.</a:t>
             </a:r>
           </a:p>
           <a:p>
@@ -1809,7 +1822,7 @@
           </a:p>
           <a:p>
             <a:r>
-              <a:t>[확인] M07 Gazebo 물리 시작 조건을 말할 수 있다.</a:t>
+              <a:t>[확인] 수정 뒤 첫 검증 명령을 다시 실행한다.</a:t>
             </a:r>
           </a:p>
           <a:p>
@@ -1819,7 +1832,7 @@
           </a:p>
           <a:p>
             <a:r>
-              <a:t>[오류] 오류가 나면 현재 폴더, source, 파일 경로를 먼저 확인한다.</a:t>
+              <a:t>[오류] 슬라이드의 두 대표 오류를 먼저 사용한다.</a:t>
             </a:r>
           </a:p>
         </p:txBody>
@@ -1889,6 +1902,296 @@
           <a:lstStyle/>
           <a:p>
             <a:r>
+              <a:t>[설명] Complete는 정답 복사본이 아니라 막혔을 때 비교·복구하는 안전망이다.</a:t>
+            </a:r>
+          </a:p>
+          <a:p>
+            <a:r>
+              <a:t>[실행] cd ~/ros2_curri</a:t>
+            </a:r>
+          </a:p>
+          <a:p>
+            <a:r>
+              <a:t>diff -ru my_agv_ws/src blocks/B_robot_build/M06_xacro_modularization/complete/agv_ws/src || true</a:t>
+            </a:r>
+          </a:p>
+          <a:p>
+            <a:r>
+              <a:t>cp -a my_agv_ws/src my_agv_ws/src_before_M06</a:t>
+            </a:r>
+          </a:p>
+          <a:p>
+            <a:r>
+              <a:t>cp -a blocks/B_robot_build/M06_xacro_modularization/complete/agv_ws/src/. my_agv_ws/src/</a:t>
+            </a:r>
+          </a:p>
+          <a:p>
+            <a:r>
+              <a:t>cd my_agv_ws &amp;&amp; colcon build --symlink-install &amp;&amp; source install/setup.bash</a:t>
+            </a:r>
+          </a:p>
+          <a:p>
+            <a:r>
+              <a:t>[확인] diff에서 내 파일과 Complete의 차이를 설명할 수 있다.</a:t>
+            </a:r>
+          </a:p>
+          <a:p>
+            <a:r>
+              <a:t>[멈춤] 교육생이 현재 체크포인트를 통과할 때까지 기다린다.</a:t>
+            </a:r>
+          </a:p>
+          <a:p>
+            <a:r>
+              <a:t>[오류] 오류가 나면 현재 폴더, source, 파일 경로를 먼저 확인한다.</a:t>
+            </a:r>
+          </a:p>
+        </p:txBody>
+      </p:sp>
+      <p:sp>
+        <p:nvSpPr>
+          <p:cNvPr id="4" name="Slide Number Placeholder 3"/>
+          <p:cNvSpPr>
+            <a:spLocks noGrp="1"/>
+          </p:cNvSpPr>
+          <p:nvPr>
+            <p:ph type="sldNum" idx="5" sz="quarter"/>
+          </p:nvPr>
+        </p:nvSpPr>
+        <p:spPr/>
+      </p:sp>
+    </p:spTree>
+  </p:cSld>
+  <p:clrMapOvr>
+    <a:masterClrMapping/>
+  </p:clrMapOvr>
+</p:notes>
+</file>
+
+<file path=ppt/notesSlides/notesSlide24.xml><?xml version="1.0" encoding="utf-8"?>
+<p:notes xmlns:a="http://schemas.openxmlformats.org/drawingml/2006/main" xmlns:p="http://schemas.openxmlformats.org/presentationml/2006/main" xmlns:r="http://schemas.openxmlformats.org/officeDocument/2006/relationships">
+  <p:cSld>
+    <p:spTree>
+      <p:nvGrpSpPr>
+        <p:cNvPr id="1" name=""/>
+        <p:cNvGrpSpPr/>
+        <p:nvPr/>
+      </p:nvGrpSpPr>
+      <p:grpSpPr>
+        <a:xfrm>
+          <a:off x="0" y="0"/>
+          <a:ext cx="0" cy="0"/>
+          <a:chOff x="0" y="0"/>
+          <a:chExt cx="0" cy="0"/>
+        </a:xfrm>
+      </p:grpSpPr>
+      <p:sp>
+        <p:nvSpPr>
+          <p:cNvPr id="2" name="Slide Image Placeholder 1"/>
+          <p:cNvSpPr>
+            <a:spLocks noGrp="1"/>
+          </p:cNvSpPr>
+          <p:nvPr>
+            <p:ph type="sldImg" idx="2"/>
+          </p:nvPr>
+        </p:nvSpPr>
+        <p:spPr/>
+      </p:sp>
+      <p:sp>
+        <p:nvSpPr>
+          <p:cNvPr id="3" name="Notes Placeholder 2"/>
+          <p:cNvSpPr>
+            <a:spLocks noGrp="1"/>
+          </p:cNvSpPr>
+          <p:nvPr>
+            <p:ph type="body" idx="3" sz="quarter"/>
+          </p:nvPr>
+        </p:nvSpPr>
+        <p:spPr/>
+        <p:txBody>
+          <a:bodyPr/>
+          <a:lstStyle/>
+          <a:p>
+            <a:r>
+              <a:t>[설명] 교육생이 직접 한 값만 바꿔 원인과 결과를 연결하게 한다.</a:t>
+            </a:r>
+          </a:p>
+          <a:p>
+            <a:r>
+              <a:t>[실행] 슬라이드의 명령 또는 파일 작성 단계를 진행한다.</a:t>
+            </a:r>
+          </a:p>
+          <a:p>
+            <a:r>
+              <a:t>[확인] 원래 값과 변경 값을 모두 기록한다.</a:t>
+            </a:r>
+          </a:p>
+          <a:p>
+            <a:r>
+              <a:t>[멈춤] 교육생이 현재 체크포인트를 통과할 때까지 기다린다.</a:t>
+            </a:r>
+          </a:p>
+          <a:p>
+            <a:r>
+              <a:t>[오류] 오류가 나면 현재 폴더, source, 파일 경로를 먼저 확인한다.</a:t>
+            </a:r>
+          </a:p>
+        </p:txBody>
+      </p:sp>
+      <p:sp>
+        <p:nvSpPr>
+          <p:cNvPr id="4" name="Slide Number Placeholder 3"/>
+          <p:cNvSpPr>
+            <a:spLocks noGrp="1"/>
+          </p:cNvSpPr>
+          <p:nvPr>
+            <p:ph type="sldNum" idx="5" sz="quarter"/>
+          </p:nvPr>
+        </p:nvSpPr>
+        <p:spPr/>
+      </p:sp>
+    </p:spTree>
+  </p:cSld>
+  <p:clrMapOvr>
+    <a:masterClrMapping/>
+  </p:clrMapOvr>
+</p:notes>
+</file>
+
+<file path=ppt/notesSlides/notesSlide25.xml><?xml version="1.0" encoding="utf-8"?>
+<p:notes xmlns:a="http://schemas.openxmlformats.org/drawingml/2006/main" xmlns:p="http://schemas.openxmlformats.org/presentationml/2006/main" xmlns:r="http://schemas.openxmlformats.org/officeDocument/2006/relationships">
+  <p:cSld>
+    <p:spTree>
+      <p:nvGrpSpPr>
+        <p:cNvPr id="1" name=""/>
+        <p:cNvGrpSpPr/>
+        <p:nvPr/>
+      </p:nvGrpSpPr>
+      <p:grpSpPr>
+        <a:xfrm>
+          <a:off x="0" y="0"/>
+          <a:ext cx="0" cy="0"/>
+          <a:chOff x="0" y="0"/>
+          <a:chExt cx="0" cy="0"/>
+        </a:xfrm>
+      </p:grpSpPr>
+      <p:sp>
+        <p:nvSpPr>
+          <p:cNvPr id="2" name="Slide Image Placeholder 1"/>
+          <p:cNvSpPr>
+            <a:spLocks noGrp="1"/>
+          </p:cNvSpPr>
+          <p:nvPr>
+            <p:ph type="sldImg" idx="2"/>
+          </p:nvPr>
+        </p:nvSpPr>
+        <p:spPr/>
+      </p:sp>
+      <p:sp>
+        <p:nvSpPr>
+          <p:cNvPr id="3" name="Notes Placeholder 2"/>
+          <p:cNvSpPr>
+            <a:spLocks noGrp="1"/>
+          </p:cNvSpPr>
+          <p:nvPr>
+            <p:ph type="body" idx="3" sz="quarter"/>
+          </p:nvPr>
+        </p:nvSpPr>
+        <p:spPr/>
+        <p:txBody>
+          <a:bodyPr/>
+          <a:lstStyle/>
+          <a:p>
+            <a:r>
+              <a:t>[설명] 교육생이 자신의 workspace·캡처·로그를 저장했는지 확인하고 다음 모듈의 시작 상태를 읽는다.</a:t>
+            </a:r>
+          </a:p>
+          <a:p>
+            <a:r>
+              <a:t>[실행] 슬라이드의 명령 또는 파일 작성 단계를 진행한다.</a:t>
+            </a:r>
+          </a:p>
+          <a:p>
+            <a:r>
+              <a:t>[확인] M07 Gazebo 물리 시작 조건을 말할 수 있다.</a:t>
+            </a:r>
+          </a:p>
+          <a:p>
+            <a:r>
+              <a:t>[멈춤] 교육생이 현재 체크포인트를 통과할 때까지 기다린다.</a:t>
+            </a:r>
+          </a:p>
+          <a:p>
+            <a:r>
+              <a:t>[오류] 오류가 나면 현재 폴더, source, 파일 경로를 먼저 확인한다.</a:t>
+            </a:r>
+          </a:p>
+        </p:txBody>
+      </p:sp>
+      <p:sp>
+        <p:nvSpPr>
+          <p:cNvPr id="4" name="Slide Number Placeholder 3"/>
+          <p:cNvSpPr>
+            <a:spLocks noGrp="1"/>
+          </p:cNvSpPr>
+          <p:nvPr>
+            <p:ph type="sldNum" idx="5" sz="quarter"/>
+          </p:nvPr>
+        </p:nvSpPr>
+        <p:spPr/>
+      </p:sp>
+    </p:spTree>
+  </p:cSld>
+  <p:clrMapOvr>
+    <a:masterClrMapping/>
+  </p:clrMapOvr>
+</p:notes>
+</file>
+
+<file path=ppt/notesSlides/notesSlide26.xml><?xml version="1.0" encoding="utf-8"?>
+<p:notes xmlns:a="http://schemas.openxmlformats.org/drawingml/2006/main" xmlns:p="http://schemas.openxmlformats.org/presentationml/2006/main" xmlns:r="http://schemas.openxmlformats.org/officeDocument/2006/relationships">
+  <p:cSld>
+    <p:spTree>
+      <p:nvGrpSpPr>
+        <p:cNvPr id="1" name=""/>
+        <p:cNvGrpSpPr/>
+        <p:nvPr/>
+      </p:nvGrpSpPr>
+      <p:grpSpPr>
+        <a:xfrm>
+          <a:off x="0" y="0"/>
+          <a:ext cx="0" cy="0"/>
+          <a:chOff x="0" y="0"/>
+          <a:chExt cx="0" cy="0"/>
+        </a:xfrm>
+      </p:grpSpPr>
+      <p:sp>
+        <p:nvSpPr>
+          <p:cNvPr id="2" name="Slide Image Placeholder 1"/>
+          <p:cNvSpPr>
+            <a:spLocks noGrp="1"/>
+          </p:cNvSpPr>
+          <p:nvPr>
+            <p:ph type="sldImg" idx="2"/>
+          </p:nvPr>
+        </p:nvSpPr>
+        <p:spPr/>
+      </p:sp>
+      <p:sp>
+        <p:nvSpPr>
+          <p:cNvPr id="3" name="Notes Placeholder 2"/>
+          <p:cNvSpPr>
+            <a:spLocks noGrp="1"/>
+          </p:cNvSpPr>
+          <p:nvPr>
+            <p:ph type="body" idx="3" sz="quarter"/>
+          </p:nvPr>
+        </p:nvSpPr>
+        <p:spPr/>
+        <p:txBody>
+          <a:bodyPr/>
+          <a:lstStyle/>
+          <a:p>
+            <a:r>
               <a:t>[설명] 공식 문서는 버전 차이와 확장 학습을 확인할 때 사용한다.</a:t>
             </a:r>
           </a:p>
@@ -1984,7 +2287,7 @@
           </a:p>
           <a:p>
             <a:r>
-              <a:t>[실행] pwd; source /opt/ros/jazzy/setup.bash; source ~/ros2_curri/agv_ws/install/setup.bash</a:t>
+              <a:t>[실행] pwd; source /opt/ros/jazzy/setup.bash; source ~/ros2_curri/my_agv_ws/install/setup.bash</a:t>
             </a:r>
           </a:p>
           <a:p>
@@ -2159,7 +2462,7 @@
           <a:lstStyle/>
           <a:p>
             <a:r>
-              <a:t>[설명] 도식의 각 상자가 무엇을 만들고 화살표가 어떤 방향으로 데이터를 보내는지 설명한다.</a:t>
+              <a:t>[설명] 이 모듈이 전체 AGV 프로젝트에 추가하는 기능을 먼저 선언한다.</a:t>
             </a:r>
           </a:p>
           <a:p>
@@ -2169,7 +2472,7 @@
           </a:p>
           <a:p>
             <a:r>
-              <a:t>[확인] 교육생이 왼쪽에서 오른쪽(또는 제어 방향)으로 흐름을 말할 수 있다.</a:t>
+              <a:t>[확인] wheel_radius와 wheel_base 변경이 좌우 바퀴·충돌 형상에 함께 적용된다.</a:t>
             </a:r>
           </a:p>
           <a:p>
@@ -2249,7 +2552,7 @@
           <a:lstStyle/>
           <a:p>
             <a:r>
-              <a:t>[설명] 실제 파일 경로를 보여 주고 어떤 package의 책임인지 설명한다.</a:t>
+              <a:t>[설명] 코드를 입력하기 전에 완성 결과와 관찰 기준을 보여 준다.</a:t>
             </a:r>
           </a:p>
           <a:p>
@@ -2259,7 +2562,7 @@
           </a:p>
           <a:p>
             <a:r>
-              <a:t>[확인] 교육생이 파일의 부모 package를 찾을 수 있다.</a:t>
+              <a:t>[확인] xacro 명령 다음의 Successfully Parsed XML과 left/right wheel child를 찾습니다.</a:t>
             </a:r>
           </a:p>
           <a:p>
@@ -2339,7 +2642,7 @@
           <a:lstStyle/>
           <a:p>
             <a:r>
-              <a:t>[설명] 파일을 코드 문법보다 먼저 역할·사용법·확인 화면으로 설명한다.</a:t>
+              <a:t>[설명] 도식의 각 상자가 무엇을 만들고 화살표가 어떤 방향으로 데이터를 보내는지 설명한다.</a:t>
             </a:r>
           </a:p>
           <a:p>
@@ -2349,7 +2652,7 @@
           </a:p>
           <a:p>
             <a:r>
-              <a:t>[확인] 교육생이 각 파일의 산출물과 확인 위치를 말할 수 있다.</a:t>
+              <a:t>[확인] 교육생이 왼쪽에서 오른쪽(또는 제어 방향)으로 흐름을 말할 수 있다.</a:t>
             </a:r>
           </a:p>
           <a:p>
@@ -2429,7 +2732,7 @@
           <a:lstStyle/>
           <a:p>
             <a:r>
-              <a:t>[설명] Xacro는 같은 바퀴 코드를 복사하지 않고 ‘값 한 번, 생성 여러 번’으로 바꾸는 도구입니다.</a:t>
+              <a:t>[설명] 실제 파일 경로를 보여 주고 어떤 package의 책임인지 설명한다.</a:t>
             </a:r>
           </a:p>
           <a:p>
@@ -2439,7 +2742,7 @@
           </a:p>
           <a:p>
             <a:r>
-              <a:t>[확인] xacro → /tmp/agv.urdf → check_urdf 순서가 변환과 검증을 분리합니다.</a:t>
+              <a:t>[확인] 교육생이 파일의 부모 package를 찾을 수 있다.</a:t>
             </a:r>
           </a:p>
           <a:p>
@@ -2519,22 +2822,17 @@
           <a:lstStyle/>
           <a:p>
             <a:r>
-              <a:t>[설명] M05 단일 URDF의 반복 바퀴 구조를 macro/property로 바꾸는 첫 단계다.</a:t>
-            </a:r>
-          </a:p>
-          <a:p>
-            <a:r>
-              <a:t>[실행] cd ~/ros2_curri/agv_ws</a:t>
-            </a:r>
-          </a:p>
-          <a:p>
-            <a:r>
-              <a:t>xacro src/agv_description/curriculum_stages/M06/agv.urdf.xacro &gt; /tmp/agv_from_xacro.urdf</a:t>
-            </a:r>
-          </a:p>
-          <a:p>
-            <a:r>
-              <a:t>[확인] 명령 출력에서 슬라이드의 확인 항목을 찾는다.</a:t>
+              <a:t>[설명] 파일을 코드 문법보다 먼저 역할·사용법·확인 화면으로 설명한다.</a:t>
+            </a:r>
+          </a:p>
+          <a:p>
+            <a:r>
+              <a:t>[실행] 슬라이드의 명령 또는 파일 작성 단계를 진행한다.</a:t>
+            </a:r>
+          </a:p>
+          <a:p>
+            <a:r>
+              <a:t>[확인] 교육생이 각 파일의 산출물과 확인 위치를 말할 수 있다.</a:t>
             </a:r>
           </a:p>
           <a:p>
@@ -5782,7 +6080,7 @@
               </a:defRPr>
             </a:pPr>
             <a:r>
-              <a:t>이 PPT만 보고 시작 상태 → 파일 작성 → build/run → 검증 → 오류 대응 → checkpoint를 순서대로 수행합니다.</a:t>
+              <a:t>이 PPT에서 폴더 생성 → 빈 파일 열기 → 코드 입력·저장 → build/run → 검증을 직접 반복합니다.</a:t>
             </a:r>
           </a:p>
         </p:txBody>
@@ -5917,7 +6215,7 @@
               </a:defRPr>
             </a:pPr>
             <a:r>
-              <a:t>property 변경을 검증한다</a:t>
+              <a:t>코드를 ‘만드는 것 → 표시할 줄 → 바꾼 결과’로 읽는다</a:t>
             </a:r>
           </a:p>
         </p:txBody>
@@ -5956,7 +6254,7 @@
               </a:defRPr>
             </a:pPr>
             <a:r>
-              <a:t>한 장에는 한 행동만 수행합니다.</a:t>
+              <a:t>PDF 예시처럼 화면을 보기 전에 코드의 역할과 관찰 지점을 한 번 짚고 갑니다.</a:t>
             </a:r>
           </a:p>
         </p:txBody>
@@ -6092,109 +6390,31 @@
               </a:defRPr>
             </a:pPr>
             <a:r>
-              <a:t>현재 단계 2/2    |    현재 폴더 ~/ros2_curri/agv_ws    |    현재 터미널</a:t>
-            </a:r>
-          </a:p>
-        </p:txBody>
-      </p:sp>
-      <p:sp>
-        <p:nvSpPr>
-          <p:cNvPr id="7" name="TextBox 6"/>
-          <p:cNvSpPr txBox="1"/>
-          <p:nvPr/>
-        </p:nvSpPr>
-        <p:spPr>
-          <a:xfrm>
-            <a:off x="676656" y="1764792"/>
-            <a:ext cx="1828800" cy="347472"/>
-          </a:xfrm>
-          <a:prstGeom prst="rect">
-            <a:avLst/>
-          </a:prstGeom>
-          <a:noFill/>
-        </p:spPr>
-        <p:txBody>
-          <a:bodyPr wrap="square" lIns="73152" rIns="73152" tIns="36576" bIns="36576">
-            <a:spAutoFit/>
-          </a:bodyPr>
-          <a:lstStyle/>
-          <a:p>
-            <a:pPr algn="l">
-              <a:spcAft>
-                <a:spcPts val="0"/>
-              </a:spcAft>
-              <a:defRPr sz="1800" b="1">
-                <a:solidFill>
-                  <a:srgbClr val="225B9B"/>
-                </a:solidFill>
-                <a:latin typeface="Noto Sans CJK KR"/>
-              </a:defRPr>
-            </a:pPr>
-            <a:r>
-              <a:t>왜 하는가</a:t>
-            </a:r>
-          </a:p>
-        </p:txBody>
-      </p:sp>
-      <p:sp>
-        <p:nvSpPr>
-          <p:cNvPr id="8" name="TextBox 7"/>
-          <p:cNvSpPr txBox="1"/>
-          <p:nvPr/>
-        </p:nvSpPr>
-        <p:spPr>
-          <a:xfrm>
-            <a:off x="676656" y="2103120"/>
-            <a:ext cx="10789920" cy="512064"/>
-          </a:xfrm>
-          <a:prstGeom prst="rect">
-            <a:avLst/>
-          </a:prstGeom>
-          <a:noFill/>
-        </p:spPr>
-        <p:txBody>
-          <a:bodyPr wrap="square" lIns="73152" rIns="73152" tIns="36576" bIns="36576">
-            <a:spAutoFit/>
-          </a:bodyPr>
-          <a:lstStyle/>
-          <a:p>
-            <a:pPr algn="l">
-              <a:spcAft>
-                <a:spcPts val="0"/>
-              </a:spcAft>
-              <a:defRPr sz="2000" b="0">
-                <a:solidFill>
-                  <a:srgbClr val="122C4E"/>
-                </a:solidFill>
-                <a:latin typeface="Noto Sans CJK KR"/>
-              </a:defRPr>
-            </a:pPr>
-            <a:r>
-              <a:t>하나의 wheel_radius가 좌우 바퀴에 함께 적용되어야 한다.</a:t>
-            </a:r>
-          </a:p>
-        </p:txBody>
-      </p:sp>
-      <p:sp>
-        <p:nvSpPr>
-          <p:cNvPr id="9" name="Rounded Rectangle 8"/>
+              <a:t>현재 단계 코드 해설    |    현재 폴더 ~/ros2_curri/my_agv_ws    |    현재 터미널</a:t>
+            </a:r>
+          </a:p>
+        </p:txBody>
+      </p:sp>
+      <p:sp>
+        <p:nvSpPr>
+          <p:cNvPr id="7" name="Rounded Rectangle 6"/>
           <p:cNvSpPr/>
           <p:nvPr/>
         </p:nvSpPr>
         <p:spPr>
           <a:xfrm>
-            <a:off x="676656" y="2871216"/>
-            <a:ext cx="10835640" cy="2331720"/>
+            <a:off x="658368" y="1664208"/>
+            <a:ext cx="5321808" cy="1764792"/>
           </a:xfrm>
           <a:prstGeom prst="roundRect">
             <a:avLst/>
           </a:prstGeom>
           <a:solidFill>
-            <a:srgbClr val="1D232D"/>
+            <a:srgbClr val="F4F7FB"/>
           </a:solidFill>
           <a:ln>
             <a:solidFill>
-              <a:srgbClr val="1D232D"/>
+              <a:srgbClr val="2A8B5A"/>
             </a:solidFill>
           </a:ln>
         </p:spPr>
@@ -6213,40 +6433,146 @@
           </a:fontRef>
         </p:style>
         <p:txBody>
-          <a:bodyPr rtlCol="0" anchor="ctr" wrap="square" lIns="73152" rIns="73152" tIns="36576" bIns="36576"/>
+          <a:bodyPr rtlCol="0" anchor="ctr"/>
+          <a:lstStyle/>
+          <a:p>
+            <a:pPr algn="ctr"/>
+          </a:p>
+        </p:txBody>
+      </p:sp>
+      <p:sp>
+        <p:nvSpPr>
+          <p:cNvPr id="8" name="TextBox 7"/>
+          <p:cNvSpPr txBox="1"/>
+          <p:nvPr/>
+        </p:nvSpPr>
+        <p:spPr>
+          <a:xfrm>
+            <a:off x="859536" y="1828800"/>
+            <a:ext cx="4892040" cy="265176"/>
+          </a:xfrm>
+          <a:prstGeom prst="rect">
+            <a:avLst/>
+          </a:prstGeom>
+          <a:noFill/>
+        </p:spPr>
+        <p:txBody>
+          <a:bodyPr wrap="square" lIns="73152" rIns="73152" tIns="36576" bIns="36576">
+            <a:spAutoFit/>
+          </a:bodyPr>
           <a:lstStyle/>
           <a:p>
             <a:pPr algn="l">
               <a:spcAft>
                 <a:spcPts val="0"/>
               </a:spcAft>
+              <a:defRPr sz="1700" b="1">
+                <a:solidFill>
+                  <a:srgbClr val="2A8B5A"/>
+                </a:solidFill>
+                <a:latin typeface="Noto Sans CJK KR"/>
+              </a:defRPr>
+            </a:pPr>
+            <a:r>
+              <a:t>1. 이 파일이 만드는 것</a:t>
+            </a:r>
+          </a:p>
+        </p:txBody>
+      </p:sp>
+      <p:sp>
+        <p:nvSpPr>
+          <p:cNvPr id="9" name="TextBox 8"/>
+          <p:cNvSpPr txBox="1"/>
+          <p:nvPr/>
+        </p:nvSpPr>
+        <p:spPr>
+          <a:xfrm>
+            <a:off x="859536" y="2240280"/>
+            <a:ext cx="4846320" cy="941832"/>
+          </a:xfrm>
+          <a:prstGeom prst="rect">
+            <a:avLst/>
+          </a:prstGeom>
+          <a:noFill/>
+        </p:spPr>
+        <p:txBody>
+          <a:bodyPr wrap="square" lIns="73152" rIns="73152" tIns="36576" bIns="36576">
+            <a:spAutoFit/>
+          </a:bodyPr>
+          <a:lstStyle/>
+          <a:p>
+            <a:pPr algn="l">
+              <a:spcAft>
+                <a:spcPts val="0"/>
+              </a:spcAft>
               <a:defRPr sz="1600" b="0">
                 <a:solidFill>
-                  <a:srgbClr val="FFFFFF"/>
-                </a:solidFill>
-                <a:latin typeface="DejaVu Sans Mono"/>
-              </a:defRPr>
-            </a:pPr>
-            <a:r>
-              <a:t>check_urdf /tmp/agv_from_xacro.urdf</a:t>
-            </a:r>
-            <a:br/>
-            <a:r>
-              <a:t># wheel_radius 값을 바꾼 뒤 같은 두 명령을 다시 실행</a:t>
-            </a:r>
-          </a:p>
-        </p:txBody>
-      </p:sp>
-      <p:sp>
-        <p:nvSpPr>
-          <p:cNvPr id="10" name="TextBox 9"/>
-          <p:cNvSpPr txBox="1"/>
-          <p:nvPr/>
-        </p:nvSpPr>
-        <p:spPr>
-          <a:xfrm>
-            <a:off x="768096" y="5468112"/>
-            <a:ext cx="1143000" cy="256032"/>
+                  <a:srgbClr val="122C4E"/>
+                </a:solidFill>
+                <a:latin typeface="Noto Sans CJK KR"/>
+              </a:defRPr>
+            </a:pPr>
+            <a:r>
+              <a:t>Xacro는 같은 바퀴 코드를 복사하지 않고 ‘값 한 번, 생성 여러 번’으로 바꾸는 도구입니다.</a:t>
+            </a:r>
+          </a:p>
+        </p:txBody>
+      </p:sp>
+      <p:sp>
+        <p:nvSpPr>
+          <p:cNvPr id="10" name="Rounded Rectangle 9"/>
+          <p:cNvSpPr/>
+          <p:nvPr/>
+        </p:nvSpPr>
+        <p:spPr>
+          <a:xfrm>
+            <a:off x="6217920" y="1664208"/>
+            <a:ext cx="5321808" cy="1764792"/>
+          </a:xfrm>
+          <a:prstGeom prst="roundRect">
+            <a:avLst/>
+          </a:prstGeom>
+          <a:solidFill>
+            <a:srgbClr val="F4F7FB"/>
+          </a:solidFill>
+          <a:ln>
+            <a:solidFill>
+              <a:srgbClr val="225B9B"/>
+            </a:solidFill>
+          </a:ln>
+        </p:spPr>
+        <p:style>
+          <a:lnRef idx="1">
+            <a:schemeClr val="accent1"/>
+          </a:lnRef>
+          <a:fillRef idx="3">
+            <a:schemeClr val="accent1"/>
+          </a:fillRef>
+          <a:effectRef idx="2">
+            <a:schemeClr val="accent1"/>
+          </a:effectRef>
+          <a:fontRef idx="minor">
+            <a:schemeClr val="lt1"/>
+          </a:fontRef>
+        </p:style>
+        <p:txBody>
+          <a:bodyPr rtlCol="0" anchor="ctr"/>
+          <a:lstStyle/>
+          <a:p>
+            <a:pPr algn="ctr"/>
+          </a:p>
+        </p:txBody>
+      </p:sp>
+      <p:sp>
+        <p:nvSpPr>
+          <p:cNvPr id="11" name="TextBox 10"/>
+          <p:cNvSpPr txBox="1"/>
+          <p:nvPr/>
+        </p:nvSpPr>
+        <p:spPr>
+          <a:xfrm>
+            <a:off x="6419088" y="1828800"/>
+            <a:ext cx="4892040" cy="265176"/>
           </a:xfrm>
           <a:prstGeom prst="rect">
             <a:avLst/>
@@ -6263,7 +6589,331 @@
               <a:spcAft>
                 <a:spcPts val="0"/>
               </a:spcAft>
-              <a:defRPr sz="1800" b="1">
+              <a:defRPr sz="1700" b="1">
+                <a:solidFill>
+                  <a:srgbClr val="225B9B"/>
+                </a:solidFill>
+                <a:latin typeface="Noto Sans CJK KR"/>
+              </a:defRPr>
+            </a:pPr>
+            <a:r>
+              <a:t>2. 먼저 찾을 코드/태그</a:t>
+            </a:r>
+          </a:p>
+        </p:txBody>
+      </p:sp>
+      <p:sp>
+        <p:nvSpPr>
+          <p:cNvPr id="12" name="TextBox 11"/>
+          <p:cNvSpPr txBox="1"/>
+          <p:nvPr/>
+        </p:nvSpPr>
+        <p:spPr>
+          <a:xfrm>
+            <a:off x="6419088" y="2240280"/>
+            <a:ext cx="4846320" cy="941832"/>
+          </a:xfrm>
+          <a:prstGeom prst="rect">
+            <a:avLst/>
+          </a:prstGeom>
+          <a:noFill/>
+        </p:spPr>
+        <p:txBody>
+          <a:bodyPr wrap="square" lIns="73152" rIns="73152" tIns="36576" bIns="36576">
+            <a:spAutoFit/>
+          </a:bodyPr>
+          <a:lstStyle/>
+          <a:p>
+            <a:pPr algn="l">
+              <a:spcAft>
+                <a:spcPts val="0"/>
+              </a:spcAft>
+              <a:defRPr sz="1600" b="0">
+                <a:solidFill>
+                  <a:srgbClr val="122C4E"/>
+                </a:solidFill>
+                <a:latin typeface="Noto Sans CJK KR"/>
+              </a:defRPr>
+            </a:pPr>
+            <a:r>
+              <a:t>&lt;xacro:property&gt;, &lt;xacro:macro&gt;, &lt;xacro:wheel ...&gt;</a:t>
+            </a:r>
+          </a:p>
+        </p:txBody>
+      </p:sp>
+      <p:sp>
+        <p:nvSpPr>
+          <p:cNvPr id="13" name="Rounded Rectangle 12"/>
+          <p:cNvSpPr/>
+          <p:nvPr/>
+        </p:nvSpPr>
+        <p:spPr>
+          <a:xfrm>
+            <a:off x="658368" y="3813048"/>
+            <a:ext cx="5321808" cy="1764792"/>
+          </a:xfrm>
+          <a:prstGeom prst="roundRect">
+            <a:avLst/>
+          </a:prstGeom>
+          <a:solidFill>
+            <a:srgbClr val="F4F7FB"/>
+          </a:solidFill>
+          <a:ln>
+            <a:solidFill>
+              <a:srgbClr val="DB7E22"/>
+            </a:solidFill>
+          </a:ln>
+        </p:spPr>
+        <p:style>
+          <a:lnRef idx="1">
+            <a:schemeClr val="accent1"/>
+          </a:lnRef>
+          <a:fillRef idx="3">
+            <a:schemeClr val="accent1"/>
+          </a:fillRef>
+          <a:effectRef idx="2">
+            <a:schemeClr val="accent1"/>
+          </a:effectRef>
+          <a:fontRef idx="minor">
+            <a:schemeClr val="lt1"/>
+          </a:fontRef>
+        </p:style>
+        <p:txBody>
+          <a:bodyPr rtlCol="0" anchor="ctr"/>
+          <a:lstStyle/>
+          <a:p>
+            <a:pPr algn="ctr"/>
+          </a:p>
+        </p:txBody>
+      </p:sp>
+      <p:sp>
+        <p:nvSpPr>
+          <p:cNvPr id="14" name="TextBox 13"/>
+          <p:cNvSpPr txBox="1"/>
+          <p:nvPr/>
+        </p:nvSpPr>
+        <p:spPr>
+          <a:xfrm>
+            <a:off x="859536" y="3977639"/>
+            <a:ext cx="4892040" cy="265176"/>
+          </a:xfrm>
+          <a:prstGeom prst="rect">
+            <a:avLst/>
+          </a:prstGeom>
+          <a:noFill/>
+        </p:spPr>
+        <p:txBody>
+          <a:bodyPr wrap="square" lIns="73152" rIns="73152" tIns="36576" bIns="36576">
+            <a:spAutoFit/>
+          </a:bodyPr>
+          <a:lstStyle/>
+          <a:p>
+            <a:pPr algn="l">
+              <a:spcAft>
+                <a:spcPts val="0"/>
+              </a:spcAft>
+              <a:defRPr sz="1700" b="1">
+                <a:solidFill>
+                  <a:srgbClr val="DB7E22"/>
+                </a:solidFill>
+                <a:latin typeface="Noto Sans CJK KR"/>
+              </a:defRPr>
+            </a:pPr>
+            <a:r>
+              <a:t>3. 값을 바꾸면</a:t>
+            </a:r>
+          </a:p>
+        </p:txBody>
+      </p:sp>
+      <p:sp>
+        <p:nvSpPr>
+          <p:cNvPr id="15" name="TextBox 14"/>
+          <p:cNvSpPr txBox="1"/>
+          <p:nvPr/>
+        </p:nvSpPr>
+        <p:spPr>
+          <a:xfrm>
+            <a:off x="859536" y="4389120"/>
+            <a:ext cx="4846320" cy="941832"/>
+          </a:xfrm>
+          <a:prstGeom prst="rect">
+            <a:avLst/>
+          </a:prstGeom>
+          <a:noFill/>
+        </p:spPr>
+        <p:txBody>
+          <a:bodyPr wrap="square" lIns="73152" rIns="73152" tIns="36576" bIns="36576">
+            <a:spAutoFit/>
+          </a:bodyPr>
+          <a:lstStyle/>
+          <a:p>
+            <a:pPr algn="l">
+              <a:spcAft>
+                <a:spcPts val="0"/>
+              </a:spcAft>
+              <a:defRPr sz="1600" b="0">
+                <a:solidFill>
+                  <a:srgbClr val="122C4E"/>
+                </a:solidFill>
+                <a:latin typeface="Noto Sans CJK KR"/>
+              </a:defRPr>
+            </a:pPr>
+            <a:r>
+              <a:t>wheel_radius 값을 하나 바꾸면 좌우 macro 호출에 같은 값이 전달됩니다.</a:t>
+            </a:r>
+          </a:p>
+        </p:txBody>
+      </p:sp>
+      <p:sp>
+        <p:nvSpPr>
+          <p:cNvPr id="16" name="Rounded Rectangle 15"/>
+          <p:cNvSpPr/>
+          <p:nvPr/>
+        </p:nvSpPr>
+        <p:spPr>
+          <a:xfrm>
+            <a:off x="6217920" y="3813048"/>
+            <a:ext cx="5321808" cy="1764792"/>
+          </a:xfrm>
+          <a:prstGeom prst="roundRect">
+            <a:avLst/>
+          </a:prstGeom>
+          <a:solidFill>
+            <a:srgbClr val="F4F7FB"/>
+          </a:solidFill>
+          <a:ln>
+            <a:solidFill>
+              <a:srgbClr val="BE3B3B"/>
+            </a:solidFill>
+          </a:ln>
+        </p:spPr>
+        <p:style>
+          <a:lnRef idx="1">
+            <a:schemeClr val="accent1"/>
+          </a:lnRef>
+          <a:fillRef idx="3">
+            <a:schemeClr val="accent1"/>
+          </a:fillRef>
+          <a:effectRef idx="2">
+            <a:schemeClr val="accent1"/>
+          </a:effectRef>
+          <a:fontRef idx="minor">
+            <a:schemeClr val="lt1"/>
+          </a:fontRef>
+        </p:style>
+        <p:txBody>
+          <a:bodyPr rtlCol="0" anchor="ctr"/>
+          <a:lstStyle/>
+          <a:p>
+            <a:pPr algn="ctr"/>
+          </a:p>
+        </p:txBody>
+      </p:sp>
+      <p:sp>
+        <p:nvSpPr>
+          <p:cNvPr id="17" name="TextBox 16"/>
+          <p:cNvSpPr txBox="1"/>
+          <p:nvPr/>
+        </p:nvSpPr>
+        <p:spPr>
+          <a:xfrm>
+            <a:off x="6419088" y="3977639"/>
+            <a:ext cx="4892040" cy="265176"/>
+          </a:xfrm>
+          <a:prstGeom prst="rect">
+            <a:avLst/>
+          </a:prstGeom>
+          <a:noFill/>
+        </p:spPr>
+        <p:txBody>
+          <a:bodyPr wrap="square" lIns="73152" rIns="73152" tIns="36576" bIns="36576">
+            <a:spAutoFit/>
+          </a:bodyPr>
+          <a:lstStyle/>
+          <a:p>
+            <a:pPr algn="l">
+              <a:spcAft>
+                <a:spcPts val="0"/>
+              </a:spcAft>
+              <a:defRPr sz="1700" b="1">
+                <a:solidFill>
+                  <a:srgbClr val="BE3B3B"/>
+                </a:solidFill>
+                <a:latin typeface="Noto Sans CJK KR"/>
+              </a:defRPr>
+            </a:pPr>
+            <a:r>
+              <a:t>4. 실제로 보는 곳</a:t>
+            </a:r>
+          </a:p>
+        </p:txBody>
+      </p:sp>
+      <p:sp>
+        <p:nvSpPr>
+          <p:cNvPr id="18" name="TextBox 17"/>
+          <p:cNvSpPr txBox="1"/>
+          <p:nvPr/>
+        </p:nvSpPr>
+        <p:spPr>
+          <a:xfrm>
+            <a:off x="6419088" y="4389120"/>
+            <a:ext cx="4846320" cy="941832"/>
+          </a:xfrm>
+          <a:prstGeom prst="rect">
+            <a:avLst/>
+          </a:prstGeom>
+          <a:noFill/>
+        </p:spPr>
+        <p:txBody>
+          <a:bodyPr wrap="square" lIns="73152" rIns="73152" tIns="36576" bIns="36576">
+            <a:spAutoFit/>
+          </a:bodyPr>
+          <a:lstStyle/>
+          <a:p>
+            <a:pPr algn="l">
+              <a:spcAft>
+                <a:spcPts val="0"/>
+              </a:spcAft>
+              <a:defRPr sz="1600" b="0">
+                <a:solidFill>
+                  <a:srgbClr val="122C4E"/>
+                </a:solidFill>
+                <a:latin typeface="Noto Sans CJK KR"/>
+              </a:defRPr>
+            </a:pPr>
+            <a:r>
+              <a:t>xacro → /tmp/agv.urdf → check_urdf 순서가 변환과 검증을 분리합니다.</a:t>
+            </a:r>
+          </a:p>
+        </p:txBody>
+      </p:sp>
+      <p:sp>
+        <p:nvSpPr>
+          <p:cNvPr id="19" name="TextBox 18"/>
+          <p:cNvSpPr txBox="1"/>
+          <p:nvPr/>
+        </p:nvSpPr>
+        <p:spPr>
+          <a:xfrm>
+            <a:off x="777240" y="6172200"/>
+            <a:ext cx="10607040" cy="201168"/>
+          </a:xfrm>
+          <a:prstGeom prst="rect">
+            <a:avLst/>
+          </a:prstGeom>
+          <a:noFill/>
+        </p:spPr>
+        <p:txBody>
+          <a:bodyPr wrap="square" lIns="73152" rIns="73152" tIns="36576" bIns="36576">
+            <a:spAutoFit/>
+          </a:bodyPr>
+          <a:lstStyle/>
+          <a:p>
+            <a:pPr algn="ctr">
+              <a:spcAft>
+                <a:spcPts val="0"/>
+              </a:spcAft>
+              <a:defRPr sz="1200" b="1">
                 <a:solidFill>
                   <a:srgbClr val="2A8B5A"/>
                 </a:solidFill>
@@ -6271,46 +6921,7 @@
               </a:defRPr>
             </a:pPr>
             <a:r>
-              <a:t>확인</a:t>
-            </a:r>
-          </a:p>
-        </p:txBody>
-      </p:sp>
-      <p:sp>
-        <p:nvSpPr>
-          <p:cNvPr id="11" name="TextBox 10"/>
-          <p:cNvSpPr txBox="1"/>
-          <p:nvPr/>
-        </p:nvSpPr>
-        <p:spPr>
-          <a:xfrm>
-            <a:off x="768096" y="5742432"/>
-            <a:ext cx="10561320" cy="347472"/>
-          </a:xfrm>
-          <a:prstGeom prst="rect">
-            <a:avLst/>
-          </a:prstGeom>
-          <a:noFill/>
-        </p:spPr>
-        <p:txBody>
-          <a:bodyPr wrap="square" lIns="73152" rIns="73152" tIns="36576" bIns="36576">
-            <a:spAutoFit/>
-          </a:bodyPr>
-          <a:lstStyle/>
-          <a:p>
-            <a:pPr algn="l">
-              <a:spcAft>
-                <a:spcPts val="0"/>
-              </a:spcAft>
-              <a:defRPr sz="1800" b="0">
-                <a:solidFill>
-                  <a:srgbClr val="122C4E"/>
-                </a:solidFill>
-                <a:latin typeface="Noto Sans CJK KR"/>
-              </a:defRPr>
-            </a:pPr>
-            <a:r>
-              <a:t>명령의 출력에서 topic·frame·파일 이름 또는 성공 메시지를 찾으면 이 단계가 완료됩니다.</a:t>
+              <a:t>다음 코드 슬라이드에서는 위의 태그/함수를 찾아 색으로 표시하며 한 줄씩 설명합니다.</a:t>
             </a:r>
           </a:p>
         </p:txBody>
@@ -6367,7 +6978,7 @@
               </a:defRPr>
             </a:pPr>
             <a:r>
-              <a:t>파일을 새로 만들고 저장한다 (1/5)</a:t>
+              <a:t>구현 1/1: 폴더를 만들고 빈 파일을 연다</a:t>
             </a:r>
           </a:p>
         </p:txBody>
@@ -6406,7 +7017,7 @@
               </a:defRPr>
             </a:pPr>
             <a:r>
-              <a:t>~/ros2_curri/agv_ws/src/agv_description/curriculum_stages/M06/agv.urdf.xacro</a:t>
+              <a:t>파일을 먼저 만든 뒤, 다음 슬라이드의 코드 블록을 위에서 아래로 직접 입력합니다.</a:t>
             </a:r>
           </a:p>
         </p:txBody>
@@ -6542,7 +7153,7 @@
               </a:defRPr>
             </a:pPr>
             <a:r>
-              <a:t>현재 단계 3/8    |    현재 폴더 ~/ros2_curri/agv_ws    |    현재 터미널</a:t>
+              <a:t>현재 단계 파일 생성 1/1    |    현재 폴더 ~/ros2_curri/my_agv_ws    |    현재 터미널</a:t>
             </a:r>
           </a:p>
         </p:txBody>
@@ -6555,8 +7166,8 @@
         </p:nvSpPr>
         <p:spPr>
           <a:xfrm>
-            <a:off x="658368" y="1627632"/>
-            <a:ext cx="10972800" cy="256032"/>
+            <a:off x="685800" y="1719072"/>
+            <a:ext cx="1417320" cy="256032"/>
           </a:xfrm>
           <a:prstGeom prst="rect">
             <a:avLst/>
@@ -6573,93 +7184,148 @@
               <a:spcAft>
                 <a:spcPts val="0"/>
               </a:spcAft>
-              <a:defRPr sz="1500" b="1">
+              <a:defRPr sz="1800" b="1">
+                <a:solidFill>
+                  <a:srgbClr val="225B9B"/>
+                </a:solidFill>
+                <a:latin typeface="Noto Sans CJK KR"/>
+              </a:defRPr>
+            </a:pPr>
+            <a:r>
+              <a:t>이번 파일</a:t>
+            </a:r>
+          </a:p>
+        </p:txBody>
+      </p:sp>
+      <p:sp>
+        <p:nvSpPr>
+          <p:cNvPr id="8" name="TextBox 7"/>
+          <p:cNvSpPr txBox="1"/>
+          <p:nvPr/>
+        </p:nvSpPr>
+        <p:spPr>
+          <a:xfrm>
+            <a:off x="1920240" y="1719072"/>
+            <a:ext cx="9235440" cy="274320"/>
+          </a:xfrm>
+          <a:prstGeom prst="rect">
+            <a:avLst/>
+          </a:prstGeom>
+          <a:noFill/>
+        </p:spPr>
+        <p:txBody>
+          <a:bodyPr wrap="square" lIns="73152" rIns="73152" tIns="36576" bIns="36576">
+            <a:spAutoFit/>
+          </a:bodyPr>
+          <a:lstStyle/>
+          <a:p>
+            <a:pPr algn="l">
+              <a:spcAft>
+                <a:spcPts val="0"/>
+              </a:spcAft>
+              <a:defRPr sz="1400" b="1">
                 <a:solidFill>
                   <a:srgbClr val="122C4E"/>
                 </a:solidFill>
-                <a:latin typeface="Noto Sans CJK KR"/>
-              </a:defRPr>
-            </a:pPr>
-            <a:r>
-              <a:t>이번 단계: 파일의 전체 내용을 중간 생략 없이 작성합니다. 아래 줄 범위를 끝까지 입력하세요.</a:t>
-            </a:r>
-          </a:p>
-        </p:txBody>
-      </p:sp>
-      <p:sp>
-        <p:nvSpPr>
-          <p:cNvPr id="8" name="Rectangle 7"/>
+                <a:latin typeface="DejaVu Sans Mono"/>
+              </a:defRPr>
+            </a:pPr>
+            <a:r>
+              <a:t>~/ros2_curri/my_agv_ws/src/agv_description/curriculum_stages/M06/agv.urdf.xacro</a:t>
+            </a:r>
+          </a:p>
+        </p:txBody>
+      </p:sp>
+      <p:sp>
+        <p:nvSpPr>
+          <p:cNvPr id="9" name="TextBox 8"/>
+          <p:cNvSpPr txBox="1"/>
+          <p:nvPr/>
+        </p:nvSpPr>
+        <p:spPr>
+          <a:xfrm>
+            <a:off x="685800" y="2103120"/>
+            <a:ext cx="1417320" cy="256032"/>
+          </a:xfrm>
+          <a:prstGeom prst="rect">
+            <a:avLst/>
+          </a:prstGeom>
+          <a:noFill/>
+        </p:spPr>
+        <p:txBody>
+          <a:bodyPr wrap="square" lIns="73152" rIns="73152" tIns="36576" bIns="36576">
+            <a:spAutoFit/>
+          </a:bodyPr>
+          <a:lstStyle/>
+          <a:p>
+            <a:pPr algn="l">
+              <a:spcAft>
+                <a:spcPts val="0"/>
+              </a:spcAft>
+              <a:defRPr sz="1800" b="1">
+                <a:solidFill>
+                  <a:srgbClr val="2A8B5A"/>
+                </a:solidFill>
+                <a:latin typeface="Noto Sans CJK KR"/>
+              </a:defRPr>
+            </a:pPr>
+            <a:r>
+              <a:t>만드는 것</a:t>
+            </a:r>
+          </a:p>
+        </p:txBody>
+      </p:sp>
+      <p:sp>
+        <p:nvSpPr>
+          <p:cNvPr id="10" name="TextBox 9"/>
+          <p:cNvSpPr txBox="1"/>
+          <p:nvPr/>
+        </p:nvSpPr>
+        <p:spPr>
+          <a:xfrm>
+            <a:off x="1920240" y="2103120"/>
+            <a:ext cx="9235440" cy="438912"/>
+          </a:xfrm>
+          <a:prstGeom prst="rect">
+            <a:avLst/>
+          </a:prstGeom>
+          <a:noFill/>
+        </p:spPr>
+        <p:txBody>
+          <a:bodyPr wrap="square" lIns="73152" rIns="73152" tIns="36576" bIns="36576">
+            <a:spAutoFit/>
+          </a:bodyPr>
+          <a:lstStyle/>
+          <a:p>
+            <a:pPr algn="l">
+              <a:spcAft>
+                <a:spcPts val="0"/>
+              </a:spcAft>
+              <a:defRPr sz="1700" b="0">
+                <a:solidFill>
+                  <a:srgbClr val="122C4E"/>
+                </a:solidFill>
+                <a:latin typeface="Noto Sans CJK KR"/>
+              </a:defRPr>
+            </a:pPr>
+            <a:r>
+              <a:t>반복되는 좌·우 바퀴를 property와 macro 하나로 생성하는 재사용 가능한 AGV 설명</a:t>
+            </a:r>
+          </a:p>
+        </p:txBody>
+      </p:sp>
+      <p:sp>
+        <p:nvSpPr>
+          <p:cNvPr id="11" name="Rounded Rectangle 10"/>
           <p:cNvSpPr/>
           <p:nvPr/>
         </p:nvSpPr>
         <p:spPr>
           <a:xfrm>
-            <a:off x="658368" y="1956816"/>
-            <a:ext cx="10972800" cy="603504"/>
-          </a:xfrm>
-          <a:prstGeom prst="rect">
-            <a:avLst/>
-          </a:prstGeom>
-          <a:solidFill>
-            <a:srgbClr val="F4F7FB"/>
-          </a:solidFill>
-          <a:ln>
-            <a:solidFill>
-              <a:srgbClr val="F4F7FB"/>
-            </a:solidFill>
-          </a:ln>
-        </p:spPr>
-        <p:style>
-          <a:lnRef idx="1">
-            <a:schemeClr val="accent1"/>
-          </a:lnRef>
-          <a:fillRef idx="3">
-            <a:schemeClr val="accent1"/>
-          </a:fillRef>
-          <a:effectRef idx="2">
-            <a:schemeClr val="accent1"/>
-          </a:effectRef>
-          <a:fontRef idx="minor">
-            <a:schemeClr val="lt1"/>
-          </a:fontRef>
-        </p:style>
-        <p:txBody>
-          <a:bodyPr rtlCol="0" anchor="ctr" wrap="square" lIns="73152" rIns="73152" tIns="36576" bIns="36576"/>
-          <a:lstStyle/>
-          <a:p>
-            <a:pPr algn="l">
-              <a:spcAft>
-                <a:spcPts val="0"/>
-              </a:spcAft>
-              <a:defRPr sz="1400" b="0">
-                <a:solidFill>
-                  <a:srgbClr val="122C4E"/>
-                </a:solidFill>
-                <a:latin typeface="DejaVu Sans Mono"/>
-              </a:defRPr>
-            </a:pPr>
-            <a:r>
-              <a:t>파일 생성: mkdir -p ~/ros2_curri/agv_ws/src/agv_description/curriculum_stages/M06</a:t>
-            </a:r>
-            <a:br/>
-            <a:r>
-              <a:t>파일 열기: nano ~/ros2_curri/agv_ws/src/agv_description/curriculum_stages/M06/agv.urdf.xacro</a:t>
-            </a:r>
-          </a:p>
-        </p:txBody>
-      </p:sp>
-      <p:sp>
-        <p:nvSpPr>
-          <p:cNvPr id="9" name="Rectangle 8"/>
-          <p:cNvSpPr/>
-          <p:nvPr/>
-        </p:nvSpPr>
-        <p:spPr>
-          <a:xfrm>
-            <a:off x="658368" y="2706624"/>
-            <a:ext cx="10972800" cy="3364992"/>
-          </a:xfrm>
-          <a:prstGeom prst="rect">
+            <a:off x="676656" y="2852928"/>
+            <a:ext cx="10881360" cy="1682496"/>
+          </a:xfrm>
+          <a:prstGeom prst="roundRect">
             <a:avLst/>
           </a:prstGeom>
           <a:solidFill>
@@ -6686,14 +7352,14 @@
           </a:fontRef>
         </p:style>
         <p:txBody>
-          <a:bodyPr rtlCol="0" anchor="ctr" wrap="square" lIns="164592" rIns="164592" tIns="109728" bIns="36576"/>
+          <a:bodyPr rtlCol="0" anchor="ctr" wrap="square" lIns="73152" rIns="73152" tIns="36576" bIns="36576"/>
           <a:lstStyle/>
           <a:p>
             <a:pPr algn="l">
               <a:spcAft>
                 <a:spcPts val="0"/>
               </a:spcAft>
-              <a:defRPr sz="1400" b="0">
+              <a:defRPr sz="1600" b="0">
                 <a:solidFill>
                   <a:srgbClr val="FFFFFF"/>
                 </a:solidFill>
@@ -6701,65 +7367,25 @@
               </a:defRPr>
             </a:pPr>
             <a:r>
-              <a:t>&lt;?xml version="1.0" ?&gt;</a:t>
+              <a:t>mkdir -p ~/ros2_curri/my_agv_ws/src/agv_description/curriculum_stages/M06</a:t>
             </a:r>
             <a:br/>
             <a:r>
-              <a:t>&lt;robot xmlns:xacro="http://www.ros.org/wiki/xacro" name="agv_m06"&gt;</a:t>
-            </a:r>
-            <a:br/>
-            <a:r>
-              <a:t>  </a:t>
-            </a:r>
-            <a:br/>
-            <a:r>
-              <a:t>  </a:t>
-            </a:r>
-            <a:br/>
-            <a:r>
-              <a:t>  &lt;xacro:property name="wheel_radius" value="0.08"/&gt;</a:t>
-            </a:r>
-            <a:br/>
-            <a:r>
-              <a:t>  </a:t>
-            </a:r>
-            <a:br/>
-            <a:r>
-              <a:t>  </a:t>
-            </a:r>
-            <a:br/>
-            <a:r>
-              <a:t>  &lt;xacro:property name="half_track" value="0.19"/&gt;</a:t>
-            </a:r>
-            <a:br/>
-            <a:r>
-              <a:t>  </a:t>
-            </a:r>
-            <a:br/>
-            <a:r>
-              <a:t>  </a:t>
-            </a:r>
-            <a:br/>
-            <a:r>
-              <a:t>  &lt;xacro:macro name="wheel" params="side y"&gt;</a:t>
-            </a:r>
-            <a:br/>
-            <a:r>
-              <a:t>    </a:t>
-            </a:r>
-          </a:p>
-        </p:txBody>
-      </p:sp>
-      <p:sp>
-        <p:nvSpPr>
-          <p:cNvPr id="10" name="TextBox 9"/>
-          <p:cNvSpPr txBox="1"/>
-          <p:nvPr/>
-        </p:nvSpPr>
-        <p:spPr>
-          <a:xfrm>
-            <a:off x="749808" y="6181344"/>
-            <a:ext cx="10789920" cy="201168"/>
+              <a:t>nano ~/ros2_curri/my_agv_ws/src/agv_description/curriculum_stages/M06/agv.urdf.xacro</a:t>
+            </a:r>
+          </a:p>
+        </p:txBody>
+      </p:sp>
+      <p:sp>
+        <p:nvSpPr>
+          <p:cNvPr id="12" name="TextBox 11"/>
+          <p:cNvSpPr txBox="1"/>
+          <p:nvPr/>
+        </p:nvSpPr>
+        <p:spPr>
+          <a:xfrm>
+            <a:off x="804672" y="4901184"/>
+            <a:ext cx="10241280" cy="329184"/>
           </a:xfrm>
           <a:prstGeom prst="rect">
             <a:avLst/>
@@ -6772,19 +7398,58 @@
           </a:bodyPr>
           <a:lstStyle/>
           <a:p>
-            <a:pPr algn="l">
-              <a:spcAft>
-                <a:spcPts val="0"/>
-              </a:spcAft>
-              <a:defRPr sz="1000" b="0">
-                <a:solidFill>
-                  <a:srgbClr val="5C6672"/>
-                </a:solidFill>
-                <a:latin typeface="Noto Sans CJK KR"/>
-              </a:defRPr>
-            </a:pPr>
-            <a:r>
-              <a:t>파일 전체 1/5 · 이 슬라이드 다음에 같은 파일의 나머지 줄이 이어집니다.</a:t>
+            <a:pPr algn="ctr">
+              <a:spcAft>
+                <a:spcPts val="0"/>
+              </a:spcAft>
+              <a:defRPr sz="1600" b="1">
+                <a:solidFill>
+                  <a:srgbClr val="DB7E22"/>
+                </a:solidFill>
+                <a:latin typeface="Noto Sans CJK KR"/>
+              </a:defRPr>
+            </a:pPr>
+            <a:r>
+              <a:t>nano 저장: Ctrl+O → Enter → Ctrl+X  |  파일이 열리면 아직 비어 있는 것이 정상입니다.</a:t>
+            </a:r>
+          </a:p>
+        </p:txBody>
+      </p:sp>
+      <p:sp>
+        <p:nvSpPr>
+          <p:cNvPr id="13" name="TextBox 12"/>
+          <p:cNvSpPr txBox="1"/>
+          <p:nvPr/>
+        </p:nvSpPr>
+        <p:spPr>
+          <a:xfrm>
+            <a:off x="804672" y="5504688"/>
+            <a:ext cx="10241280" cy="329184"/>
+          </a:xfrm>
+          <a:prstGeom prst="rect">
+            <a:avLst/>
+          </a:prstGeom>
+          <a:noFill/>
+        </p:spPr>
+        <p:txBody>
+          <a:bodyPr wrap="square" lIns="73152" rIns="73152" tIns="36576" bIns="36576">
+            <a:spAutoFit/>
+          </a:bodyPr>
+          <a:lstStyle/>
+          <a:p>
+            <a:pPr algn="ctr">
+              <a:spcAft>
+                <a:spcPts val="0"/>
+              </a:spcAft>
+              <a:defRPr sz="1500" b="1">
+                <a:solidFill>
+                  <a:srgbClr val="2A8B5A"/>
+                </a:solidFill>
+                <a:latin typeface="Noto Sans CJK KR"/>
+              </a:defRPr>
+            </a:pPr>
+            <a:r>
+              <a:t>다음 단계의 확인 화면: 생성 URDF의 left/right wheel과 같은 반지름</a:t>
             </a:r>
           </a:p>
         </p:txBody>
@@ -6841,7 +7506,7 @@
               </a:defRPr>
             </a:pPr>
             <a:r>
-              <a:t>파일을 계속 작성하고 저장한다 (2/5)</a:t>
+              <a:t>구현 1/1: 코드 입력 (1/5)</a:t>
             </a:r>
           </a:p>
         </p:txBody>
@@ -6880,7 +7545,7 @@
               </a:defRPr>
             </a:pPr>
             <a:r>
-              <a:t>~/ros2_curri/agv_ws/src/agv_description/curriculum_stages/M06/agv.urdf.xacro</a:t>
+              <a:t>~/ros2_curri/my_agv_ws/src/agv_description/curriculum_stages/M06/agv.urdf.xacro</a:t>
             </a:r>
           </a:p>
         </p:txBody>
@@ -7016,7 +7681,7 @@
               </a:defRPr>
             </a:pPr>
             <a:r>
-              <a:t>현재 단계 4/8    |    현재 폴더 ~/ros2_curri/agv_ws    |    현재 터미널</a:t>
+              <a:t>현재 단계 파일 1/1 · 입력 1/5    |    현재 폴더 ~/ros2_curri/my_agv_ws    |    현재 터미널</a:t>
             </a:r>
           </a:p>
         </p:txBody>
@@ -7029,8 +7694,8 @@
         </p:nvSpPr>
         <p:spPr>
           <a:xfrm>
-            <a:off x="658368" y="1627632"/>
-            <a:ext cx="10972800" cy="256032"/>
+            <a:off x="658368" y="1609344"/>
+            <a:ext cx="10972800" cy="384048"/>
           </a:xfrm>
           <a:prstGeom prst="rect">
             <a:avLst/>
@@ -7047,7 +7712,7 @@
               <a:spcAft>
                 <a:spcPts val="0"/>
               </a:spcAft>
-              <a:defRPr sz="1500" b="1">
+              <a:defRPr sz="1400" b="1">
                 <a:solidFill>
                   <a:srgbClr val="122C4E"/>
                 </a:solidFill>
@@ -7055,7 +7720,7 @@
               </a:defRPr>
             </a:pPr>
             <a:r>
-              <a:t>이번 단계: 파일의 전체 내용을 중간 생략 없이 작성합니다. 아래 줄 범위를 끝까지 입력하세요.</a:t>
+              <a:t>이 블록이 하는 일: 파일의 root와 첫 model/link를 입력합니다. 태그 여닫는 순서를 그대로 유지합니다.</a:t>
             </a:r>
           </a:p>
         </p:txBody>
@@ -7105,7 +7770,7 @@
               <a:spcAft>
                 <a:spcPts val="0"/>
               </a:spcAft>
-              <a:defRPr sz="1400" b="0">
+              <a:defRPr sz="1300" b="0">
                 <a:solidFill>
                   <a:srgbClr val="122C4E"/>
                 </a:solidFill>
@@ -7113,11 +7778,11 @@
               </a:defRPr>
             </a:pPr>
             <a:r>
-              <a:t>파일 생성: mkdir -p ~/ros2_curri/agv_ws/src/agv_description/curriculum_stages/M06</a:t>
+              <a:t>현재 열린 파일: ~/ros2_curri/my_agv_ws/src/agv_description/curriculum_stages/M06/agv.urdf.xacro</a:t>
             </a:r>
             <a:br/>
             <a:r>
-              <a:t>파일 열기: nano ~/ros2_curri/agv_ws/src/agv_description/curriculum_stages/M06/agv.urdf.xacro</a:t>
+              <a:t>아래 코드만 입력 → Ctrl+O → Enter로 저장 → 다음 블록으로 이동</a:t>
             </a:r>
           </a:p>
         </p:txBody>
@@ -7175,51 +7840,51 @@
               </a:defRPr>
             </a:pPr>
             <a:r>
+              <a:t>&lt;?xml version="1.0" ?&gt;</a:t>
+            </a:r>
+            <a:br/>
+            <a:r>
+              <a:t>&lt;robot xmlns:xacro="http://www.ros.org/wiki/xacro" name="agv_m06"&gt;</a:t>
+            </a:r>
+            <a:br/>
+            <a:r>
+              <a:t>  </a:t>
+            </a:r>
+            <a:br/>
+            <a:r>
+              <a:t>  </a:t>
+            </a:r>
+            <a:br/>
+            <a:r>
+              <a:t>  &lt;xacro:property name="wheel_radius" value="0.08"/&gt;</a:t>
+            </a:r>
+            <a:br/>
+            <a:r>
+              <a:t>  </a:t>
+            </a:r>
+            <a:br/>
+            <a:r>
+              <a:t>  </a:t>
+            </a:r>
+            <a:br/>
+            <a:r>
+              <a:t>  &lt;xacro:property name="half_track" value="0.19"/&gt;</a:t>
+            </a:r>
+            <a:br/>
+            <a:r>
+              <a:t>  </a:t>
+            </a:r>
+            <a:br/>
+            <a:r>
+              <a:t>  </a:t>
+            </a:r>
+            <a:br/>
+            <a:r>
+              <a:t>  &lt;xacro:macro name="wheel" params="side y"&gt;</a:t>
+            </a:r>
+            <a:br/>
+            <a:r>
               <a:t>    </a:t>
-            </a:r>
-            <a:br/>
-            <a:r>
-              <a:t>    &lt;link name="${side}_wheel_link"&gt;</a:t>
-            </a:r>
-            <a:br/>
-            <a:r>
-              <a:t>      &lt;visual&gt;</a:t>
-            </a:r>
-            <a:br/>
-            <a:r>
-              <a:t>        &lt;origin rpy="1.5708 0 0"/&gt;</a:t>
-            </a:r>
-            <a:br/>
-            <a:r>
-              <a:t>        &lt;geometry&gt;</a:t>
-            </a:r>
-            <a:br/>
-            <a:r>
-              <a:t>          &lt;cylinder radius="${wheel_radius}" length="0.05"/&gt;</a:t>
-            </a:r>
-            <a:br/>
-            <a:r>
-              <a:t>        &lt;/geometry&gt;</a:t>
-            </a:r>
-            <a:br/>
-            <a:r>
-              <a:t>      &lt;/visual&gt;</a:t>
-            </a:r>
-            <a:br/>
-            <a:r>
-              <a:t>    &lt;/link&gt;</a:t>
-            </a:r>
-            <a:br/>
-            <a:r>
-              <a:t>    </a:t>
-            </a:r>
-            <a:br/>
-            <a:r>
-              <a:t>    </a:t>
-            </a:r>
-            <a:br/>
-            <a:r>
-              <a:t>    &lt;joint name="${side}_wheel_joint" type="continuous"&gt;</a:t>
             </a:r>
           </a:p>
         </p:txBody>
@@ -7258,7 +7923,7 @@
               </a:defRPr>
             </a:pPr>
             <a:r>
-              <a:t>파일 전체 2/5 · 이 슬라이드 다음에 같은 파일의 나머지 줄이 이어집니다.</a:t>
+              <a:t>입력 1/5 · 이 파일의 다음 코드 블록이 바로 다음 슬라이드에 이어집니다.</a:t>
             </a:r>
           </a:p>
         </p:txBody>
@@ -7315,7 +7980,7 @@
               </a:defRPr>
             </a:pPr>
             <a:r>
-              <a:t>파일을 계속 작성하고 저장한다 (3/5)</a:t>
+              <a:t>구현 1/1: 코드 입력 (2/5)</a:t>
             </a:r>
           </a:p>
         </p:txBody>
@@ -7354,7 +8019,7 @@
               </a:defRPr>
             </a:pPr>
             <a:r>
-              <a:t>~/ros2_curri/agv_ws/src/agv_description/curriculum_stages/M06/agv.urdf.xacro</a:t>
+              <a:t>~/ros2_curri/my_agv_ws/src/agv_description/curriculum_stages/M06/agv.urdf.xacro</a:t>
             </a:r>
           </a:p>
         </p:txBody>
@@ -7490,7 +8155,7 @@
               </a:defRPr>
             </a:pPr>
             <a:r>
-              <a:t>현재 단계 5/8    |    현재 폴더 ~/ros2_curri/agv_ws    |    현재 터미널</a:t>
+              <a:t>현재 단계 파일 1/1 · 입력 2/5    |    현재 폴더 ~/ros2_curri/my_agv_ws    |    현재 터미널</a:t>
             </a:r>
           </a:p>
         </p:txBody>
@@ -7503,8 +8168,8 @@
         </p:nvSpPr>
         <p:spPr>
           <a:xfrm>
-            <a:off x="658368" y="1627632"/>
-            <a:ext cx="10972800" cy="256032"/>
+            <a:off x="658368" y="1609344"/>
+            <a:ext cx="10972800" cy="384048"/>
           </a:xfrm>
           <a:prstGeom prst="rect">
             <a:avLst/>
@@ -7521,7 +8186,7 @@
               <a:spcAft>
                 <a:spcPts val="0"/>
               </a:spcAft>
-              <a:defRPr sz="1500" b="1">
+              <a:defRPr sz="1400" b="1">
                 <a:solidFill>
                   <a:srgbClr val="122C4E"/>
                 </a:solidFill>
@@ -7529,7 +8194,7 @@
               </a:defRPr>
             </a:pPr>
             <a:r>
-              <a:t>이번 단계: 파일의 전체 내용을 중간 생략 없이 작성합니다. 아래 줄 범위를 끝까지 입력하세요.</a:t>
+              <a:t>이 블록이 하는 일: 앞에서 만든 구조에 geometry·collision·sensor·joint를 하나씩 붙입니다.</a:t>
             </a:r>
           </a:p>
         </p:txBody>
@@ -7579,7 +8244,7 @@
               <a:spcAft>
                 <a:spcPts val="0"/>
               </a:spcAft>
-              <a:defRPr sz="1400" b="0">
+              <a:defRPr sz="1300" b="0">
                 <a:solidFill>
                   <a:srgbClr val="122C4E"/>
                 </a:solidFill>
@@ -7587,11 +8252,11 @@
               </a:defRPr>
             </a:pPr>
             <a:r>
-              <a:t>파일 생성: mkdir -p ~/ros2_curri/agv_ws/src/agv_description/curriculum_stages/M06</a:t>
+              <a:t>현재 열린 파일: ~/ros2_curri/my_agv_ws/src/agv_description/curriculum_stages/M06/agv.urdf.xacro</a:t>
             </a:r>
             <a:br/>
             <a:r>
-              <a:t>파일 열기: nano ~/ros2_curri/agv_ws/src/agv_description/curriculum_stages/M06/agv.urdf.xacro</a:t>
+              <a:t>아래 코드만 입력 → Ctrl+O → Enter로 저장 → 다음 블록으로 이동</a:t>
             </a:r>
           </a:p>
         </p:txBody>
@@ -7649,51 +8314,51 @@
               </a:defRPr>
             </a:pPr>
             <a:r>
-              <a:t>      &lt;parent link="base_link"/&gt;</a:t>
+              <a:t>    </a:t>
             </a:r>
             <a:br/>
             <a:r>
-              <a:t>      &lt;child link="${side}_wheel_link"/&gt;</a:t>
+              <a:t>    &lt;link name="${side}_wheel_link"&gt;</a:t>
             </a:r>
             <a:br/>
             <a:r>
-              <a:t>      &lt;origin xyz="0 ${y} ${wheel_radius}"/&gt;</a:t>
+              <a:t>      &lt;visual&gt;</a:t>
             </a:r>
             <a:br/>
             <a:r>
-              <a:t>      &lt;axis xyz="0 1 0"/&gt;</a:t>
+              <a:t>        &lt;origin rpy="1.5708 0 0"/&gt;</a:t>
             </a:r>
             <a:br/>
             <a:r>
-              <a:t>    &lt;/joint&gt;</a:t>
+              <a:t>        &lt;geometry&gt;</a:t>
             </a:r>
             <a:br/>
             <a:r>
+              <a:t>          &lt;cylinder radius="${wheel_radius}" length="0.05"/&gt;</a:t>
+            </a:r>
+            <a:br/>
+            <a:r>
+              <a:t>        &lt;/geometry&gt;</a:t>
+            </a:r>
+            <a:br/>
+            <a:r>
+              <a:t>      &lt;/visual&gt;</a:t>
+            </a:r>
+            <a:br/>
+            <a:r>
+              <a:t>    &lt;/link&gt;</a:t>
+            </a:r>
+            <a:br/>
+            <a:r>
               <a:t>    </a:t>
             </a:r>
             <a:br/>
             <a:r>
-              <a:t>  </a:t>
+              <a:t>    </a:t>
             </a:r>
             <a:br/>
             <a:r>
-              <a:t>  &lt;/xacro:macro&gt;</a:t>
-            </a:r>
-            <a:br/>
-            <a:r>
-              <a:t>  </a:t>
-            </a:r>
-            <a:br/>
-            <a:r>
-              <a:t>  </a:t>
-            </a:r>
-            <a:br/>
-            <a:r>
-              <a:t>  &lt;link name="base_link"&gt;</a:t>
-            </a:r>
-            <a:br/>
-            <a:r>
-              <a:t>    &lt;visual&gt;</a:t>
+              <a:t>    &lt;joint name="${side}_wheel_joint" type="continuous"&gt;</a:t>
             </a:r>
           </a:p>
         </p:txBody>
@@ -7732,7 +8397,7 @@
               </a:defRPr>
             </a:pPr>
             <a:r>
-              <a:t>파일 전체 3/5 · 이 슬라이드 다음에 같은 파일의 나머지 줄이 이어집니다.</a:t>
+              <a:t>입력 2/5 · 이 파일의 다음 코드 블록이 바로 다음 슬라이드에 이어집니다.</a:t>
             </a:r>
           </a:p>
         </p:txBody>
@@ -7789,7 +8454,7 @@
               </a:defRPr>
             </a:pPr>
             <a:r>
-              <a:t>파일을 계속 작성하고 저장한다 (4/5)</a:t>
+              <a:t>구현 1/1: 코드 입력 (3/5)</a:t>
             </a:r>
           </a:p>
         </p:txBody>
@@ -7828,7 +8493,7 @@
               </a:defRPr>
             </a:pPr>
             <a:r>
-              <a:t>~/ros2_curri/agv_ws/src/agv_description/curriculum_stages/M06/agv.urdf.xacro</a:t>
+              <a:t>~/ros2_curri/my_agv_ws/src/agv_description/curriculum_stages/M06/agv.urdf.xacro</a:t>
             </a:r>
           </a:p>
         </p:txBody>
@@ -7964,7 +8629,7 @@
               </a:defRPr>
             </a:pPr>
             <a:r>
-              <a:t>현재 단계 6/8    |    현재 폴더 ~/ros2_curri/agv_ws    |    현재 터미널</a:t>
+              <a:t>현재 단계 파일 1/1 · 입력 3/5    |    현재 폴더 ~/ros2_curri/my_agv_ws    |    현재 터미널</a:t>
             </a:r>
           </a:p>
         </p:txBody>
@@ -7977,8 +8642,8 @@
         </p:nvSpPr>
         <p:spPr>
           <a:xfrm>
-            <a:off x="658368" y="1627632"/>
-            <a:ext cx="10972800" cy="256032"/>
+            <a:off x="658368" y="1609344"/>
+            <a:ext cx="10972800" cy="384048"/>
           </a:xfrm>
           <a:prstGeom prst="rect">
             <a:avLst/>
@@ -7995,7 +8660,7 @@
               <a:spcAft>
                 <a:spcPts val="0"/>
               </a:spcAft>
-              <a:defRPr sz="1500" b="1">
+              <a:defRPr sz="1400" b="1">
                 <a:solidFill>
                   <a:srgbClr val="122C4E"/>
                 </a:solidFill>
@@ -8003,7 +8668,7 @@
               </a:defRPr>
             </a:pPr>
             <a:r>
-              <a:t>이번 단계: 파일의 전체 내용을 중간 생략 없이 작성합니다. 아래 줄 범위를 끝까지 입력하세요.</a:t>
+              <a:t>이 블록이 하는 일: 앞에서 만든 구조에 geometry·collision·sensor·joint를 하나씩 붙입니다.</a:t>
             </a:r>
           </a:p>
         </p:txBody>
@@ -8053,7 +8718,7 @@
               <a:spcAft>
                 <a:spcPts val="0"/>
               </a:spcAft>
-              <a:defRPr sz="1400" b="0">
+              <a:defRPr sz="1300" b="0">
                 <a:solidFill>
                   <a:srgbClr val="122C4E"/>
                 </a:solidFill>
@@ -8061,11 +8726,11 @@
               </a:defRPr>
             </a:pPr>
             <a:r>
-              <a:t>파일 생성: mkdir -p ~/ros2_curri/agv_ws/src/agv_description/curriculum_stages/M06</a:t>
+              <a:t>현재 열린 파일: ~/ros2_curri/my_agv_ws/src/agv_description/curriculum_stages/M06/agv.urdf.xacro</a:t>
             </a:r>
             <a:br/>
             <a:r>
-              <a:t>파일 열기: nano ~/ros2_curri/agv_ws/src/agv_description/curriculum_stages/M06/agv.urdf.xacro</a:t>
+              <a:t>아래 코드만 입력 → Ctrl+O → Enter로 저장 → 다음 블록으로 이동</a:t>
             </a:r>
           </a:p>
         </p:txBody>
@@ -8123,27 +8788,27 @@
               </a:defRPr>
             </a:pPr>
             <a:r>
-              <a:t>      &lt;origin xyz="0 0 0.16"/&gt;</a:t>
+              <a:t>      &lt;parent link="base_link"/&gt;</a:t>
             </a:r>
             <a:br/>
             <a:r>
-              <a:t>      &lt;geometry&gt;</a:t>
+              <a:t>      &lt;child link="${side}_wheel_link"/&gt;</a:t>
             </a:r>
             <a:br/>
             <a:r>
-              <a:t>        &lt;box size="0.60 0.42 0.16"/&gt;</a:t>
+              <a:t>      &lt;origin xyz="0 ${y} ${wheel_radius}"/&gt;</a:t>
             </a:r>
             <a:br/>
             <a:r>
-              <a:t>      &lt;/geometry&gt;</a:t>
+              <a:t>      &lt;axis xyz="0 1 0"/&gt;</a:t>
             </a:r>
             <a:br/>
             <a:r>
-              <a:t>    &lt;/visual&gt;</a:t>
+              <a:t>    &lt;/joint&gt;</a:t>
             </a:r>
             <a:br/>
             <a:r>
-              <a:t>  &lt;/link&gt;</a:t>
+              <a:t>    </a:t>
             </a:r>
             <a:br/>
             <a:r>
@@ -8151,21 +8816,24 @@
             </a:r>
             <a:br/>
             <a:r>
+              <a:t>  &lt;/xacro:macro&gt;</a:t>
+            </a:r>
+            <a:br/>
+            <a:r>
               <a:t>  </a:t>
             </a:r>
             <a:br/>
             <a:r>
-              <a:t>  &lt;xacro:wheel side="left" y="${half_track}"/&gt;</a:t>
+              <a:t>  </a:t>
             </a:r>
             <a:br/>
             <a:r>
-              <a:t>  &lt;xacro:wheel side="right" y="${-half_track}"/&gt;</a:t>
+              <a:t>  &lt;link name="base_link"&gt;</a:t>
             </a:r>
             <a:br/>
             <a:r>
-              <a:t>  </a:t>
-            </a:r>
-            <a:br/>
+              <a:t>    &lt;visual&gt;</a:t>
+            </a:r>
           </a:p>
         </p:txBody>
       </p:sp>
@@ -8203,7 +8871,7 @@
               </a:defRPr>
             </a:pPr>
             <a:r>
-              <a:t>파일 전체 4/5 · 이 슬라이드 다음에 같은 파일의 나머지 줄이 이어집니다.</a:t>
+              <a:t>입력 3/5 · 이 파일의 다음 코드 블록이 바로 다음 슬라이드에 이어집니다.</a:t>
             </a:r>
           </a:p>
         </p:txBody>
@@ -8260,7 +8928,7 @@
               </a:defRPr>
             </a:pPr>
             <a:r>
-              <a:t>파일을 계속 작성하고 저장한다 (5/5)</a:t>
+              <a:t>구현 1/1: 코드 입력 (4/5)</a:t>
             </a:r>
           </a:p>
         </p:txBody>
@@ -8299,7 +8967,7 @@
               </a:defRPr>
             </a:pPr>
             <a:r>
-              <a:t>~/ros2_curri/agv_ws/src/agv_description/curriculum_stages/M06/agv.urdf.xacro</a:t>
+              <a:t>~/ros2_curri/my_agv_ws/src/agv_description/curriculum_stages/M06/agv.urdf.xacro</a:t>
             </a:r>
           </a:p>
         </p:txBody>
@@ -8435,7 +9103,7 @@
               </a:defRPr>
             </a:pPr>
             <a:r>
-              <a:t>현재 단계 7/8    |    현재 폴더 ~/ros2_curri/agv_ws    |    현재 터미널</a:t>
+              <a:t>현재 단계 파일 1/1 · 입력 4/5    |    현재 폴더 ~/ros2_curri/my_agv_ws    |    현재 터미널</a:t>
             </a:r>
           </a:p>
         </p:txBody>
@@ -8448,8 +9116,8 @@
         </p:nvSpPr>
         <p:spPr>
           <a:xfrm>
-            <a:off x="658368" y="1627632"/>
-            <a:ext cx="10972800" cy="256032"/>
+            <a:off x="658368" y="1609344"/>
+            <a:ext cx="10972800" cy="384048"/>
           </a:xfrm>
           <a:prstGeom prst="rect">
             <a:avLst/>
@@ -8466,7 +9134,7 @@
               <a:spcAft>
                 <a:spcPts val="0"/>
               </a:spcAft>
-              <a:defRPr sz="1500" b="1">
+              <a:defRPr sz="1400" b="1">
                 <a:solidFill>
                   <a:srgbClr val="122C4E"/>
                 </a:solidFill>
@@ -8474,7 +9142,7 @@
               </a:defRPr>
             </a:pPr>
             <a:r>
-              <a:t>이번 단계: 파일의 전체 내용을 중간 생략 없이 작성합니다. 아래 줄 범위를 끝까지 입력하세요.</a:t>
+              <a:t>이 블록이 하는 일: 앞에서 만든 구조에 geometry·collision·sensor·joint를 하나씩 붙입니다.</a:t>
             </a:r>
           </a:p>
         </p:txBody>
@@ -8524,7 +9192,7 @@
               <a:spcAft>
                 <a:spcPts val="0"/>
               </a:spcAft>
-              <a:defRPr sz="1400" b="0">
+              <a:defRPr sz="1300" b="0">
                 <a:solidFill>
                   <a:srgbClr val="122C4E"/>
                 </a:solidFill>
@@ -8532,11 +9200,11 @@
               </a:defRPr>
             </a:pPr>
             <a:r>
-              <a:t>파일 생성: mkdir -p ~/ros2_curri/agv_ws/src/agv_description/curriculum_stages/M06</a:t>
+              <a:t>현재 열린 파일: ~/ros2_curri/my_agv_ws/src/agv_description/curriculum_stages/M06/agv.urdf.xacro</a:t>
             </a:r>
             <a:br/>
             <a:r>
-              <a:t>파일 열기: nano ~/ros2_curri/agv_ws/src/agv_description/curriculum_stages/M06/agv.urdf.xacro</a:t>
+              <a:t>아래 코드만 입력 → Ctrl+O → Enter로 저장 → 다음 블록으로 이동</a:t>
             </a:r>
           </a:p>
         </p:txBody>
@@ -8594,8 +9262,49 @@
               </a:defRPr>
             </a:pPr>
             <a:r>
-              <a:t>&lt;/robot&gt;</a:t>
-            </a:r>
+              <a:t>      &lt;origin xyz="0 0 0.16"/&gt;</a:t>
+            </a:r>
+            <a:br/>
+            <a:r>
+              <a:t>      &lt;geometry&gt;</a:t>
+            </a:r>
+            <a:br/>
+            <a:r>
+              <a:t>        &lt;box size="0.60 0.42 0.16"/&gt;</a:t>
+            </a:r>
+            <a:br/>
+            <a:r>
+              <a:t>      &lt;/geometry&gt;</a:t>
+            </a:r>
+            <a:br/>
+            <a:r>
+              <a:t>    &lt;/visual&gt;</a:t>
+            </a:r>
+            <a:br/>
+            <a:r>
+              <a:t>  &lt;/link&gt;</a:t>
+            </a:r>
+            <a:br/>
+            <a:r>
+              <a:t>  </a:t>
+            </a:r>
+            <a:br/>
+            <a:r>
+              <a:t>  </a:t>
+            </a:r>
+            <a:br/>
+            <a:r>
+              <a:t>  &lt;xacro:wheel side="left" y="${half_track}"/&gt;</a:t>
+            </a:r>
+            <a:br/>
+            <a:r>
+              <a:t>  &lt;xacro:wheel side="right" y="${-half_track}"/&gt;</a:t>
+            </a:r>
+            <a:br/>
+            <a:r>
+              <a:t>  </a:t>
+            </a:r>
+            <a:br/>
           </a:p>
         </p:txBody>
       </p:sp>
@@ -8633,7 +9342,7 @@
               </a:defRPr>
             </a:pPr>
             <a:r>
-              <a:t>파일 전체 5/5 · 이 슬라이드 다음에 같은 파일의 나머지 줄이 이어집니다.</a:t>
+              <a:t>입력 4/5 · 이 파일의 다음 코드 블록이 바로 다음 슬라이드에 이어집니다.</a:t>
             </a:r>
           </a:p>
         </p:txBody>
@@ -8690,7 +9399,7 @@
               </a:defRPr>
             </a:pPr>
             <a:r>
-              <a:t>build → source → run 순서로 실행한다</a:t>
+              <a:t>구현 1/1: 코드 입력 (5/5)</a:t>
             </a:r>
           </a:p>
         </p:txBody>
@@ -8729,7 +9438,7 @@
               </a:defRPr>
             </a:pPr>
             <a:r>
-              <a:t>새 파일 또는 수정 파일은 build와 source 뒤에만 실행 이름·설정에 반영됩니다.</a:t>
+              <a:t>~/ros2_curri/my_agv_ws/src/agv_description/curriculum_stages/M06/agv.urdf.xacro</a:t>
             </a:r>
           </a:p>
         </p:txBody>
@@ -8865,23 +9574,124 @@
               </a:defRPr>
             </a:pPr>
             <a:r>
-              <a:t>현재 단계 실행    |    현재 폴더 ~/ros2_curri/agv_ws    |    현재 터미널</a:t>
-            </a:r>
-          </a:p>
-        </p:txBody>
-      </p:sp>
-      <p:sp>
-        <p:nvSpPr>
-          <p:cNvPr id="7" name="Rounded Rectangle 6"/>
+              <a:t>현재 단계 파일 1/1 · 입력 5/5    |    현재 폴더 ~/ros2_curri/my_agv_ws    |    현재 터미널</a:t>
+            </a:r>
+          </a:p>
+        </p:txBody>
+      </p:sp>
+      <p:sp>
+        <p:nvSpPr>
+          <p:cNvPr id="7" name="TextBox 6"/>
+          <p:cNvSpPr txBox="1"/>
+          <p:nvPr/>
+        </p:nvSpPr>
+        <p:spPr>
+          <a:xfrm>
+            <a:off x="658368" y="1609344"/>
+            <a:ext cx="10972800" cy="384048"/>
+          </a:xfrm>
+          <a:prstGeom prst="rect">
+            <a:avLst/>
+          </a:prstGeom>
+          <a:noFill/>
+        </p:spPr>
+        <p:txBody>
+          <a:bodyPr wrap="square" lIns="73152" rIns="73152" tIns="36576" bIns="36576">
+            <a:spAutoFit/>
+          </a:bodyPr>
+          <a:lstStyle/>
+          <a:p>
+            <a:pPr algn="l">
+              <a:spcAft>
+                <a:spcPts val="0"/>
+              </a:spcAft>
+              <a:defRPr sz="1400" b="1">
+                <a:solidFill>
+                  <a:srgbClr val="122C4E"/>
+                </a:solidFill>
+                <a:latin typeface="Noto Sans CJK KR"/>
+              </a:defRPr>
+            </a:pPr>
+            <a:r>
+              <a:t>이 블록이 하는 일: 마지막 joint·sensor·plugin과 닫는 태그를 입력해 구조를 완성합니다.</a:t>
+            </a:r>
+          </a:p>
+        </p:txBody>
+      </p:sp>
+      <p:sp>
+        <p:nvSpPr>
+          <p:cNvPr id="8" name="Rectangle 7"/>
           <p:cNvSpPr/>
           <p:nvPr/>
         </p:nvSpPr>
         <p:spPr>
           <a:xfrm>
-            <a:off x="658368" y="1700784"/>
-            <a:ext cx="10972800" cy="3182112"/>
-          </a:xfrm>
-          <a:prstGeom prst="roundRect">
+            <a:off x="658368" y="1956816"/>
+            <a:ext cx="10972800" cy="603504"/>
+          </a:xfrm>
+          <a:prstGeom prst="rect">
+            <a:avLst/>
+          </a:prstGeom>
+          <a:solidFill>
+            <a:srgbClr val="F4F7FB"/>
+          </a:solidFill>
+          <a:ln>
+            <a:solidFill>
+              <a:srgbClr val="F4F7FB"/>
+            </a:solidFill>
+          </a:ln>
+        </p:spPr>
+        <p:style>
+          <a:lnRef idx="1">
+            <a:schemeClr val="accent1"/>
+          </a:lnRef>
+          <a:fillRef idx="3">
+            <a:schemeClr val="accent1"/>
+          </a:fillRef>
+          <a:effectRef idx="2">
+            <a:schemeClr val="accent1"/>
+          </a:effectRef>
+          <a:fontRef idx="minor">
+            <a:schemeClr val="lt1"/>
+          </a:fontRef>
+        </p:style>
+        <p:txBody>
+          <a:bodyPr rtlCol="0" anchor="ctr" wrap="square" lIns="73152" rIns="73152" tIns="36576" bIns="36576"/>
+          <a:lstStyle/>
+          <a:p>
+            <a:pPr algn="l">
+              <a:spcAft>
+                <a:spcPts val="0"/>
+              </a:spcAft>
+              <a:defRPr sz="1300" b="0">
+                <a:solidFill>
+                  <a:srgbClr val="122C4E"/>
+                </a:solidFill>
+                <a:latin typeface="DejaVu Sans Mono"/>
+              </a:defRPr>
+            </a:pPr>
+            <a:r>
+              <a:t>현재 열린 파일: ~/ros2_curri/my_agv_ws/src/agv_description/curriculum_stages/M06/agv.urdf.xacro</a:t>
+            </a:r>
+            <a:br/>
+            <a:r>
+              <a:t>아래 코드만 입력 → Ctrl+O → Enter로 저장 → 다음 블록으로 이동</a:t>
+            </a:r>
+          </a:p>
+        </p:txBody>
+      </p:sp>
+      <p:sp>
+        <p:nvSpPr>
+          <p:cNvPr id="9" name="Rectangle 8"/>
+          <p:cNvSpPr/>
+          <p:nvPr/>
+        </p:nvSpPr>
+        <p:spPr>
+          <a:xfrm>
+            <a:off x="658368" y="2706624"/>
+            <a:ext cx="10972800" cy="3364992"/>
+          </a:xfrm>
+          <a:prstGeom prst="rect">
             <a:avLst/>
           </a:prstGeom>
           <a:solidFill>
@@ -8908,14 +9718,14 @@
           </a:fontRef>
         </p:style>
         <p:txBody>
-          <a:bodyPr rtlCol="0" anchor="ctr" wrap="square" lIns="73152" rIns="73152" tIns="36576" bIns="36576"/>
+          <a:bodyPr rtlCol="0" anchor="ctr" wrap="square" lIns="164592" rIns="164592" tIns="109728" bIns="36576"/>
           <a:lstStyle/>
           <a:p>
             <a:pPr algn="l">
               <a:spcAft>
                 <a:spcPts val="0"/>
               </a:spcAft>
-              <a:defRPr sz="1600" b="0">
+              <a:defRPr sz="1400" b="0">
                 <a:solidFill>
                   <a:srgbClr val="FFFFFF"/>
                 </a:solidFill>
@@ -8923,25 +9733,21 @@
               </a:defRPr>
             </a:pPr>
             <a:r>
-              <a:t>xacro ~/ros2_curri/agv_ws/src/agv_description/curriculum_stages/M06/agv.urdf.xacro &gt; /tmp/agv.urdf</a:t>
-            </a:r>
-            <a:br/>
-            <a:r>
-              <a:t>check_urdf /tmp/agv.urdf</a:t>
-            </a:r>
-          </a:p>
-        </p:txBody>
-      </p:sp>
-      <p:sp>
-        <p:nvSpPr>
-          <p:cNvPr id="8" name="TextBox 7"/>
-          <p:cNvSpPr txBox="1"/>
-          <p:nvPr/>
-        </p:nvSpPr>
-        <p:spPr>
-          <a:xfrm>
-            <a:off x="786384" y="5239512"/>
-            <a:ext cx="1261872" cy="237744"/>
+              <a:t>&lt;/robot&gt;</a:t>
+            </a:r>
+          </a:p>
+        </p:txBody>
+      </p:sp>
+      <p:sp>
+        <p:nvSpPr>
+          <p:cNvPr id="10" name="TextBox 9"/>
+          <p:cNvSpPr txBox="1"/>
+          <p:nvPr/>
+        </p:nvSpPr>
+        <p:spPr>
+          <a:xfrm>
+            <a:off x="749808" y="6181344"/>
+            <a:ext cx="10789920" cy="201168"/>
           </a:xfrm>
           <a:prstGeom prst="rect">
             <a:avLst/>
@@ -8958,54 +9764,15 @@
               <a:spcAft>
                 <a:spcPts val="0"/>
               </a:spcAft>
-              <a:defRPr sz="1800" b="1">
-                <a:solidFill>
-                  <a:srgbClr val="2A8B5A"/>
-                </a:solidFill>
-                <a:latin typeface="Noto Sans CJK KR"/>
-              </a:defRPr>
-            </a:pPr>
-            <a:r>
-              <a:t>확인 기준</a:t>
-            </a:r>
-          </a:p>
-        </p:txBody>
-      </p:sp>
-      <p:sp>
-        <p:nvSpPr>
-          <p:cNvPr id="9" name="TextBox 8"/>
-          <p:cNvSpPr txBox="1"/>
-          <p:nvPr/>
-        </p:nvSpPr>
-        <p:spPr>
-          <a:xfrm>
-            <a:off x="786384" y="5532120"/>
-            <a:ext cx="10469880" cy="420624"/>
-          </a:xfrm>
-          <a:prstGeom prst="rect">
-            <a:avLst/>
-          </a:prstGeom>
-          <a:noFill/>
-        </p:spPr>
-        <p:txBody>
-          <a:bodyPr wrap="square" lIns="73152" rIns="73152" tIns="36576" bIns="36576">
-            <a:spAutoFit/>
-          </a:bodyPr>
-          <a:lstStyle/>
-          <a:p>
-            <a:pPr algn="l">
-              <a:spcAft>
-                <a:spcPts val="0"/>
-              </a:spcAft>
-              <a:defRPr sz="1800" b="0">
-                <a:solidFill>
-                  <a:srgbClr val="122C4E"/>
-                </a:solidFill>
-                <a:latin typeface="Noto Sans CJK KR"/>
-              </a:defRPr>
-            </a:pPr>
-            <a:r>
-              <a:t>wheel_radius와 wheel_base 변경이 좌우 바퀴·충돌 형상에 함께 적용된다.</a:t>
+              <a:defRPr sz="1000" b="0">
+                <a:solidFill>
+                  <a:srgbClr val="5C6672"/>
+                </a:solidFill>
+                <a:latin typeface="Noto Sans CJK KR"/>
+              </a:defRPr>
+            </a:pPr>
+            <a:r>
+              <a:t>입력 5/5 · 이 파일의 다음 코드 블록이 바로 다음 슬라이드에 이어집니다.</a:t>
             </a:r>
           </a:p>
         </p:txBody>
@@ -9062,7 +9829,7 @@
               </a:defRPr>
             </a:pPr>
             <a:r>
-              <a:t>정상 결과: 실제 환경에서 확인한 출력</a:t>
+              <a:t>구현 뒤 실행 1/2: 처음으로 Xacro macro를 만든다</a:t>
             </a:r>
           </a:p>
         </p:txBody>
@@ -9101,7 +9868,7 @@
               </a:defRPr>
             </a:pPr>
             <a:r>
-              <a:t>실제 ROS 2 환경의 파일·패키지·구성 검증 로그</a:t>
+              <a:t>방금 직접 만든 파일을 실행·검사하며 다음 파일로 넘어갈 기준을 만듭니다.</a:t>
             </a:r>
           </a:p>
         </p:txBody>
@@ -9184,30 +9951,64 @@
           </a:p>
         </p:txBody>
       </p:sp>
-      <p:pic>
-        <p:nvPicPr>
-          <p:cNvPr id="6" name="Picture 5" descr="validation_terminal.png"/>
-          <p:cNvPicPr>
-            <a:picLocks noChangeAspect="1"/>
-          </p:cNvPicPr>
-          <p:nvPr/>
-        </p:nvPicPr>
-        <p:blipFill>
-          <a:blip r:embed="rId2"/>
-          <a:stretch>
-            <a:fillRect/>
-          </a:stretch>
-        </p:blipFill>
-        <p:spPr>
-          <a:xfrm>
-            <a:off x="790956" y="1884338"/>
-            <a:ext cx="10607040" cy="3738546"/>
-          </a:xfrm>
-          <a:prstGeom prst="rect">
-            <a:avLst/>
-          </a:prstGeom>
-        </p:spPr>
-      </p:pic>
+      <p:sp>
+        <p:nvSpPr>
+          <p:cNvPr id="6" name="Rectangle 5"/>
+          <p:cNvSpPr/>
+          <p:nvPr/>
+        </p:nvSpPr>
+        <p:spPr>
+          <a:xfrm>
+            <a:off x="566928" y="1188720"/>
+            <a:ext cx="11064240" cy="347472"/>
+          </a:xfrm>
+          <a:prstGeom prst="rect">
+            <a:avLst/>
+          </a:prstGeom>
+          <a:solidFill>
+            <a:srgbClr val="F4F7FB"/>
+          </a:solidFill>
+          <a:ln>
+            <a:solidFill>
+              <a:srgbClr val="F4F7FB"/>
+            </a:solidFill>
+          </a:ln>
+        </p:spPr>
+        <p:style>
+          <a:lnRef idx="1">
+            <a:schemeClr val="accent1"/>
+          </a:lnRef>
+          <a:fillRef idx="3">
+            <a:schemeClr val="accent1"/>
+          </a:fillRef>
+          <a:effectRef idx="2">
+            <a:schemeClr val="accent1"/>
+          </a:effectRef>
+          <a:fontRef idx="minor">
+            <a:schemeClr val="lt1"/>
+          </a:fontRef>
+        </p:style>
+        <p:txBody>
+          <a:bodyPr rtlCol="0" anchor="ctr" wrap="square" lIns="73152" rIns="73152" tIns="36576" bIns="36576"/>
+          <a:lstStyle/>
+          <a:p>
+            <a:pPr algn="l">
+              <a:spcAft>
+                <a:spcPts val="0"/>
+              </a:spcAft>
+              <a:defRPr sz="1300" b="1">
+                <a:solidFill>
+                  <a:srgbClr val="122C4E"/>
+                </a:solidFill>
+                <a:latin typeface="Noto Sans CJK KR"/>
+              </a:defRPr>
+            </a:pPr>
+            <a:r>
+              <a:t>현재 단계 실행 1/2    |    현재 폴더 ~/ros2_curri/my_agv_ws    |    현재 터미널</a:t>
+            </a:r>
+          </a:p>
+        </p:txBody>
+      </p:sp>
       <p:sp>
         <p:nvSpPr>
           <p:cNvPr id="7" name="TextBox 6"/>
@@ -9216,8 +10017,8 @@
         </p:nvSpPr>
         <p:spPr>
           <a:xfrm>
-            <a:off x="777240" y="6144768"/>
-            <a:ext cx="10607040" cy="310896"/>
+            <a:off x="676656" y="1764792"/>
+            <a:ext cx="1828800" cy="347472"/>
           </a:xfrm>
           <a:prstGeom prst="rect">
             <a:avLst/>
@@ -9230,11 +10031,151 @@
           </a:bodyPr>
           <a:lstStyle/>
           <a:p>
-            <a:pPr algn="ctr">
-              <a:spcAft>
-                <a:spcPts val="0"/>
-              </a:spcAft>
-              <a:defRPr sz="1100" b="1">
+            <a:pPr algn="l">
+              <a:spcAft>
+                <a:spcPts val="0"/>
+              </a:spcAft>
+              <a:defRPr sz="1800" b="1">
+                <a:solidFill>
+                  <a:srgbClr val="225B9B"/>
+                </a:solidFill>
+                <a:latin typeface="Noto Sans CJK KR"/>
+              </a:defRPr>
+            </a:pPr>
+            <a:r>
+              <a:t>왜 하는가</a:t>
+            </a:r>
+          </a:p>
+        </p:txBody>
+      </p:sp>
+      <p:sp>
+        <p:nvSpPr>
+          <p:cNvPr id="8" name="TextBox 7"/>
+          <p:cNvSpPr txBox="1"/>
+          <p:nvPr/>
+        </p:nvSpPr>
+        <p:spPr>
+          <a:xfrm>
+            <a:off x="676656" y="2103120"/>
+            <a:ext cx="10789920" cy="512064"/>
+          </a:xfrm>
+          <a:prstGeom prst="rect">
+            <a:avLst/>
+          </a:prstGeom>
+          <a:noFill/>
+        </p:spPr>
+        <p:txBody>
+          <a:bodyPr wrap="square" lIns="73152" rIns="73152" tIns="36576" bIns="36576">
+            <a:spAutoFit/>
+          </a:bodyPr>
+          <a:lstStyle/>
+          <a:p>
+            <a:pPr algn="l">
+              <a:spcAft>
+                <a:spcPts val="0"/>
+              </a:spcAft>
+              <a:defRPr sz="2000" b="0">
+                <a:solidFill>
+                  <a:srgbClr val="122C4E"/>
+                </a:solidFill>
+                <a:latin typeface="Noto Sans CJK KR"/>
+              </a:defRPr>
+            </a:pPr>
+            <a:r>
+              <a:t>M05 단일 URDF의 반복 바퀴 구조를 macro/property로 바꾸는 첫 단계다.</a:t>
+            </a:r>
+          </a:p>
+        </p:txBody>
+      </p:sp>
+      <p:sp>
+        <p:nvSpPr>
+          <p:cNvPr id="9" name="Rounded Rectangle 8"/>
+          <p:cNvSpPr/>
+          <p:nvPr/>
+        </p:nvSpPr>
+        <p:spPr>
+          <a:xfrm>
+            <a:off x="676656" y="2871216"/>
+            <a:ext cx="10835640" cy="2331720"/>
+          </a:xfrm>
+          <a:prstGeom prst="roundRect">
+            <a:avLst/>
+          </a:prstGeom>
+          <a:solidFill>
+            <a:srgbClr val="1D232D"/>
+          </a:solidFill>
+          <a:ln>
+            <a:solidFill>
+              <a:srgbClr val="1D232D"/>
+            </a:solidFill>
+          </a:ln>
+        </p:spPr>
+        <p:style>
+          <a:lnRef idx="1">
+            <a:schemeClr val="accent1"/>
+          </a:lnRef>
+          <a:fillRef idx="3">
+            <a:schemeClr val="accent1"/>
+          </a:fillRef>
+          <a:effectRef idx="2">
+            <a:schemeClr val="accent1"/>
+          </a:effectRef>
+          <a:fontRef idx="minor">
+            <a:schemeClr val="lt1"/>
+          </a:fontRef>
+        </p:style>
+        <p:txBody>
+          <a:bodyPr rtlCol="0" anchor="ctr" wrap="square" lIns="73152" rIns="73152" tIns="36576" bIns="36576"/>
+          <a:lstStyle/>
+          <a:p>
+            <a:pPr algn="l">
+              <a:spcAft>
+                <a:spcPts val="0"/>
+              </a:spcAft>
+              <a:defRPr sz="1600" b="0">
+                <a:solidFill>
+                  <a:srgbClr val="FFFFFF"/>
+                </a:solidFill>
+                <a:latin typeface="DejaVu Sans Mono"/>
+              </a:defRPr>
+            </a:pPr>
+            <a:r>
+              <a:t>cd ~/ros2_curri/my_agv_ws</a:t>
+            </a:r>
+            <a:br/>
+            <a:r>
+              <a:t>xacro src/agv_description/curriculum_stages/M06/agv.urdf.xacro &gt; /tmp/agv_from_xacro.urdf</a:t>
+            </a:r>
+          </a:p>
+        </p:txBody>
+      </p:sp>
+      <p:sp>
+        <p:nvSpPr>
+          <p:cNvPr id="10" name="TextBox 9"/>
+          <p:cNvSpPr txBox="1"/>
+          <p:nvPr/>
+        </p:nvSpPr>
+        <p:spPr>
+          <a:xfrm>
+            <a:off x="768096" y="5468112"/>
+            <a:ext cx="1143000" cy="256032"/>
+          </a:xfrm>
+          <a:prstGeom prst="rect">
+            <a:avLst/>
+          </a:prstGeom>
+          <a:noFill/>
+        </p:spPr>
+        <p:txBody>
+          <a:bodyPr wrap="square" lIns="73152" rIns="73152" tIns="36576" bIns="36576">
+            <a:spAutoFit/>
+          </a:bodyPr>
+          <a:lstStyle/>
+          <a:p>
+            <a:pPr algn="l">
+              <a:spcAft>
+                <a:spcPts val="0"/>
+              </a:spcAft>
+              <a:defRPr sz="1800" b="1">
                 <a:solidFill>
                   <a:srgbClr val="2A8B5A"/>
                 </a:solidFill>
@@ -9242,7 +10183,46 @@
               </a:defRPr>
             </a:pPr>
             <a:r>
-              <a:t>화면에서 확인: ① 명령/설정  ② 정상 출력 또는 화면  ③ 다음 검증 명령으로 재확인</a:t>
+              <a:t>확인</a:t>
+            </a:r>
+          </a:p>
+        </p:txBody>
+      </p:sp>
+      <p:sp>
+        <p:nvSpPr>
+          <p:cNvPr id="11" name="TextBox 10"/>
+          <p:cNvSpPr txBox="1"/>
+          <p:nvPr/>
+        </p:nvSpPr>
+        <p:spPr>
+          <a:xfrm>
+            <a:off x="768096" y="5742432"/>
+            <a:ext cx="10561320" cy="347472"/>
+          </a:xfrm>
+          <a:prstGeom prst="rect">
+            <a:avLst/>
+          </a:prstGeom>
+          <a:noFill/>
+        </p:spPr>
+        <p:txBody>
+          <a:bodyPr wrap="square" lIns="73152" rIns="73152" tIns="36576" bIns="36576">
+            <a:spAutoFit/>
+          </a:bodyPr>
+          <a:lstStyle/>
+          <a:p>
+            <a:pPr algn="l">
+              <a:spcAft>
+                <a:spcPts val="0"/>
+              </a:spcAft>
+              <a:defRPr sz="1800" b="0">
+                <a:solidFill>
+                  <a:srgbClr val="122C4E"/>
+                </a:solidFill>
+                <a:latin typeface="Noto Sans CJK KR"/>
+              </a:defRPr>
+            </a:pPr>
+            <a:r>
+              <a:t>출력에서 topic·frame·파일 이름 또는 성공 메시지를 찾고, 맞지 않으면 다음 파일로 가지 않습니다.</a:t>
             </a:r>
           </a:p>
         </p:txBody>
@@ -9299,7 +10279,7 @@
               </a:defRPr>
             </a:pPr>
             <a:r>
-              <a:t>정상 결과: 실제 환경에서 확인한 출력</a:t>
+              <a:t>구현 뒤 실행 2/2: property 변경을 검증한다</a:t>
             </a:r>
           </a:p>
         </p:txBody>
@@ -9338,7 +10318,7 @@
               </a:defRPr>
             </a:pPr>
             <a:r>
-              <a:t>실제 terminal: Xacro 변환 뒤 생성 URDF를 check_urdf로 검사한 결과</a:t>
+              <a:t>방금 직접 만든 파일을 실행·검사하며 다음 파일로 넘어갈 기준을 만듭니다.</a:t>
             </a:r>
           </a:p>
         </p:txBody>
@@ -9421,30 +10401,64 @@
           </a:p>
         </p:txBody>
       </p:sp>
-      <p:pic>
-        <p:nvPicPr>
-          <p:cNvPr id="6" name="Picture 5" descr="03_m06_xacro_terminal_actual.png"/>
-          <p:cNvPicPr>
-            <a:picLocks noChangeAspect="1"/>
-          </p:cNvPicPr>
-          <p:nvPr/>
-        </p:nvPicPr>
-        <p:blipFill>
-          <a:blip r:embed="rId2"/>
-          <a:stretch>
-            <a:fillRect/>
-          </a:stretch>
-        </p:blipFill>
-        <p:spPr>
-          <a:xfrm>
-            <a:off x="2789770" y="1353312"/>
-            <a:ext cx="6609411" cy="4800600"/>
-          </a:xfrm>
-          <a:prstGeom prst="rect">
-            <a:avLst/>
-          </a:prstGeom>
-        </p:spPr>
-      </p:pic>
+      <p:sp>
+        <p:nvSpPr>
+          <p:cNvPr id="6" name="Rectangle 5"/>
+          <p:cNvSpPr/>
+          <p:nvPr/>
+        </p:nvSpPr>
+        <p:spPr>
+          <a:xfrm>
+            <a:off x="566928" y="1188720"/>
+            <a:ext cx="11064240" cy="347472"/>
+          </a:xfrm>
+          <a:prstGeom prst="rect">
+            <a:avLst/>
+          </a:prstGeom>
+          <a:solidFill>
+            <a:srgbClr val="F4F7FB"/>
+          </a:solidFill>
+          <a:ln>
+            <a:solidFill>
+              <a:srgbClr val="F4F7FB"/>
+            </a:solidFill>
+          </a:ln>
+        </p:spPr>
+        <p:style>
+          <a:lnRef idx="1">
+            <a:schemeClr val="accent1"/>
+          </a:lnRef>
+          <a:fillRef idx="3">
+            <a:schemeClr val="accent1"/>
+          </a:fillRef>
+          <a:effectRef idx="2">
+            <a:schemeClr val="accent1"/>
+          </a:effectRef>
+          <a:fontRef idx="minor">
+            <a:schemeClr val="lt1"/>
+          </a:fontRef>
+        </p:style>
+        <p:txBody>
+          <a:bodyPr rtlCol="0" anchor="ctr" wrap="square" lIns="73152" rIns="73152" tIns="36576" bIns="36576"/>
+          <a:lstStyle/>
+          <a:p>
+            <a:pPr algn="l">
+              <a:spcAft>
+                <a:spcPts val="0"/>
+              </a:spcAft>
+              <a:defRPr sz="1300" b="1">
+                <a:solidFill>
+                  <a:srgbClr val="122C4E"/>
+                </a:solidFill>
+                <a:latin typeface="Noto Sans CJK KR"/>
+              </a:defRPr>
+            </a:pPr>
+            <a:r>
+              <a:t>현재 단계 실행 2/2    |    현재 폴더 ~/ros2_curri/my_agv_ws    |    현재 터미널</a:t>
+            </a:r>
+          </a:p>
+        </p:txBody>
+      </p:sp>
       <p:sp>
         <p:nvSpPr>
           <p:cNvPr id="7" name="TextBox 6"/>
@@ -9453,8 +10467,8 @@
         </p:nvSpPr>
         <p:spPr>
           <a:xfrm>
-            <a:off x="777240" y="6144768"/>
-            <a:ext cx="10607040" cy="310896"/>
+            <a:off x="676656" y="1764792"/>
+            <a:ext cx="1828800" cy="347472"/>
           </a:xfrm>
           <a:prstGeom prst="rect">
             <a:avLst/>
@@ -9467,11 +10481,151 @@
           </a:bodyPr>
           <a:lstStyle/>
           <a:p>
-            <a:pPr algn="ctr">
-              <a:spcAft>
-                <a:spcPts val="0"/>
-              </a:spcAft>
-              <a:defRPr sz="1100" b="1">
+            <a:pPr algn="l">
+              <a:spcAft>
+                <a:spcPts val="0"/>
+              </a:spcAft>
+              <a:defRPr sz="1800" b="1">
+                <a:solidFill>
+                  <a:srgbClr val="225B9B"/>
+                </a:solidFill>
+                <a:latin typeface="Noto Sans CJK KR"/>
+              </a:defRPr>
+            </a:pPr>
+            <a:r>
+              <a:t>왜 하는가</a:t>
+            </a:r>
+          </a:p>
+        </p:txBody>
+      </p:sp>
+      <p:sp>
+        <p:nvSpPr>
+          <p:cNvPr id="8" name="TextBox 7"/>
+          <p:cNvSpPr txBox="1"/>
+          <p:nvPr/>
+        </p:nvSpPr>
+        <p:spPr>
+          <a:xfrm>
+            <a:off x="676656" y="2103120"/>
+            <a:ext cx="10789920" cy="512064"/>
+          </a:xfrm>
+          <a:prstGeom prst="rect">
+            <a:avLst/>
+          </a:prstGeom>
+          <a:noFill/>
+        </p:spPr>
+        <p:txBody>
+          <a:bodyPr wrap="square" lIns="73152" rIns="73152" tIns="36576" bIns="36576">
+            <a:spAutoFit/>
+          </a:bodyPr>
+          <a:lstStyle/>
+          <a:p>
+            <a:pPr algn="l">
+              <a:spcAft>
+                <a:spcPts val="0"/>
+              </a:spcAft>
+              <a:defRPr sz="2000" b="0">
+                <a:solidFill>
+                  <a:srgbClr val="122C4E"/>
+                </a:solidFill>
+                <a:latin typeface="Noto Sans CJK KR"/>
+              </a:defRPr>
+            </a:pPr>
+            <a:r>
+              <a:t>하나의 wheel_radius가 좌우 바퀴에 함께 적용되어야 한다.</a:t>
+            </a:r>
+          </a:p>
+        </p:txBody>
+      </p:sp>
+      <p:sp>
+        <p:nvSpPr>
+          <p:cNvPr id="9" name="Rounded Rectangle 8"/>
+          <p:cNvSpPr/>
+          <p:nvPr/>
+        </p:nvSpPr>
+        <p:spPr>
+          <a:xfrm>
+            <a:off x="676656" y="2871216"/>
+            <a:ext cx="10835640" cy="2331720"/>
+          </a:xfrm>
+          <a:prstGeom prst="roundRect">
+            <a:avLst/>
+          </a:prstGeom>
+          <a:solidFill>
+            <a:srgbClr val="1D232D"/>
+          </a:solidFill>
+          <a:ln>
+            <a:solidFill>
+              <a:srgbClr val="1D232D"/>
+            </a:solidFill>
+          </a:ln>
+        </p:spPr>
+        <p:style>
+          <a:lnRef idx="1">
+            <a:schemeClr val="accent1"/>
+          </a:lnRef>
+          <a:fillRef idx="3">
+            <a:schemeClr val="accent1"/>
+          </a:fillRef>
+          <a:effectRef idx="2">
+            <a:schemeClr val="accent1"/>
+          </a:effectRef>
+          <a:fontRef idx="minor">
+            <a:schemeClr val="lt1"/>
+          </a:fontRef>
+        </p:style>
+        <p:txBody>
+          <a:bodyPr rtlCol="0" anchor="ctr" wrap="square" lIns="73152" rIns="73152" tIns="36576" bIns="36576"/>
+          <a:lstStyle/>
+          <a:p>
+            <a:pPr algn="l">
+              <a:spcAft>
+                <a:spcPts val="0"/>
+              </a:spcAft>
+              <a:defRPr sz="1600" b="0">
+                <a:solidFill>
+                  <a:srgbClr val="FFFFFF"/>
+                </a:solidFill>
+                <a:latin typeface="DejaVu Sans Mono"/>
+              </a:defRPr>
+            </a:pPr>
+            <a:r>
+              <a:t>check_urdf /tmp/agv_from_xacro.urdf</a:t>
+            </a:r>
+            <a:br/>
+            <a:r>
+              <a:t># wheel_radius 값을 바꾼 뒤 같은 두 명령을 다시 실행</a:t>
+            </a:r>
+          </a:p>
+        </p:txBody>
+      </p:sp>
+      <p:sp>
+        <p:nvSpPr>
+          <p:cNvPr id="10" name="TextBox 9"/>
+          <p:cNvSpPr txBox="1"/>
+          <p:nvPr/>
+        </p:nvSpPr>
+        <p:spPr>
+          <a:xfrm>
+            <a:off x="768096" y="5468112"/>
+            <a:ext cx="1143000" cy="256032"/>
+          </a:xfrm>
+          <a:prstGeom prst="rect">
+            <a:avLst/>
+          </a:prstGeom>
+          <a:noFill/>
+        </p:spPr>
+        <p:txBody>
+          <a:bodyPr wrap="square" lIns="73152" rIns="73152" tIns="36576" bIns="36576">
+            <a:spAutoFit/>
+          </a:bodyPr>
+          <a:lstStyle/>
+          <a:p>
+            <a:pPr algn="l">
+              <a:spcAft>
+                <a:spcPts val="0"/>
+              </a:spcAft>
+              <a:defRPr sz="1800" b="1">
                 <a:solidFill>
                   <a:srgbClr val="2A8B5A"/>
                 </a:solidFill>
@@ -9479,7 +10633,46 @@
               </a:defRPr>
             </a:pPr>
             <a:r>
-              <a:t>화면에서 확인: xacro 명령 다음의 Successfully Parsed XML과 left/right wheel child를 찾습니다.</a:t>
+              <a:t>확인</a:t>
+            </a:r>
+          </a:p>
+        </p:txBody>
+      </p:sp>
+      <p:sp>
+        <p:nvSpPr>
+          <p:cNvPr id="11" name="TextBox 10"/>
+          <p:cNvSpPr txBox="1"/>
+          <p:nvPr/>
+        </p:nvSpPr>
+        <p:spPr>
+          <a:xfrm>
+            <a:off x="768096" y="5742432"/>
+            <a:ext cx="10561320" cy="347472"/>
+          </a:xfrm>
+          <a:prstGeom prst="rect">
+            <a:avLst/>
+          </a:prstGeom>
+          <a:noFill/>
+        </p:spPr>
+        <p:txBody>
+          <a:bodyPr wrap="square" lIns="73152" rIns="73152" tIns="36576" bIns="36576">
+            <a:spAutoFit/>
+          </a:bodyPr>
+          <a:lstStyle/>
+          <a:p>
+            <a:pPr algn="l">
+              <a:spcAft>
+                <a:spcPts val="0"/>
+              </a:spcAft>
+              <a:defRPr sz="1800" b="0">
+                <a:solidFill>
+                  <a:srgbClr val="122C4E"/>
+                </a:solidFill>
+                <a:latin typeface="Noto Sans CJK KR"/>
+              </a:defRPr>
+            </a:pPr>
+            <a:r>
+              <a:t>출력에서 topic·frame·파일 이름 또는 성공 메시지를 찾고, 맞지 않으면 다음 파일로 가지 않습니다.</a:t>
             </a:r>
           </a:p>
         </p:txBody>
@@ -9536,7 +10729,7 @@
               </a:defRPr>
             </a:pPr>
             <a:r>
-              <a:t>객관적 검증 명령으로 완료를 확인한다</a:t>
+              <a:t>build → source → run 순서로 실행한다</a:t>
             </a:r>
           </a:p>
         </p:txBody>
@@ -9575,7 +10768,7 @@
               </a:defRPr>
             </a:pPr>
             <a:r>
-              <a:t>화면만 보지 말고 topic·frame·파일·parameter를 다시 확인합니다.</a:t>
+              <a:t>새 파일 또는 수정 파일은 build와 source 뒤에만 실행 이름·설정에 반영됩니다.</a:t>
             </a:r>
           </a:p>
         </p:txBody>
@@ -9711,7 +10904,7 @@
               </a:defRPr>
             </a:pPr>
             <a:r>
-              <a:t>현재 단계 검증    |    현재 폴더 ~/ros2_curri/agv_ws    |    현재 터미널</a:t>
+              <a:t>현재 단계 실행    |    현재 폴더 ~/ros2_curri/my_agv_ws    |    현재 터미널</a:t>
             </a:r>
           </a:p>
         </p:txBody>
@@ -9724,8 +10917,8 @@
         </p:nvSpPr>
         <p:spPr>
           <a:xfrm>
-            <a:off x="658368" y="1755648"/>
-            <a:ext cx="10972800" cy="2148840"/>
+            <a:off x="658368" y="1700784"/>
+            <a:ext cx="10972800" cy="3182112"/>
           </a:xfrm>
           <a:prstGeom prst="roundRect">
             <a:avLst/>
@@ -9769,54 +10962,35 @@
               </a:defRPr>
             </a:pPr>
             <a:r>
-              <a:t>xacro ~/ros2_curri/agv_ws/src/agv_description/curriculum_stages/M06/agv.urdf.xacro &gt; /tmp/agv.urdf</a:t>
+              <a:t>xacro ~/ros2_curri/my_agv_ws/src/agv_description/curriculum_stages/M06/agv.urdf.xacro &gt; /tmp/agv.urdf</a:t>
             </a:r>
             <a:br/>
             <a:r>
-              <a:t>rg -n 'wheel_radius|left_wheel_joint|right_wheel_joint' /tmp/agv.urdf</a:t>
-            </a:r>
-          </a:p>
-        </p:txBody>
-      </p:sp>
-      <p:sp>
-        <p:nvSpPr>
-          <p:cNvPr id="8" name="Rounded Rectangle 7"/>
-          <p:cNvSpPr/>
-          <p:nvPr/>
-        </p:nvSpPr>
-        <p:spPr>
-          <a:xfrm>
-            <a:off x="658368" y="4206240"/>
-            <a:ext cx="10972800" cy="1554480"/>
-          </a:xfrm>
-          <a:prstGeom prst="roundRect">
-            <a:avLst/>
-          </a:prstGeom>
-          <a:solidFill>
-            <a:srgbClr val="F4F7FB"/>
-          </a:solidFill>
-          <a:ln>
-            <a:solidFill>
-              <a:srgbClr val="D1DFD5"/>
-            </a:solidFill>
-          </a:ln>
-        </p:spPr>
-        <p:style>
-          <a:lnRef idx="1">
-            <a:schemeClr val="accent1"/>
-          </a:lnRef>
-          <a:fillRef idx="3">
-            <a:schemeClr val="accent1"/>
-          </a:fillRef>
-          <a:effectRef idx="2">
-            <a:schemeClr val="accent1"/>
-          </a:effectRef>
-          <a:fontRef idx="minor">
-            <a:schemeClr val="lt1"/>
-          </a:fontRef>
-        </p:style>
-        <p:txBody>
-          <a:bodyPr rtlCol="0" anchor="ctr" wrap="square" lIns="73152" rIns="73152" tIns="36576" bIns="36576"/>
+              <a:t>check_urdf /tmp/agv.urdf</a:t>
+            </a:r>
+          </a:p>
+        </p:txBody>
+      </p:sp>
+      <p:sp>
+        <p:nvSpPr>
+          <p:cNvPr id="8" name="TextBox 7"/>
+          <p:cNvSpPr txBox="1"/>
+          <p:nvPr/>
+        </p:nvSpPr>
+        <p:spPr>
+          <a:xfrm>
+            <a:off x="786384" y="5239512"/>
+            <a:ext cx="1261872" cy="237744"/>
+          </a:xfrm>
+          <a:prstGeom prst="rect">
+            <a:avLst/>
+          </a:prstGeom>
+          <a:noFill/>
+        </p:spPr>
+        <p:txBody>
+          <a:bodyPr wrap="square" lIns="73152" rIns="73152" tIns="36576" bIns="36576">
+            <a:spAutoFit/>
+          </a:bodyPr>
           <a:lstStyle/>
           <a:p>
             <a:pPr algn="l">
@@ -9831,19 +11005,7 @@
               </a:defRPr>
             </a:pPr>
             <a:r>
-              <a:t>완료 체크</a:t>
-            </a:r>
-            <a:br/>
-            <a:r>
-              <a:t>□ 명령이 오류 없이 실행된다.</a:t>
-            </a:r>
-            <a:br/>
-            <a:r>
-              <a:t>□ 기대한 파일·topic·frame·parameter 이름이 보인다.</a:t>
-            </a:r>
-            <a:br/>
-            <a:r>
-              <a:t>□ 값의 단위와 방향을 한 문장으로 설명할 수 있다.</a:t>
+              <a:t>확인 기준</a:t>
             </a:r>
           </a:p>
         </p:txBody>
@@ -9856,8 +11018,8 @@
         </p:nvSpPr>
         <p:spPr>
           <a:xfrm>
-            <a:off x="731520" y="5989320"/>
-            <a:ext cx="10789920" cy="237744"/>
+            <a:off x="786384" y="5532120"/>
+            <a:ext cx="10469880" cy="420624"/>
           </a:xfrm>
           <a:prstGeom prst="rect">
             <a:avLst/>
@@ -9874,7 +11036,7 @@
               <a:spcAft>
                 <a:spcPts val="0"/>
               </a:spcAft>
-              <a:defRPr sz="1500" b="1">
+              <a:defRPr sz="1800" b="0">
                 <a:solidFill>
                   <a:srgbClr val="122C4E"/>
                 </a:solidFill>
@@ -9882,7 +11044,7 @@
               </a:defRPr>
             </a:pPr>
             <a:r>
-              <a:t>완료 조건: wheel_radius와 wheel_base 변경이 좌우 바퀴·충돌 형상에 함께 적용된다.</a:t>
+              <a:t>wheel_radius와 wheel_base 변경이 좌우 바퀴·충돌 형상에 함께 적용된다.</a:t>
             </a:r>
           </a:p>
         </p:txBody>
@@ -10400,7 +11562,7 @@
               </a:defRPr>
             </a:pPr>
             <a:r>
-              <a:t>막히면: 증상 → 우선 확인 → 재검증</a:t>
+              <a:t>정상 결과: 실제 환경에서 확인한 출력</a:t>
             </a:r>
           </a:p>
         </p:txBody>
@@ -10439,7 +11601,7 @@
               </a:defRPr>
             </a:pPr>
             <a:r>
-              <a:t>오류 메시지를 숨기지 않고 같은 순서로 점검합니다.</a:t>
+              <a:t>실제 ROS 2 환경의 파일·패키지·구성 검증 로그</a:t>
             </a:r>
           </a:p>
         </p:txBody>
@@ -10522,119 +11684,40 @@
           </a:p>
         </p:txBody>
       </p:sp>
-      <p:sp>
-        <p:nvSpPr>
-          <p:cNvPr id="6" name="Rectangle 5"/>
-          <p:cNvSpPr/>
-          <p:nvPr/>
-        </p:nvSpPr>
-        <p:spPr>
-          <a:xfrm>
-            <a:off x="566928" y="1188720"/>
-            <a:ext cx="11064240" cy="347472"/>
-          </a:xfrm>
-          <a:prstGeom prst="rect">
-            <a:avLst/>
-          </a:prstGeom>
-          <a:solidFill>
-            <a:srgbClr val="F4F7FB"/>
-          </a:solidFill>
-          <a:ln>
-            <a:solidFill>
-              <a:srgbClr val="F4F7FB"/>
-            </a:solidFill>
-          </a:ln>
-        </p:spPr>
-        <p:style>
-          <a:lnRef idx="1">
-            <a:schemeClr val="accent1"/>
-          </a:lnRef>
-          <a:fillRef idx="3">
-            <a:schemeClr val="accent1"/>
-          </a:fillRef>
-          <a:effectRef idx="2">
-            <a:schemeClr val="accent1"/>
-          </a:effectRef>
-          <a:fontRef idx="minor">
-            <a:schemeClr val="lt1"/>
-          </a:fontRef>
-        </p:style>
-        <p:txBody>
-          <a:bodyPr rtlCol="0" anchor="ctr" wrap="square" lIns="73152" rIns="73152" tIns="36576" bIns="36576"/>
-          <a:lstStyle/>
-          <a:p>
-            <a:pPr algn="l">
-              <a:spcAft>
-                <a:spcPts val="0"/>
-              </a:spcAft>
-              <a:defRPr sz="1300" b="1">
-                <a:solidFill>
-                  <a:srgbClr val="122C4E"/>
-                </a:solidFill>
-                <a:latin typeface="Noto Sans CJK KR"/>
-              </a:defRPr>
-            </a:pPr>
-            <a:r>
-              <a:t>현재 단계 오류 대응    |    현재 폴더 ~/ros2_curri/agv_ws    |    현재 터미널</a:t>
-            </a:r>
-          </a:p>
-        </p:txBody>
-      </p:sp>
-      <p:sp>
-        <p:nvSpPr>
-          <p:cNvPr id="7" name="Rounded Rectangle 6"/>
-          <p:cNvSpPr/>
-          <p:nvPr/>
-        </p:nvSpPr>
-        <p:spPr>
-          <a:xfrm>
-            <a:off x="694944" y="1755648"/>
-            <a:ext cx="10972800" cy="1115568"/>
-          </a:xfrm>
-          <a:prstGeom prst="roundRect">
-            <a:avLst/>
-          </a:prstGeom>
-          <a:solidFill>
-            <a:srgbClr val="FFF7F4"/>
-          </a:solidFill>
-          <a:ln>
-            <a:solidFill>
-              <a:srgbClr val="EDBEB4"/>
-            </a:solidFill>
-          </a:ln>
-        </p:spPr>
-        <p:style>
-          <a:lnRef idx="1">
-            <a:schemeClr val="accent1"/>
-          </a:lnRef>
-          <a:fillRef idx="3">
-            <a:schemeClr val="accent1"/>
-          </a:fillRef>
-          <a:effectRef idx="2">
-            <a:schemeClr val="accent1"/>
-          </a:effectRef>
-          <a:fontRef idx="minor">
-            <a:schemeClr val="lt1"/>
-          </a:fontRef>
-        </p:style>
-        <p:txBody>
-          <a:bodyPr rtlCol="0" anchor="ctr"/>
-          <a:lstStyle/>
-          <a:p>
-            <a:pPr algn="ctr"/>
-          </a:p>
-        </p:txBody>
-      </p:sp>
-      <p:sp>
-        <p:nvSpPr>
-          <p:cNvPr id="8" name="TextBox 7"/>
-          <p:cNvSpPr txBox="1"/>
-          <p:nvPr/>
-        </p:nvSpPr>
-        <p:spPr>
-          <a:xfrm>
-            <a:off x="896112" y="1901952"/>
-            <a:ext cx="2926080" cy="274320"/>
+      <p:pic>
+        <p:nvPicPr>
+          <p:cNvPr id="6" name="Picture 5" descr="validation_terminal.png"/>
+          <p:cNvPicPr>
+            <a:picLocks noChangeAspect="1"/>
+          </p:cNvPicPr>
+          <p:nvPr/>
+        </p:nvPicPr>
+        <p:blipFill>
+          <a:blip r:embed="rId2"/>
+          <a:stretch>
+            <a:fillRect/>
+          </a:stretch>
+        </p:blipFill>
+        <p:spPr>
+          <a:xfrm>
+            <a:off x="790956" y="1884338"/>
+            <a:ext cx="10607040" cy="3738546"/>
+          </a:xfrm>
+          <a:prstGeom prst="rect">
+            <a:avLst/>
+          </a:prstGeom>
+        </p:spPr>
+      </p:pic>
+      <p:sp>
+        <p:nvSpPr>
+          <p:cNvPr id="7" name="TextBox 6"/>
+          <p:cNvSpPr txBox="1"/>
+          <p:nvPr/>
+        </p:nvSpPr>
+        <p:spPr>
+          <a:xfrm>
+            <a:off x="777240" y="6144768"/>
+            <a:ext cx="10607040" cy="310896"/>
           </a:xfrm>
           <a:prstGeom prst="rect">
             <a:avLst/>
@@ -10647,228 +11730,19 @@
           </a:bodyPr>
           <a:lstStyle/>
           <a:p>
-            <a:pPr algn="l">
-              <a:spcAft>
-                <a:spcPts val="0"/>
-              </a:spcAft>
-              <a:defRPr sz="1800" b="1">
-                <a:solidFill>
-                  <a:srgbClr val="BE3B3B"/>
-                </a:solidFill>
-                <a:latin typeface="Noto Sans CJK KR"/>
-              </a:defRPr>
-            </a:pPr>
-            <a:r>
-              <a:t>증상 1: unknown macro/property</a:t>
-            </a:r>
-          </a:p>
-        </p:txBody>
-      </p:sp>
-      <p:sp>
-        <p:nvSpPr>
-          <p:cNvPr id="9" name="TextBox 8"/>
-          <p:cNvSpPr txBox="1"/>
-          <p:nvPr/>
-        </p:nvSpPr>
-        <p:spPr>
-          <a:xfrm>
-            <a:off x="3794760" y="1883664"/>
-            <a:ext cx="7543800" cy="621792"/>
-          </a:xfrm>
-          <a:prstGeom prst="rect">
-            <a:avLst/>
-          </a:prstGeom>
-          <a:noFill/>
-        </p:spPr>
-        <p:txBody>
-          <a:bodyPr wrap="square" lIns="73152" rIns="73152" tIns="36576" bIns="36576">
-            <a:spAutoFit/>
-          </a:bodyPr>
-          <a:lstStyle/>
-          <a:p>
-            <a:pPr algn="l">
-              <a:spcAft>
-                <a:spcPts val="0"/>
-              </a:spcAft>
-              <a:defRPr sz="1600" b="0">
-                <a:solidFill>
-                  <a:srgbClr val="122C4E"/>
-                </a:solidFill>
-                <a:latin typeface="Noto Sans CJK KR"/>
-              </a:defRPr>
-            </a:pPr>
-            <a:r>
-              <a:t>우선 확인: 선언 순서·xacro namespace·철자를 확인한다.</a:t>
-            </a:r>
-            <a:br/>
-            <a:r>
-              <a:t>수정 후: xacro ~/ros2_curri/agv_ws/src/agv_description/curriculum_stages/M06/agv.urdf.xacro &gt; /tmp/agv.urdf</a:t>
-            </a:r>
-          </a:p>
-        </p:txBody>
-      </p:sp>
-      <p:sp>
-        <p:nvSpPr>
-          <p:cNvPr id="10" name="Rounded Rectangle 9"/>
-          <p:cNvSpPr/>
-          <p:nvPr/>
-        </p:nvSpPr>
-        <p:spPr>
-          <a:xfrm>
-            <a:off x="694944" y="3172968"/>
-            <a:ext cx="10972800" cy="1115568"/>
-          </a:xfrm>
-          <a:prstGeom prst="roundRect">
-            <a:avLst/>
-          </a:prstGeom>
-          <a:solidFill>
-            <a:srgbClr val="FFF7F4"/>
-          </a:solidFill>
-          <a:ln>
-            <a:solidFill>
-              <a:srgbClr val="EDBEB4"/>
-            </a:solidFill>
-          </a:ln>
-        </p:spPr>
-        <p:style>
-          <a:lnRef idx="1">
-            <a:schemeClr val="accent1"/>
-          </a:lnRef>
-          <a:fillRef idx="3">
-            <a:schemeClr val="accent1"/>
-          </a:fillRef>
-          <a:effectRef idx="2">
-            <a:schemeClr val="accent1"/>
-          </a:effectRef>
-          <a:fontRef idx="minor">
-            <a:schemeClr val="lt1"/>
-          </a:fontRef>
-        </p:style>
-        <p:txBody>
-          <a:bodyPr rtlCol="0" anchor="ctr"/>
-          <a:lstStyle/>
-          <a:p>
-            <a:pPr algn="ctr"/>
-          </a:p>
-        </p:txBody>
-      </p:sp>
-      <p:sp>
-        <p:nvSpPr>
-          <p:cNvPr id="11" name="TextBox 10"/>
-          <p:cNvSpPr txBox="1"/>
-          <p:nvPr/>
-        </p:nvSpPr>
-        <p:spPr>
-          <a:xfrm>
-            <a:off x="896112" y="3319272"/>
-            <a:ext cx="2926080" cy="274320"/>
-          </a:xfrm>
-          <a:prstGeom prst="rect">
-            <a:avLst/>
-          </a:prstGeom>
-          <a:noFill/>
-        </p:spPr>
-        <p:txBody>
-          <a:bodyPr wrap="square" lIns="73152" rIns="73152" tIns="36576" bIns="36576">
-            <a:spAutoFit/>
-          </a:bodyPr>
-          <a:lstStyle/>
-          <a:p>
-            <a:pPr algn="l">
-              <a:spcAft>
-                <a:spcPts val="0"/>
-              </a:spcAft>
-              <a:defRPr sz="1800" b="1">
-                <a:solidFill>
-                  <a:srgbClr val="BE3B3B"/>
-                </a:solidFill>
-                <a:latin typeface="Noto Sans CJK KR"/>
-              </a:defRPr>
-            </a:pPr>
-            <a:r>
-              <a:t>증상 2: include file not found</a:t>
-            </a:r>
-          </a:p>
-        </p:txBody>
-      </p:sp>
-      <p:sp>
-        <p:nvSpPr>
-          <p:cNvPr id="12" name="TextBox 11"/>
-          <p:cNvSpPr txBox="1"/>
-          <p:nvPr/>
-        </p:nvSpPr>
-        <p:spPr>
-          <a:xfrm>
-            <a:off x="3794760" y="3300984"/>
-            <a:ext cx="7543800" cy="621792"/>
-          </a:xfrm>
-          <a:prstGeom prst="rect">
-            <a:avLst/>
-          </a:prstGeom>
-          <a:noFill/>
-        </p:spPr>
-        <p:txBody>
-          <a:bodyPr wrap="square" lIns="73152" rIns="73152" tIns="36576" bIns="36576">
-            <a:spAutoFit/>
-          </a:bodyPr>
-          <a:lstStyle/>
-          <a:p>
-            <a:pPr algn="l">
-              <a:spcAft>
-                <a:spcPts val="0"/>
-              </a:spcAft>
-              <a:defRPr sz="1600" b="0">
-                <a:solidFill>
-                  <a:srgbClr val="122C4E"/>
-                </a:solidFill>
-                <a:latin typeface="Noto Sans CJK KR"/>
-              </a:defRPr>
-            </a:pPr>
-            <a:r>
-              <a:t>우선 확인: 패키지 이름과 설치 대상·파일 경로를 확인한다.</a:t>
-            </a:r>
-            <a:br/>
-            <a:r>
-              <a:t>수정 후: xacro ~/ros2_curri/agv_ws/src/agv_description/curriculum_stages/M06/agv.urdf.xacro &gt; /tmp/agv.urdf</a:t>
-            </a:r>
-          </a:p>
-        </p:txBody>
-      </p:sp>
-      <p:sp>
-        <p:nvSpPr>
-          <p:cNvPr id="13" name="TextBox 12"/>
-          <p:cNvSpPr txBox="1"/>
-          <p:nvPr/>
-        </p:nvSpPr>
-        <p:spPr>
-          <a:xfrm>
-            <a:off x="822960" y="5102352"/>
-            <a:ext cx="10607040" cy="402336"/>
-          </a:xfrm>
-          <a:prstGeom prst="rect">
-            <a:avLst/>
-          </a:prstGeom>
-          <a:noFill/>
-        </p:spPr>
-        <p:txBody>
-          <a:bodyPr wrap="square" lIns="73152" rIns="73152" tIns="36576" bIns="36576">
-            <a:spAutoFit/>
-          </a:bodyPr>
-          <a:lstStyle/>
-          <a:p>
             <a:pPr algn="ctr">
               <a:spcAft>
                 <a:spcPts val="0"/>
               </a:spcAft>
-              <a:defRPr sz="1800" b="1">
-                <a:solidFill>
-                  <a:srgbClr val="DB7E22"/>
-                </a:solidFill>
-                <a:latin typeface="Noto Sans CJK KR"/>
-              </a:defRPr>
-            </a:pPr>
-            <a:r>
-              <a:t>공통 순서: ① 현재 폴더 ② source ③ 파일 경로 ④ 이름/타입/단위 ⑤ build·source 후 재실행</a:t>
+              <a:defRPr sz="1100" b="1">
+                <a:solidFill>
+                  <a:srgbClr val="2A8B5A"/>
+                </a:solidFill>
+                <a:latin typeface="Noto Sans CJK KR"/>
+              </a:defRPr>
+            </a:pPr>
+            <a:r>
+              <a:t>화면에서 확인: ① 명령/설정  ② 정상 출력 또는 화면  ③ 다음 검증 명령으로 재확인</a:t>
             </a:r>
           </a:p>
         </p:txBody>
@@ -10925,7 +11799,7 @@
               </a:defRPr>
             </a:pPr>
             <a:r>
-              <a:t>미니 실습: 값 하나를 바꾸고 결과를 비교한다</a:t>
+              <a:t>객관적 검증 명령으로 완료를 확인한다</a:t>
             </a:r>
           </a:p>
         </p:txBody>
@@ -10964,7 +11838,7 @@
               </a:defRPr>
             </a:pPr>
             <a:r>
-              <a:t>정상 결과를 만든 뒤에는 한 번에 하나의 값만 바꿉니다.</a:t>
+              <a:t>화면만 보지 말고 topic·frame·파일·parameter를 다시 확인합니다.</a:t>
             </a:r>
           </a:p>
         </p:txBody>
@@ -11100,7 +11974,7 @@
               </a:defRPr>
             </a:pPr>
             <a:r>
-              <a:t>현재 단계 미니 실습    |    현재 폴더 ~/ros2_curri/agv_ws    |    현재 터미널</a:t>
+              <a:t>현재 단계 검증    |    현재 폴더 ~/ros2_curri/my_agv_ws    |    현재 터미널</a:t>
             </a:r>
           </a:p>
         </p:txBody>
@@ -11113,18 +11987,18 @@
         </p:nvSpPr>
         <p:spPr>
           <a:xfrm>
-            <a:off x="749808" y="1874519"/>
-            <a:ext cx="10652760" cy="1993392"/>
+            <a:off x="658368" y="1755648"/>
+            <a:ext cx="10972800" cy="2148840"/>
           </a:xfrm>
           <a:prstGeom prst="roundRect">
             <a:avLst/>
           </a:prstGeom>
           <a:solidFill>
-            <a:srgbClr val="FFF8EB"/>
+            <a:srgbClr val="1D232D"/>
           </a:solidFill>
           <a:ln>
             <a:solidFill>
-              <a:srgbClr val="ECC680"/>
+              <a:srgbClr val="1D232D"/>
             </a:solidFill>
           </a:ln>
         </p:spPr>
@@ -11146,11 +12020,124 @@
           <a:bodyPr rtlCol="0" anchor="ctr" wrap="square" lIns="73152" rIns="73152" tIns="36576" bIns="36576"/>
           <a:lstStyle/>
           <a:p>
-            <a:pPr algn="ctr">
-              <a:spcAft>
-                <a:spcPts val="0"/>
-              </a:spcAft>
-              <a:defRPr sz="2300" b="1">
+            <a:pPr algn="l">
+              <a:spcAft>
+                <a:spcPts val="0"/>
+              </a:spcAft>
+              <a:defRPr sz="1600" b="0">
+                <a:solidFill>
+                  <a:srgbClr val="FFFFFF"/>
+                </a:solidFill>
+                <a:latin typeface="DejaVu Sans Mono"/>
+              </a:defRPr>
+            </a:pPr>
+            <a:r>
+              <a:t>xacro ~/ros2_curri/my_agv_ws/src/agv_description/curriculum_stages/M06/agv.urdf.xacro &gt; /tmp/agv.urdf</a:t>
+            </a:r>
+            <a:br/>
+            <a:r>
+              <a:t>rg -n 'wheel_radius|left_wheel_joint|right_wheel_joint' /tmp/agv.urdf</a:t>
+            </a:r>
+          </a:p>
+        </p:txBody>
+      </p:sp>
+      <p:sp>
+        <p:nvSpPr>
+          <p:cNvPr id="8" name="Rounded Rectangle 7"/>
+          <p:cNvSpPr/>
+          <p:nvPr/>
+        </p:nvSpPr>
+        <p:spPr>
+          <a:xfrm>
+            <a:off x="658368" y="4206240"/>
+            <a:ext cx="10972800" cy="1554480"/>
+          </a:xfrm>
+          <a:prstGeom prst="roundRect">
+            <a:avLst/>
+          </a:prstGeom>
+          <a:solidFill>
+            <a:srgbClr val="F4F7FB"/>
+          </a:solidFill>
+          <a:ln>
+            <a:solidFill>
+              <a:srgbClr val="D1DFD5"/>
+            </a:solidFill>
+          </a:ln>
+        </p:spPr>
+        <p:style>
+          <a:lnRef idx="1">
+            <a:schemeClr val="accent1"/>
+          </a:lnRef>
+          <a:fillRef idx="3">
+            <a:schemeClr val="accent1"/>
+          </a:fillRef>
+          <a:effectRef idx="2">
+            <a:schemeClr val="accent1"/>
+          </a:effectRef>
+          <a:fontRef idx="minor">
+            <a:schemeClr val="lt1"/>
+          </a:fontRef>
+        </p:style>
+        <p:txBody>
+          <a:bodyPr rtlCol="0" anchor="ctr" wrap="square" lIns="73152" rIns="73152" tIns="36576" bIns="36576"/>
+          <a:lstStyle/>
+          <a:p>
+            <a:pPr algn="l">
+              <a:spcAft>
+                <a:spcPts val="0"/>
+              </a:spcAft>
+              <a:defRPr sz="1800" b="1">
+                <a:solidFill>
+                  <a:srgbClr val="2A8B5A"/>
+                </a:solidFill>
+                <a:latin typeface="Noto Sans CJK KR"/>
+              </a:defRPr>
+            </a:pPr>
+            <a:r>
+              <a:t>완료 체크</a:t>
+            </a:r>
+            <a:br/>
+            <a:r>
+              <a:t>□ 명령이 오류 없이 실행된다.</a:t>
+            </a:r>
+            <a:br/>
+            <a:r>
+              <a:t>□ 기대한 파일·topic·frame·parameter 이름이 보인다.</a:t>
+            </a:r>
+            <a:br/>
+            <a:r>
+              <a:t>□ 값의 단위와 방향을 한 문장으로 설명할 수 있다.</a:t>
+            </a:r>
+          </a:p>
+        </p:txBody>
+      </p:sp>
+      <p:sp>
+        <p:nvSpPr>
+          <p:cNvPr id="9" name="TextBox 8"/>
+          <p:cNvSpPr txBox="1"/>
+          <p:nvPr/>
+        </p:nvSpPr>
+        <p:spPr>
+          <a:xfrm>
+            <a:off x="731520" y="5989320"/>
+            <a:ext cx="10789920" cy="237744"/>
+          </a:xfrm>
+          <a:prstGeom prst="rect">
+            <a:avLst/>
+          </a:prstGeom>
+          <a:noFill/>
+        </p:spPr>
+        <p:txBody>
+          <a:bodyPr wrap="square" lIns="73152" rIns="73152" tIns="36576" bIns="36576">
+            <a:spAutoFit/>
+          </a:bodyPr>
+          <a:lstStyle/>
+          <a:p>
+            <a:pPr algn="l">
+              <a:spcAft>
+                <a:spcPts val="0"/>
+              </a:spcAft>
+              <a:defRPr sz="1500" b="1">
                 <a:solidFill>
                   <a:srgbClr val="122C4E"/>
                 </a:solidFill>
@@ -11158,46 +12145,7 @@
               </a:defRPr>
             </a:pPr>
             <a:r>
-              <a:t>wheel_radius 0.08→0.12 m를 적용한 뒤 joint origin과 cylinder radius가 함께 바뀌는지 비교한다.</a:t>
-            </a:r>
-          </a:p>
-        </p:txBody>
-      </p:sp>
-      <p:sp>
-        <p:nvSpPr>
-          <p:cNvPr id="8" name="TextBox 7"/>
-          <p:cNvSpPr txBox="1"/>
-          <p:nvPr/>
-        </p:nvSpPr>
-        <p:spPr>
-          <a:xfrm>
-            <a:off x="877824" y="4590288"/>
-            <a:ext cx="10241280" cy="594360"/>
-          </a:xfrm>
-          <a:prstGeom prst="rect">
-            <a:avLst/>
-          </a:prstGeom>
-          <a:noFill/>
-        </p:spPr>
-        <p:txBody>
-          <a:bodyPr wrap="square" lIns="73152" rIns="73152" tIns="36576" bIns="36576">
-            <a:spAutoFit/>
-          </a:bodyPr>
-          <a:lstStyle/>
-          <a:p>
-            <a:pPr algn="ctr">
-              <a:spcAft>
-                <a:spcPts val="0"/>
-              </a:spcAft>
-              <a:defRPr sz="1900" b="1">
-                <a:solidFill>
-                  <a:srgbClr val="DB7E22"/>
-                </a:solidFill>
-                <a:latin typeface="Noto Sans CJK KR"/>
-              </a:defRPr>
-            </a:pPr>
-            <a:r>
-              <a:t>기록할 것: 바꾼 값(단위) · 기대한 변화 · 실제 출력/화면 · 원래 값으로 되돌린 결과</a:t>
+              <a:t>완료 조건: wheel_radius와 wheel_base 변경이 좌우 바퀴·충돌 형상에 함께 적용된다.</a:t>
             </a:r>
           </a:p>
         </p:txBody>
@@ -11254,7 +12202,7 @@
               </a:defRPr>
             </a:pPr>
             <a:r>
-              <a:t>체크포인트를 저장하고 다음 모듈로 넘긴다</a:t>
+              <a:t>막히면: 증상 → 우선 확인 → 재검증</a:t>
             </a:r>
           </a:p>
         </p:txBody>
@@ -11293,7 +12241,7 @@
               </a:defRPr>
             </a:pPr>
             <a:r>
-              <a:t>현재 Complete는 다음 Starter의 기준선입니다.</a:t>
+              <a:t>오류 메시지를 숨기지 않고 같은 순서로 점검합니다.</a:t>
             </a:r>
           </a:p>
         </p:txBody>
@@ -11429,7 +12377,7 @@
               </a:defRPr>
             </a:pPr>
             <a:r>
-              <a:t>현재 단계 체크포인트    |    현재 폴더 ~/ros2_curri/agv_ws    |    현재 터미널</a:t>
+              <a:t>현재 단계 오류 대응    |    현재 폴더 ~/ros2_curri/my_agv_ws    |    현재 터미널</a:t>
             </a:r>
           </a:p>
         </p:txBody>
@@ -11442,18 +12390,18 @@
         </p:nvSpPr>
         <p:spPr>
           <a:xfrm>
-            <a:off x="685800" y="1737360"/>
-            <a:ext cx="10972800" cy="3611880"/>
+            <a:off x="694944" y="1755648"/>
+            <a:ext cx="10972800" cy="1115568"/>
           </a:xfrm>
           <a:prstGeom prst="roundRect">
             <a:avLst/>
           </a:prstGeom>
           <a:solidFill>
-            <a:srgbClr val="F4F7FB"/>
+            <a:srgbClr val="FFF7F4"/>
           </a:solidFill>
           <a:ln>
             <a:solidFill>
-              <a:srgbClr val="D2DCE8"/>
+              <a:srgbClr val="EDBEB4"/>
             </a:solidFill>
           </a:ln>
         </p:spPr>
@@ -11487,25 +12435,64 @@
         </p:nvSpPr>
         <p:spPr>
           <a:xfrm>
-            <a:off x="896112" y="1993392"/>
-            <a:ext cx="10332720" cy="2971800"/>
-          </a:xfrm>
-          <a:prstGeom prst="rect">
-            <a:avLst/>
-          </a:prstGeom>
-          <a:noFill/>
-        </p:spPr>
-        <p:txBody>
-          <a:bodyPr wrap="square" lIns="109728" rIns="109728">
-            <a:spAutoFit/>
-          </a:bodyPr>
-          <a:lstStyle/>
-          <a:p>
-            <a:pPr>
-              <a:spcAft>
-                <a:spcPts val="800"/>
-              </a:spcAft>
-              <a:defRPr sz="1800">
+            <a:off x="896112" y="1901952"/>
+            <a:ext cx="2926080" cy="274320"/>
+          </a:xfrm>
+          <a:prstGeom prst="rect">
+            <a:avLst/>
+          </a:prstGeom>
+          <a:noFill/>
+        </p:spPr>
+        <p:txBody>
+          <a:bodyPr wrap="square" lIns="73152" rIns="73152" tIns="36576" bIns="36576">
+            <a:spAutoFit/>
+          </a:bodyPr>
+          <a:lstStyle/>
+          <a:p>
+            <a:pPr algn="l">
+              <a:spcAft>
+                <a:spcPts val="0"/>
+              </a:spcAft>
+              <a:defRPr sz="1800" b="1">
+                <a:solidFill>
+                  <a:srgbClr val="BE3B3B"/>
+                </a:solidFill>
+                <a:latin typeface="Noto Sans CJK KR"/>
+              </a:defRPr>
+            </a:pPr>
+            <a:r>
+              <a:t>증상 1: unknown macro/property</a:t>
+            </a:r>
+          </a:p>
+        </p:txBody>
+      </p:sp>
+      <p:sp>
+        <p:nvSpPr>
+          <p:cNvPr id="9" name="TextBox 8"/>
+          <p:cNvSpPr txBox="1"/>
+          <p:nvPr/>
+        </p:nvSpPr>
+        <p:spPr>
+          <a:xfrm>
+            <a:off x="3794760" y="1883664"/>
+            <a:ext cx="7543800" cy="621792"/>
+          </a:xfrm>
+          <a:prstGeom prst="rect">
+            <a:avLst/>
+          </a:prstGeom>
+          <a:noFill/>
+        </p:spPr>
+        <p:txBody>
+          <a:bodyPr wrap="square" lIns="73152" rIns="73152" tIns="36576" bIns="36576">
+            <a:spAutoFit/>
+          </a:bodyPr>
+          <a:lstStyle/>
+          <a:p>
+            <a:pPr algn="l">
+              <a:spcAft>
+                <a:spcPts val="0"/>
+              </a:spcAft>
+              <a:defRPr sz="1600" b="0">
                 <a:solidFill>
                   <a:srgbClr val="122C4E"/>
                 </a:solidFill>
@@ -11513,15 +12500,126 @@
               </a:defRPr>
             </a:pPr>
             <a:r>
-              <a:t>• □ 완료 화면: wheel_radius와 wheel_base 변경이 좌우 바퀴·충돌 형상에 함께 적용된다.</a:t>
-            </a:r>
-          </a:p>
-          <a:p>
-            <a:pPr>
-              <a:spcAft>
-                <a:spcPts val="800"/>
-              </a:spcAft>
-              <a:defRPr sz="1800">
+              <a:t>우선 확인: 선언 순서·xacro namespace·철자를 확인한다.</a:t>
+            </a:r>
+            <a:br/>
+            <a:r>
+              <a:t>수정 후: xacro ~/ros2_curri/my_agv_ws/src/agv_description/curriculum_stages/M06/agv.urdf.xacro &gt; /tmp/agv.urdf</a:t>
+            </a:r>
+          </a:p>
+        </p:txBody>
+      </p:sp>
+      <p:sp>
+        <p:nvSpPr>
+          <p:cNvPr id="10" name="Rounded Rectangle 9"/>
+          <p:cNvSpPr/>
+          <p:nvPr/>
+        </p:nvSpPr>
+        <p:spPr>
+          <a:xfrm>
+            <a:off x="694944" y="3172968"/>
+            <a:ext cx="10972800" cy="1115568"/>
+          </a:xfrm>
+          <a:prstGeom prst="roundRect">
+            <a:avLst/>
+          </a:prstGeom>
+          <a:solidFill>
+            <a:srgbClr val="FFF7F4"/>
+          </a:solidFill>
+          <a:ln>
+            <a:solidFill>
+              <a:srgbClr val="EDBEB4"/>
+            </a:solidFill>
+          </a:ln>
+        </p:spPr>
+        <p:style>
+          <a:lnRef idx="1">
+            <a:schemeClr val="accent1"/>
+          </a:lnRef>
+          <a:fillRef idx="3">
+            <a:schemeClr val="accent1"/>
+          </a:fillRef>
+          <a:effectRef idx="2">
+            <a:schemeClr val="accent1"/>
+          </a:effectRef>
+          <a:fontRef idx="minor">
+            <a:schemeClr val="lt1"/>
+          </a:fontRef>
+        </p:style>
+        <p:txBody>
+          <a:bodyPr rtlCol="0" anchor="ctr"/>
+          <a:lstStyle/>
+          <a:p>
+            <a:pPr algn="ctr"/>
+          </a:p>
+        </p:txBody>
+      </p:sp>
+      <p:sp>
+        <p:nvSpPr>
+          <p:cNvPr id="11" name="TextBox 10"/>
+          <p:cNvSpPr txBox="1"/>
+          <p:nvPr/>
+        </p:nvSpPr>
+        <p:spPr>
+          <a:xfrm>
+            <a:off x="896112" y="3319272"/>
+            <a:ext cx="2926080" cy="274320"/>
+          </a:xfrm>
+          <a:prstGeom prst="rect">
+            <a:avLst/>
+          </a:prstGeom>
+          <a:noFill/>
+        </p:spPr>
+        <p:txBody>
+          <a:bodyPr wrap="square" lIns="73152" rIns="73152" tIns="36576" bIns="36576">
+            <a:spAutoFit/>
+          </a:bodyPr>
+          <a:lstStyle/>
+          <a:p>
+            <a:pPr algn="l">
+              <a:spcAft>
+                <a:spcPts val="0"/>
+              </a:spcAft>
+              <a:defRPr sz="1800" b="1">
+                <a:solidFill>
+                  <a:srgbClr val="BE3B3B"/>
+                </a:solidFill>
+                <a:latin typeface="Noto Sans CJK KR"/>
+              </a:defRPr>
+            </a:pPr>
+            <a:r>
+              <a:t>증상 2: include file not found</a:t>
+            </a:r>
+          </a:p>
+        </p:txBody>
+      </p:sp>
+      <p:sp>
+        <p:nvSpPr>
+          <p:cNvPr id="12" name="TextBox 11"/>
+          <p:cNvSpPr txBox="1"/>
+          <p:nvPr/>
+        </p:nvSpPr>
+        <p:spPr>
+          <a:xfrm>
+            <a:off x="3794760" y="3300984"/>
+            <a:ext cx="7543800" cy="621792"/>
+          </a:xfrm>
+          <a:prstGeom prst="rect">
+            <a:avLst/>
+          </a:prstGeom>
+          <a:noFill/>
+        </p:spPr>
+        <p:txBody>
+          <a:bodyPr wrap="square" lIns="73152" rIns="73152" tIns="36576" bIns="36576">
+            <a:spAutoFit/>
+          </a:bodyPr>
+          <a:lstStyle/>
+          <a:p>
+            <a:pPr algn="l">
+              <a:spcAft>
+                <a:spcPts val="0"/>
+              </a:spcAft>
+              <a:defRPr sz="1600" b="0">
                 <a:solidFill>
                   <a:srgbClr val="122C4E"/>
                 </a:solidFill>
@@ -11529,69 +12627,25 @@
               </a:defRPr>
             </a:pPr>
             <a:r>
-              <a:t>• □ Complete 파일: blocks/B_robot_build/M06_xacro_modularization/complete/</a:t>
-            </a:r>
-          </a:p>
-          <a:p>
-            <a:pPr>
-              <a:spcAft>
-                <a:spcPts val="800"/>
-              </a:spcAft>
-              <a:defRPr sz="1800">
-                <a:solidFill>
-                  <a:srgbClr val="122C4E"/>
-                </a:solidFill>
-                <a:latin typeface="Noto Sans CJK KR"/>
-              </a:defRPr>
-            </a:pPr>
-            <a:r>
-              <a:t>• □ 정상 로그·캡처: logs/validation.log, screenshots/validation_terminal.png</a:t>
-            </a:r>
-          </a:p>
-          <a:p>
-            <a:pPr>
-              <a:spcAft>
-                <a:spcPts val="800"/>
-              </a:spcAft>
-              <a:defRPr sz="1800">
-                <a:solidFill>
-                  <a:srgbClr val="122C4E"/>
-                </a:solidFill>
-                <a:latin typeface="Noto Sans CJK KR"/>
-              </a:defRPr>
-            </a:pPr>
-            <a:r>
-              <a:t>• □ 버전 식별: CHECKSUM_or_TAG.txt의 SHA-256 manifest</a:t>
-            </a:r>
-          </a:p>
-          <a:p>
-            <a:pPr>
-              <a:spcAft>
-                <a:spcPts val="800"/>
-              </a:spcAft>
-              <a:defRPr sz="1800">
-                <a:solidFill>
-                  <a:srgbClr val="122C4E"/>
-                </a:solidFill>
-                <a:latin typeface="Noto Sans CJK KR"/>
-              </a:defRPr>
-            </a:pPr>
-            <a:r>
-              <a:t>• □ 다음 시작 조건: M07 Gazebo 물리</a:t>
-            </a:r>
-          </a:p>
-        </p:txBody>
-      </p:sp>
-      <p:sp>
-        <p:nvSpPr>
-          <p:cNvPr id="9" name="TextBox 8"/>
-          <p:cNvSpPr txBox="1"/>
-          <p:nvPr/>
-        </p:nvSpPr>
-        <p:spPr>
-          <a:xfrm>
-            <a:off x="868680" y="5596128"/>
-            <a:ext cx="10515600" cy="338328"/>
+              <a:t>우선 확인: 패키지 이름과 설치 대상·파일 경로를 확인한다.</a:t>
+            </a:r>
+            <a:br/>
+            <a:r>
+              <a:t>수정 후: xacro ~/ros2_curri/my_agv_ws/src/agv_description/curriculum_stages/M06/agv.urdf.xacro &gt; /tmp/agv.urdf</a:t>
+            </a:r>
+          </a:p>
+        </p:txBody>
+      </p:sp>
+      <p:sp>
+        <p:nvSpPr>
+          <p:cNvPr id="13" name="TextBox 12"/>
+          <p:cNvSpPr txBox="1"/>
+          <p:nvPr/>
+        </p:nvSpPr>
+        <p:spPr>
+          <a:xfrm>
+            <a:off x="822960" y="5102352"/>
+            <a:ext cx="10607040" cy="402336"/>
           </a:xfrm>
           <a:prstGeom prst="rect">
             <a:avLst/>
@@ -11608,15 +12662,15 @@
               <a:spcAft>
                 <a:spcPts val="0"/>
               </a:spcAft>
-              <a:defRPr sz="1700" b="1">
-                <a:solidFill>
-                  <a:srgbClr val="2A8B5A"/>
-                </a:solidFill>
-                <a:latin typeface="Noto Sans CJK KR"/>
-              </a:defRPr>
-            </a:pPr>
-            <a:r>
-              <a:t>다음 모듈을 시작하기 전, 이 슬라이드의 Complete와 다음 모듈의 Starter를 비교합니다.</a:t>
+              <a:defRPr sz="1800" b="1">
+                <a:solidFill>
+                  <a:srgbClr val="DB7E22"/>
+                </a:solidFill>
+                <a:latin typeface="Noto Sans CJK KR"/>
+              </a:defRPr>
+            </a:pPr>
+            <a:r>
+              <a:t>공통 순서: ① 현재 폴더 ② source ③ 파일 경로 ④ 이름/타입/단위 ⑤ build·source 후 재실행</a:t>
             </a:r>
           </a:p>
         </p:txBody>
@@ -11673,6 +12727,1138 @@
               </a:defRPr>
             </a:pPr>
             <a:r>
+              <a:t>막혔을 때만: Complete를 복구용으로 사용한다</a:t>
+            </a:r>
+          </a:p>
+        </p:txBody>
+      </p:sp>
+      <p:sp>
+        <p:nvSpPr>
+          <p:cNvPr id="3" name="TextBox 2"/>
+          <p:cNvSpPr txBox="1"/>
+          <p:nvPr/>
+        </p:nvSpPr>
+        <p:spPr>
+          <a:xfrm>
+            <a:off x="603504" y="859536"/>
+            <a:ext cx="10698480" cy="292608"/>
+          </a:xfrm>
+          <a:prstGeom prst="rect">
+            <a:avLst/>
+          </a:prstGeom>
+          <a:noFill/>
+        </p:spPr>
+        <p:txBody>
+          <a:bodyPr wrap="square" lIns="73152" rIns="73152" tIns="36576" bIns="36576">
+            <a:spAutoFit/>
+          </a:bodyPr>
+          <a:lstStyle/>
+          <a:p>
+            <a:pPr algn="l">
+              <a:spcAft>
+                <a:spcPts val="0"/>
+              </a:spcAft>
+              <a:defRPr sz="1700" b="0">
+                <a:solidFill>
+                  <a:srgbClr val="5C6672"/>
+                </a:solidFill>
+                <a:latin typeface="Noto Sans CJK KR"/>
+              </a:defRPr>
+            </a:pPr>
+            <a:r>
+              <a:t>이 슬라이드가 먼저가 아닙니다. 직접 입력·실행을 시도한 뒤에만 내 파일과 Complete를 비교합니다.</a:t>
+            </a:r>
+          </a:p>
+        </p:txBody>
+      </p:sp>
+      <p:sp>
+        <p:nvSpPr>
+          <p:cNvPr id="4" name="TextBox 3"/>
+          <p:cNvSpPr txBox="1"/>
+          <p:nvPr/>
+        </p:nvSpPr>
+        <p:spPr>
+          <a:xfrm>
+            <a:off x="530352" y="6510528"/>
+            <a:ext cx="7772400" cy="201168"/>
+          </a:xfrm>
+          <a:prstGeom prst="rect">
+            <a:avLst/>
+          </a:prstGeom>
+          <a:noFill/>
+        </p:spPr>
+        <p:txBody>
+          <a:bodyPr wrap="square" lIns="73152" rIns="73152" tIns="36576" bIns="36576">
+            <a:spAutoFit/>
+          </a:bodyPr>
+          <a:lstStyle/>
+          <a:p>
+            <a:pPr algn="l">
+              <a:spcAft>
+                <a:spcPts val="0"/>
+              </a:spcAft>
+              <a:defRPr sz="1000" b="0">
+                <a:solidFill>
+                  <a:srgbClr val="5C6672"/>
+                </a:solidFill>
+                <a:latin typeface="Noto Sans CJK KR"/>
+              </a:defRPr>
+            </a:pPr>
+            <a:r>
+              <a:t>ROS 2 Jazzy · Gazebo Harmonic · M06 · 따라 하기형 AGV 실습</a:t>
+            </a:r>
+          </a:p>
+        </p:txBody>
+      </p:sp>
+      <p:sp>
+        <p:nvSpPr>
+          <p:cNvPr id="5" name="TextBox 4"/>
+          <p:cNvSpPr txBox="1"/>
+          <p:nvPr/>
+        </p:nvSpPr>
+        <p:spPr>
+          <a:xfrm>
+            <a:off x="9144000" y="6510528"/>
+            <a:ext cx="2468880" cy="201168"/>
+          </a:xfrm>
+          <a:prstGeom prst="rect">
+            <a:avLst/>
+          </a:prstGeom>
+          <a:noFill/>
+        </p:spPr>
+        <p:txBody>
+          <a:bodyPr wrap="square" lIns="73152" rIns="73152" tIns="36576" bIns="36576">
+            <a:spAutoFit/>
+          </a:bodyPr>
+          <a:lstStyle/>
+          <a:p>
+            <a:pPr algn="r">
+              <a:spcAft>
+                <a:spcPts val="0"/>
+              </a:spcAft>
+              <a:defRPr sz="1000" b="0">
+                <a:solidFill>
+                  <a:srgbClr val="5C6672"/>
+                </a:solidFill>
+                <a:latin typeface="Noto Sans CJK KR"/>
+              </a:defRPr>
+            </a:pPr>
+            <a:r>
+              <a:t>명령·파일 경로는 슬라이드에서 복사 가능</a:t>
+            </a:r>
+          </a:p>
+        </p:txBody>
+      </p:sp>
+      <p:sp>
+        <p:nvSpPr>
+          <p:cNvPr id="6" name="Rectangle 5"/>
+          <p:cNvSpPr/>
+          <p:nvPr/>
+        </p:nvSpPr>
+        <p:spPr>
+          <a:xfrm>
+            <a:off x="566928" y="1188720"/>
+            <a:ext cx="11064240" cy="347472"/>
+          </a:xfrm>
+          <a:prstGeom prst="rect">
+            <a:avLst/>
+          </a:prstGeom>
+          <a:solidFill>
+            <a:srgbClr val="F4F7FB"/>
+          </a:solidFill>
+          <a:ln>
+            <a:solidFill>
+              <a:srgbClr val="F4F7FB"/>
+            </a:solidFill>
+          </a:ln>
+        </p:spPr>
+        <p:style>
+          <a:lnRef idx="1">
+            <a:schemeClr val="accent1"/>
+          </a:lnRef>
+          <a:fillRef idx="3">
+            <a:schemeClr val="accent1"/>
+          </a:fillRef>
+          <a:effectRef idx="2">
+            <a:schemeClr val="accent1"/>
+          </a:effectRef>
+          <a:fontRef idx="minor">
+            <a:schemeClr val="lt1"/>
+          </a:fontRef>
+        </p:style>
+        <p:txBody>
+          <a:bodyPr rtlCol="0" anchor="ctr" wrap="square" lIns="73152" rIns="73152" tIns="36576" bIns="36576"/>
+          <a:lstStyle/>
+          <a:p>
+            <a:pPr algn="l">
+              <a:spcAft>
+                <a:spcPts val="0"/>
+              </a:spcAft>
+              <a:defRPr sz="1300" b="1">
+                <a:solidFill>
+                  <a:srgbClr val="122C4E"/>
+                </a:solidFill>
+                <a:latin typeface="Noto Sans CJK KR"/>
+              </a:defRPr>
+            </a:pPr>
+            <a:r>
+              <a:t>현재 단계 복구용 Complete    |    현재 폴더 ~/ros2_curri    |    현재 터미널</a:t>
+            </a:r>
+          </a:p>
+        </p:txBody>
+      </p:sp>
+      <p:sp>
+        <p:nvSpPr>
+          <p:cNvPr id="7" name="TextBox 6"/>
+          <p:cNvSpPr txBox="1"/>
+          <p:nvPr/>
+        </p:nvSpPr>
+        <p:spPr>
+          <a:xfrm>
+            <a:off x="713232" y="1664208"/>
+            <a:ext cx="10698480" cy="402336"/>
+          </a:xfrm>
+          <a:prstGeom prst="rect">
+            <a:avLst/>
+          </a:prstGeom>
+          <a:noFill/>
+        </p:spPr>
+        <p:txBody>
+          <a:bodyPr wrap="square" lIns="73152" rIns="73152" tIns="36576" bIns="36576">
+            <a:spAutoFit/>
+          </a:bodyPr>
+          <a:lstStyle/>
+          <a:p>
+            <a:pPr algn="ctr">
+              <a:spcAft>
+                <a:spcPts val="0"/>
+              </a:spcAft>
+              <a:defRPr sz="1800" b="1">
+                <a:solidFill>
+                  <a:srgbClr val="DB7E22"/>
+                </a:solidFill>
+                <a:latin typeface="Noto Sans CJK KR"/>
+              </a:defRPr>
+            </a:pPr>
+            <a:r>
+              <a:t>권장 순서: ① 내 오류를 확인  ② Complete와 diff  ③ 꼭 필요할 때만 backup 후 복사</a:t>
+            </a:r>
+          </a:p>
+        </p:txBody>
+      </p:sp>
+      <p:sp>
+        <p:nvSpPr>
+          <p:cNvPr id="8" name="Rounded Rectangle 7"/>
+          <p:cNvSpPr/>
+          <p:nvPr/>
+        </p:nvSpPr>
+        <p:spPr>
+          <a:xfrm>
+            <a:off x="676656" y="2423160"/>
+            <a:ext cx="10881360" cy="2606040"/>
+          </a:xfrm>
+          <a:prstGeom prst="roundRect">
+            <a:avLst/>
+          </a:prstGeom>
+          <a:solidFill>
+            <a:srgbClr val="1D232D"/>
+          </a:solidFill>
+          <a:ln>
+            <a:solidFill>
+              <a:srgbClr val="1D232D"/>
+            </a:solidFill>
+          </a:ln>
+        </p:spPr>
+        <p:style>
+          <a:lnRef idx="1">
+            <a:schemeClr val="accent1"/>
+          </a:lnRef>
+          <a:fillRef idx="3">
+            <a:schemeClr val="accent1"/>
+          </a:fillRef>
+          <a:effectRef idx="2">
+            <a:schemeClr val="accent1"/>
+          </a:effectRef>
+          <a:fontRef idx="minor">
+            <a:schemeClr val="lt1"/>
+          </a:fontRef>
+        </p:style>
+        <p:txBody>
+          <a:bodyPr rtlCol="0" anchor="ctr" wrap="square" lIns="73152" rIns="73152" tIns="36576" bIns="36576"/>
+          <a:lstStyle/>
+          <a:p>
+            <a:pPr algn="l">
+              <a:spcAft>
+                <a:spcPts val="0"/>
+              </a:spcAft>
+              <a:defRPr sz="1400" b="0">
+                <a:solidFill>
+                  <a:srgbClr val="FFFFFF"/>
+                </a:solidFill>
+                <a:latin typeface="DejaVu Sans Mono"/>
+              </a:defRPr>
+            </a:pPr>
+            <a:r>
+              <a:t>cd ~/ros2_curri</a:t>
+            </a:r>
+            <a:br/>
+            <a:r>
+              <a:t>diff -ru my_agv_ws/src blocks/B_robot_build/M06_xacro_modularization/complete/agv_ws/src || true</a:t>
+            </a:r>
+            <a:br/>
+            <a:r>
+              <a:t>cp -a my_agv_ws/src my_agv_ws/src_before_M06</a:t>
+            </a:r>
+            <a:br/>
+            <a:r>
+              <a:t>cp -a blocks/B_robot_build/M06_xacro_modularization/complete/agv_ws/src/. my_agv_ws/src/</a:t>
+            </a:r>
+            <a:br/>
+            <a:r>
+              <a:t>cd my_agv_ws &amp;&amp; colcon build --symlink-install &amp;&amp; source install/setup.bash</a:t>
+            </a:r>
+          </a:p>
+        </p:txBody>
+      </p:sp>
+      <p:sp>
+        <p:nvSpPr>
+          <p:cNvPr id="9" name="TextBox 8"/>
+          <p:cNvSpPr txBox="1"/>
+          <p:nvPr/>
+        </p:nvSpPr>
+        <p:spPr>
+          <a:xfrm>
+            <a:off x="786384" y="5413248"/>
+            <a:ext cx="10424160" cy="429768"/>
+          </a:xfrm>
+          <a:prstGeom prst="rect">
+            <a:avLst/>
+          </a:prstGeom>
+          <a:noFill/>
+        </p:spPr>
+        <p:txBody>
+          <a:bodyPr wrap="square" lIns="73152" rIns="73152" tIns="36576" bIns="36576">
+            <a:spAutoFit/>
+          </a:bodyPr>
+          <a:lstStyle/>
+          <a:p>
+            <a:pPr algn="ctr">
+              <a:spcAft>
+                <a:spcPts val="0"/>
+              </a:spcAft>
+              <a:defRPr sz="1700" b="1">
+                <a:solidFill>
+                  <a:srgbClr val="2A8B5A"/>
+                </a:solidFill>
+                <a:latin typeface="Noto Sans CJK KR"/>
+              </a:defRPr>
+            </a:pPr>
+            <a:r>
+              <a:t>복구 뒤에는 끝내지 말고, 내 파일과 Complete의 차이를 한 줄씩 설명한 뒤 다시 직접 입력해 봅니다.</a:t>
+            </a:r>
+          </a:p>
+        </p:txBody>
+      </p:sp>
+    </p:spTree>
+  </p:cSld>
+  <p:clrMapOvr>
+    <a:masterClrMapping/>
+  </p:clrMapOvr>
+</p:sld>
+</file>
+
+<file path=ppt/slides/slide24.xml><?xml version="1.0" encoding="utf-8"?>
+<p:sld xmlns:a="http://schemas.openxmlformats.org/drawingml/2006/main" xmlns:p="http://schemas.openxmlformats.org/presentationml/2006/main" xmlns:r="http://schemas.openxmlformats.org/officeDocument/2006/relationships">
+  <p:cSld>
+    <p:spTree>
+      <p:nvGrpSpPr>
+        <p:cNvPr id="1" name=""/>
+        <p:cNvGrpSpPr/>
+        <p:nvPr/>
+      </p:nvGrpSpPr>
+      <p:grpSpPr/>
+      <p:sp>
+        <p:nvSpPr>
+          <p:cNvPr id="2" name="TextBox 1"/>
+          <p:cNvSpPr txBox="1"/>
+          <p:nvPr/>
+        </p:nvSpPr>
+        <p:spPr>
+          <a:xfrm>
+            <a:off x="566928" y="347472"/>
+            <a:ext cx="10881360" cy="438912"/>
+          </a:xfrm>
+          <a:prstGeom prst="rect">
+            <a:avLst/>
+          </a:prstGeom>
+          <a:noFill/>
+        </p:spPr>
+        <p:txBody>
+          <a:bodyPr wrap="square" lIns="73152" rIns="73152" tIns="36576" bIns="36576">
+            <a:spAutoFit/>
+          </a:bodyPr>
+          <a:lstStyle/>
+          <a:p>
+            <a:pPr algn="l">
+              <a:spcAft>
+                <a:spcPts val="0"/>
+              </a:spcAft>
+              <a:defRPr sz="3200" b="1">
+                <a:solidFill>
+                  <a:srgbClr val="122C4E"/>
+                </a:solidFill>
+                <a:latin typeface="Noto Sans CJK KR"/>
+              </a:defRPr>
+            </a:pPr>
+            <a:r>
+              <a:t>미니 실습: 값 하나를 바꾸고 결과를 비교한다</a:t>
+            </a:r>
+          </a:p>
+        </p:txBody>
+      </p:sp>
+      <p:sp>
+        <p:nvSpPr>
+          <p:cNvPr id="3" name="TextBox 2"/>
+          <p:cNvSpPr txBox="1"/>
+          <p:nvPr/>
+        </p:nvSpPr>
+        <p:spPr>
+          <a:xfrm>
+            <a:off x="603504" y="859536"/>
+            <a:ext cx="10698480" cy="292608"/>
+          </a:xfrm>
+          <a:prstGeom prst="rect">
+            <a:avLst/>
+          </a:prstGeom>
+          <a:noFill/>
+        </p:spPr>
+        <p:txBody>
+          <a:bodyPr wrap="square" lIns="73152" rIns="73152" tIns="36576" bIns="36576">
+            <a:spAutoFit/>
+          </a:bodyPr>
+          <a:lstStyle/>
+          <a:p>
+            <a:pPr algn="l">
+              <a:spcAft>
+                <a:spcPts val="0"/>
+              </a:spcAft>
+              <a:defRPr sz="1700" b="0">
+                <a:solidFill>
+                  <a:srgbClr val="5C6672"/>
+                </a:solidFill>
+                <a:latin typeface="Noto Sans CJK KR"/>
+              </a:defRPr>
+            </a:pPr>
+            <a:r>
+              <a:t>정상 결과를 만든 뒤에는 한 번에 하나의 값만 바꿉니다.</a:t>
+            </a:r>
+          </a:p>
+        </p:txBody>
+      </p:sp>
+      <p:sp>
+        <p:nvSpPr>
+          <p:cNvPr id="4" name="TextBox 3"/>
+          <p:cNvSpPr txBox="1"/>
+          <p:nvPr/>
+        </p:nvSpPr>
+        <p:spPr>
+          <a:xfrm>
+            <a:off x="530352" y="6510528"/>
+            <a:ext cx="7772400" cy="201168"/>
+          </a:xfrm>
+          <a:prstGeom prst="rect">
+            <a:avLst/>
+          </a:prstGeom>
+          <a:noFill/>
+        </p:spPr>
+        <p:txBody>
+          <a:bodyPr wrap="square" lIns="73152" rIns="73152" tIns="36576" bIns="36576">
+            <a:spAutoFit/>
+          </a:bodyPr>
+          <a:lstStyle/>
+          <a:p>
+            <a:pPr algn="l">
+              <a:spcAft>
+                <a:spcPts val="0"/>
+              </a:spcAft>
+              <a:defRPr sz="1000" b="0">
+                <a:solidFill>
+                  <a:srgbClr val="5C6672"/>
+                </a:solidFill>
+                <a:latin typeface="Noto Sans CJK KR"/>
+              </a:defRPr>
+            </a:pPr>
+            <a:r>
+              <a:t>ROS 2 Jazzy · Gazebo Harmonic · M06 · 따라 하기형 AGV 실습</a:t>
+            </a:r>
+          </a:p>
+        </p:txBody>
+      </p:sp>
+      <p:sp>
+        <p:nvSpPr>
+          <p:cNvPr id="5" name="TextBox 4"/>
+          <p:cNvSpPr txBox="1"/>
+          <p:nvPr/>
+        </p:nvSpPr>
+        <p:spPr>
+          <a:xfrm>
+            <a:off x="9144000" y="6510528"/>
+            <a:ext cx="2468880" cy="201168"/>
+          </a:xfrm>
+          <a:prstGeom prst="rect">
+            <a:avLst/>
+          </a:prstGeom>
+          <a:noFill/>
+        </p:spPr>
+        <p:txBody>
+          <a:bodyPr wrap="square" lIns="73152" rIns="73152" tIns="36576" bIns="36576">
+            <a:spAutoFit/>
+          </a:bodyPr>
+          <a:lstStyle/>
+          <a:p>
+            <a:pPr algn="r">
+              <a:spcAft>
+                <a:spcPts val="0"/>
+              </a:spcAft>
+              <a:defRPr sz="1000" b="0">
+                <a:solidFill>
+                  <a:srgbClr val="5C6672"/>
+                </a:solidFill>
+                <a:latin typeface="Noto Sans CJK KR"/>
+              </a:defRPr>
+            </a:pPr>
+            <a:r>
+              <a:t>명령·파일 경로는 슬라이드에서 복사 가능</a:t>
+            </a:r>
+          </a:p>
+        </p:txBody>
+      </p:sp>
+      <p:sp>
+        <p:nvSpPr>
+          <p:cNvPr id="6" name="Rectangle 5"/>
+          <p:cNvSpPr/>
+          <p:nvPr/>
+        </p:nvSpPr>
+        <p:spPr>
+          <a:xfrm>
+            <a:off x="566928" y="1188720"/>
+            <a:ext cx="11064240" cy="347472"/>
+          </a:xfrm>
+          <a:prstGeom prst="rect">
+            <a:avLst/>
+          </a:prstGeom>
+          <a:solidFill>
+            <a:srgbClr val="F4F7FB"/>
+          </a:solidFill>
+          <a:ln>
+            <a:solidFill>
+              <a:srgbClr val="F4F7FB"/>
+            </a:solidFill>
+          </a:ln>
+        </p:spPr>
+        <p:style>
+          <a:lnRef idx="1">
+            <a:schemeClr val="accent1"/>
+          </a:lnRef>
+          <a:fillRef idx="3">
+            <a:schemeClr val="accent1"/>
+          </a:fillRef>
+          <a:effectRef idx="2">
+            <a:schemeClr val="accent1"/>
+          </a:effectRef>
+          <a:fontRef idx="minor">
+            <a:schemeClr val="lt1"/>
+          </a:fontRef>
+        </p:style>
+        <p:txBody>
+          <a:bodyPr rtlCol="0" anchor="ctr" wrap="square" lIns="73152" rIns="73152" tIns="36576" bIns="36576"/>
+          <a:lstStyle/>
+          <a:p>
+            <a:pPr algn="l">
+              <a:spcAft>
+                <a:spcPts val="0"/>
+              </a:spcAft>
+              <a:defRPr sz="1300" b="1">
+                <a:solidFill>
+                  <a:srgbClr val="122C4E"/>
+                </a:solidFill>
+                <a:latin typeface="Noto Sans CJK KR"/>
+              </a:defRPr>
+            </a:pPr>
+            <a:r>
+              <a:t>현재 단계 미니 실습    |    현재 폴더 ~/ros2_curri/my_agv_ws    |    현재 터미널</a:t>
+            </a:r>
+          </a:p>
+        </p:txBody>
+      </p:sp>
+      <p:sp>
+        <p:nvSpPr>
+          <p:cNvPr id="7" name="Rounded Rectangle 6"/>
+          <p:cNvSpPr/>
+          <p:nvPr/>
+        </p:nvSpPr>
+        <p:spPr>
+          <a:xfrm>
+            <a:off x="749808" y="1874519"/>
+            <a:ext cx="10652760" cy="1993392"/>
+          </a:xfrm>
+          <a:prstGeom prst="roundRect">
+            <a:avLst/>
+          </a:prstGeom>
+          <a:solidFill>
+            <a:srgbClr val="FFF8EB"/>
+          </a:solidFill>
+          <a:ln>
+            <a:solidFill>
+              <a:srgbClr val="ECC680"/>
+            </a:solidFill>
+          </a:ln>
+        </p:spPr>
+        <p:style>
+          <a:lnRef idx="1">
+            <a:schemeClr val="accent1"/>
+          </a:lnRef>
+          <a:fillRef idx="3">
+            <a:schemeClr val="accent1"/>
+          </a:fillRef>
+          <a:effectRef idx="2">
+            <a:schemeClr val="accent1"/>
+          </a:effectRef>
+          <a:fontRef idx="minor">
+            <a:schemeClr val="lt1"/>
+          </a:fontRef>
+        </p:style>
+        <p:txBody>
+          <a:bodyPr rtlCol="0" anchor="ctr" wrap="square" lIns="73152" rIns="73152" tIns="36576" bIns="36576"/>
+          <a:lstStyle/>
+          <a:p>
+            <a:pPr algn="ctr">
+              <a:spcAft>
+                <a:spcPts val="0"/>
+              </a:spcAft>
+              <a:defRPr sz="2300" b="1">
+                <a:solidFill>
+                  <a:srgbClr val="122C4E"/>
+                </a:solidFill>
+                <a:latin typeface="Noto Sans CJK KR"/>
+              </a:defRPr>
+            </a:pPr>
+            <a:r>
+              <a:t>wheel_radius 0.08→0.12 m를 적용한 뒤 joint origin과 cylinder radius가 함께 바뀌는지 비교한다.</a:t>
+            </a:r>
+          </a:p>
+        </p:txBody>
+      </p:sp>
+      <p:sp>
+        <p:nvSpPr>
+          <p:cNvPr id="8" name="TextBox 7"/>
+          <p:cNvSpPr txBox="1"/>
+          <p:nvPr/>
+        </p:nvSpPr>
+        <p:spPr>
+          <a:xfrm>
+            <a:off x="877824" y="4590288"/>
+            <a:ext cx="10241280" cy="594360"/>
+          </a:xfrm>
+          <a:prstGeom prst="rect">
+            <a:avLst/>
+          </a:prstGeom>
+          <a:noFill/>
+        </p:spPr>
+        <p:txBody>
+          <a:bodyPr wrap="square" lIns="73152" rIns="73152" tIns="36576" bIns="36576">
+            <a:spAutoFit/>
+          </a:bodyPr>
+          <a:lstStyle/>
+          <a:p>
+            <a:pPr algn="ctr">
+              <a:spcAft>
+                <a:spcPts val="0"/>
+              </a:spcAft>
+              <a:defRPr sz="1900" b="1">
+                <a:solidFill>
+                  <a:srgbClr val="DB7E22"/>
+                </a:solidFill>
+                <a:latin typeface="Noto Sans CJK KR"/>
+              </a:defRPr>
+            </a:pPr>
+            <a:r>
+              <a:t>기록할 것: 바꾼 값(단위) · 기대한 변화 · 실제 출력/화면 · 원래 값으로 되돌린 결과</a:t>
+            </a:r>
+          </a:p>
+        </p:txBody>
+      </p:sp>
+    </p:spTree>
+  </p:cSld>
+  <p:clrMapOvr>
+    <a:masterClrMapping/>
+  </p:clrMapOvr>
+</p:sld>
+</file>
+
+<file path=ppt/slides/slide25.xml><?xml version="1.0" encoding="utf-8"?>
+<p:sld xmlns:a="http://schemas.openxmlformats.org/drawingml/2006/main" xmlns:p="http://schemas.openxmlformats.org/presentationml/2006/main" xmlns:r="http://schemas.openxmlformats.org/officeDocument/2006/relationships">
+  <p:cSld>
+    <p:spTree>
+      <p:nvGrpSpPr>
+        <p:cNvPr id="1" name=""/>
+        <p:cNvGrpSpPr/>
+        <p:nvPr/>
+      </p:nvGrpSpPr>
+      <p:grpSpPr/>
+      <p:sp>
+        <p:nvSpPr>
+          <p:cNvPr id="2" name="TextBox 1"/>
+          <p:cNvSpPr txBox="1"/>
+          <p:nvPr/>
+        </p:nvSpPr>
+        <p:spPr>
+          <a:xfrm>
+            <a:off x="566928" y="347472"/>
+            <a:ext cx="10881360" cy="438912"/>
+          </a:xfrm>
+          <a:prstGeom prst="rect">
+            <a:avLst/>
+          </a:prstGeom>
+          <a:noFill/>
+        </p:spPr>
+        <p:txBody>
+          <a:bodyPr wrap="square" lIns="73152" rIns="73152" tIns="36576" bIns="36576">
+            <a:spAutoFit/>
+          </a:bodyPr>
+          <a:lstStyle/>
+          <a:p>
+            <a:pPr algn="l">
+              <a:spcAft>
+                <a:spcPts val="0"/>
+              </a:spcAft>
+              <a:defRPr sz="3200" b="1">
+                <a:solidFill>
+                  <a:srgbClr val="122C4E"/>
+                </a:solidFill>
+                <a:latin typeface="Noto Sans CJK KR"/>
+              </a:defRPr>
+            </a:pPr>
+            <a:r>
+              <a:t>내 프로젝트 체크포인트를 저장하고 다음 모듈로 넘긴다</a:t>
+            </a:r>
+          </a:p>
+        </p:txBody>
+      </p:sp>
+      <p:sp>
+        <p:nvSpPr>
+          <p:cNvPr id="3" name="TextBox 2"/>
+          <p:cNvSpPr txBox="1"/>
+          <p:nvPr/>
+        </p:nvSpPr>
+        <p:spPr>
+          <a:xfrm>
+            <a:off x="603504" y="859536"/>
+            <a:ext cx="10698480" cy="292608"/>
+          </a:xfrm>
+          <a:prstGeom prst="rect">
+            <a:avLst/>
+          </a:prstGeom>
+          <a:noFill/>
+        </p:spPr>
+        <p:txBody>
+          <a:bodyPr wrap="square" lIns="73152" rIns="73152" tIns="36576" bIns="36576">
+            <a:spAutoFit/>
+          </a:bodyPr>
+          <a:lstStyle/>
+          <a:p>
+            <a:pPr algn="l">
+              <a:spcAft>
+                <a:spcPts val="0"/>
+              </a:spcAft>
+              <a:defRPr sz="1700" b="0">
+                <a:solidFill>
+                  <a:srgbClr val="5C6672"/>
+                </a:solidFill>
+                <a:latin typeface="Noto Sans CJK KR"/>
+              </a:defRPr>
+            </a:pPr>
+            <a:r>
+              <a:t>Complete는 복구용 비교 기준이고, 다음 단계는 내가 직접 만든 workspace에서 계속합니다.</a:t>
+            </a:r>
+          </a:p>
+        </p:txBody>
+      </p:sp>
+      <p:sp>
+        <p:nvSpPr>
+          <p:cNvPr id="4" name="TextBox 3"/>
+          <p:cNvSpPr txBox="1"/>
+          <p:nvPr/>
+        </p:nvSpPr>
+        <p:spPr>
+          <a:xfrm>
+            <a:off x="530352" y="6510528"/>
+            <a:ext cx="7772400" cy="201168"/>
+          </a:xfrm>
+          <a:prstGeom prst="rect">
+            <a:avLst/>
+          </a:prstGeom>
+          <a:noFill/>
+        </p:spPr>
+        <p:txBody>
+          <a:bodyPr wrap="square" lIns="73152" rIns="73152" tIns="36576" bIns="36576">
+            <a:spAutoFit/>
+          </a:bodyPr>
+          <a:lstStyle/>
+          <a:p>
+            <a:pPr algn="l">
+              <a:spcAft>
+                <a:spcPts val="0"/>
+              </a:spcAft>
+              <a:defRPr sz="1000" b="0">
+                <a:solidFill>
+                  <a:srgbClr val="5C6672"/>
+                </a:solidFill>
+                <a:latin typeface="Noto Sans CJK KR"/>
+              </a:defRPr>
+            </a:pPr>
+            <a:r>
+              <a:t>ROS 2 Jazzy · Gazebo Harmonic · M06 · 따라 하기형 AGV 실습</a:t>
+            </a:r>
+          </a:p>
+        </p:txBody>
+      </p:sp>
+      <p:sp>
+        <p:nvSpPr>
+          <p:cNvPr id="5" name="TextBox 4"/>
+          <p:cNvSpPr txBox="1"/>
+          <p:nvPr/>
+        </p:nvSpPr>
+        <p:spPr>
+          <a:xfrm>
+            <a:off x="9144000" y="6510528"/>
+            <a:ext cx="2468880" cy="201168"/>
+          </a:xfrm>
+          <a:prstGeom prst="rect">
+            <a:avLst/>
+          </a:prstGeom>
+          <a:noFill/>
+        </p:spPr>
+        <p:txBody>
+          <a:bodyPr wrap="square" lIns="73152" rIns="73152" tIns="36576" bIns="36576">
+            <a:spAutoFit/>
+          </a:bodyPr>
+          <a:lstStyle/>
+          <a:p>
+            <a:pPr algn="r">
+              <a:spcAft>
+                <a:spcPts val="0"/>
+              </a:spcAft>
+              <a:defRPr sz="1000" b="0">
+                <a:solidFill>
+                  <a:srgbClr val="5C6672"/>
+                </a:solidFill>
+                <a:latin typeface="Noto Sans CJK KR"/>
+              </a:defRPr>
+            </a:pPr>
+            <a:r>
+              <a:t>명령·파일 경로는 슬라이드에서 복사 가능</a:t>
+            </a:r>
+          </a:p>
+        </p:txBody>
+      </p:sp>
+      <p:sp>
+        <p:nvSpPr>
+          <p:cNvPr id="6" name="Rectangle 5"/>
+          <p:cNvSpPr/>
+          <p:nvPr/>
+        </p:nvSpPr>
+        <p:spPr>
+          <a:xfrm>
+            <a:off x="566928" y="1188720"/>
+            <a:ext cx="11064240" cy="347472"/>
+          </a:xfrm>
+          <a:prstGeom prst="rect">
+            <a:avLst/>
+          </a:prstGeom>
+          <a:solidFill>
+            <a:srgbClr val="F4F7FB"/>
+          </a:solidFill>
+          <a:ln>
+            <a:solidFill>
+              <a:srgbClr val="F4F7FB"/>
+            </a:solidFill>
+          </a:ln>
+        </p:spPr>
+        <p:style>
+          <a:lnRef idx="1">
+            <a:schemeClr val="accent1"/>
+          </a:lnRef>
+          <a:fillRef idx="3">
+            <a:schemeClr val="accent1"/>
+          </a:fillRef>
+          <a:effectRef idx="2">
+            <a:schemeClr val="accent1"/>
+          </a:effectRef>
+          <a:fontRef idx="minor">
+            <a:schemeClr val="lt1"/>
+          </a:fontRef>
+        </p:style>
+        <p:txBody>
+          <a:bodyPr rtlCol="0" anchor="ctr" wrap="square" lIns="73152" rIns="73152" tIns="36576" bIns="36576"/>
+          <a:lstStyle/>
+          <a:p>
+            <a:pPr algn="l">
+              <a:spcAft>
+                <a:spcPts val="0"/>
+              </a:spcAft>
+              <a:defRPr sz="1300" b="1">
+                <a:solidFill>
+                  <a:srgbClr val="122C4E"/>
+                </a:solidFill>
+                <a:latin typeface="Noto Sans CJK KR"/>
+              </a:defRPr>
+            </a:pPr>
+            <a:r>
+              <a:t>현재 단계 체크포인트    |    현재 폴더 ~/ros2_curri/my_agv_ws    |    현재 터미널</a:t>
+            </a:r>
+          </a:p>
+        </p:txBody>
+      </p:sp>
+      <p:sp>
+        <p:nvSpPr>
+          <p:cNvPr id="7" name="Rounded Rectangle 6"/>
+          <p:cNvSpPr/>
+          <p:nvPr/>
+        </p:nvSpPr>
+        <p:spPr>
+          <a:xfrm>
+            <a:off x="685800" y="1737360"/>
+            <a:ext cx="10972800" cy="3611880"/>
+          </a:xfrm>
+          <a:prstGeom prst="roundRect">
+            <a:avLst/>
+          </a:prstGeom>
+          <a:solidFill>
+            <a:srgbClr val="F4F7FB"/>
+          </a:solidFill>
+          <a:ln>
+            <a:solidFill>
+              <a:srgbClr val="D2DCE8"/>
+            </a:solidFill>
+          </a:ln>
+        </p:spPr>
+        <p:style>
+          <a:lnRef idx="1">
+            <a:schemeClr val="accent1"/>
+          </a:lnRef>
+          <a:fillRef idx="3">
+            <a:schemeClr val="accent1"/>
+          </a:fillRef>
+          <a:effectRef idx="2">
+            <a:schemeClr val="accent1"/>
+          </a:effectRef>
+          <a:fontRef idx="minor">
+            <a:schemeClr val="lt1"/>
+          </a:fontRef>
+        </p:style>
+        <p:txBody>
+          <a:bodyPr rtlCol="0" anchor="ctr"/>
+          <a:lstStyle/>
+          <a:p>
+            <a:pPr algn="ctr"/>
+          </a:p>
+        </p:txBody>
+      </p:sp>
+      <p:sp>
+        <p:nvSpPr>
+          <p:cNvPr id="8" name="TextBox 7"/>
+          <p:cNvSpPr txBox="1"/>
+          <p:nvPr/>
+        </p:nvSpPr>
+        <p:spPr>
+          <a:xfrm>
+            <a:off x="896112" y="1993392"/>
+            <a:ext cx="10332720" cy="2971800"/>
+          </a:xfrm>
+          <a:prstGeom prst="rect">
+            <a:avLst/>
+          </a:prstGeom>
+          <a:noFill/>
+        </p:spPr>
+        <p:txBody>
+          <a:bodyPr wrap="square" lIns="109728" rIns="109728">
+            <a:spAutoFit/>
+          </a:bodyPr>
+          <a:lstStyle/>
+          <a:p>
+            <a:pPr>
+              <a:spcAft>
+                <a:spcPts val="800"/>
+              </a:spcAft>
+              <a:defRPr sz="1800">
+                <a:solidFill>
+                  <a:srgbClr val="122C4E"/>
+                </a:solidFill>
+                <a:latin typeface="Noto Sans CJK KR"/>
+              </a:defRPr>
+            </a:pPr>
+            <a:r>
+              <a:t>• □ 완료 화면: wheel_radius와 wheel_base 변경이 좌우 바퀴·충돌 형상에 함께 적용된다.</a:t>
+            </a:r>
+          </a:p>
+          <a:p>
+            <a:pPr>
+              <a:spcAft>
+                <a:spcPts val="800"/>
+              </a:spcAft>
+              <a:defRPr sz="1800">
+                <a:solidFill>
+                  <a:srgbClr val="122C4E"/>
+                </a:solidFill>
+                <a:latin typeface="Noto Sans CJK KR"/>
+              </a:defRPr>
+            </a:pPr>
+            <a:r>
+              <a:t>• □ 막혔을 때 비교할 Complete: blocks/B_robot_build/M06_xacro_modularization/complete/</a:t>
+            </a:r>
+          </a:p>
+          <a:p>
+            <a:pPr>
+              <a:spcAft>
+                <a:spcPts val="800"/>
+              </a:spcAft>
+              <a:defRPr sz="1800">
+                <a:solidFill>
+                  <a:srgbClr val="122C4E"/>
+                </a:solidFill>
+                <a:latin typeface="Noto Sans CJK KR"/>
+              </a:defRPr>
+            </a:pPr>
+            <a:r>
+              <a:t>• □ 정상 로그·캡처: logs/validation.log, screenshots/validation_terminal.png</a:t>
+            </a:r>
+          </a:p>
+          <a:p>
+            <a:pPr>
+              <a:spcAft>
+                <a:spcPts val="800"/>
+              </a:spcAft>
+              <a:defRPr sz="1800">
+                <a:solidFill>
+                  <a:srgbClr val="122C4E"/>
+                </a:solidFill>
+                <a:latin typeface="Noto Sans CJK KR"/>
+              </a:defRPr>
+            </a:pPr>
+            <a:r>
+              <a:t>• □ 버전 식별: CHECKSUM_or_TAG.txt의 SHA-256 manifest</a:t>
+            </a:r>
+          </a:p>
+          <a:p>
+            <a:pPr>
+              <a:spcAft>
+                <a:spcPts val="800"/>
+              </a:spcAft>
+              <a:defRPr sz="1800">
+                <a:solidFill>
+                  <a:srgbClr val="122C4E"/>
+                </a:solidFill>
+                <a:latin typeface="Noto Sans CJK KR"/>
+              </a:defRPr>
+            </a:pPr>
+            <a:r>
+              <a:t>• □ 다음 시작 조건: M07 Gazebo 물리</a:t>
+            </a:r>
+          </a:p>
+        </p:txBody>
+      </p:sp>
+      <p:sp>
+        <p:nvSpPr>
+          <p:cNvPr id="9" name="TextBox 8"/>
+          <p:cNvSpPr txBox="1"/>
+          <p:nvPr/>
+        </p:nvSpPr>
+        <p:spPr>
+          <a:xfrm>
+            <a:off x="868680" y="5596128"/>
+            <a:ext cx="10515600" cy="338328"/>
+          </a:xfrm>
+          <a:prstGeom prst="rect">
+            <a:avLst/>
+          </a:prstGeom>
+          <a:noFill/>
+        </p:spPr>
+        <p:txBody>
+          <a:bodyPr wrap="square" lIns="73152" rIns="73152" tIns="36576" bIns="36576">
+            <a:spAutoFit/>
+          </a:bodyPr>
+          <a:lstStyle/>
+          <a:p>
+            <a:pPr algn="ctr">
+              <a:spcAft>
+                <a:spcPts val="0"/>
+              </a:spcAft>
+              <a:defRPr sz="1700" b="1">
+                <a:solidFill>
+                  <a:srgbClr val="2A8B5A"/>
+                </a:solidFill>
+                <a:latin typeface="Noto Sans CJK KR"/>
+              </a:defRPr>
+            </a:pPr>
+            <a:r>
+              <a:t>다음 모듈을 시작하기 전, 내 src의 변경사항을 저장하고 현재 완료 조건을 다시 확인합니다.</a:t>
+            </a:r>
+          </a:p>
+        </p:txBody>
+      </p:sp>
+    </p:spTree>
+  </p:cSld>
+  <p:clrMapOvr>
+    <a:masterClrMapping/>
+  </p:clrMapOvr>
+</p:sld>
+</file>
+
+<file path=ppt/slides/slide26.xml><?xml version="1.0" encoding="utf-8"?>
+<p:sld xmlns:a="http://schemas.openxmlformats.org/drawingml/2006/main" xmlns:p="http://schemas.openxmlformats.org/presentationml/2006/main" xmlns:r="http://schemas.openxmlformats.org/officeDocument/2006/relationships">
+  <p:cSld>
+    <p:spTree>
+      <p:nvGrpSpPr>
+        <p:cNvPr id="1" name=""/>
+        <p:cNvGrpSpPr/>
+        <p:nvPr/>
+      </p:nvGrpSpPr>
+      <p:grpSpPr/>
+      <p:sp>
+        <p:nvSpPr>
+          <p:cNvPr id="2" name="TextBox 1"/>
+          <p:cNvSpPr txBox="1"/>
+          <p:nvPr/>
+        </p:nvSpPr>
+        <p:spPr>
+          <a:xfrm>
+            <a:off x="566928" y="347472"/>
+            <a:ext cx="10881360" cy="438912"/>
+          </a:xfrm>
+          <a:prstGeom prst="rect">
+            <a:avLst/>
+          </a:prstGeom>
+          <a:noFill/>
+        </p:spPr>
+        <p:txBody>
+          <a:bodyPr wrap="square" lIns="73152" rIns="73152" tIns="36576" bIns="36576">
+            <a:spAutoFit/>
+          </a:bodyPr>
+          <a:lstStyle/>
+          <a:p>
+            <a:pPr algn="l">
+              <a:spcAft>
+                <a:spcPts val="0"/>
+              </a:spcAft>
+              <a:defRPr sz="3200" b="1">
+                <a:solidFill>
+                  <a:srgbClr val="122C4E"/>
+                </a:solidFill>
+                <a:latin typeface="Noto Sans CJK KR"/>
+              </a:defRPr>
+            </a:pPr>
+            <a:r>
               <a:t>공식 참고 자료</a:t>
             </a:r>
           </a:p>
@@ -12379,7 +14565,7 @@
               </a:defRPr>
             </a:pPr>
             <a:r>
-              <a:t>현재 단계 시작    |    현재 폴더 ~/ros2_curri/agv_ws    |    현재 터미널</a:t>
+              <a:t>현재 단계 시작    |    현재 폴더 ~/ros2_curri/my_agv_ws    |    현재 터미널</a:t>
             </a:r>
           </a:p>
         </p:txBody>
@@ -12495,7 +14681,7 @@
               </a:defRPr>
             </a:pPr>
             <a:r>
-              <a:t>• 현재 폴더: ~/ros2_curri/agv_ws</a:t>
+              <a:t>• 현재 폴더: ~/ros2_curri/my_agv_ws</a:t>
             </a:r>
           </a:p>
           <a:p>
@@ -12566,7 +14752,7 @@
               </a:defRPr>
             </a:pPr>
             <a:r>
-              <a:t>확인: pwd가 ~/ros2_curri/agv_ws이고, 이전 모듈의 완료 조건을 한 문장으로 설명할 수 있으면 시작합니다.</a:t>
+              <a:t>확인: pwd가 ~/ros2_curri/my_agv_ws이고, 이전 모듈의 완료 조건을 한 문장으로 설명할 수 있으면 시작합니다.</a:t>
             </a:r>
           </a:p>
         </p:txBody>
@@ -12956,7 +15142,7 @@
               </a:defRPr>
             </a:pPr>
             <a:r>
-              <a:t>핵심 흐름을 한 장으로 이해하기</a:t>
+              <a:t>프로젝트에 이번 기능을 직접 추가한다</a:t>
             </a:r>
           </a:p>
         </p:txBody>
@@ -12995,7 +15181,7 @@
               </a:defRPr>
             </a:pPr>
             <a:r>
-              <a:t>상자와 화살표의 방향을 따라 데이터 또는 제어의 흐름을 읽습니다.</a:t>
+              <a:t>완성본을 먼저 복사하지 않습니다. 빈 workspace에 지금 필요한 폴더와 파일을 하나씩 만듭니다.</a:t>
             </a:r>
           </a:p>
         </p:txBody>
@@ -13080,20 +15266,201 @@
       </p:sp>
       <p:sp>
         <p:nvSpPr>
-          <p:cNvPr id="6" name="Rounded Rectangle 5"/>
+          <p:cNvPr id="6" name="Rectangle 5"/>
           <p:cNvSpPr/>
           <p:nvPr/>
         </p:nvSpPr>
         <p:spPr>
           <a:xfrm>
-            <a:off x="2738628" y="2743200"/>
-            <a:ext cx="2029968" cy="1051560"/>
+            <a:off x="566928" y="1188720"/>
+            <a:ext cx="11064240" cy="347472"/>
+          </a:xfrm>
+          <a:prstGeom prst="rect">
+            <a:avLst/>
+          </a:prstGeom>
+          <a:solidFill>
+            <a:srgbClr val="F4F7FB"/>
+          </a:solidFill>
+          <a:ln>
+            <a:solidFill>
+              <a:srgbClr val="F4F7FB"/>
+            </a:solidFill>
+          </a:ln>
+        </p:spPr>
+        <p:style>
+          <a:lnRef idx="1">
+            <a:schemeClr val="accent1"/>
+          </a:lnRef>
+          <a:fillRef idx="3">
+            <a:schemeClr val="accent1"/>
+          </a:fillRef>
+          <a:effectRef idx="2">
+            <a:schemeClr val="accent1"/>
+          </a:effectRef>
+          <a:fontRef idx="minor">
+            <a:schemeClr val="lt1"/>
+          </a:fontRef>
+        </p:style>
+        <p:txBody>
+          <a:bodyPr rtlCol="0" anchor="ctr" wrap="square" lIns="73152" rIns="73152" tIns="36576" bIns="36576"/>
+          <a:lstStyle/>
+          <a:p>
+            <a:pPr algn="l">
+              <a:spcAft>
+                <a:spcPts val="0"/>
+              </a:spcAft>
+              <a:defRPr sz="1300" b="1">
+                <a:solidFill>
+                  <a:srgbClr val="122C4E"/>
+                </a:solidFill>
+                <a:latin typeface="Noto Sans CJK KR"/>
+              </a:defRPr>
+            </a:pPr>
+            <a:r>
+              <a:t>현재 단계 프로젝트 조립    |    현재 폴더 ~/ros2_curri/my_agv_ws    |    현재 터미널</a:t>
+            </a:r>
+          </a:p>
+        </p:txBody>
+      </p:sp>
+      <p:sp>
+        <p:nvSpPr>
+          <p:cNvPr id="7" name="Rounded Rectangle 6"/>
+          <p:cNvSpPr/>
+          <p:nvPr/>
+        </p:nvSpPr>
+        <p:spPr>
+          <a:xfrm>
+            <a:off x="731520" y="1755648"/>
+            <a:ext cx="10835640" cy="1033271"/>
           </a:xfrm>
           <a:prstGeom prst="roundRect">
             <a:avLst/>
           </a:prstGeom>
           <a:solidFill>
-            <a:srgbClr val="FFFFFF"/>
+            <a:srgbClr val="F4F7FB"/>
+          </a:solidFill>
+          <a:ln>
+            <a:solidFill>
+              <a:srgbClr val="5C6672"/>
+            </a:solidFill>
+          </a:ln>
+        </p:spPr>
+        <p:style>
+          <a:lnRef idx="1">
+            <a:schemeClr val="accent1"/>
+          </a:lnRef>
+          <a:fillRef idx="3">
+            <a:schemeClr val="accent1"/>
+          </a:fillRef>
+          <a:effectRef idx="2">
+            <a:schemeClr val="accent1"/>
+          </a:effectRef>
+          <a:fontRef idx="minor">
+            <a:schemeClr val="lt1"/>
+          </a:fontRef>
+        </p:style>
+        <p:txBody>
+          <a:bodyPr rtlCol="0" anchor="ctr"/>
+          <a:lstStyle/>
+          <a:p>
+            <a:pPr algn="ctr"/>
+          </a:p>
+        </p:txBody>
+      </p:sp>
+      <p:sp>
+        <p:nvSpPr>
+          <p:cNvPr id="8" name="TextBox 7"/>
+          <p:cNvSpPr txBox="1"/>
+          <p:nvPr/>
+        </p:nvSpPr>
+        <p:spPr>
+          <a:xfrm>
+            <a:off x="960120" y="1911095"/>
+            <a:ext cx="1920240" cy="228600"/>
+          </a:xfrm>
+          <a:prstGeom prst="rect">
+            <a:avLst/>
+          </a:prstGeom>
+          <a:noFill/>
+        </p:spPr>
+        <p:txBody>
+          <a:bodyPr wrap="square" lIns="73152" rIns="73152" tIns="36576" bIns="36576">
+            <a:spAutoFit/>
+          </a:bodyPr>
+          <a:lstStyle/>
+          <a:p>
+            <a:pPr algn="l">
+              <a:spcAft>
+                <a:spcPts val="0"/>
+              </a:spcAft>
+              <a:defRPr sz="1700" b="1">
+                <a:solidFill>
+                  <a:srgbClr val="5C6672"/>
+                </a:solidFill>
+                <a:latin typeface="Noto Sans CJK KR"/>
+              </a:defRPr>
+            </a:pPr>
+            <a:r>
+              <a:t>이미 있는 것</a:t>
+            </a:r>
+          </a:p>
+        </p:txBody>
+      </p:sp>
+      <p:sp>
+        <p:nvSpPr>
+          <p:cNvPr id="9" name="TextBox 8"/>
+          <p:cNvSpPr txBox="1"/>
+          <p:nvPr/>
+        </p:nvSpPr>
+        <p:spPr>
+          <a:xfrm>
+            <a:off x="2788920" y="1892807"/>
+            <a:ext cx="8229600" cy="566928"/>
+          </a:xfrm>
+          <a:prstGeom prst="rect">
+            <a:avLst/>
+          </a:prstGeom>
+          <a:noFill/>
+        </p:spPr>
+        <p:txBody>
+          <a:bodyPr wrap="square" lIns="73152" rIns="73152" tIns="36576" bIns="36576">
+            <a:spAutoFit/>
+          </a:bodyPr>
+          <a:lstStyle/>
+          <a:p>
+            <a:pPr algn="l">
+              <a:spcAft>
+                <a:spcPts val="0"/>
+              </a:spcAft>
+              <a:defRPr sz="1700" b="0">
+                <a:solidFill>
+                  <a:srgbClr val="122C4E"/>
+                </a:solidFill>
+                <a:latin typeface="Noto Sans CJK KR"/>
+              </a:defRPr>
+            </a:pPr>
+            <a:r>
+              <a:t>M05 완성 URDF</a:t>
+            </a:r>
+          </a:p>
+        </p:txBody>
+      </p:sp>
+      <p:sp>
+        <p:nvSpPr>
+          <p:cNvPr id="10" name="Rounded Rectangle 9"/>
+          <p:cNvSpPr/>
+          <p:nvPr/>
+        </p:nvSpPr>
+        <p:spPr>
+          <a:xfrm>
+            <a:off x="731520" y="3081528"/>
+            <a:ext cx="10835640" cy="1033271"/>
+          </a:xfrm>
+          <a:prstGeom prst="roundRect">
+            <a:avLst/>
+          </a:prstGeom>
+          <a:solidFill>
+            <a:srgbClr val="F4F7FB"/>
           </a:solidFill>
           <a:ln>
             <a:solidFill>
@@ -13116,14 +15483,79 @@
           </a:fontRef>
         </p:style>
         <p:txBody>
-          <a:bodyPr rtlCol="0" anchor="ctr" wrap="square" lIns="73152" rIns="73152" tIns="36576" bIns="36576"/>
-          <a:lstStyle/>
-          <a:p>
-            <a:pPr algn="ctr">
-              <a:spcAft>
-                <a:spcPts val="0"/>
-              </a:spcAft>
-              <a:defRPr sz="1900" b="1">
+          <a:bodyPr rtlCol="0" anchor="ctr"/>
+          <a:lstStyle/>
+          <a:p>
+            <a:pPr algn="ctr"/>
+          </a:p>
+        </p:txBody>
+      </p:sp>
+      <p:sp>
+        <p:nvSpPr>
+          <p:cNvPr id="11" name="TextBox 10"/>
+          <p:cNvSpPr txBox="1"/>
+          <p:nvPr/>
+        </p:nvSpPr>
+        <p:spPr>
+          <a:xfrm>
+            <a:off x="960120" y="3236976"/>
+            <a:ext cx="1920240" cy="228600"/>
+          </a:xfrm>
+          <a:prstGeom prst="rect">
+            <a:avLst/>
+          </a:prstGeom>
+          <a:noFill/>
+        </p:spPr>
+        <p:txBody>
+          <a:bodyPr wrap="square" lIns="73152" rIns="73152" tIns="36576" bIns="36576">
+            <a:spAutoFit/>
+          </a:bodyPr>
+          <a:lstStyle/>
+          <a:p>
+            <a:pPr algn="l">
+              <a:spcAft>
+                <a:spcPts val="0"/>
+              </a:spcAft>
+              <a:defRPr sz="1700" b="1">
+                <a:solidFill>
+                  <a:srgbClr val="225B9B"/>
+                </a:solidFill>
+                <a:latin typeface="Noto Sans CJK KR"/>
+              </a:defRPr>
+            </a:pPr>
+            <a:r>
+              <a:t>이번에 직접 만들 것</a:t>
+            </a:r>
+          </a:p>
+        </p:txBody>
+      </p:sp>
+      <p:sp>
+        <p:nvSpPr>
+          <p:cNvPr id="12" name="TextBox 11"/>
+          <p:cNvSpPr txBox="1"/>
+          <p:nvPr/>
+        </p:nvSpPr>
+        <p:spPr>
+          <a:xfrm>
+            <a:off x="2788920" y="3218688"/>
+            <a:ext cx="8229600" cy="566928"/>
+          </a:xfrm>
+          <a:prstGeom prst="rect">
+            <a:avLst/>
+          </a:prstGeom>
+          <a:noFill/>
+        </p:spPr>
+        <p:txBody>
+          <a:bodyPr wrap="square" lIns="73152" rIns="73152" tIns="36576" bIns="36576">
+            <a:spAutoFit/>
+          </a:bodyPr>
+          <a:lstStyle/>
+          <a:p>
+            <a:pPr algn="l">
+              <a:spcAft>
+                <a:spcPts val="0"/>
+              </a:spcAft>
+              <a:defRPr sz="1700" b="0">
                 <a:solidFill>
                   <a:srgbClr val="122C4E"/>
                 </a:solidFill>
@@ -13131,66 +15563,31 @@
               </a:defRPr>
             </a:pPr>
             <a:r>
-              <a:t>agv.urdf.xacro</a:t>
-            </a:r>
-          </a:p>
-        </p:txBody>
-      </p:sp>
-      <p:cxnSp>
-        <p:nvCxnSpPr>
-          <p:cNvPr id="7" name="Connector 6"/>
-          <p:cNvCxnSpPr/>
-          <p:nvPr/>
-        </p:nvCxnSpPr>
-        <p:spPr>
-          <a:xfrm>
-            <a:off x="4768596" y="3264408"/>
-            <a:ext cx="283463" cy="0"/>
-          </a:xfrm>
-          <a:prstGeom prst="line">
-            <a:avLst/>
-          </a:prstGeom>
-          <a:ln w="31750">
-            <a:solidFill>
-              <a:srgbClr val="225B9B"/>
-            </a:solidFill>
-          </a:ln>
-        </p:spPr>
-        <p:style>
-          <a:lnRef idx="2">
-            <a:schemeClr val="accent1"/>
-          </a:lnRef>
-          <a:fillRef idx="0">
-            <a:schemeClr val="accent1"/>
-          </a:fillRef>
-          <a:effectRef idx="1">
-            <a:schemeClr val="accent1"/>
-          </a:effectRef>
-          <a:fontRef idx="minor">
-            <a:schemeClr val="tx1"/>
-          </a:fontRef>
-        </p:style>
-      </p:cxnSp>
-      <p:sp>
-        <p:nvSpPr>
-          <p:cNvPr id="8" name="Rounded Rectangle 7"/>
+              <a:t>property·macro·include로 반복되는 wheel·sensor 구조를 한 번만 작성한다.</a:t>
+            </a:r>
+          </a:p>
+        </p:txBody>
+      </p:sp>
+      <p:sp>
+        <p:nvSpPr>
+          <p:cNvPr id="13" name="Rounded Rectangle 12"/>
           <p:cNvSpPr/>
           <p:nvPr/>
         </p:nvSpPr>
         <p:spPr>
           <a:xfrm>
-            <a:off x="5079492" y="2743200"/>
-            <a:ext cx="2029968" cy="1051560"/>
+            <a:off x="731520" y="4407408"/>
+            <a:ext cx="10835640" cy="1033271"/>
           </a:xfrm>
           <a:prstGeom prst="roundRect">
             <a:avLst/>
           </a:prstGeom>
           <a:solidFill>
-            <a:srgbClr val="FFFFFF"/>
+            <a:srgbClr val="F4F7FB"/>
           </a:solidFill>
           <a:ln>
             <a:solidFill>
-              <a:srgbClr val="225B9B"/>
+              <a:srgbClr val="2A8B5A"/>
             </a:solidFill>
           </a:ln>
         </p:spPr>
@@ -13209,158 +15606,126 @@
           </a:fontRef>
         </p:style>
         <p:txBody>
-          <a:bodyPr rtlCol="0" anchor="ctr" wrap="square" lIns="73152" rIns="73152" tIns="36576" bIns="36576"/>
+          <a:bodyPr rtlCol="0" anchor="ctr"/>
+          <a:lstStyle/>
+          <a:p>
+            <a:pPr algn="ctr"/>
+          </a:p>
+        </p:txBody>
+      </p:sp>
+      <p:sp>
+        <p:nvSpPr>
+          <p:cNvPr id="14" name="TextBox 13"/>
+          <p:cNvSpPr txBox="1"/>
+          <p:nvPr/>
+        </p:nvSpPr>
+        <p:spPr>
+          <a:xfrm>
+            <a:off x="960120" y="4562856"/>
+            <a:ext cx="1920240" cy="228600"/>
+          </a:xfrm>
+          <a:prstGeom prst="rect">
+            <a:avLst/>
+          </a:prstGeom>
+          <a:noFill/>
+        </p:spPr>
+        <p:txBody>
+          <a:bodyPr wrap="square" lIns="73152" rIns="73152" tIns="36576" bIns="36576">
+            <a:spAutoFit/>
+          </a:bodyPr>
+          <a:lstStyle/>
+          <a:p>
+            <a:pPr algn="l">
+              <a:spcAft>
+                <a:spcPts val="0"/>
+              </a:spcAft>
+              <a:defRPr sz="1700" b="1">
+                <a:solidFill>
+                  <a:srgbClr val="2A8B5A"/>
+                </a:solidFill>
+                <a:latin typeface="Noto Sans CJK KR"/>
+              </a:defRPr>
+            </a:pPr>
+            <a:r>
+              <a:t>만들고 나서 확인할 것</a:t>
+            </a:r>
+          </a:p>
+        </p:txBody>
+      </p:sp>
+      <p:sp>
+        <p:nvSpPr>
+          <p:cNvPr id="15" name="TextBox 14"/>
+          <p:cNvSpPr txBox="1"/>
+          <p:nvPr/>
+        </p:nvSpPr>
+        <p:spPr>
+          <a:xfrm>
+            <a:off x="2788920" y="4544568"/>
+            <a:ext cx="8229600" cy="566928"/>
+          </a:xfrm>
+          <a:prstGeom prst="rect">
+            <a:avLst/>
+          </a:prstGeom>
+          <a:noFill/>
+        </p:spPr>
+        <p:txBody>
+          <a:bodyPr wrap="square" lIns="73152" rIns="73152" tIns="36576" bIns="36576">
+            <a:spAutoFit/>
+          </a:bodyPr>
+          <a:lstStyle/>
+          <a:p>
+            <a:pPr algn="l">
+              <a:spcAft>
+                <a:spcPts val="0"/>
+              </a:spcAft>
+              <a:defRPr sz="1700" b="0">
+                <a:solidFill>
+                  <a:srgbClr val="122C4E"/>
+                </a:solidFill>
+                <a:latin typeface="Noto Sans CJK KR"/>
+              </a:defRPr>
+            </a:pPr>
+            <a:r>
+              <a:t>wheel_radius와 wheel_base 변경이 좌우 바퀴·충돌 형상에 함께 적용된다.</a:t>
+            </a:r>
+          </a:p>
+        </p:txBody>
+      </p:sp>
+      <p:sp>
+        <p:nvSpPr>
+          <p:cNvPr id="16" name="TextBox 15"/>
+          <p:cNvSpPr txBox="1"/>
+          <p:nvPr/>
+        </p:nvSpPr>
+        <p:spPr>
+          <a:xfrm>
+            <a:off x="841248" y="5833872"/>
+            <a:ext cx="10561320" cy="365760"/>
+          </a:xfrm>
+          <a:prstGeom prst="rect">
+            <a:avLst/>
+          </a:prstGeom>
+          <a:noFill/>
+        </p:spPr>
+        <p:txBody>
+          <a:bodyPr wrap="square" lIns="73152" rIns="73152" tIns="36576" bIns="36576">
+            <a:spAutoFit/>
+          </a:bodyPr>
           <a:lstStyle/>
           <a:p>
             <a:pPr algn="ctr">
               <a:spcAft>
                 <a:spcPts val="0"/>
               </a:spcAft>
-              <a:defRPr sz="1900" b="1">
-                <a:solidFill>
-                  <a:srgbClr val="122C4E"/>
-                </a:solidFill>
-                <a:latin typeface="Noto Sans CJK KR"/>
-              </a:defRPr>
-            </a:pPr>
-            <a:r>
-              <a:t>include</a:t>
-            </a:r>
-            <a:br/>
-            <a:r>
-              <a:t>macro</a:t>
-            </a:r>
-          </a:p>
-        </p:txBody>
-      </p:sp>
-      <p:cxnSp>
-        <p:nvCxnSpPr>
-          <p:cNvPr id="9" name="Connector 8"/>
-          <p:cNvCxnSpPr/>
-          <p:nvPr/>
-        </p:nvCxnSpPr>
-        <p:spPr>
-          <a:xfrm>
-            <a:off x="7109460" y="3264408"/>
-            <a:ext cx="283464" cy="0"/>
-          </a:xfrm>
-          <a:prstGeom prst="line">
-            <a:avLst/>
-          </a:prstGeom>
-          <a:ln w="31750">
-            <a:solidFill>
-              <a:srgbClr val="225B9B"/>
-            </a:solidFill>
-          </a:ln>
-        </p:spPr>
-        <p:style>
-          <a:lnRef idx="2">
-            <a:schemeClr val="accent1"/>
-          </a:lnRef>
-          <a:fillRef idx="0">
-            <a:schemeClr val="accent1"/>
-          </a:fillRef>
-          <a:effectRef idx="1">
-            <a:schemeClr val="accent1"/>
-          </a:effectRef>
-          <a:fontRef idx="minor">
-            <a:schemeClr val="tx1"/>
-          </a:fontRef>
-        </p:style>
-      </p:cxnSp>
-      <p:sp>
-        <p:nvSpPr>
-          <p:cNvPr id="10" name="Rounded Rectangle 9"/>
-          <p:cNvSpPr/>
-          <p:nvPr/>
-        </p:nvSpPr>
-        <p:spPr>
-          <a:xfrm>
-            <a:off x="7420356" y="2743200"/>
-            <a:ext cx="2029968" cy="1051560"/>
-          </a:xfrm>
-          <a:prstGeom prst="roundRect">
-            <a:avLst/>
-          </a:prstGeom>
-          <a:solidFill>
-            <a:srgbClr val="FFFFFF"/>
-          </a:solidFill>
-          <a:ln>
-            <a:solidFill>
-              <a:srgbClr val="225B9B"/>
-            </a:solidFill>
-          </a:ln>
-        </p:spPr>
-        <p:style>
-          <a:lnRef idx="1">
-            <a:schemeClr val="accent1"/>
-          </a:lnRef>
-          <a:fillRef idx="3">
-            <a:schemeClr val="accent1"/>
-          </a:fillRef>
-          <a:effectRef idx="2">
-            <a:schemeClr val="accent1"/>
-          </a:effectRef>
-          <a:fontRef idx="minor">
-            <a:schemeClr val="lt1"/>
-          </a:fontRef>
-        </p:style>
-        <p:txBody>
-          <a:bodyPr rtlCol="0" anchor="ctr" wrap="square" lIns="73152" rIns="73152" tIns="36576" bIns="36576"/>
-          <a:lstStyle/>
-          <a:p>
-            <a:pPr algn="ctr">
-              <a:spcAft>
-                <a:spcPts val="0"/>
-              </a:spcAft>
-              <a:defRPr sz="1900" b="1">
-                <a:solidFill>
-                  <a:srgbClr val="122C4E"/>
-                </a:solidFill>
-                <a:latin typeface="Noto Sans CJK KR"/>
-              </a:defRPr>
-            </a:pPr>
-            <a:r>
-              <a:t>생성 URDF</a:t>
-            </a:r>
-          </a:p>
-        </p:txBody>
-      </p:sp>
-      <p:sp>
-        <p:nvSpPr>
-          <p:cNvPr id="11" name="TextBox 10"/>
-          <p:cNvSpPr txBox="1"/>
-          <p:nvPr/>
-        </p:nvSpPr>
-        <p:spPr>
-          <a:xfrm>
-            <a:off x="914400" y="4800600"/>
-            <a:ext cx="10332720" cy="502920"/>
-          </a:xfrm>
-          <a:prstGeom prst="rect">
-            <a:avLst/>
-          </a:prstGeom>
-          <a:noFill/>
-        </p:spPr>
-        <p:txBody>
-          <a:bodyPr wrap="square" lIns="73152" rIns="73152" tIns="36576" bIns="36576">
-            <a:spAutoFit/>
-          </a:bodyPr>
-          <a:lstStyle/>
-          <a:p>
-            <a:pPr algn="ctr">
-              <a:spcAft>
-                <a:spcPts val="0"/>
-              </a:spcAft>
-              <a:defRPr sz="2000" b="1">
-                <a:solidFill>
-                  <a:srgbClr val="225B9B"/>
-                </a:solidFill>
-                <a:latin typeface="Noto Sans CJK KR"/>
-              </a:defRPr>
-            </a:pPr>
-            <a:r>
-              <a:t>기억할 한 문장: 앞 단계의 출력이 다음 단계의 입력이 되도록 topic·frame·파일 이름을 끝까지 유지합니다.</a:t>
+              <a:defRPr sz="1500" b="1">
+                <a:solidFill>
+                  <a:srgbClr val="DB7E22"/>
+                </a:solidFill>
+                <a:latin typeface="Noto Sans CJK KR"/>
+              </a:defRPr>
+            </a:pPr>
+            <a:r>
+              <a:t>이번 모듈에서는 1개 파일을 빈 상태에서 직접 만듭니다. 다음 슬라이드의 명령을 입력한 뒤에만 코드를 작성합니다.</a:t>
             </a:r>
           </a:p>
         </p:txBody>
@@ -13417,7 +15782,7 @@
               </a:defRPr>
             </a:pPr>
             <a:r>
-              <a:t>이번 모듈에서 생성·수정하는 파일</a:t>
+              <a:t>먼저 이번 단계의 완료 모습을 본다</a:t>
             </a:r>
           </a:p>
         </p:txBody>
@@ -13456,7 +15821,7 @@
               </a:defRPr>
             </a:pPr>
             <a:r>
-              <a:t>파일명과 package 경로를 끝까지 동일하게 사용합니다.</a:t>
+              <a:t>지금부터 폴더·파일·코드를 만들면 아래의 실제 결과에 도달합니다. 보이는 기준을 기억한 뒤 구현합니다.</a:t>
             </a:r>
           </a:p>
         </p:txBody>
@@ -13539,68 +15904,30 @@
           </a:p>
         </p:txBody>
       </p:sp>
-      <p:sp>
-        <p:nvSpPr>
-          <p:cNvPr id="6" name="Rounded Rectangle 5"/>
-          <p:cNvSpPr/>
-          <p:nvPr/>
-        </p:nvSpPr>
-        <p:spPr>
-          <a:xfrm>
-            <a:off x="777240" y="1600200"/>
-            <a:ext cx="10789920" cy="4407408"/>
-          </a:xfrm>
-          <a:prstGeom prst="roundRect">
-            <a:avLst/>
-          </a:prstGeom>
-          <a:solidFill>
-            <a:srgbClr val="1D232D"/>
-          </a:solidFill>
-          <a:ln>
-            <a:solidFill>
-              <a:srgbClr val="1D232D"/>
-            </a:solidFill>
-          </a:ln>
-        </p:spPr>
-        <p:style>
-          <a:lnRef idx="1">
-            <a:schemeClr val="accent1"/>
-          </a:lnRef>
-          <a:fillRef idx="3">
-            <a:schemeClr val="accent1"/>
-          </a:fillRef>
-          <a:effectRef idx="2">
-            <a:schemeClr val="accent1"/>
-          </a:effectRef>
-          <a:fontRef idx="minor">
-            <a:schemeClr val="lt1"/>
-          </a:fontRef>
-        </p:style>
-        <p:txBody>
-          <a:bodyPr rtlCol="0" anchor="ctr" wrap="square" lIns="73152" rIns="73152" tIns="36576" bIns="36576"/>
-          <a:lstStyle/>
-          <a:p>
-            <a:pPr algn="l">
-              <a:spcAft>
-                <a:spcPts val="0"/>
-              </a:spcAft>
-              <a:defRPr sz="1600" b="0">
-                <a:solidFill>
-                  <a:srgbClr val="FFFFFF"/>
-                </a:solidFill>
-                <a:latin typeface="DejaVu Sans Mono"/>
-              </a:defRPr>
-            </a:pPr>
-            <a:r>
-              <a:t>~/ros2_curri/agv_ws/src/</a:t>
-            </a:r>
-            <a:br/>
-            <a:r>
-              <a:t>└── agv_description/curriculum_stages/M06/agv.urdf.xacro</a:t>
-            </a:r>
-          </a:p>
-        </p:txBody>
-      </p:sp>
+      <p:pic>
+        <p:nvPicPr>
+          <p:cNvPr id="6" name="Picture 5" descr="03_m06_xacro_terminal_actual.png"/>
+          <p:cNvPicPr>
+            <a:picLocks noChangeAspect="1"/>
+          </p:cNvPicPr>
+          <p:nvPr/>
+        </p:nvPicPr>
+        <p:blipFill>
+          <a:blip r:embed="rId2"/>
+          <a:stretch>
+            <a:fillRect/>
+          </a:stretch>
+        </p:blipFill>
+        <p:spPr>
+          <a:xfrm>
+            <a:off x="2884190" y="1389888"/>
+            <a:ext cx="6420570" cy="4663440"/>
+          </a:xfrm>
+          <a:prstGeom prst="rect">
+            <a:avLst/>
+          </a:prstGeom>
+        </p:spPr>
+      </p:pic>
       <p:sp>
         <p:nvSpPr>
           <p:cNvPr id="7" name="TextBox 6"/>
@@ -13609,8 +15936,8 @@
         </p:nvSpPr>
         <p:spPr>
           <a:xfrm>
-            <a:off x="877824" y="6144768"/>
-            <a:ext cx="10332720" cy="201168"/>
+            <a:off x="777240" y="6126480"/>
+            <a:ext cx="10607040" cy="228600"/>
           </a:xfrm>
           <a:prstGeom prst="rect">
             <a:avLst/>
@@ -13627,15 +15954,15 @@
               <a:spcAft>
                 <a:spcPts val="0"/>
               </a:spcAft>
-              <a:defRPr sz="1100" b="0">
-                <a:solidFill>
-                  <a:srgbClr val="5C6672"/>
-                </a:solidFill>
-                <a:latin typeface="Noto Sans CJK KR"/>
-              </a:defRPr>
-            </a:pPr>
-            <a:r>
-              <a:t>파일 전체 코드는 다음 슬라이드에 이어집니다. 중간 줄을 빼지 않고 끝까지 제공합니다.</a:t>
+              <a:defRPr sz="1000" b="1">
+                <a:solidFill>
+                  <a:srgbClr val="2A8B5A"/>
+                </a:solidFill>
+                <a:latin typeface="Noto Sans CJK KR"/>
+              </a:defRPr>
+            </a:pPr>
+            <a:r>
+              <a:t>목표 화면: 실제 terminal: Xacro 변환 뒤 생성 URDF를 check_urdf로 검사한 결과  |  나중에 확인할 것: xacro 명령 다음의 Successfully Parsed XML과 left/right wheel child를 찾습니다.</a:t>
             </a:r>
           </a:p>
         </p:txBody>
@@ -13692,7 +16019,7 @@
               </a:defRPr>
             </a:pPr>
             <a:r>
-              <a:t>코드/설정이 실제로 만드는 것 (1/1)</a:t>
+              <a:t>핵심 흐름을 한 장으로 이해하기</a:t>
             </a:r>
           </a:p>
         </p:txBody>
@@ -13731,7 +16058,7 @@
               </a:defRPr>
             </a:pPr>
             <a:r>
-              <a:t>파일을 입력하기 전에 ‘무엇을 만들고 어디서 볼지’를 먼저 연결합니다.</a:t>
+              <a:t>상자와 화살표의 방향을 따라 데이터 또는 제어의 흐름을 읽습니다.</a:t>
             </a:r>
           </a:p>
         </p:txBody>
@@ -13816,24 +16143,24 @@
       </p:sp>
       <p:sp>
         <p:nvSpPr>
-          <p:cNvPr id="6" name="Rectangle 5"/>
+          <p:cNvPr id="6" name="Rounded Rectangle 5"/>
           <p:cNvSpPr/>
           <p:nvPr/>
         </p:nvSpPr>
         <p:spPr>
           <a:xfrm>
-            <a:off x="566928" y="1188720"/>
-            <a:ext cx="11064240" cy="347472"/>
-          </a:xfrm>
-          <a:prstGeom prst="rect">
+            <a:off x="2738628" y="2743200"/>
+            <a:ext cx="2029968" cy="1051560"/>
+          </a:xfrm>
+          <a:prstGeom prst="roundRect">
             <a:avLst/>
           </a:prstGeom>
           <a:solidFill>
-            <a:srgbClr val="F4F7FB"/>
+            <a:srgbClr val="FFFFFF"/>
           </a:solidFill>
           <a:ln>
             <a:solidFill>
-              <a:srgbClr val="F4F7FB"/>
+              <a:srgbClr val="225B9B"/>
             </a:solidFill>
           </a:ln>
         </p:spPr>
@@ -13855,11 +16182,11 @@
           <a:bodyPr rtlCol="0" anchor="ctr" wrap="square" lIns="73152" rIns="73152" tIns="36576" bIns="36576"/>
           <a:lstStyle/>
           <a:p>
-            <a:pPr algn="l">
-              <a:spcAft>
-                <a:spcPts val="0"/>
-              </a:spcAft>
-              <a:defRPr sz="1300" b="1">
+            <a:pPr algn="ctr">
+              <a:spcAft>
+                <a:spcPts val="0"/>
+              </a:spcAft>
+              <a:defRPr sz="1900" b="1">
                 <a:solidFill>
                   <a:srgbClr val="122C4E"/>
                 </a:solidFill>
@@ -13867,31 +16194,66 @@
               </a:defRPr>
             </a:pPr>
             <a:r>
-              <a:t>현재 단계 파일 역할    |    현재 폴더 ~/ros2_curri/agv_ws    |    현재 터미널</a:t>
-            </a:r>
-          </a:p>
-        </p:txBody>
-      </p:sp>
-      <p:sp>
-        <p:nvSpPr>
-          <p:cNvPr id="7" name="Rounded Rectangle 6"/>
+              <a:t>agv.urdf.xacro</a:t>
+            </a:r>
+          </a:p>
+        </p:txBody>
+      </p:sp>
+      <p:cxnSp>
+        <p:nvCxnSpPr>
+          <p:cNvPr id="7" name="Connector 6"/>
+          <p:cNvCxnSpPr/>
+          <p:nvPr/>
+        </p:nvCxnSpPr>
+        <p:spPr>
+          <a:xfrm>
+            <a:off x="4768596" y="3264408"/>
+            <a:ext cx="283463" cy="0"/>
+          </a:xfrm>
+          <a:prstGeom prst="line">
+            <a:avLst/>
+          </a:prstGeom>
+          <a:ln w="31750">
+            <a:solidFill>
+              <a:srgbClr val="225B9B"/>
+            </a:solidFill>
+          </a:ln>
+        </p:spPr>
+        <p:style>
+          <a:lnRef idx="2">
+            <a:schemeClr val="accent1"/>
+          </a:lnRef>
+          <a:fillRef idx="0">
+            <a:schemeClr val="accent1"/>
+          </a:fillRef>
+          <a:effectRef idx="1">
+            <a:schemeClr val="accent1"/>
+          </a:effectRef>
+          <a:fontRef idx="minor">
+            <a:schemeClr val="tx1"/>
+          </a:fontRef>
+        </p:style>
+      </p:cxnSp>
+      <p:sp>
+        <p:nvSpPr>
+          <p:cNvPr id="8" name="Rounded Rectangle 7"/>
           <p:cNvSpPr/>
           <p:nvPr/>
         </p:nvSpPr>
         <p:spPr>
           <a:xfrm>
-            <a:off x="640080" y="1627632"/>
-            <a:ext cx="10972800" cy="2048256"/>
+            <a:off x="5079492" y="2743200"/>
+            <a:ext cx="2029968" cy="1051560"/>
           </a:xfrm>
           <a:prstGeom prst="roundRect">
             <a:avLst/>
           </a:prstGeom>
           <a:solidFill>
-            <a:srgbClr val="F4F7FB"/>
+            <a:srgbClr val="FFFFFF"/>
           </a:solidFill>
           <a:ln>
             <a:solidFill>
-              <a:srgbClr val="CCDBEB"/>
+              <a:srgbClr val="225B9B"/>
             </a:solidFill>
           </a:ln>
         </p:spPr>
@@ -13910,23 +16272,133 @@
           </a:fontRef>
         </p:style>
         <p:txBody>
-          <a:bodyPr rtlCol="0" anchor="ctr"/>
-          <a:lstStyle/>
-          <a:p>
-            <a:pPr algn="ctr"/>
-          </a:p>
-        </p:txBody>
-      </p:sp>
-      <p:sp>
-        <p:nvSpPr>
-          <p:cNvPr id="8" name="TextBox 7"/>
-          <p:cNvSpPr txBox="1"/>
-          <p:nvPr/>
-        </p:nvSpPr>
-        <p:spPr>
-          <a:xfrm>
-            <a:off x="850392" y="1764792"/>
-            <a:ext cx="10424160" cy="256032"/>
+          <a:bodyPr rtlCol="0" anchor="ctr" wrap="square" lIns="73152" rIns="73152" tIns="36576" bIns="36576"/>
+          <a:lstStyle/>
+          <a:p>
+            <a:pPr algn="ctr">
+              <a:spcAft>
+                <a:spcPts val="0"/>
+              </a:spcAft>
+              <a:defRPr sz="1900" b="1">
+                <a:solidFill>
+                  <a:srgbClr val="122C4E"/>
+                </a:solidFill>
+                <a:latin typeface="Noto Sans CJK KR"/>
+              </a:defRPr>
+            </a:pPr>
+            <a:r>
+              <a:t>include</a:t>
+            </a:r>
+            <a:br/>
+            <a:r>
+              <a:t>macro</a:t>
+            </a:r>
+          </a:p>
+        </p:txBody>
+      </p:sp>
+      <p:cxnSp>
+        <p:nvCxnSpPr>
+          <p:cNvPr id="9" name="Connector 8"/>
+          <p:cNvCxnSpPr/>
+          <p:nvPr/>
+        </p:nvCxnSpPr>
+        <p:spPr>
+          <a:xfrm>
+            <a:off x="7109460" y="3264408"/>
+            <a:ext cx="283464" cy="0"/>
+          </a:xfrm>
+          <a:prstGeom prst="line">
+            <a:avLst/>
+          </a:prstGeom>
+          <a:ln w="31750">
+            <a:solidFill>
+              <a:srgbClr val="225B9B"/>
+            </a:solidFill>
+          </a:ln>
+        </p:spPr>
+        <p:style>
+          <a:lnRef idx="2">
+            <a:schemeClr val="accent1"/>
+          </a:lnRef>
+          <a:fillRef idx="0">
+            <a:schemeClr val="accent1"/>
+          </a:fillRef>
+          <a:effectRef idx="1">
+            <a:schemeClr val="accent1"/>
+          </a:effectRef>
+          <a:fontRef idx="minor">
+            <a:schemeClr val="tx1"/>
+          </a:fontRef>
+        </p:style>
+      </p:cxnSp>
+      <p:sp>
+        <p:nvSpPr>
+          <p:cNvPr id="10" name="Rounded Rectangle 9"/>
+          <p:cNvSpPr/>
+          <p:nvPr/>
+        </p:nvSpPr>
+        <p:spPr>
+          <a:xfrm>
+            <a:off x="7420356" y="2743200"/>
+            <a:ext cx="2029968" cy="1051560"/>
+          </a:xfrm>
+          <a:prstGeom prst="roundRect">
+            <a:avLst/>
+          </a:prstGeom>
+          <a:solidFill>
+            <a:srgbClr val="FFFFFF"/>
+          </a:solidFill>
+          <a:ln>
+            <a:solidFill>
+              <a:srgbClr val="225B9B"/>
+            </a:solidFill>
+          </a:ln>
+        </p:spPr>
+        <p:style>
+          <a:lnRef idx="1">
+            <a:schemeClr val="accent1"/>
+          </a:lnRef>
+          <a:fillRef idx="3">
+            <a:schemeClr val="accent1"/>
+          </a:fillRef>
+          <a:effectRef idx="2">
+            <a:schemeClr val="accent1"/>
+          </a:effectRef>
+          <a:fontRef idx="minor">
+            <a:schemeClr val="lt1"/>
+          </a:fontRef>
+        </p:style>
+        <p:txBody>
+          <a:bodyPr rtlCol="0" anchor="ctr" wrap="square" lIns="73152" rIns="73152" tIns="36576" bIns="36576"/>
+          <a:lstStyle/>
+          <a:p>
+            <a:pPr algn="ctr">
+              <a:spcAft>
+                <a:spcPts val="0"/>
+              </a:spcAft>
+              <a:defRPr sz="1900" b="1">
+                <a:solidFill>
+                  <a:srgbClr val="122C4E"/>
+                </a:solidFill>
+                <a:latin typeface="Noto Sans CJK KR"/>
+              </a:defRPr>
+            </a:pPr>
+            <a:r>
+              <a:t>생성 URDF</a:t>
+            </a:r>
+          </a:p>
+        </p:txBody>
+      </p:sp>
+      <p:sp>
+        <p:nvSpPr>
+          <p:cNvPr id="11" name="TextBox 10"/>
+          <p:cNvSpPr txBox="1"/>
+          <p:nvPr/>
+        </p:nvSpPr>
+        <p:spPr>
+          <a:xfrm>
+            <a:off x="914400" y="4800600"/>
+            <a:ext cx="10332720" cy="502920"/>
           </a:xfrm>
           <a:prstGeom prst="rect">
             <a:avLst/>
@@ -13939,257 +16411,19 @@
           </a:bodyPr>
           <a:lstStyle/>
           <a:p>
-            <a:pPr algn="l">
-              <a:spcAft>
-                <a:spcPts val="0"/>
-              </a:spcAft>
-              <a:defRPr sz="1300" b="1">
+            <a:pPr algn="ctr">
+              <a:spcAft>
+                <a:spcPts val="0"/>
+              </a:spcAft>
+              <a:defRPr sz="2000" b="1">
                 <a:solidFill>
                   <a:srgbClr val="225B9B"/>
                 </a:solidFill>
-                <a:latin typeface="DejaVu Sans Mono"/>
-              </a:defRPr>
-            </a:pPr>
-            <a:r>
-              <a:t>~/ros2_curri/agv_ws/src/agv_description/curriculum_stages/M06/agv.urdf.xacro</a:t>
-            </a:r>
-          </a:p>
-        </p:txBody>
-      </p:sp>
-      <p:sp>
-        <p:nvSpPr>
-          <p:cNvPr id="9" name="TextBox 8"/>
-          <p:cNvSpPr txBox="1"/>
-          <p:nvPr/>
-        </p:nvSpPr>
-        <p:spPr>
-          <a:xfrm>
-            <a:off x="868680" y="2130552"/>
-            <a:ext cx="1234440" cy="228600"/>
-          </a:xfrm>
-          <a:prstGeom prst="rect">
-            <a:avLst/>
-          </a:prstGeom>
-          <a:noFill/>
-        </p:spPr>
-        <p:txBody>
-          <a:bodyPr wrap="square" lIns="73152" rIns="73152" tIns="36576" bIns="36576">
-            <a:spAutoFit/>
-          </a:bodyPr>
-          <a:lstStyle/>
-          <a:p>
-            <a:pPr algn="l">
-              <a:spcAft>
-                <a:spcPts val="0"/>
-              </a:spcAft>
-              <a:defRPr sz="1500" b="1">
-                <a:solidFill>
-                  <a:srgbClr val="2A8B5A"/>
-                </a:solidFill>
-                <a:latin typeface="Noto Sans CJK KR"/>
-              </a:defRPr>
-            </a:pPr>
-            <a:r>
-              <a:t>만드는 것</a:t>
-            </a:r>
-          </a:p>
-        </p:txBody>
-      </p:sp>
-      <p:sp>
-        <p:nvSpPr>
-          <p:cNvPr id="10" name="TextBox 9"/>
-          <p:cNvSpPr txBox="1"/>
-          <p:nvPr/>
-        </p:nvSpPr>
-        <p:spPr>
-          <a:xfrm>
-            <a:off x="1975104" y="2112264"/>
-            <a:ext cx="9189720" cy="274320"/>
-          </a:xfrm>
-          <a:prstGeom prst="rect">
-            <a:avLst/>
-          </a:prstGeom>
-          <a:noFill/>
-        </p:spPr>
-        <p:txBody>
-          <a:bodyPr wrap="square" lIns="73152" rIns="73152" tIns="36576" bIns="36576">
-            <a:spAutoFit/>
-          </a:bodyPr>
-          <a:lstStyle/>
-          <a:p>
-            <a:pPr algn="l">
-              <a:spcAft>
-                <a:spcPts val="0"/>
-              </a:spcAft>
-              <a:defRPr sz="1500" b="0">
-                <a:solidFill>
-                  <a:srgbClr val="122C4E"/>
-                </a:solidFill>
-                <a:latin typeface="Noto Sans CJK KR"/>
-              </a:defRPr>
-            </a:pPr>
-            <a:r>
-              <a:t>반복되는 좌·우 바퀴를 property와 macro 하나로 생성하는 재사용 가능한 AGV 설명</a:t>
-            </a:r>
-          </a:p>
-        </p:txBody>
-      </p:sp>
-      <p:sp>
-        <p:nvSpPr>
-          <p:cNvPr id="11" name="TextBox 10"/>
-          <p:cNvSpPr txBox="1"/>
-          <p:nvPr/>
-        </p:nvSpPr>
-        <p:spPr>
-          <a:xfrm>
-            <a:off x="868680" y="2505456"/>
-            <a:ext cx="1234440" cy="228600"/>
-          </a:xfrm>
-          <a:prstGeom prst="rect">
-            <a:avLst/>
-          </a:prstGeom>
-          <a:noFill/>
-        </p:spPr>
-        <p:txBody>
-          <a:bodyPr wrap="square" lIns="73152" rIns="73152" tIns="36576" bIns="36576">
-            <a:spAutoFit/>
-          </a:bodyPr>
-          <a:lstStyle/>
-          <a:p>
-            <a:pPr algn="l">
-              <a:spcAft>
-                <a:spcPts val="0"/>
-              </a:spcAft>
-              <a:defRPr sz="1500" b="1">
-                <a:solidFill>
-                  <a:srgbClr val="DB7E22"/>
-                </a:solidFill>
-                <a:latin typeface="Noto Sans CJK KR"/>
-              </a:defRPr>
-            </a:pPr>
-            <a:r>
-              <a:t>코드 읽기</a:t>
-            </a:r>
-          </a:p>
-        </p:txBody>
-      </p:sp>
-      <p:sp>
-        <p:nvSpPr>
-          <p:cNvPr id="12" name="TextBox 11"/>
-          <p:cNvSpPr txBox="1"/>
-          <p:nvPr/>
-        </p:nvSpPr>
-        <p:spPr>
-          <a:xfrm>
-            <a:off x="1975104" y="2487168"/>
-            <a:ext cx="9189720" cy="301752"/>
-          </a:xfrm>
-          <a:prstGeom prst="rect">
-            <a:avLst/>
-          </a:prstGeom>
-          <a:noFill/>
-        </p:spPr>
-        <p:txBody>
-          <a:bodyPr wrap="square" lIns="73152" rIns="73152" tIns="36576" bIns="36576">
-            <a:spAutoFit/>
-          </a:bodyPr>
-          <a:lstStyle/>
-          <a:p>
-            <a:pPr algn="l">
-              <a:spcAft>
-                <a:spcPts val="0"/>
-              </a:spcAft>
-              <a:defRPr sz="1400" b="0">
-                <a:solidFill>
-                  <a:srgbClr val="122C4E"/>
-                </a:solidFill>
-                <a:latin typeface="Noto Sans CJK KR"/>
-              </a:defRPr>
-            </a:pPr>
-            <a:r>
-              <a:t>property → macro 정의 → macro 호출 순서로 읽고, wheel_radius 한 값만 바꾼다.</a:t>
-            </a:r>
-          </a:p>
-        </p:txBody>
-      </p:sp>
-      <p:sp>
-        <p:nvSpPr>
-          <p:cNvPr id="13" name="TextBox 12"/>
-          <p:cNvSpPr txBox="1"/>
-          <p:nvPr/>
-        </p:nvSpPr>
-        <p:spPr>
-          <a:xfrm>
-            <a:off x="868680" y="2889504"/>
-            <a:ext cx="1234440" cy="228600"/>
-          </a:xfrm>
-          <a:prstGeom prst="rect">
-            <a:avLst/>
-          </a:prstGeom>
-          <a:noFill/>
-        </p:spPr>
-        <p:txBody>
-          <a:bodyPr wrap="square" lIns="73152" rIns="73152" tIns="36576" bIns="36576">
-            <a:spAutoFit/>
-          </a:bodyPr>
-          <a:lstStyle/>
-          <a:p>
-            <a:pPr algn="l">
-              <a:spcAft>
-                <a:spcPts val="0"/>
-              </a:spcAft>
-              <a:defRPr sz="1500" b="1">
-                <a:solidFill>
-                  <a:srgbClr val="225B9B"/>
-                </a:solidFill>
-                <a:latin typeface="Noto Sans CJK KR"/>
-              </a:defRPr>
-            </a:pPr>
-            <a:r>
-              <a:t>사용/확인</a:t>
-            </a:r>
-          </a:p>
-        </p:txBody>
-      </p:sp>
-      <p:sp>
-        <p:nvSpPr>
-          <p:cNvPr id="14" name="TextBox 13"/>
-          <p:cNvSpPr txBox="1"/>
-          <p:nvPr/>
-        </p:nvSpPr>
-        <p:spPr>
-          <a:xfrm>
-            <a:off x="1975104" y="2871216"/>
-            <a:ext cx="9189720" cy="512064"/>
-          </a:xfrm>
-          <a:prstGeom prst="rect">
-            <a:avLst/>
-          </a:prstGeom>
-          <a:noFill/>
-        </p:spPr>
-        <p:txBody>
-          <a:bodyPr wrap="square" lIns="73152" rIns="73152" tIns="36576" bIns="36576">
-            <a:spAutoFit/>
-          </a:bodyPr>
-          <a:lstStyle/>
-          <a:p>
-            <a:pPr algn="l">
-              <a:spcAft>
-                <a:spcPts val="0"/>
-              </a:spcAft>
-              <a:defRPr sz="1300" b="0">
-                <a:solidFill>
-                  <a:srgbClr val="122C4E"/>
-                </a:solidFill>
-                <a:latin typeface="Noto Sans CJK KR"/>
-              </a:defRPr>
-            </a:pPr>
-            <a:r>
-              <a:t>사용: xacro로 URDF를 만든 뒤 check_urdf를 실행한다.</a:t>
-            </a:r>
-            <a:br/>
-            <a:r>
-              <a:t>화면/출력: 생성 URDF의 left/right wheel과 같은 반지름</a:t>
+                <a:latin typeface="Noto Sans CJK KR"/>
+              </a:defRPr>
+            </a:pPr>
+            <a:r>
+              <a:t>기억할 한 문장: 앞 단계의 출력이 다음 단계의 입력이 되도록 topic·frame·파일 이름을 끝까지 유지합니다.</a:t>
             </a:r>
           </a:p>
         </p:txBody>
@@ -14246,7 +16480,7 @@
               </a:defRPr>
             </a:pPr>
             <a:r>
-              <a:t>코드를 ‘만드는 것 → 표시할 줄 → 바꾼 결과’로 읽는다</a:t>
+              <a:t>이번에 프로젝트 안에 새로 만드는 파일</a:t>
             </a:r>
           </a:p>
         </p:txBody>
@@ -14285,7 +16519,7 @@
               </a:defRPr>
             </a:pPr>
             <a:r>
-              <a:t>PDF 예시처럼 화면을 보기 전에 코드의 역할과 관찰 지점을 한 번 짚고 갑니다.</a:t>
+              <a:t>아래 파일은 완성본을 복사하지 않고, 다음 슬라이드에서 폴더·빈 파일부터 직접 만듭니다.</a:t>
             </a:r>
           </a:p>
         </p:txBody>
@@ -14370,24 +16604,24 @@
       </p:sp>
       <p:sp>
         <p:nvSpPr>
-          <p:cNvPr id="6" name="Rectangle 5"/>
+          <p:cNvPr id="6" name="Rounded Rectangle 5"/>
           <p:cNvSpPr/>
           <p:nvPr/>
         </p:nvSpPr>
         <p:spPr>
           <a:xfrm>
-            <a:off x="566928" y="1188720"/>
-            <a:ext cx="11064240" cy="347472"/>
-          </a:xfrm>
-          <a:prstGeom prst="rect">
+            <a:off x="777240" y="1600200"/>
+            <a:ext cx="10789920" cy="4407408"/>
+          </a:xfrm>
+          <a:prstGeom prst="roundRect">
             <a:avLst/>
           </a:prstGeom>
           <a:solidFill>
-            <a:srgbClr val="F4F7FB"/>
+            <a:srgbClr val="1D232D"/>
           </a:solidFill>
           <a:ln>
             <a:solidFill>
-              <a:srgbClr val="F4F7FB"/>
+              <a:srgbClr val="1D232D"/>
             </a:solidFill>
           </a:ln>
         </p:spPr>
@@ -14413,74 +16647,33 @@
               <a:spcAft>
                 <a:spcPts val="0"/>
               </a:spcAft>
-              <a:defRPr sz="1300" b="1">
-                <a:solidFill>
-                  <a:srgbClr val="122C4E"/>
-                </a:solidFill>
-                <a:latin typeface="Noto Sans CJK KR"/>
-              </a:defRPr>
-            </a:pPr>
-            <a:r>
-              <a:t>현재 단계 코드 해설    |    현재 폴더 ~/ros2_curri/agv_ws    |    현재 터미널</a:t>
-            </a:r>
-          </a:p>
-        </p:txBody>
-      </p:sp>
-      <p:sp>
-        <p:nvSpPr>
-          <p:cNvPr id="7" name="Rounded Rectangle 6"/>
-          <p:cNvSpPr/>
-          <p:nvPr/>
-        </p:nvSpPr>
-        <p:spPr>
-          <a:xfrm>
-            <a:off x="658368" y="1664208"/>
-            <a:ext cx="5321808" cy="1764792"/>
-          </a:xfrm>
-          <a:prstGeom prst="roundRect">
-            <a:avLst/>
-          </a:prstGeom>
-          <a:solidFill>
-            <a:srgbClr val="F4F7FB"/>
-          </a:solidFill>
-          <a:ln>
-            <a:solidFill>
-              <a:srgbClr val="2A8B5A"/>
-            </a:solidFill>
-          </a:ln>
-        </p:spPr>
-        <p:style>
-          <a:lnRef idx="1">
-            <a:schemeClr val="accent1"/>
-          </a:lnRef>
-          <a:fillRef idx="3">
-            <a:schemeClr val="accent1"/>
-          </a:fillRef>
-          <a:effectRef idx="2">
-            <a:schemeClr val="accent1"/>
-          </a:effectRef>
-          <a:fontRef idx="minor">
-            <a:schemeClr val="lt1"/>
-          </a:fontRef>
-        </p:style>
-        <p:txBody>
-          <a:bodyPr rtlCol="0" anchor="ctr"/>
-          <a:lstStyle/>
-          <a:p>
-            <a:pPr algn="ctr"/>
-          </a:p>
-        </p:txBody>
-      </p:sp>
-      <p:sp>
-        <p:nvSpPr>
-          <p:cNvPr id="8" name="TextBox 7"/>
-          <p:cNvSpPr txBox="1"/>
-          <p:nvPr/>
-        </p:nvSpPr>
-        <p:spPr>
-          <a:xfrm>
-            <a:off x="859536" y="1828800"/>
-            <a:ext cx="4892040" cy="265176"/>
+              <a:defRPr sz="1600" b="0">
+                <a:solidFill>
+                  <a:srgbClr val="FFFFFF"/>
+                </a:solidFill>
+                <a:latin typeface="DejaVu Sans Mono"/>
+              </a:defRPr>
+            </a:pPr>
+            <a:r>
+              <a:t>~/ros2_curri/my_agv_ws/src/</a:t>
+            </a:r>
+            <a:br/>
+            <a:r>
+              <a:t>└── agv_description/curriculum_stages/M06/agv.urdf.xacro</a:t>
+            </a:r>
+          </a:p>
+        </p:txBody>
+      </p:sp>
+      <p:sp>
+        <p:nvSpPr>
+          <p:cNvPr id="7" name="TextBox 6"/>
+          <p:cNvSpPr txBox="1"/>
+          <p:nvPr/>
+        </p:nvSpPr>
+        <p:spPr>
+          <a:xfrm>
+            <a:off x="877824" y="6144768"/>
+            <a:ext cx="10332720" cy="201168"/>
           </a:xfrm>
           <a:prstGeom prst="rect">
             <a:avLst/>
@@ -14493,466 +16686,19 @@
           </a:bodyPr>
           <a:lstStyle/>
           <a:p>
-            <a:pPr algn="l">
-              <a:spcAft>
-                <a:spcPts val="0"/>
-              </a:spcAft>
-              <a:defRPr sz="1700" b="1">
-                <a:solidFill>
-                  <a:srgbClr val="2A8B5A"/>
-                </a:solidFill>
-                <a:latin typeface="Noto Sans CJK KR"/>
-              </a:defRPr>
-            </a:pPr>
-            <a:r>
-              <a:t>1. 이 파일이 만드는 것</a:t>
-            </a:r>
-          </a:p>
-        </p:txBody>
-      </p:sp>
-      <p:sp>
-        <p:nvSpPr>
-          <p:cNvPr id="9" name="TextBox 8"/>
-          <p:cNvSpPr txBox="1"/>
-          <p:nvPr/>
-        </p:nvSpPr>
-        <p:spPr>
-          <a:xfrm>
-            <a:off x="859536" y="2240280"/>
-            <a:ext cx="4846320" cy="941832"/>
-          </a:xfrm>
-          <a:prstGeom prst="rect">
-            <a:avLst/>
-          </a:prstGeom>
-          <a:noFill/>
-        </p:spPr>
-        <p:txBody>
-          <a:bodyPr wrap="square" lIns="73152" rIns="73152" tIns="36576" bIns="36576">
-            <a:spAutoFit/>
-          </a:bodyPr>
-          <a:lstStyle/>
-          <a:p>
-            <a:pPr algn="l">
-              <a:spcAft>
-                <a:spcPts val="0"/>
-              </a:spcAft>
-              <a:defRPr sz="1600" b="0">
-                <a:solidFill>
-                  <a:srgbClr val="122C4E"/>
-                </a:solidFill>
-                <a:latin typeface="Noto Sans CJK KR"/>
-              </a:defRPr>
-            </a:pPr>
-            <a:r>
-              <a:t>Xacro는 같은 바퀴 코드를 복사하지 않고 ‘값 한 번, 생성 여러 번’으로 바꾸는 도구입니다.</a:t>
-            </a:r>
-          </a:p>
-        </p:txBody>
-      </p:sp>
-      <p:sp>
-        <p:nvSpPr>
-          <p:cNvPr id="10" name="Rounded Rectangle 9"/>
-          <p:cNvSpPr/>
-          <p:nvPr/>
-        </p:nvSpPr>
-        <p:spPr>
-          <a:xfrm>
-            <a:off x="6217920" y="1664208"/>
-            <a:ext cx="5321808" cy="1764792"/>
-          </a:xfrm>
-          <a:prstGeom prst="roundRect">
-            <a:avLst/>
-          </a:prstGeom>
-          <a:solidFill>
-            <a:srgbClr val="F4F7FB"/>
-          </a:solidFill>
-          <a:ln>
-            <a:solidFill>
-              <a:srgbClr val="225B9B"/>
-            </a:solidFill>
-          </a:ln>
-        </p:spPr>
-        <p:style>
-          <a:lnRef idx="1">
-            <a:schemeClr val="accent1"/>
-          </a:lnRef>
-          <a:fillRef idx="3">
-            <a:schemeClr val="accent1"/>
-          </a:fillRef>
-          <a:effectRef idx="2">
-            <a:schemeClr val="accent1"/>
-          </a:effectRef>
-          <a:fontRef idx="minor">
-            <a:schemeClr val="lt1"/>
-          </a:fontRef>
-        </p:style>
-        <p:txBody>
-          <a:bodyPr rtlCol="0" anchor="ctr"/>
-          <a:lstStyle/>
-          <a:p>
-            <a:pPr algn="ctr"/>
-          </a:p>
-        </p:txBody>
-      </p:sp>
-      <p:sp>
-        <p:nvSpPr>
-          <p:cNvPr id="11" name="TextBox 10"/>
-          <p:cNvSpPr txBox="1"/>
-          <p:nvPr/>
-        </p:nvSpPr>
-        <p:spPr>
-          <a:xfrm>
-            <a:off x="6419088" y="1828800"/>
-            <a:ext cx="4892040" cy="265176"/>
-          </a:xfrm>
-          <a:prstGeom prst="rect">
-            <a:avLst/>
-          </a:prstGeom>
-          <a:noFill/>
-        </p:spPr>
-        <p:txBody>
-          <a:bodyPr wrap="square" lIns="73152" rIns="73152" tIns="36576" bIns="36576">
-            <a:spAutoFit/>
-          </a:bodyPr>
-          <a:lstStyle/>
-          <a:p>
-            <a:pPr algn="l">
-              <a:spcAft>
-                <a:spcPts val="0"/>
-              </a:spcAft>
-              <a:defRPr sz="1700" b="1">
-                <a:solidFill>
-                  <a:srgbClr val="225B9B"/>
-                </a:solidFill>
-                <a:latin typeface="Noto Sans CJK KR"/>
-              </a:defRPr>
-            </a:pPr>
-            <a:r>
-              <a:t>2. 먼저 찾을 코드/태그</a:t>
-            </a:r>
-          </a:p>
-        </p:txBody>
-      </p:sp>
-      <p:sp>
-        <p:nvSpPr>
-          <p:cNvPr id="12" name="TextBox 11"/>
-          <p:cNvSpPr txBox="1"/>
-          <p:nvPr/>
-        </p:nvSpPr>
-        <p:spPr>
-          <a:xfrm>
-            <a:off x="6419088" y="2240280"/>
-            <a:ext cx="4846320" cy="941832"/>
-          </a:xfrm>
-          <a:prstGeom prst="rect">
-            <a:avLst/>
-          </a:prstGeom>
-          <a:noFill/>
-        </p:spPr>
-        <p:txBody>
-          <a:bodyPr wrap="square" lIns="73152" rIns="73152" tIns="36576" bIns="36576">
-            <a:spAutoFit/>
-          </a:bodyPr>
-          <a:lstStyle/>
-          <a:p>
-            <a:pPr algn="l">
-              <a:spcAft>
-                <a:spcPts val="0"/>
-              </a:spcAft>
-              <a:defRPr sz="1600" b="0">
-                <a:solidFill>
-                  <a:srgbClr val="122C4E"/>
-                </a:solidFill>
-                <a:latin typeface="Noto Sans CJK KR"/>
-              </a:defRPr>
-            </a:pPr>
-            <a:r>
-              <a:t>&lt;xacro:property&gt;, &lt;xacro:macro&gt;, &lt;xacro:wheel ...&gt;</a:t>
-            </a:r>
-          </a:p>
-        </p:txBody>
-      </p:sp>
-      <p:sp>
-        <p:nvSpPr>
-          <p:cNvPr id="13" name="Rounded Rectangle 12"/>
-          <p:cNvSpPr/>
-          <p:nvPr/>
-        </p:nvSpPr>
-        <p:spPr>
-          <a:xfrm>
-            <a:off x="658368" y="3813048"/>
-            <a:ext cx="5321808" cy="1764792"/>
-          </a:xfrm>
-          <a:prstGeom prst="roundRect">
-            <a:avLst/>
-          </a:prstGeom>
-          <a:solidFill>
-            <a:srgbClr val="F4F7FB"/>
-          </a:solidFill>
-          <a:ln>
-            <a:solidFill>
-              <a:srgbClr val="DB7E22"/>
-            </a:solidFill>
-          </a:ln>
-        </p:spPr>
-        <p:style>
-          <a:lnRef idx="1">
-            <a:schemeClr val="accent1"/>
-          </a:lnRef>
-          <a:fillRef idx="3">
-            <a:schemeClr val="accent1"/>
-          </a:fillRef>
-          <a:effectRef idx="2">
-            <a:schemeClr val="accent1"/>
-          </a:effectRef>
-          <a:fontRef idx="minor">
-            <a:schemeClr val="lt1"/>
-          </a:fontRef>
-        </p:style>
-        <p:txBody>
-          <a:bodyPr rtlCol="0" anchor="ctr"/>
-          <a:lstStyle/>
-          <a:p>
-            <a:pPr algn="ctr"/>
-          </a:p>
-        </p:txBody>
-      </p:sp>
-      <p:sp>
-        <p:nvSpPr>
-          <p:cNvPr id="14" name="TextBox 13"/>
-          <p:cNvSpPr txBox="1"/>
-          <p:nvPr/>
-        </p:nvSpPr>
-        <p:spPr>
-          <a:xfrm>
-            <a:off x="859536" y="3977639"/>
-            <a:ext cx="4892040" cy="265176"/>
-          </a:xfrm>
-          <a:prstGeom prst="rect">
-            <a:avLst/>
-          </a:prstGeom>
-          <a:noFill/>
-        </p:spPr>
-        <p:txBody>
-          <a:bodyPr wrap="square" lIns="73152" rIns="73152" tIns="36576" bIns="36576">
-            <a:spAutoFit/>
-          </a:bodyPr>
-          <a:lstStyle/>
-          <a:p>
-            <a:pPr algn="l">
-              <a:spcAft>
-                <a:spcPts val="0"/>
-              </a:spcAft>
-              <a:defRPr sz="1700" b="1">
-                <a:solidFill>
-                  <a:srgbClr val="DB7E22"/>
-                </a:solidFill>
-                <a:latin typeface="Noto Sans CJK KR"/>
-              </a:defRPr>
-            </a:pPr>
-            <a:r>
-              <a:t>3. 값을 바꾸면</a:t>
-            </a:r>
-          </a:p>
-        </p:txBody>
-      </p:sp>
-      <p:sp>
-        <p:nvSpPr>
-          <p:cNvPr id="15" name="TextBox 14"/>
-          <p:cNvSpPr txBox="1"/>
-          <p:nvPr/>
-        </p:nvSpPr>
-        <p:spPr>
-          <a:xfrm>
-            <a:off x="859536" y="4389120"/>
-            <a:ext cx="4846320" cy="941832"/>
-          </a:xfrm>
-          <a:prstGeom prst="rect">
-            <a:avLst/>
-          </a:prstGeom>
-          <a:noFill/>
-        </p:spPr>
-        <p:txBody>
-          <a:bodyPr wrap="square" lIns="73152" rIns="73152" tIns="36576" bIns="36576">
-            <a:spAutoFit/>
-          </a:bodyPr>
-          <a:lstStyle/>
-          <a:p>
-            <a:pPr algn="l">
-              <a:spcAft>
-                <a:spcPts val="0"/>
-              </a:spcAft>
-              <a:defRPr sz="1600" b="0">
-                <a:solidFill>
-                  <a:srgbClr val="122C4E"/>
-                </a:solidFill>
-                <a:latin typeface="Noto Sans CJK KR"/>
-              </a:defRPr>
-            </a:pPr>
-            <a:r>
-              <a:t>wheel_radius 값을 하나 바꾸면 좌우 macro 호출에 같은 값이 전달됩니다.</a:t>
-            </a:r>
-          </a:p>
-        </p:txBody>
-      </p:sp>
-      <p:sp>
-        <p:nvSpPr>
-          <p:cNvPr id="16" name="Rounded Rectangle 15"/>
-          <p:cNvSpPr/>
-          <p:nvPr/>
-        </p:nvSpPr>
-        <p:spPr>
-          <a:xfrm>
-            <a:off x="6217920" y="3813048"/>
-            <a:ext cx="5321808" cy="1764792"/>
-          </a:xfrm>
-          <a:prstGeom prst="roundRect">
-            <a:avLst/>
-          </a:prstGeom>
-          <a:solidFill>
-            <a:srgbClr val="F4F7FB"/>
-          </a:solidFill>
-          <a:ln>
-            <a:solidFill>
-              <a:srgbClr val="BE3B3B"/>
-            </a:solidFill>
-          </a:ln>
-        </p:spPr>
-        <p:style>
-          <a:lnRef idx="1">
-            <a:schemeClr val="accent1"/>
-          </a:lnRef>
-          <a:fillRef idx="3">
-            <a:schemeClr val="accent1"/>
-          </a:fillRef>
-          <a:effectRef idx="2">
-            <a:schemeClr val="accent1"/>
-          </a:effectRef>
-          <a:fontRef idx="minor">
-            <a:schemeClr val="lt1"/>
-          </a:fontRef>
-        </p:style>
-        <p:txBody>
-          <a:bodyPr rtlCol="0" anchor="ctr"/>
-          <a:lstStyle/>
-          <a:p>
-            <a:pPr algn="ctr"/>
-          </a:p>
-        </p:txBody>
-      </p:sp>
-      <p:sp>
-        <p:nvSpPr>
-          <p:cNvPr id="17" name="TextBox 16"/>
-          <p:cNvSpPr txBox="1"/>
-          <p:nvPr/>
-        </p:nvSpPr>
-        <p:spPr>
-          <a:xfrm>
-            <a:off x="6419088" y="3977639"/>
-            <a:ext cx="4892040" cy="265176"/>
-          </a:xfrm>
-          <a:prstGeom prst="rect">
-            <a:avLst/>
-          </a:prstGeom>
-          <a:noFill/>
-        </p:spPr>
-        <p:txBody>
-          <a:bodyPr wrap="square" lIns="73152" rIns="73152" tIns="36576" bIns="36576">
-            <a:spAutoFit/>
-          </a:bodyPr>
-          <a:lstStyle/>
-          <a:p>
-            <a:pPr algn="l">
-              <a:spcAft>
-                <a:spcPts val="0"/>
-              </a:spcAft>
-              <a:defRPr sz="1700" b="1">
-                <a:solidFill>
-                  <a:srgbClr val="BE3B3B"/>
-                </a:solidFill>
-                <a:latin typeface="Noto Sans CJK KR"/>
-              </a:defRPr>
-            </a:pPr>
-            <a:r>
-              <a:t>4. 실제로 보는 곳</a:t>
-            </a:r>
-          </a:p>
-        </p:txBody>
-      </p:sp>
-      <p:sp>
-        <p:nvSpPr>
-          <p:cNvPr id="18" name="TextBox 17"/>
-          <p:cNvSpPr txBox="1"/>
-          <p:nvPr/>
-        </p:nvSpPr>
-        <p:spPr>
-          <a:xfrm>
-            <a:off x="6419088" y="4389120"/>
-            <a:ext cx="4846320" cy="941832"/>
-          </a:xfrm>
-          <a:prstGeom prst="rect">
-            <a:avLst/>
-          </a:prstGeom>
-          <a:noFill/>
-        </p:spPr>
-        <p:txBody>
-          <a:bodyPr wrap="square" lIns="73152" rIns="73152" tIns="36576" bIns="36576">
-            <a:spAutoFit/>
-          </a:bodyPr>
-          <a:lstStyle/>
-          <a:p>
-            <a:pPr algn="l">
-              <a:spcAft>
-                <a:spcPts val="0"/>
-              </a:spcAft>
-              <a:defRPr sz="1600" b="0">
-                <a:solidFill>
-                  <a:srgbClr val="122C4E"/>
-                </a:solidFill>
-                <a:latin typeface="Noto Sans CJK KR"/>
-              </a:defRPr>
-            </a:pPr>
-            <a:r>
-              <a:t>xacro → /tmp/agv.urdf → check_urdf 순서가 변환과 검증을 분리합니다.</a:t>
-            </a:r>
-          </a:p>
-        </p:txBody>
-      </p:sp>
-      <p:sp>
-        <p:nvSpPr>
-          <p:cNvPr id="19" name="TextBox 18"/>
-          <p:cNvSpPr txBox="1"/>
-          <p:nvPr/>
-        </p:nvSpPr>
-        <p:spPr>
-          <a:xfrm>
-            <a:off x="777240" y="6172200"/>
-            <a:ext cx="10607040" cy="201168"/>
-          </a:xfrm>
-          <a:prstGeom prst="rect">
-            <a:avLst/>
-          </a:prstGeom>
-          <a:noFill/>
-        </p:spPr>
-        <p:txBody>
-          <a:bodyPr wrap="square" lIns="73152" rIns="73152" tIns="36576" bIns="36576">
-            <a:spAutoFit/>
-          </a:bodyPr>
-          <a:lstStyle/>
-          <a:p>
             <a:pPr algn="ctr">
               <a:spcAft>
                 <a:spcPts val="0"/>
               </a:spcAft>
-              <a:defRPr sz="1200" b="1">
-                <a:solidFill>
-                  <a:srgbClr val="2A8B5A"/>
-                </a:solidFill>
-                <a:latin typeface="Noto Sans CJK KR"/>
-              </a:defRPr>
-            </a:pPr>
-            <a:r>
-              <a:t>다음 코드 슬라이드에서는 위의 태그/함수를 찾아 색으로 표시하며 한 줄씩 설명합니다.</a:t>
+              <a:defRPr sz="1100" b="0">
+                <a:solidFill>
+                  <a:srgbClr val="5C6672"/>
+                </a:solidFill>
+                <a:latin typeface="Noto Sans CJK KR"/>
+              </a:defRPr>
+            </a:pPr>
+            <a:r>
+              <a:t>파일 하나를 만들고 저장한 뒤에만 다음 파일로 넘어갑니다. Complete는 오류가 풀리지 않을 때만 비교합니다.</a:t>
             </a:r>
           </a:p>
         </p:txBody>
@@ -15009,7 +16755,7 @@
               </a:defRPr>
             </a:pPr>
             <a:r>
-              <a:t>처음으로 Xacro macro를 만든다</a:t>
+              <a:t>코드/설정이 실제로 만드는 것 (1/1)</a:t>
             </a:r>
           </a:p>
         </p:txBody>
@@ -15048,7 +16794,7 @@
               </a:defRPr>
             </a:pPr>
             <a:r>
-              <a:t>한 장에는 한 행동만 수행합니다.</a:t>
+              <a:t>파일을 입력하기 전에 ‘무엇을 만들고 어디서 볼지’를 먼저 연결합니다.</a:t>
             </a:r>
           </a:p>
         </p:txBody>
@@ -15184,109 +16930,31 @@
               </a:defRPr>
             </a:pPr>
             <a:r>
-              <a:t>현재 단계 1/2    |    현재 폴더 ~/ros2_curri/agv_ws    |    현재 터미널</a:t>
-            </a:r>
-          </a:p>
-        </p:txBody>
-      </p:sp>
-      <p:sp>
-        <p:nvSpPr>
-          <p:cNvPr id="7" name="TextBox 6"/>
-          <p:cNvSpPr txBox="1"/>
-          <p:nvPr/>
-        </p:nvSpPr>
-        <p:spPr>
-          <a:xfrm>
-            <a:off x="676656" y="1764792"/>
-            <a:ext cx="1828800" cy="347472"/>
-          </a:xfrm>
-          <a:prstGeom prst="rect">
-            <a:avLst/>
-          </a:prstGeom>
-          <a:noFill/>
-        </p:spPr>
-        <p:txBody>
-          <a:bodyPr wrap="square" lIns="73152" rIns="73152" tIns="36576" bIns="36576">
-            <a:spAutoFit/>
-          </a:bodyPr>
-          <a:lstStyle/>
-          <a:p>
-            <a:pPr algn="l">
-              <a:spcAft>
-                <a:spcPts val="0"/>
-              </a:spcAft>
-              <a:defRPr sz="1800" b="1">
-                <a:solidFill>
-                  <a:srgbClr val="225B9B"/>
-                </a:solidFill>
-                <a:latin typeface="Noto Sans CJK KR"/>
-              </a:defRPr>
-            </a:pPr>
-            <a:r>
-              <a:t>왜 하는가</a:t>
-            </a:r>
-          </a:p>
-        </p:txBody>
-      </p:sp>
-      <p:sp>
-        <p:nvSpPr>
-          <p:cNvPr id="8" name="TextBox 7"/>
-          <p:cNvSpPr txBox="1"/>
-          <p:nvPr/>
-        </p:nvSpPr>
-        <p:spPr>
-          <a:xfrm>
-            <a:off x="676656" y="2103120"/>
-            <a:ext cx="10789920" cy="512064"/>
-          </a:xfrm>
-          <a:prstGeom prst="rect">
-            <a:avLst/>
-          </a:prstGeom>
-          <a:noFill/>
-        </p:spPr>
-        <p:txBody>
-          <a:bodyPr wrap="square" lIns="73152" rIns="73152" tIns="36576" bIns="36576">
-            <a:spAutoFit/>
-          </a:bodyPr>
-          <a:lstStyle/>
-          <a:p>
-            <a:pPr algn="l">
-              <a:spcAft>
-                <a:spcPts val="0"/>
-              </a:spcAft>
-              <a:defRPr sz="2000" b="0">
-                <a:solidFill>
-                  <a:srgbClr val="122C4E"/>
-                </a:solidFill>
-                <a:latin typeface="Noto Sans CJK KR"/>
-              </a:defRPr>
-            </a:pPr>
-            <a:r>
-              <a:t>M05 단일 URDF의 반복 바퀴 구조를 macro/property로 바꾸는 첫 단계다.</a:t>
-            </a:r>
-          </a:p>
-        </p:txBody>
-      </p:sp>
-      <p:sp>
-        <p:nvSpPr>
-          <p:cNvPr id="9" name="Rounded Rectangle 8"/>
+              <a:t>현재 단계 파일 역할    |    현재 폴더 ~/ros2_curri/my_agv_ws    |    현재 터미널</a:t>
+            </a:r>
+          </a:p>
+        </p:txBody>
+      </p:sp>
+      <p:sp>
+        <p:nvSpPr>
+          <p:cNvPr id="7" name="Rounded Rectangle 6"/>
           <p:cNvSpPr/>
           <p:nvPr/>
         </p:nvSpPr>
         <p:spPr>
           <a:xfrm>
-            <a:off x="676656" y="2871216"/>
-            <a:ext cx="10835640" cy="2331720"/>
+            <a:off x="640080" y="1627632"/>
+            <a:ext cx="10972800" cy="2048256"/>
           </a:xfrm>
           <a:prstGeom prst="roundRect">
             <a:avLst/>
           </a:prstGeom>
           <a:solidFill>
-            <a:srgbClr val="1D232D"/>
+            <a:srgbClr val="F4F7FB"/>
           </a:solidFill>
           <a:ln>
             <a:solidFill>
-              <a:srgbClr val="1D232D"/>
+              <a:srgbClr val="CCDBEB"/>
             </a:solidFill>
           </a:ln>
         </p:spPr>
@@ -15305,104 +16973,286 @@
           </a:fontRef>
         </p:style>
         <p:txBody>
-          <a:bodyPr rtlCol="0" anchor="ctr" wrap="square" lIns="73152" rIns="73152" tIns="36576" bIns="36576"/>
+          <a:bodyPr rtlCol="0" anchor="ctr"/>
+          <a:lstStyle/>
+          <a:p>
+            <a:pPr algn="ctr"/>
+          </a:p>
+        </p:txBody>
+      </p:sp>
+      <p:sp>
+        <p:nvSpPr>
+          <p:cNvPr id="8" name="TextBox 7"/>
+          <p:cNvSpPr txBox="1"/>
+          <p:nvPr/>
+        </p:nvSpPr>
+        <p:spPr>
+          <a:xfrm>
+            <a:off x="850392" y="1764792"/>
+            <a:ext cx="10424160" cy="256032"/>
+          </a:xfrm>
+          <a:prstGeom prst="rect">
+            <a:avLst/>
+          </a:prstGeom>
+          <a:noFill/>
+        </p:spPr>
+        <p:txBody>
+          <a:bodyPr wrap="square" lIns="73152" rIns="73152" tIns="36576" bIns="36576">
+            <a:spAutoFit/>
+          </a:bodyPr>
           <a:lstStyle/>
           <a:p>
             <a:pPr algn="l">
               <a:spcAft>
                 <a:spcPts val="0"/>
               </a:spcAft>
-              <a:defRPr sz="1600" b="0">
-                <a:solidFill>
-                  <a:srgbClr val="FFFFFF"/>
+              <a:defRPr sz="1300" b="1">
+                <a:solidFill>
+                  <a:srgbClr val="225B9B"/>
                 </a:solidFill>
                 <a:latin typeface="DejaVu Sans Mono"/>
               </a:defRPr>
             </a:pPr>
             <a:r>
-              <a:t>cd ~/ros2_curri/agv_ws</a:t>
+              <a:t>~/ros2_curri/my_agv_ws/src/agv_description/curriculum_stages/M06/agv.urdf.xacro</a:t>
+            </a:r>
+          </a:p>
+        </p:txBody>
+      </p:sp>
+      <p:sp>
+        <p:nvSpPr>
+          <p:cNvPr id="9" name="TextBox 8"/>
+          <p:cNvSpPr txBox="1"/>
+          <p:nvPr/>
+        </p:nvSpPr>
+        <p:spPr>
+          <a:xfrm>
+            <a:off x="868680" y="2130552"/>
+            <a:ext cx="1234440" cy="228600"/>
+          </a:xfrm>
+          <a:prstGeom prst="rect">
+            <a:avLst/>
+          </a:prstGeom>
+          <a:noFill/>
+        </p:spPr>
+        <p:txBody>
+          <a:bodyPr wrap="square" lIns="73152" rIns="73152" tIns="36576" bIns="36576">
+            <a:spAutoFit/>
+          </a:bodyPr>
+          <a:lstStyle/>
+          <a:p>
+            <a:pPr algn="l">
+              <a:spcAft>
+                <a:spcPts val="0"/>
+              </a:spcAft>
+              <a:defRPr sz="1500" b="1">
+                <a:solidFill>
+                  <a:srgbClr val="2A8B5A"/>
+                </a:solidFill>
+                <a:latin typeface="Noto Sans CJK KR"/>
+              </a:defRPr>
+            </a:pPr>
+            <a:r>
+              <a:t>만드는 것</a:t>
+            </a:r>
+          </a:p>
+        </p:txBody>
+      </p:sp>
+      <p:sp>
+        <p:nvSpPr>
+          <p:cNvPr id="10" name="TextBox 9"/>
+          <p:cNvSpPr txBox="1"/>
+          <p:nvPr/>
+        </p:nvSpPr>
+        <p:spPr>
+          <a:xfrm>
+            <a:off x="1975104" y="2112264"/>
+            <a:ext cx="9189720" cy="274320"/>
+          </a:xfrm>
+          <a:prstGeom prst="rect">
+            <a:avLst/>
+          </a:prstGeom>
+          <a:noFill/>
+        </p:spPr>
+        <p:txBody>
+          <a:bodyPr wrap="square" lIns="73152" rIns="73152" tIns="36576" bIns="36576">
+            <a:spAutoFit/>
+          </a:bodyPr>
+          <a:lstStyle/>
+          <a:p>
+            <a:pPr algn="l">
+              <a:spcAft>
+                <a:spcPts val="0"/>
+              </a:spcAft>
+              <a:defRPr sz="1500" b="0">
+                <a:solidFill>
+                  <a:srgbClr val="122C4E"/>
+                </a:solidFill>
+                <a:latin typeface="Noto Sans CJK KR"/>
+              </a:defRPr>
+            </a:pPr>
+            <a:r>
+              <a:t>반복되는 좌·우 바퀴를 property와 macro 하나로 생성하는 재사용 가능한 AGV 설명</a:t>
+            </a:r>
+          </a:p>
+        </p:txBody>
+      </p:sp>
+      <p:sp>
+        <p:nvSpPr>
+          <p:cNvPr id="11" name="TextBox 10"/>
+          <p:cNvSpPr txBox="1"/>
+          <p:nvPr/>
+        </p:nvSpPr>
+        <p:spPr>
+          <a:xfrm>
+            <a:off x="868680" y="2505456"/>
+            <a:ext cx="1234440" cy="228600"/>
+          </a:xfrm>
+          <a:prstGeom prst="rect">
+            <a:avLst/>
+          </a:prstGeom>
+          <a:noFill/>
+        </p:spPr>
+        <p:txBody>
+          <a:bodyPr wrap="square" lIns="73152" rIns="73152" tIns="36576" bIns="36576">
+            <a:spAutoFit/>
+          </a:bodyPr>
+          <a:lstStyle/>
+          <a:p>
+            <a:pPr algn="l">
+              <a:spcAft>
+                <a:spcPts val="0"/>
+              </a:spcAft>
+              <a:defRPr sz="1500" b="1">
+                <a:solidFill>
+                  <a:srgbClr val="DB7E22"/>
+                </a:solidFill>
+                <a:latin typeface="Noto Sans CJK KR"/>
+              </a:defRPr>
+            </a:pPr>
+            <a:r>
+              <a:t>코드 읽기</a:t>
+            </a:r>
+          </a:p>
+        </p:txBody>
+      </p:sp>
+      <p:sp>
+        <p:nvSpPr>
+          <p:cNvPr id="12" name="TextBox 11"/>
+          <p:cNvSpPr txBox="1"/>
+          <p:nvPr/>
+        </p:nvSpPr>
+        <p:spPr>
+          <a:xfrm>
+            <a:off x="1975104" y="2487168"/>
+            <a:ext cx="9189720" cy="301752"/>
+          </a:xfrm>
+          <a:prstGeom prst="rect">
+            <a:avLst/>
+          </a:prstGeom>
+          <a:noFill/>
+        </p:spPr>
+        <p:txBody>
+          <a:bodyPr wrap="square" lIns="73152" rIns="73152" tIns="36576" bIns="36576">
+            <a:spAutoFit/>
+          </a:bodyPr>
+          <a:lstStyle/>
+          <a:p>
+            <a:pPr algn="l">
+              <a:spcAft>
+                <a:spcPts val="0"/>
+              </a:spcAft>
+              <a:defRPr sz="1400" b="0">
+                <a:solidFill>
+                  <a:srgbClr val="122C4E"/>
+                </a:solidFill>
+                <a:latin typeface="Noto Sans CJK KR"/>
+              </a:defRPr>
+            </a:pPr>
+            <a:r>
+              <a:t>property → macro 정의 → macro 호출 순서로 읽고, wheel_radius 한 값만 바꾼다.</a:t>
+            </a:r>
+          </a:p>
+        </p:txBody>
+      </p:sp>
+      <p:sp>
+        <p:nvSpPr>
+          <p:cNvPr id="13" name="TextBox 12"/>
+          <p:cNvSpPr txBox="1"/>
+          <p:nvPr/>
+        </p:nvSpPr>
+        <p:spPr>
+          <a:xfrm>
+            <a:off x="868680" y="2889504"/>
+            <a:ext cx="1234440" cy="228600"/>
+          </a:xfrm>
+          <a:prstGeom prst="rect">
+            <a:avLst/>
+          </a:prstGeom>
+          <a:noFill/>
+        </p:spPr>
+        <p:txBody>
+          <a:bodyPr wrap="square" lIns="73152" rIns="73152" tIns="36576" bIns="36576">
+            <a:spAutoFit/>
+          </a:bodyPr>
+          <a:lstStyle/>
+          <a:p>
+            <a:pPr algn="l">
+              <a:spcAft>
+                <a:spcPts val="0"/>
+              </a:spcAft>
+              <a:defRPr sz="1500" b="1">
+                <a:solidFill>
+                  <a:srgbClr val="225B9B"/>
+                </a:solidFill>
+                <a:latin typeface="Noto Sans CJK KR"/>
+              </a:defRPr>
+            </a:pPr>
+            <a:r>
+              <a:t>사용/확인</a:t>
+            </a:r>
+          </a:p>
+        </p:txBody>
+      </p:sp>
+      <p:sp>
+        <p:nvSpPr>
+          <p:cNvPr id="14" name="TextBox 13"/>
+          <p:cNvSpPr txBox="1"/>
+          <p:nvPr/>
+        </p:nvSpPr>
+        <p:spPr>
+          <a:xfrm>
+            <a:off x="1975104" y="2871216"/>
+            <a:ext cx="9189720" cy="512064"/>
+          </a:xfrm>
+          <a:prstGeom prst="rect">
+            <a:avLst/>
+          </a:prstGeom>
+          <a:noFill/>
+        </p:spPr>
+        <p:txBody>
+          <a:bodyPr wrap="square" lIns="73152" rIns="73152" tIns="36576" bIns="36576">
+            <a:spAutoFit/>
+          </a:bodyPr>
+          <a:lstStyle/>
+          <a:p>
+            <a:pPr algn="l">
+              <a:spcAft>
+                <a:spcPts val="0"/>
+              </a:spcAft>
+              <a:defRPr sz="1300" b="0">
+                <a:solidFill>
+                  <a:srgbClr val="122C4E"/>
+                </a:solidFill>
+                <a:latin typeface="Noto Sans CJK KR"/>
+              </a:defRPr>
+            </a:pPr>
+            <a:r>
+              <a:t>사용: xacro로 URDF를 만든 뒤 check_urdf를 실행한다.</a:t>
             </a:r>
             <a:br/>
             <a:r>
-              <a:t>xacro src/agv_description/curriculum_stages/M06/agv.urdf.xacro &gt; /tmp/agv_from_xacro.urdf</a:t>
-            </a:r>
-          </a:p>
-        </p:txBody>
-      </p:sp>
-      <p:sp>
-        <p:nvSpPr>
-          <p:cNvPr id="10" name="TextBox 9"/>
-          <p:cNvSpPr txBox="1"/>
-          <p:nvPr/>
-        </p:nvSpPr>
-        <p:spPr>
-          <a:xfrm>
-            <a:off x="768096" y="5468112"/>
-            <a:ext cx="1143000" cy="256032"/>
-          </a:xfrm>
-          <a:prstGeom prst="rect">
-            <a:avLst/>
-          </a:prstGeom>
-          <a:noFill/>
-        </p:spPr>
-        <p:txBody>
-          <a:bodyPr wrap="square" lIns="73152" rIns="73152" tIns="36576" bIns="36576">
-            <a:spAutoFit/>
-          </a:bodyPr>
-          <a:lstStyle/>
-          <a:p>
-            <a:pPr algn="l">
-              <a:spcAft>
-                <a:spcPts val="0"/>
-              </a:spcAft>
-              <a:defRPr sz="1800" b="1">
-                <a:solidFill>
-                  <a:srgbClr val="2A8B5A"/>
-                </a:solidFill>
-                <a:latin typeface="Noto Sans CJK KR"/>
-              </a:defRPr>
-            </a:pPr>
-            <a:r>
-              <a:t>확인</a:t>
-            </a:r>
-          </a:p>
-        </p:txBody>
-      </p:sp>
-      <p:sp>
-        <p:nvSpPr>
-          <p:cNvPr id="11" name="TextBox 10"/>
-          <p:cNvSpPr txBox="1"/>
-          <p:nvPr/>
-        </p:nvSpPr>
-        <p:spPr>
-          <a:xfrm>
-            <a:off x="768096" y="5742432"/>
-            <a:ext cx="10561320" cy="347472"/>
-          </a:xfrm>
-          <a:prstGeom prst="rect">
-            <a:avLst/>
-          </a:prstGeom>
-          <a:noFill/>
-        </p:spPr>
-        <p:txBody>
-          <a:bodyPr wrap="square" lIns="73152" rIns="73152" tIns="36576" bIns="36576">
-            <a:spAutoFit/>
-          </a:bodyPr>
-          <a:lstStyle/>
-          <a:p>
-            <a:pPr algn="l">
-              <a:spcAft>
-                <a:spcPts val="0"/>
-              </a:spcAft>
-              <a:defRPr sz="1800" b="0">
-                <a:solidFill>
-                  <a:srgbClr val="122C4E"/>
-                </a:solidFill>
-                <a:latin typeface="Noto Sans CJK KR"/>
-              </a:defRPr>
-            </a:pPr>
-            <a:r>
-              <a:t>명령의 출력에서 topic·frame·파일 이름 또는 성공 메시지를 찾으면 이 단계가 완료됩니다.</a:t>
+              <a:t>화면/출력: 생성 URDF의 left/right wheel과 같은 반지름</a:t>
             </a:r>
           </a:p>
         </p:txBody>

--- a/blocks/B_robot_build/M06_xacro_modularization/M06_Xacro로_구조_모듈화.pptx
+++ b/blocks/B_robot_build/M06_xacro_modularization/M06_Xacro로_구조_모듈화.pptx
@@ -31,6 +31,9 @@
     <p:sldId id="279" r:id="rId31"/>
     <p:sldId id="280" r:id="rId32"/>
     <p:sldId id="281" r:id="rId33"/>
+    <p:sldId id="282" r:id="rId34"/>
+    <p:sldId id="283" r:id="rId35"/>
+    <p:sldId id="284" r:id="rId36"/>
   </p:sldIdLst>
   <p:sldSz cx="12191999" cy="6858000" type="screen4x3"/>
   <p:notesSz cx="6858000" cy="9144000"/>
@@ -802,17 +805,17 @@
           <a:lstStyle/>
           <a:p>
             <a:r>
-              <a:t>[설명] ~/ros2_curri/my_agv_ws/src/agv_description/curriculum_stages/M06/agv.urdf.xacro의 1/5 구현 블록을 직접 입력한다.</a:t>
-            </a:r>
-          </a:p>
-          <a:p>
-            <a:r>
-              <a:t>[실행] nano ~/ros2_curri/my_agv_ws/src/agv_description/curriculum_stages/M06/agv.urdf.xacro</a:t>
-            </a:r>
-          </a:p>
-          <a:p>
-            <a:r>
-              <a:t>[확인] 저장 뒤 다음 구현 블록으로 이동한다.</a:t>
+              <a:t>[설명] 코드를 읽어 주는 방식으로 한 줄의 역할과 실행 효과를 연결한다.</a:t>
+            </a:r>
+          </a:p>
+          <a:p>
+            <a:r>
+              <a:t>[실행] 슬라이드의 명령 또는 파일 작성 단계를 진행한다.</a:t>
+            </a:r>
+          </a:p>
+          <a:p>
+            <a:r>
+              <a:t>[확인] 각 코드 줄의 뜻과 확인 위치를 한 문장으로 설명한다.</a:t>
             </a:r>
           </a:p>
           <a:p>
@@ -822,7 +825,7 @@
           </a:p>
           <a:p>
             <a:r>
-              <a:t>[오류] 들여쓰기·XML 태그·따옴표가 슬라이드와 정확히 같은지 확인한다.</a:t>
+              <a:t>[오류] 오류가 나면 현재 폴더, source, 파일 경로를 먼저 확인한다.</a:t>
             </a:r>
           </a:p>
         </p:txBody>
@@ -892,17 +895,17 @@
           <a:lstStyle/>
           <a:p>
             <a:r>
-              <a:t>[설명] ~/ros2_curri/my_agv_ws/src/agv_description/curriculum_stages/M06/agv.urdf.xacro의 2/5 구현 블록을 직접 입력한다.</a:t>
-            </a:r>
-          </a:p>
-          <a:p>
-            <a:r>
-              <a:t>[실행] nano ~/ros2_curri/my_agv_ws/src/agv_description/curriculum_stages/M06/agv.urdf.xacro</a:t>
-            </a:r>
-          </a:p>
-          <a:p>
-            <a:r>
-              <a:t>[확인] 저장 뒤 다음 구현 블록으로 이동한다.</a:t>
+              <a:t>[설명] 코드를 읽어 주는 방식으로 한 줄의 역할과 실행 효과를 연결한다.</a:t>
+            </a:r>
+          </a:p>
+          <a:p>
+            <a:r>
+              <a:t>[실행] 슬라이드의 명령 또는 파일 작성 단계를 진행한다.</a:t>
+            </a:r>
+          </a:p>
+          <a:p>
+            <a:r>
+              <a:t>[확인] 각 코드 줄의 뜻과 확인 위치를 한 문장으로 설명한다.</a:t>
             </a:r>
           </a:p>
           <a:p>
@@ -912,7 +915,7 @@
           </a:p>
           <a:p>
             <a:r>
-              <a:t>[오류] 들여쓰기·XML 태그·따옴표가 슬라이드와 정확히 같은지 확인한다.</a:t>
+              <a:t>[오류] 오류가 나면 현재 폴더, source, 파일 경로를 먼저 확인한다.</a:t>
             </a:r>
           </a:p>
         </p:txBody>
@@ -982,17 +985,17 @@
           <a:lstStyle/>
           <a:p>
             <a:r>
-              <a:t>[설명] ~/ros2_curri/my_agv_ws/src/agv_description/curriculum_stages/M06/agv.urdf.xacro의 3/5 구현 블록을 직접 입력한다.</a:t>
-            </a:r>
-          </a:p>
-          <a:p>
-            <a:r>
-              <a:t>[실행] nano ~/ros2_curri/my_agv_ws/src/agv_description/curriculum_stages/M06/agv.urdf.xacro</a:t>
-            </a:r>
-          </a:p>
-          <a:p>
-            <a:r>
-              <a:t>[확인] 저장 뒤 다음 구현 블록으로 이동한다.</a:t>
+              <a:t>[설명] 코드를 읽어 주는 방식으로 한 줄의 역할과 실행 효과를 연결한다.</a:t>
+            </a:r>
+          </a:p>
+          <a:p>
+            <a:r>
+              <a:t>[실행] 슬라이드의 명령 또는 파일 작성 단계를 진행한다.</a:t>
+            </a:r>
+          </a:p>
+          <a:p>
+            <a:r>
+              <a:t>[확인] 각 코드 줄의 뜻과 확인 위치를 한 문장으로 설명한다.</a:t>
             </a:r>
           </a:p>
           <a:p>
@@ -1002,7 +1005,7 @@
           </a:p>
           <a:p>
             <a:r>
-              <a:t>[오류] 들여쓰기·XML 태그·따옴표가 슬라이드와 정확히 같은지 확인한다.</a:t>
+              <a:t>[오류] 오류가 나면 현재 폴더, source, 파일 경로를 먼저 확인한다.</a:t>
             </a:r>
           </a:p>
         </p:txBody>
@@ -1072,7 +1075,7 @@
           <a:lstStyle/>
           <a:p>
             <a:r>
-              <a:t>[설명] ~/ros2_curri/my_agv_ws/src/agv_description/curriculum_stages/M06/agv.urdf.xacro의 4/5 구현 블록을 직접 입력한다.</a:t>
+              <a:t>[설명] ~/ros2_curri/my_agv_ws/src/agv_description/curriculum_stages/M06/agv.urdf.xacro의 1/5 구현 블록을 직접 입력한다.</a:t>
             </a:r>
           </a:p>
           <a:p>
@@ -1162,7 +1165,7 @@
           <a:lstStyle/>
           <a:p>
             <a:r>
-              <a:t>[설명] ~/ros2_curri/my_agv_ws/src/agv_description/curriculum_stages/M06/agv.urdf.xacro의 5/5 구현 블록을 직접 입력한다.</a:t>
+              <a:t>[설명] ~/ros2_curri/my_agv_ws/src/agv_description/curriculum_stages/M06/agv.urdf.xacro의 2/5 구현 블록을 직접 입력한다.</a:t>
             </a:r>
           </a:p>
           <a:p>
@@ -1252,22 +1255,17 @@
           <a:lstStyle/>
           <a:p>
             <a:r>
-              <a:t>[설명] M05 단일 URDF의 반복 바퀴 구조를 macro/property로 바꾸는 첫 단계다.</a:t>
-            </a:r>
-          </a:p>
-          <a:p>
-            <a:r>
-              <a:t>[실행] cd ~/ros2_curri/my_agv_ws</a:t>
-            </a:r>
-          </a:p>
-          <a:p>
-            <a:r>
-              <a:t>xacro src/agv_description/curriculum_stages/M06/agv.urdf.xacro &gt; /tmp/agv_from_xacro.urdf</a:t>
-            </a:r>
-          </a:p>
-          <a:p>
-            <a:r>
-              <a:t>[확인] 명령 출력에서 슬라이드의 확인 항목을 찾는다.</a:t>
+              <a:t>[설명] ~/ros2_curri/my_agv_ws/src/agv_description/curriculum_stages/M06/agv.urdf.xacro의 3/5 구현 블록을 직접 입력한다.</a:t>
+            </a:r>
+          </a:p>
+          <a:p>
+            <a:r>
+              <a:t>[실행] nano ~/ros2_curri/my_agv_ws/src/agv_description/curriculum_stages/M06/agv.urdf.xacro</a:t>
+            </a:r>
+          </a:p>
+          <a:p>
+            <a:r>
+              <a:t>[확인] 저장 뒤 다음 구현 블록으로 이동한다.</a:t>
             </a:r>
           </a:p>
           <a:p>
@@ -1277,7 +1275,7 @@
           </a:p>
           <a:p>
             <a:r>
-              <a:t>[오류] 오류가 나면 현재 폴더, source, 파일 경로를 먼저 확인한다.</a:t>
+              <a:t>[오류] 들여쓰기·XML 태그·따옴표가 슬라이드와 정확히 같은지 확인한다.</a:t>
             </a:r>
           </a:p>
         </p:txBody>
@@ -1347,22 +1345,17 @@
           <a:lstStyle/>
           <a:p>
             <a:r>
-              <a:t>[설명] 하나의 wheel_radius가 좌우 바퀴에 함께 적용되어야 한다.</a:t>
-            </a:r>
-          </a:p>
-          <a:p>
-            <a:r>
-              <a:t>[실행] check_urdf /tmp/agv_from_xacro.urdf</a:t>
-            </a:r>
-          </a:p>
-          <a:p>
-            <a:r>
-              <a:t># wheel_radius 값을 바꾼 뒤 같은 두 명령을 다시 실행</a:t>
-            </a:r>
-          </a:p>
-          <a:p>
-            <a:r>
-              <a:t>[확인] 명령 출력에서 슬라이드의 확인 항목을 찾는다.</a:t>
+              <a:t>[설명] ~/ros2_curri/my_agv_ws/src/agv_description/curriculum_stages/M06/agv.urdf.xacro의 4/5 구현 블록을 직접 입력한다.</a:t>
+            </a:r>
+          </a:p>
+          <a:p>
+            <a:r>
+              <a:t>[실행] nano ~/ros2_curri/my_agv_ws/src/agv_description/curriculum_stages/M06/agv.urdf.xacro</a:t>
+            </a:r>
+          </a:p>
+          <a:p>
+            <a:r>
+              <a:t>[확인] 저장 뒤 다음 구현 블록으로 이동한다.</a:t>
             </a:r>
           </a:p>
           <a:p>
@@ -1372,7 +1365,7 @@
           </a:p>
           <a:p>
             <a:r>
-              <a:t>[오류] 오류가 나면 현재 폴더, source, 파일 경로를 먼저 확인한다.</a:t>
+              <a:t>[오류] 들여쓰기·XML 태그·따옴표가 슬라이드와 정확히 같은지 확인한다.</a:t>
             </a:r>
           </a:p>
         </p:txBody>
@@ -1442,22 +1435,17 @@
           <a:lstStyle/>
           <a:p>
             <a:r>
-              <a:t>[설명] build/source/run을 생략 없이 실행한다.</a:t>
-            </a:r>
-          </a:p>
-          <a:p>
-            <a:r>
-              <a:t>[실행] xacro ~/ros2_curri/my_agv_ws/src/agv_description/curriculum_stages/M06/agv.urdf.xacro &gt; /tmp/agv.urdf</a:t>
-            </a:r>
-          </a:p>
-          <a:p>
-            <a:r>
-              <a:t>check_urdf /tmp/agv.urdf</a:t>
-            </a:r>
-          </a:p>
-          <a:p>
-            <a:r>
-              <a:t>[확인] wheel_radius와 wheel_base 변경이 좌우 바퀴·충돌 형상에 함께 적용된다.</a:t>
+              <a:t>[설명] ~/ros2_curri/my_agv_ws/src/agv_description/curriculum_stages/M06/agv.urdf.xacro의 5/5 구현 블록을 직접 입력한다.</a:t>
+            </a:r>
+          </a:p>
+          <a:p>
+            <a:r>
+              <a:t>[실행] nano ~/ros2_curri/my_agv_ws/src/agv_description/curriculum_stages/M06/agv.urdf.xacro</a:t>
+            </a:r>
+          </a:p>
+          <a:p>
+            <a:r>
+              <a:t>[확인] 저장 뒤 다음 구현 블록으로 이동한다.</a:t>
             </a:r>
           </a:p>
           <a:p>
@@ -1467,7 +1455,7 @@
           </a:p>
           <a:p>
             <a:r>
-              <a:t>[오류] 오류가 나면 현재 폴더, source, 파일 경로를 먼저 확인한다.</a:t>
+              <a:t>[오류] 들여쓰기·XML 태그·따옴표가 슬라이드와 정확히 같은지 확인한다.</a:t>
             </a:r>
           </a:p>
         </p:txBody>
@@ -1627,17 +1615,22 @@
           <a:lstStyle/>
           <a:p>
             <a:r>
-              <a:t>[설명] 실제 Ubuntu/ROS 2 환경에서 생성한 검증 화면이다.</a:t>
-            </a:r>
-          </a:p>
-          <a:p>
-            <a:r>
-              <a:t>[실행] 슬라이드의 명령 또는 파일 작성 단계를 진행한다.</a:t>
-            </a:r>
-          </a:p>
-          <a:p>
-            <a:r>
-              <a:t>[확인] ① 명령/설정  ② 정상 출력 또는 화면  ③ 다음 검증 명령으로 재확인</a:t>
+              <a:t>[설명] M05 단일 URDF의 반복 바퀴 구조를 macro/property로 바꾸는 첫 단계다.</a:t>
+            </a:r>
+          </a:p>
+          <a:p>
+            <a:r>
+              <a:t>[실행] cd ~/ros2_curri/my_agv_ws</a:t>
+            </a:r>
+          </a:p>
+          <a:p>
+            <a:r>
+              <a:t>xacro src/agv_description/curriculum_stages/M06/agv.urdf.xacro &gt; /tmp/agv_from_xacro.urdf</a:t>
+            </a:r>
+          </a:p>
+          <a:p>
+            <a:r>
+              <a:t>[확인] 명령 출력에서 슬라이드의 확인 항목을 찾는다.</a:t>
             </a:r>
           </a:p>
           <a:p>
@@ -1717,22 +1710,22 @@
           <a:lstStyle/>
           <a:p>
             <a:r>
-              <a:t>[설명] 검증 명령은 GUI 결과와 별도로 실행해 재현 가능한 완료 기준을 만든다.</a:t>
-            </a:r>
-          </a:p>
-          <a:p>
-            <a:r>
-              <a:t>[실행] xacro ~/ros2_curri/my_agv_ws/src/agv_description/curriculum_stages/M06/agv.urdf.xacro &gt; /tmp/agv.urdf</a:t>
-            </a:r>
-          </a:p>
-          <a:p>
-            <a:r>
-              <a:t>rg -n 'wheel_radius|left_wheel_joint|right_wheel_joint' /tmp/agv.urdf</a:t>
-            </a:r>
-          </a:p>
-          <a:p>
-            <a:r>
-              <a:t>[확인] wheel_radius와 wheel_base 변경이 좌우 바퀴·충돌 형상에 함께 적용된다.</a:t>
+              <a:t>[설명] 하나의 wheel_radius가 좌우 바퀴에 함께 적용되어야 한다.</a:t>
+            </a:r>
+          </a:p>
+          <a:p>
+            <a:r>
+              <a:t>[실행] check_urdf /tmp/agv_from_xacro.urdf</a:t>
+            </a:r>
+          </a:p>
+          <a:p>
+            <a:r>
+              <a:t># wheel_radius 값을 바꾼 뒤 같은 두 명령을 다시 실행</a:t>
+            </a:r>
+          </a:p>
+          <a:p>
+            <a:r>
+              <a:t>[확인] 명령 출력에서 슬라이드의 확인 항목을 찾는다.</a:t>
             </a:r>
           </a:p>
           <a:p>
@@ -1812,17 +1805,22 @@
           <a:lstStyle/>
           <a:p>
             <a:r>
-              <a:t>[설명] 오류를 대신 해결하지 말고 증상부터 우선 확인 순서대로 교육생이 실행하게 한다.</a:t>
-            </a:r>
-          </a:p>
-          <a:p>
-            <a:r>
-              <a:t>[실행] 슬라이드의 명령 또는 파일 작성 단계를 진행한다.</a:t>
-            </a:r>
-          </a:p>
-          <a:p>
-            <a:r>
-              <a:t>[확인] 수정 뒤 첫 검증 명령을 다시 실행한다.</a:t>
+              <a:t>[설명] build/source/run을 생략 없이 실행한다.</a:t>
+            </a:r>
+          </a:p>
+          <a:p>
+            <a:r>
+              <a:t>[실행] xacro ~/ros2_curri/my_agv_ws/src/agv_description/curriculum_stages/M06/agv.urdf.xacro &gt; /tmp/agv.urdf</a:t>
+            </a:r>
+          </a:p>
+          <a:p>
+            <a:r>
+              <a:t>check_urdf /tmp/agv.urdf</a:t>
+            </a:r>
+          </a:p>
+          <a:p>
+            <a:r>
+              <a:t>[확인] wheel_radius와 wheel_base 변경이 좌우 바퀴·충돌 형상에 함께 적용된다.</a:t>
             </a:r>
           </a:p>
           <a:p>
@@ -1832,7 +1830,7 @@
           </a:p>
           <a:p>
             <a:r>
-              <a:t>[오류] 슬라이드의 두 대표 오류를 먼저 사용한다.</a:t>
+              <a:t>[오류] 오류가 나면 현재 폴더, source, 파일 경로를 먼저 확인한다.</a:t>
             </a:r>
           </a:p>
         </p:txBody>
@@ -1902,37 +1900,17 @@
           <a:lstStyle/>
           <a:p>
             <a:r>
-              <a:t>[설명] Complete는 정답 복사본이 아니라 막혔을 때 비교·복구하는 안전망이다.</a:t>
-            </a:r>
-          </a:p>
-          <a:p>
-            <a:r>
-              <a:t>[실행] cd ~/ros2_curri</a:t>
-            </a:r>
-          </a:p>
-          <a:p>
-            <a:r>
-              <a:t>diff -ru my_agv_ws/src blocks/B_robot_build/M06_xacro_modularization/complete/agv_ws/src || true</a:t>
-            </a:r>
-          </a:p>
-          <a:p>
-            <a:r>
-              <a:t>cp -a my_agv_ws/src my_agv_ws/src_before_M06</a:t>
-            </a:r>
-          </a:p>
-          <a:p>
-            <a:r>
-              <a:t>cp -a blocks/B_robot_build/M06_xacro_modularization/complete/agv_ws/src/. my_agv_ws/src/</a:t>
-            </a:r>
-          </a:p>
-          <a:p>
-            <a:r>
-              <a:t>cd my_agv_ws &amp;&amp; colcon build --symlink-install &amp;&amp; source install/setup.bash</a:t>
-            </a:r>
-          </a:p>
-          <a:p>
-            <a:r>
-              <a:t>[확인] diff에서 내 파일과 Complete의 차이를 설명할 수 있다.</a:t>
+              <a:t>[설명] 실제 Ubuntu/ROS 2 환경에서 생성한 검증 화면이다.</a:t>
+            </a:r>
+          </a:p>
+          <a:p>
+            <a:r>
+              <a:t>[실행] 슬라이드의 명령 또는 파일 작성 단계를 진행한다.</a:t>
+            </a:r>
+          </a:p>
+          <a:p>
+            <a:r>
+              <a:t>[확인] ① 명령/설정  ② 정상 출력 또는 화면  ③ 다음 검증 명령으로 재확인</a:t>
             </a:r>
           </a:p>
           <a:p>
@@ -2012,17 +1990,22 @@
           <a:lstStyle/>
           <a:p>
             <a:r>
-              <a:t>[설명] 교육생이 직접 한 값만 바꿔 원인과 결과를 연결하게 한다.</a:t>
-            </a:r>
-          </a:p>
-          <a:p>
-            <a:r>
-              <a:t>[실행] 슬라이드의 명령 또는 파일 작성 단계를 진행한다.</a:t>
-            </a:r>
-          </a:p>
-          <a:p>
-            <a:r>
-              <a:t>[확인] 원래 값과 변경 값을 모두 기록한다.</a:t>
+              <a:t>[설명] 검증 명령은 GUI 결과와 별도로 실행해 재현 가능한 완료 기준을 만든다.</a:t>
+            </a:r>
+          </a:p>
+          <a:p>
+            <a:r>
+              <a:t>[실행] xacro ~/ros2_curri/my_agv_ws/src/agv_description/curriculum_stages/M06/agv.urdf.xacro &gt; /tmp/agv.urdf</a:t>
+            </a:r>
+          </a:p>
+          <a:p>
+            <a:r>
+              <a:t>rg -n 'wheel_radius|left_wheel_joint|right_wheel_joint' /tmp/agv.urdf</a:t>
+            </a:r>
+          </a:p>
+          <a:p>
+            <a:r>
+              <a:t>[확인] wheel_radius와 wheel_base 변경이 좌우 바퀴·충돌 형상에 함께 적용된다.</a:t>
             </a:r>
           </a:p>
           <a:p>
@@ -2102,7 +2085,7 @@
           <a:lstStyle/>
           <a:p>
             <a:r>
-              <a:t>[설명] 교육생이 자신의 workspace·캡처·로그를 저장했는지 확인하고 다음 모듈의 시작 상태를 읽는다.</a:t>
+              <a:t>[설명] 오류를 대신 해결하지 말고 증상부터 우선 확인 순서대로 교육생이 실행하게 한다.</a:t>
             </a:r>
           </a:p>
           <a:p>
@@ -2112,7 +2095,7 @@
           </a:p>
           <a:p>
             <a:r>
-              <a:t>[확인] M07 Gazebo 물리 시작 조건을 말할 수 있다.</a:t>
+              <a:t>[확인] 수정 뒤 첫 검증 명령을 다시 실행한다.</a:t>
             </a:r>
           </a:p>
           <a:p>
@@ -2122,7 +2105,7 @@
           </a:p>
           <a:p>
             <a:r>
-              <a:t>[오류] 오류가 나면 현재 폴더, source, 파일 경로를 먼저 확인한다.</a:t>
+              <a:t>[오류] 슬라이드의 두 대표 오류를 먼저 사용한다.</a:t>
             </a:r>
           </a:p>
         </p:txBody>
@@ -2148,6 +2131,296 @@
 </file>
 
 <file path=ppt/notesSlides/notesSlide26.xml><?xml version="1.0" encoding="utf-8"?>
+<p:notes xmlns:a="http://schemas.openxmlformats.org/drawingml/2006/main" xmlns:p="http://schemas.openxmlformats.org/presentationml/2006/main" xmlns:r="http://schemas.openxmlformats.org/officeDocument/2006/relationships">
+  <p:cSld>
+    <p:spTree>
+      <p:nvGrpSpPr>
+        <p:cNvPr id="1" name=""/>
+        <p:cNvGrpSpPr/>
+        <p:nvPr/>
+      </p:nvGrpSpPr>
+      <p:grpSpPr>
+        <a:xfrm>
+          <a:off x="0" y="0"/>
+          <a:ext cx="0" cy="0"/>
+          <a:chOff x="0" y="0"/>
+          <a:chExt cx="0" cy="0"/>
+        </a:xfrm>
+      </p:grpSpPr>
+      <p:sp>
+        <p:nvSpPr>
+          <p:cNvPr id="2" name="Slide Image Placeholder 1"/>
+          <p:cNvSpPr>
+            <a:spLocks noGrp="1"/>
+          </p:cNvSpPr>
+          <p:nvPr>
+            <p:ph type="sldImg" idx="2"/>
+          </p:nvPr>
+        </p:nvSpPr>
+        <p:spPr/>
+      </p:sp>
+      <p:sp>
+        <p:nvSpPr>
+          <p:cNvPr id="3" name="Notes Placeholder 2"/>
+          <p:cNvSpPr>
+            <a:spLocks noGrp="1"/>
+          </p:cNvSpPr>
+          <p:nvPr>
+            <p:ph type="body" idx="3" sz="quarter"/>
+          </p:nvPr>
+        </p:nvSpPr>
+        <p:spPr/>
+        <p:txBody>
+          <a:bodyPr/>
+          <a:lstStyle/>
+          <a:p>
+            <a:r>
+              <a:t>[설명] Complete는 정답 복사본이 아니라 막혔을 때 비교·복구하는 안전망이다.</a:t>
+            </a:r>
+          </a:p>
+          <a:p>
+            <a:r>
+              <a:t>[실행] cd ~/ros2_curri</a:t>
+            </a:r>
+          </a:p>
+          <a:p>
+            <a:r>
+              <a:t>diff -ru my_agv_ws/src blocks/B_robot_build/M06_xacro_modularization/complete/agv_ws/src || true</a:t>
+            </a:r>
+          </a:p>
+          <a:p>
+            <a:r>
+              <a:t>cp -a my_agv_ws/src my_agv_ws/src_before_M06</a:t>
+            </a:r>
+          </a:p>
+          <a:p>
+            <a:r>
+              <a:t>cp -a blocks/B_robot_build/M06_xacro_modularization/complete/agv_ws/src/. my_agv_ws/src/</a:t>
+            </a:r>
+          </a:p>
+          <a:p>
+            <a:r>
+              <a:t>cd my_agv_ws &amp;&amp; colcon build --symlink-install &amp;&amp; source install/setup.bash</a:t>
+            </a:r>
+          </a:p>
+          <a:p>
+            <a:r>
+              <a:t>[확인] diff에서 내 파일과 Complete의 차이를 설명할 수 있다.</a:t>
+            </a:r>
+          </a:p>
+          <a:p>
+            <a:r>
+              <a:t>[멈춤] 교육생이 현재 체크포인트를 통과할 때까지 기다린다.</a:t>
+            </a:r>
+          </a:p>
+          <a:p>
+            <a:r>
+              <a:t>[오류] 오류가 나면 현재 폴더, source, 파일 경로를 먼저 확인한다.</a:t>
+            </a:r>
+          </a:p>
+        </p:txBody>
+      </p:sp>
+      <p:sp>
+        <p:nvSpPr>
+          <p:cNvPr id="4" name="Slide Number Placeholder 3"/>
+          <p:cNvSpPr>
+            <a:spLocks noGrp="1"/>
+          </p:cNvSpPr>
+          <p:nvPr>
+            <p:ph type="sldNum" idx="5" sz="quarter"/>
+          </p:nvPr>
+        </p:nvSpPr>
+        <p:spPr/>
+      </p:sp>
+    </p:spTree>
+  </p:cSld>
+  <p:clrMapOvr>
+    <a:masterClrMapping/>
+  </p:clrMapOvr>
+</p:notes>
+</file>
+
+<file path=ppt/notesSlides/notesSlide27.xml><?xml version="1.0" encoding="utf-8"?>
+<p:notes xmlns:a="http://schemas.openxmlformats.org/drawingml/2006/main" xmlns:p="http://schemas.openxmlformats.org/presentationml/2006/main" xmlns:r="http://schemas.openxmlformats.org/officeDocument/2006/relationships">
+  <p:cSld>
+    <p:spTree>
+      <p:nvGrpSpPr>
+        <p:cNvPr id="1" name=""/>
+        <p:cNvGrpSpPr/>
+        <p:nvPr/>
+      </p:nvGrpSpPr>
+      <p:grpSpPr>
+        <a:xfrm>
+          <a:off x="0" y="0"/>
+          <a:ext cx="0" cy="0"/>
+          <a:chOff x="0" y="0"/>
+          <a:chExt cx="0" cy="0"/>
+        </a:xfrm>
+      </p:grpSpPr>
+      <p:sp>
+        <p:nvSpPr>
+          <p:cNvPr id="2" name="Slide Image Placeholder 1"/>
+          <p:cNvSpPr>
+            <a:spLocks noGrp="1"/>
+          </p:cNvSpPr>
+          <p:nvPr>
+            <p:ph type="sldImg" idx="2"/>
+          </p:nvPr>
+        </p:nvSpPr>
+        <p:spPr/>
+      </p:sp>
+      <p:sp>
+        <p:nvSpPr>
+          <p:cNvPr id="3" name="Notes Placeholder 2"/>
+          <p:cNvSpPr>
+            <a:spLocks noGrp="1"/>
+          </p:cNvSpPr>
+          <p:nvPr>
+            <p:ph type="body" idx="3" sz="quarter"/>
+          </p:nvPr>
+        </p:nvSpPr>
+        <p:spPr/>
+        <p:txBody>
+          <a:bodyPr/>
+          <a:lstStyle/>
+          <a:p>
+            <a:r>
+              <a:t>[설명] 교육생이 직접 한 값만 바꿔 원인과 결과를 연결하게 한다.</a:t>
+            </a:r>
+          </a:p>
+          <a:p>
+            <a:r>
+              <a:t>[실행] 슬라이드의 명령 또는 파일 작성 단계를 진행한다.</a:t>
+            </a:r>
+          </a:p>
+          <a:p>
+            <a:r>
+              <a:t>[확인] 원래 값과 변경 값을 모두 기록한다.</a:t>
+            </a:r>
+          </a:p>
+          <a:p>
+            <a:r>
+              <a:t>[멈춤] 교육생이 현재 체크포인트를 통과할 때까지 기다린다.</a:t>
+            </a:r>
+          </a:p>
+          <a:p>
+            <a:r>
+              <a:t>[오류] 오류가 나면 현재 폴더, source, 파일 경로를 먼저 확인한다.</a:t>
+            </a:r>
+          </a:p>
+        </p:txBody>
+      </p:sp>
+      <p:sp>
+        <p:nvSpPr>
+          <p:cNvPr id="4" name="Slide Number Placeholder 3"/>
+          <p:cNvSpPr>
+            <a:spLocks noGrp="1"/>
+          </p:cNvSpPr>
+          <p:nvPr>
+            <p:ph type="sldNum" idx="5" sz="quarter"/>
+          </p:nvPr>
+        </p:nvSpPr>
+        <p:spPr/>
+      </p:sp>
+    </p:spTree>
+  </p:cSld>
+  <p:clrMapOvr>
+    <a:masterClrMapping/>
+  </p:clrMapOvr>
+</p:notes>
+</file>
+
+<file path=ppt/notesSlides/notesSlide28.xml><?xml version="1.0" encoding="utf-8"?>
+<p:notes xmlns:a="http://schemas.openxmlformats.org/drawingml/2006/main" xmlns:p="http://schemas.openxmlformats.org/presentationml/2006/main" xmlns:r="http://schemas.openxmlformats.org/officeDocument/2006/relationships">
+  <p:cSld>
+    <p:spTree>
+      <p:nvGrpSpPr>
+        <p:cNvPr id="1" name=""/>
+        <p:cNvGrpSpPr/>
+        <p:nvPr/>
+      </p:nvGrpSpPr>
+      <p:grpSpPr>
+        <a:xfrm>
+          <a:off x="0" y="0"/>
+          <a:ext cx="0" cy="0"/>
+          <a:chOff x="0" y="0"/>
+          <a:chExt cx="0" cy="0"/>
+        </a:xfrm>
+      </p:grpSpPr>
+      <p:sp>
+        <p:nvSpPr>
+          <p:cNvPr id="2" name="Slide Image Placeholder 1"/>
+          <p:cNvSpPr>
+            <a:spLocks noGrp="1"/>
+          </p:cNvSpPr>
+          <p:nvPr>
+            <p:ph type="sldImg" idx="2"/>
+          </p:nvPr>
+        </p:nvSpPr>
+        <p:spPr/>
+      </p:sp>
+      <p:sp>
+        <p:nvSpPr>
+          <p:cNvPr id="3" name="Notes Placeholder 2"/>
+          <p:cNvSpPr>
+            <a:spLocks noGrp="1"/>
+          </p:cNvSpPr>
+          <p:nvPr>
+            <p:ph type="body" idx="3" sz="quarter"/>
+          </p:nvPr>
+        </p:nvSpPr>
+        <p:spPr/>
+        <p:txBody>
+          <a:bodyPr/>
+          <a:lstStyle/>
+          <a:p>
+            <a:r>
+              <a:t>[설명] 교육생이 자신의 workspace·캡처·로그를 저장했는지 확인하고 다음 모듈의 시작 상태를 읽는다.</a:t>
+            </a:r>
+          </a:p>
+          <a:p>
+            <a:r>
+              <a:t>[실행] 슬라이드의 명령 또는 파일 작성 단계를 진행한다.</a:t>
+            </a:r>
+          </a:p>
+          <a:p>
+            <a:r>
+              <a:t>[확인] M07 Gazebo 물리 시작 조건을 말할 수 있다.</a:t>
+            </a:r>
+          </a:p>
+          <a:p>
+            <a:r>
+              <a:t>[멈춤] 교육생이 현재 체크포인트를 통과할 때까지 기다린다.</a:t>
+            </a:r>
+          </a:p>
+          <a:p>
+            <a:r>
+              <a:t>[오류] 오류가 나면 현재 폴더, source, 파일 경로를 먼저 확인한다.</a:t>
+            </a:r>
+          </a:p>
+        </p:txBody>
+      </p:sp>
+      <p:sp>
+        <p:nvSpPr>
+          <p:cNvPr id="4" name="Slide Number Placeholder 3"/>
+          <p:cNvSpPr>
+            <a:spLocks noGrp="1"/>
+          </p:cNvSpPr>
+          <p:nvPr>
+            <p:ph type="sldNum" idx="5" sz="quarter"/>
+          </p:nvPr>
+        </p:nvSpPr>
+        <p:spPr/>
+      </p:sp>
+    </p:spTree>
+  </p:cSld>
+  <p:clrMapOvr>
+    <a:masterClrMapping/>
+  </p:clrMapOvr>
+</p:notes>
+</file>
+
+<file path=ppt/notesSlides/notesSlide29.xml><?xml version="1.0" encoding="utf-8"?>
 <p:notes xmlns:a="http://schemas.openxmlformats.org/drawingml/2006/main" xmlns:p="http://schemas.openxmlformats.org/presentationml/2006/main" xmlns:r="http://schemas.openxmlformats.org/officeDocument/2006/relationships">
   <p:cSld>
     <p:spTree>
@@ -7506,7 +7779,7 @@
               </a:defRPr>
             </a:pPr>
             <a:r>
-              <a:t>구현 1/1: 코드 입력 (1/5)</a:t>
+              <a:t>구현 1/1: 코드 읽기 (1/3)</a:t>
             </a:r>
           </a:p>
         </p:txBody>
@@ -7545,7 +7818,7 @@
               </a:defRPr>
             </a:pPr>
             <a:r>
-              <a:t>~/ros2_curri/my_agv_ws/src/agv_description/curriculum_stages/M06/agv.urdf.xacro</a:t>
+              <a:t>짧은 실제 코드 조각을 먼저 읽고, 다음 슬라이드에서 같은 코드를 직접 입력합니다.</a:t>
             </a:r>
           </a:p>
         </p:txBody>
@@ -7681,7 +7954,7 @@
               </a:defRPr>
             </a:pPr>
             <a:r>
-              <a:t>현재 단계 파일 1/1 · 입력 1/5    |    현재 폴더 ~/ros2_curri/my_agv_ws    |    현재 터미널</a:t>
+              <a:t>현재 단계 코드 해설 1/1    |    현재 폴더 ~/ros2_curri/my_agv_ws    |    현재 터미널</a:t>
             </a:r>
           </a:p>
         </p:txBody>
@@ -7694,111 +7967,88 @@
         </p:nvSpPr>
         <p:spPr>
           <a:xfrm>
-            <a:off x="658368" y="1609344"/>
-            <a:ext cx="10972800" cy="384048"/>
-          </a:xfrm>
-          <a:prstGeom prst="rect">
-            <a:avLst/>
-          </a:prstGeom>
-          <a:noFill/>
-        </p:spPr>
-        <p:txBody>
-          <a:bodyPr wrap="square" lIns="73152" rIns="73152" tIns="36576" bIns="36576">
-            <a:spAutoFit/>
-          </a:bodyPr>
-          <a:lstStyle/>
-          <a:p>
-            <a:pPr algn="l">
-              <a:spcAft>
-                <a:spcPts val="0"/>
-              </a:spcAft>
-              <a:defRPr sz="1400" b="1">
-                <a:solidFill>
-                  <a:srgbClr val="122C4E"/>
-                </a:solidFill>
-                <a:latin typeface="Noto Sans CJK KR"/>
-              </a:defRPr>
-            </a:pPr>
-            <a:r>
-              <a:t>이 블록이 하는 일: 파일의 root와 첫 model/link를 입력합니다. 태그 여닫는 순서를 그대로 유지합니다.</a:t>
-            </a:r>
-          </a:p>
-        </p:txBody>
-      </p:sp>
-      <p:sp>
-        <p:nvSpPr>
-          <p:cNvPr id="8" name="Rectangle 7"/>
+            <a:off x="694944" y="1618488"/>
+            <a:ext cx="10789920" cy="274320"/>
+          </a:xfrm>
+          <a:prstGeom prst="rect">
+            <a:avLst/>
+          </a:prstGeom>
+          <a:noFill/>
+        </p:spPr>
+        <p:txBody>
+          <a:bodyPr wrap="square" lIns="73152" rIns="73152" tIns="36576" bIns="36576">
+            <a:spAutoFit/>
+          </a:bodyPr>
+          <a:lstStyle/>
+          <a:p>
+            <a:pPr algn="l">
+              <a:spcAft>
+                <a:spcPts val="0"/>
+              </a:spcAft>
+              <a:defRPr sz="1300" b="1">
+                <a:solidFill>
+                  <a:srgbClr val="225B9B"/>
+                </a:solidFill>
+                <a:latin typeface="DejaVu Sans Mono"/>
+              </a:defRPr>
+            </a:pPr>
+            <a:r>
+              <a:t>~/ros2_curri/my_agv_ws/src/agv_description/curriculum_stages/M06/agv.urdf.xacro</a:t>
+            </a:r>
+          </a:p>
+        </p:txBody>
+      </p:sp>
+      <p:sp>
+        <p:nvSpPr>
+          <p:cNvPr id="8" name="TextBox 7"/>
+          <p:cNvSpPr txBox="1"/>
+          <p:nvPr/>
+        </p:nvSpPr>
+        <p:spPr>
+          <a:xfrm>
+            <a:off x="694944" y="1938528"/>
+            <a:ext cx="10789920" cy="274320"/>
+          </a:xfrm>
+          <a:prstGeom prst="rect">
+            <a:avLst/>
+          </a:prstGeom>
+          <a:noFill/>
+        </p:spPr>
+        <p:txBody>
+          <a:bodyPr wrap="square" lIns="73152" rIns="73152" tIns="36576" bIns="36576">
+            <a:spAutoFit/>
+          </a:bodyPr>
+          <a:lstStyle/>
+          <a:p>
+            <a:pPr algn="ctr">
+              <a:spcAft>
+                <a:spcPts val="0"/>
+              </a:spcAft>
+              <a:defRPr sz="1500" b="1">
+                <a:solidFill>
+                  <a:srgbClr val="DB7E22"/>
+                </a:solidFill>
+                <a:latin typeface="Noto Sans CJK KR"/>
+              </a:defRPr>
+            </a:pPr>
+            <a:r>
+              <a:t>말로 먼저 답해 보세요: 이 줄은 무엇을 만들고, 실행하면 어디에서 확인할 수 있을까요?</a:t>
+            </a:r>
+          </a:p>
+        </p:txBody>
+      </p:sp>
+      <p:sp>
+        <p:nvSpPr>
+          <p:cNvPr id="9" name="Rounded Rectangle 8"/>
           <p:cNvSpPr/>
           <p:nvPr/>
         </p:nvSpPr>
         <p:spPr>
           <a:xfrm>
-            <a:off x="658368" y="1956816"/>
-            <a:ext cx="10972800" cy="603504"/>
-          </a:xfrm>
-          <a:prstGeom prst="rect">
-            <a:avLst/>
-          </a:prstGeom>
-          <a:solidFill>
-            <a:srgbClr val="F4F7FB"/>
-          </a:solidFill>
-          <a:ln>
-            <a:solidFill>
-              <a:srgbClr val="F4F7FB"/>
-            </a:solidFill>
-          </a:ln>
-        </p:spPr>
-        <p:style>
-          <a:lnRef idx="1">
-            <a:schemeClr val="accent1"/>
-          </a:lnRef>
-          <a:fillRef idx="3">
-            <a:schemeClr val="accent1"/>
-          </a:fillRef>
-          <a:effectRef idx="2">
-            <a:schemeClr val="accent1"/>
-          </a:effectRef>
-          <a:fontRef idx="minor">
-            <a:schemeClr val="lt1"/>
-          </a:fontRef>
-        </p:style>
-        <p:txBody>
-          <a:bodyPr rtlCol="0" anchor="ctr" wrap="square" lIns="73152" rIns="73152" tIns="36576" bIns="36576"/>
-          <a:lstStyle/>
-          <a:p>
-            <a:pPr algn="l">
-              <a:spcAft>
-                <a:spcPts val="0"/>
-              </a:spcAft>
-              <a:defRPr sz="1300" b="0">
-                <a:solidFill>
-                  <a:srgbClr val="122C4E"/>
-                </a:solidFill>
-                <a:latin typeface="DejaVu Sans Mono"/>
-              </a:defRPr>
-            </a:pPr>
-            <a:r>
-              <a:t>현재 열린 파일: ~/ros2_curri/my_agv_ws/src/agv_description/curriculum_stages/M06/agv.urdf.xacro</a:t>
-            </a:r>
-            <a:br/>
-            <a:r>
-              <a:t>아래 코드만 입력 → Ctrl+O → Enter로 저장 → 다음 블록으로 이동</a:t>
-            </a:r>
-          </a:p>
-        </p:txBody>
-      </p:sp>
-      <p:sp>
-        <p:nvSpPr>
-          <p:cNvPr id="9" name="Rectangle 8"/>
-          <p:cNvSpPr/>
-          <p:nvPr/>
-        </p:nvSpPr>
-        <p:spPr>
-          <a:xfrm>
-            <a:off x="658368" y="2706624"/>
-            <a:ext cx="10972800" cy="3364992"/>
-          </a:xfrm>
-          <a:prstGeom prst="rect">
+            <a:off x="658368" y="2359152"/>
+            <a:ext cx="4160520" cy="1417320"/>
+          </a:xfrm>
+          <a:prstGeom prst="roundRect">
             <a:avLst/>
           </a:prstGeom>
           <a:solidFill>
@@ -7825,14 +8075,14 @@
           </a:fontRef>
         </p:style>
         <p:txBody>
-          <a:bodyPr rtlCol="0" anchor="ctr" wrap="square" lIns="164592" rIns="164592" tIns="109728" bIns="36576"/>
-          <a:lstStyle/>
-          <a:p>
-            <a:pPr algn="l">
-              <a:spcAft>
-                <a:spcPts val="0"/>
-              </a:spcAft>
-              <a:defRPr sz="1400" b="0">
+          <a:bodyPr rtlCol="0" anchor="ctr" wrap="square" lIns="73152" rIns="73152" tIns="36576" bIns="36576"/>
+          <a:lstStyle/>
+          <a:p>
+            <a:pPr algn="l">
+              <a:spcAft>
+                <a:spcPts val="0"/>
+              </a:spcAft>
+              <a:defRPr sz="1300" b="0">
                 <a:solidFill>
                   <a:srgbClr val="FFFFFF"/>
                 </a:solidFill>
@@ -7840,82 +8090,424 @@
               </a:defRPr>
             </a:pPr>
             <a:r>
-              <a:t>&lt;?xml version="1.0" ?&gt;</a:t>
+              <a:t>&lt;robot xmlns:xacro="http://www.ros.org/wiki/xacro"</a:t>
             </a:r>
             <a:br/>
             <a:r>
-              <a:t>&lt;robot xmlns:xacro="http://www.ros.org/wiki/xacro" name="agv_m06"&gt;</a:t>
-            </a:r>
-            <a:br/>
-            <a:r>
-              <a:t>  </a:t>
-            </a:r>
-            <a:br/>
-            <a:r>
-              <a:t>  </a:t>
-            </a:r>
-            <a:br/>
-            <a:r>
-              <a:t>  &lt;xacro:property name="wheel_radius" value="0.08"/&gt;</a:t>
-            </a:r>
-            <a:br/>
-            <a:r>
-              <a:t>  </a:t>
-            </a:r>
-            <a:br/>
-            <a:r>
-              <a:t>  </a:t>
-            </a:r>
-            <a:br/>
-            <a:r>
-              <a:t>  &lt;xacro:property name="half_track" value="0.19"/&gt;</a:t>
-            </a:r>
-            <a:br/>
-            <a:r>
-              <a:t>  </a:t>
-            </a:r>
-            <a:br/>
-            <a:r>
-              <a:t>  </a:t>
-            </a:r>
-            <a:br/>
-            <a:r>
-              <a:t>  &lt;xacro:macro name="wheel" params="side y"&gt;</a:t>
-            </a:r>
-            <a:br/>
-            <a:r>
-              <a:t>    </a:t>
-            </a:r>
-          </a:p>
-        </p:txBody>
-      </p:sp>
-      <p:sp>
-        <p:nvSpPr>
-          <p:cNvPr id="10" name="TextBox 9"/>
-          <p:cNvSpPr txBox="1"/>
-          <p:nvPr/>
-        </p:nvSpPr>
-        <p:spPr>
-          <a:xfrm>
-            <a:off x="749808" y="6181344"/>
-            <a:ext cx="10789920" cy="201168"/>
-          </a:xfrm>
-          <a:prstGeom prst="rect">
-            <a:avLst/>
-          </a:prstGeom>
-          <a:noFill/>
-        </p:spPr>
-        <p:txBody>
-          <a:bodyPr wrap="square" lIns="73152" rIns="73152" tIns="36576" bIns="36576">
-            <a:spAutoFit/>
-          </a:bodyPr>
-          <a:lstStyle/>
-          <a:p>
-            <a:pPr algn="l">
-              <a:spcAft>
-                <a:spcPts val="0"/>
-              </a:spcAft>
-              <a:defRPr sz="1000" b="0">
+              <a:t>name="agv_m06"&gt;</a:t>
+            </a:r>
+          </a:p>
+        </p:txBody>
+      </p:sp>
+      <p:sp>
+        <p:nvSpPr>
+          <p:cNvPr id="10" name="Rounded Rectangle 9"/>
+          <p:cNvSpPr/>
+          <p:nvPr/>
+        </p:nvSpPr>
+        <p:spPr>
+          <a:xfrm>
+            <a:off x="5029200" y="2359152"/>
+            <a:ext cx="6537960" cy="1417320"/>
+          </a:xfrm>
+          <a:prstGeom prst="roundRect">
+            <a:avLst/>
+          </a:prstGeom>
+          <a:solidFill>
+            <a:srgbClr val="F4F7FB"/>
+          </a:solidFill>
+          <a:ln>
+            <a:solidFill>
+              <a:srgbClr val="225B9B"/>
+            </a:solidFill>
+          </a:ln>
+        </p:spPr>
+        <p:style>
+          <a:lnRef idx="1">
+            <a:schemeClr val="accent1"/>
+          </a:lnRef>
+          <a:fillRef idx="3">
+            <a:schemeClr val="accent1"/>
+          </a:fillRef>
+          <a:effectRef idx="2">
+            <a:schemeClr val="accent1"/>
+          </a:effectRef>
+          <a:fontRef idx="minor">
+            <a:schemeClr val="lt1"/>
+          </a:fontRef>
+        </p:style>
+        <p:txBody>
+          <a:bodyPr rtlCol="0" anchor="ctr"/>
+          <a:lstStyle/>
+          <a:p>
+            <a:pPr algn="ctr"/>
+          </a:p>
+        </p:txBody>
+      </p:sp>
+      <p:sp>
+        <p:nvSpPr>
+          <p:cNvPr id="11" name="TextBox 10"/>
+          <p:cNvSpPr txBox="1"/>
+          <p:nvPr/>
+        </p:nvSpPr>
+        <p:spPr>
+          <a:xfrm>
+            <a:off x="5239512" y="2468880"/>
+            <a:ext cx="594360" cy="219456"/>
+          </a:xfrm>
+          <a:prstGeom prst="rect">
+            <a:avLst/>
+          </a:prstGeom>
+          <a:noFill/>
+        </p:spPr>
+        <p:txBody>
+          <a:bodyPr wrap="square" lIns="73152" rIns="73152" tIns="36576" bIns="36576">
+            <a:spAutoFit/>
+          </a:bodyPr>
+          <a:lstStyle/>
+          <a:p>
+            <a:pPr algn="l">
+              <a:spcAft>
+                <a:spcPts val="0"/>
+              </a:spcAft>
+              <a:defRPr sz="1400" b="1">
+                <a:solidFill>
+                  <a:srgbClr val="225B9B"/>
+                </a:solidFill>
+                <a:latin typeface="Noto Sans CJK KR"/>
+              </a:defRPr>
+            </a:pPr>
+            <a:r>
+              <a:t>1.</a:t>
+            </a:r>
+          </a:p>
+        </p:txBody>
+      </p:sp>
+      <p:sp>
+        <p:nvSpPr>
+          <p:cNvPr id="12" name="TextBox 11"/>
+          <p:cNvSpPr txBox="1"/>
+          <p:nvPr/>
+        </p:nvSpPr>
+        <p:spPr>
+          <a:xfrm>
+            <a:off x="5596128" y="2450592"/>
+            <a:ext cx="5696712" cy="493776"/>
+          </a:xfrm>
+          <a:prstGeom prst="rect">
+            <a:avLst/>
+          </a:prstGeom>
+          <a:noFill/>
+        </p:spPr>
+        <p:txBody>
+          <a:bodyPr wrap="square" lIns="73152" rIns="73152" tIns="36576" bIns="36576">
+            <a:spAutoFit/>
+          </a:bodyPr>
+          <a:lstStyle/>
+          <a:p>
+            <a:pPr algn="l">
+              <a:spcAft>
+                <a:spcPts val="0"/>
+              </a:spcAft>
+              <a:defRPr sz="1300" b="0">
+                <a:solidFill>
+                  <a:srgbClr val="122C4E"/>
+                </a:solidFill>
+                <a:latin typeface="Noto Sans CJK KR"/>
+              </a:defRPr>
+            </a:pPr>
+            <a:r>
+              <a:t>뜻: 로봇 model 또는 Gazebo world의 가장 바깥 이름과 범위를 선언합니다.</a:t>
+            </a:r>
+          </a:p>
+        </p:txBody>
+      </p:sp>
+      <p:sp>
+        <p:nvSpPr>
+          <p:cNvPr id="13" name="TextBox 12"/>
+          <p:cNvSpPr txBox="1"/>
+          <p:nvPr/>
+        </p:nvSpPr>
+        <p:spPr>
+          <a:xfrm>
+            <a:off x="5596128" y="3108960"/>
+            <a:ext cx="5696712" cy="457200"/>
+          </a:xfrm>
+          <a:prstGeom prst="rect">
+            <a:avLst/>
+          </a:prstGeom>
+          <a:noFill/>
+        </p:spPr>
+        <p:txBody>
+          <a:bodyPr wrap="square" lIns="73152" rIns="73152" tIns="36576" bIns="36576">
+            <a:spAutoFit/>
+          </a:bodyPr>
+          <a:lstStyle/>
+          <a:p>
+            <a:pPr algn="l">
+              <a:spcAft>
+                <a:spcPts val="0"/>
+              </a:spcAft>
+              <a:defRPr sz="1200" b="0">
+                <a:solidFill>
+                  <a:srgbClr val="2A8B5A"/>
+                </a:solidFill>
+                <a:latin typeface="Noto Sans CJK KR"/>
+              </a:defRPr>
+            </a:pPr>
+            <a:r>
+              <a:t>실행에서: 문법 검사와 Gazebo/RViz가 이 구조부터 읽기 시작합니다.</a:t>
+            </a:r>
+          </a:p>
+        </p:txBody>
+      </p:sp>
+      <p:sp>
+        <p:nvSpPr>
+          <p:cNvPr id="14" name="Rounded Rectangle 13"/>
+          <p:cNvSpPr/>
+          <p:nvPr/>
+        </p:nvSpPr>
+        <p:spPr>
+          <a:xfrm>
+            <a:off x="658368" y="4078224"/>
+            <a:ext cx="4160520" cy="1417320"/>
+          </a:xfrm>
+          <a:prstGeom prst="roundRect">
+            <a:avLst/>
+          </a:prstGeom>
+          <a:solidFill>
+            <a:srgbClr val="1D232D"/>
+          </a:solidFill>
+          <a:ln>
+            <a:solidFill>
+              <a:srgbClr val="1D232D"/>
+            </a:solidFill>
+          </a:ln>
+        </p:spPr>
+        <p:style>
+          <a:lnRef idx="1">
+            <a:schemeClr val="accent1"/>
+          </a:lnRef>
+          <a:fillRef idx="3">
+            <a:schemeClr val="accent1"/>
+          </a:fillRef>
+          <a:effectRef idx="2">
+            <a:schemeClr val="accent1"/>
+          </a:effectRef>
+          <a:fontRef idx="minor">
+            <a:schemeClr val="lt1"/>
+          </a:fontRef>
+        </p:style>
+        <p:txBody>
+          <a:bodyPr rtlCol="0" anchor="ctr" wrap="square" lIns="73152" rIns="73152" tIns="36576" bIns="36576"/>
+          <a:lstStyle/>
+          <a:p>
+            <a:pPr algn="l">
+              <a:spcAft>
+                <a:spcPts val="0"/>
+              </a:spcAft>
+              <a:defRPr sz="1300" b="0">
+                <a:solidFill>
+                  <a:srgbClr val="FFFFFF"/>
+                </a:solidFill>
+                <a:latin typeface="DejaVu Sans Mono"/>
+              </a:defRPr>
+            </a:pPr>
+            <a:r>
+              <a:t>&lt;xacro:property name="wheel_radius" value="0.08"/&gt;</a:t>
+            </a:r>
+          </a:p>
+        </p:txBody>
+      </p:sp>
+      <p:sp>
+        <p:nvSpPr>
+          <p:cNvPr id="15" name="Rounded Rectangle 14"/>
+          <p:cNvSpPr/>
+          <p:nvPr/>
+        </p:nvSpPr>
+        <p:spPr>
+          <a:xfrm>
+            <a:off x="5029200" y="4078224"/>
+            <a:ext cx="6537960" cy="1417320"/>
+          </a:xfrm>
+          <a:prstGeom prst="roundRect">
+            <a:avLst/>
+          </a:prstGeom>
+          <a:solidFill>
+            <a:srgbClr val="F4F7FB"/>
+          </a:solidFill>
+          <a:ln>
+            <a:solidFill>
+              <a:srgbClr val="225B9B"/>
+            </a:solidFill>
+          </a:ln>
+        </p:spPr>
+        <p:style>
+          <a:lnRef idx="1">
+            <a:schemeClr val="accent1"/>
+          </a:lnRef>
+          <a:fillRef idx="3">
+            <a:schemeClr val="accent1"/>
+          </a:fillRef>
+          <a:effectRef idx="2">
+            <a:schemeClr val="accent1"/>
+          </a:effectRef>
+          <a:fontRef idx="minor">
+            <a:schemeClr val="lt1"/>
+          </a:fontRef>
+        </p:style>
+        <p:txBody>
+          <a:bodyPr rtlCol="0" anchor="ctr"/>
+          <a:lstStyle/>
+          <a:p>
+            <a:pPr algn="ctr"/>
+          </a:p>
+        </p:txBody>
+      </p:sp>
+      <p:sp>
+        <p:nvSpPr>
+          <p:cNvPr id="16" name="TextBox 15"/>
+          <p:cNvSpPr txBox="1"/>
+          <p:nvPr/>
+        </p:nvSpPr>
+        <p:spPr>
+          <a:xfrm>
+            <a:off x="5239512" y="4187952"/>
+            <a:ext cx="594360" cy="219456"/>
+          </a:xfrm>
+          <a:prstGeom prst="rect">
+            <a:avLst/>
+          </a:prstGeom>
+          <a:noFill/>
+        </p:spPr>
+        <p:txBody>
+          <a:bodyPr wrap="square" lIns="73152" rIns="73152" tIns="36576" bIns="36576">
+            <a:spAutoFit/>
+          </a:bodyPr>
+          <a:lstStyle/>
+          <a:p>
+            <a:pPr algn="l">
+              <a:spcAft>
+                <a:spcPts val="0"/>
+              </a:spcAft>
+              <a:defRPr sz="1400" b="1">
+                <a:solidFill>
+                  <a:srgbClr val="225B9B"/>
+                </a:solidFill>
+                <a:latin typeface="Noto Sans CJK KR"/>
+              </a:defRPr>
+            </a:pPr>
+            <a:r>
+              <a:t>2.</a:t>
+            </a:r>
+          </a:p>
+        </p:txBody>
+      </p:sp>
+      <p:sp>
+        <p:nvSpPr>
+          <p:cNvPr id="17" name="TextBox 16"/>
+          <p:cNvSpPr txBox="1"/>
+          <p:nvPr/>
+        </p:nvSpPr>
+        <p:spPr>
+          <a:xfrm>
+            <a:off x="5596128" y="4169663"/>
+            <a:ext cx="5696712" cy="493776"/>
+          </a:xfrm>
+          <a:prstGeom prst="rect">
+            <a:avLst/>
+          </a:prstGeom>
+          <a:noFill/>
+        </p:spPr>
+        <p:txBody>
+          <a:bodyPr wrap="square" lIns="73152" rIns="73152" tIns="36576" bIns="36576">
+            <a:spAutoFit/>
+          </a:bodyPr>
+          <a:lstStyle/>
+          <a:p>
+            <a:pPr algn="l">
+              <a:spcAft>
+                <a:spcPts val="0"/>
+              </a:spcAft>
+              <a:defRPr sz="1300" b="0">
+                <a:solidFill>
+                  <a:srgbClr val="122C4E"/>
+                </a:solidFill>
+                <a:latin typeface="Noto Sans CJK KR"/>
+              </a:defRPr>
+            </a:pPr>
+            <a:r>
+              <a:t>뜻: 여러 위치에서 함께 쓸 치수·질량 같은 값을 한 번 정의합니다.</a:t>
+            </a:r>
+          </a:p>
+        </p:txBody>
+      </p:sp>
+      <p:sp>
+        <p:nvSpPr>
+          <p:cNvPr id="18" name="TextBox 17"/>
+          <p:cNvSpPr txBox="1"/>
+          <p:nvPr/>
+        </p:nvSpPr>
+        <p:spPr>
+          <a:xfrm>
+            <a:off x="5596128" y="4828032"/>
+            <a:ext cx="5696712" cy="457200"/>
+          </a:xfrm>
+          <a:prstGeom prst="rect">
+            <a:avLst/>
+          </a:prstGeom>
+          <a:noFill/>
+        </p:spPr>
+        <p:txBody>
+          <a:bodyPr wrap="square" lIns="73152" rIns="73152" tIns="36576" bIns="36576">
+            <a:spAutoFit/>
+          </a:bodyPr>
+          <a:lstStyle/>
+          <a:p>
+            <a:pPr algn="l">
+              <a:spcAft>
+                <a:spcPts val="0"/>
+              </a:spcAft>
+              <a:defRPr sz="1200" b="0">
+                <a:solidFill>
+                  <a:srgbClr val="2A8B5A"/>
+                </a:solidFill>
+                <a:latin typeface="Noto Sans CJK KR"/>
+              </a:defRPr>
+            </a:pPr>
+            <a:r>
+              <a:t>실행에서: 값 하나를 바꾸면 그 property를 쓰는 구조가 함께 바뀝니다.</a:t>
+            </a:r>
+          </a:p>
+        </p:txBody>
+      </p:sp>
+      <p:sp>
+        <p:nvSpPr>
+          <p:cNvPr id="19" name="TextBox 18"/>
+          <p:cNvSpPr txBox="1"/>
+          <p:nvPr/>
+        </p:nvSpPr>
+        <p:spPr>
+          <a:xfrm>
+            <a:off x="749808" y="6199632"/>
+            <a:ext cx="10698480" cy="182880"/>
+          </a:xfrm>
+          <a:prstGeom prst="rect">
+            <a:avLst/>
+          </a:prstGeom>
+          <a:noFill/>
+        </p:spPr>
+        <p:txBody>
+          <a:bodyPr wrap="square" lIns="73152" rIns="73152" tIns="36576" bIns="36576">
+            <a:spAutoFit/>
+          </a:bodyPr>
+          <a:lstStyle/>
+          <a:p>
+            <a:pPr algn="ctr">
+              <a:spcAft>
+                <a:spcPts val="0"/>
+              </a:spcAft>
+              <a:defRPr sz="1100" b="0">
                 <a:solidFill>
                   <a:srgbClr val="5C6672"/>
                 </a:solidFill>
@@ -7923,7 +8515,7 @@
               </a:defRPr>
             </a:pPr>
             <a:r>
-              <a:t>입력 1/5 · 이 파일의 다음 코드 블록이 바로 다음 슬라이드에 이어집니다.</a:t>
+              <a:t>다음 코드 입력 슬라이드에서 이 줄을 발견하면, 방금 설명한 ‘뜻’과 ‘실행에서 보이는 변화’를 다시 말해 봅니다.</a:t>
             </a:r>
           </a:p>
         </p:txBody>
@@ -7980,7 +8572,7 @@
               </a:defRPr>
             </a:pPr>
             <a:r>
-              <a:t>구현 1/1: 코드 입력 (2/5)</a:t>
+              <a:t>구현 1/1: 코드 읽기 (2/3)</a:t>
             </a:r>
           </a:p>
         </p:txBody>
@@ -8019,7 +8611,7 @@
               </a:defRPr>
             </a:pPr>
             <a:r>
-              <a:t>~/ros2_curri/my_agv_ws/src/agv_description/curriculum_stages/M06/agv.urdf.xacro</a:t>
+              <a:t>짧은 실제 코드 조각을 먼저 읽고, 다음 슬라이드에서 같은 코드를 직접 입력합니다.</a:t>
             </a:r>
           </a:p>
         </p:txBody>
@@ -8155,7 +8747,7 @@
               </a:defRPr>
             </a:pPr>
             <a:r>
-              <a:t>현재 단계 파일 1/1 · 입력 2/5    |    현재 폴더 ~/ros2_curri/my_agv_ws    |    현재 터미널</a:t>
+              <a:t>현재 단계 코드 해설 1/1    |    현재 폴더 ~/ros2_curri/my_agv_ws    |    현재 터미널</a:t>
             </a:r>
           </a:p>
         </p:txBody>
@@ -8168,111 +8760,88 @@
         </p:nvSpPr>
         <p:spPr>
           <a:xfrm>
-            <a:off x="658368" y="1609344"/>
-            <a:ext cx="10972800" cy="384048"/>
-          </a:xfrm>
-          <a:prstGeom prst="rect">
-            <a:avLst/>
-          </a:prstGeom>
-          <a:noFill/>
-        </p:spPr>
-        <p:txBody>
-          <a:bodyPr wrap="square" lIns="73152" rIns="73152" tIns="36576" bIns="36576">
-            <a:spAutoFit/>
-          </a:bodyPr>
-          <a:lstStyle/>
-          <a:p>
-            <a:pPr algn="l">
-              <a:spcAft>
-                <a:spcPts val="0"/>
-              </a:spcAft>
-              <a:defRPr sz="1400" b="1">
-                <a:solidFill>
-                  <a:srgbClr val="122C4E"/>
-                </a:solidFill>
-                <a:latin typeface="Noto Sans CJK KR"/>
-              </a:defRPr>
-            </a:pPr>
-            <a:r>
-              <a:t>이 블록이 하는 일: 앞에서 만든 구조에 geometry·collision·sensor·joint를 하나씩 붙입니다.</a:t>
-            </a:r>
-          </a:p>
-        </p:txBody>
-      </p:sp>
-      <p:sp>
-        <p:nvSpPr>
-          <p:cNvPr id="8" name="Rectangle 7"/>
+            <a:off x="694944" y="1618488"/>
+            <a:ext cx="10789920" cy="274320"/>
+          </a:xfrm>
+          <a:prstGeom prst="rect">
+            <a:avLst/>
+          </a:prstGeom>
+          <a:noFill/>
+        </p:spPr>
+        <p:txBody>
+          <a:bodyPr wrap="square" lIns="73152" rIns="73152" tIns="36576" bIns="36576">
+            <a:spAutoFit/>
+          </a:bodyPr>
+          <a:lstStyle/>
+          <a:p>
+            <a:pPr algn="l">
+              <a:spcAft>
+                <a:spcPts val="0"/>
+              </a:spcAft>
+              <a:defRPr sz="1300" b="1">
+                <a:solidFill>
+                  <a:srgbClr val="225B9B"/>
+                </a:solidFill>
+                <a:latin typeface="DejaVu Sans Mono"/>
+              </a:defRPr>
+            </a:pPr>
+            <a:r>
+              <a:t>~/ros2_curri/my_agv_ws/src/agv_description/curriculum_stages/M06/agv.urdf.xacro</a:t>
+            </a:r>
+          </a:p>
+        </p:txBody>
+      </p:sp>
+      <p:sp>
+        <p:nvSpPr>
+          <p:cNvPr id="8" name="TextBox 7"/>
+          <p:cNvSpPr txBox="1"/>
+          <p:nvPr/>
+        </p:nvSpPr>
+        <p:spPr>
+          <a:xfrm>
+            <a:off x="694944" y="1938528"/>
+            <a:ext cx="10789920" cy="274320"/>
+          </a:xfrm>
+          <a:prstGeom prst="rect">
+            <a:avLst/>
+          </a:prstGeom>
+          <a:noFill/>
+        </p:spPr>
+        <p:txBody>
+          <a:bodyPr wrap="square" lIns="73152" rIns="73152" tIns="36576" bIns="36576">
+            <a:spAutoFit/>
+          </a:bodyPr>
+          <a:lstStyle/>
+          <a:p>
+            <a:pPr algn="ctr">
+              <a:spcAft>
+                <a:spcPts val="0"/>
+              </a:spcAft>
+              <a:defRPr sz="1500" b="1">
+                <a:solidFill>
+                  <a:srgbClr val="DB7E22"/>
+                </a:solidFill>
+                <a:latin typeface="Noto Sans CJK KR"/>
+              </a:defRPr>
+            </a:pPr>
+            <a:r>
+              <a:t>말로 먼저 답해 보세요: 이 줄은 무엇을 만들고, 실행하면 어디에서 확인할 수 있을까요?</a:t>
+            </a:r>
+          </a:p>
+        </p:txBody>
+      </p:sp>
+      <p:sp>
+        <p:nvSpPr>
+          <p:cNvPr id="9" name="Rounded Rectangle 8"/>
           <p:cNvSpPr/>
           <p:nvPr/>
         </p:nvSpPr>
         <p:spPr>
           <a:xfrm>
-            <a:off x="658368" y="1956816"/>
-            <a:ext cx="10972800" cy="603504"/>
-          </a:xfrm>
-          <a:prstGeom prst="rect">
-            <a:avLst/>
-          </a:prstGeom>
-          <a:solidFill>
-            <a:srgbClr val="F4F7FB"/>
-          </a:solidFill>
-          <a:ln>
-            <a:solidFill>
-              <a:srgbClr val="F4F7FB"/>
-            </a:solidFill>
-          </a:ln>
-        </p:spPr>
-        <p:style>
-          <a:lnRef idx="1">
-            <a:schemeClr val="accent1"/>
-          </a:lnRef>
-          <a:fillRef idx="3">
-            <a:schemeClr val="accent1"/>
-          </a:fillRef>
-          <a:effectRef idx="2">
-            <a:schemeClr val="accent1"/>
-          </a:effectRef>
-          <a:fontRef idx="minor">
-            <a:schemeClr val="lt1"/>
-          </a:fontRef>
-        </p:style>
-        <p:txBody>
-          <a:bodyPr rtlCol="0" anchor="ctr" wrap="square" lIns="73152" rIns="73152" tIns="36576" bIns="36576"/>
-          <a:lstStyle/>
-          <a:p>
-            <a:pPr algn="l">
-              <a:spcAft>
-                <a:spcPts val="0"/>
-              </a:spcAft>
-              <a:defRPr sz="1300" b="0">
-                <a:solidFill>
-                  <a:srgbClr val="122C4E"/>
-                </a:solidFill>
-                <a:latin typeface="DejaVu Sans Mono"/>
-              </a:defRPr>
-            </a:pPr>
-            <a:r>
-              <a:t>현재 열린 파일: ~/ros2_curri/my_agv_ws/src/agv_description/curriculum_stages/M06/agv.urdf.xacro</a:t>
-            </a:r>
-            <a:br/>
-            <a:r>
-              <a:t>아래 코드만 입력 → Ctrl+O → Enter로 저장 → 다음 블록으로 이동</a:t>
-            </a:r>
-          </a:p>
-        </p:txBody>
-      </p:sp>
-      <p:sp>
-        <p:nvSpPr>
-          <p:cNvPr id="9" name="Rectangle 8"/>
-          <p:cNvSpPr/>
-          <p:nvPr/>
-        </p:nvSpPr>
-        <p:spPr>
-          <a:xfrm>
-            <a:off x="658368" y="2706624"/>
-            <a:ext cx="10972800" cy="3364992"/>
-          </a:xfrm>
-          <a:prstGeom prst="rect">
+            <a:off x="658368" y="2359152"/>
+            <a:ext cx="4160520" cy="1417320"/>
+          </a:xfrm>
+          <a:prstGeom prst="roundRect">
             <a:avLst/>
           </a:prstGeom>
           <a:solidFill>
@@ -8299,14 +8868,14 @@
           </a:fontRef>
         </p:style>
         <p:txBody>
-          <a:bodyPr rtlCol="0" anchor="ctr" wrap="square" lIns="164592" rIns="164592" tIns="109728" bIns="36576"/>
-          <a:lstStyle/>
-          <a:p>
-            <a:pPr algn="l">
-              <a:spcAft>
-                <a:spcPts val="0"/>
-              </a:spcAft>
-              <a:defRPr sz="1400" b="0">
+          <a:bodyPr rtlCol="0" anchor="ctr" wrap="square" lIns="73152" rIns="73152" tIns="36576" bIns="36576"/>
+          <a:lstStyle/>
+          <a:p>
+            <a:pPr algn="l">
+              <a:spcAft>
+                <a:spcPts val="0"/>
+              </a:spcAft>
+              <a:defRPr sz="1300" b="0">
                 <a:solidFill>
                   <a:srgbClr val="FFFFFF"/>
                 </a:solidFill>
@@ -8314,82 +8883,420 @@
               </a:defRPr>
             </a:pPr>
             <a:r>
-              <a:t>    </a:t>
-            </a:r>
-            <a:br/>
-            <a:r>
-              <a:t>    &lt;link name="${side}_wheel_link"&gt;</a:t>
-            </a:r>
-            <a:br/>
-            <a:r>
-              <a:t>      &lt;visual&gt;</a:t>
-            </a:r>
-            <a:br/>
-            <a:r>
-              <a:t>        &lt;origin rpy="1.5708 0 0"/&gt;</a:t>
-            </a:r>
-            <a:br/>
-            <a:r>
-              <a:t>        &lt;geometry&gt;</a:t>
-            </a:r>
-            <a:br/>
-            <a:r>
-              <a:t>          &lt;cylinder radius="${wheel_radius}" length="0.05"/&gt;</a:t>
-            </a:r>
-            <a:br/>
-            <a:r>
-              <a:t>        &lt;/geometry&gt;</a:t>
-            </a:r>
-            <a:br/>
-            <a:r>
-              <a:t>      &lt;/visual&gt;</a:t>
-            </a:r>
-            <a:br/>
-            <a:r>
-              <a:t>    &lt;/link&gt;</a:t>
-            </a:r>
-            <a:br/>
-            <a:r>
-              <a:t>    </a:t>
-            </a:r>
-            <a:br/>
-            <a:r>
-              <a:t>    </a:t>
-            </a:r>
-            <a:br/>
-            <a:r>
-              <a:t>    &lt;joint name="${side}_wheel_joint" type="continuous"&gt;</a:t>
-            </a:r>
-          </a:p>
-        </p:txBody>
-      </p:sp>
-      <p:sp>
-        <p:nvSpPr>
-          <p:cNvPr id="10" name="TextBox 9"/>
-          <p:cNvSpPr txBox="1"/>
-          <p:nvPr/>
-        </p:nvSpPr>
-        <p:spPr>
-          <a:xfrm>
-            <a:off x="749808" y="6181344"/>
-            <a:ext cx="10789920" cy="201168"/>
-          </a:xfrm>
-          <a:prstGeom prst="rect">
-            <a:avLst/>
-          </a:prstGeom>
-          <a:noFill/>
-        </p:spPr>
-        <p:txBody>
-          <a:bodyPr wrap="square" lIns="73152" rIns="73152" tIns="36576" bIns="36576">
-            <a:spAutoFit/>
-          </a:bodyPr>
-          <a:lstStyle/>
-          <a:p>
-            <a:pPr algn="l">
-              <a:spcAft>
-                <a:spcPts val="0"/>
-              </a:spcAft>
-              <a:defRPr sz="1000" b="0">
+              <a:t>&lt;xacro:macro name="wheel" params="side y"&gt;</a:t>
+            </a:r>
+          </a:p>
+        </p:txBody>
+      </p:sp>
+      <p:sp>
+        <p:nvSpPr>
+          <p:cNvPr id="10" name="Rounded Rectangle 9"/>
+          <p:cNvSpPr/>
+          <p:nvPr/>
+        </p:nvSpPr>
+        <p:spPr>
+          <a:xfrm>
+            <a:off x="5029200" y="2359152"/>
+            <a:ext cx="6537960" cy="1417320"/>
+          </a:xfrm>
+          <a:prstGeom prst="roundRect">
+            <a:avLst/>
+          </a:prstGeom>
+          <a:solidFill>
+            <a:srgbClr val="F4F7FB"/>
+          </a:solidFill>
+          <a:ln>
+            <a:solidFill>
+              <a:srgbClr val="225B9B"/>
+            </a:solidFill>
+          </a:ln>
+        </p:spPr>
+        <p:style>
+          <a:lnRef idx="1">
+            <a:schemeClr val="accent1"/>
+          </a:lnRef>
+          <a:fillRef idx="3">
+            <a:schemeClr val="accent1"/>
+          </a:fillRef>
+          <a:effectRef idx="2">
+            <a:schemeClr val="accent1"/>
+          </a:effectRef>
+          <a:fontRef idx="minor">
+            <a:schemeClr val="lt1"/>
+          </a:fontRef>
+        </p:style>
+        <p:txBody>
+          <a:bodyPr rtlCol="0" anchor="ctr"/>
+          <a:lstStyle/>
+          <a:p>
+            <a:pPr algn="ctr"/>
+          </a:p>
+        </p:txBody>
+      </p:sp>
+      <p:sp>
+        <p:nvSpPr>
+          <p:cNvPr id="11" name="TextBox 10"/>
+          <p:cNvSpPr txBox="1"/>
+          <p:nvPr/>
+        </p:nvSpPr>
+        <p:spPr>
+          <a:xfrm>
+            <a:off x="5239512" y="2468880"/>
+            <a:ext cx="594360" cy="219456"/>
+          </a:xfrm>
+          <a:prstGeom prst="rect">
+            <a:avLst/>
+          </a:prstGeom>
+          <a:noFill/>
+        </p:spPr>
+        <p:txBody>
+          <a:bodyPr wrap="square" lIns="73152" rIns="73152" tIns="36576" bIns="36576">
+            <a:spAutoFit/>
+          </a:bodyPr>
+          <a:lstStyle/>
+          <a:p>
+            <a:pPr algn="l">
+              <a:spcAft>
+                <a:spcPts val="0"/>
+              </a:spcAft>
+              <a:defRPr sz="1400" b="1">
+                <a:solidFill>
+                  <a:srgbClr val="225B9B"/>
+                </a:solidFill>
+                <a:latin typeface="Noto Sans CJK KR"/>
+              </a:defRPr>
+            </a:pPr>
+            <a:r>
+              <a:t>1.</a:t>
+            </a:r>
+          </a:p>
+        </p:txBody>
+      </p:sp>
+      <p:sp>
+        <p:nvSpPr>
+          <p:cNvPr id="12" name="TextBox 11"/>
+          <p:cNvSpPr txBox="1"/>
+          <p:nvPr/>
+        </p:nvSpPr>
+        <p:spPr>
+          <a:xfrm>
+            <a:off x="5596128" y="2450592"/>
+            <a:ext cx="5696712" cy="493776"/>
+          </a:xfrm>
+          <a:prstGeom prst="rect">
+            <a:avLst/>
+          </a:prstGeom>
+          <a:noFill/>
+        </p:spPr>
+        <p:txBody>
+          <a:bodyPr wrap="square" lIns="73152" rIns="73152" tIns="36576" bIns="36576">
+            <a:spAutoFit/>
+          </a:bodyPr>
+          <a:lstStyle/>
+          <a:p>
+            <a:pPr algn="l">
+              <a:spcAft>
+                <a:spcPts val="0"/>
+              </a:spcAft>
+              <a:defRPr sz="1300" b="0">
+                <a:solidFill>
+                  <a:srgbClr val="122C4E"/>
+                </a:solidFill>
+                <a:latin typeface="Noto Sans CJK KR"/>
+              </a:defRPr>
+            </a:pPr>
+            <a:r>
+              <a:t>뜻: 반복되는 로봇 부품을 이름 있는 설계 블록으로 만듭니다.</a:t>
+            </a:r>
+          </a:p>
+        </p:txBody>
+      </p:sp>
+      <p:sp>
+        <p:nvSpPr>
+          <p:cNvPr id="13" name="TextBox 12"/>
+          <p:cNvSpPr txBox="1"/>
+          <p:nvPr/>
+        </p:nvSpPr>
+        <p:spPr>
+          <a:xfrm>
+            <a:off x="5596128" y="3108960"/>
+            <a:ext cx="5696712" cy="457200"/>
+          </a:xfrm>
+          <a:prstGeom prst="rect">
+            <a:avLst/>
+          </a:prstGeom>
+          <a:noFill/>
+        </p:spPr>
+        <p:txBody>
+          <a:bodyPr wrap="square" lIns="73152" rIns="73152" tIns="36576" bIns="36576">
+            <a:spAutoFit/>
+          </a:bodyPr>
+          <a:lstStyle/>
+          <a:p>
+            <a:pPr algn="l">
+              <a:spcAft>
+                <a:spcPts val="0"/>
+              </a:spcAft>
+              <a:defRPr sz="1200" b="0">
+                <a:solidFill>
+                  <a:srgbClr val="2A8B5A"/>
+                </a:solidFill>
+                <a:latin typeface="Noto Sans CJK KR"/>
+              </a:defRPr>
+            </a:pPr>
+            <a:r>
+              <a:t>실행에서: 같은 macro를 여러 번 호출해도 바퀴·부품 구조가 일관됩니다.</a:t>
+            </a:r>
+          </a:p>
+        </p:txBody>
+      </p:sp>
+      <p:sp>
+        <p:nvSpPr>
+          <p:cNvPr id="14" name="Rounded Rectangle 13"/>
+          <p:cNvSpPr/>
+          <p:nvPr/>
+        </p:nvSpPr>
+        <p:spPr>
+          <a:xfrm>
+            <a:off x="658368" y="4078224"/>
+            <a:ext cx="4160520" cy="1417320"/>
+          </a:xfrm>
+          <a:prstGeom prst="roundRect">
+            <a:avLst/>
+          </a:prstGeom>
+          <a:solidFill>
+            <a:srgbClr val="1D232D"/>
+          </a:solidFill>
+          <a:ln>
+            <a:solidFill>
+              <a:srgbClr val="1D232D"/>
+            </a:solidFill>
+          </a:ln>
+        </p:spPr>
+        <p:style>
+          <a:lnRef idx="1">
+            <a:schemeClr val="accent1"/>
+          </a:lnRef>
+          <a:fillRef idx="3">
+            <a:schemeClr val="accent1"/>
+          </a:fillRef>
+          <a:effectRef idx="2">
+            <a:schemeClr val="accent1"/>
+          </a:effectRef>
+          <a:fontRef idx="minor">
+            <a:schemeClr val="lt1"/>
+          </a:fontRef>
+        </p:style>
+        <p:txBody>
+          <a:bodyPr rtlCol="0" anchor="ctr" wrap="square" lIns="73152" rIns="73152" tIns="36576" bIns="36576"/>
+          <a:lstStyle/>
+          <a:p>
+            <a:pPr algn="l">
+              <a:spcAft>
+                <a:spcPts val="0"/>
+              </a:spcAft>
+              <a:defRPr sz="1300" b="0">
+                <a:solidFill>
+                  <a:srgbClr val="FFFFFF"/>
+                </a:solidFill>
+                <a:latin typeface="DejaVu Sans Mono"/>
+              </a:defRPr>
+            </a:pPr>
+            <a:r>
+              <a:t>&lt;link name="${side}_wheel_link"&gt;</a:t>
+            </a:r>
+          </a:p>
+        </p:txBody>
+      </p:sp>
+      <p:sp>
+        <p:nvSpPr>
+          <p:cNvPr id="15" name="Rounded Rectangle 14"/>
+          <p:cNvSpPr/>
+          <p:nvPr/>
+        </p:nvSpPr>
+        <p:spPr>
+          <a:xfrm>
+            <a:off x="5029200" y="4078224"/>
+            <a:ext cx="6537960" cy="1417320"/>
+          </a:xfrm>
+          <a:prstGeom prst="roundRect">
+            <a:avLst/>
+          </a:prstGeom>
+          <a:solidFill>
+            <a:srgbClr val="F4F7FB"/>
+          </a:solidFill>
+          <a:ln>
+            <a:solidFill>
+              <a:srgbClr val="225B9B"/>
+            </a:solidFill>
+          </a:ln>
+        </p:spPr>
+        <p:style>
+          <a:lnRef idx="1">
+            <a:schemeClr val="accent1"/>
+          </a:lnRef>
+          <a:fillRef idx="3">
+            <a:schemeClr val="accent1"/>
+          </a:fillRef>
+          <a:effectRef idx="2">
+            <a:schemeClr val="accent1"/>
+          </a:effectRef>
+          <a:fontRef idx="minor">
+            <a:schemeClr val="lt1"/>
+          </a:fontRef>
+        </p:style>
+        <p:txBody>
+          <a:bodyPr rtlCol="0" anchor="ctr"/>
+          <a:lstStyle/>
+          <a:p>
+            <a:pPr algn="ctr"/>
+          </a:p>
+        </p:txBody>
+      </p:sp>
+      <p:sp>
+        <p:nvSpPr>
+          <p:cNvPr id="16" name="TextBox 15"/>
+          <p:cNvSpPr txBox="1"/>
+          <p:nvPr/>
+        </p:nvSpPr>
+        <p:spPr>
+          <a:xfrm>
+            <a:off x="5239512" y="4187952"/>
+            <a:ext cx="594360" cy="219456"/>
+          </a:xfrm>
+          <a:prstGeom prst="rect">
+            <a:avLst/>
+          </a:prstGeom>
+          <a:noFill/>
+        </p:spPr>
+        <p:txBody>
+          <a:bodyPr wrap="square" lIns="73152" rIns="73152" tIns="36576" bIns="36576">
+            <a:spAutoFit/>
+          </a:bodyPr>
+          <a:lstStyle/>
+          <a:p>
+            <a:pPr algn="l">
+              <a:spcAft>
+                <a:spcPts val="0"/>
+              </a:spcAft>
+              <a:defRPr sz="1400" b="1">
+                <a:solidFill>
+                  <a:srgbClr val="225B9B"/>
+                </a:solidFill>
+                <a:latin typeface="Noto Sans CJK KR"/>
+              </a:defRPr>
+            </a:pPr>
+            <a:r>
+              <a:t>2.</a:t>
+            </a:r>
+          </a:p>
+        </p:txBody>
+      </p:sp>
+      <p:sp>
+        <p:nvSpPr>
+          <p:cNvPr id="17" name="TextBox 16"/>
+          <p:cNvSpPr txBox="1"/>
+          <p:nvPr/>
+        </p:nvSpPr>
+        <p:spPr>
+          <a:xfrm>
+            <a:off x="5596128" y="4169663"/>
+            <a:ext cx="5696712" cy="493776"/>
+          </a:xfrm>
+          <a:prstGeom prst="rect">
+            <a:avLst/>
+          </a:prstGeom>
+          <a:noFill/>
+        </p:spPr>
+        <p:txBody>
+          <a:bodyPr wrap="square" lIns="73152" rIns="73152" tIns="36576" bIns="36576">
+            <a:spAutoFit/>
+          </a:bodyPr>
+          <a:lstStyle/>
+          <a:p>
+            <a:pPr algn="l">
+              <a:spcAft>
+                <a:spcPts val="0"/>
+              </a:spcAft>
+              <a:defRPr sz="1300" b="0">
+                <a:solidFill>
+                  <a:srgbClr val="122C4E"/>
+                </a:solidFill>
+                <a:latin typeface="Noto Sans CJK KR"/>
+              </a:defRPr>
+            </a:pPr>
+            <a:r>
+              <a:t>뜻: 로봇의 몸체·바퀴처럼 실제로 존재하는 하나의 부품을 선언합니다.</a:t>
+            </a:r>
+          </a:p>
+        </p:txBody>
+      </p:sp>
+      <p:sp>
+        <p:nvSpPr>
+          <p:cNvPr id="18" name="TextBox 17"/>
+          <p:cNvSpPr txBox="1"/>
+          <p:nvPr/>
+        </p:nvSpPr>
+        <p:spPr>
+          <a:xfrm>
+            <a:off x="5596128" y="4828032"/>
+            <a:ext cx="5696712" cy="457200"/>
+          </a:xfrm>
+          <a:prstGeom prst="rect">
+            <a:avLst/>
+          </a:prstGeom>
+          <a:noFill/>
+        </p:spPr>
+        <p:txBody>
+          <a:bodyPr wrap="square" lIns="73152" rIns="73152" tIns="36576" bIns="36576">
+            <a:spAutoFit/>
+          </a:bodyPr>
+          <a:lstStyle/>
+          <a:p>
+            <a:pPr algn="l">
+              <a:spcAft>
+                <a:spcPts val="0"/>
+              </a:spcAft>
+              <a:defRPr sz="1200" b="0">
+                <a:solidFill>
+                  <a:srgbClr val="2A8B5A"/>
+                </a:solidFill>
+                <a:latin typeface="Noto Sans CJK KR"/>
+              </a:defRPr>
+            </a:pPr>
+            <a:r>
+              <a:t>실행에서: RViz/Gazebo에서 이 부품이 별도 frame/물체로 보입니다.</a:t>
+            </a:r>
+          </a:p>
+        </p:txBody>
+      </p:sp>
+      <p:sp>
+        <p:nvSpPr>
+          <p:cNvPr id="19" name="TextBox 18"/>
+          <p:cNvSpPr txBox="1"/>
+          <p:nvPr/>
+        </p:nvSpPr>
+        <p:spPr>
+          <a:xfrm>
+            <a:off x="749808" y="6199632"/>
+            <a:ext cx="10698480" cy="182880"/>
+          </a:xfrm>
+          <a:prstGeom prst="rect">
+            <a:avLst/>
+          </a:prstGeom>
+          <a:noFill/>
+        </p:spPr>
+        <p:txBody>
+          <a:bodyPr wrap="square" lIns="73152" rIns="73152" tIns="36576" bIns="36576">
+            <a:spAutoFit/>
+          </a:bodyPr>
+          <a:lstStyle/>
+          <a:p>
+            <a:pPr algn="ctr">
+              <a:spcAft>
+                <a:spcPts val="0"/>
+              </a:spcAft>
+              <a:defRPr sz="1100" b="0">
                 <a:solidFill>
                   <a:srgbClr val="5C6672"/>
                 </a:solidFill>
@@ -8397,7 +9304,7 @@
               </a:defRPr>
             </a:pPr>
             <a:r>
-              <a:t>입력 2/5 · 이 파일의 다음 코드 블록이 바로 다음 슬라이드에 이어집니다.</a:t>
+              <a:t>다음 코드 입력 슬라이드에서 이 줄을 발견하면, 방금 설명한 ‘뜻’과 ‘실행에서 보이는 변화’를 다시 말해 봅니다.</a:t>
             </a:r>
           </a:p>
         </p:txBody>
@@ -8454,7 +9361,7 @@
               </a:defRPr>
             </a:pPr>
             <a:r>
-              <a:t>구현 1/1: 코드 입력 (3/5)</a:t>
+              <a:t>구현 1/1: 코드 읽기 (3/3)</a:t>
             </a:r>
           </a:p>
         </p:txBody>
@@ -8493,7 +9400,7 @@
               </a:defRPr>
             </a:pPr>
             <a:r>
-              <a:t>~/ros2_curri/my_agv_ws/src/agv_description/curriculum_stages/M06/agv.urdf.xacro</a:t>
+              <a:t>짧은 실제 코드 조각을 먼저 읽고, 다음 슬라이드에서 같은 코드를 직접 입력합니다.</a:t>
             </a:r>
           </a:p>
         </p:txBody>
@@ -8629,7 +9536,7 @@
               </a:defRPr>
             </a:pPr>
             <a:r>
-              <a:t>현재 단계 파일 1/1 · 입력 3/5    |    현재 폴더 ~/ros2_curri/my_agv_ws    |    현재 터미널</a:t>
+              <a:t>현재 단계 코드 해설 1/1    |    현재 폴더 ~/ros2_curri/my_agv_ws    |    현재 터미널</a:t>
             </a:r>
           </a:p>
         </p:txBody>
@@ -8642,111 +9549,88 @@
         </p:nvSpPr>
         <p:spPr>
           <a:xfrm>
-            <a:off x="658368" y="1609344"/>
-            <a:ext cx="10972800" cy="384048"/>
-          </a:xfrm>
-          <a:prstGeom prst="rect">
-            <a:avLst/>
-          </a:prstGeom>
-          <a:noFill/>
-        </p:spPr>
-        <p:txBody>
-          <a:bodyPr wrap="square" lIns="73152" rIns="73152" tIns="36576" bIns="36576">
-            <a:spAutoFit/>
-          </a:bodyPr>
-          <a:lstStyle/>
-          <a:p>
-            <a:pPr algn="l">
-              <a:spcAft>
-                <a:spcPts val="0"/>
-              </a:spcAft>
-              <a:defRPr sz="1400" b="1">
-                <a:solidFill>
-                  <a:srgbClr val="122C4E"/>
-                </a:solidFill>
-                <a:latin typeface="Noto Sans CJK KR"/>
-              </a:defRPr>
-            </a:pPr>
-            <a:r>
-              <a:t>이 블록이 하는 일: 앞에서 만든 구조에 geometry·collision·sensor·joint를 하나씩 붙입니다.</a:t>
-            </a:r>
-          </a:p>
-        </p:txBody>
-      </p:sp>
-      <p:sp>
-        <p:nvSpPr>
-          <p:cNvPr id="8" name="Rectangle 7"/>
+            <a:off x="694944" y="1618488"/>
+            <a:ext cx="10789920" cy="274320"/>
+          </a:xfrm>
+          <a:prstGeom prst="rect">
+            <a:avLst/>
+          </a:prstGeom>
+          <a:noFill/>
+        </p:spPr>
+        <p:txBody>
+          <a:bodyPr wrap="square" lIns="73152" rIns="73152" tIns="36576" bIns="36576">
+            <a:spAutoFit/>
+          </a:bodyPr>
+          <a:lstStyle/>
+          <a:p>
+            <a:pPr algn="l">
+              <a:spcAft>
+                <a:spcPts val="0"/>
+              </a:spcAft>
+              <a:defRPr sz="1300" b="1">
+                <a:solidFill>
+                  <a:srgbClr val="225B9B"/>
+                </a:solidFill>
+                <a:latin typeface="DejaVu Sans Mono"/>
+              </a:defRPr>
+            </a:pPr>
+            <a:r>
+              <a:t>~/ros2_curri/my_agv_ws/src/agv_description/curriculum_stages/M06/agv.urdf.xacro</a:t>
+            </a:r>
+          </a:p>
+        </p:txBody>
+      </p:sp>
+      <p:sp>
+        <p:nvSpPr>
+          <p:cNvPr id="8" name="TextBox 7"/>
+          <p:cNvSpPr txBox="1"/>
+          <p:nvPr/>
+        </p:nvSpPr>
+        <p:spPr>
+          <a:xfrm>
+            <a:off x="694944" y="1938528"/>
+            <a:ext cx="10789920" cy="274320"/>
+          </a:xfrm>
+          <a:prstGeom prst="rect">
+            <a:avLst/>
+          </a:prstGeom>
+          <a:noFill/>
+        </p:spPr>
+        <p:txBody>
+          <a:bodyPr wrap="square" lIns="73152" rIns="73152" tIns="36576" bIns="36576">
+            <a:spAutoFit/>
+          </a:bodyPr>
+          <a:lstStyle/>
+          <a:p>
+            <a:pPr algn="ctr">
+              <a:spcAft>
+                <a:spcPts val="0"/>
+              </a:spcAft>
+              <a:defRPr sz="1500" b="1">
+                <a:solidFill>
+                  <a:srgbClr val="DB7E22"/>
+                </a:solidFill>
+                <a:latin typeface="Noto Sans CJK KR"/>
+              </a:defRPr>
+            </a:pPr>
+            <a:r>
+              <a:t>말로 먼저 답해 보세요: 이 줄은 무엇을 만들고, 실행하면 어디에서 확인할 수 있을까요?</a:t>
+            </a:r>
+          </a:p>
+        </p:txBody>
+      </p:sp>
+      <p:sp>
+        <p:nvSpPr>
+          <p:cNvPr id="9" name="Rounded Rectangle 8"/>
           <p:cNvSpPr/>
           <p:nvPr/>
         </p:nvSpPr>
         <p:spPr>
           <a:xfrm>
-            <a:off x="658368" y="1956816"/>
-            <a:ext cx="10972800" cy="603504"/>
-          </a:xfrm>
-          <a:prstGeom prst="rect">
-            <a:avLst/>
-          </a:prstGeom>
-          <a:solidFill>
-            <a:srgbClr val="F4F7FB"/>
-          </a:solidFill>
-          <a:ln>
-            <a:solidFill>
-              <a:srgbClr val="F4F7FB"/>
-            </a:solidFill>
-          </a:ln>
-        </p:spPr>
-        <p:style>
-          <a:lnRef idx="1">
-            <a:schemeClr val="accent1"/>
-          </a:lnRef>
-          <a:fillRef idx="3">
-            <a:schemeClr val="accent1"/>
-          </a:fillRef>
-          <a:effectRef idx="2">
-            <a:schemeClr val="accent1"/>
-          </a:effectRef>
-          <a:fontRef idx="minor">
-            <a:schemeClr val="lt1"/>
-          </a:fontRef>
-        </p:style>
-        <p:txBody>
-          <a:bodyPr rtlCol="0" anchor="ctr" wrap="square" lIns="73152" rIns="73152" tIns="36576" bIns="36576"/>
-          <a:lstStyle/>
-          <a:p>
-            <a:pPr algn="l">
-              <a:spcAft>
-                <a:spcPts val="0"/>
-              </a:spcAft>
-              <a:defRPr sz="1300" b="0">
-                <a:solidFill>
-                  <a:srgbClr val="122C4E"/>
-                </a:solidFill>
-                <a:latin typeface="DejaVu Sans Mono"/>
-              </a:defRPr>
-            </a:pPr>
-            <a:r>
-              <a:t>현재 열린 파일: ~/ros2_curri/my_agv_ws/src/agv_description/curriculum_stages/M06/agv.urdf.xacro</a:t>
-            </a:r>
-            <a:br/>
-            <a:r>
-              <a:t>아래 코드만 입력 → Ctrl+O → Enter로 저장 → 다음 블록으로 이동</a:t>
-            </a:r>
-          </a:p>
-        </p:txBody>
-      </p:sp>
-      <p:sp>
-        <p:nvSpPr>
-          <p:cNvPr id="9" name="Rectangle 8"/>
-          <p:cNvSpPr/>
-          <p:nvPr/>
-        </p:nvSpPr>
-        <p:spPr>
-          <a:xfrm>
-            <a:off x="658368" y="2706624"/>
-            <a:ext cx="10972800" cy="3364992"/>
-          </a:xfrm>
-          <a:prstGeom prst="rect">
+            <a:off x="658368" y="2359152"/>
+            <a:ext cx="4160520" cy="1417320"/>
+          </a:xfrm>
+          <a:prstGeom prst="roundRect">
             <a:avLst/>
           </a:prstGeom>
           <a:solidFill>
@@ -8773,14 +9657,14 @@
           </a:fontRef>
         </p:style>
         <p:txBody>
-          <a:bodyPr rtlCol="0" anchor="ctr" wrap="square" lIns="164592" rIns="164592" tIns="109728" bIns="36576"/>
-          <a:lstStyle/>
-          <a:p>
-            <a:pPr algn="l">
-              <a:spcAft>
-                <a:spcPts val="0"/>
-              </a:spcAft>
-              <a:defRPr sz="1400" b="0">
+          <a:bodyPr rtlCol="0" anchor="ctr" wrap="square" lIns="73152" rIns="73152" tIns="36576" bIns="36576"/>
+          <a:lstStyle/>
+          <a:p>
+            <a:pPr algn="l">
+              <a:spcAft>
+                <a:spcPts val="0"/>
+              </a:spcAft>
+              <a:defRPr sz="1300" b="0">
                 <a:solidFill>
                   <a:srgbClr val="FFFFFF"/>
                 </a:solidFill>
@@ -8788,82 +9672,420 @@
               </a:defRPr>
             </a:pPr>
             <a:r>
-              <a:t>      &lt;parent link="base_link"/&gt;</a:t>
-            </a:r>
-            <a:br/>
-            <a:r>
-              <a:t>      &lt;child link="${side}_wheel_link"/&gt;</a:t>
-            </a:r>
-            <a:br/>
-            <a:r>
-              <a:t>      &lt;origin xyz="0 ${y} ${wheel_radius}"/&gt;</a:t>
-            </a:r>
-            <a:br/>
-            <a:r>
-              <a:t>      &lt;axis xyz="0 1 0"/&gt;</a:t>
-            </a:r>
-            <a:br/>
-            <a:r>
-              <a:t>    &lt;/joint&gt;</a:t>
-            </a:r>
-            <a:br/>
-            <a:r>
-              <a:t>    </a:t>
-            </a:r>
-            <a:br/>
-            <a:r>
-              <a:t>  </a:t>
-            </a:r>
-            <a:br/>
-            <a:r>
-              <a:t>  &lt;/xacro:macro&gt;</a:t>
-            </a:r>
-            <a:br/>
-            <a:r>
-              <a:t>  </a:t>
-            </a:r>
-            <a:br/>
-            <a:r>
-              <a:t>  </a:t>
-            </a:r>
-            <a:br/>
-            <a:r>
-              <a:t>  &lt;link name="base_link"&gt;</a:t>
-            </a:r>
-            <a:br/>
-            <a:r>
-              <a:t>    &lt;visual&gt;</a:t>
-            </a:r>
-          </a:p>
-        </p:txBody>
-      </p:sp>
-      <p:sp>
-        <p:nvSpPr>
-          <p:cNvPr id="10" name="TextBox 9"/>
-          <p:cNvSpPr txBox="1"/>
-          <p:nvPr/>
-        </p:nvSpPr>
-        <p:spPr>
-          <a:xfrm>
-            <a:off x="749808" y="6181344"/>
-            <a:ext cx="10789920" cy="201168"/>
-          </a:xfrm>
-          <a:prstGeom prst="rect">
-            <a:avLst/>
-          </a:prstGeom>
-          <a:noFill/>
-        </p:spPr>
-        <p:txBody>
-          <a:bodyPr wrap="square" lIns="73152" rIns="73152" tIns="36576" bIns="36576">
-            <a:spAutoFit/>
-          </a:bodyPr>
-          <a:lstStyle/>
-          <a:p>
-            <a:pPr algn="l">
-              <a:spcAft>
-                <a:spcPts val="0"/>
-              </a:spcAft>
-              <a:defRPr sz="1000" b="0">
+              <a:t>&lt;visual&gt;</a:t>
+            </a:r>
+          </a:p>
+        </p:txBody>
+      </p:sp>
+      <p:sp>
+        <p:nvSpPr>
+          <p:cNvPr id="10" name="Rounded Rectangle 9"/>
+          <p:cNvSpPr/>
+          <p:nvPr/>
+        </p:nvSpPr>
+        <p:spPr>
+          <a:xfrm>
+            <a:off x="5029200" y="2359152"/>
+            <a:ext cx="6537960" cy="1417320"/>
+          </a:xfrm>
+          <a:prstGeom prst="roundRect">
+            <a:avLst/>
+          </a:prstGeom>
+          <a:solidFill>
+            <a:srgbClr val="F4F7FB"/>
+          </a:solidFill>
+          <a:ln>
+            <a:solidFill>
+              <a:srgbClr val="225B9B"/>
+            </a:solidFill>
+          </a:ln>
+        </p:spPr>
+        <p:style>
+          <a:lnRef idx="1">
+            <a:schemeClr val="accent1"/>
+          </a:lnRef>
+          <a:fillRef idx="3">
+            <a:schemeClr val="accent1"/>
+          </a:fillRef>
+          <a:effectRef idx="2">
+            <a:schemeClr val="accent1"/>
+          </a:effectRef>
+          <a:fontRef idx="minor">
+            <a:schemeClr val="lt1"/>
+          </a:fontRef>
+        </p:style>
+        <p:txBody>
+          <a:bodyPr rtlCol="0" anchor="ctr"/>
+          <a:lstStyle/>
+          <a:p>
+            <a:pPr algn="ctr"/>
+          </a:p>
+        </p:txBody>
+      </p:sp>
+      <p:sp>
+        <p:nvSpPr>
+          <p:cNvPr id="11" name="TextBox 10"/>
+          <p:cNvSpPr txBox="1"/>
+          <p:nvPr/>
+        </p:nvSpPr>
+        <p:spPr>
+          <a:xfrm>
+            <a:off x="5239512" y="2468880"/>
+            <a:ext cx="594360" cy="219456"/>
+          </a:xfrm>
+          <a:prstGeom prst="rect">
+            <a:avLst/>
+          </a:prstGeom>
+          <a:noFill/>
+        </p:spPr>
+        <p:txBody>
+          <a:bodyPr wrap="square" lIns="73152" rIns="73152" tIns="36576" bIns="36576">
+            <a:spAutoFit/>
+          </a:bodyPr>
+          <a:lstStyle/>
+          <a:p>
+            <a:pPr algn="l">
+              <a:spcAft>
+                <a:spcPts val="0"/>
+              </a:spcAft>
+              <a:defRPr sz="1400" b="1">
+                <a:solidFill>
+                  <a:srgbClr val="225B9B"/>
+                </a:solidFill>
+                <a:latin typeface="Noto Sans CJK KR"/>
+              </a:defRPr>
+            </a:pPr>
+            <a:r>
+              <a:t>1.</a:t>
+            </a:r>
+          </a:p>
+        </p:txBody>
+      </p:sp>
+      <p:sp>
+        <p:nvSpPr>
+          <p:cNvPr id="12" name="TextBox 11"/>
+          <p:cNvSpPr txBox="1"/>
+          <p:nvPr/>
+        </p:nvSpPr>
+        <p:spPr>
+          <a:xfrm>
+            <a:off x="5596128" y="2450592"/>
+            <a:ext cx="5696712" cy="493776"/>
+          </a:xfrm>
+          <a:prstGeom prst="rect">
+            <a:avLst/>
+          </a:prstGeom>
+          <a:noFill/>
+        </p:spPr>
+        <p:txBody>
+          <a:bodyPr wrap="square" lIns="73152" rIns="73152" tIns="36576" bIns="36576">
+            <a:spAutoFit/>
+          </a:bodyPr>
+          <a:lstStyle/>
+          <a:p>
+            <a:pPr algn="l">
+              <a:spcAft>
+                <a:spcPts val="0"/>
+              </a:spcAft>
+              <a:defRPr sz="1300" b="0">
+                <a:solidFill>
+                  <a:srgbClr val="122C4E"/>
+                </a:solidFill>
+                <a:latin typeface="Noto Sans CJK KR"/>
+              </a:defRPr>
+            </a:pPr>
+            <a:r>
+              <a:t>뜻: 사람이 화면에서 보는 모양·색·mesh를 설정합니다.</a:t>
+            </a:r>
+          </a:p>
+        </p:txBody>
+      </p:sp>
+      <p:sp>
+        <p:nvSpPr>
+          <p:cNvPr id="13" name="TextBox 12"/>
+          <p:cNvSpPr txBox="1"/>
+          <p:nvPr/>
+        </p:nvSpPr>
+        <p:spPr>
+          <a:xfrm>
+            <a:off x="5596128" y="3108960"/>
+            <a:ext cx="5696712" cy="457200"/>
+          </a:xfrm>
+          <a:prstGeom prst="rect">
+            <a:avLst/>
+          </a:prstGeom>
+          <a:noFill/>
+        </p:spPr>
+        <p:txBody>
+          <a:bodyPr wrap="square" lIns="73152" rIns="73152" tIns="36576" bIns="36576">
+            <a:spAutoFit/>
+          </a:bodyPr>
+          <a:lstStyle/>
+          <a:p>
+            <a:pPr algn="l">
+              <a:spcAft>
+                <a:spcPts val="0"/>
+              </a:spcAft>
+              <a:defRPr sz="1200" b="0">
+                <a:solidFill>
+                  <a:srgbClr val="2A8B5A"/>
+                </a:solidFill>
+                <a:latin typeface="Noto Sans CJK KR"/>
+              </a:defRPr>
+            </a:pPr>
+            <a:r>
+              <a:t>실행에서: Gazebo/RViz 화면에서 해당 부품의 외형이 바뀝니다.</a:t>
+            </a:r>
+          </a:p>
+        </p:txBody>
+      </p:sp>
+      <p:sp>
+        <p:nvSpPr>
+          <p:cNvPr id="14" name="Rounded Rectangle 13"/>
+          <p:cNvSpPr/>
+          <p:nvPr/>
+        </p:nvSpPr>
+        <p:spPr>
+          <a:xfrm>
+            <a:off x="658368" y="4078224"/>
+            <a:ext cx="4160520" cy="1417320"/>
+          </a:xfrm>
+          <a:prstGeom prst="roundRect">
+            <a:avLst/>
+          </a:prstGeom>
+          <a:solidFill>
+            <a:srgbClr val="1D232D"/>
+          </a:solidFill>
+          <a:ln>
+            <a:solidFill>
+              <a:srgbClr val="1D232D"/>
+            </a:solidFill>
+          </a:ln>
+        </p:spPr>
+        <p:style>
+          <a:lnRef idx="1">
+            <a:schemeClr val="accent1"/>
+          </a:lnRef>
+          <a:fillRef idx="3">
+            <a:schemeClr val="accent1"/>
+          </a:fillRef>
+          <a:effectRef idx="2">
+            <a:schemeClr val="accent1"/>
+          </a:effectRef>
+          <a:fontRef idx="minor">
+            <a:schemeClr val="lt1"/>
+          </a:fontRef>
+        </p:style>
+        <p:txBody>
+          <a:bodyPr rtlCol="0" anchor="ctr" wrap="square" lIns="73152" rIns="73152" tIns="36576" bIns="36576"/>
+          <a:lstStyle/>
+          <a:p>
+            <a:pPr algn="l">
+              <a:spcAft>
+                <a:spcPts val="0"/>
+              </a:spcAft>
+              <a:defRPr sz="1300" b="0">
+                <a:solidFill>
+                  <a:srgbClr val="FFFFFF"/>
+                </a:solidFill>
+                <a:latin typeface="DejaVu Sans Mono"/>
+              </a:defRPr>
+            </a:pPr>
+            <a:r>
+              <a:t>&lt;joint name="${side}_wheel_joint" type="continuous"&gt;</a:t>
+            </a:r>
+          </a:p>
+        </p:txBody>
+      </p:sp>
+      <p:sp>
+        <p:nvSpPr>
+          <p:cNvPr id="15" name="Rounded Rectangle 14"/>
+          <p:cNvSpPr/>
+          <p:nvPr/>
+        </p:nvSpPr>
+        <p:spPr>
+          <a:xfrm>
+            <a:off x="5029200" y="4078224"/>
+            <a:ext cx="6537960" cy="1417320"/>
+          </a:xfrm>
+          <a:prstGeom prst="roundRect">
+            <a:avLst/>
+          </a:prstGeom>
+          <a:solidFill>
+            <a:srgbClr val="F4F7FB"/>
+          </a:solidFill>
+          <a:ln>
+            <a:solidFill>
+              <a:srgbClr val="225B9B"/>
+            </a:solidFill>
+          </a:ln>
+        </p:spPr>
+        <p:style>
+          <a:lnRef idx="1">
+            <a:schemeClr val="accent1"/>
+          </a:lnRef>
+          <a:fillRef idx="3">
+            <a:schemeClr val="accent1"/>
+          </a:fillRef>
+          <a:effectRef idx="2">
+            <a:schemeClr val="accent1"/>
+          </a:effectRef>
+          <a:fontRef idx="minor">
+            <a:schemeClr val="lt1"/>
+          </a:fontRef>
+        </p:style>
+        <p:txBody>
+          <a:bodyPr rtlCol="0" anchor="ctr"/>
+          <a:lstStyle/>
+          <a:p>
+            <a:pPr algn="ctr"/>
+          </a:p>
+        </p:txBody>
+      </p:sp>
+      <p:sp>
+        <p:nvSpPr>
+          <p:cNvPr id="16" name="TextBox 15"/>
+          <p:cNvSpPr txBox="1"/>
+          <p:nvPr/>
+        </p:nvSpPr>
+        <p:spPr>
+          <a:xfrm>
+            <a:off x="5239512" y="4187952"/>
+            <a:ext cx="594360" cy="219456"/>
+          </a:xfrm>
+          <a:prstGeom prst="rect">
+            <a:avLst/>
+          </a:prstGeom>
+          <a:noFill/>
+        </p:spPr>
+        <p:txBody>
+          <a:bodyPr wrap="square" lIns="73152" rIns="73152" tIns="36576" bIns="36576">
+            <a:spAutoFit/>
+          </a:bodyPr>
+          <a:lstStyle/>
+          <a:p>
+            <a:pPr algn="l">
+              <a:spcAft>
+                <a:spcPts val="0"/>
+              </a:spcAft>
+              <a:defRPr sz="1400" b="1">
+                <a:solidFill>
+                  <a:srgbClr val="225B9B"/>
+                </a:solidFill>
+                <a:latin typeface="Noto Sans CJK KR"/>
+              </a:defRPr>
+            </a:pPr>
+            <a:r>
+              <a:t>2.</a:t>
+            </a:r>
+          </a:p>
+        </p:txBody>
+      </p:sp>
+      <p:sp>
+        <p:nvSpPr>
+          <p:cNvPr id="17" name="TextBox 16"/>
+          <p:cNvSpPr txBox="1"/>
+          <p:nvPr/>
+        </p:nvSpPr>
+        <p:spPr>
+          <a:xfrm>
+            <a:off x="5596128" y="4169663"/>
+            <a:ext cx="5696712" cy="493776"/>
+          </a:xfrm>
+          <a:prstGeom prst="rect">
+            <a:avLst/>
+          </a:prstGeom>
+          <a:noFill/>
+        </p:spPr>
+        <p:txBody>
+          <a:bodyPr wrap="square" lIns="73152" rIns="73152" tIns="36576" bIns="36576">
+            <a:spAutoFit/>
+          </a:bodyPr>
+          <a:lstStyle/>
+          <a:p>
+            <a:pPr algn="l">
+              <a:spcAft>
+                <a:spcPts val="0"/>
+              </a:spcAft>
+              <a:defRPr sz="1300" b="0">
+                <a:solidFill>
+                  <a:srgbClr val="122C4E"/>
+                </a:solidFill>
+                <a:latin typeface="Noto Sans CJK KR"/>
+              </a:defRPr>
+            </a:pPr>
+            <a:r>
+              <a:t>뜻: 두 link를 어떤 축·방식으로 연결할지 정합니다.</a:t>
+            </a:r>
+          </a:p>
+        </p:txBody>
+      </p:sp>
+      <p:sp>
+        <p:nvSpPr>
+          <p:cNvPr id="18" name="TextBox 17"/>
+          <p:cNvSpPr txBox="1"/>
+          <p:nvPr/>
+        </p:nvSpPr>
+        <p:spPr>
+          <a:xfrm>
+            <a:off x="5596128" y="4828032"/>
+            <a:ext cx="5696712" cy="457200"/>
+          </a:xfrm>
+          <a:prstGeom prst="rect">
+            <a:avLst/>
+          </a:prstGeom>
+          <a:noFill/>
+        </p:spPr>
+        <p:txBody>
+          <a:bodyPr wrap="square" lIns="73152" rIns="73152" tIns="36576" bIns="36576">
+            <a:spAutoFit/>
+          </a:bodyPr>
+          <a:lstStyle/>
+          <a:p>
+            <a:pPr algn="l">
+              <a:spcAft>
+                <a:spcPts val="0"/>
+              </a:spcAft>
+              <a:defRPr sz="1200" b="0">
+                <a:solidFill>
+                  <a:srgbClr val="2A8B5A"/>
+                </a:solidFill>
+                <a:latin typeface="Noto Sans CJK KR"/>
+              </a:defRPr>
+            </a:pPr>
+            <a:r>
+              <a:t>실행에서: joint 이름·축이 맞아야 바퀴와 센서 frame이 기대한 위치에 있습니다.</a:t>
+            </a:r>
+          </a:p>
+        </p:txBody>
+      </p:sp>
+      <p:sp>
+        <p:nvSpPr>
+          <p:cNvPr id="19" name="TextBox 18"/>
+          <p:cNvSpPr txBox="1"/>
+          <p:nvPr/>
+        </p:nvSpPr>
+        <p:spPr>
+          <a:xfrm>
+            <a:off x="749808" y="6199632"/>
+            <a:ext cx="10698480" cy="182880"/>
+          </a:xfrm>
+          <a:prstGeom prst="rect">
+            <a:avLst/>
+          </a:prstGeom>
+          <a:noFill/>
+        </p:spPr>
+        <p:txBody>
+          <a:bodyPr wrap="square" lIns="73152" rIns="73152" tIns="36576" bIns="36576">
+            <a:spAutoFit/>
+          </a:bodyPr>
+          <a:lstStyle/>
+          <a:p>
+            <a:pPr algn="ctr">
+              <a:spcAft>
+                <a:spcPts val="0"/>
+              </a:spcAft>
+              <a:defRPr sz="1100" b="0">
                 <a:solidFill>
                   <a:srgbClr val="5C6672"/>
                 </a:solidFill>
@@ -8871,7 +10093,7 @@
               </a:defRPr>
             </a:pPr>
             <a:r>
-              <a:t>입력 3/5 · 이 파일의 다음 코드 블록이 바로 다음 슬라이드에 이어집니다.</a:t>
+              <a:t>다음 코드 입력 슬라이드에서 이 줄을 발견하면, 방금 설명한 ‘뜻’과 ‘실행에서 보이는 변화’를 다시 말해 봅니다.</a:t>
             </a:r>
           </a:p>
         </p:txBody>
@@ -8928,7 +10150,7 @@
               </a:defRPr>
             </a:pPr>
             <a:r>
-              <a:t>구현 1/1: 코드 입력 (4/5)</a:t>
+              <a:t>구현 1/1: 코드 입력 (1/5)</a:t>
             </a:r>
           </a:p>
         </p:txBody>
@@ -9103,7 +10325,7 @@
               </a:defRPr>
             </a:pPr>
             <a:r>
-              <a:t>현재 단계 파일 1/1 · 입력 4/5    |    현재 폴더 ~/ros2_curri/my_agv_ws    |    현재 터미널</a:t>
+              <a:t>현재 단계 파일 1/1 · 입력 1/5    |    현재 폴더 ~/ros2_curri/my_agv_ws    |    현재 터미널</a:t>
             </a:r>
           </a:p>
         </p:txBody>
@@ -9142,7 +10364,7 @@
               </a:defRPr>
             </a:pPr>
             <a:r>
-              <a:t>이 블록이 하는 일: 앞에서 만든 구조에 geometry·collision·sensor·joint를 하나씩 붙입니다.</a:t>
+              <a:t>이 블록이 하는 일: 파일의 root와 첫 model/link를 입력합니다. 태그 여닫는 순서를 그대로 유지합니다.</a:t>
             </a:r>
           </a:p>
         </p:txBody>
@@ -9262,27 +10484,27 @@
               </a:defRPr>
             </a:pPr>
             <a:r>
-              <a:t>      &lt;origin xyz="0 0 0.16"/&gt;</a:t>
+              <a:t>&lt;?xml version="1.0" ?&gt;</a:t>
             </a:r>
             <a:br/>
             <a:r>
-              <a:t>      &lt;geometry&gt;</a:t>
+              <a:t>&lt;robot xmlns:xacro="http://www.ros.org/wiki/xacro" name="agv_m06"&gt;</a:t>
             </a:r>
             <a:br/>
             <a:r>
-              <a:t>        &lt;box size="0.60 0.42 0.16"/&gt;</a:t>
+              <a:t>  </a:t>
             </a:r>
             <a:br/>
             <a:r>
-              <a:t>      &lt;/geometry&gt;</a:t>
+              <a:t>  </a:t>
             </a:r>
             <a:br/>
             <a:r>
-              <a:t>    &lt;/visual&gt;</a:t>
+              <a:t>  &lt;xacro:property name="wheel_radius" value="0.08"/&gt;</a:t>
             </a:r>
             <a:br/>
             <a:r>
-              <a:t>  &lt;/link&gt;</a:t>
+              <a:t>  </a:t>
             </a:r>
             <a:br/>
             <a:r>
@@ -9290,21 +10512,24 @@
             </a:r>
             <a:br/>
             <a:r>
+              <a:t>  &lt;xacro:property name="half_track" value="0.19"/&gt;</a:t>
+            </a:r>
+            <a:br/>
+            <a:r>
               <a:t>  </a:t>
             </a:r>
             <a:br/>
             <a:r>
-              <a:t>  &lt;xacro:wheel side="left" y="${half_track}"/&gt;</a:t>
+              <a:t>  </a:t>
             </a:r>
             <a:br/>
             <a:r>
-              <a:t>  &lt;xacro:wheel side="right" y="${-half_track}"/&gt;</a:t>
+              <a:t>  &lt;xacro:macro name="wheel" params="side y"&gt;</a:t>
             </a:r>
             <a:br/>
             <a:r>
-              <a:t>  </a:t>
-            </a:r>
-            <a:br/>
+              <a:t>    </a:t>
+            </a:r>
           </a:p>
         </p:txBody>
       </p:sp>
@@ -9342,7 +10567,7 @@
               </a:defRPr>
             </a:pPr>
             <a:r>
-              <a:t>입력 4/5 · 이 파일의 다음 코드 블록이 바로 다음 슬라이드에 이어집니다.</a:t>
+              <a:t>입력 1/5 · 이 파일의 다음 코드 블록이 바로 다음 슬라이드에 이어집니다.</a:t>
             </a:r>
           </a:p>
         </p:txBody>
@@ -9399,7 +10624,7 @@
               </a:defRPr>
             </a:pPr>
             <a:r>
-              <a:t>구현 1/1: 코드 입력 (5/5)</a:t>
+              <a:t>구현 1/1: 코드 입력 (2/5)</a:t>
             </a:r>
           </a:p>
         </p:txBody>
@@ -9574,7 +10799,7 @@
               </a:defRPr>
             </a:pPr>
             <a:r>
-              <a:t>현재 단계 파일 1/1 · 입력 5/5    |    현재 폴더 ~/ros2_curri/my_agv_ws    |    현재 터미널</a:t>
+              <a:t>현재 단계 파일 1/1 · 입력 2/5    |    현재 폴더 ~/ros2_curri/my_agv_ws    |    현재 터미널</a:t>
             </a:r>
           </a:p>
         </p:txBody>
@@ -9613,7 +10838,7 @@
               </a:defRPr>
             </a:pPr>
             <a:r>
-              <a:t>이 블록이 하는 일: 마지막 joint·sensor·plugin과 닫는 태그를 입력해 구조를 완성합니다.</a:t>
+              <a:t>이 블록이 하는 일: 앞에서 만든 구조에 geometry·collision·sensor·joint를 하나씩 붙입니다.</a:t>
             </a:r>
           </a:p>
         </p:txBody>
@@ -9733,7 +10958,51 @@
               </a:defRPr>
             </a:pPr>
             <a:r>
-              <a:t>&lt;/robot&gt;</a:t>
+              <a:t>    </a:t>
+            </a:r>
+            <a:br/>
+            <a:r>
+              <a:t>    &lt;link name="${side}_wheel_link"&gt;</a:t>
+            </a:r>
+            <a:br/>
+            <a:r>
+              <a:t>      &lt;visual&gt;</a:t>
+            </a:r>
+            <a:br/>
+            <a:r>
+              <a:t>        &lt;origin rpy="1.5708 0 0"/&gt;</a:t>
+            </a:r>
+            <a:br/>
+            <a:r>
+              <a:t>        &lt;geometry&gt;</a:t>
+            </a:r>
+            <a:br/>
+            <a:r>
+              <a:t>          &lt;cylinder radius="${wheel_radius}" length="0.05"/&gt;</a:t>
+            </a:r>
+            <a:br/>
+            <a:r>
+              <a:t>        &lt;/geometry&gt;</a:t>
+            </a:r>
+            <a:br/>
+            <a:r>
+              <a:t>      &lt;/visual&gt;</a:t>
+            </a:r>
+            <a:br/>
+            <a:r>
+              <a:t>    &lt;/link&gt;</a:t>
+            </a:r>
+            <a:br/>
+            <a:r>
+              <a:t>    </a:t>
+            </a:r>
+            <a:br/>
+            <a:r>
+              <a:t>    </a:t>
+            </a:r>
+            <a:br/>
+            <a:r>
+              <a:t>    &lt;joint name="${side}_wheel_joint" type="continuous"&gt;</a:t>
             </a:r>
           </a:p>
         </p:txBody>
@@ -9772,7 +11041,7 @@
               </a:defRPr>
             </a:pPr>
             <a:r>
-              <a:t>입력 5/5 · 이 파일의 다음 코드 블록이 바로 다음 슬라이드에 이어집니다.</a:t>
+              <a:t>입력 2/5 · 이 파일의 다음 코드 블록이 바로 다음 슬라이드에 이어집니다.</a:t>
             </a:r>
           </a:p>
         </p:txBody>
@@ -9829,7 +11098,7 @@
               </a:defRPr>
             </a:pPr>
             <a:r>
-              <a:t>구현 뒤 실행 1/2: 처음으로 Xacro macro를 만든다</a:t>
+              <a:t>구현 1/1: 코드 입력 (3/5)</a:t>
             </a:r>
           </a:p>
         </p:txBody>
@@ -9868,7 +11137,7 @@
               </a:defRPr>
             </a:pPr>
             <a:r>
-              <a:t>방금 직접 만든 파일을 실행·검사하며 다음 파일로 넘어갈 기준을 만듭니다.</a:t>
+              <a:t>~/ros2_curri/my_agv_ws/src/agv_description/curriculum_stages/M06/agv.urdf.xacro</a:t>
             </a:r>
           </a:p>
         </p:txBody>
@@ -10004,7 +11273,7 @@
               </a:defRPr>
             </a:pPr>
             <a:r>
-              <a:t>현재 단계 실행 1/2    |    현재 폴더 ~/ros2_curri/my_agv_ws    |    현재 터미널</a:t>
+              <a:t>현재 단계 파일 1/1 · 입력 3/5    |    현재 폴더 ~/ros2_curri/my_agv_ws    |    현재 터미널</a:t>
             </a:r>
           </a:p>
         </p:txBody>
@@ -10017,64 +11286,25 @@
         </p:nvSpPr>
         <p:spPr>
           <a:xfrm>
-            <a:off x="676656" y="1764792"/>
-            <a:ext cx="1828800" cy="347472"/>
-          </a:xfrm>
-          <a:prstGeom prst="rect">
-            <a:avLst/>
-          </a:prstGeom>
-          <a:noFill/>
-        </p:spPr>
-        <p:txBody>
-          <a:bodyPr wrap="square" lIns="73152" rIns="73152" tIns="36576" bIns="36576">
-            <a:spAutoFit/>
-          </a:bodyPr>
-          <a:lstStyle/>
-          <a:p>
-            <a:pPr algn="l">
-              <a:spcAft>
-                <a:spcPts val="0"/>
-              </a:spcAft>
-              <a:defRPr sz="1800" b="1">
-                <a:solidFill>
-                  <a:srgbClr val="225B9B"/>
-                </a:solidFill>
-                <a:latin typeface="Noto Sans CJK KR"/>
-              </a:defRPr>
-            </a:pPr>
-            <a:r>
-              <a:t>왜 하는가</a:t>
-            </a:r>
-          </a:p>
-        </p:txBody>
-      </p:sp>
-      <p:sp>
-        <p:nvSpPr>
-          <p:cNvPr id="8" name="TextBox 7"/>
-          <p:cNvSpPr txBox="1"/>
-          <p:nvPr/>
-        </p:nvSpPr>
-        <p:spPr>
-          <a:xfrm>
-            <a:off x="676656" y="2103120"/>
-            <a:ext cx="10789920" cy="512064"/>
-          </a:xfrm>
-          <a:prstGeom prst="rect">
-            <a:avLst/>
-          </a:prstGeom>
-          <a:noFill/>
-        </p:spPr>
-        <p:txBody>
-          <a:bodyPr wrap="square" lIns="73152" rIns="73152" tIns="36576" bIns="36576">
-            <a:spAutoFit/>
-          </a:bodyPr>
-          <a:lstStyle/>
-          <a:p>
-            <a:pPr algn="l">
-              <a:spcAft>
-                <a:spcPts val="0"/>
-              </a:spcAft>
-              <a:defRPr sz="2000" b="0">
+            <a:off x="658368" y="1609344"/>
+            <a:ext cx="10972800" cy="384048"/>
+          </a:xfrm>
+          <a:prstGeom prst="rect">
+            <a:avLst/>
+          </a:prstGeom>
+          <a:noFill/>
+        </p:spPr>
+        <p:txBody>
+          <a:bodyPr wrap="square" lIns="73152" rIns="73152" tIns="36576" bIns="36576">
+            <a:spAutoFit/>
+          </a:bodyPr>
+          <a:lstStyle/>
+          <a:p>
+            <a:pPr algn="l">
+              <a:spcAft>
+                <a:spcPts val="0"/>
+              </a:spcAft>
+              <a:defRPr sz="1400" b="1">
                 <a:solidFill>
                   <a:srgbClr val="122C4E"/>
                 </a:solidFill>
@@ -10082,23 +11312,85 @@
               </a:defRPr>
             </a:pPr>
             <a:r>
-              <a:t>M05 단일 URDF의 반복 바퀴 구조를 macro/property로 바꾸는 첫 단계다.</a:t>
-            </a:r>
-          </a:p>
-        </p:txBody>
-      </p:sp>
-      <p:sp>
-        <p:nvSpPr>
-          <p:cNvPr id="9" name="Rounded Rectangle 8"/>
+              <a:t>이 블록이 하는 일: 앞에서 만든 구조에 geometry·collision·sensor·joint를 하나씩 붙입니다.</a:t>
+            </a:r>
+          </a:p>
+        </p:txBody>
+      </p:sp>
+      <p:sp>
+        <p:nvSpPr>
+          <p:cNvPr id="8" name="Rectangle 7"/>
           <p:cNvSpPr/>
           <p:nvPr/>
         </p:nvSpPr>
         <p:spPr>
           <a:xfrm>
-            <a:off x="676656" y="2871216"/>
-            <a:ext cx="10835640" cy="2331720"/>
-          </a:xfrm>
-          <a:prstGeom prst="roundRect">
+            <a:off x="658368" y="1956816"/>
+            <a:ext cx="10972800" cy="603504"/>
+          </a:xfrm>
+          <a:prstGeom prst="rect">
+            <a:avLst/>
+          </a:prstGeom>
+          <a:solidFill>
+            <a:srgbClr val="F4F7FB"/>
+          </a:solidFill>
+          <a:ln>
+            <a:solidFill>
+              <a:srgbClr val="F4F7FB"/>
+            </a:solidFill>
+          </a:ln>
+        </p:spPr>
+        <p:style>
+          <a:lnRef idx="1">
+            <a:schemeClr val="accent1"/>
+          </a:lnRef>
+          <a:fillRef idx="3">
+            <a:schemeClr val="accent1"/>
+          </a:fillRef>
+          <a:effectRef idx="2">
+            <a:schemeClr val="accent1"/>
+          </a:effectRef>
+          <a:fontRef idx="minor">
+            <a:schemeClr val="lt1"/>
+          </a:fontRef>
+        </p:style>
+        <p:txBody>
+          <a:bodyPr rtlCol="0" anchor="ctr" wrap="square" lIns="73152" rIns="73152" tIns="36576" bIns="36576"/>
+          <a:lstStyle/>
+          <a:p>
+            <a:pPr algn="l">
+              <a:spcAft>
+                <a:spcPts val="0"/>
+              </a:spcAft>
+              <a:defRPr sz="1300" b="0">
+                <a:solidFill>
+                  <a:srgbClr val="122C4E"/>
+                </a:solidFill>
+                <a:latin typeface="DejaVu Sans Mono"/>
+              </a:defRPr>
+            </a:pPr>
+            <a:r>
+              <a:t>현재 열린 파일: ~/ros2_curri/my_agv_ws/src/agv_description/curriculum_stages/M06/agv.urdf.xacro</a:t>
+            </a:r>
+            <a:br/>
+            <a:r>
+              <a:t>아래 코드만 입력 → Ctrl+O → Enter로 저장 → 다음 블록으로 이동</a:t>
+            </a:r>
+          </a:p>
+        </p:txBody>
+      </p:sp>
+      <p:sp>
+        <p:nvSpPr>
+          <p:cNvPr id="9" name="Rectangle 8"/>
+          <p:cNvSpPr/>
+          <p:nvPr/>
+        </p:nvSpPr>
+        <p:spPr>
+          <a:xfrm>
+            <a:off x="658368" y="2706624"/>
+            <a:ext cx="10972800" cy="3364992"/>
+          </a:xfrm>
+          <a:prstGeom prst="rect">
             <a:avLst/>
           </a:prstGeom>
           <a:solidFill>
@@ -10125,14 +11417,14 @@
           </a:fontRef>
         </p:style>
         <p:txBody>
-          <a:bodyPr rtlCol="0" anchor="ctr" wrap="square" lIns="73152" rIns="73152" tIns="36576" bIns="36576"/>
-          <a:lstStyle/>
-          <a:p>
-            <a:pPr algn="l">
-              <a:spcAft>
-                <a:spcPts val="0"/>
-              </a:spcAft>
-              <a:defRPr sz="1600" b="0">
+          <a:bodyPr rtlCol="0" anchor="ctr" wrap="square" lIns="164592" rIns="164592" tIns="109728" bIns="36576"/>
+          <a:lstStyle/>
+          <a:p>
+            <a:pPr algn="l">
+              <a:spcAft>
+                <a:spcPts val="0"/>
+              </a:spcAft>
+              <a:defRPr sz="1400" b="0">
                 <a:solidFill>
                   <a:srgbClr val="FFFFFF"/>
                 </a:solidFill>
@@ -10140,11 +11432,51 @@
               </a:defRPr>
             </a:pPr>
             <a:r>
-              <a:t>cd ~/ros2_curri/my_agv_ws</a:t>
+              <a:t>      &lt;parent link="base_link"/&gt;</a:t>
             </a:r>
             <a:br/>
             <a:r>
-              <a:t>xacro src/agv_description/curriculum_stages/M06/agv.urdf.xacro &gt; /tmp/agv_from_xacro.urdf</a:t>
+              <a:t>      &lt;child link="${side}_wheel_link"/&gt;</a:t>
+            </a:r>
+            <a:br/>
+            <a:r>
+              <a:t>      &lt;origin xyz="0 ${y} ${wheel_radius}"/&gt;</a:t>
+            </a:r>
+            <a:br/>
+            <a:r>
+              <a:t>      &lt;axis xyz="0 1 0"/&gt;</a:t>
+            </a:r>
+            <a:br/>
+            <a:r>
+              <a:t>    &lt;/joint&gt;</a:t>
+            </a:r>
+            <a:br/>
+            <a:r>
+              <a:t>    </a:t>
+            </a:r>
+            <a:br/>
+            <a:r>
+              <a:t>  </a:t>
+            </a:r>
+            <a:br/>
+            <a:r>
+              <a:t>  &lt;/xacro:macro&gt;</a:t>
+            </a:r>
+            <a:br/>
+            <a:r>
+              <a:t>  </a:t>
+            </a:r>
+            <a:br/>
+            <a:r>
+              <a:t>  </a:t>
+            </a:r>
+            <a:br/>
+            <a:r>
+              <a:t>  &lt;link name="base_link"&gt;</a:t>
+            </a:r>
+            <a:br/>
+            <a:r>
+              <a:t>    &lt;visual&gt;</a:t>
             </a:r>
           </a:p>
         </p:txBody>
@@ -10157,72 +11489,33 @@
         </p:nvSpPr>
         <p:spPr>
           <a:xfrm>
-            <a:off x="768096" y="5468112"/>
-            <a:ext cx="1143000" cy="256032"/>
-          </a:xfrm>
-          <a:prstGeom prst="rect">
-            <a:avLst/>
-          </a:prstGeom>
-          <a:noFill/>
-        </p:spPr>
-        <p:txBody>
-          <a:bodyPr wrap="square" lIns="73152" rIns="73152" tIns="36576" bIns="36576">
-            <a:spAutoFit/>
-          </a:bodyPr>
-          <a:lstStyle/>
-          <a:p>
-            <a:pPr algn="l">
-              <a:spcAft>
-                <a:spcPts val="0"/>
-              </a:spcAft>
-              <a:defRPr sz="1800" b="1">
-                <a:solidFill>
-                  <a:srgbClr val="2A8B5A"/>
-                </a:solidFill>
-                <a:latin typeface="Noto Sans CJK KR"/>
-              </a:defRPr>
-            </a:pPr>
-            <a:r>
-              <a:t>확인</a:t>
-            </a:r>
-          </a:p>
-        </p:txBody>
-      </p:sp>
-      <p:sp>
-        <p:nvSpPr>
-          <p:cNvPr id="11" name="TextBox 10"/>
-          <p:cNvSpPr txBox="1"/>
-          <p:nvPr/>
-        </p:nvSpPr>
-        <p:spPr>
-          <a:xfrm>
-            <a:off x="768096" y="5742432"/>
-            <a:ext cx="10561320" cy="347472"/>
-          </a:xfrm>
-          <a:prstGeom prst="rect">
-            <a:avLst/>
-          </a:prstGeom>
-          <a:noFill/>
-        </p:spPr>
-        <p:txBody>
-          <a:bodyPr wrap="square" lIns="73152" rIns="73152" tIns="36576" bIns="36576">
-            <a:spAutoFit/>
-          </a:bodyPr>
-          <a:lstStyle/>
-          <a:p>
-            <a:pPr algn="l">
-              <a:spcAft>
-                <a:spcPts val="0"/>
-              </a:spcAft>
-              <a:defRPr sz="1800" b="0">
-                <a:solidFill>
-                  <a:srgbClr val="122C4E"/>
-                </a:solidFill>
-                <a:latin typeface="Noto Sans CJK KR"/>
-              </a:defRPr>
-            </a:pPr>
-            <a:r>
-              <a:t>출력에서 topic·frame·파일 이름 또는 성공 메시지를 찾고, 맞지 않으면 다음 파일로 가지 않습니다.</a:t>
+            <a:off x="749808" y="6181344"/>
+            <a:ext cx="10789920" cy="201168"/>
+          </a:xfrm>
+          <a:prstGeom prst="rect">
+            <a:avLst/>
+          </a:prstGeom>
+          <a:noFill/>
+        </p:spPr>
+        <p:txBody>
+          <a:bodyPr wrap="square" lIns="73152" rIns="73152" tIns="36576" bIns="36576">
+            <a:spAutoFit/>
+          </a:bodyPr>
+          <a:lstStyle/>
+          <a:p>
+            <a:pPr algn="l">
+              <a:spcAft>
+                <a:spcPts val="0"/>
+              </a:spcAft>
+              <a:defRPr sz="1000" b="0">
+                <a:solidFill>
+                  <a:srgbClr val="5C6672"/>
+                </a:solidFill>
+                <a:latin typeface="Noto Sans CJK KR"/>
+              </a:defRPr>
+            </a:pPr>
+            <a:r>
+              <a:t>입력 3/5 · 이 파일의 다음 코드 블록이 바로 다음 슬라이드에 이어집니다.</a:t>
             </a:r>
           </a:p>
         </p:txBody>
@@ -10279,7 +11572,7 @@
               </a:defRPr>
             </a:pPr>
             <a:r>
-              <a:t>구현 뒤 실행 2/2: property 변경을 검증한다</a:t>
+              <a:t>구현 1/1: 코드 입력 (4/5)</a:t>
             </a:r>
           </a:p>
         </p:txBody>
@@ -10318,7 +11611,7 @@
               </a:defRPr>
             </a:pPr>
             <a:r>
-              <a:t>방금 직접 만든 파일을 실행·검사하며 다음 파일로 넘어갈 기준을 만듭니다.</a:t>
+              <a:t>~/ros2_curri/my_agv_ws/src/agv_description/curriculum_stages/M06/agv.urdf.xacro</a:t>
             </a:r>
           </a:p>
         </p:txBody>
@@ -10454,7 +11747,7 @@
               </a:defRPr>
             </a:pPr>
             <a:r>
-              <a:t>현재 단계 실행 2/2    |    현재 폴더 ~/ros2_curri/my_agv_ws    |    현재 터미널</a:t>
+              <a:t>현재 단계 파일 1/1 · 입력 4/5    |    현재 폴더 ~/ros2_curri/my_agv_ws    |    현재 터미널</a:t>
             </a:r>
           </a:p>
         </p:txBody>
@@ -10467,64 +11760,25 @@
         </p:nvSpPr>
         <p:spPr>
           <a:xfrm>
-            <a:off x="676656" y="1764792"/>
-            <a:ext cx="1828800" cy="347472"/>
-          </a:xfrm>
-          <a:prstGeom prst="rect">
-            <a:avLst/>
-          </a:prstGeom>
-          <a:noFill/>
-        </p:spPr>
-        <p:txBody>
-          <a:bodyPr wrap="square" lIns="73152" rIns="73152" tIns="36576" bIns="36576">
-            <a:spAutoFit/>
-          </a:bodyPr>
-          <a:lstStyle/>
-          <a:p>
-            <a:pPr algn="l">
-              <a:spcAft>
-                <a:spcPts val="0"/>
-              </a:spcAft>
-              <a:defRPr sz="1800" b="1">
-                <a:solidFill>
-                  <a:srgbClr val="225B9B"/>
-                </a:solidFill>
-                <a:latin typeface="Noto Sans CJK KR"/>
-              </a:defRPr>
-            </a:pPr>
-            <a:r>
-              <a:t>왜 하는가</a:t>
-            </a:r>
-          </a:p>
-        </p:txBody>
-      </p:sp>
-      <p:sp>
-        <p:nvSpPr>
-          <p:cNvPr id="8" name="TextBox 7"/>
-          <p:cNvSpPr txBox="1"/>
-          <p:nvPr/>
-        </p:nvSpPr>
-        <p:spPr>
-          <a:xfrm>
-            <a:off x="676656" y="2103120"/>
-            <a:ext cx="10789920" cy="512064"/>
-          </a:xfrm>
-          <a:prstGeom prst="rect">
-            <a:avLst/>
-          </a:prstGeom>
-          <a:noFill/>
-        </p:spPr>
-        <p:txBody>
-          <a:bodyPr wrap="square" lIns="73152" rIns="73152" tIns="36576" bIns="36576">
-            <a:spAutoFit/>
-          </a:bodyPr>
-          <a:lstStyle/>
-          <a:p>
-            <a:pPr algn="l">
-              <a:spcAft>
-                <a:spcPts val="0"/>
-              </a:spcAft>
-              <a:defRPr sz="2000" b="0">
+            <a:off x="658368" y="1609344"/>
+            <a:ext cx="10972800" cy="384048"/>
+          </a:xfrm>
+          <a:prstGeom prst="rect">
+            <a:avLst/>
+          </a:prstGeom>
+          <a:noFill/>
+        </p:spPr>
+        <p:txBody>
+          <a:bodyPr wrap="square" lIns="73152" rIns="73152" tIns="36576" bIns="36576">
+            <a:spAutoFit/>
+          </a:bodyPr>
+          <a:lstStyle/>
+          <a:p>
+            <a:pPr algn="l">
+              <a:spcAft>
+                <a:spcPts val="0"/>
+              </a:spcAft>
+              <a:defRPr sz="1400" b="1">
                 <a:solidFill>
                   <a:srgbClr val="122C4E"/>
                 </a:solidFill>
@@ -10532,23 +11786,85 @@
               </a:defRPr>
             </a:pPr>
             <a:r>
-              <a:t>하나의 wheel_radius가 좌우 바퀴에 함께 적용되어야 한다.</a:t>
-            </a:r>
-          </a:p>
-        </p:txBody>
-      </p:sp>
-      <p:sp>
-        <p:nvSpPr>
-          <p:cNvPr id="9" name="Rounded Rectangle 8"/>
+              <a:t>이 블록이 하는 일: 앞에서 만든 구조에 geometry·collision·sensor·joint를 하나씩 붙입니다.</a:t>
+            </a:r>
+          </a:p>
+        </p:txBody>
+      </p:sp>
+      <p:sp>
+        <p:nvSpPr>
+          <p:cNvPr id="8" name="Rectangle 7"/>
           <p:cNvSpPr/>
           <p:nvPr/>
         </p:nvSpPr>
         <p:spPr>
           <a:xfrm>
-            <a:off x="676656" y="2871216"/>
-            <a:ext cx="10835640" cy="2331720"/>
-          </a:xfrm>
-          <a:prstGeom prst="roundRect">
+            <a:off x="658368" y="1956816"/>
+            <a:ext cx="10972800" cy="603504"/>
+          </a:xfrm>
+          <a:prstGeom prst="rect">
+            <a:avLst/>
+          </a:prstGeom>
+          <a:solidFill>
+            <a:srgbClr val="F4F7FB"/>
+          </a:solidFill>
+          <a:ln>
+            <a:solidFill>
+              <a:srgbClr val="F4F7FB"/>
+            </a:solidFill>
+          </a:ln>
+        </p:spPr>
+        <p:style>
+          <a:lnRef idx="1">
+            <a:schemeClr val="accent1"/>
+          </a:lnRef>
+          <a:fillRef idx="3">
+            <a:schemeClr val="accent1"/>
+          </a:fillRef>
+          <a:effectRef idx="2">
+            <a:schemeClr val="accent1"/>
+          </a:effectRef>
+          <a:fontRef idx="minor">
+            <a:schemeClr val="lt1"/>
+          </a:fontRef>
+        </p:style>
+        <p:txBody>
+          <a:bodyPr rtlCol="0" anchor="ctr" wrap="square" lIns="73152" rIns="73152" tIns="36576" bIns="36576"/>
+          <a:lstStyle/>
+          <a:p>
+            <a:pPr algn="l">
+              <a:spcAft>
+                <a:spcPts val="0"/>
+              </a:spcAft>
+              <a:defRPr sz="1300" b="0">
+                <a:solidFill>
+                  <a:srgbClr val="122C4E"/>
+                </a:solidFill>
+                <a:latin typeface="DejaVu Sans Mono"/>
+              </a:defRPr>
+            </a:pPr>
+            <a:r>
+              <a:t>현재 열린 파일: ~/ros2_curri/my_agv_ws/src/agv_description/curriculum_stages/M06/agv.urdf.xacro</a:t>
+            </a:r>
+            <a:br/>
+            <a:r>
+              <a:t>아래 코드만 입력 → Ctrl+O → Enter로 저장 → 다음 블록으로 이동</a:t>
+            </a:r>
+          </a:p>
+        </p:txBody>
+      </p:sp>
+      <p:sp>
+        <p:nvSpPr>
+          <p:cNvPr id="9" name="Rectangle 8"/>
+          <p:cNvSpPr/>
+          <p:nvPr/>
+        </p:nvSpPr>
+        <p:spPr>
+          <a:xfrm>
+            <a:off x="658368" y="2706624"/>
+            <a:ext cx="10972800" cy="3364992"/>
+          </a:xfrm>
+          <a:prstGeom prst="rect">
             <a:avLst/>
           </a:prstGeom>
           <a:solidFill>
@@ -10575,14 +11891,14 @@
           </a:fontRef>
         </p:style>
         <p:txBody>
-          <a:bodyPr rtlCol="0" anchor="ctr" wrap="square" lIns="73152" rIns="73152" tIns="36576" bIns="36576"/>
-          <a:lstStyle/>
-          <a:p>
-            <a:pPr algn="l">
-              <a:spcAft>
-                <a:spcPts val="0"/>
-              </a:spcAft>
-              <a:defRPr sz="1600" b="0">
+          <a:bodyPr rtlCol="0" anchor="ctr" wrap="square" lIns="164592" rIns="164592" tIns="109728" bIns="36576"/>
+          <a:lstStyle/>
+          <a:p>
+            <a:pPr algn="l">
+              <a:spcAft>
+                <a:spcPts val="0"/>
+              </a:spcAft>
+              <a:defRPr sz="1400" b="0">
                 <a:solidFill>
                   <a:srgbClr val="FFFFFF"/>
                 </a:solidFill>
@@ -10590,12 +11906,49 @@
               </a:defRPr>
             </a:pPr>
             <a:r>
-              <a:t>check_urdf /tmp/agv_from_xacro.urdf</a:t>
+              <a:t>      &lt;origin xyz="0 0 0.16"/&gt;</a:t>
             </a:r>
             <a:br/>
             <a:r>
-              <a:t># wheel_radius 값을 바꾼 뒤 같은 두 명령을 다시 실행</a:t>
-            </a:r>
+              <a:t>      &lt;geometry&gt;</a:t>
+            </a:r>
+            <a:br/>
+            <a:r>
+              <a:t>        &lt;box size="0.60 0.42 0.16"/&gt;</a:t>
+            </a:r>
+            <a:br/>
+            <a:r>
+              <a:t>      &lt;/geometry&gt;</a:t>
+            </a:r>
+            <a:br/>
+            <a:r>
+              <a:t>    &lt;/visual&gt;</a:t>
+            </a:r>
+            <a:br/>
+            <a:r>
+              <a:t>  &lt;/link&gt;</a:t>
+            </a:r>
+            <a:br/>
+            <a:r>
+              <a:t>  </a:t>
+            </a:r>
+            <a:br/>
+            <a:r>
+              <a:t>  </a:t>
+            </a:r>
+            <a:br/>
+            <a:r>
+              <a:t>  &lt;xacro:wheel side="left" y="${half_track}"/&gt;</a:t>
+            </a:r>
+            <a:br/>
+            <a:r>
+              <a:t>  &lt;xacro:wheel side="right" y="${-half_track}"/&gt;</a:t>
+            </a:r>
+            <a:br/>
+            <a:r>
+              <a:t>  </a:t>
+            </a:r>
+            <a:br/>
           </a:p>
         </p:txBody>
       </p:sp>
@@ -10607,72 +11960,33 @@
         </p:nvSpPr>
         <p:spPr>
           <a:xfrm>
-            <a:off x="768096" y="5468112"/>
-            <a:ext cx="1143000" cy="256032"/>
-          </a:xfrm>
-          <a:prstGeom prst="rect">
-            <a:avLst/>
-          </a:prstGeom>
-          <a:noFill/>
-        </p:spPr>
-        <p:txBody>
-          <a:bodyPr wrap="square" lIns="73152" rIns="73152" tIns="36576" bIns="36576">
-            <a:spAutoFit/>
-          </a:bodyPr>
-          <a:lstStyle/>
-          <a:p>
-            <a:pPr algn="l">
-              <a:spcAft>
-                <a:spcPts val="0"/>
-              </a:spcAft>
-              <a:defRPr sz="1800" b="1">
-                <a:solidFill>
-                  <a:srgbClr val="2A8B5A"/>
-                </a:solidFill>
-                <a:latin typeface="Noto Sans CJK KR"/>
-              </a:defRPr>
-            </a:pPr>
-            <a:r>
-              <a:t>확인</a:t>
-            </a:r>
-          </a:p>
-        </p:txBody>
-      </p:sp>
-      <p:sp>
-        <p:nvSpPr>
-          <p:cNvPr id="11" name="TextBox 10"/>
-          <p:cNvSpPr txBox="1"/>
-          <p:nvPr/>
-        </p:nvSpPr>
-        <p:spPr>
-          <a:xfrm>
-            <a:off x="768096" y="5742432"/>
-            <a:ext cx="10561320" cy="347472"/>
-          </a:xfrm>
-          <a:prstGeom prst="rect">
-            <a:avLst/>
-          </a:prstGeom>
-          <a:noFill/>
-        </p:spPr>
-        <p:txBody>
-          <a:bodyPr wrap="square" lIns="73152" rIns="73152" tIns="36576" bIns="36576">
-            <a:spAutoFit/>
-          </a:bodyPr>
-          <a:lstStyle/>
-          <a:p>
-            <a:pPr algn="l">
-              <a:spcAft>
-                <a:spcPts val="0"/>
-              </a:spcAft>
-              <a:defRPr sz="1800" b="0">
-                <a:solidFill>
-                  <a:srgbClr val="122C4E"/>
-                </a:solidFill>
-                <a:latin typeface="Noto Sans CJK KR"/>
-              </a:defRPr>
-            </a:pPr>
-            <a:r>
-              <a:t>출력에서 topic·frame·파일 이름 또는 성공 메시지를 찾고, 맞지 않으면 다음 파일로 가지 않습니다.</a:t>
+            <a:off x="749808" y="6181344"/>
+            <a:ext cx="10789920" cy="201168"/>
+          </a:xfrm>
+          <a:prstGeom prst="rect">
+            <a:avLst/>
+          </a:prstGeom>
+          <a:noFill/>
+        </p:spPr>
+        <p:txBody>
+          <a:bodyPr wrap="square" lIns="73152" rIns="73152" tIns="36576" bIns="36576">
+            <a:spAutoFit/>
+          </a:bodyPr>
+          <a:lstStyle/>
+          <a:p>
+            <a:pPr algn="l">
+              <a:spcAft>
+                <a:spcPts val="0"/>
+              </a:spcAft>
+              <a:defRPr sz="1000" b="0">
+                <a:solidFill>
+                  <a:srgbClr val="5C6672"/>
+                </a:solidFill>
+                <a:latin typeface="Noto Sans CJK KR"/>
+              </a:defRPr>
+            </a:pPr>
+            <a:r>
+              <a:t>입력 4/5 · 이 파일의 다음 코드 블록이 바로 다음 슬라이드에 이어집니다.</a:t>
             </a:r>
           </a:p>
         </p:txBody>
@@ -10729,7 +12043,7 @@
               </a:defRPr>
             </a:pPr>
             <a:r>
-              <a:t>build → source → run 순서로 실행한다</a:t>
+              <a:t>구현 1/1: 코드 입력 (5/5)</a:t>
             </a:r>
           </a:p>
         </p:txBody>
@@ -10768,7 +12082,7 @@
               </a:defRPr>
             </a:pPr>
             <a:r>
-              <a:t>새 파일 또는 수정 파일은 build와 source 뒤에만 실행 이름·설정에 반영됩니다.</a:t>
+              <a:t>~/ros2_curri/my_agv_ws/src/agv_description/curriculum_stages/M06/agv.urdf.xacro</a:t>
             </a:r>
           </a:p>
         </p:txBody>
@@ -10904,23 +12218,124 @@
               </a:defRPr>
             </a:pPr>
             <a:r>
-              <a:t>현재 단계 실행    |    현재 폴더 ~/ros2_curri/my_agv_ws    |    현재 터미널</a:t>
-            </a:r>
-          </a:p>
-        </p:txBody>
-      </p:sp>
-      <p:sp>
-        <p:nvSpPr>
-          <p:cNvPr id="7" name="Rounded Rectangle 6"/>
+              <a:t>현재 단계 파일 1/1 · 입력 5/5    |    현재 폴더 ~/ros2_curri/my_agv_ws    |    현재 터미널</a:t>
+            </a:r>
+          </a:p>
+        </p:txBody>
+      </p:sp>
+      <p:sp>
+        <p:nvSpPr>
+          <p:cNvPr id="7" name="TextBox 6"/>
+          <p:cNvSpPr txBox="1"/>
+          <p:nvPr/>
+        </p:nvSpPr>
+        <p:spPr>
+          <a:xfrm>
+            <a:off x="658368" y="1609344"/>
+            <a:ext cx="10972800" cy="384048"/>
+          </a:xfrm>
+          <a:prstGeom prst="rect">
+            <a:avLst/>
+          </a:prstGeom>
+          <a:noFill/>
+        </p:spPr>
+        <p:txBody>
+          <a:bodyPr wrap="square" lIns="73152" rIns="73152" tIns="36576" bIns="36576">
+            <a:spAutoFit/>
+          </a:bodyPr>
+          <a:lstStyle/>
+          <a:p>
+            <a:pPr algn="l">
+              <a:spcAft>
+                <a:spcPts val="0"/>
+              </a:spcAft>
+              <a:defRPr sz="1400" b="1">
+                <a:solidFill>
+                  <a:srgbClr val="122C4E"/>
+                </a:solidFill>
+                <a:latin typeface="Noto Sans CJK KR"/>
+              </a:defRPr>
+            </a:pPr>
+            <a:r>
+              <a:t>이 블록이 하는 일: 마지막 joint·sensor·plugin과 닫는 태그를 입력해 구조를 완성합니다.</a:t>
+            </a:r>
+          </a:p>
+        </p:txBody>
+      </p:sp>
+      <p:sp>
+        <p:nvSpPr>
+          <p:cNvPr id="8" name="Rectangle 7"/>
           <p:cNvSpPr/>
           <p:nvPr/>
         </p:nvSpPr>
         <p:spPr>
           <a:xfrm>
-            <a:off x="658368" y="1700784"/>
-            <a:ext cx="10972800" cy="3182112"/>
-          </a:xfrm>
-          <a:prstGeom prst="roundRect">
+            <a:off x="658368" y="1956816"/>
+            <a:ext cx="10972800" cy="603504"/>
+          </a:xfrm>
+          <a:prstGeom prst="rect">
+            <a:avLst/>
+          </a:prstGeom>
+          <a:solidFill>
+            <a:srgbClr val="F4F7FB"/>
+          </a:solidFill>
+          <a:ln>
+            <a:solidFill>
+              <a:srgbClr val="F4F7FB"/>
+            </a:solidFill>
+          </a:ln>
+        </p:spPr>
+        <p:style>
+          <a:lnRef idx="1">
+            <a:schemeClr val="accent1"/>
+          </a:lnRef>
+          <a:fillRef idx="3">
+            <a:schemeClr val="accent1"/>
+          </a:fillRef>
+          <a:effectRef idx="2">
+            <a:schemeClr val="accent1"/>
+          </a:effectRef>
+          <a:fontRef idx="minor">
+            <a:schemeClr val="lt1"/>
+          </a:fontRef>
+        </p:style>
+        <p:txBody>
+          <a:bodyPr rtlCol="0" anchor="ctr" wrap="square" lIns="73152" rIns="73152" tIns="36576" bIns="36576"/>
+          <a:lstStyle/>
+          <a:p>
+            <a:pPr algn="l">
+              <a:spcAft>
+                <a:spcPts val="0"/>
+              </a:spcAft>
+              <a:defRPr sz="1300" b="0">
+                <a:solidFill>
+                  <a:srgbClr val="122C4E"/>
+                </a:solidFill>
+                <a:latin typeface="DejaVu Sans Mono"/>
+              </a:defRPr>
+            </a:pPr>
+            <a:r>
+              <a:t>현재 열린 파일: ~/ros2_curri/my_agv_ws/src/agv_description/curriculum_stages/M06/agv.urdf.xacro</a:t>
+            </a:r>
+            <a:br/>
+            <a:r>
+              <a:t>아래 코드만 입력 → Ctrl+O → Enter로 저장 → 다음 블록으로 이동</a:t>
+            </a:r>
+          </a:p>
+        </p:txBody>
+      </p:sp>
+      <p:sp>
+        <p:nvSpPr>
+          <p:cNvPr id="9" name="Rectangle 8"/>
+          <p:cNvSpPr/>
+          <p:nvPr/>
+        </p:nvSpPr>
+        <p:spPr>
+          <a:xfrm>
+            <a:off x="658368" y="2706624"/>
+            <a:ext cx="10972800" cy="3364992"/>
+          </a:xfrm>
+          <a:prstGeom prst="rect">
             <a:avLst/>
           </a:prstGeom>
           <a:solidFill>
@@ -10947,14 +12362,14 @@
           </a:fontRef>
         </p:style>
         <p:txBody>
-          <a:bodyPr rtlCol="0" anchor="ctr" wrap="square" lIns="73152" rIns="73152" tIns="36576" bIns="36576"/>
-          <a:lstStyle/>
-          <a:p>
-            <a:pPr algn="l">
-              <a:spcAft>
-                <a:spcPts val="0"/>
-              </a:spcAft>
-              <a:defRPr sz="1600" b="0">
+          <a:bodyPr rtlCol="0" anchor="ctr" wrap="square" lIns="164592" rIns="164592" tIns="109728" bIns="36576"/>
+          <a:lstStyle/>
+          <a:p>
+            <a:pPr algn="l">
+              <a:spcAft>
+                <a:spcPts val="0"/>
+              </a:spcAft>
+              <a:defRPr sz="1400" b="0">
                 <a:solidFill>
                   <a:srgbClr val="FFFFFF"/>
                 </a:solidFill>
@@ -10962,89 +12377,46 @@
               </a:defRPr>
             </a:pPr>
             <a:r>
-              <a:t>xacro ~/ros2_curri/my_agv_ws/src/agv_description/curriculum_stages/M06/agv.urdf.xacro &gt; /tmp/agv.urdf</a:t>
-            </a:r>
-            <a:br/>
-            <a:r>
-              <a:t>check_urdf /tmp/agv.urdf</a:t>
-            </a:r>
-          </a:p>
-        </p:txBody>
-      </p:sp>
-      <p:sp>
-        <p:nvSpPr>
-          <p:cNvPr id="8" name="TextBox 7"/>
-          <p:cNvSpPr txBox="1"/>
-          <p:nvPr/>
-        </p:nvSpPr>
-        <p:spPr>
-          <a:xfrm>
-            <a:off x="786384" y="5239512"/>
-            <a:ext cx="1261872" cy="237744"/>
-          </a:xfrm>
-          <a:prstGeom prst="rect">
-            <a:avLst/>
-          </a:prstGeom>
-          <a:noFill/>
-        </p:spPr>
-        <p:txBody>
-          <a:bodyPr wrap="square" lIns="73152" rIns="73152" tIns="36576" bIns="36576">
-            <a:spAutoFit/>
-          </a:bodyPr>
-          <a:lstStyle/>
-          <a:p>
-            <a:pPr algn="l">
-              <a:spcAft>
-                <a:spcPts val="0"/>
-              </a:spcAft>
-              <a:defRPr sz="1800" b="1">
-                <a:solidFill>
-                  <a:srgbClr val="2A8B5A"/>
-                </a:solidFill>
-                <a:latin typeface="Noto Sans CJK KR"/>
-              </a:defRPr>
-            </a:pPr>
-            <a:r>
-              <a:t>확인 기준</a:t>
-            </a:r>
-          </a:p>
-        </p:txBody>
-      </p:sp>
-      <p:sp>
-        <p:nvSpPr>
-          <p:cNvPr id="9" name="TextBox 8"/>
-          <p:cNvSpPr txBox="1"/>
-          <p:nvPr/>
-        </p:nvSpPr>
-        <p:spPr>
-          <a:xfrm>
-            <a:off x="786384" y="5532120"/>
-            <a:ext cx="10469880" cy="420624"/>
-          </a:xfrm>
-          <a:prstGeom prst="rect">
-            <a:avLst/>
-          </a:prstGeom>
-          <a:noFill/>
-        </p:spPr>
-        <p:txBody>
-          <a:bodyPr wrap="square" lIns="73152" rIns="73152" tIns="36576" bIns="36576">
-            <a:spAutoFit/>
-          </a:bodyPr>
-          <a:lstStyle/>
-          <a:p>
-            <a:pPr algn="l">
-              <a:spcAft>
-                <a:spcPts val="0"/>
-              </a:spcAft>
-              <a:defRPr sz="1800" b="0">
-                <a:solidFill>
-                  <a:srgbClr val="122C4E"/>
-                </a:solidFill>
-                <a:latin typeface="Noto Sans CJK KR"/>
-              </a:defRPr>
-            </a:pPr>
-            <a:r>
-              <a:t>wheel_radius와 wheel_base 변경이 좌우 바퀴·충돌 형상에 함께 적용된다.</a:t>
+              <a:t>&lt;/robot&gt;</a:t>
+            </a:r>
+          </a:p>
+        </p:txBody>
+      </p:sp>
+      <p:sp>
+        <p:nvSpPr>
+          <p:cNvPr id="10" name="TextBox 9"/>
+          <p:cNvSpPr txBox="1"/>
+          <p:nvPr/>
+        </p:nvSpPr>
+        <p:spPr>
+          <a:xfrm>
+            <a:off x="749808" y="6181344"/>
+            <a:ext cx="10789920" cy="201168"/>
+          </a:xfrm>
+          <a:prstGeom prst="rect">
+            <a:avLst/>
+          </a:prstGeom>
+          <a:noFill/>
+        </p:spPr>
+        <p:txBody>
+          <a:bodyPr wrap="square" lIns="73152" rIns="73152" tIns="36576" bIns="36576">
+            <a:spAutoFit/>
+          </a:bodyPr>
+          <a:lstStyle/>
+          <a:p>
+            <a:pPr algn="l">
+              <a:spcAft>
+                <a:spcPts val="0"/>
+              </a:spcAft>
+              <a:defRPr sz="1000" b="0">
+                <a:solidFill>
+                  <a:srgbClr val="5C6672"/>
+                </a:solidFill>
+                <a:latin typeface="Noto Sans CJK KR"/>
+              </a:defRPr>
+            </a:pPr>
+            <a:r>
+              <a:t>입력 5/5 · 이 파일의 다음 코드 블록이 바로 다음 슬라이드에 이어집니다.</a:t>
             </a:r>
           </a:p>
         </p:txBody>
@@ -11562,7 +12934,7 @@
               </a:defRPr>
             </a:pPr>
             <a:r>
-              <a:t>정상 결과: 실제 환경에서 확인한 출력</a:t>
+              <a:t>구현 뒤 실행 1/2: 처음으로 Xacro macro를 만든다</a:t>
             </a:r>
           </a:p>
         </p:txBody>
@@ -11601,7 +12973,7 @@
               </a:defRPr>
             </a:pPr>
             <a:r>
-              <a:t>실제 ROS 2 환경의 파일·패키지·구성 검증 로그</a:t>
+              <a:t>방금 직접 만든 파일을 실행·검사하며 다음 파일로 넘어갈 기준을 만듭니다.</a:t>
             </a:r>
           </a:p>
         </p:txBody>
@@ -11684,30 +13056,64 @@
           </a:p>
         </p:txBody>
       </p:sp>
-      <p:pic>
-        <p:nvPicPr>
-          <p:cNvPr id="6" name="Picture 5" descr="validation_terminal.png"/>
-          <p:cNvPicPr>
-            <a:picLocks noChangeAspect="1"/>
-          </p:cNvPicPr>
-          <p:nvPr/>
-        </p:nvPicPr>
-        <p:blipFill>
-          <a:blip r:embed="rId2"/>
-          <a:stretch>
-            <a:fillRect/>
-          </a:stretch>
-        </p:blipFill>
-        <p:spPr>
-          <a:xfrm>
-            <a:off x="790956" y="1884338"/>
-            <a:ext cx="10607040" cy="3738546"/>
-          </a:xfrm>
-          <a:prstGeom prst="rect">
-            <a:avLst/>
-          </a:prstGeom>
-        </p:spPr>
-      </p:pic>
+      <p:sp>
+        <p:nvSpPr>
+          <p:cNvPr id="6" name="Rectangle 5"/>
+          <p:cNvSpPr/>
+          <p:nvPr/>
+        </p:nvSpPr>
+        <p:spPr>
+          <a:xfrm>
+            <a:off x="566928" y="1188720"/>
+            <a:ext cx="11064240" cy="347472"/>
+          </a:xfrm>
+          <a:prstGeom prst="rect">
+            <a:avLst/>
+          </a:prstGeom>
+          <a:solidFill>
+            <a:srgbClr val="F4F7FB"/>
+          </a:solidFill>
+          <a:ln>
+            <a:solidFill>
+              <a:srgbClr val="F4F7FB"/>
+            </a:solidFill>
+          </a:ln>
+        </p:spPr>
+        <p:style>
+          <a:lnRef idx="1">
+            <a:schemeClr val="accent1"/>
+          </a:lnRef>
+          <a:fillRef idx="3">
+            <a:schemeClr val="accent1"/>
+          </a:fillRef>
+          <a:effectRef idx="2">
+            <a:schemeClr val="accent1"/>
+          </a:effectRef>
+          <a:fontRef idx="minor">
+            <a:schemeClr val="lt1"/>
+          </a:fontRef>
+        </p:style>
+        <p:txBody>
+          <a:bodyPr rtlCol="0" anchor="ctr" wrap="square" lIns="73152" rIns="73152" tIns="36576" bIns="36576"/>
+          <a:lstStyle/>
+          <a:p>
+            <a:pPr algn="l">
+              <a:spcAft>
+                <a:spcPts val="0"/>
+              </a:spcAft>
+              <a:defRPr sz="1300" b="1">
+                <a:solidFill>
+                  <a:srgbClr val="122C4E"/>
+                </a:solidFill>
+                <a:latin typeface="Noto Sans CJK KR"/>
+              </a:defRPr>
+            </a:pPr>
+            <a:r>
+              <a:t>현재 단계 실행 1/2    |    현재 폴더 ~/ros2_curri/my_agv_ws    |    현재 터미널</a:t>
+            </a:r>
+          </a:p>
+        </p:txBody>
+      </p:sp>
       <p:sp>
         <p:nvSpPr>
           <p:cNvPr id="7" name="TextBox 6"/>
@@ -11716,25 +13122,165 @@
         </p:nvSpPr>
         <p:spPr>
           <a:xfrm>
-            <a:off x="777240" y="6144768"/>
-            <a:ext cx="10607040" cy="310896"/>
-          </a:xfrm>
-          <a:prstGeom prst="rect">
-            <a:avLst/>
-          </a:prstGeom>
-          <a:noFill/>
-        </p:spPr>
-        <p:txBody>
-          <a:bodyPr wrap="square" lIns="73152" rIns="73152" tIns="36576" bIns="36576">
-            <a:spAutoFit/>
-          </a:bodyPr>
-          <a:lstStyle/>
-          <a:p>
-            <a:pPr algn="ctr">
-              <a:spcAft>
-                <a:spcPts val="0"/>
-              </a:spcAft>
-              <a:defRPr sz="1100" b="1">
+            <a:off x="676656" y="1764792"/>
+            <a:ext cx="1828800" cy="347472"/>
+          </a:xfrm>
+          <a:prstGeom prst="rect">
+            <a:avLst/>
+          </a:prstGeom>
+          <a:noFill/>
+        </p:spPr>
+        <p:txBody>
+          <a:bodyPr wrap="square" lIns="73152" rIns="73152" tIns="36576" bIns="36576">
+            <a:spAutoFit/>
+          </a:bodyPr>
+          <a:lstStyle/>
+          <a:p>
+            <a:pPr algn="l">
+              <a:spcAft>
+                <a:spcPts val="0"/>
+              </a:spcAft>
+              <a:defRPr sz="1800" b="1">
+                <a:solidFill>
+                  <a:srgbClr val="225B9B"/>
+                </a:solidFill>
+                <a:latin typeface="Noto Sans CJK KR"/>
+              </a:defRPr>
+            </a:pPr>
+            <a:r>
+              <a:t>왜 하는가</a:t>
+            </a:r>
+          </a:p>
+        </p:txBody>
+      </p:sp>
+      <p:sp>
+        <p:nvSpPr>
+          <p:cNvPr id="8" name="TextBox 7"/>
+          <p:cNvSpPr txBox="1"/>
+          <p:nvPr/>
+        </p:nvSpPr>
+        <p:spPr>
+          <a:xfrm>
+            <a:off x="676656" y="2103120"/>
+            <a:ext cx="10789920" cy="512064"/>
+          </a:xfrm>
+          <a:prstGeom prst="rect">
+            <a:avLst/>
+          </a:prstGeom>
+          <a:noFill/>
+        </p:spPr>
+        <p:txBody>
+          <a:bodyPr wrap="square" lIns="73152" rIns="73152" tIns="36576" bIns="36576">
+            <a:spAutoFit/>
+          </a:bodyPr>
+          <a:lstStyle/>
+          <a:p>
+            <a:pPr algn="l">
+              <a:spcAft>
+                <a:spcPts val="0"/>
+              </a:spcAft>
+              <a:defRPr sz="2000" b="0">
+                <a:solidFill>
+                  <a:srgbClr val="122C4E"/>
+                </a:solidFill>
+                <a:latin typeface="Noto Sans CJK KR"/>
+              </a:defRPr>
+            </a:pPr>
+            <a:r>
+              <a:t>M05 단일 URDF의 반복 바퀴 구조를 macro/property로 바꾸는 첫 단계다.</a:t>
+            </a:r>
+          </a:p>
+        </p:txBody>
+      </p:sp>
+      <p:sp>
+        <p:nvSpPr>
+          <p:cNvPr id="9" name="Rounded Rectangle 8"/>
+          <p:cNvSpPr/>
+          <p:nvPr/>
+        </p:nvSpPr>
+        <p:spPr>
+          <a:xfrm>
+            <a:off x="676656" y="2871216"/>
+            <a:ext cx="10835640" cy="2331720"/>
+          </a:xfrm>
+          <a:prstGeom prst="roundRect">
+            <a:avLst/>
+          </a:prstGeom>
+          <a:solidFill>
+            <a:srgbClr val="1D232D"/>
+          </a:solidFill>
+          <a:ln>
+            <a:solidFill>
+              <a:srgbClr val="1D232D"/>
+            </a:solidFill>
+          </a:ln>
+        </p:spPr>
+        <p:style>
+          <a:lnRef idx="1">
+            <a:schemeClr val="accent1"/>
+          </a:lnRef>
+          <a:fillRef idx="3">
+            <a:schemeClr val="accent1"/>
+          </a:fillRef>
+          <a:effectRef idx="2">
+            <a:schemeClr val="accent1"/>
+          </a:effectRef>
+          <a:fontRef idx="minor">
+            <a:schemeClr val="lt1"/>
+          </a:fontRef>
+        </p:style>
+        <p:txBody>
+          <a:bodyPr rtlCol="0" anchor="ctr" wrap="square" lIns="73152" rIns="73152" tIns="36576" bIns="36576"/>
+          <a:lstStyle/>
+          <a:p>
+            <a:pPr algn="l">
+              <a:spcAft>
+                <a:spcPts val="0"/>
+              </a:spcAft>
+              <a:defRPr sz="1600" b="0">
+                <a:solidFill>
+                  <a:srgbClr val="FFFFFF"/>
+                </a:solidFill>
+                <a:latin typeface="DejaVu Sans Mono"/>
+              </a:defRPr>
+            </a:pPr>
+            <a:r>
+              <a:t>cd ~/ros2_curri/my_agv_ws</a:t>
+            </a:r>
+            <a:br/>
+            <a:r>
+              <a:t>xacro src/agv_description/curriculum_stages/M06/agv.urdf.xacro &gt; /tmp/agv_from_xacro.urdf</a:t>
+            </a:r>
+          </a:p>
+        </p:txBody>
+      </p:sp>
+      <p:sp>
+        <p:nvSpPr>
+          <p:cNvPr id="10" name="TextBox 9"/>
+          <p:cNvSpPr txBox="1"/>
+          <p:nvPr/>
+        </p:nvSpPr>
+        <p:spPr>
+          <a:xfrm>
+            <a:off x="768096" y="5468112"/>
+            <a:ext cx="1143000" cy="256032"/>
+          </a:xfrm>
+          <a:prstGeom prst="rect">
+            <a:avLst/>
+          </a:prstGeom>
+          <a:noFill/>
+        </p:spPr>
+        <p:txBody>
+          <a:bodyPr wrap="square" lIns="73152" rIns="73152" tIns="36576" bIns="36576">
+            <a:spAutoFit/>
+          </a:bodyPr>
+          <a:lstStyle/>
+          <a:p>
+            <a:pPr algn="l">
+              <a:spcAft>
+                <a:spcPts val="0"/>
+              </a:spcAft>
+              <a:defRPr sz="1800" b="1">
                 <a:solidFill>
                   <a:srgbClr val="2A8B5A"/>
                 </a:solidFill>
@@ -11742,7 +13288,46 @@
               </a:defRPr>
             </a:pPr>
             <a:r>
-              <a:t>화면에서 확인: ① 명령/설정  ② 정상 출력 또는 화면  ③ 다음 검증 명령으로 재확인</a:t>
+              <a:t>확인</a:t>
+            </a:r>
+          </a:p>
+        </p:txBody>
+      </p:sp>
+      <p:sp>
+        <p:nvSpPr>
+          <p:cNvPr id="11" name="TextBox 10"/>
+          <p:cNvSpPr txBox="1"/>
+          <p:nvPr/>
+        </p:nvSpPr>
+        <p:spPr>
+          <a:xfrm>
+            <a:off x="768096" y="5742432"/>
+            <a:ext cx="10561320" cy="347472"/>
+          </a:xfrm>
+          <a:prstGeom prst="rect">
+            <a:avLst/>
+          </a:prstGeom>
+          <a:noFill/>
+        </p:spPr>
+        <p:txBody>
+          <a:bodyPr wrap="square" lIns="73152" rIns="73152" tIns="36576" bIns="36576">
+            <a:spAutoFit/>
+          </a:bodyPr>
+          <a:lstStyle/>
+          <a:p>
+            <a:pPr algn="l">
+              <a:spcAft>
+                <a:spcPts val="0"/>
+              </a:spcAft>
+              <a:defRPr sz="1800" b="0">
+                <a:solidFill>
+                  <a:srgbClr val="122C4E"/>
+                </a:solidFill>
+                <a:latin typeface="Noto Sans CJK KR"/>
+              </a:defRPr>
+            </a:pPr>
+            <a:r>
+              <a:t>출력에서 topic·frame·파일 이름 또는 성공 메시지를 찾고, 맞지 않으면 다음 파일로 가지 않습니다.</a:t>
             </a:r>
           </a:p>
         </p:txBody>
@@ -11799,7 +13384,7 @@
               </a:defRPr>
             </a:pPr>
             <a:r>
-              <a:t>객관적 검증 명령으로 완료를 확인한다</a:t>
+              <a:t>구현 뒤 실행 2/2: property 변경을 검증한다</a:t>
             </a:r>
           </a:p>
         </p:txBody>
@@ -11838,7 +13423,7 @@
               </a:defRPr>
             </a:pPr>
             <a:r>
-              <a:t>화면만 보지 말고 topic·frame·파일·parameter를 다시 확인합니다.</a:t>
+              <a:t>방금 직접 만든 파일을 실행·검사하며 다음 파일로 넘어갈 기준을 만듭니다.</a:t>
             </a:r>
           </a:p>
         </p:txBody>
@@ -11974,21 +13559,99 @@
               </a:defRPr>
             </a:pPr>
             <a:r>
-              <a:t>현재 단계 검증    |    현재 폴더 ~/ros2_curri/my_agv_ws    |    현재 터미널</a:t>
-            </a:r>
-          </a:p>
-        </p:txBody>
-      </p:sp>
-      <p:sp>
-        <p:nvSpPr>
-          <p:cNvPr id="7" name="Rounded Rectangle 6"/>
+              <a:t>현재 단계 실행 2/2    |    현재 폴더 ~/ros2_curri/my_agv_ws    |    현재 터미널</a:t>
+            </a:r>
+          </a:p>
+        </p:txBody>
+      </p:sp>
+      <p:sp>
+        <p:nvSpPr>
+          <p:cNvPr id="7" name="TextBox 6"/>
+          <p:cNvSpPr txBox="1"/>
+          <p:nvPr/>
+        </p:nvSpPr>
+        <p:spPr>
+          <a:xfrm>
+            <a:off x="676656" y="1764792"/>
+            <a:ext cx="1828800" cy="347472"/>
+          </a:xfrm>
+          <a:prstGeom prst="rect">
+            <a:avLst/>
+          </a:prstGeom>
+          <a:noFill/>
+        </p:spPr>
+        <p:txBody>
+          <a:bodyPr wrap="square" lIns="73152" rIns="73152" tIns="36576" bIns="36576">
+            <a:spAutoFit/>
+          </a:bodyPr>
+          <a:lstStyle/>
+          <a:p>
+            <a:pPr algn="l">
+              <a:spcAft>
+                <a:spcPts val="0"/>
+              </a:spcAft>
+              <a:defRPr sz="1800" b="1">
+                <a:solidFill>
+                  <a:srgbClr val="225B9B"/>
+                </a:solidFill>
+                <a:latin typeface="Noto Sans CJK KR"/>
+              </a:defRPr>
+            </a:pPr>
+            <a:r>
+              <a:t>왜 하는가</a:t>
+            </a:r>
+          </a:p>
+        </p:txBody>
+      </p:sp>
+      <p:sp>
+        <p:nvSpPr>
+          <p:cNvPr id="8" name="TextBox 7"/>
+          <p:cNvSpPr txBox="1"/>
+          <p:nvPr/>
+        </p:nvSpPr>
+        <p:spPr>
+          <a:xfrm>
+            <a:off x="676656" y="2103120"/>
+            <a:ext cx="10789920" cy="512064"/>
+          </a:xfrm>
+          <a:prstGeom prst="rect">
+            <a:avLst/>
+          </a:prstGeom>
+          <a:noFill/>
+        </p:spPr>
+        <p:txBody>
+          <a:bodyPr wrap="square" lIns="73152" rIns="73152" tIns="36576" bIns="36576">
+            <a:spAutoFit/>
+          </a:bodyPr>
+          <a:lstStyle/>
+          <a:p>
+            <a:pPr algn="l">
+              <a:spcAft>
+                <a:spcPts val="0"/>
+              </a:spcAft>
+              <a:defRPr sz="2000" b="0">
+                <a:solidFill>
+                  <a:srgbClr val="122C4E"/>
+                </a:solidFill>
+                <a:latin typeface="Noto Sans CJK KR"/>
+              </a:defRPr>
+            </a:pPr>
+            <a:r>
+              <a:t>하나의 wheel_radius가 좌우 바퀴에 함께 적용되어야 한다.</a:t>
+            </a:r>
+          </a:p>
+        </p:txBody>
+      </p:sp>
+      <p:sp>
+        <p:nvSpPr>
+          <p:cNvPr id="9" name="Rounded Rectangle 8"/>
           <p:cNvSpPr/>
           <p:nvPr/>
         </p:nvSpPr>
         <p:spPr>
           <a:xfrm>
-            <a:off x="658368" y="1755648"/>
-            <a:ext cx="10972800" cy="2148840"/>
+            <a:off x="676656" y="2871216"/>
+            <a:ext cx="10835640" cy="2331720"/>
           </a:xfrm>
           <a:prstGeom prst="roundRect">
             <a:avLst/>
@@ -12032,54 +13695,35 @@
               </a:defRPr>
             </a:pPr>
             <a:r>
-              <a:t>xacro ~/ros2_curri/my_agv_ws/src/agv_description/curriculum_stages/M06/agv.urdf.xacro &gt; /tmp/agv.urdf</a:t>
+              <a:t>check_urdf /tmp/agv_from_xacro.urdf</a:t>
             </a:r>
             <a:br/>
             <a:r>
-              <a:t>rg -n 'wheel_radius|left_wheel_joint|right_wheel_joint' /tmp/agv.urdf</a:t>
-            </a:r>
-          </a:p>
-        </p:txBody>
-      </p:sp>
-      <p:sp>
-        <p:nvSpPr>
-          <p:cNvPr id="8" name="Rounded Rectangle 7"/>
-          <p:cNvSpPr/>
-          <p:nvPr/>
-        </p:nvSpPr>
-        <p:spPr>
-          <a:xfrm>
-            <a:off x="658368" y="4206240"/>
-            <a:ext cx="10972800" cy="1554480"/>
-          </a:xfrm>
-          <a:prstGeom prst="roundRect">
-            <a:avLst/>
-          </a:prstGeom>
-          <a:solidFill>
-            <a:srgbClr val="F4F7FB"/>
-          </a:solidFill>
-          <a:ln>
-            <a:solidFill>
-              <a:srgbClr val="D1DFD5"/>
-            </a:solidFill>
-          </a:ln>
-        </p:spPr>
-        <p:style>
-          <a:lnRef idx="1">
-            <a:schemeClr val="accent1"/>
-          </a:lnRef>
-          <a:fillRef idx="3">
-            <a:schemeClr val="accent1"/>
-          </a:fillRef>
-          <a:effectRef idx="2">
-            <a:schemeClr val="accent1"/>
-          </a:effectRef>
-          <a:fontRef idx="minor">
-            <a:schemeClr val="lt1"/>
-          </a:fontRef>
-        </p:style>
-        <p:txBody>
-          <a:bodyPr rtlCol="0" anchor="ctr" wrap="square" lIns="73152" rIns="73152" tIns="36576" bIns="36576"/>
+              <a:t># wheel_radius 값을 바꾼 뒤 같은 두 명령을 다시 실행</a:t>
+            </a:r>
+          </a:p>
+        </p:txBody>
+      </p:sp>
+      <p:sp>
+        <p:nvSpPr>
+          <p:cNvPr id="10" name="TextBox 9"/>
+          <p:cNvSpPr txBox="1"/>
+          <p:nvPr/>
+        </p:nvSpPr>
+        <p:spPr>
+          <a:xfrm>
+            <a:off x="768096" y="5468112"/>
+            <a:ext cx="1143000" cy="256032"/>
+          </a:xfrm>
+          <a:prstGeom prst="rect">
+            <a:avLst/>
+          </a:prstGeom>
+          <a:noFill/>
+        </p:spPr>
+        <p:txBody>
+          <a:bodyPr wrap="square" lIns="73152" rIns="73152" tIns="36576" bIns="36576">
+            <a:spAutoFit/>
+          </a:bodyPr>
           <a:lstStyle/>
           <a:p>
             <a:pPr algn="l">
@@ -12094,50 +13738,38 @@
               </a:defRPr>
             </a:pPr>
             <a:r>
-              <a:t>완료 체크</a:t>
-            </a:r>
-            <a:br/>
-            <a:r>
-              <a:t>□ 명령이 오류 없이 실행된다.</a:t>
-            </a:r>
-            <a:br/>
-            <a:r>
-              <a:t>□ 기대한 파일·topic·frame·parameter 이름이 보인다.</a:t>
-            </a:r>
-            <a:br/>
-            <a:r>
-              <a:t>□ 값의 단위와 방향을 한 문장으로 설명할 수 있다.</a:t>
-            </a:r>
-          </a:p>
-        </p:txBody>
-      </p:sp>
-      <p:sp>
-        <p:nvSpPr>
-          <p:cNvPr id="9" name="TextBox 8"/>
-          <p:cNvSpPr txBox="1"/>
-          <p:nvPr/>
-        </p:nvSpPr>
-        <p:spPr>
-          <a:xfrm>
-            <a:off x="731520" y="5989320"/>
-            <a:ext cx="10789920" cy="237744"/>
-          </a:xfrm>
-          <a:prstGeom prst="rect">
-            <a:avLst/>
-          </a:prstGeom>
-          <a:noFill/>
-        </p:spPr>
-        <p:txBody>
-          <a:bodyPr wrap="square" lIns="73152" rIns="73152" tIns="36576" bIns="36576">
-            <a:spAutoFit/>
-          </a:bodyPr>
-          <a:lstStyle/>
-          <a:p>
-            <a:pPr algn="l">
-              <a:spcAft>
-                <a:spcPts val="0"/>
-              </a:spcAft>
-              <a:defRPr sz="1500" b="1">
+              <a:t>확인</a:t>
+            </a:r>
+          </a:p>
+        </p:txBody>
+      </p:sp>
+      <p:sp>
+        <p:nvSpPr>
+          <p:cNvPr id="11" name="TextBox 10"/>
+          <p:cNvSpPr txBox="1"/>
+          <p:nvPr/>
+        </p:nvSpPr>
+        <p:spPr>
+          <a:xfrm>
+            <a:off x="768096" y="5742432"/>
+            <a:ext cx="10561320" cy="347472"/>
+          </a:xfrm>
+          <a:prstGeom prst="rect">
+            <a:avLst/>
+          </a:prstGeom>
+          <a:noFill/>
+        </p:spPr>
+        <p:txBody>
+          <a:bodyPr wrap="square" lIns="73152" rIns="73152" tIns="36576" bIns="36576">
+            <a:spAutoFit/>
+          </a:bodyPr>
+          <a:lstStyle/>
+          <a:p>
+            <a:pPr algn="l">
+              <a:spcAft>
+                <a:spcPts val="0"/>
+              </a:spcAft>
+              <a:defRPr sz="1800" b="0">
                 <a:solidFill>
                   <a:srgbClr val="122C4E"/>
                 </a:solidFill>
@@ -12145,7 +13777,7 @@
               </a:defRPr>
             </a:pPr>
             <a:r>
-              <a:t>완료 조건: wheel_radius와 wheel_base 변경이 좌우 바퀴·충돌 형상에 함께 적용된다.</a:t>
+              <a:t>출력에서 topic·frame·파일 이름 또는 성공 메시지를 찾고, 맞지 않으면 다음 파일로 가지 않습니다.</a:t>
             </a:r>
           </a:p>
         </p:txBody>
@@ -12202,7 +13834,7 @@
               </a:defRPr>
             </a:pPr>
             <a:r>
-              <a:t>막히면: 증상 → 우선 확인 → 재검증</a:t>
+              <a:t>build → source → run 순서로 실행한다</a:t>
             </a:r>
           </a:p>
         </p:txBody>
@@ -12241,7 +13873,7 @@
               </a:defRPr>
             </a:pPr>
             <a:r>
-              <a:t>오류 메시지를 숨기지 않고 같은 순서로 점검합니다.</a:t>
+              <a:t>새 파일 또는 수정 파일은 build와 source 뒤에만 실행 이름·설정에 반영됩니다.</a:t>
             </a:r>
           </a:p>
         </p:txBody>
@@ -12377,7 +14009,7 @@
               </a:defRPr>
             </a:pPr>
             <a:r>
-              <a:t>현재 단계 오류 대응    |    현재 폴더 ~/ros2_curri/my_agv_ws    |    현재 터미널</a:t>
+              <a:t>현재 단계 실행    |    현재 폴더 ~/ros2_curri/my_agv_ws    |    현재 터미널</a:t>
             </a:r>
           </a:p>
         </p:txBody>
@@ -12390,18 +14022,18 @@
         </p:nvSpPr>
         <p:spPr>
           <a:xfrm>
-            <a:off x="694944" y="1755648"/>
-            <a:ext cx="10972800" cy="1115568"/>
+            <a:off x="658368" y="1700784"/>
+            <a:ext cx="10972800" cy="3182112"/>
           </a:xfrm>
           <a:prstGeom prst="roundRect">
             <a:avLst/>
           </a:prstGeom>
           <a:solidFill>
-            <a:srgbClr val="FFF7F4"/>
+            <a:srgbClr val="1D232D"/>
           </a:solidFill>
           <a:ln>
             <a:solidFill>
-              <a:srgbClr val="EDBEB4"/>
+              <a:srgbClr val="1D232D"/>
             </a:solidFill>
           </a:ln>
         </p:spPr>
@@ -12420,10 +14052,27 @@
           </a:fontRef>
         </p:style>
         <p:txBody>
-          <a:bodyPr rtlCol="0" anchor="ctr"/>
-          <a:lstStyle/>
-          <a:p>
-            <a:pPr algn="ctr"/>
+          <a:bodyPr rtlCol="0" anchor="ctr" wrap="square" lIns="73152" rIns="73152" tIns="36576" bIns="36576"/>
+          <a:lstStyle/>
+          <a:p>
+            <a:pPr algn="l">
+              <a:spcAft>
+                <a:spcPts val="0"/>
+              </a:spcAft>
+              <a:defRPr sz="1600" b="0">
+                <a:solidFill>
+                  <a:srgbClr val="FFFFFF"/>
+                </a:solidFill>
+                <a:latin typeface="DejaVu Sans Mono"/>
+              </a:defRPr>
+            </a:pPr>
+            <a:r>
+              <a:t>xacro ~/ros2_curri/my_agv_ws/src/agv_description/curriculum_stages/M06/agv.urdf.xacro &gt; /tmp/agv.urdf</a:t>
+            </a:r>
+            <a:br/>
+            <a:r>
+              <a:t>check_urdf /tmp/agv.urdf</a:t>
+            </a:r>
           </a:p>
         </p:txBody>
       </p:sp>
@@ -12435,8 +14084,8 @@
         </p:nvSpPr>
         <p:spPr>
           <a:xfrm>
-            <a:off x="896112" y="1901952"/>
-            <a:ext cx="2926080" cy="274320"/>
+            <a:off x="786384" y="5239512"/>
+            <a:ext cx="1261872" cy="237744"/>
           </a:xfrm>
           <a:prstGeom prst="rect">
             <a:avLst/>
@@ -12455,13 +14104,13 @@
               </a:spcAft>
               <a:defRPr sz="1800" b="1">
                 <a:solidFill>
-                  <a:srgbClr val="BE3B3B"/>
-                </a:solidFill>
-                <a:latin typeface="Noto Sans CJK KR"/>
-              </a:defRPr>
-            </a:pPr>
-            <a:r>
-              <a:t>증상 1: unknown macro/property</a:t>
+                  <a:srgbClr val="2A8B5A"/>
+                </a:solidFill>
+                <a:latin typeface="Noto Sans CJK KR"/>
+              </a:defRPr>
+            </a:pPr>
+            <a:r>
+              <a:t>확인 기준</a:t>
             </a:r>
           </a:p>
         </p:txBody>
@@ -12474,25 +14123,25 @@
         </p:nvSpPr>
         <p:spPr>
           <a:xfrm>
-            <a:off x="3794760" y="1883664"/>
-            <a:ext cx="7543800" cy="621792"/>
-          </a:xfrm>
-          <a:prstGeom prst="rect">
-            <a:avLst/>
-          </a:prstGeom>
-          <a:noFill/>
-        </p:spPr>
-        <p:txBody>
-          <a:bodyPr wrap="square" lIns="73152" rIns="73152" tIns="36576" bIns="36576">
-            <a:spAutoFit/>
-          </a:bodyPr>
-          <a:lstStyle/>
-          <a:p>
-            <a:pPr algn="l">
-              <a:spcAft>
-                <a:spcPts val="0"/>
-              </a:spcAft>
-              <a:defRPr sz="1600" b="0">
+            <a:off x="786384" y="5532120"/>
+            <a:ext cx="10469880" cy="420624"/>
+          </a:xfrm>
+          <a:prstGeom prst="rect">
+            <a:avLst/>
+          </a:prstGeom>
+          <a:noFill/>
+        </p:spPr>
+        <p:txBody>
+          <a:bodyPr wrap="square" lIns="73152" rIns="73152" tIns="36576" bIns="36576">
+            <a:spAutoFit/>
+          </a:bodyPr>
+          <a:lstStyle/>
+          <a:p>
+            <a:pPr algn="l">
+              <a:spcAft>
+                <a:spcPts val="0"/>
+              </a:spcAft>
+              <a:defRPr sz="1800" b="0">
                 <a:solidFill>
                   <a:srgbClr val="122C4E"/>
                 </a:solidFill>
@@ -12500,177 +14149,7 @@
               </a:defRPr>
             </a:pPr>
             <a:r>
-              <a:t>우선 확인: 선언 순서·xacro namespace·철자를 확인한다.</a:t>
-            </a:r>
-            <a:br/>
-            <a:r>
-              <a:t>수정 후: xacro ~/ros2_curri/my_agv_ws/src/agv_description/curriculum_stages/M06/agv.urdf.xacro &gt; /tmp/agv.urdf</a:t>
-            </a:r>
-          </a:p>
-        </p:txBody>
-      </p:sp>
-      <p:sp>
-        <p:nvSpPr>
-          <p:cNvPr id="10" name="Rounded Rectangle 9"/>
-          <p:cNvSpPr/>
-          <p:nvPr/>
-        </p:nvSpPr>
-        <p:spPr>
-          <a:xfrm>
-            <a:off x="694944" y="3172968"/>
-            <a:ext cx="10972800" cy="1115568"/>
-          </a:xfrm>
-          <a:prstGeom prst="roundRect">
-            <a:avLst/>
-          </a:prstGeom>
-          <a:solidFill>
-            <a:srgbClr val="FFF7F4"/>
-          </a:solidFill>
-          <a:ln>
-            <a:solidFill>
-              <a:srgbClr val="EDBEB4"/>
-            </a:solidFill>
-          </a:ln>
-        </p:spPr>
-        <p:style>
-          <a:lnRef idx="1">
-            <a:schemeClr val="accent1"/>
-          </a:lnRef>
-          <a:fillRef idx="3">
-            <a:schemeClr val="accent1"/>
-          </a:fillRef>
-          <a:effectRef idx="2">
-            <a:schemeClr val="accent1"/>
-          </a:effectRef>
-          <a:fontRef idx="minor">
-            <a:schemeClr val="lt1"/>
-          </a:fontRef>
-        </p:style>
-        <p:txBody>
-          <a:bodyPr rtlCol="0" anchor="ctr"/>
-          <a:lstStyle/>
-          <a:p>
-            <a:pPr algn="ctr"/>
-          </a:p>
-        </p:txBody>
-      </p:sp>
-      <p:sp>
-        <p:nvSpPr>
-          <p:cNvPr id="11" name="TextBox 10"/>
-          <p:cNvSpPr txBox="1"/>
-          <p:nvPr/>
-        </p:nvSpPr>
-        <p:spPr>
-          <a:xfrm>
-            <a:off x="896112" y="3319272"/>
-            <a:ext cx="2926080" cy="274320"/>
-          </a:xfrm>
-          <a:prstGeom prst="rect">
-            <a:avLst/>
-          </a:prstGeom>
-          <a:noFill/>
-        </p:spPr>
-        <p:txBody>
-          <a:bodyPr wrap="square" lIns="73152" rIns="73152" tIns="36576" bIns="36576">
-            <a:spAutoFit/>
-          </a:bodyPr>
-          <a:lstStyle/>
-          <a:p>
-            <a:pPr algn="l">
-              <a:spcAft>
-                <a:spcPts val="0"/>
-              </a:spcAft>
-              <a:defRPr sz="1800" b="1">
-                <a:solidFill>
-                  <a:srgbClr val="BE3B3B"/>
-                </a:solidFill>
-                <a:latin typeface="Noto Sans CJK KR"/>
-              </a:defRPr>
-            </a:pPr>
-            <a:r>
-              <a:t>증상 2: include file not found</a:t>
-            </a:r>
-          </a:p>
-        </p:txBody>
-      </p:sp>
-      <p:sp>
-        <p:nvSpPr>
-          <p:cNvPr id="12" name="TextBox 11"/>
-          <p:cNvSpPr txBox="1"/>
-          <p:nvPr/>
-        </p:nvSpPr>
-        <p:spPr>
-          <a:xfrm>
-            <a:off x="3794760" y="3300984"/>
-            <a:ext cx="7543800" cy="621792"/>
-          </a:xfrm>
-          <a:prstGeom prst="rect">
-            <a:avLst/>
-          </a:prstGeom>
-          <a:noFill/>
-        </p:spPr>
-        <p:txBody>
-          <a:bodyPr wrap="square" lIns="73152" rIns="73152" tIns="36576" bIns="36576">
-            <a:spAutoFit/>
-          </a:bodyPr>
-          <a:lstStyle/>
-          <a:p>
-            <a:pPr algn="l">
-              <a:spcAft>
-                <a:spcPts val="0"/>
-              </a:spcAft>
-              <a:defRPr sz="1600" b="0">
-                <a:solidFill>
-                  <a:srgbClr val="122C4E"/>
-                </a:solidFill>
-                <a:latin typeface="Noto Sans CJK KR"/>
-              </a:defRPr>
-            </a:pPr>
-            <a:r>
-              <a:t>우선 확인: 패키지 이름과 설치 대상·파일 경로를 확인한다.</a:t>
-            </a:r>
-            <a:br/>
-            <a:r>
-              <a:t>수정 후: xacro ~/ros2_curri/my_agv_ws/src/agv_description/curriculum_stages/M06/agv.urdf.xacro &gt; /tmp/agv.urdf</a:t>
-            </a:r>
-          </a:p>
-        </p:txBody>
-      </p:sp>
-      <p:sp>
-        <p:nvSpPr>
-          <p:cNvPr id="13" name="TextBox 12"/>
-          <p:cNvSpPr txBox="1"/>
-          <p:nvPr/>
-        </p:nvSpPr>
-        <p:spPr>
-          <a:xfrm>
-            <a:off x="822960" y="5102352"/>
-            <a:ext cx="10607040" cy="402336"/>
-          </a:xfrm>
-          <a:prstGeom prst="rect">
-            <a:avLst/>
-          </a:prstGeom>
-          <a:noFill/>
-        </p:spPr>
-        <p:txBody>
-          <a:bodyPr wrap="square" lIns="73152" rIns="73152" tIns="36576" bIns="36576">
-            <a:spAutoFit/>
-          </a:bodyPr>
-          <a:lstStyle/>
-          <a:p>
-            <a:pPr algn="ctr">
-              <a:spcAft>
-                <a:spcPts val="0"/>
-              </a:spcAft>
-              <a:defRPr sz="1800" b="1">
-                <a:solidFill>
-                  <a:srgbClr val="DB7E22"/>
-                </a:solidFill>
-                <a:latin typeface="Noto Sans CJK KR"/>
-              </a:defRPr>
-            </a:pPr>
-            <a:r>
-              <a:t>공통 순서: ① 현재 폴더 ② source ③ 파일 경로 ④ 이름/타입/단위 ⑤ build·source 후 재실행</a:t>
+              <a:t>wheel_radius와 wheel_base 변경이 좌우 바퀴·충돌 형상에 함께 적용된다.</a:t>
             </a:r>
           </a:p>
         </p:txBody>
@@ -12727,7 +14206,7 @@
               </a:defRPr>
             </a:pPr>
             <a:r>
-              <a:t>막혔을 때만: Complete를 복구용으로 사용한다</a:t>
+              <a:t>정상 결과: 실제 환경에서 확인한 출력</a:t>
             </a:r>
           </a:p>
         </p:txBody>
@@ -12766,7 +14245,7 @@
               </a:defRPr>
             </a:pPr>
             <a:r>
-              <a:t>이 슬라이드가 먼저가 아닙니다. 직접 입력·실행을 시도한 뒤에만 내 파일과 Complete를 비교합니다.</a:t>
+              <a:t>실제 ROS 2 환경의 파일·패키지·구성 검증 로그</a:t>
             </a:r>
           </a:p>
         </p:txBody>
@@ -12849,64 +14328,30 @@
           </a:p>
         </p:txBody>
       </p:sp>
-      <p:sp>
-        <p:nvSpPr>
-          <p:cNvPr id="6" name="Rectangle 5"/>
-          <p:cNvSpPr/>
-          <p:nvPr/>
-        </p:nvSpPr>
-        <p:spPr>
-          <a:xfrm>
-            <a:off x="566928" y="1188720"/>
-            <a:ext cx="11064240" cy="347472"/>
-          </a:xfrm>
-          <a:prstGeom prst="rect">
-            <a:avLst/>
-          </a:prstGeom>
-          <a:solidFill>
-            <a:srgbClr val="F4F7FB"/>
-          </a:solidFill>
-          <a:ln>
-            <a:solidFill>
-              <a:srgbClr val="F4F7FB"/>
-            </a:solidFill>
-          </a:ln>
-        </p:spPr>
-        <p:style>
-          <a:lnRef idx="1">
-            <a:schemeClr val="accent1"/>
-          </a:lnRef>
-          <a:fillRef idx="3">
-            <a:schemeClr val="accent1"/>
-          </a:fillRef>
-          <a:effectRef idx="2">
-            <a:schemeClr val="accent1"/>
-          </a:effectRef>
-          <a:fontRef idx="minor">
-            <a:schemeClr val="lt1"/>
-          </a:fontRef>
-        </p:style>
-        <p:txBody>
-          <a:bodyPr rtlCol="0" anchor="ctr" wrap="square" lIns="73152" rIns="73152" tIns="36576" bIns="36576"/>
-          <a:lstStyle/>
-          <a:p>
-            <a:pPr algn="l">
-              <a:spcAft>
-                <a:spcPts val="0"/>
-              </a:spcAft>
-              <a:defRPr sz="1300" b="1">
-                <a:solidFill>
-                  <a:srgbClr val="122C4E"/>
-                </a:solidFill>
-                <a:latin typeface="Noto Sans CJK KR"/>
-              </a:defRPr>
-            </a:pPr>
-            <a:r>
-              <a:t>현재 단계 복구용 Complete    |    현재 폴더 ~/ros2_curri    |    현재 터미널</a:t>
-            </a:r>
-          </a:p>
-        </p:txBody>
-      </p:sp>
+      <p:pic>
+        <p:nvPicPr>
+          <p:cNvPr id="6" name="Picture 5" descr="validation_terminal.png"/>
+          <p:cNvPicPr>
+            <a:picLocks noChangeAspect="1"/>
+          </p:cNvPicPr>
+          <p:nvPr/>
+        </p:nvPicPr>
+        <p:blipFill>
+          <a:blip r:embed="rId2"/>
+          <a:stretch>
+            <a:fillRect/>
+          </a:stretch>
+        </p:blipFill>
+        <p:spPr>
+          <a:xfrm>
+            <a:off x="790956" y="1884338"/>
+            <a:ext cx="10607040" cy="3738546"/>
+          </a:xfrm>
+          <a:prstGeom prst="rect">
+            <a:avLst/>
+          </a:prstGeom>
+        </p:spPr>
+      </p:pic>
       <p:sp>
         <p:nvSpPr>
           <p:cNvPr id="7" name="TextBox 6"/>
@@ -12915,8 +14360,8 @@
         </p:nvSpPr>
         <p:spPr>
           <a:xfrm>
-            <a:off x="713232" y="1664208"/>
-            <a:ext cx="10698480" cy="402336"/>
+            <a:off x="777240" y="6144768"/>
+            <a:ext cx="10607040" cy="310896"/>
           </a:xfrm>
           <a:prstGeom prst="rect">
             <a:avLst/>
@@ -12933,120 +14378,7 @@
               <a:spcAft>
                 <a:spcPts val="0"/>
               </a:spcAft>
-              <a:defRPr sz="1800" b="1">
-                <a:solidFill>
-                  <a:srgbClr val="DB7E22"/>
-                </a:solidFill>
-                <a:latin typeface="Noto Sans CJK KR"/>
-              </a:defRPr>
-            </a:pPr>
-            <a:r>
-              <a:t>권장 순서: ① 내 오류를 확인  ② Complete와 diff  ③ 꼭 필요할 때만 backup 후 복사</a:t>
-            </a:r>
-          </a:p>
-        </p:txBody>
-      </p:sp>
-      <p:sp>
-        <p:nvSpPr>
-          <p:cNvPr id="8" name="Rounded Rectangle 7"/>
-          <p:cNvSpPr/>
-          <p:nvPr/>
-        </p:nvSpPr>
-        <p:spPr>
-          <a:xfrm>
-            <a:off x="676656" y="2423160"/>
-            <a:ext cx="10881360" cy="2606040"/>
-          </a:xfrm>
-          <a:prstGeom prst="roundRect">
-            <a:avLst/>
-          </a:prstGeom>
-          <a:solidFill>
-            <a:srgbClr val="1D232D"/>
-          </a:solidFill>
-          <a:ln>
-            <a:solidFill>
-              <a:srgbClr val="1D232D"/>
-            </a:solidFill>
-          </a:ln>
-        </p:spPr>
-        <p:style>
-          <a:lnRef idx="1">
-            <a:schemeClr val="accent1"/>
-          </a:lnRef>
-          <a:fillRef idx="3">
-            <a:schemeClr val="accent1"/>
-          </a:fillRef>
-          <a:effectRef idx="2">
-            <a:schemeClr val="accent1"/>
-          </a:effectRef>
-          <a:fontRef idx="minor">
-            <a:schemeClr val="lt1"/>
-          </a:fontRef>
-        </p:style>
-        <p:txBody>
-          <a:bodyPr rtlCol="0" anchor="ctr" wrap="square" lIns="73152" rIns="73152" tIns="36576" bIns="36576"/>
-          <a:lstStyle/>
-          <a:p>
-            <a:pPr algn="l">
-              <a:spcAft>
-                <a:spcPts val="0"/>
-              </a:spcAft>
-              <a:defRPr sz="1400" b="0">
-                <a:solidFill>
-                  <a:srgbClr val="FFFFFF"/>
-                </a:solidFill>
-                <a:latin typeface="DejaVu Sans Mono"/>
-              </a:defRPr>
-            </a:pPr>
-            <a:r>
-              <a:t>cd ~/ros2_curri</a:t>
-            </a:r>
-            <a:br/>
-            <a:r>
-              <a:t>diff -ru my_agv_ws/src blocks/B_robot_build/M06_xacro_modularization/complete/agv_ws/src || true</a:t>
-            </a:r>
-            <a:br/>
-            <a:r>
-              <a:t>cp -a my_agv_ws/src my_agv_ws/src_before_M06</a:t>
-            </a:r>
-            <a:br/>
-            <a:r>
-              <a:t>cp -a blocks/B_robot_build/M06_xacro_modularization/complete/agv_ws/src/. my_agv_ws/src/</a:t>
-            </a:r>
-            <a:br/>
-            <a:r>
-              <a:t>cd my_agv_ws &amp;&amp; colcon build --symlink-install &amp;&amp; source install/setup.bash</a:t>
-            </a:r>
-          </a:p>
-        </p:txBody>
-      </p:sp>
-      <p:sp>
-        <p:nvSpPr>
-          <p:cNvPr id="9" name="TextBox 8"/>
-          <p:cNvSpPr txBox="1"/>
-          <p:nvPr/>
-        </p:nvSpPr>
-        <p:spPr>
-          <a:xfrm>
-            <a:off x="786384" y="5413248"/>
-            <a:ext cx="10424160" cy="429768"/>
-          </a:xfrm>
-          <a:prstGeom prst="rect">
-            <a:avLst/>
-          </a:prstGeom>
-          <a:noFill/>
-        </p:spPr>
-        <p:txBody>
-          <a:bodyPr wrap="square" lIns="73152" rIns="73152" tIns="36576" bIns="36576">
-            <a:spAutoFit/>
-          </a:bodyPr>
-          <a:lstStyle/>
-          <a:p>
-            <a:pPr algn="ctr">
-              <a:spcAft>
-                <a:spcPts val="0"/>
-              </a:spcAft>
-              <a:defRPr sz="1700" b="1">
+              <a:defRPr sz="1100" b="1">
                 <a:solidFill>
                   <a:srgbClr val="2A8B5A"/>
                 </a:solidFill>
@@ -13054,7 +14386,7 @@
               </a:defRPr>
             </a:pPr>
             <a:r>
-              <a:t>복구 뒤에는 끝내지 말고, 내 파일과 Complete의 차이를 한 줄씩 설명한 뒤 다시 직접 입력해 봅니다.</a:t>
+              <a:t>화면에서 확인: ① 명령/설정  ② 정상 출력 또는 화면  ③ 다음 검증 명령으로 재확인</a:t>
             </a:r>
           </a:p>
         </p:txBody>
@@ -13111,7 +14443,7 @@
               </a:defRPr>
             </a:pPr>
             <a:r>
-              <a:t>미니 실습: 값 하나를 바꾸고 결과를 비교한다</a:t>
+              <a:t>객관적 검증 명령으로 완료를 확인한다</a:t>
             </a:r>
           </a:p>
         </p:txBody>
@@ -13150,7 +14482,7 @@
               </a:defRPr>
             </a:pPr>
             <a:r>
-              <a:t>정상 결과를 만든 뒤에는 한 번에 하나의 값만 바꿉니다.</a:t>
+              <a:t>화면만 보지 말고 topic·frame·파일·parameter를 다시 확인합니다.</a:t>
             </a:r>
           </a:p>
         </p:txBody>
@@ -13286,7 +14618,7 @@
               </a:defRPr>
             </a:pPr>
             <a:r>
-              <a:t>현재 단계 미니 실습    |    현재 폴더 ~/ros2_curri/my_agv_ws    |    현재 터미널</a:t>
+              <a:t>현재 단계 검증    |    현재 폴더 ~/ros2_curri/my_agv_ws    |    현재 터미널</a:t>
             </a:r>
           </a:p>
         </p:txBody>
@@ -13299,18 +14631,18 @@
         </p:nvSpPr>
         <p:spPr>
           <a:xfrm>
-            <a:off x="749808" y="1874519"/>
-            <a:ext cx="10652760" cy="1993392"/>
+            <a:off x="658368" y="1755648"/>
+            <a:ext cx="10972800" cy="2148840"/>
           </a:xfrm>
           <a:prstGeom prst="roundRect">
             <a:avLst/>
           </a:prstGeom>
           <a:solidFill>
-            <a:srgbClr val="FFF8EB"/>
+            <a:srgbClr val="1D232D"/>
           </a:solidFill>
           <a:ln>
             <a:solidFill>
-              <a:srgbClr val="ECC680"/>
+              <a:srgbClr val="1D232D"/>
             </a:solidFill>
           </a:ln>
         </p:spPr>
@@ -13332,11 +14664,124 @@
           <a:bodyPr rtlCol="0" anchor="ctr" wrap="square" lIns="73152" rIns="73152" tIns="36576" bIns="36576"/>
           <a:lstStyle/>
           <a:p>
-            <a:pPr algn="ctr">
-              <a:spcAft>
-                <a:spcPts val="0"/>
-              </a:spcAft>
-              <a:defRPr sz="2300" b="1">
+            <a:pPr algn="l">
+              <a:spcAft>
+                <a:spcPts val="0"/>
+              </a:spcAft>
+              <a:defRPr sz="1600" b="0">
+                <a:solidFill>
+                  <a:srgbClr val="FFFFFF"/>
+                </a:solidFill>
+                <a:latin typeface="DejaVu Sans Mono"/>
+              </a:defRPr>
+            </a:pPr>
+            <a:r>
+              <a:t>xacro ~/ros2_curri/my_agv_ws/src/agv_description/curriculum_stages/M06/agv.urdf.xacro &gt; /tmp/agv.urdf</a:t>
+            </a:r>
+            <a:br/>
+            <a:r>
+              <a:t>rg -n 'wheel_radius|left_wheel_joint|right_wheel_joint' /tmp/agv.urdf</a:t>
+            </a:r>
+          </a:p>
+        </p:txBody>
+      </p:sp>
+      <p:sp>
+        <p:nvSpPr>
+          <p:cNvPr id="8" name="Rounded Rectangle 7"/>
+          <p:cNvSpPr/>
+          <p:nvPr/>
+        </p:nvSpPr>
+        <p:spPr>
+          <a:xfrm>
+            <a:off x="658368" y="4206240"/>
+            <a:ext cx="10972800" cy="1554480"/>
+          </a:xfrm>
+          <a:prstGeom prst="roundRect">
+            <a:avLst/>
+          </a:prstGeom>
+          <a:solidFill>
+            <a:srgbClr val="F4F7FB"/>
+          </a:solidFill>
+          <a:ln>
+            <a:solidFill>
+              <a:srgbClr val="D1DFD5"/>
+            </a:solidFill>
+          </a:ln>
+        </p:spPr>
+        <p:style>
+          <a:lnRef idx="1">
+            <a:schemeClr val="accent1"/>
+          </a:lnRef>
+          <a:fillRef idx="3">
+            <a:schemeClr val="accent1"/>
+          </a:fillRef>
+          <a:effectRef idx="2">
+            <a:schemeClr val="accent1"/>
+          </a:effectRef>
+          <a:fontRef idx="minor">
+            <a:schemeClr val="lt1"/>
+          </a:fontRef>
+        </p:style>
+        <p:txBody>
+          <a:bodyPr rtlCol="0" anchor="ctr" wrap="square" lIns="73152" rIns="73152" tIns="36576" bIns="36576"/>
+          <a:lstStyle/>
+          <a:p>
+            <a:pPr algn="l">
+              <a:spcAft>
+                <a:spcPts val="0"/>
+              </a:spcAft>
+              <a:defRPr sz="1800" b="1">
+                <a:solidFill>
+                  <a:srgbClr val="2A8B5A"/>
+                </a:solidFill>
+                <a:latin typeface="Noto Sans CJK KR"/>
+              </a:defRPr>
+            </a:pPr>
+            <a:r>
+              <a:t>완료 체크</a:t>
+            </a:r>
+            <a:br/>
+            <a:r>
+              <a:t>□ 명령이 오류 없이 실행된다.</a:t>
+            </a:r>
+            <a:br/>
+            <a:r>
+              <a:t>□ 기대한 파일·topic·frame·parameter 이름이 보인다.</a:t>
+            </a:r>
+            <a:br/>
+            <a:r>
+              <a:t>□ 값의 단위와 방향을 한 문장으로 설명할 수 있다.</a:t>
+            </a:r>
+          </a:p>
+        </p:txBody>
+      </p:sp>
+      <p:sp>
+        <p:nvSpPr>
+          <p:cNvPr id="9" name="TextBox 8"/>
+          <p:cNvSpPr txBox="1"/>
+          <p:nvPr/>
+        </p:nvSpPr>
+        <p:spPr>
+          <a:xfrm>
+            <a:off x="731520" y="5989320"/>
+            <a:ext cx="10789920" cy="237744"/>
+          </a:xfrm>
+          <a:prstGeom prst="rect">
+            <a:avLst/>
+          </a:prstGeom>
+          <a:noFill/>
+        </p:spPr>
+        <p:txBody>
+          <a:bodyPr wrap="square" lIns="73152" rIns="73152" tIns="36576" bIns="36576">
+            <a:spAutoFit/>
+          </a:bodyPr>
+          <a:lstStyle/>
+          <a:p>
+            <a:pPr algn="l">
+              <a:spcAft>
+                <a:spcPts val="0"/>
+              </a:spcAft>
+              <a:defRPr sz="1500" b="1">
                 <a:solidFill>
                   <a:srgbClr val="122C4E"/>
                 </a:solidFill>
@@ -13344,46 +14789,7 @@
               </a:defRPr>
             </a:pPr>
             <a:r>
-              <a:t>wheel_radius 0.08→0.12 m를 적용한 뒤 joint origin과 cylinder radius가 함께 바뀌는지 비교한다.</a:t>
-            </a:r>
-          </a:p>
-        </p:txBody>
-      </p:sp>
-      <p:sp>
-        <p:nvSpPr>
-          <p:cNvPr id="8" name="TextBox 7"/>
-          <p:cNvSpPr txBox="1"/>
-          <p:nvPr/>
-        </p:nvSpPr>
-        <p:spPr>
-          <a:xfrm>
-            <a:off x="877824" y="4590288"/>
-            <a:ext cx="10241280" cy="594360"/>
-          </a:xfrm>
-          <a:prstGeom prst="rect">
-            <a:avLst/>
-          </a:prstGeom>
-          <a:noFill/>
-        </p:spPr>
-        <p:txBody>
-          <a:bodyPr wrap="square" lIns="73152" rIns="73152" tIns="36576" bIns="36576">
-            <a:spAutoFit/>
-          </a:bodyPr>
-          <a:lstStyle/>
-          <a:p>
-            <a:pPr algn="ctr">
-              <a:spcAft>
-                <a:spcPts val="0"/>
-              </a:spcAft>
-              <a:defRPr sz="1900" b="1">
-                <a:solidFill>
-                  <a:srgbClr val="DB7E22"/>
-                </a:solidFill>
-                <a:latin typeface="Noto Sans CJK KR"/>
-              </a:defRPr>
-            </a:pPr>
-            <a:r>
-              <a:t>기록할 것: 바꾼 값(단위) · 기대한 변화 · 실제 출력/화면 · 원래 값으로 되돌린 결과</a:t>
+              <a:t>완료 조건: wheel_radius와 wheel_base 변경이 좌우 바퀴·충돌 형상에 함께 적용된다.</a:t>
             </a:r>
           </a:p>
         </p:txBody>
@@ -13440,7 +14846,7 @@
               </a:defRPr>
             </a:pPr>
             <a:r>
-              <a:t>내 프로젝트 체크포인트를 저장하고 다음 모듈로 넘긴다</a:t>
+              <a:t>막히면: 증상 → 우선 확인 → 재검증</a:t>
             </a:r>
           </a:p>
         </p:txBody>
@@ -13479,7 +14885,7 @@
               </a:defRPr>
             </a:pPr>
             <a:r>
-              <a:t>Complete는 복구용 비교 기준이고, 다음 단계는 내가 직접 만든 workspace에서 계속합니다.</a:t>
+              <a:t>오류 메시지를 숨기지 않고 같은 순서로 점검합니다.</a:t>
             </a:r>
           </a:p>
         </p:txBody>
@@ -13615,7 +15021,7 @@
               </a:defRPr>
             </a:pPr>
             <a:r>
-              <a:t>현재 단계 체크포인트    |    현재 폴더 ~/ros2_curri/my_agv_ws    |    현재 터미널</a:t>
+              <a:t>현재 단계 오류 대응    |    현재 폴더 ~/ros2_curri/my_agv_ws    |    현재 터미널</a:t>
             </a:r>
           </a:p>
         </p:txBody>
@@ -13628,18 +15034,18 @@
         </p:nvSpPr>
         <p:spPr>
           <a:xfrm>
-            <a:off x="685800" y="1737360"/>
-            <a:ext cx="10972800" cy="3611880"/>
+            <a:off x="694944" y="1755648"/>
+            <a:ext cx="10972800" cy="1115568"/>
           </a:xfrm>
           <a:prstGeom prst="roundRect">
             <a:avLst/>
           </a:prstGeom>
           <a:solidFill>
-            <a:srgbClr val="F4F7FB"/>
+            <a:srgbClr val="FFF7F4"/>
           </a:solidFill>
           <a:ln>
             <a:solidFill>
-              <a:srgbClr val="D2DCE8"/>
+              <a:srgbClr val="EDBEB4"/>
             </a:solidFill>
           </a:ln>
         </p:spPr>
@@ -13673,25 +15079,64 @@
         </p:nvSpPr>
         <p:spPr>
           <a:xfrm>
-            <a:off x="896112" y="1993392"/>
-            <a:ext cx="10332720" cy="2971800"/>
-          </a:xfrm>
-          <a:prstGeom prst="rect">
-            <a:avLst/>
-          </a:prstGeom>
-          <a:noFill/>
-        </p:spPr>
-        <p:txBody>
-          <a:bodyPr wrap="square" lIns="109728" rIns="109728">
-            <a:spAutoFit/>
-          </a:bodyPr>
-          <a:lstStyle/>
-          <a:p>
-            <a:pPr>
-              <a:spcAft>
-                <a:spcPts val="800"/>
-              </a:spcAft>
-              <a:defRPr sz="1800">
+            <a:off x="896112" y="1901952"/>
+            <a:ext cx="2926080" cy="274320"/>
+          </a:xfrm>
+          <a:prstGeom prst="rect">
+            <a:avLst/>
+          </a:prstGeom>
+          <a:noFill/>
+        </p:spPr>
+        <p:txBody>
+          <a:bodyPr wrap="square" lIns="73152" rIns="73152" tIns="36576" bIns="36576">
+            <a:spAutoFit/>
+          </a:bodyPr>
+          <a:lstStyle/>
+          <a:p>
+            <a:pPr algn="l">
+              <a:spcAft>
+                <a:spcPts val="0"/>
+              </a:spcAft>
+              <a:defRPr sz="1800" b="1">
+                <a:solidFill>
+                  <a:srgbClr val="BE3B3B"/>
+                </a:solidFill>
+                <a:latin typeface="Noto Sans CJK KR"/>
+              </a:defRPr>
+            </a:pPr>
+            <a:r>
+              <a:t>증상 1: unknown macro/property</a:t>
+            </a:r>
+          </a:p>
+        </p:txBody>
+      </p:sp>
+      <p:sp>
+        <p:nvSpPr>
+          <p:cNvPr id="9" name="TextBox 8"/>
+          <p:cNvSpPr txBox="1"/>
+          <p:nvPr/>
+        </p:nvSpPr>
+        <p:spPr>
+          <a:xfrm>
+            <a:off x="3794760" y="1883664"/>
+            <a:ext cx="7543800" cy="621792"/>
+          </a:xfrm>
+          <a:prstGeom prst="rect">
+            <a:avLst/>
+          </a:prstGeom>
+          <a:noFill/>
+        </p:spPr>
+        <p:txBody>
+          <a:bodyPr wrap="square" lIns="73152" rIns="73152" tIns="36576" bIns="36576">
+            <a:spAutoFit/>
+          </a:bodyPr>
+          <a:lstStyle/>
+          <a:p>
+            <a:pPr algn="l">
+              <a:spcAft>
+                <a:spcPts val="0"/>
+              </a:spcAft>
+              <a:defRPr sz="1600" b="0">
                 <a:solidFill>
                   <a:srgbClr val="122C4E"/>
                 </a:solidFill>
@@ -13699,15 +15144,126 @@
               </a:defRPr>
             </a:pPr>
             <a:r>
-              <a:t>• □ 완료 화면: wheel_radius와 wheel_base 변경이 좌우 바퀴·충돌 형상에 함께 적용된다.</a:t>
-            </a:r>
-          </a:p>
-          <a:p>
-            <a:pPr>
-              <a:spcAft>
-                <a:spcPts val="800"/>
-              </a:spcAft>
-              <a:defRPr sz="1800">
+              <a:t>우선 확인: 선언 순서·xacro namespace·철자를 확인한다.</a:t>
+            </a:r>
+            <a:br/>
+            <a:r>
+              <a:t>수정 후: xacro ~/ros2_curri/my_agv_ws/src/agv_description/curriculum_stages/M06/agv.urdf.xacro &gt; /tmp/agv.urdf</a:t>
+            </a:r>
+          </a:p>
+        </p:txBody>
+      </p:sp>
+      <p:sp>
+        <p:nvSpPr>
+          <p:cNvPr id="10" name="Rounded Rectangle 9"/>
+          <p:cNvSpPr/>
+          <p:nvPr/>
+        </p:nvSpPr>
+        <p:spPr>
+          <a:xfrm>
+            <a:off x="694944" y="3172968"/>
+            <a:ext cx="10972800" cy="1115568"/>
+          </a:xfrm>
+          <a:prstGeom prst="roundRect">
+            <a:avLst/>
+          </a:prstGeom>
+          <a:solidFill>
+            <a:srgbClr val="FFF7F4"/>
+          </a:solidFill>
+          <a:ln>
+            <a:solidFill>
+              <a:srgbClr val="EDBEB4"/>
+            </a:solidFill>
+          </a:ln>
+        </p:spPr>
+        <p:style>
+          <a:lnRef idx="1">
+            <a:schemeClr val="accent1"/>
+          </a:lnRef>
+          <a:fillRef idx="3">
+            <a:schemeClr val="accent1"/>
+          </a:fillRef>
+          <a:effectRef idx="2">
+            <a:schemeClr val="accent1"/>
+          </a:effectRef>
+          <a:fontRef idx="minor">
+            <a:schemeClr val="lt1"/>
+          </a:fontRef>
+        </p:style>
+        <p:txBody>
+          <a:bodyPr rtlCol="0" anchor="ctr"/>
+          <a:lstStyle/>
+          <a:p>
+            <a:pPr algn="ctr"/>
+          </a:p>
+        </p:txBody>
+      </p:sp>
+      <p:sp>
+        <p:nvSpPr>
+          <p:cNvPr id="11" name="TextBox 10"/>
+          <p:cNvSpPr txBox="1"/>
+          <p:nvPr/>
+        </p:nvSpPr>
+        <p:spPr>
+          <a:xfrm>
+            <a:off x="896112" y="3319272"/>
+            <a:ext cx="2926080" cy="274320"/>
+          </a:xfrm>
+          <a:prstGeom prst="rect">
+            <a:avLst/>
+          </a:prstGeom>
+          <a:noFill/>
+        </p:spPr>
+        <p:txBody>
+          <a:bodyPr wrap="square" lIns="73152" rIns="73152" tIns="36576" bIns="36576">
+            <a:spAutoFit/>
+          </a:bodyPr>
+          <a:lstStyle/>
+          <a:p>
+            <a:pPr algn="l">
+              <a:spcAft>
+                <a:spcPts val="0"/>
+              </a:spcAft>
+              <a:defRPr sz="1800" b="1">
+                <a:solidFill>
+                  <a:srgbClr val="BE3B3B"/>
+                </a:solidFill>
+                <a:latin typeface="Noto Sans CJK KR"/>
+              </a:defRPr>
+            </a:pPr>
+            <a:r>
+              <a:t>증상 2: include file not found</a:t>
+            </a:r>
+          </a:p>
+        </p:txBody>
+      </p:sp>
+      <p:sp>
+        <p:nvSpPr>
+          <p:cNvPr id="12" name="TextBox 11"/>
+          <p:cNvSpPr txBox="1"/>
+          <p:nvPr/>
+        </p:nvSpPr>
+        <p:spPr>
+          <a:xfrm>
+            <a:off x="3794760" y="3300984"/>
+            <a:ext cx="7543800" cy="621792"/>
+          </a:xfrm>
+          <a:prstGeom prst="rect">
+            <a:avLst/>
+          </a:prstGeom>
+          <a:noFill/>
+        </p:spPr>
+        <p:txBody>
+          <a:bodyPr wrap="square" lIns="73152" rIns="73152" tIns="36576" bIns="36576">
+            <a:spAutoFit/>
+          </a:bodyPr>
+          <a:lstStyle/>
+          <a:p>
+            <a:pPr algn="l">
+              <a:spcAft>
+                <a:spcPts val="0"/>
+              </a:spcAft>
+              <a:defRPr sz="1600" b="0">
                 <a:solidFill>
                   <a:srgbClr val="122C4E"/>
                 </a:solidFill>
@@ -13715,69 +15271,25 @@
               </a:defRPr>
             </a:pPr>
             <a:r>
-              <a:t>• □ 막혔을 때 비교할 Complete: blocks/B_robot_build/M06_xacro_modularization/complete/</a:t>
-            </a:r>
-          </a:p>
-          <a:p>
-            <a:pPr>
-              <a:spcAft>
-                <a:spcPts val="800"/>
-              </a:spcAft>
-              <a:defRPr sz="1800">
-                <a:solidFill>
-                  <a:srgbClr val="122C4E"/>
-                </a:solidFill>
-                <a:latin typeface="Noto Sans CJK KR"/>
-              </a:defRPr>
-            </a:pPr>
-            <a:r>
-              <a:t>• □ 정상 로그·캡처: logs/validation.log, screenshots/validation_terminal.png</a:t>
-            </a:r>
-          </a:p>
-          <a:p>
-            <a:pPr>
-              <a:spcAft>
-                <a:spcPts val="800"/>
-              </a:spcAft>
-              <a:defRPr sz="1800">
-                <a:solidFill>
-                  <a:srgbClr val="122C4E"/>
-                </a:solidFill>
-                <a:latin typeface="Noto Sans CJK KR"/>
-              </a:defRPr>
-            </a:pPr>
-            <a:r>
-              <a:t>• □ 버전 식별: CHECKSUM_or_TAG.txt의 SHA-256 manifest</a:t>
-            </a:r>
-          </a:p>
-          <a:p>
-            <a:pPr>
-              <a:spcAft>
-                <a:spcPts val="800"/>
-              </a:spcAft>
-              <a:defRPr sz="1800">
-                <a:solidFill>
-                  <a:srgbClr val="122C4E"/>
-                </a:solidFill>
-                <a:latin typeface="Noto Sans CJK KR"/>
-              </a:defRPr>
-            </a:pPr>
-            <a:r>
-              <a:t>• □ 다음 시작 조건: M07 Gazebo 물리</a:t>
-            </a:r>
-          </a:p>
-        </p:txBody>
-      </p:sp>
-      <p:sp>
-        <p:nvSpPr>
-          <p:cNvPr id="9" name="TextBox 8"/>
-          <p:cNvSpPr txBox="1"/>
-          <p:nvPr/>
-        </p:nvSpPr>
-        <p:spPr>
-          <a:xfrm>
-            <a:off x="868680" y="5596128"/>
-            <a:ext cx="10515600" cy="338328"/>
+              <a:t>우선 확인: 패키지 이름과 설치 대상·파일 경로를 확인한다.</a:t>
+            </a:r>
+            <a:br/>
+            <a:r>
+              <a:t>수정 후: xacro ~/ros2_curri/my_agv_ws/src/agv_description/curriculum_stages/M06/agv.urdf.xacro &gt; /tmp/agv.urdf</a:t>
+            </a:r>
+          </a:p>
+        </p:txBody>
+      </p:sp>
+      <p:sp>
+        <p:nvSpPr>
+          <p:cNvPr id="13" name="TextBox 12"/>
+          <p:cNvSpPr txBox="1"/>
+          <p:nvPr/>
+        </p:nvSpPr>
+        <p:spPr>
+          <a:xfrm>
+            <a:off x="822960" y="5102352"/>
+            <a:ext cx="10607040" cy="402336"/>
           </a:xfrm>
           <a:prstGeom prst="rect">
             <a:avLst/>
@@ -13794,15 +15306,15 @@
               <a:spcAft>
                 <a:spcPts val="0"/>
               </a:spcAft>
-              <a:defRPr sz="1700" b="1">
-                <a:solidFill>
-                  <a:srgbClr val="2A8B5A"/>
-                </a:solidFill>
-                <a:latin typeface="Noto Sans CJK KR"/>
-              </a:defRPr>
-            </a:pPr>
-            <a:r>
-              <a:t>다음 모듈을 시작하기 전, 내 src의 변경사항을 저장하고 현재 완료 조건을 다시 확인합니다.</a:t>
+              <a:defRPr sz="1800" b="1">
+                <a:solidFill>
+                  <a:srgbClr val="DB7E22"/>
+                </a:solidFill>
+                <a:latin typeface="Noto Sans CJK KR"/>
+              </a:defRPr>
+            </a:pPr>
+            <a:r>
+              <a:t>공통 순서: ① 현재 폴더 ② source ③ 파일 경로 ④ 이름/타입/단위 ⑤ build·source 후 재실행</a:t>
             </a:r>
           </a:p>
         </p:txBody>
@@ -13816,6 +15328,1138 @@
 </file>
 
 <file path=ppt/slides/slide26.xml><?xml version="1.0" encoding="utf-8"?>
+<p:sld xmlns:a="http://schemas.openxmlformats.org/drawingml/2006/main" xmlns:p="http://schemas.openxmlformats.org/presentationml/2006/main" xmlns:r="http://schemas.openxmlformats.org/officeDocument/2006/relationships">
+  <p:cSld>
+    <p:spTree>
+      <p:nvGrpSpPr>
+        <p:cNvPr id="1" name=""/>
+        <p:cNvGrpSpPr/>
+        <p:nvPr/>
+      </p:nvGrpSpPr>
+      <p:grpSpPr/>
+      <p:sp>
+        <p:nvSpPr>
+          <p:cNvPr id="2" name="TextBox 1"/>
+          <p:cNvSpPr txBox="1"/>
+          <p:nvPr/>
+        </p:nvSpPr>
+        <p:spPr>
+          <a:xfrm>
+            <a:off x="566928" y="347472"/>
+            <a:ext cx="10881360" cy="438912"/>
+          </a:xfrm>
+          <a:prstGeom prst="rect">
+            <a:avLst/>
+          </a:prstGeom>
+          <a:noFill/>
+        </p:spPr>
+        <p:txBody>
+          <a:bodyPr wrap="square" lIns="73152" rIns="73152" tIns="36576" bIns="36576">
+            <a:spAutoFit/>
+          </a:bodyPr>
+          <a:lstStyle/>
+          <a:p>
+            <a:pPr algn="l">
+              <a:spcAft>
+                <a:spcPts val="0"/>
+              </a:spcAft>
+              <a:defRPr sz="3200" b="1">
+                <a:solidFill>
+                  <a:srgbClr val="122C4E"/>
+                </a:solidFill>
+                <a:latin typeface="Noto Sans CJK KR"/>
+              </a:defRPr>
+            </a:pPr>
+            <a:r>
+              <a:t>막혔을 때만: Complete를 복구용으로 사용한다</a:t>
+            </a:r>
+          </a:p>
+        </p:txBody>
+      </p:sp>
+      <p:sp>
+        <p:nvSpPr>
+          <p:cNvPr id="3" name="TextBox 2"/>
+          <p:cNvSpPr txBox="1"/>
+          <p:nvPr/>
+        </p:nvSpPr>
+        <p:spPr>
+          <a:xfrm>
+            <a:off x="603504" y="859536"/>
+            <a:ext cx="10698480" cy="292608"/>
+          </a:xfrm>
+          <a:prstGeom prst="rect">
+            <a:avLst/>
+          </a:prstGeom>
+          <a:noFill/>
+        </p:spPr>
+        <p:txBody>
+          <a:bodyPr wrap="square" lIns="73152" rIns="73152" tIns="36576" bIns="36576">
+            <a:spAutoFit/>
+          </a:bodyPr>
+          <a:lstStyle/>
+          <a:p>
+            <a:pPr algn="l">
+              <a:spcAft>
+                <a:spcPts val="0"/>
+              </a:spcAft>
+              <a:defRPr sz="1700" b="0">
+                <a:solidFill>
+                  <a:srgbClr val="5C6672"/>
+                </a:solidFill>
+                <a:latin typeface="Noto Sans CJK KR"/>
+              </a:defRPr>
+            </a:pPr>
+            <a:r>
+              <a:t>이 슬라이드가 먼저가 아닙니다. 직접 입력·실행을 시도한 뒤에만 내 파일과 Complete를 비교합니다.</a:t>
+            </a:r>
+          </a:p>
+        </p:txBody>
+      </p:sp>
+      <p:sp>
+        <p:nvSpPr>
+          <p:cNvPr id="4" name="TextBox 3"/>
+          <p:cNvSpPr txBox="1"/>
+          <p:nvPr/>
+        </p:nvSpPr>
+        <p:spPr>
+          <a:xfrm>
+            <a:off x="530352" y="6510528"/>
+            <a:ext cx="7772400" cy="201168"/>
+          </a:xfrm>
+          <a:prstGeom prst="rect">
+            <a:avLst/>
+          </a:prstGeom>
+          <a:noFill/>
+        </p:spPr>
+        <p:txBody>
+          <a:bodyPr wrap="square" lIns="73152" rIns="73152" tIns="36576" bIns="36576">
+            <a:spAutoFit/>
+          </a:bodyPr>
+          <a:lstStyle/>
+          <a:p>
+            <a:pPr algn="l">
+              <a:spcAft>
+                <a:spcPts val="0"/>
+              </a:spcAft>
+              <a:defRPr sz="1000" b="0">
+                <a:solidFill>
+                  <a:srgbClr val="5C6672"/>
+                </a:solidFill>
+                <a:latin typeface="Noto Sans CJK KR"/>
+              </a:defRPr>
+            </a:pPr>
+            <a:r>
+              <a:t>ROS 2 Jazzy · Gazebo Harmonic · M06 · 따라 하기형 AGV 실습</a:t>
+            </a:r>
+          </a:p>
+        </p:txBody>
+      </p:sp>
+      <p:sp>
+        <p:nvSpPr>
+          <p:cNvPr id="5" name="TextBox 4"/>
+          <p:cNvSpPr txBox="1"/>
+          <p:nvPr/>
+        </p:nvSpPr>
+        <p:spPr>
+          <a:xfrm>
+            <a:off x="9144000" y="6510528"/>
+            <a:ext cx="2468880" cy="201168"/>
+          </a:xfrm>
+          <a:prstGeom prst="rect">
+            <a:avLst/>
+          </a:prstGeom>
+          <a:noFill/>
+        </p:spPr>
+        <p:txBody>
+          <a:bodyPr wrap="square" lIns="73152" rIns="73152" tIns="36576" bIns="36576">
+            <a:spAutoFit/>
+          </a:bodyPr>
+          <a:lstStyle/>
+          <a:p>
+            <a:pPr algn="r">
+              <a:spcAft>
+                <a:spcPts val="0"/>
+              </a:spcAft>
+              <a:defRPr sz="1000" b="0">
+                <a:solidFill>
+                  <a:srgbClr val="5C6672"/>
+                </a:solidFill>
+                <a:latin typeface="Noto Sans CJK KR"/>
+              </a:defRPr>
+            </a:pPr>
+            <a:r>
+              <a:t>명령·파일 경로는 슬라이드에서 복사 가능</a:t>
+            </a:r>
+          </a:p>
+        </p:txBody>
+      </p:sp>
+      <p:sp>
+        <p:nvSpPr>
+          <p:cNvPr id="6" name="Rectangle 5"/>
+          <p:cNvSpPr/>
+          <p:nvPr/>
+        </p:nvSpPr>
+        <p:spPr>
+          <a:xfrm>
+            <a:off x="566928" y="1188720"/>
+            <a:ext cx="11064240" cy="347472"/>
+          </a:xfrm>
+          <a:prstGeom prst="rect">
+            <a:avLst/>
+          </a:prstGeom>
+          <a:solidFill>
+            <a:srgbClr val="F4F7FB"/>
+          </a:solidFill>
+          <a:ln>
+            <a:solidFill>
+              <a:srgbClr val="F4F7FB"/>
+            </a:solidFill>
+          </a:ln>
+        </p:spPr>
+        <p:style>
+          <a:lnRef idx="1">
+            <a:schemeClr val="accent1"/>
+          </a:lnRef>
+          <a:fillRef idx="3">
+            <a:schemeClr val="accent1"/>
+          </a:fillRef>
+          <a:effectRef idx="2">
+            <a:schemeClr val="accent1"/>
+          </a:effectRef>
+          <a:fontRef idx="minor">
+            <a:schemeClr val="lt1"/>
+          </a:fontRef>
+        </p:style>
+        <p:txBody>
+          <a:bodyPr rtlCol="0" anchor="ctr" wrap="square" lIns="73152" rIns="73152" tIns="36576" bIns="36576"/>
+          <a:lstStyle/>
+          <a:p>
+            <a:pPr algn="l">
+              <a:spcAft>
+                <a:spcPts val="0"/>
+              </a:spcAft>
+              <a:defRPr sz="1300" b="1">
+                <a:solidFill>
+                  <a:srgbClr val="122C4E"/>
+                </a:solidFill>
+                <a:latin typeface="Noto Sans CJK KR"/>
+              </a:defRPr>
+            </a:pPr>
+            <a:r>
+              <a:t>현재 단계 복구용 Complete    |    현재 폴더 ~/ros2_curri    |    현재 터미널</a:t>
+            </a:r>
+          </a:p>
+        </p:txBody>
+      </p:sp>
+      <p:sp>
+        <p:nvSpPr>
+          <p:cNvPr id="7" name="TextBox 6"/>
+          <p:cNvSpPr txBox="1"/>
+          <p:nvPr/>
+        </p:nvSpPr>
+        <p:spPr>
+          <a:xfrm>
+            <a:off x="713232" y="1664208"/>
+            <a:ext cx="10698480" cy="402336"/>
+          </a:xfrm>
+          <a:prstGeom prst="rect">
+            <a:avLst/>
+          </a:prstGeom>
+          <a:noFill/>
+        </p:spPr>
+        <p:txBody>
+          <a:bodyPr wrap="square" lIns="73152" rIns="73152" tIns="36576" bIns="36576">
+            <a:spAutoFit/>
+          </a:bodyPr>
+          <a:lstStyle/>
+          <a:p>
+            <a:pPr algn="ctr">
+              <a:spcAft>
+                <a:spcPts val="0"/>
+              </a:spcAft>
+              <a:defRPr sz="1800" b="1">
+                <a:solidFill>
+                  <a:srgbClr val="DB7E22"/>
+                </a:solidFill>
+                <a:latin typeface="Noto Sans CJK KR"/>
+              </a:defRPr>
+            </a:pPr>
+            <a:r>
+              <a:t>권장 순서: ① 내 오류를 확인  ② Complete와 diff  ③ 꼭 필요할 때만 backup 후 복사</a:t>
+            </a:r>
+          </a:p>
+        </p:txBody>
+      </p:sp>
+      <p:sp>
+        <p:nvSpPr>
+          <p:cNvPr id="8" name="Rounded Rectangle 7"/>
+          <p:cNvSpPr/>
+          <p:nvPr/>
+        </p:nvSpPr>
+        <p:spPr>
+          <a:xfrm>
+            <a:off x="676656" y="2423160"/>
+            <a:ext cx="10881360" cy="2606040"/>
+          </a:xfrm>
+          <a:prstGeom prst="roundRect">
+            <a:avLst/>
+          </a:prstGeom>
+          <a:solidFill>
+            <a:srgbClr val="1D232D"/>
+          </a:solidFill>
+          <a:ln>
+            <a:solidFill>
+              <a:srgbClr val="1D232D"/>
+            </a:solidFill>
+          </a:ln>
+        </p:spPr>
+        <p:style>
+          <a:lnRef idx="1">
+            <a:schemeClr val="accent1"/>
+          </a:lnRef>
+          <a:fillRef idx="3">
+            <a:schemeClr val="accent1"/>
+          </a:fillRef>
+          <a:effectRef idx="2">
+            <a:schemeClr val="accent1"/>
+          </a:effectRef>
+          <a:fontRef idx="minor">
+            <a:schemeClr val="lt1"/>
+          </a:fontRef>
+        </p:style>
+        <p:txBody>
+          <a:bodyPr rtlCol="0" anchor="ctr" wrap="square" lIns="73152" rIns="73152" tIns="36576" bIns="36576"/>
+          <a:lstStyle/>
+          <a:p>
+            <a:pPr algn="l">
+              <a:spcAft>
+                <a:spcPts val="0"/>
+              </a:spcAft>
+              <a:defRPr sz="1400" b="0">
+                <a:solidFill>
+                  <a:srgbClr val="FFFFFF"/>
+                </a:solidFill>
+                <a:latin typeface="DejaVu Sans Mono"/>
+              </a:defRPr>
+            </a:pPr>
+            <a:r>
+              <a:t>cd ~/ros2_curri</a:t>
+            </a:r>
+            <a:br/>
+            <a:r>
+              <a:t>diff -ru my_agv_ws/src blocks/B_robot_build/M06_xacro_modularization/complete/agv_ws/src || true</a:t>
+            </a:r>
+            <a:br/>
+            <a:r>
+              <a:t>cp -a my_agv_ws/src my_agv_ws/src_before_M06</a:t>
+            </a:r>
+            <a:br/>
+            <a:r>
+              <a:t>cp -a blocks/B_robot_build/M06_xacro_modularization/complete/agv_ws/src/. my_agv_ws/src/</a:t>
+            </a:r>
+            <a:br/>
+            <a:r>
+              <a:t>cd my_agv_ws &amp;&amp; colcon build --symlink-install &amp;&amp; source install/setup.bash</a:t>
+            </a:r>
+          </a:p>
+        </p:txBody>
+      </p:sp>
+      <p:sp>
+        <p:nvSpPr>
+          <p:cNvPr id="9" name="TextBox 8"/>
+          <p:cNvSpPr txBox="1"/>
+          <p:nvPr/>
+        </p:nvSpPr>
+        <p:spPr>
+          <a:xfrm>
+            <a:off x="786384" y="5413248"/>
+            <a:ext cx="10424160" cy="429768"/>
+          </a:xfrm>
+          <a:prstGeom prst="rect">
+            <a:avLst/>
+          </a:prstGeom>
+          <a:noFill/>
+        </p:spPr>
+        <p:txBody>
+          <a:bodyPr wrap="square" lIns="73152" rIns="73152" tIns="36576" bIns="36576">
+            <a:spAutoFit/>
+          </a:bodyPr>
+          <a:lstStyle/>
+          <a:p>
+            <a:pPr algn="ctr">
+              <a:spcAft>
+                <a:spcPts val="0"/>
+              </a:spcAft>
+              <a:defRPr sz="1700" b="1">
+                <a:solidFill>
+                  <a:srgbClr val="2A8B5A"/>
+                </a:solidFill>
+                <a:latin typeface="Noto Sans CJK KR"/>
+              </a:defRPr>
+            </a:pPr>
+            <a:r>
+              <a:t>복구 뒤에는 끝내지 말고, 내 파일과 Complete의 차이를 한 줄씩 설명한 뒤 다시 직접 입력해 봅니다.</a:t>
+            </a:r>
+          </a:p>
+        </p:txBody>
+      </p:sp>
+    </p:spTree>
+  </p:cSld>
+  <p:clrMapOvr>
+    <a:masterClrMapping/>
+  </p:clrMapOvr>
+</p:sld>
+</file>
+
+<file path=ppt/slides/slide27.xml><?xml version="1.0" encoding="utf-8"?>
+<p:sld xmlns:a="http://schemas.openxmlformats.org/drawingml/2006/main" xmlns:p="http://schemas.openxmlformats.org/presentationml/2006/main" xmlns:r="http://schemas.openxmlformats.org/officeDocument/2006/relationships">
+  <p:cSld>
+    <p:spTree>
+      <p:nvGrpSpPr>
+        <p:cNvPr id="1" name=""/>
+        <p:cNvGrpSpPr/>
+        <p:nvPr/>
+      </p:nvGrpSpPr>
+      <p:grpSpPr/>
+      <p:sp>
+        <p:nvSpPr>
+          <p:cNvPr id="2" name="TextBox 1"/>
+          <p:cNvSpPr txBox="1"/>
+          <p:nvPr/>
+        </p:nvSpPr>
+        <p:spPr>
+          <a:xfrm>
+            <a:off x="566928" y="347472"/>
+            <a:ext cx="10881360" cy="438912"/>
+          </a:xfrm>
+          <a:prstGeom prst="rect">
+            <a:avLst/>
+          </a:prstGeom>
+          <a:noFill/>
+        </p:spPr>
+        <p:txBody>
+          <a:bodyPr wrap="square" lIns="73152" rIns="73152" tIns="36576" bIns="36576">
+            <a:spAutoFit/>
+          </a:bodyPr>
+          <a:lstStyle/>
+          <a:p>
+            <a:pPr algn="l">
+              <a:spcAft>
+                <a:spcPts val="0"/>
+              </a:spcAft>
+              <a:defRPr sz="3200" b="1">
+                <a:solidFill>
+                  <a:srgbClr val="122C4E"/>
+                </a:solidFill>
+                <a:latin typeface="Noto Sans CJK KR"/>
+              </a:defRPr>
+            </a:pPr>
+            <a:r>
+              <a:t>미니 실습: 값 하나를 바꾸고 결과를 비교한다</a:t>
+            </a:r>
+          </a:p>
+        </p:txBody>
+      </p:sp>
+      <p:sp>
+        <p:nvSpPr>
+          <p:cNvPr id="3" name="TextBox 2"/>
+          <p:cNvSpPr txBox="1"/>
+          <p:nvPr/>
+        </p:nvSpPr>
+        <p:spPr>
+          <a:xfrm>
+            <a:off x="603504" y="859536"/>
+            <a:ext cx="10698480" cy="292608"/>
+          </a:xfrm>
+          <a:prstGeom prst="rect">
+            <a:avLst/>
+          </a:prstGeom>
+          <a:noFill/>
+        </p:spPr>
+        <p:txBody>
+          <a:bodyPr wrap="square" lIns="73152" rIns="73152" tIns="36576" bIns="36576">
+            <a:spAutoFit/>
+          </a:bodyPr>
+          <a:lstStyle/>
+          <a:p>
+            <a:pPr algn="l">
+              <a:spcAft>
+                <a:spcPts val="0"/>
+              </a:spcAft>
+              <a:defRPr sz="1700" b="0">
+                <a:solidFill>
+                  <a:srgbClr val="5C6672"/>
+                </a:solidFill>
+                <a:latin typeface="Noto Sans CJK KR"/>
+              </a:defRPr>
+            </a:pPr>
+            <a:r>
+              <a:t>정상 결과를 만든 뒤에는 한 번에 하나의 값만 바꿉니다.</a:t>
+            </a:r>
+          </a:p>
+        </p:txBody>
+      </p:sp>
+      <p:sp>
+        <p:nvSpPr>
+          <p:cNvPr id="4" name="TextBox 3"/>
+          <p:cNvSpPr txBox="1"/>
+          <p:nvPr/>
+        </p:nvSpPr>
+        <p:spPr>
+          <a:xfrm>
+            <a:off x="530352" y="6510528"/>
+            <a:ext cx="7772400" cy="201168"/>
+          </a:xfrm>
+          <a:prstGeom prst="rect">
+            <a:avLst/>
+          </a:prstGeom>
+          <a:noFill/>
+        </p:spPr>
+        <p:txBody>
+          <a:bodyPr wrap="square" lIns="73152" rIns="73152" tIns="36576" bIns="36576">
+            <a:spAutoFit/>
+          </a:bodyPr>
+          <a:lstStyle/>
+          <a:p>
+            <a:pPr algn="l">
+              <a:spcAft>
+                <a:spcPts val="0"/>
+              </a:spcAft>
+              <a:defRPr sz="1000" b="0">
+                <a:solidFill>
+                  <a:srgbClr val="5C6672"/>
+                </a:solidFill>
+                <a:latin typeface="Noto Sans CJK KR"/>
+              </a:defRPr>
+            </a:pPr>
+            <a:r>
+              <a:t>ROS 2 Jazzy · Gazebo Harmonic · M06 · 따라 하기형 AGV 실습</a:t>
+            </a:r>
+          </a:p>
+        </p:txBody>
+      </p:sp>
+      <p:sp>
+        <p:nvSpPr>
+          <p:cNvPr id="5" name="TextBox 4"/>
+          <p:cNvSpPr txBox="1"/>
+          <p:nvPr/>
+        </p:nvSpPr>
+        <p:spPr>
+          <a:xfrm>
+            <a:off x="9144000" y="6510528"/>
+            <a:ext cx="2468880" cy="201168"/>
+          </a:xfrm>
+          <a:prstGeom prst="rect">
+            <a:avLst/>
+          </a:prstGeom>
+          <a:noFill/>
+        </p:spPr>
+        <p:txBody>
+          <a:bodyPr wrap="square" lIns="73152" rIns="73152" tIns="36576" bIns="36576">
+            <a:spAutoFit/>
+          </a:bodyPr>
+          <a:lstStyle/>
+          <a:p>
+            <a:pPr algn="r">
+              <a:spcAft>
+                <a:spcPts val="0"/>
+              </a:spcAft>
+              <a:defRPr sz="1000" b="0">
+                <a:solidFill>
+                  <a:srgbClr val="5C6672"/>
+                </a:solidFill>
+                <a:latin typeface="Noto Sans CJK KR"/>
+              </a:defRPr>
+            </a:pPr>
+            <a:r>
+              <a:t>명령·파일 경로는 슬라이드에서 복사 가능</a:t>
+            </a:r>
+          </a:p>
+        </p:txBody>
+      </p:sp>
+      <p:sp>
+        <p:nvSpPr>
+          <p:cNvPr id="6" name="Rectangle 5"/>
+          <p:cNvSpPr/>
+          <p:nvPr/>
+        </p:nvSpPr>
+        <p:spPr>
+          <a:xfrm>
+            <a:off x="566928" y="1188720"/>
+            <a:ext cx="11064240" cy="347472"/>
+          </a:xfrm>
+          <a:prstGeom prst="rect">
+            <a:avLst/>
+          </a:prstGeom>
+          <a:solidFill>
+            <a:srgbClr val="F4F7FB"/>
+          </a:solidFill>
+          <a:ln>
+            <a:solidFill>
+              <a:srgbClr val="F4F7FB"/>
+            </a:solidFill>
+          </a:ln>
+        </p:spPr>
+        <p:style>
+          <a:lnRef idx="1">
+            <a:schemeClr val="accent1"/>
+          </a:lnRef>
+          <a:fillRef idx="3">
+            <a:schemeClr val="accent1"/>
+          </a:fillRef>
+          <a:effectRef idx="2">
+            <a:schemeClr val="accent1"/>
+          </a:effectRef>
+          <a:fontRef idx="minor">
+            <a:schemeClr val="lt1"/>
+          </a:fontRef>
+        </p:style>
+        <p:txBody>
+          <a:bodyPr rtlCol="0" anchor="ctr" wrap="square" lIns="73152" rIns="73152" tIns="36576" bIns="36576"/>
+          <a:lstStyle/>
+          <a:p>
+            <a:pPr algn="l">
+              <a:spcAft>
+                <a:spcPts val="0"/>
+              </a:spcAft>
+              <a:defRPr sz="1300" b="1">
+                <a:solidFill>
+                  <a:srgbClr val="122C4E"/>
+                </a:solidFill>
+                <a:latin typeface="Noto Sans CJK KR"/>
+              </a:defRPr>
+            </a:pPr>
+            <a:r>
+              <a:t>현재 단계 미니 실습    |    현재 폴더 ~/ros2_curri/my_agv_ws    |    현재 터미널</a:t>
+            </a:r>
+          </a:p>
+        </p:txBody>
+      </p:sp>
+      <p:sp>
+        <p:nvSpPr>
+          <p:cNvPr id="7" name="Rounded Rectangle 6"/>
+          <p:cNvSpPr/>
+          <p:nvPr/>
+        </p:nvSpPr>
+        <p:spPr>
+          <a:xfrm>
+            <a:off x="749808" y="1874519"/>
+            <a:ext cx="10652760" cy="1993392"/>
+          </a:xfrm>
+          <a:prstGeom prst="roundRect">
+            <a:avLst/>
+          </a:prstGeom>
+          <a:solidFill>
+            <a:srgbClr val="FFF8EB"/>
+          </a:solidFill>
+          <a:ln>
+            <a:solidFill>
+              <a:srgbClr val="ECC680"/>
+            </a:solidFill>
+          </a:ln>
+        </p:spPr>
+        <p:style>
+          <a:lnRef idx="1">
+            <a:schemeClr val="accent1"/>
+          </a:lnRef>
+          <a:fillRef idx="3">
+            <a:schemeClr val="accent1"/>
+          </a:fillRef>
+          <a:effectRef idx="2">
+            <a:schemeClr val="accent1"/>
+          </a:effectRef>
+          <a:fontRef idx="minor">
+            <a:schemeClr val="lt1"/>
+          </a:fontRef>
+        </p:style>
+        <p:txBody>
+          <a:bodyPr rtlCol="0" anchor="ctr" wrap="square" lIns="73152" rIns="73152" tIns="36576" bIns="36576"/>
+          <a:lstStyle/>
+          <a:p>
+            <a:pPr algn="ctr">
+              <a:spcAft>
+                <a:spcPts val="0"/>
+              </a:spcAft>
+              <a:defRPr sz="2300" b="1">
+                <a:solidFill>
+                  <a:srgbClr val="122C4E"/>
+                </a:solidFill>
+                <a:latin typeface="Noto Sans CJK KR"/>
+              </a:defRPr>
+            </a:pPr>
+            <a:r>
+              <a:t>wheel_radius 0.08→0.12 m를 적용한 뒤 joint origin과 cylinder radius가 함께 바뀌는지 비교한다.</a:t>
+            </a:r>
+          </a:p>
+        </p:txBody>
+      </p:sp>
+      <p:sp>
+        <p:nvSpPr>
+          <p:cNvPr id="8" name="TextBox 7"/>
+          <p:cNvSpPr txBox="1"/>
+          <p:nvPr/>
+        </p:nvSpPr>
+        <p:spPr>
+          <a:xfrm>
+            <a:off x="877824" y="4590288"/>
+            <a:ext cx="10241280" cy="594360"/>
+          </a:xfrm>
+          <a:prstGeom prst="rect">
+            <a:avLst/>
+          </a:prstGeom>
+          <a:noFill/>
+        </p:spPr>
+        <p:txBody>
+          <a:bodyPr wrap="square" lIns="73152" rIns="73152" tIns="36576" bIns="36576">
+            <a:spAutoFit/>
+          </a:bodyPr>
+          <a:lstStyle/>
+          <a:p>
+            <a:pPr algn="ctr">
+              <a:spcAft>
+                <a:spcPts val="0"/>
+              </a:spcAft>
+              <a:defRPr sz="1900" b="1">
+                <a:solidFill>
+                  <a:srgbClr val="DB7E22"/>
+                </a:solidFill>
+                <a:latin typeface="Noto Sans CJK KR"/>
+              </a:defRPr>
+            </a:pPr>
+            <a:r>
+              <a:t>기록할 것: 바꾼 값(단위) · 기대한 변화 · 실제 출력/화면 · 원래 값으로 되돌린 결과</a:t>
+            </a:r>
+          </a:p>
+        </p:txBody>
+      </p:sp>
+    </p:spTree>
+  </p:cSld>
+  <p:clrMapOvr>
+    <a:masterClrMapping/>
+  </p:clrMapOvr>
+</p:sld>
+</file>
+
+<file path=ppt/slides/slide28.xml><?xml version="1.0" encoding="utf-8"?>
+<p:sld xmlns:a="http://schemas.openxmlformats.org/drawingml/2006/main" xmlns:p="http://schemas.openxmlformats.org/presentationml/2006/main" xmlns:r="http://schemas.openxmlformats.org/officeDocument/2006/relationships">
+  <p:cSld>
+    <p:spTree>
+      <p:nvGrpSpPr>
+        <p:cNvPr id="1" name=""/>
+        <p:cNvGrpSpPr/>
+        <p:nvPr/>
+      </p:nvGrpSpPr>
+      <p:grpSpPr/>
+      <p:sp>
+        <p:nvSpPr>
+          <p:cNvPr id="2" name="TextBox 1"/>
+          <p:cNvSpPr txBox="1"/>
+          <p:nvPr/>
+        </p:nvSpPr>
+        <p:spPr>
+          <a:xfrm>
+            <a:off x="566928" y="347472"/>
+            <a:ext cx="10881360" cy="438912"/>
+          </a:xfrm>
+          <a:prstGeom prst="rect">
+            <a:avLst/>
+          </a:prstGeom>
+          <a:noFill/>
+        </p:spPr>
+        <p:txBody>
+          <a:bodyPr wrap="square" lIns="73152" rIns="73152" tIns="36576" bIns="36576">
+            <a:spAutoFit/>
+          </a:bodyPr>
+          <a:lstStyle/>
+          <a:p>
+            <a:pPr algn="l">
+              <a:spcAft>
+                <a:spcPts val="0"/>
+              </a:spcAft>
+              <a:defRPr sz="3200" b="1">
+                <a:solidFill>
+                  <a:srgbClr val="122C4E"/>
+                </a:solidFill>
+                <a:latin typeface="Noto Sans CJK KR"/>
+              </a:defRPr>
+            </a:pPr>
+            <a:r>
+              <a:t>내 프로젝트 체크포인트를 저장하고 다음 모듈로 넘긴다</a:t>
+            </a:r>
+          </a:p>
+        </p:txBody>
+      </p:sp>
+      <p:sp>
+        <p:nvSpPr>
+          <p:cNvPr id="3" name="TextBox 2"/>
+          <p:cNvSpPr txBox="1"/>
+          <p:nvPr/>
+        </p:nvSpPr>
+        <p:spPr>
+          <a:xfrm>
+            <a:off x="603504" y="859536"/>
+            <a:ext cx="10698480" cy="292608"/>
+          </a:xfrm>
+          <a:prstGeom prst="rect">
+            <a:avLst/>
+          </a:prstGeom>
+          <a:noFill/>
+        </p:spPr>
+        <p:txBody>
+          <a:bodyPr wrap="square" lIns="73152" rIns="73152" tIns="36576" bIns="36576">
+            <a:spAutoFit/>
+          </a:bodyPr>
+          <a:lstStyle/>
+          <a:p>
+            <a:pPr algn="l">
+              <a:spcAft>
+                <a:spcPts val="0"/>
+              </a:spcAft>
+              <a:defRPr sz="1700" b="0">
+                <a:solidFill>
+                  <a:srgbClr val="5C6672"/>
+                </a:solidFill>
+                <a:latin typeface="Noto Sans CJK KR"/>
+              </a:defRPr>
+            </a:pPr>
+            <a:r>
+              <a:t>Complete는 복구용 비교 기준이고, 다음 단계는 내가 직접 만든 workspace에서 계속합니다.</a:t>
+            </a:r>
+          </a:p>
+        </p:txBody>
+      </p:sp>
+      <p:sp>
+        <p:nvSpPr>
+          <p:cNvPr id="4" name="TextBox 3"/>
+          <p:cNvSpPr txBox="1"/>
+          <p:nvPr/>
+        </p:nvSpPr>
+        <p:spPr>
+          <a:xfrm>
+            <a:off x="530352" y="6510528"/>
+            <a:ext cx="7772400" cy="201168"/>
+          </a:xfrm>
+          <a:prstGeom prst="rect">
+            <a:avLst/>
+          </a:prstGeom>
+          <a:noFill/>
+        </p:spPr>
+        <p:txBody>
+          <a:bodyPr wrap="square" lIns="73152" rIns="73152" tIns="36576" bIns="36576">
+            <a:spAutoFit/>
+          </a:bodyPr>
+          <a:lstStyle/>
+          <a:p>
+            <a:pPr algn="l">
+              <a:spcAft>
+                <a:spcPts val="0"/>
+              </a:spcAft>
+              <a:defRPr sz="1000" b="0">
+                <a:solidFill>
+                  <a:srgbClr val="5C6672"/>
+                </a:solidFill>
+                <a:latin typeface="Noto Sans CJK KR"/>
+              </a:defRPr>
+            </a:pPr>
+            <a:r>
+              <a:t>ROS 2 Jazzy · Gazebo Harmonic · M06 · 따라 하기형 AGV 실습</a:t>
+            </a:r>
+          </a:p>
+        </p:txBody>
+      </p:sp>
+      <p:sp>
+        <p:nvSpPr>
+          <p:cNvPr id="5" name="TextBox 4"/>
+          <p:cNvSpPr txBox="1"/>
+          <p:nvPr/>
+        </p:nvSpPr>
+        <p:spPr>
+          <a:xfrm>
+            <a:off x="9144000" y="6510528"/>
+            <a:ext cx="2468880" cy="201168"/>
+          </a:xfrm>
+          <a:prstGeom prst="rect">
+            <a:avLst/>
+          </a:prstGeom>
+          <a:noFill/>
+        </p:spPr>
+        <p:txBody>
+          <a:bodyPr wrap="square" lIns="73152" rIns="73152" tIns="36576" bIns="36576">
+            <a:spAutoFit/>
+          </a:bodyPr>
+          <a:lstStyle/>
+          <a:p>
+            <a:pPr algn="r">
+              <a:spcAft>
+                <a:spcPts val="0"/>
+              </a:spcAft>
+              <a:defRPr sz="1000" b="0">
+                <a:solidFill>
+                  <a:srgbClr val="5C6672"/>
+                </a:solidFill>
+                <a:latin typeface="Noto Sans CJK KR"/>
+              </a:defRPr>
+            </a:pPr>
+            <a:r>
+              <a:t>명령·파일 경로는 슬라이드에서 복사 가능</a:t>
+            </a:r>
+          </a:p>
+        </p:txBody>
+      </p:sp>
+      <p:sp>
+        <p:nvSpPr>
+          <p:cNvPr id="6" name="Rectangle 5"/>
+          <p:cNvSpPr/>
+          <p:nvPr/>
+        </p:nvSpPr>
+        <p:spPr>
+          <a:xfrm>
+            <a:off x="566928" y="1188720"/>
+            <a:ext cx="11064240" cy="347472"/>
+          </a:xfrm>
+          <a:prstGeom prst="rect">
+            <a:avLst/>
+          </a:prstGeom>
+          <a:solidFill>
+            <a:srgbClr val="F4F7FB"/>
+          </a:solidFill>
+          <a:ln>
+            <a:solidFill>
+              <a:srgbClr val="F4F7FB"/>
+            </a:solidFill>
+          </a:ln>
+        </p:spPr>
+        <p:style>
+          <a:lnRef idx="1">
+            <a:schemeClr val="accent1"/>
+          </a:lnRef>
+          <a:fillRef idx="3">
+            <a:schemeClr val="accent1"/>
+          </a:fillRef>
+          <a:effectRef idx="2">
+            <a:schemeClr val="accent1"/>
+          </a:effectRef>
+          <a:fontRef idx="minor">
+            <a:schemeClr val="lt1"/>
+          </a:fontRef>
+        </p:style>
+        <p:txBody>
+          <a:bodyPr rtlCol="0" anchor="ctr" wrap="square" lIns="73152" rIns="73152" tIns="36576" bIns="36576"/>
+          <a:lstStyle/>
+          <a:p>
+            <a:pPr algn="l">
+              <a:spcAft>
+                <a:spcPts val="0"/>
+              </a:spcAft>
+              <a:defRPr sz="1300" b="1">
+                <a:solidFill>
+                  <a:srgbClr val="122C4E"/>
+                </a:solidFill>
+                <a:latin typeface="Noto Sans CJK KR"/>
+              </a:defRPr>
+            </a:pPr>
+            <a:r>
+              <a:t>현재 단계 체크포인트    |    현재 폴더 ~/ros2_curri/my_agv_ws    |    현재 터미널</a:t>
+            </a:r>
+          </a:p>
+        </p:txBody>
+      </p:sp>
+      <p:sp>
+        <p:nvSpPr>
+          <p:cNvPr id="7" name="Rounded Rectangle 6"/>
+          <p:cNvSpPr/>
+          <p:nvPr/>
+        </p:nvSpPr>
+        <p:spPr>
+          <a:xfrm>
+            <a:off x="685800" y="1737360"/>
+            <a:ext cx="10972800" cy="3611880"/>
+          </a:xfrm>
+          <a:prstGeom prst="roundRect">
+            <a:avLst/>
+          </a:prstGeom>
+          <a:solidFill>
+            <a:srgbClr val="F4F7FB"/>
+          </a:solidFill>
+          <a:ln>
+            <a:solidFill>
+              <a:srgbClr val="D2DCE8"/>
+            </a:solidFill>
+          </a:ln>
+        </p:spPr>
+        <p:style>
+          <a:lnRef idx="1">
+            <a:schemeClr val="accent1"/>
+          </a:lnRef>
+          <a:fillRef idx="3">
+            <a:schemeClr val="accent1"/>
+          </a:fillRef>
+          <a:effectRef idx="2">
+            <a:schemeClr val="accent1"/>
+          </a:effectRef>
+          <a:fontRef idx="minor">
+            <a:schemeClr val="lt1"/>
+          </a:fontRef>
+        </p:style>
+        <p:txBody>
+          <a:bodyPr rtlCol="0" anchor="ctr"/>
+          <a:lstStyle/>
+          <a:p>
+            <a:pPr algn="ctr"/>
+          </a:p>
+        </p:txBody>
+      </p:sp>
+      <p:sp>
+        <p:nvSpPr>
+          <p:cNvPr id="8" name="TextBox 7"/>
+          <p:cNvSpPr txBox="1"/>
+          <p:nvPr/>
+        </p:nvSpPr>
+        <p:spPr>
+          <a:xfrm>
+            <a:off x="896112" y="1993392"/>
+            <a:ext cx="10332720" cy="2971800"/>
+          </a:xfrm>
+          <a:prstGeom prst="rect">
+            <a:avLst/>
+          </a:prstGeom>
+          <a:noFill/>
+        </p:spPr>
+        <p:txBody>
+          <a:bodyPr wrap="square" lIns="109728" rIns="109728">
+            <a:spAutoFit/>
+          </a:bodyPr>
+          <a:lstStyle/>
+          <a:p>
+            <a:pPr>
+              <a:spcAft>
+                <a:spcPts val="800"/>
+              </a:spcAft>
+              <a:defRPr sz="1800">
+                <a:solidFill>
+                  <a:srgbClr val="122C4E"/>
+                </a:solidFill>
+                <a:latin typeface="Noto Sans CJK KR"/>
+              </a:defRPr>
+            </a:pPr>
+            <a:r>
+              <a:t>• □ 완료 화면: wheel_radius와 wheel_base 변경이 좌우 바퀴·충돌 형상에 함께 적용된다.</a:t>
+            </a:r>
+          </a:p>
+          <a:p>
+            <a:pPr>
+              <a:spcAft>
+                <a:spcPts val="800"/>
+              </a:spcAft>
+              <a:defRPr sz="1800">
+                <a:solidFill>
+                  <a:srgbClr val="122C4E"/>
+                </a:solidFill>
+                <a:latin typeface="Noto Sans CJK KR"/>
+              </a:defRPr>
+            </a:pPr>
+            <a:r>
+              <a:t>• □ 막혔을 때 비교할 Complete: blocks/B_robot_build/M06_xacro_modularization/complete/</a:t>
+            </a:r>
+          </a:p>
+          <a:p>
+            <a:pPr>
+              <a:spcAft>
+                <a:spcPts val="800"/>
+              </a:spcAft>
+              <a:defRPr sz="1800">
+                <a:solidFill>
+                  <a:srgbClr val="122C4E"/>
+                </a:solidFill>
+                <a:latin typeface="Noto Sans CJK KR"/>
+              </a:defRPr>
+            </a:pPr>
+            <a:r>
+              <a:t>• □ 정상 로그·캡처: logs/validation.log, screenshots/validation_terminal.png</a:t>
+            </a:r>
+          </a:p>
+          <a:p>
+            <a:pPr>
+              <a:spcAft>
+                <a:spcPts val="800"/>
+              </a:spcAft>
+              <a:defRPr sz="1800">
+                <a:solidFill>
+                  <a:srgbClr val="122C4E"/>
+                </a:solidFill>
+                <a:latin typeface="Noto Sans CJK KR"/>
+              </a:defRPr>
+            </a:pPr>
+            <a:r>
+              <a:t>• □ 버전 식별: CHECKSUM_or_TAG.txt의 SHA-256 manifest</a:t>
+            </a:r>
+          </a:p>
+          <a:p>
+            <a:pPr>
+              <a:spcAft>
+                <a:spcPts val="800"/>
+              </a:spcAft>
+              <a:defRPr sz="1800">
+                <a:solidFill>
+                  <a:srgbClr val="122C4E"/>
+                </a:solidFill>
+                <a:latin typeface="Noto Sans CJK KR"/>
+              </a:defRPr>
+            </a:pPr>
+            <a:r>
+              <a:t>• □ 다음 시작 조건: M07 Gazebo 물리</a:t>
+            </a:r>
+          </a:p>
+        </p:txBody>
+      </p:sp>
+      <p:sp>
+        <p:nvSpPr>
+          <p:cNvPr id="9" name="TextBox 8"/>
+          <p:cNvSpPr txBox="1"/>
+          <p:nvPr/>
+        </p:nvSpPr>
+        <p:spPr>
+          <a:xfrm>
+            <a:off x="868680" y="5596128"/>
+            <a:ext cx="10515600" cy="338328"/>
+          </a:xfrm>
+          <a:prstGeom prst="rect">
+            <a:avLst/>
+          </a:prstGeom>
+          <a:noFill/>
+        </p:spPr>
+        <p:txBody>
+          <a:bodyPr wrap="square" lIns="73152" rIns="73152" tIns="36576" bIns="36576">
+            <a:spAutoFit/>
+          </a:bodyPr>
+          <a:lstStyle/>
+          <a:p>
+            <a:pPr algn="ctr">
+              <a:spcAft>
+                <a:spcPts val="0"/>
+              </a:spcAft>
+              <a:defRPr sz="1700" b="1">
+                <a:solidFill>
+                  <a:srgbClr val="2A8B5A"/>
+                </a:solidFill>
+                <a:latin typeface="Noto Sans CJK KR"/>
+              </a:defRPr>
+            </a:pPr>
+            <a:r>
+              <a:t>다음 모듈을 시작하기 전, 내 src의 변경사항을 저장하고 현재 완료 조건을 다시 확인합니다.</a:t>
+            </a:r>
+          </a:p>
+        </p:txBody>
+      </p:sp>
+    </p:spTree>
+  </p:cSld>
+  <p:clrMapOvr>
+    <a:masterClrMapping/>
+  </p:clrMapOvr>
+</p:sld>
+</file>
+
+<file path=ppt/slides/slide29.xml><?xml version="1.0" encoding="utf-8"?>
 <p:sld xmlns:a="http://schemas.openxmlformats.org/drawingml/2006/main" xmlns:p="http://schemas.openxmlformats.org/presentationml/2006/main" xmlns:r="http://schemas.openxmlformats.org/officeDocument/2006/relationships">
   <p:cSld>
     <p:spTree>

--- a/blocks/B_robot_build/M06_xacro_modularization/M06_Xacro로_구조_모듈화.pptx
+++ b/blocks/B_robot_build/M06_xacro_modularization/M06_Xacro로_구조_모듈화.pptx
@@ -6166,7 +6166,7 @@
               <a:spcAft>
                 <a:spcPts val="0"/>
               </a:spcAft>
-              <a:defRPr sz="1800" b="1">
+              <a:defRPr sz="1400" b="1">
                 <a:solidFill>
                   <a:srgbClr val="FFFFFF"/>
                 </a:solidFill>
@@ -6174,7 +6174,7 @@
               </a:defRPr>
             </a:pPr>
             <a:r>
-              <a:t>M06 · Block B · ROS 2 + Gazebo Sim AGV</a:t>
+              <a:t>ROS 2 기반 AGV End-to-End 개발 커리큘럼 · M06 · Block B</a:t>
             </a:r>
           </a:p>
         </p:txBody>
@@ -6384,7 +6384,7 @@
               <a:spcAft>
                 <a:spcPts val="0"/>
               </a:spcAft>
-              <a:defRPr sz="1000" b="0">
+              <a:defRPr sz="900" b="0">
                 <a:solidFill>
                   <a:srgbClr val="5C6672"/>
                 </a:solidFill>
@@ -6392,7 +6392,7 @@
               </a:defRPr>
             </a:pPr>
             <a:r>
-              <a:t>ROS 2 Jazzy · Gazebo Harmonic · M06 · 따라 하기형 AGV 실습</a:t>
+              <a:t>ROS 2 기반 AGV End-to-End 개발 커리큘럼 · M06 · Block B</a:t>
             </a:r>
           </a:p>
         </p:txBody>
@@ -6558,7 +6558,7 @@
               <a:spcAft>
                 <a:spcPts val="0"/>
               </a:spcAft>
-              <a:defRPr sz="1000" b="0">
+              <a:defRPr sz="900" b="0">
                 <a:solidFill>
                   <a:srgbClr val="5C6672"/>
                 </a:solidFill>
@@ -6566,7 +6566,7 @@
               </a:defRPr>
             </a:pPr>
             <a:r>
-              <a:t>ROS 2 Jazzy · Gazebo Harmonic · M06 · 따라 하기형 AGV 실습</a:t>
+              <a:t>ROS 2 기반 AGV End-to-End 개발 커리큘럼 · M06 · Block B</a:t>
             </a:r>
           </a:p>
         </p:txBody>
@@ -7321,7 +7321,7 @@
               <a:spcAft>
                 <a:spcPts val="0"/>
               </a:spcAft>
-              <a:defRPr sz="1000" b="0">
+              <a:defRPr sz="900" b="0">
                 <a:solidFill>
                   <a:srgbClr val="5C6672"/>
                 </a:solidFill>
@@ -7329,7 +7329,7 @@
               </a:defRPr>
             </a:pPr>
             <a:r>
-              <a:t>ROS 2 Jazzy · Gazebo Harmonic · M06 · 따라 하기형 AGV 실습</a:t>
+              <a:t>ROS 2 기반 AGV End-to-End 개발 커리큘럼 · M06 · Block B</a:t>
             </a:r>
           </a:p>
         </p:txBody>
@@ -7849,7 +7849,7 @@
               <a:spcAft>
                 <a:spcPts val="0"/>
               </a:spcAft>
-              <a:defRPr sz="1000" b="0">
+              <a:defRPr sz="900" b="0">
                 <a:solidFill>
                   <a:srgbClr val="5C6672"/>
                 </a:solidFill>
@@ -7857,7 +7857,7 @@
               </a:defRPr>
             </a:pPr>
             <a:r>
-              <a:t>ROS 2 Jazzy · Gazebo Harmonic · M06 · 따라 하기형 AGV 실습</a:t>
+              <a:t>ROS 2 기반 AGV End-to-End 개발 커리큘럼 · M06 · Block B</a:t>
             </a:r>
           </a:p>
         </p:txBody>
@@ -8642,7 +8642,7 @@
               <a:spcAft>
                 <a:spcPts val="0"/>
               </a:spcAft>
-              <a:defRPr sz="1000" b="0">
+              <a:defRPr sz="900" b="0">
                 <a:solidFill>
                   <a:srgbClr val="5C6672"/>
                 </a:solidFill>
@@ -8650,7 +8650,7 @@
               </a:defRPr>
             </a:pPr>
             <a:r>
-              <a:t>ROS 2 Jazzy · Gazebo Harmonic · M06 · 따라 하기형 AGV 실습</a:t>
+              <a:t>ROS 2 기반 AGV End-to-End 개발 커리큘럼 · M06 · Block B</a:t>
             </a:r>
           </a:p>
         </p:txBody>
@@ -9431,7 +9431,7 @@
               <a:spcAft>
                 <a:spcPts val="0"/>
               </a:spcAft>
-              <a:defRPr sz="1000" b="0">
+              <a:defRPr sz="900" b="0">
                 <a:solidFill>
                   <a:srgbClr val="5C6672"/>
                 </a:solidFill>
@@ -9439,7 +9439,7 @@
               </a:defRPr>
             </a:pPr>
             <a:r>
-              <a:t>ROS 2 Jazzy · Gazebo Harmonic · M06 · 따라 하기형 AGV 실습</a:t>
+              <a:t>ROS 2 기반 AGV End-to-End 개발 커리큘럼 · M06 · Block B</a:t>
             </a:r>
           </a:p>
         </p:txBody>
@@ -10220,7 +10220,7 @@
               <a:spcAft>
                 <a:spcPts val="0"/>
               </a:spcAft>
-              <a:defRPr sz="1000" b="0">
+              <a:defRPr sz="900" b="0">
                 <a:solidFill>
                   <a:srgbClr val="5C6672"/>
                 </a:solidFill>
@@ -10228,7 +10228,7 @@
               </a:defRPr>
             </a:pPr>
             <a:r>
-              <a:t>ROS 2 Jazzy · Gazebo Harmonic · M06 · 따라 하기형 AGV 실습</a:t>
+              <a:t>ROS 2 기반 AGV End-to-End 개발 커리큘럼 · M06 · Block B</a:t>
             </a:r>
           </a:p>
         </p:txBody>
@@ -10694,7 +10694,7 @@
               <a:spcAft>
                 <a:spcPts val="0"/>
               </a:spcAft>
-              <a:defRPr sz="1000" b="0">
+              <a:defRPr sz="900" b="0">
                 <a:solidFill>
                   <a:srgbClr val="5C6672"/>
                 </a:solidFill>
@@ -10702,7 +10702,7 @@
               </a:defRPr>
             </a:pPr>
             <a:r>
-              <a:t>ROS 2 Jazzy · Gazebo Harmonic · M06 · 따라 하기형 AGV 실습</a:t>
+              <a:t>ROS 2 기반 AGV End-to-End 개발 커리큘럼 · M06 · Block B</a:t>
             </a:r>
           </a:p>
         </p:txBody>
@@ -11168,7 +11168,7 @@
               <a:spcAft>
                 <a:spcPts val="0"/>
               </a:spcAft>
-              <a:defRPr sz="1000" b="0">
+              <a:defRPr sz="900" b="0">
                 <a:solidFill>
                   <a:srgbClr val="5C6672"/>
                 </a:solidFill>
@@ -11176,7 +11176,7 @@
               </a:defRPr>
             </a:pPr>
             <a:r>
-              <a:t>ROS 2 Jazzy · Gazebo Harmonic · M06 · 따라 하기형 AGV 실습</a:t>
+              <a:t>ROS 2 기반 AGV End-to-End 개발 커리큘럼 · M06 · Block B</a:t>
             </a:r>
           </a:p>
         </p:txBody>
@@ -11642,7 +11642,7 @@
               <a:spcAft>
                 <a:spcPts val="0"/>
               </a:spcAft>
-              <a:defRPr sz="1000" b="0">
+              <a:defRPr sz="900" b="0">
                 <a:solidFill>
                   <a:srgbClr val="5C6672"/>
                 </a:solidFill>
@@ -11650,7 +11650,7 @@
               </a:defRPr>
             </a:pPr>
             <a:r>
-              <a:t>ROS 2 Jazzy · Gazebo Harmonic · M06 · 따라 하기형 AGV 실습</a:t>
+              <a:t>ROS 2 기반 AGV End-to-End 개발 커리큘럼 · M06 · Block B</a:t>
             </a:r>
           </a:p>
         </p:txBody>
@@ -12113,7 +12113,7 @@
               <a:spcAft>
                 <a:spcPts val="0"/>
               </a:spcAft>
-              <a:defRPr sz="1000" b="0">
+              <a:defRPr sz="900" b="0">
                 <a:solidFill>
                   <a:srgbClr val="5C6672"/>
                 </a:solidFill>
@@ -12121,7 +12121,7 @@
               </a:defRPr>
             </a:pPr>
             <a:r>
-              <a:t>ROS 2 Jazzy · Gazebo Harmonic · M06 · 따라 하기형 AGV 실습</a:t>
+              <a:t>ROS 2 기반 AGV End-to-End 개발 커리큘럼 · M06 · Block B</a:t>
             </a:r>
           </a:p>
         </p:txBody>
@@ -12543,7 +12543,7 @@
               <a:spcAft>
                 <a:spcPts val="0"/>
               </a:spcAft>
-              <a:defRPr sz="1000" b="0">
+              <a:defRPr sz="900" b="0">
                 <a:solidFill>
                   <a:srgbClr val="5C6672"/>
                 </a:solidFill>
@@ -12551,7 +12551,7 @@
               </a:defRPr>
             </a:pPr>
             <a:r>
-              <a:t>ROS 2 Jazzy · Gazebo Harmonic · M06 · 따라 하기형 AGV 실습</a:t>
+              <a:t>ROS 2 기반 AGV End-to-End 개발 커리큘럼 · M06 · Block B</a:t>
             </a:r>
           </a:p>
         </p:txBody>
@@ -13004,7 +13004,7 @@
               <a:spcAft>
                 <a:spcPts val="0"/>
               </a:spcAft>
-              <a:defRPr sz="1000" b="0">
+              <a:defRPr sz="900" b="0">
                 <a:solidFill>
                   <a:srgbClr val="5C6672"/>
                 </a:solidFill>
@@ -13012,7 +13012,7 @@
               </a:defRPr>
             </a:pPr>
             <a:r>
-              <a:t>ROS 2 Jazzy · Gazebo Harmonic · M06 · 따라 하기형 AGV 실습</a:t>
+              <a:t>ROS 2 기반 AGV End-to-End 개발 커리큘럼 · M06 · Block B</a:t>
             </a:r>
           </a:p>
         </p:txBody>
@@ -13454,7 +13454,7 @@
               <a:spcAft>
                 <a:spcPts val="0"/>
               </a:spcAft>
-              <a:defRPr sz="1000" b="0">
+              <a:defRPr sz="900" b="0">
                 <a:solidFill>
                   <a:srgbClr val="5C6672"/>
                 </a:solidFill>
@@ -13462,7 +13462,7 @@
               </a:defRPr>
             </a:pPr>
             <a:r>
-              <a:t>ROS 2 Jazzy · Gazebo Harmonic · M06 · 따라 하기형 AGV 실습</a:t>
+              <a:t>ROS 2 기반 AGV End-to-End 개발 커리큘럼 · M06 · Block B</a:t>
             </a:r>
           </a:p>
         </p:txBody>
@@ -13904,7 +13904,7 @@
               <a:spcAft>
                 <a:spcPts val="0"/>
               </a:spcAft>
-              <a:defRPr sz="1000" b="0">
+              <a:defRPr sz="900" b="0">
                 <a:solidFill>
                   <a:srgbClr val="5C6672"/>
                 </a:solidFill>
@@ -13912,7 +13912,7 @@
               </a:defRPr>
             </a:pPr>
             <a:r>
-              <a:t>ROS 2 Jazzy · Gazebo Harmonic · M06 · 따라 하기형 AGV 실습</a:t>
+              <a:t>ROS 2 기반 AGV End-to-End 개발 커리큘럼 · M06 · Block B</a:t>
             </a:r>
           </a:p>
         </p:txBody>
@@ -14276,7 +14276,7 @@
               <a:spcAft>
                 <a:spcPts val="0"/>
               </a:spcAft>
-              <a:defRPr sz="1000" b="0">
+              <a:defRPr sz="900" b="0">
                 <a:solidFill>
                   <a:srgbClr val="5C6672"/>
                 </a:solidFill>
@@ -14284,7 +14284,7 @@
               </a:defRPr>
             </a:pPr>
             <a:r>
-              <a:t>ROS 2 Jazzy · Gazebo Harmonic · M06 · 따라 하기형 AGV 실습</a:t>
+              <a:t>ROS 2 기반 AGV End-to-End 개발 커리큘럼 · M06 · Block B</a:t>
             </a:r>
           </a:p>
         </p:txBody>
@@ -14513,7 +14513,7 @@
               <a:spcAft>
                 <a:spcPts val="0"/>
               </a:spcAft>
-              <a:defRPr sz="1000" b="0">
+              <a:defRPr sz="900" b="0">
                 <a:solidFill>
                   <a:srgbClr val="5C6672"/>
                 </a:solidFill>
@@ -14521,7 +14521,7 @@
               </a:defRPr>
             </a:pPr>
             <a:r>
-              <a:t>ROS 2 Jazzy · Gazebo Harmonic · M06 · 따라 하기형 AGV 실습</a:t>
+              <a:t>ROS 2 기반 AGV End-to-End 개발 커리큘럼 · M06 · Block B</a:t>
             </a:r>
           </a:p>
         </p:txBody>
@@ -14916,7 +14916,7 @@
               <a:spcAft>
                 <a:spcPts val="0"/>
               </a:spcAft>
-              <a:defRPr sz="1000" b="0">
+              <a:defRPr sz="900" b="0">
                 <a:solidFill>
                   <a:srgbClr val="5C6672"/>
                 </a:solidFill>
@@ -14924,7 +14924,7 @@
               </a:defRPr>
             </a:pPr>
             <a:r>
-              <a:t>ROS 2 Jazzy · Gazebo Harmonic · M06 · 따라 하기형 AGV 실습</a:t>
+              <a:t>ROS 2 기반 AGV End-to-End 개발 커리큘럼 · M06 · Block B</a:t>
             </a:r>
           </a:p>
         </p:txBody>
@@ -15441,7 +15441,7 @@
               <a:spcAft>
                 <a:spcPts val="0"/>
               </a:spcAft>
-              <a:defRPr sz="1000" b="0">
+              <a:defRPr sz="900" b="0">
                 <a:solidFill>
                   <a:srgbClr val="5C6672"/>
                 </a:solidFill>
@@ -15449,7 +15449,7 @@
               </a:defRPr>
             </a:pPr>
             <a:r>
-              <a:t>ROS 2 Jazzy · Gazebo Harmonic · M06 · 따라 하기형 AGV 실습</a:t>
+              <a:t>ROS 2 기반 AGV End-to-End 개발 커리큘럼 · M06 · Block B</a:t>
             </a:r>
           </a:p>
         </p:txBody>
@@ -15825,7 +15825,7 @@
               <a:spcAft>
                 <a:spcPts val="0"/>
               </a:spcAft>
-              <a:defRPr sz="1000" b="0">
+              <a:defRPr sz="900" b="0">
                 <a:solidFill>
                   <a:srgbClr val="5C6672"/>
                 </a:solidFill>
@@ -15833,7 +15833,7 @@
               </a:defRPr>
             </a:pPr>
             <a:r>
-              <a:t>ROS 2 Jazzy · Gazebo Harmonic · M06 · 따라 하기형 AGV 실습</a:t>
+              <a:t>ROS 2 기반 AGV End-to-End 개발 커리큘럼 · M06 · Block B</a:t>
             </a:r>
           </a:p>
         </p:txBody>
@@ -16154,7 +16154,7 @@
               <a:spcAft>
                 <a:spcPts val="0"/>
               </a:spcAft>
-              <a:defRPr sz="1000" b="0">
+              <a:defRPr sz="900" b="0">
                 <a:solidFill>
                   <a:srgbClr val="5C6672"/>
                 </a:solidFill>
@@ -16162,7 +16162,7 @@
               </a:defRPr>
             </a:pPr>
             <a:r>
-              <a:t>ROS 2 Jazzy · Gazebo Harmonic · M06 · 따라 하기형 AGV 실습</a:t>
+              <a:t>ROS 2 기반 AGV End-to-End 개발 커리큘럼 · M06 · Block B</a:t>
             </a:r>
           </a:p>
         </p:txBody>
@@ -16573,7 +16573,7 @@
               <a:spcAft>
                 <a:spcPts val="0"/>
               </a:spcAft>
-              <a:defRPr sz="1000" b="0">
+              <a:defRPr sz="900" b="0">
                 <a:solidFill>
                   <a:srgbClr val="5C6672"/>
                 </a:solidFill>
@@ -16581,7 +16581,7 @@
               </a:defRPr>
             </a:pPr>
             <a:r>
-              <a:t>ROS 2 Jazzy · Gazebo Harmonic · M06 · 따라 하기형 AGV 실습</a:t>
+              <a:t>ROS 2 기반 AGV End-to-End 개발 커리큘럼 · M06 · Block B</a:t>
             </a:r>
           </a:p>
         </p:txBody>
@@ -17104,7 +17104,7 @@
               <a:spcAft>
                 <a:spcPts val="0"/>
               </a:spcAft>
-              <a:defRPr sz="1000" b="0">
+              <a:defRPr sz="900" b="0">
                 <a:solidFill>
                   <a:srgbClr val="5C6672"/>
                 </a:solidFill>
@@ -17112,7 +17112,7 @@
               </a:defRPr>
             </a:pPr>
             <a:r>
-              <a:t>ROS 2 Jazzy · Gazebo Harmonic · M06 · 따라 하기형 AGV 실습</a:t>
+              <a:t>ROS 2 기반 AGV End-to-End 개발 커리큘럼 · M06 · Block B</a:t>
             </a:r>
           </a:p>
         </p:txBody>
@@ -17523,7 +17523,7 @@
               <a:spcAft>
                 <a:spcPts val="0"/>
               </a:spcAft>
-              <a:defRPr sz="1000" b="0">
+              <a:defRPr sz="900" b="0">
                 <a:solidFill>
                   <a:srgbClr val="5C6672"/>
                 </a:solidFill>
@@ -17531,7 +17531,7 @@
               </a:defRPr>
             </a:pPr>
             <a:r>
-              <a:t>ROS 2 Jazzy · Gazebo Harmonic · M06 · 따라 하기형 AGV 실습</a:t>
+              <a:t>ROS 2 기반 AGV End-to-End 개발 커리큘럼 · M06 · Block B</a:t>
             </a:r>
           </a:p>
         </p:txBody>
@@ -17856,7 +17856,7 @@
               <a:spcAft>
                 <a:spcPts val="0"/>
               </a:spcAft>
-              <a:defRPr sz="1000" b="0">
+              <a:defRPr sz="900" b="0">
                 <a:solidFill>
                   <a:srgbClr val="5C6672"/>
                 </a:solidFill>
@@ -17864,7 +17864,7 @@
               </a:defRPr>
             </a:pPr>
             <a:r>
-              <a:t>ROS 2 Jazzy · Gazebo Harmonic · M06 · 따라 하기형 AGV 실습</a:t>
+              <a:t>ROS 2 기반 AGV End-to-End 개발 커리큘럼 · M06 · Block B</a:t>
             </a:r>
           </a:p>
         </p:txBody>
@@ -18496,7 +18496,7 @@
               <a:spcAft>
                 <a:spcPts val="0"/>
               </a:spcAft>
-              <a:defRPr sz="1000" b="0">
+              <a:defRPr sz="900" b="0">
                 <a:solidFill>
                   <a:srgbClr val="5C6672"/>
                 </a:solidFill>
@@ -18504,7 +18504,7 @@
               </a:defRPr>
             </a:pPr>
             <a:r>
-              <a:t>ROS 2 Jazzy · Gazebo Harmonic · M06 · 따라 하기형 AGV 실습</a:t>
+              <a:t>ROS 2 기반 AGV End-to-End 개발 커리큘럼 · M06 · Block B</a:t>
             </a:r>
           </a:p>
         </p:txBody>
@@ -18733,7 +18733,7 @@
               <a:spcAft>
                 <a:spcPts val="0"/>
               </a:spcAft>
-              <a:defRPr sz="1000" b="0">
+              <a:defRPr sz="900" b="0">
                 <a:solidFill>
                   <a:srgbClr val="5C6672"/>
                 </a:solidFill>
@@ -18741,7 +18741,7 @@
               </a:defRPr>
             </a:pPr>
             <a:r>
-              <a:t>ROS 2 Jazzy · Gazebo Harmonic · M06 · 따라 하기형 AGV 실습</a:t>
+              <a:t>ROS 2 기반 AGV End-to-End 개발 커리큘럼 · M06 · Block B</a:t>
             </a:r>
           </a:p>
         </p:txBody>
@@ -19194,7 +19194,7 @@
               <a:spcAft>
                 <a:spcPts val="0"/>
               </a:spcAft>
-              <a:defRPr sz="1000" b="0">
+              <a:defRPr sz="900" b="0">
                 <a:solidFill>
                   <a:srgbClr val="5C6672"/>
                 </a:solidFill>
@@ -19202,7 +19202,7 @@
               </a:defRPr>
             </a:pPr>
             <a:r>
-              <a:t>ROS 2 Jazzy · Gazebo Harmonic · M06 · 따라 하기형 AGV 실습</a:t>
+              <a:t>ROS 2 기반 AGV End-to-End 개발 커리큘럼 · M06 · Block B</a:t>
             </a:r>
           </a:p>
         </p:txBody>
@@ -19469,7 +19469,7 @@
               <a:spcAft>
                 <a:spcPts val="0"/>
               </a:spcAft>
-              <a:defRPr sz="1000" b="0">
+              <a:defRPr sz="900" b="0">
                 <a:solidFill>
                   <a:srgbClr val="5C6672"/>
                 </a:solidFill>
@@ -19477,7 +19477,7 @@
               </a:defRPr>
             </a:pPr>
             <a:r>
-              <a:t>ROS 2 Jazzy · Gazebo Harmonic · M06 · 따라 하기형 AGV 실습</a:t>
+              <a:t>ROS 2 기반 AGV End-to-End 개발 커리큘럼 · M06 · Block B</a:t>
             </a:r>
           </a:p>
         </p:txBody>
